--- a/NET3006A-ML-Network-Telemetry/presentation/NET3006A_ML_Network_Telemetry_Presentation.pptx
+++ b/NET3006A-ML-Network-Telemetry/presentation/NET3006A_ML_Network_Telemetry_Presentation.pptx
@@ -3498,7 +3498,268 @@
       </p:sp>
       <p:sp>
         <p:nvSpPr>
-          <p:cNvPr id="11" name="TextBox 10"/>
+          <p:cNvPr id="11" name="Rounded Rectangle 10"/>
+          <p:cNvSpPr/>
+          <p:nvPr/>
+        </p:nvSpPr>
+        <p:spPr>
+          <a:xfrm>
+            <a:off x="2148840" y="5760720"/>
+            <a:ext cx="2011680" cy="502920"/>
+          </a:xfrm>
+          <a:prstGeom prst="roundRect">
+            <a:avLst/>
+          </a:prstGeom>
+          <a:solidFill>
+            <a:srgbClr val="141832"/>
+          </a:solidFill>
+          <a:ln w="15240">
+            <a:solidFill>
+              <a:srgbClr val="009FFD"/>
+            </a:solidFill>
+          </a:ln>
+        </p:spPr>
+        <p:style>
+          <a:lnRef idx="1">
+            <a:schemeClr val="accent1"/>
+          </a:lnRef>
+          <a:fillRef idx="3">
+            <a:schemeClr val="accent1"/>
+          </a:fillRef>
+          <a:effectRef idx="2">
+            <a:schemeClr val="accent1"/>
+          </a:effectRef>
+          <a:fontRef idx="minor">
+            <a:schemeClr val="lt1"/>
+          </a:fontRef>
+        </p:style>
+        <p:txBody>
+          <a:bodyPr rtlCol="0" anchor="ctr"/>
+          <a:lstStyle/>
+          <a:p>
+            <a:pPr algn="ctr"/>
+          </a:p>
+        </p:txBody>
+      </p:sp>
+      <p:sp>
+        <p:nvSpPr>
+          <p:cNvPr id="12" name="TextBox 11"/>
+          <p:cNvSpPr txBox="1"/>
+          <p:nvPr/>
+        </p:nvSpPr>
+        <p:spPr>
+          <a:xfrm>
+            <a:off x="2148840" y="5870448"/>
+            <a:ext cx="2011680" cy="274320"/>
+          </a:xfrm>
+          <a:prstGeom prst="rect">
+            <a:avLst/>
+          </a:prstGeom>
+          <a:noFill/>
+        </p:spPr>
+        <p:txBody>
+          <a:bodyPr wrap="square">
+            <a:spAutoFit/>
+          </a:bodyPr>
+          <a:lstStyle/>
+          <a:p>
+            <a:pPr algn="ctr">
+              <a:lnSpc>
+                <a:spcPts val="1439"/>
+              </a:lnSpc>
+              <a:spcAft>
+                <a:spcPts val="0"/>
+              </a:spcAft>
+              <a:defRPr sz="1200" b="1">
+                <a:solidFill>
+                  <a:srgbClr val="009FFD"/>
+                </a:solidFill>
+                <a:latin typeface="Calibri"/>
+              </a:defRPr>
+            </a:pPr>
+            <a:r>
+              <a:t>Detect</a:t>
+            </a:r>
+          </a:p>
+        </p:txBody>
+      </p:sp>
+      <p:sp>
+        <p:nvSpPr>
+          <p:cNvPr id="13" name="Rounded Rectangle 12"/>
+          <p:cNvSpPr/>
+          <p:nvPr/>
+        </p:nvSpPr>
+        <p:spPr>
+          <a:xfrm>
+            <a:off x="4892040" y="5760720"/>
+            <a:ext cx="2011680" cy="502920"/>
+          </a:xfrm>
+          <a:prstGeom prst="roundRect">
+            <a:avLst/>
+          </a:prstGeom>
+          <a:solidFill>
+            <a:srgbClr val="141832"/>
+          </a:solidFill>
+          <a:ln w="15240">
+            <a:solidFill>
+              <a:srgbClr val="00C9A7"/>
+            </a:solidFill>
+          </a:ln>
+        </p:spPr>
+        <p:style>
+          <a:lnRef idx="1">
+            <a:schemeClr val="accent1"/>
+          </a:lnRef>
+          <a:fillRef idx="3">
+            <a:schemeClr val="accent1"/>
+          </a:fillRef>
+          <a:effectRef idx="2">
+            <a:schemeClr val="accent1"/>
+          </a:effectRef>
+          <a:fontRef idx="minor">
+            <a:schemeClr val="lt1"/>
+          </a:fontRef>
+        </p:style>
+        <p:txBody>
+          <a:bodyPr rtlCol="0" anchor="ctr"/>
+          <a:lstStyle/>
+          <a:p>
+            <a:pPr algn="ctr"/>
+          </a:p>
+        </p:txBody>
+      </p:sp>
+      <p:sp>
+        <p:nvSpPr>
+          <p:cNvPr id="14" name="TextBox 13"/>
+          <p:cNvSpPr txBox="1"/>
+          <p:nvPr/>
+        </p:nvSpPr>
+        <p:spPr>
+          <a:xfrm>
+            <a:off x="4892040" y="5870448"/>
+            <a:ext cx="2011680" cy="274320"/>
+          </a:xfrm>
+          <a:prstGeom prst="rect">
+            <a:avLst/>
+          </a:prstGeom>
+          <a:noFill/>
+        </p:spPr>
+        <p:txBody>
+          <a:bodyPr wrap="square">
+            <a:spAutoFit/>
+          </a:bodyPr>
+          <a:lstStyle/>
+          <a:p>
+            <a:pPr algn="ctr">
+              <a:lnSpc>
+                <a:spcPts val="1439"/>
+              </a:lnSpc>
+              <a:spcAft>
+                <a:spcPts val="0"/>
+              </a:spcAft>
+              <a:defRPr sz="1200" b="1">
+                <a:solidFill>
+                  <a:srgbClr val="00C9A7"/>
+                </a:solidFill>
+                <a:latin typeface="Calibri"/>
+              </a:defRPr>
+            </a:pPr>
+            <a:r>
+              <a:t>Predict</a:t>
+            </a:r>
+          </a:p>
+        </p:txBody>
+      </p:sp>
+      <p:sp>
+        <p:nvSpPr>
+          <p:cNvPr id="15" name="Rounded Rectangle 14"/>
+          <p:cNvSpPr/>
+          <p:nvPr/>
+        </p:nvSpPr>
+        <p:spPr>
+          <a:xfrm>
+            <a:off x="7635240" y="5760720"/>
+            <a:ext cx="2011680" cy="502920"/>
+          </a:xfrm>
+          <a:prstGeom prst="roundRect">
+            <a:avLst/>
+          </a:prstGeom>
+          <a:solidFill>
+            <a:srgbClr val="141832"/>
+          </a:solidFill>
+          <a:ln w="15240">
+            <a:solidFill>
+              <a:srgbClr val="845EC2"/>
+            </a:solidFill>
+          </a:ln>
+        </p:spPr>
+        <p:style>
+          <a:lnRef idx="1">
+            <a:schemeClr val="accent1"/>
+          </a:lnRef>
+          <a:fillRef idx="3">
+            <a:schemeClr val="accent1"/>
+          </a:fillRef>
+          <a:effectRef idx="2">
+            <a:schemeClr val="accent1"/>
+          </a:effectRef>
+          <a:fontRef idx="minor">
+            <a:schemeClr val="lt1"/>
+          </a:fontRef>
+        </p:style>
+        <p:txBody>
+          <a:bodyPr rtlCol="0" anchor="ctr"/>
+          <a:lstStyle/>
+          <a:p>
+            <a:pPr algn="ctr"/>
+          </a:p>
+        </p:txBody>
+      </p:sp>
+      <p:sp>
+        <p:nvSpPr>
+          <p:cNvPr id="16" name="TextBox 15"/>
+          <p:cNvSpPr txBox="1"/>
+          <p:nvPr/>
+        </p:nvSpPr>
+        <p:spPr>
+          <a:xfrm>
+            <a:off x="7635240" y="5870448"/>
+            <a:ext cx="2011680" cy="274320"/>
+          </a:xfrm>
+          <a:prstGeom prst="rect">
+            <a:avLst/>
+          </a:prstGeom>
+          <a:noFill/>
+        </p:spPr>
+        <p:txBody>
+          <a:bodyPr wrap="square">
+            <a:spAutoFit/>
+          </a:bodyPr>
+          <a:lstStyle/>
+          <a:p>
+            <a:pPr algn="ctr">
+              <a:lnSpc>
+                <a:spcPts val="1439"/>
+              </a:lnSpc>
+              <a:spcAft>
+                <a:spcPts val="0"/>
+              </a:spcAft>
+              <a:defRPr sz="1200" b="1">
+                <a:solidFill>
+                  <a:srgbClr val="845EC2"/>
+                </a:solidFill>
+                <a:latin typeface="Calibri"/>
+              </a:defRPr>
+            </a:pPr>
+            <a:r>
+              <a:t>Optimize</a:t>
+            </a:r>
+          </a:p>
+        </p:txBody>
+      </p:sp>
+      <p:sp>
+        <p:nvSpPr>
+          <p:cNvPr id="17" name="TextBox 16"/>
           <p:cNvSpPr txBox="1"/>
           <p:nvPr/>
         </p:nvSpPr>
@@ -3729,7 +3990,7 @@
               </a:defRPr>
             </a:pPr>
             <a:r>
-              <a:t>Using predicted telemetry to maintain service-level agreements</a:t>
+              <a:t>Using telemetry and predictions to keep service quality high</a:t>
             </a:r>
           </a:p>
         </p:txBody>
@@ -3856,7 +4117,7 @@
               </a:defRPr>
             </a:pPr>
             <a:r>
-              <a:t>Reinforcement Learning (RL)</a:t>
+              <a:t>Reinforcement Learning</a:t>
             </a:r>
           </a:p>
         </p:txBody>
@@ -3898,7 +4159,7 @@
               </a:defRPr>
             </a:pPr>
             <a:r>
-              <a:t>Agents learn optimal routing/scheduling policies by interacting with the network environment. DQN and PPO are widely used for real-time QoS-aware traffic engineering.</a:t>
+              <a:t>An agent tries actions and learns which routing or scheduling choices give better QoS.</a:t>
             </a:r>
           </a:p>
         </p:txBody>
@@ -3983,7 +4244,7 @@
               </a:defRPr>
             </a:pPr>
             <a:r>
-              <a:t>Deep Q-Networks (DQN)</a:t>
+              <a:t>Deep Q-Networks</a:t>
             </a:r>
           </a:p>
         </p:txBody>
@@ -4025,7 +4286,7 @@
               </a:defRPr>
             </a:pPr>
             <a:r>
-              <a:t>Map network state (telemetry features) to optimal actions (e.g., rerouting flows). Effective for dynamic bandwidth allocation and load balancing.</a:t>
+              <a:t>Use the current network state to choose actions like rerouting, balancing load, or assigning bandwidth.</a:t>
             </a:r>
           </a:p>
         </p:txBody>
@@ -4152,7 +4413,7 @@
               </a:defRPr>
             </a:pPr>
             <a:r>
-              <a:t>Balance competing QoS metrics (latency vs. throughput vs. fairness) using Pareto-optimal ML solutions. Neural networks approximate the Pareto front.</a:t>
+              <a:t>Helps balance trade-offs such as low delay, good throughput, and fairness at the same time.</a:t>
             </a:r>
           </a:p>
         </p:txBody>
@@ -4279,7 +4540,7 @@
               </a:defRPr>
             </a:pPr>
             <a:r>
-              <a:t>Train QoS models across distributed network domains without sharing raw telemetry data. Preserves privacy while enabling cross-domain optimization.</a:t>
+              <a:t>Lets different domains train shared models without sending all raw telemetry to one place.</a:t>
             </a:r>
           </a:p>
         </p:txBody>
@@ -4517,7 +4778,7 @@
               </a:defRPr>
             </a:pPr>
             <a:r>
-              <a:t>Performance Prediction &amp; QoS: Key Findings</a:t>
+              <a:t>Performance &amp; QoS: Main Lessons</a:t>
             </a:r>
           </a:p>
         </p:txBody>
@@ -4559,7 +4820,7 @@
               </a:defRPr>
             </a:pPr>
             <a:r>
-              <a:t>Insights from recent academic and industry literature</a:t>
+              <a:t>What stood out most across the literature</a:t>
             </a:r>
           </a:p>
         </p:txBody>
@@ -4728,7 +4989,7 @@
               </a:defRPr>
             </a:pPr>
             <a:r>
-              <a:t>GNNs &gt; Time-Series for Topology-Aware Prediction</a:t>
+              <a:t>Topology matters</a:t>
             </a:r>
           </a:p>
         </p:txBody>
@@ -4770,7 +5031,7 @@
               </a:defRPr>
             </a:pPr>
             <a:r>
-              <a:t>Graph neural networks outperform pure time-series models when network topology matters — they capture how congestion propagates across paths and links.</a:t>
+              <a:t>GNNs usually beat plain time-series models when the shape of the network affects performance.</a:t>
             </a:r>
           </a:p>
         </p:txBody>
@@ -4897,7 +5158,7 @@
               </a:defRPr>
             </a:pPr>
             <a:r>
-              <a:t>RL for QoS Is Promising but Hard to Deploy</a:t>
+              <a:t>RL is powerful but risky</a:t>
             </a:r>
           </a:p>
         </p:txBody>
@@ -4939,7 +5200,7 @@
               </a:defRPr>
             </a:pPr>
             <a:r>
-              <a:t>Reinforcement learning achieves near-optimal QoS policies in simulation, but real-world deployment faces challenges: safety constraints, exploration risk, and training instability.</a:t>
+              <a:t>Reinforcement learning looks strong in simulations, but deployment is harder because bad actions can hurt live traffic.</a:t>
             </a:r>
           </a:p>
         </p:txBody>
@@ -5066,7 +5327,7 @@
               </a:defRPr>
             </a:pPr>
             <a:r>
-              <a:t>Data Quality Is the Bottleneck</a:t>
+              <a:t>Good data matters most</a:t>
             </a:r>
           </a:p>
         </p:txBody>
@@ -5108,7 +5369,7 @@
               </a:defRPr>
             </a:pPr>
             <a:r>
-              <a:t>Prediction accuracy depends heavily on telemetry data quality. Missing values, sampling artifacts, and clock synchronization issues degrade model performance significantly.</a:t>
+              <a:t>Missing or noisy telemetry can hurt prediction quality more than model choice.</a:t>
             </a:r>
           </a:p>
         </p:txBody>
@@ -5235,7 +5496,7 @@
               </a:defRPr>
             </a:pPr>
             <a:r>
-              <a:t>Proactive &gt; Reactive Management</a:t>
+              <a:t>Proactive beats reactive</a:t>
             </a:r>
           </a:p>
         </p:txBody>
@@ -5277,7 +5538,7 @@
               </a:defRPr>
             </a:pPr>
             <a:r>
-              <a:t>ML-driven proactive management (predict-then-act) reduces SLA violations by 30–50% compared to reactive threshold-based approaches in studied deployments.</a:t>
+              <a:t>Predicting trouble early is better than waiting for thresholds to fail after users are already affected.</a:t>
             </a:r>
           </a:p>
         </p:txBody>
@@ -5557,7 +5818,7 @@
               </a:defRPr>
             </a:pPr>
             <a:r>
-              <a:t>How ML integrates into modern telemetry architectures</a:t>
+              <a:t>A cleaner flow from data to action</a:t>
             </a:r>
           </a:p>
         </p:txBody>
@@ -5613,7 +5874,7 @@
         <p:spPr>
           <a:xfrm>
             <a:off x="731520" y="2103120"/>
-            <a:ext cx="1920240" cy="1828800"/>
+            <a:ext cx="1965960" cy="1828800"/>
           </a:xfrm>
           <a:prstGeom prst="roundRect">
             <a:avLst/>
@@ -5651,14 +5912,57 @@
       </p:sp>
       <p:sp>
         <p:nvSpPr>
-          <p:cNvPr id="8" name="TextBox 7"/>
-          <p:cNvSpPr txBox="1"/>
-          <p:nvPr/>
-        </p:nvSpPr>
-        <p:spPr>
-          <a:xfrm>
-            <a:off x="868680" y="2286000"/>
-            <a:ext cx="1645920" cy="320040"/>
+          <p:cNvPr id="8" name="Oval 7"/>
+          <p:cNvSpPr/>
+          <p:nvPr/>
+        </p:nvSpPr>
+        <p:spPr>
+          <a:xfrm>
+            <a:off x="1389888" y="2267712"/>
+            <a:ext cx="640080" cy="640080"/>
+          </a:xfrm>
+          <a:prstGeom prst="ellipse">
+            <a:avLst/>
+          </a:prstGeom>
+          <a:solidFill>
+            <a:srgbClr val="009FFD"/>
+          </a:solidFill>
+          <a:ln>
+            <a:noFill/>
+          </a:ln>
+        </p:spPr>
+        <p:style>
+          <a:lnRef idx="1">
+            <a:schemeClr val="accent1"/>
+          </a:lnRef>
+          <a:fillRef idx="3">
+            <a:schemeClr val="accent1"/>
+          </a:fillRef>
+          <a:effectRef idx="2">
+            <a:schemeClr val="accent1"/>
+          </a:effectRef>
+          <a:fontRef idx="minor">
+            <a:schemeClr val="lt1"/>
+          </a:fontRef>
+        </p:style>
+        <p:txBody>
+          <a:bodyPr rtlCol="0" anchor="ctr"/>
+          <a:lstStyle/>
+          <a:p>
+            <a:pPr algn="ctr"/>
+          </a:p>
+        </p:txBody>
+      </p:sp>
+      <p:sp>
+        <p:nvSpPr>
+          <p:cNvPr id="9" name="TextBox 8"/>
+          <p:cNvSpPr txBox="1"/>
+          <p:nvPr/>
+        </p:nvSpPr>
+        <p:spPr>
+          <a:xfrm>
+            <a:off x="1389888" y="2295144"/>
+            <a:ext cx="640080" cy="612648"/>
           </a:xfrm>
           <a:prstGeom prst="rect">
             <a:avLst/>
@@ -5673,12 +5977,54 @@
           <a:p>
             <a:pPr algn="ctr">
               <a:lnSpc>
-                <a:spcPts val="1800"/>
-              </a:lnSpc>
-              <a:spcAft>
-                <a:spcPts val="0"/>
-              </a:spcAft>
-              <a:defRPr sz="1500" b="1">
+                <a:spcPts val="2160"/>
+              </a:lnSpc>
+              <a:spcAft>
+                <a:spcPts val="0"/>
+              </a:spcAft>
+              <a:defRPr sz="1800" b="1">
+                <a:solidFill>
+                  <a:srgbClr val="FFFFFF"/>
+                </a:solidFill>
+                <a:latin typeface="Calibri"/>
+              </a:defRPr>
+            </a:pPr>
+            <a:r>
+              <a:t>1</a:t>
+            </a:r>
+          </a:p>
+        </p:txBody>
+      </p:sp>
+      <p:sp>
+        <p:nvSpPr>
+          <p:cNvPr id="10" name="TextBox 9"/>
+          <p:cNvSpPr txBox="1"/>
+          <p:nvPr/>
+        </p:nvSpPr>
+        <p:spPr>
+          <a:xfrm>
+            <a:off x="841248" y="2971800"/>
+            <a:ext cx="1746504" cy="292608"/>
+          </a:xfrm>
+          <a:prstGeom prst="rect">
+            <a:avLst/>
+          </a:prstGeom>
+          <a:noFill/>
+        </p:spPr>
+        <p:txBody>
+          <a:bodyPr wrap="square">
+            <a:spAutoFit/>
+          </a:bodyPr>
+          <a:lstStyle/>
+          <a:p>
+            <a:pPr algn="ctr">
+              <a:lnSpc>
+                <a:spcPts val="1680"/>
+              </a:lnSpc>
+              <a:spcAft>
+                <a:spcPts val="0"/>
+              </a:spcAft>
+              <a:defRPr sz="1400" b="1">
                 <a:solidFill>
                   <a:srgbClr val="009FFD"/>
                 </a:solidFill>
@@ -5686,21 +6032,21 @@
               </a:defRPr>
             </a:pPr>
             <a:r>
-              <a:t>1. Collection</a:t>
-            </a:r>
-          </a:p>
-        </p:txBody>
-      </p:sp>
-      <p:sp>
-        <p:nvSpPr>
-          <p:cNvPr id="9" name="TextBox 8"/>
-          <p:cNvSpPr txBox="1"/>
-          <p:nvPr/>
-        </p:nvSpPr>
-        <p:spPr>
-          <a:xfrm>
-            <a:off x="868680" y="2743200"/>
-            <a:ext cx="1645920" cy="1097280"/>
+              <a:t>1. Collect</a:t>
+            </a:r>
+          </a:p>
+        </p:txBody>
+      </p:sp>
+      <p:sp>
+        <p:nvSpPr>
+          <p:cNvPr id="11" name="TextBox 10"/>
+          <p:cNvSpPr txBox="1"/>
+          <p:nvPr/>
+        </p:nvSpPr>
+        <p:spPr>
+          <a:xfrm>
+            <a:off x="841248" y="3255264"/>
+            <a:ext cx="1746504" cy="475488"/>
           </a:xfrm>
           <a:prstGeom prst="rect">
             <a:avLst/>
@@ -5715,12 +6061,12 @@
           <a:p>
             <a:pPr algn="ctr">
               <a:lnSpc>
-                <a:spcPts val="1560"/>
-              </a:lnSpc>
-              <a:spcAft>
-                <a:spcPts val="0"/>
-              </a:spcAft>
-              <a:defRPr sz="1300" b="0">
+                <a:spcPts val="1439"/>
+              </a:lnSpc>
+              <a:spcAft>
+                <a:spcPts val="0"/>
+              </a:spcAft>
+              <a:defRPr sz="1200" b="0">
                 <a:solidFill>
                   <a:srgbClr val="CCCCCC"/>
                 </a:solidFill>
@@ -5739,14 +6085,14 @@
       </p:sp>
       <p:sp>
         <p:nvSpPr>
-          <p:cNvPr id="10" name="Right Arrow 9"/>
+          <p:cNvPr id="12" name="Right Arrow 11"/>
           <p:cNvSpPr/>
           <p:nvPr/>
         </p:nvSpPr>
         <p:spPr>
           <a:xfrm>
-            <a:off x="2651760" y="2880360"/>
-            <a:ext cx="228600" cy="274320"/>
+            <a:off x="2697480" y="2880360"/>
+            <a:ext cx="164592" cy="274320"/>
           </a:xfrm>
           <a:prstGeom prst="rightArrow">
             <a:avLst/>
@@ -5782,14 +6128,14 @@
       </p:sp>
       <p:sp>
         <p:nvSpPr>
-          <p:cNvPr id="11" name="Rounded Rectangle 10"/>
+          <p:cNvPr id="13" name="Rounded Rectangle 12"/>
           <p:cNvSpPr/>
           <p:nvPr/>
         </p:nvSpPr>
         <p:spPr>
           <a:xfrm>
-            <a:off x="2880360" y="2103120"/>
-            <a:ext cx="1920240" cy="1828800"/>
+            <a:off x="2862072" y="2103120"/>
+            <a:ext cx="1965960" cy="1828800"/>
           </a:xfrm>
           <a:prstGeom prst="roundRect">
             <a:avLst/>
@@ -5827,14 +6173,57 @@
       </p:sp>
       <p:sp>
         <p:nvSpPr>
-          <p:cNvPr id="12" name="TextBox 11"/>
-          <p:cNvSpPr txBox="1"/>
-          <p:nvPr/>
-        </p:nvSpPr>
-        <p:spPr>
-          <a:xfrm>
-            <a:off x="3017520" y="2286000"/>
-            <a:ext cx="1645920" cy="320040"/>
+          <p:cNvPr id="14" name="Oval 13"/>
+          <p:cNvSpPr/>
+          <p:nvPr/>
+        </p:nvSpPr>
+        <p:spPr>
+          <a:xfrm>
+            <a:off x="3520440" y="2267712"/>
+            <a:ext cx="640080" cy="640080"/>
+          </a:xfrm>
+          <a:prstGeom prst="ellipse">
+            <a:avLst/>
+          </a:prstGeom>
+          <a:solidFill>
+            <a:srgbClr val="00B4D8"/>
+          </a:solidFill>
+          <a:ln>
+            <a:noFill/>
+          </a:ln>
+        </p:spPr>
+        <p:style>
+          <a:lnRef idx="1">
+            <a:schemeClr val="accent1"/>
+          </a:lnRef>
+          <a:fillRef idx="3">
+            <a:schemeClr val="accent1"/>
+          </a:fillRef>
+          <a:effectRef idx="2">
+            <a:schemeClr val="accent1"/>
+          </a:effectRef>
+          <a:fontRef idx="minor">
+            <a:schemeClr val="lt1"/>
+          </a:fontRef>
+        </p:style>
+        <p:txBody>
+          <a:bodyPr rtlCol="0" anchor="ctr"/>
+          <a:lstStyle/>
+          <a:p>
+            <a:pPr algn="ctr"/>
+          </a:p>
+        </p:txBody>
+      </p:sp>
+      <p:sp>
+        <p:nvSpPr>
+          <p:cNvPr id="15" name="TextBox 14"/>
+          <p:cNvSpPr txBox="1"/>
+          <p:nvPr/>
+        </p:nvSpPr>
+        <p:spPr>
+          <a:xfrm>
+            <a:off x="3520440" y="2295144"/>
+            <a:ext cx="640080" cy="612648"/>
           </a:xfrm>
           <a:prstGeom prst="rect">
             <a:avLst/>
@@ -5849,12 +6238,54 @@
           <a:p>
             <a:pPr algn="ctr">
               <a:lnSpc>
-                <a:spcPts val="1800"/>
-              </a:lnSpc>
-              <a:spcAft>
-                <a:spcPts val="0"/>
-              </a:spcAft>
-              <a:defRPr sz="1500" b="1">
+                <a:spcPts val="2160"/>
+              </a:lnSpc>
+              <a:spcAft>
+                <a:spcPts val="0"/>
+              </a:spcAft>
+              <a:defRPr sz="1800" b="1">
+                <a:solidFill>
+                  <a:srgbClr val="FFFFFF"/>
+                </a:solidFill>
+                <a:latin typeface="Calibri"/>
+              </a:defRPr>
+            </a:pPr>
+            <a:r>
+              <a:t>2</a:t>
+            </a:r>
+          </a:p>
+        </p:txBody>
+      </p:sp>
+      <p:sp>
+        <p:nvSpPr>
+          <p:cNvPr id="16" name="TextBox 15"/>
+          <p:cNvSpPr txBox="1"/>
+          <p:nvPr/>
+        </p:nvSpPr>
+        <p:spPr>
+          <a:xfrm>
+            <a:off x="2971800" y="2971800"/>
+            <a:ext cx="1746504" cy="292608"/>
+          </a:xfrm>
+          <a:prstGeom prst="rect">
+            <a:avLst/>
+          </a:prstGeom>
+          <a:noFill/>
+        </p:spPr>
+        <p:txBody>
+          <a:bodyPr wrap="square">
+            <a:spAutoFit/>
+          </a:bodyPr>
+          <a:lstStyle/>
+          <a:p>
+            <a:pPr algn="ctr">
+              <a:lnSpc>
+                <a:spcPts val="1680"/>
+              </a:lnSpc>
+              <a:spcAft>
+                <a:spcPts val="0"/>
+              </a:spcAft>
+              <a:defRPr sz="1400" b="1">
                 <a:solidFill>
                   <a:srgbClr val="00B4D8"/>
                 </a:solidFill>
@@ -5862,21 +6293,21 @@
               </a:defRPr>
             </a:pPr>
             <a:r>
-              <a:t>2. Ingestion</a:t>
-            </a:r>
-          </a:p>
-        </p:txBody>
-      </p:sp>
-      <p:sp>
-        <p:nvSpPr>
-          <p:cNvPr id="13" name="TextBox 12"/>
-          <p:cNvSpPr txBox="1"/>
-          <p:nvPr/>
-        </p:nvSpPr>
-        <p:spPr>
-          <a:xfrm>
-            <a:off x="3017520" y="2743200"/>
-            <a:ext cx="1645920" cy="1097280"/>
+              <a:t>2. Move</a:t>
+            </a:r>
+          </a:p>
+        </p:txBody>
+      </p:sp>
+      <p:sp>
+        <p:nvSpPr>
+          <p:cNvPr id="17" name="TextBox 16"/>
+          <p:cNvSpPr txBox="1"/>
+          <p:nvPr/>
+        </p:nvSpPr>
+        <p:spPr>
+          <a:xfrm>
+            <a:off x="2971800" y="3255264"/>
+            <a:ext cx="1746504" cy="475488"/>
           </a:xfrm>
           <a:prstGeom prst="rect">
             <a:avLst/>
@@ -5891,12 +6322,12 @@
           <a:p>
             <a:pPr algn="ctr">
               <a:lnSpc>
-                <a:spcPts val="1560"/>
-              </a:lnSpc>
-              <a:spcAft>
-                <a:spcPts val="0"/>
-              </a:spcAft>
-              <a:defRPr sz="1300" b="0">
+                <a:spcPts val="1439"/>
+              </a:lnSpc>
+              <a:spcAft>
+                <a:spcPts val="0"/>
+              </a:spcAft>
+              <a:defRPr sz="1200" b="0">
                 <a:solidFill>
                   <a:srgbClr val="CCCCCC"/>
                 </a:solidFill>
@@ -5904,7 +6335,7 @@
               </a:defRPr>
             </a:pPr>
             <a:r>
-              <a:t>Stream processing</a:t>
+              <a:t>Streaming tools</a:t>
             </a:r>
             <a:br/>
             <a:r>
@@ -5915,14 +6346,14 @@
       </p:sp>
       <p:sp>
         <p:nvSpPr>
-          <p:cNvPr id="14" name="Right Arrow 13"/>
+          <p:cNvPr id="18" name="Right Arrow 17"/>
           <p:cNvSpPr/>
           <p:nvPr/>
         </p:nvSpPr>
         <p:spPr>
           <a:xfrm>
-            <a:off x="4800600" y="2880360"/>
-            <a:ext cx="228600" cy="274320"/>
+            <a:off x="4828032" y="2880360"/>
+            <a:ext cx="164592" cy="274320"/>
           </a:xfrm>
           <a:prstGeom prst="rightArrow">
             <a:avLst/>
@@ -5958,14 +6389,14 @@
       </p:sp>
       <p:sp>
         <p:nvSpPr>
-          <p:cNvPr id="15" name="Rounded Rectangle 14"/>
+          <p:cNvPr id="19" name="Rounded Rectangle 18"/>
           <p:cNvSpPr/>
           <p:nvPr/>
         </p:nvSpPr>
         <p:spPr>
           <a:xfrm>
-            <a:off x="5029200" y="2103120"/>
-            <a:ext cx="1920240" cy="1828800"/>
+            <a:off x="4992624" y="2103120"/>
+            <a:ext cx="1965960" cy="1828800"/>
           </a:xfrm>
           <a:prstGeom prst="roundRect">
             <a:avLst/>
@@ -6003,14 +6434,57 @@
       </p:sp>
       <p:sp>
         <p:nvSpPr>
-          <p:cNvPr id="16" name="TextBox 15"/>
-          <p:cNvSpPr txBox="1"/>
-          <p:nvPr/>
-        </p:nvSpPr>
-        <p:spPr>
-          <a:xfrm>
-            <a:off x="5166360" y="2286000"/>
-            <a:ext cx="1645920" cy="320040"/>
+          <p:cNvPr id="20" name="Oval 19"/>
+          <p:cNvSpPr/>
+          <p:nvPr/>
+        </p:nvSpPr>
+        <p:spPr>
+          <a:xfrm>
+            <a:off x="5650992" y="2267712"/>
+            <a:ext cx="640080" cy="640080"/>
+          </a:xfrm>
+          <a:prstGeom prst="ellipse">
+            <a:avLst/>
+          </a:prstGeom>
+          <a:solidFill>
+            <a:srgbClr val="00C9A7"/>
+          </a:solidFill>
+          <a:ln>
+            <a:noFill/>
+          </a:ln>
+        </p:spPr>
+        <p:style>
+          <a:lnRef idx="1">
+            <a:schemeClr val="accent1"/>
+          </a:lnRef>
+          <a:fillRef idx="3">
+            <a:schemeClr val="accent1"/>
+          </a:fillRef>
+          <a:effectRef idx="2">
+            <a:schemeClr val="accent1"/>
+          </a:effectRef>
+          <a:fontRef idx="minor">
+            <a:schemeClr val="lt1"/>
+          </a:fontRef>
+        </p:style>
+        <p:txBody>
+          <a:bodyPr rtlCol="0" anchor="ctr"/>
+          <a:lstStyle/>
+          <a:p>
+            <a:pPr algn="ctr"/>
+          </a:p>
+        </p:txBody>
+      </p:sp>
+      <p:sp>
+        <p:nvSpPr>
+          <p:cNvPr id="21" name="TextBox 20"/>
+          <p:cNvSpPr txBox="1"/>
+          <p:nvPr/>
+        </p:nvSpPr>
+        <p:spPr>
+          <a:xfrm>
+            <a:off x="5650992" y="2295144"/>
+            <a:ext cx="640080" cy="612648"/>
           </a:xfrm>
           <a:prstGeom prst="rect">
             <a:avLst/>
@@ -6025,12 +6499,54 @@
           <a:p>
             <a:pPr algn="ctr">
               <a:lnSpc>
-                <a:spcPts val="1800"/>
-              </a:lnSpc>
-              <a:spcAft>
-                <a:spcPts val="0"/>
-              </a:spcAft>
-              <a:defRPr sz="1500" b="1">
+                <a:spcPts val="2160"/>
+              </a:lnSpc>
+              <a:spcAft>
+                <a:spcPts val="0"/>
+              </a:spcAft>
+              <a:defRPr sz="1800" b="1">
+                <a:solidFill>
+                  <a:srgbClr val="FFFFFF"/>
+                </a:solidFill>
+                <a:latin typeface="Calibri"/>
+              </a:defRPr>
+            </a:pPr>
+            <a:r>
+              <a:t>3</a:t>
+            </a:r>
+          </a:p>
+        </p:txBody>
+      </p:sp>
+      <p:sp>
+        <p:nvSpPr>
+          <p:cNvPr id="22" name="TextBox 21"/>
+          <p:cNvSpPr txBox="1"/>
+          <p:nvPr/>
+        </p:nvSpPr>
+        <p:spPr>
+          <a:xfrm>
+            <a:off x="5102352" y="2971800"/>
+            <a:ext cx="1746504" cy="292608"/>
+          </a:xfrm>
+          <a:prstGeom prst="rect">
+            <a:avLst/>
+          </a:prstGeom>
+          <a:noFill/>
+        </p:spPr>
+        <p:txBody>
+          <a:bodyPr wrap="square">
+            <a:spAutoFit/>
+          </a:bodyPr>
+          <a:lstStyle/>
+          <a:p>
+            <a:pPr algn="ctr">
+              <a:lnSpc>
+                <a:spcPts val="1680"/>
+              </a:lnSpc>
+              <a:spcAft>
+                <a:spcPts val="0"/>
+              </a:spcAft>
+              <a:defRPr sz="1400" b="1">
                 <a:solidFill>
                   <a:srgbClr val="00C9A7"/>
                 </a:solidFill>
@@ -6038,21 +6554,21 @@
               </a:defRPr>
             </a:pPr>
             <a:r>
-              <a:t>3. Storage</a:t>
-            </a:r>
-          </a:p>
-        </p:txBody>
-      </p:sp>
-      <p:sp>
-        <p:nvSpPr>
-          <p:cNvPr id="17" name="TextBox 16"/>
-          <p:cNvSpPr txBox="1"/>
-          <p:nvPr/>
-        </p:nvSpPr>
-        <p:spPr>
-          <a:xfrm>
-            <a:off x="5166360" y="2743200"/>
-            <a:ext cx="1645920" cy="1097280"/>
+              <a:t>3. Store</a:t>
+            </a:r>
+          </a:p>
+        </p:txBody>
+      </p:sp>
+      <p:sp>
+        <p:nvSpPr>
+          <p:cNvPr id="23" name="TextBox 22"/>
+          <p:cNvSpPr txBox="1"/>
+          <p:nvPr/>
+        </p:nvSpPr>
+        <p:spPr>
+          <a:xfrm>
+            <a:off x="5102352" y="3255264"/>
+            <a:ext cx="1746504" cy="475488"/>
           </a:xfrm>
           <a:prstGeom prst="rect">
             <a:avLst/>
@@ -6067,12 +6583,12 @@
           <a:p>
             <a:pPr algn="ctr">
               <a:lnSpc>
-                <a:spcPts val="1560"/>
-              </a:lnSpc>
-              <a:spcAft>
-                <a:spcPts val="0"/>
-              </a:spcAft>
-              <a:defRPr sz="1300" b="0">
+                <a:spcPts val="1439"/>
+              </a:lnSpc>
+              <a:spcAft>
+                <a:spcPts val="0"/>
+              </a:spcAft>
+              <a:defRPr sz="1200" b="0">
                 <a:solidFill>
                   <a:srgbClr val="CCCCCC"/>
                 </a:solidFill>
@@ -6091,14 +6607,14 @@
       </p:sp>
       <p:sp>
         <p:nvSpPr>
-          <p:cNvPr id="18" name="Right Arrow 17"/>
+          <p:cNvPr id="24" name="Right Arrow 23"/>
           <p:cNvSpPr/>
           <p:nvPr/>
         </p:nvSpPr>
         <p:spPr>
           <a:xfrm>
-            <a:off x="6949440" y="2880360"/>
-            <a:ext cx="228600" cy="274320"/>
+            <a:off x="6958584" y="2880360"/>
+            <a:ext cx="164592" cy="274320"/>
           </a:xfrm>
           <a:prstGeom prst="rightArrow">
             <a:avLst/>
@@ -6134,14 +6650,14 @@
       </p:sp>
       <p:sp>
         <p:nvSpPr>
-          <p:cNvPr id="19" name="Rounded Rectangle 18"/>
+          <p:cNvPr id="25" name="Rounded Rectangle 24"/>
           <p:cNvSpPr/>
           <p:nvPr/>
         </p:nvSpPr>
         <p:spPr>
           <a:xfrm>
-            <a:off x="7178040" y="2103120"/>
-            <a:ext cx="1920240" cy="1828800"/>
+            <a:off x="7123176" y="2103120"/>
+            <a:ext cx="1965960" cy="1828800"/>
           </a:xfrm>
           <a:prstGeom prst="roundRect">
             <a:avLst/>
@@ -6179,14 +6695,57 @@
       </p:sp>
       <p:sp>
         <p:nvSpPr>
-          <p:cNvPr id="20" name="TextBox 19"/>
-          <p:cNvSpPr txBox="1"/>
-          <p:nvPr/>
-        </p:nvSpPr>
-        <p:spPr>
-          <a:xfrm>
-            <a:off x="7315200" y="2286000"/>
-            <a:ext cx="1645920" cy="320040"/>
+          <p:cNvPr id="26" name="Oval 25"/>
+          <p:cNvSpPr/>
+          <p:nvPr/>
+        </p:nvSpPr>
+        <p:spPr>
+          <a:xfrm>
+            <a:off x="7781544" y="2267712"/>
+            <a:ext cx="640080" cy="640080"/>
+          </a:xfrm>
+          <a:prstGeom prst="ellipse">
+            <a:avLst/>
+          </a:prstGeom>
+          <a:solidFill>
+            <a:srgbClr val="845EC2"/>
+          </a:solidFill>
+          <a:ln>
+            <a:noFill/>
+          </a:ln>
+        </p:spPr>
+        <p:style>
+          <a:lnRef idx="1">
+            <a:schemeClr val="accent1"/>
+          </a:lnRef>
+          <a:fillRef idx="3">
+            <a:schemeClr val="accent1"/>
+          </a:fillRef>
+          <a:effectRef idx="2">
+            <a:schemeClr val="accent1"/>
+          </a:effectRef>
+          <a:fontRef idx="minor">
+            <a:schemeClr val="lt1"/>
+          </a:fontRef>
+        </p:style>
+        <p:txBody>
+          <a:bodyPr rtlCol="0" anchor="ctr"/>
+          <a:lstStyle/>
+          <a:p>
+            <a:pPr algn="ctr"/>
+          </a:p>
+        </p:txBody>
+      </p:sp>
+      <p:sp>
+        <p:nvSpPr>
+          <p:cNvPr id="27" name="TextBox 26"/>
+          <p:cNvSpPr txBox="1"/>
+          <p:nvPr/>
+        </p:nvSpPr>
+        <p:spPr>
+          <a:xfrm>
+            <a:off x="7781544" y="2295144"/>
+            <a:ext cx="640080" cy="612648"/>
           </a:xfrm>
           <a:prstGeom prst="rect">
             <a:avLst/>
@@ -6201,12 +6760,54 @@
           <a:p>
             <a:pPr algn="ctr">
               <a:lnSpc>
-                <a:spcPts val="1800"/>
-              </a:lnSpc>
-              <a:spcAft>
-                <a:spcPts val="0"/>
-              </a:spcAft>
-              <a:defRPr sz="1500" b="1">
+                <a:spcPts val="2160"/>
+              </a:lnSpc>
+              <a:spcAft>
+                <a:spcPts val="0"/>
+              </a:spcAft>
+              <a:defRPr sz="1800" b="1">
+                <a:solidFill>
+                  <a:srgbClr val="FFFFFF"/>
+                </a:solidFill>
+                <a:latin typeface="Calibri"/>
+              </a:defRPr>
+            </a:pPr>
+            <a:r>
+              <a:t>4</a:t>
+            </a:r>
+          </a:p>
+        </p:txBody>
+      </p:sp>
+      <p:sp>
+        <p:nvSpPr>
+          <p:cNvPr id="28" name="TextBox 27"/>
+          <p:cNvSpPr txBox="1"/>
+          <p:nvPr/>
+        </p:nvSpPr>
+        <p:spPr>
+          <a:xfrm>
+            <a:off x="7232904" y="2971800"/>
+            <a:ext cx="1746504" cy="292608"/>
+          </a:xfrm>
+          <a:prstGeom prst="rect">
+            <a:avLst/>
+          </a:prstGeom>
+          <a:noFill/>
+        </p:spPr>
+        <p:txBody>
+          <a:bodyPr wrap="square">
+            <a:spAutoFit/>
+          </a:bodyPr>
+          <a:lstStyle/>
+          <a:p>
+            <a:pPr algn="ctr">
+              <a:lnSpc>
+                <a:spcPts val="1680"/>
+              </a:lnSpc>
+              <a:spcAft>
+                <a:spcPts val="0"/>
+              </a:spcAft>
+              <a:defRPr sz="1400" b="1">
                 <a:solidFill>
                   <a:srgbClr val="845EC2"/>
                 </a:solidFill>
@@ -6214,21 +6815,21 @@
               </a:defRPr>
             </a:pPr>
             <a:r>
-              <a:t>4. ML Analysis</a:t>
-            </a:r>
-          </a:p>
-        </p:txBody>
-      </p:sp>
-      <p:sp>
-        <p:nvSpPr>
-          <p:cNvPr id="21" name="TextBox 20"/>
-          <p:cNvSpPr txBox="1"/>
-          <p:nvPr/>
-        </p:nvSpPr>
-        <p:spPr>
-          <a:xfrm>
-            <a:off x="7315200" y="2743200"/>
-            <a:ext cx="1645920" cy="1097280"/>
+              <a:t>4. Analyze</a:t>
+            </a:r>
+          </a:p>
+        </p:txBody>
+      </p:sp>
+      <p:sp>
+        <p:nvSpPr>
+          <p:cNvPr id="29" name="TextBox 28"/>
+          <p:cNvSpPr txBox="1"/>
+          <p:nvPr/>
+        </p:nvSpPr>
+        <p:spPr>
+          <a:xfrm>
+            <a:off x="7232904" y="3255264"/>
+            <a:ext cx="1746504" cy="475488"/>
           </a:xfrm>
           <a:prstGeom prst="rect">
             <a:avLst/>
@@ -6243,12 +6844,12 @@
           <a:p>
             <a:pPr algn="ctr">
               <a:lnSpc>
-                <a:spcPts val="1560"/>
-              </a:lnSpc>
-              <a:spcAft>
-                <a:spcPts val="0"/>
-              </a:spcAft>
-              <a:defRPr sz="1300" b="0">
+                <a:spcPts val="1439"/>
+              </a:lnSpc>
+              <a:spcAft>
+                <a:spcPts val="0"/>
+              </a:spcAft>
+              <a:defRPr sz="1200" b="0">
                 <a:solidFill>
                   <a:srgbClr val="CCCCCC"/>
                 </a:solidFill>
@@ -6256,25 +6857,25 @@
               </a:defRPr>
             </a:pPr>
             <a:r>
-              <a:t>Anomaly detection</a:t>
+              <a:t>Detection,</a:t>
             </a:r>
             <a:br/>
             <a:r>
-              <a:t>Prediction, RL</a:t>
-            </a:r>
-          </a:p>
-        </p:txBody>
-      </p:sp>
-      <p:sp>
-        <p:nvSpPr>
-          <p:cNvPr id="22" name="Right Arrow 21"/>
+              <a:t>prediction, RL</a:t>
+            </a:r>
+          </a:p>
+        </p:txBody>
+      </p:sp>
+      <p:sp>
+        <p:nvSpPr>
+          <p:cNvPr id="30" name="Right Arrow 29"/>
           <p:cNvSpPr/>
           <p:nvPr/>
         </p:nvSpPr>
         <p:spPr>
           <a:xfrm>
-            <a:off x="9098280" y="2880360"/>
-            <a:ext cx="228600" cy="274320"/>
+            <a:off x="9089136" y="2880360"/>
+            <a:ext cx="164592" cy="274320"/>
           </a:xfrm>
           <a:prstGeom prst="rightArrow">
             <a:avLst/>
@@ -6310,14 +6911,14 @@
       </p:sp>
       <p:sp>
         <p:nvSpPr>
-          <p:cNvPr id="23" name="Rounded Rectangle 22"/>
+          <p:cNvPr id="31" name="Rounded Rectangle 30"/>
           <p:cNvSpPr/>
           <p:nvPr/>
         </p:nvSpPr>
         <p:spPr>
           <a:xfrm>
-            <a:off x="9326880" y="2103120"/>
-            <a:ext cx="1920240" cy="1828800"/>
+            <a:off x="9253728" y="2103120"/>
+            <a:ext cx="1965960" cy="1828800"/>
           </a:xfrm>
           <a:prstGeom prst="roundRect">
             <a:avLst/>
@@ -6355,14 +6956,57 @@
       </p:sp>
       <p:sp>
         <p:nvSpPr>
-          <p:cNvPr id="24" name="TextBox 23"/>
-          <p:cNvSpPr txBox="1"/>
-          <p:nvPr/>
-        </p:nvSpPr>
-        <p:spPr>
-          <a:xfrm>
-            <a:off x="9464040" y="2286000"/>
-            <a:ext cx="1645920" cy="320040"/>
+          <p:cNvPr id="32" name="Oval 31"/>
+          <p:cNvSpPr/>
+          <p:nvPr/>
+        </p:nvSpPr>
+        <p:spPr>
+          <a:xfrm>
+            <a:off x="9912096" y="2267712"/>
+            <a:ext cx="640080" cy="640080"/>
+          </a:xfrm>
+          <a:prstGeom prst="ellipse">
+            <a:avLst/>
+          </a:prstGeom>
+          <a:solidFill>
+            <a:srgbClr val="FF8C00"/>
+          </a:solidFill>
+          <a:ln>
+            <a:noFill/>
+          </a:ln>
+        </p:spPr>
+        <p:style>
+          <a:lnRef idx="1">
+            <a:schemeClr val="accent1"/>
+          </a:lnRef>
+          <a:fillRef idx="3">
+            <a:schemeClr val="accent1"/>
+          </a:fillRef>
+          <a:effectRef idx="2">
+            <a:schemeClr val="accent1"/>
+          </a:effectRef>
+          <a:fontRef idx="minor">
+            <a:schemeClr val="lt1"/>
+          </a:fontRef>
+        </p:style>
+        <p:txBody>
+          <a:bodyPr rtlCol="0" anchor="ctr"/>
+          <a:lstStyle/>
+          <a:p>
+            <a:pPr algn="ctr"/>
+          </a:p>
+        </p:txBody>
+      </p:sp>
+      <p:sp>
+        <p:nvSpPr>
+          <p:cNvPr id="33" name="TextBox 32"/>
+          <p:cNvSpPr txBox="1"/>
+          <p:nvPr/>
+        </p:nvSpPr>
+        <p:spPr>
+          <a:xfrm>
+            <a:off x="9912096" y="2295144"/>
+            <a:ext cx="640080" cy="612648"/>
           </a:xfrm>
           <a:prstGeom prst="rect">
             <a:avLst/>
@@ -6377,12 +7021,54 @@
           <a:p>
             <a:pPr algn="ctr">
               <a:lnSpc>
-                <a:spcPts val="1800"/>
-              </a:lnSpc>
-              <a:spcAft>
-                <a:spcPts val="0"/>
-              </a:spcAft>
-              <a:defRPr sz="1500" b="1">
+                <a:spcPts val="2160"/>
+              </a:lnSpc>
+              <a:spcAft>
+                <a:spcPts val="0"/>
+              </a:spcAft>
+              <a:defRPr sz="1800" b="1">
+                <a:solidFill>
+                  <a:srgbClr val="FFFFFF"/>
+                </a:solidFill>
+                <a:latin typeface="Calibri"/>
+              </a:defRPr>
+            </a:pPr>
+            <a:r>
+              <a:t>5</a:t>
+            </a:r>
+          </a:p>
+        </p:txBody>
+      </p:sp>
+      <p:sp>
+        <p:nvSpPr>
+          <p:cNvPr id="34" name="TextBox 33"/>
+          <p:cNvSpPr txBox="1"/>
+          <p:nvPr/>
+        </p:nvSpPr>
+        <p:spPr>
+          <a:xfrm>
+            <a:off x="9363456" y="2971800"/>
+            <a:ext cx="1746504" cy="292608"/>
+          </a:xfrm>
+          <a:prstGeom prst="rect">
+            <a:avLst/>
+          </a:prstGeom>
+          <a:noFill/>
+        </p:spPr>
+        <p:txBody>
+          <a:bodyPr wrap="square">
+            <a:spAutoFit/>
+          </a:bodyPr>
+          <a:lstStyle/>
+          <a:p>
+            <a:pPr algn="ctr">
+              <a:lnSpc>
+                <a:spcPts val="1680"/>
+              </a:lnSpc>
+              <a:spcAft>
+                <a:spcPts val="0"/>
+              </a:spcAft>
+              <a:defRPr sz="1400" b="1">
                 <a:solidFill>
                   <a:srgbClr val="FF8C00"/>
                 </a:solidFill>
@@ -6390,21 +7076,21 @@
               </a:defRPr>
             </a:pPr>
             <a:r>
-              <a:t>5. Action</a:t>
-            </a:r>
-          </a:p>
-        </p:txBody>
-      </p:sp>
-      <p:sp>
-        <p:nvSpPr>
-          <p:cNvPr id="25" name="TextBox 24"/>
-          <p:cNvSpPr txBox="1"/>
-          <p:nvPr/>
-        </p:nvSpPr>
-        <p:spPr>
-          <a:xfrm>
-            <a:off x="9464040" y="2743200"/>
-            <a:ext cx="1645920" cy="1097280"/>
+              <a:t>5. Act</a:t>
+            </a:r>
+          </a:p>
+        </p:txBody>
+      </p:sp>
+      <p:sp>
+        <p:nvSpPr>
+          <p:cNvPr id="35" name="TextBox 34"/>
+          <p:cNvSpPr txBox="1"/>
+          <p:nvPr/>
+        </p:nvSpPr>
+        <p:spPr>
+          <a:xfrm>
+            <a:off x="9363456" y="3255264"/>
+            <a:ext cx="1746504" cy="475488"/>
           </a:xfrm>
           <a:prstGeom prst="rect">
             <a:avLst/>
@@ -6419,12 +7105,12 @@
           <a:p>
             <a:pPr algn="ctr">
               <a:lnSpc>
-                <a:spcPts val="1560"/>
-              </a:lnSpc>
-              <a:spcAft>
-                <a:spcPts val="0"/>
-              </a:spcAft>
-              <a:defRPr sz="1300" b="0">
+                <a:spcPts val="1439"/>
+              </a:lnSpc>
+              <a:spcAft>
+                <a:spcPts val="0"/>
+              </a:spcAft>
+              <a:defRPr sz="1200" b="0">
                 <a:solidFill>
                   <a:srgbClr val="CCCCCC"/>
                 </a:solidFill>
@@ -6432,18 +7118,18 @@
               </a:defRPr>
             </a:pPr>
             <a:r>
-              <a:t>Auto-remediation</a:t>
+              <a:t>Alerts,</a:t>
             </a:r>
             <a:br/>
             <a:r>
-              <a:t>Policy updates</a:t>
-            </a:r>
-          </a:p>
-        </p:txBody>
-      </p:sp>
-      <p:sp>
-        <p:nvSpPr>
-          <p:cNvPr id="26" name="TextBox 25"/>
+              <a:t>policy changes</a:t>
+            </a:r>
+          </a:p>
+        </p:txBody>
+      </p:sp>
+      <p:sp>
+        <p:nvSpPr>
+          <p:cNvPr id="36" name="TextBox 35"/>
           <p:cNvSpPr txBox="1"/>
           <p:nvPr/>
         </p:nvSpPr>
@@ -6478,14 +7164,14 @@
               </a:defRPr>
             </a:pPr>
             <a:r>
-              <a:t>Modern telemetry pipelines are evolving from passive data collection to active, ML-driven closed-loop systems. The integration of ML at the analysis stage enables proactive network management — transforming raw telemetry into actionable insights and automated responses in near real-time.</a:t>
-            </a:r>
-          </a:p>
-        </p:txBody>
-      </p:sp>
-      <p:sp>
-        <p:nvSpPr>
-          <p:cNvPr id="27" name="TextBox 26"/>
+              <a:t>The big idea is simple: collect data, analyze it with ML, then use the result to help the network respond faster. That is what turns monitoring into intelligent network management.</a:t>
+            </a:r>
+          </a:p>
+        </p:txBody>
+      </p:sp>
+      <p:sp>
+        <p:nvSpPr>
+          <p:cNvPr id="37" name="TextBox 36"/>
           <p:cNvSpPr txBox="1"/>
           <p:nvPr/>
         </p:nvSpPr>
@@ -6527,7 +7213,7 @@
       </p:sp>
       <p:sp>
         <p:nvSpPr>
-          <p:cNvPr id="28" name="TextBox 27"/>
+          <p:cNvPr id="38" name="TextBox 37"/>
           <p:cNvSpPr txBox="1"/>
           <p:nvPr/>
         </p:nvSpPr>
@@ -6996,7 +7682,7 @@
               </a:defRPr>
             </a:pPr>
             <a:r>
-              <a:t>Industry: Nokia's Modern Broadband Network Telemetry</a:t>
+              <a:t>Industry Example: Nokia</a:t>
             </a:r>
           </a:p>
         </p:txBody>
@@ -7038,7 +7724,7 @@
               </a:defRPr>
             </a:pPr>
             <a:r>
-              <a:t>From reactive monitoring to AI-driven network intelligence</a:t>
+              <a:t>Showing what ML-driven telemetry looks like in practice</a:t>
             </a:r>
           </a:p>
         </p:txBody>
@@ -7087,132 +7773,14 @@
       </p:sp>
       <p:sp>
         <p:nvSpPr>
-          <p:cNvPr id="7" name="TextBox 6"/>
-          <p:cNvSpPr txBox="1"/>
-          <p:nvPr/>
-        </p:nvSpPr>
-        <p:spPr>
-          <a:xfrm>
-            <a:off x="731520" y="1554480"/>
-            <a:ext cx="5486400" cy="4389120"/>
-          </a:xfrm>
-          <a:prstGeom prst="rect">
-            <a:avLst/>
-          </a:prstGeom>
-          <a:noFill/>
-        </p:spPr>
-        <p:txBody>
-          <a:bodyPr wrap="square">
-            <a:spAutoFit/>
-          </a:bodyPr>
-          <a:lstStyle/>
-          <a:p>
-            <a:pPr>
-              <a:spcBef>
-                <a:spcPts val="200"/>
-              </a:spcBef>
-              <a:spcAft>
-                <a:spcPts val="1000"/>
-              </a:spcAft>
-              <a:defRPr sz="1500" b="0">
-                <a:solidFill>
-                  <a:srgbClr val="CCCCCC"/>
-                </a:solidFill>
-                <a:latin typeface="Calibri"/>
-              </a:defRPr>
-            </a:pPr>
-            <a:r>
-              <a:t>Nokia's broadband telemetry platform collects streaming data from millions of endpoints in real time</a:t>
-            </a:r>
-          </a:p>
-          <a:p>
-            <a:pPr>
-              <a:spcBef>
-                <a:spcPts val="200"/>
-              </a:spcBef>
-              <a:spcAft>
-                <a:spcPts val="1000"/>
-              </a:spcAft>
-              <a:defRPr sz="1500" b="0">
-                <a:solidFill>
-                  <a:srgbClr val="CCCCCC"/>
-                </a:solidFill>
-                <a:latin typeface="Calibri"/>
-              </a:defRPr>
-            </a:pPr>
-            <a:r>
-              <a:t>Employs ML for predictive maintenance — detecting degrading CPE and fiber links before failures occur</a:t>
-            </a:r>
-          </a:p>
-          <a:p>
-            <a:pPr>
-              <a:spcBef>
-                <a:spcPts val="200"/>
-              </a:spcBef>
-              <a:spcAft>
-                <a:spcPts val="1000"/>
-              </a:spcAft>
-              <a:defRPr sz="1500" b="0">
-                <a:solidFill>
-                  <a:srgbClr val="CCCCCC"/>
-                </a:solidFill>
-                <a:latin typeface="Calibri"/>
-              </a:defRPr>
-            </a:pPr>
-            <a:r>
-              <a:t>Automated root-cause analysis reduces mean time to resolution (MTTR) from hours to minutes</a:t>
-            </a:r>
-          </a:p>
-          <a:p>
-            <a:pPr>
-              <a:spcBef>
-                <a:spcPts val="200"/>
-              </a:spcBef>
-              <a:spcAft>
-                <a:spcPts val="1000"/>
-              </a:spcAft>
-              <a:defRPr sz="1500" b="0">
-                <a:solidFill>
-                  <a:srgbClr val="CCCCCC"/>
-                </a:solidFill>
-                <a:latin typeface="Calibri"/>
-              </a:defRPr>
-            </a:pPr>
-            <a:r>
-              <a:t>Leverages unsupervised clustering to group similar network behaviors and detect fleet-wide anomalies</a:t>
-            </a:r>
-          </a:p>
-          <a:p>
-            <a:pPr>
-              <a:spcBef>
-                <a:spcPts val="200"/>
-              </a:spcBef>
-              <a:spcAft>
-                <a:spcPts val="1000"/>
-              </a:spcAft>
-              <a:defRPr sz="1500" b="0">
-                <a:solidFill>
-                  <a:srgbClr val="CCCCCC"/>
-                </a:solidFill>
-                <a:latin typeface="Calibri"/>
-              </a:defRPr>
-            </a:pPr>
-            <a:r>
-              <a:t>Integration with Nokia AVA platform for AI-as-a-service in telco environments</a:t>
-            </a:r>
-          </a:p>
-        </p:txBody>
-      </p:sp>
-      <p:sp>
-        <p:nvSpPr>
-          <p:cNvPr id="8" name="Rounded Rectangle 7"/>
+          <p:cNvPr id="7" name="Rounded Rectangle 6"/>
           <p:cNvSpPr/>
           <p:nvPr/>
         </p:nvSpPr>
         <p:spPr>
           <a:xfrm>
-            <a:off x="6583680" y="1554480"/>
-            <a:ext cx="5120640" cy="3200400"/>
+            <a:off x="777240" y="1737360"/>
+            <a:ext cx="3474720" cy="1463040"/>
           </a:xfrm>
           <a:prstGeom prst="roundRect">
             <a:avLst/>
@@ -7220,7 +7788,7 @@
           <a:solidFill>
             <a:srgbClr val="141832"/>
           </a:solidFill>
-          <a:ln w="19050">
+          <a:ln w="17780">
             <a:solidFill>
               <a:srgbClr val="845EC2"/>
             </a:solidFill>
@@ -7250,14 +7818,56 @@
       </p:sp>
       <p:sp>
         <p:nvSpPr>
+          <p:cNvPr id="8" name="TextBox 7"/>
+          <p:cNvSpPr txBox="1"/>
+          <p:nvPr/>
+        </p:nvSpPr>
+        <p:spPr>
+          <a:xfrm>
+            <a:off x="941832" y="1874520"/>
+            <a:ext cx="3145536" cy="320040"/>
+          </a:xfrm>
+          <a:prstGeom prst="rect">
+            <a:avLst/>
+          </a:prstGeom>
+          <a:noFill/>
+        </p:spPr>
+        <p:txBody>
+          <a:bodyPr wrap="square">
+            <a:spAutoFit/>
+          </a:bodyPr>
+          <a:lstStyle/>
+          <a:p>
+            <a:pPr algn="l">
+              <a:lnSpc>
+                <a:spcPts val="1920"/>
+              </a:lnSpc>
+              <a:spcAft>
+                <a:spcPts val="0"/>
+              </a:spcAft>
+              <a:defRPr sz="1600" b="1">
+                <a:solidFill>
+                  <a:srgbClr val="845EC2"/>
+                </a:solidFill>
+                <a:latin typeface="Calibri"/>
+              </a:defRPr>
+            </a:pPr>
+            <a:r>
+              <a:t>Collect</a:t>
+            </a:r>
+          </a:p>
+        </p:txBody>
+      </p:sp>
+      <p:sp>
+        <p:nvSpPr>
           <p:cNvPr id="9" name="TextBox 8"/>
           <p:cNvSpPr txBox="1"/>
           <p:nvPr/>
         </p:nvSpPr>
         <p:spPr>
           <a:xfrm>
-            <a:off x="6858000" y="1737360"/>
-            <a:ext cx="4572000" cy="365760"/>
+            <a:off x="941832" y="2240280"/>
+            <a:ext cx="3145536" cy="822960"/>
           </a:xfrm>
           <a:prstGeom prst="rect">
             <a:avLst/>
@@ -7272,12 +7882,443 @@
           <a:p>
             <a:pPr algn="l">
               <a:lnSpc>
-                <a:spcPts val="1800"/>
-              </a:lnSpc>
-              <a:spcAft>
-                <a:spcPts val="0"/>
-              </a:spcAft>
-              <a:defRPr sz="1500" b="1">
+                <a:spcPts val="1690"/>
+              </a:lnSpc>
+              <a:spcAft>
+                <a:spcPts val="0"/>
+              </a:spcAft>
+              <a:defRPr sz="1300" b="0">
+                <a:solidFill>
+                  <a:srgbClr val="CCCCCC"/>
+                </a:solidFill>
+                <a:latin typeface="Calibri"/>
+              </a:defRPr>
+            </a:pPr>
+            <a:r>
+              <a:t>Gather live broadband telemetry from many devices.</a:t>
+            </a:r>
+          </a:p>
+        </p:txBody>
+      </p:sp>
+      <p:sp>
+        <p:nvSpPr>
+          <p:cNvPr id="10" name="Rounded Rectangle 9"/>
+          <p:cNvSpPr/>
+          <p:nvPr/>
+        </p:nvSpPr>
+        <p:spPr>
+          <a:xfrm>
+            <a:off x="4343400" y="1737360"/>
+            <a:ext cx="3474720" cy="1463040"/>
+          </a:xfrm>
+          <a:prstGeom prst="roundRect">
+            <a:avLst/>
+          </a:prstGeom>
+          <a:solidFill>
+            <a:srgbClr val="141832"/>
+          </a:solidFill>
+          <a:ln w="17780">
+            <a:solidFill>
+              <a:srgbClr val="00C9A7"/>
+            </a:solidFill>
+          </a:ln>
+        </p:spPr>
+        <p:style>
+          <a:lnRef idx="1">
+            <a:schemeClr val="accent1"/>
+          </a:lnRef>
+          <a:fillRef idx="3">
+            <a:schemeClr val="accent1"/>
+          </a:fillRef>
+          <a:effectRef idx="2">
+            <a:schemeClr val="accent1"/>
+          </a:effectRef>
+          <a:fontRef idx="minor">
+            <a:schemeClr val="lt1"/>
+          </a:fontRef>
+        </p:style>
+        <p:txBody>
+          <a:bodyPr rtlCol="0" anchor="ctr"/>
+          <a:lstStyle/>
+          <a:p>
+            <a:pPr algn="ctr"/>
+          </a:p>
+        </p:txBody>
+      </p:sp>
+      <p:sp>
+        <p:nvSpPr>
+          <p:cNvPr id="11" name="TextBox 10"/>
+          <p:cNvSpPr txBox="1"/>
+          <p:nvPr/>
+        </p:nvSpPr>
+        <p:spPr>
+          <a:xfrm>
+            <a:off x="4507992" y="1874520"/>
+            <a:ext cx="3145536" cy="320040"/>
+          </a:xfrm>
+          <a:prstGeom prst="rect">
+            <a:avLst/>
+          </a:prstGeom>
+          <a:noFill/>
+        </p:spPr>
+        <p:txBody>
+          <a:bodyPr wrap="square">
+            <a:spAutoFit/>
+          </a:bodyPr>
+          <a:lstStyle/>
+          <a:p>
+            <a:pPr algn="l">
+              <a:lnSpc>
+                <a:spcPts val="1920"/>
+              </a:lnSpc>
+              <a:spcAft>
+                <a:spcPts val="0"/>
+              </a:spcAft>
+              <a:defRPr sz="1600" b="1">
+                <a:solidFill>
+                  <a:srgbClr val="00C9A7"/>
+                </a:solidFill>
+                <a:latin typeface="Calibri"/>
+              </a:defRPr>
+            </a:pPr>
+            <a:r>
+              <a:t>Analyze</a:t>
+            </a:r>
+          </a:p>
+        </p:txBody>
+      </p:sp>
+      <p:sp>
+        <p:nvSpPr>
+          <p:cNvPr id="12" name="TextBox 11"/>
+          <p:cNvSpPr txBox="1"/>
+          <p:nvPr/>
+        </p:nvSpPr>
+        <p:spPr>
+          <a:xfrm>
+            <a:off x="4507992" y="2240280"/>
+            <a:ext cx="3145536" cy="822960"/>
+          </a:xfrm>
+          <a:prstGeom prst="rect">
+            <a:avLst/>
+          </a:prstGeom>
+          <a:noFill/>
+        </p:spPr>
+        <p:txBody>
+          <a:bodyPr wrap="square">
+            <a:spAutoFit/>
+          </a:bodyPr>
+          <a:lstStyle/>
+          <a:p>
+            <a:pPr algn="l">
+              <a:lnSpc>
+                <a:spcPts val="1690"/>
+              </a:lnSpc>
+              <a:spcAft>
+                <a:spcPts val="0"/>
+              </a:spcAft>
+              <a:defRPr sz="1300" b="0">
+                <a:solidFill>
+                  <a:srgbClr val="CCCCCC"/>
+                </a:solidFill>
+                <a:latin typeface="Calibri"/>
+              </a:defRPr>
+            </a:pPr>
+            <a:r>
+              <a:t>Use ML to detect anomalies and estimate risk.</a:t>
+            </a:r>
+          </a:p>
+        </p:txBody>
+      </p:sp>
+      <p:sp>
+        <p:nvSpPr>
+          <p:cNvPr id="13" name="Rounded Rectangle 12"/>
+          <p:cNvSpPr/>
+          <p:nvPr/>
+        </p:nvSpPr>
+        <p:spPr>
+          <a:xfrm>
+            <a:off x="7909560" y="1737360"/>
+            <a:ext cx="3474720" cy="1463040"/>
+          </a:xfrm>
+          <a:prstGeom prst="roundRect">
+            <a:avLst/>
+          </a:prstGeom>
+          <a:solidFill>
+            <a:srgbClr val="141832"/>
+          </a:solidFill>
+          <a:ln w="17780">
+            <a:solidFill>
+              <a:srgbClr val="FF8C00"/>
+            </a:solidFill>
+          </a:ln>
+        </p:spPr>
+        <p:style>
+          <a:lnRef idx="1">
+            <a:schemeClr val="accent1"/>
+          </a:lnRef>
+          <a:fillRef idx="3">
+            <a:schemeClr val="accent1"/>
+          </a:fillRef>
+          <a:effectRef idx="2">
+            <a:schemeClr val="accent1"/>
+          </a:effectRef>
+          <a:fontRef idx="minor">
+            <a:schemeClr val="lt1"/>
+          </a:fontRef>
+        </p:style>
+        <p:txBody>
+          <a:bodyPr rtlCol="0" anchor="ctr"/>
+          <a:lstStyle/>
+          <a:p>
+            <a:pPr algn="ctr"/>
+          </a:p>
+        </p:txBody>
+      </p:sp>
+      <p:sp>
+        <p:nvSpPr>
+          <p:cNvPr id="14" name="TextBox 13"/>
+          <p:cNvSpPr txBox="1"/>
+          <p:nvPr/>
+        </p:nvSpPr>
+        <p:spPr>
+          <a:xfrm>
+            <a:off x="8074152" y="1874520"/>
+            <a:ext cx="3145536" cy="320040"/>
+          </a:xfrm>
+          <a:prstGeom prst="rect">
+            <a:avLst/>
+          </a:prstGeom>
+          <a:noFill/>
+        </p:spPr>
+        <p:txBody>
+          <a:bodyPr wrap="square">
+            <a:spAutoFit/>
+          </a:bodyPr>
+          <a:lstStyle/>
+          <a:p>
+            <a:pPr algn="l">
+              <a:lnSpc>
+                <a:spcPts val="1920"/>
+              </a:lnSpc>
+              <a:spcAft>
+                <a:spcPts val="0"/>
+              </a:spcAft>
+              <a:defRPr sz="1600" b="1">
+                <a:solidFill>
+                  <a:srgbClr val="FF8C00"/>
+                </a:solidFill>
+                <a:latin typeface="Calibri"/>
+              </a:defRPr>
+            </a:pPr>
+            <a:r>
+              <a:t>Act</a:t>
+            </a:r>
+          </a:p>
+        </p:txBody>
+      </p:sp>
+      <p:sp>
+        <p:nvSpPr>
+          <p:cNvPr id="15" name="TextBox 14"/>
+          <p:cNvSpPr txBox="1"/>
+          <p:nvPr/>
+        </p:nvSpPr>
+        <p:spPr>
+          <a:xfrm>
+            <a:off x="8074152" y="2240280"/>
+            <a:ext cx="3145536" cy="822960"/>
+          </a:xfrm>
+          <a:prstGeom prst="rect">
+            <a:avLst/>
+          </a:prstGeom>
+          <a:noFill/>
+        </p:spPr>
+        <p:txBody>
+          <a:bodyPr wrap="square">
+            <a:spAutoFit/>
+          </a:bodyPr>
+          <a:lstStyle/>
+          <a:p>
+            <a:pPr algn="l">
+              <a:lnSpc>
+                <a:spcPts val="1690"/>
+              </a:lnSpc>
+              <a:spcAft>
+                <a:spcPts val="0"/>
+              </a:spcAft>
+              <a:defRPr sz="1300" b="0">
+                <a:solidFill>
+                  <a:srgbClr val="CCCCCC"/>
+                </a:solidFill>
+                <a:latin typeface="Calibri"/>
+              </a:defRPr>
+            </a:pPr>
+            <a:r>
+              <a:t>Support faster troubleshooting and predictive maintenance.</a:t>
+            </a:r>
+          </a:p>
+        </p:txBody>
+      </p:sp>
+      <p:sp>
+        <p:nvSpPr>
+          <p:cNvPr id="16" name="Right Arrow 15"/>
+          <p:cNvSpPr/>
+          <p:nvPr/>
+        </p:nvSpPr>
+        <p:spPr>
+          <a:xfrm>
+            <a:off x="3840480" y="2304288"/>
+            <a:ext cx="320040" cy="201168"/>
+          </a:xfrm>
+          <a:prstGeom prst="rightArrow">
+            <a:avLst/>
+          </a:prstGeom>
+          <a:solidFill>
+            <a:srgbClr val="999999"/>
+          </a:solidFill>
+          <a:ln>
+            <a:noFill/>
+          </a:ln>
+        </p:spPr>
+        <p:style>
+          <a:lnRef idx="1">
+            <a:schemeClr val="accent1"/>
+          </a:lnRef>
+          <a:fillRef idx="3">
+            <a:schemeClr val="accent1"/>
+          </a:fillRef>
+          <a:effectRef idx="2">
+            <a:schemeClr val="accent1"/>
+          </a:effectRef>
+          <a:fontRef idx="minor">
+            <a:schemeClr val="lt1"/>
+          </a:fontRef>
+        </p:style>
+        <p:txBody>
+          <a:bodyPr rtlCol="0" anchor="ctr"/>
+          <a:lstStyle/>
+          <a:p>
+            <a:pPr algn="ctr"/>
+          </a:p>
+        </p:txBody>
+      </p:sp>
+      <p:sp>
+        <p:nvSpPr>
+          <p:cNvPr id="17" name="Right Arrow 16"/>
+          <p:cNvSpPr/>
+          <p:nvPr/>
+        </p:nvSpPr>
+        <p:spPr>
+          <a:xfrm>
+            <a:off x="7406640" y="2304288"/>
+            <a:ext cx="320040" cy="201168"/>
+          </a:xfrm>
+          <a:prstGeom prst="rightArrow">
+            <a:avLst/>
+          </a:prstGeom>
+          <a:solidFill>
+            <a:srgbClr val="999999"/>
+          </a:solidFill>
+          <a:ln>
+            <a:noFill/>
+          </a:ln>
+        </p:spPr>
+        <p:style>
+          <a:lnRef idx="1">
+            <a:schemeClr val="accent1"/>
+          </a:lnRef>
+          <a:fillRef idx="3">
+            <a:schemeClr val="accent1"/>
+          </a:fillRef>
+          <a:effectRef idx="2">
+            <a:schemeClr val="accent1"/>
+          </a:effectRef>
+          <a:fontRef idx="minor">
+            <a:schemeClr val="lt1"/>
+          </a:fontRef>
+        </p:style>
+        <p:txBody>
+          <a:bodyPr rtlCol="0" anchor="ctr"/>
+          <a:lstStyle/>
+          <a:p>
+            <a:pPr algn="ctr"/>
+          </a:p>
+        </p:txBody>
+      </p:sp>
+      <p:sp>
+        <p:nvSpPr>
+          <p:cNvPr id="18" name="Rounded Rectangle 17"/>
+          <p:cNvSpPr/>
+          <p:nvPr/>
+        </p:nvSpPr>
+        <p:spPr>
+          <a:xfrm>
+            <a:off x="1325880" y="3794760"/>
+            <a:ext cx="9509760" cy="1554480"/>
+          </a:xfrm>
+          <a:prstGeom prst="roundRect">
+            <a:avLst/>
+          </a:prstGeom>
+          <a:solidFill>
+            <a:srgbClr val="141832"/>
+          </a:solidFill>
+          <a:ln w="17780">
+            <a:solidFill>
+              <a:srgbClr val="845EC2"/>
+            </a:solidFill>
+          </a:ln>
+        </p:spPr>
+        <p:style>
+          <a:lnRef idx="1">
+            <a:schemeClr val="accent1"/>
+          </a:lnRef>
+          <a:fillRef idx="3">
+            <a:schemeClr val="accent1"/>
+          </a:fillRef>
+          <a:effectRef idx="2">
+            <a:schemeClr val="accent1"/>
+          </a:effectRef>
+          <a:fontRef idx="minor">
+            <a:schemeClr val="lt1"/>
+          </a:fontRef>
+        </p:style>
+        <p:txBody>
+          <a:bodyPr rtlCol="0" anchor="ctr"/>
+          <a:lstStyle/>
+          <a:p>
+            <a:pPr algn="ctr"/>
+          </a:p>
+        </p:txBody>
+      </p:sp>
+      <p:sp>
+        <p:nvSpPr>
+          <p:cNvPr id="19" name="TextBox 18"/>
+          <p:cNvSpPr txBox="1"/>
+          <p:nvPr/>
+        </p:nvSpPr>
+        <p:spPr>
+          <a:xfrm>
+            <a:off x="1490472" y="3931920"/>
+            <a:ext cx="9180576" cy="320040"/>
+          </a:xfrm>
+          <a:prstGeom prst="rect">
+            <a:avLst/>
+          </a:prstGeom>
+          <a:noFill/>
+        </p:spPr>
+        <p:txBody>
+          <a:bodyPr wrap="square">
+            <a:spAutoFit/>
+          </a:bodyPr>
+          <a:lstStyle/>
+          <a:p>
+            <a:pPr algn="l">
+              <a:lnSpc>
+                <a:spcPts val="1920"/>
+              </a:lnSpc>
+              <a:spcAft>
+                <a:spcPts val="0"/>
+              </a:spcAft>
+              <a:defRPr sz="1600" b="1">
                 <a:solidFill>
                   <a:srgbClr val="845EC2"/>
                 </a:solidFill>
@@ -7285,41 +8326,41 @@
               </a:defRPr>
             </a:pPr>
             <a:r>
-              <a:t>Nokia's Key ML Capabilities</a:t>
-            </a:r>
-          </a:p>
-        </p:txBody>
-      </p:sp>
-      <p:sp>
-        <p:nvSpPr>
-          <p:cNvPr id="10" name="TextBox 9"/>
-          <p:cNvSpPr txBox="1"/>
-          <p:nvPr/>
-        </p:nvSpPr>
-        <p:spPr>
-          <a:xfrm>
-            <a:off x="6858000" y="2194560"/>
-            <a:ext cx="4572000" cy="2377440"/>
-          </a:xfrm>
-          <a:prstGeom prst="rect">
-            <a:avLst/>
-          </a:prstGeom>
-          <a:noFill/>
-        </p:spPr>
-        <p:txBody>
-          <a:bodyPr wrap="square">
-            <a:spAutoFit/>
-          </a:bodyPr>
-          <a:lstStyle/>
-          <a:p>
-            <a:pPr>
-              <a:spcBef>
-                <a:spcPts val="200"/>
-              </a:spcBef>
-              <a:spcAft>
-                <a:spcPts val="600"/>
-              </a:spcAft>
-              <a:defRPr sz="1300" b="0">
+              <a:t>What Nokia Is Trying To Do</a:t>
+            </a:r>
+          </a:p>
+        </p:txBody>
+      </p:sp>
+      <p:sp>
+        <p:nvSpPr>
+          <p:cNvPr id="20" name="TextBox 19"/>
+          <p:cNvSpPr txBox="1"/>
+          <p:nvPr/>
+        </p:nvSpPr>
+        <p:spPr>
+          <a:xfrm>
+            <a:off x="1490472" y="4297680"/>
+            <a:ext cx="9180576" cy="914400"/>
+          </a:xfrm>
+          <a:prstGeom prst="rect">
+            <a:avLst/>
+          </a:prstGeom>
+          <a:noFill/>
+        </p:spPr>
+        <p:txBody>
+          <a:bodyPr wrap="square">
+            <a:spAutoFit/>
+          </a:bodyPr>
+          <a:lstStyle/>
+          <a:p>
+            <a:pPr algn="l">
+              <a:lnSpc>
+                <a:spcPts val="1820"/>
+              </a:lnSpc>
+              <a:spcAft>
+                <a:spcPts val="0"/>
+              </a:spcAft>
+              <a:defRPr sz="1400" b="0">
                 <a:solidFill>
                   <a:srgbClr val="CCCCCC"/>
                 </a:solidFill>
@@ -7327,90 +8368,14 @@
               </a:defRPr>
             </a:pPr>
             <a:r>
-              <a:t>Predictive maintenance using supervised ML models</a:t>
-            </a:r>
-          </a:p>
-          <a:p>
-            <a:pPr>
-              <a:spcBef>
-                <a:spcPts val="200"/>
-              </a:spcBef>
-              <a:spcAft>
-                <a:spcPts val="600"/>
-              </a:spcAft>
-              <a:defRPr sz="1300" b="0">
-                <a:solidFill>
-                  <a:srgbClr val="CCCCCC"/>
-                </a:solidFill>
-                <a:latin typeface="Calibri"/>
-              </a:defRPr>
-            </a:pPr>
-            <a:r>
-              <a:t>Anomaly detection via unsupervised clustering</a:t>
-            </a:r>
-          </a:p>
-          <a:p>
-            <a:pPr>
-              <a:spcBef>
-                <a:spcPts val="200"/>
-              </a:spcBef>
-              <a:spcAft>
-                <a:spcPts val="600"/>
-              </a:spcAft>
-              <a:defRPr sz="1300" b="0">
-                <a:solidFill>
-                  <a:srgbClr val="CCCCCC"/>
-                </a:solidFill>
-                <a:latin typeface="Calibri"/>
-              </a:defRPr>
-            </a:pPr>
-            <a:r>
-              <a:t>Customer experience scoring with ensemble models</a:t>
-            </a:r>
-          </a:p>
-          <a:p>
-            <a:pPr>
-              <a:spcBef>
-                <a:spcPts val="200"/>
-              </a:spcBef>
-              <a:spcAft>
-                <a:spcPts val="600"/>
-              </a:spcAft>
-              <a:defRPr sz="1300" b="0">
-                <a:solidFill>
-                  <a:srgbClr val="CCCCCC"/>
-                </a:solidFill>
-                <a:latin typeface="Calibri"/>
-              </a:defRPr>
-            </a:pPr>
-            <a:r>
-              <a:t>Network capacity forecasting with time-series DL</a:t>
-            </a:r>
-          </a:p>
-          <a:p>
-            <a:pPr>
-              <a:spcBef>
-                <a:spcPts val="200"/>
-              </a:spcBef>
-              <a:spcAft>
-                <a:spcPts val="600"/>
-              </a:spcAft>
-              <a:defRPr sz="1300" b="0">
-                <a:solidFill>
-                  <a:srgbClr val="CCCCCC"/>
-                </a:solidFill>
-                <a:latin typeface="Calibri"/>
-              </a:defRPr>
-            </a:pPr>
-            <a:r>
-              <a:t>Automated incident correlation and root-cause analysis</a:t>
-            </a:r>
-          </a:p>
-        </p:txBody>
-      </p:sp>
-      <p:sp>
-        <p:nvSpPr>
-          <p:cNvPr id="11" name="TextBox 10"/>
+              <a:t>Predict failures early  |  find unusual behavior automatically  |  estimate customer experience  |  forecast capacity needs  |  speed up troubleshooting</a:t>
+            </a:r>
+          </a:p>
+        </p:txBody>
+      </p:sp>
+      <p:sp>
+        <p:nvSpPr>
+          <p:cNvPr id="21" name="TextBox 20"/>
           <p:cNvSpPr txBox="1"/>
           <p:nvPr/>
         </p:nvSpPr>
@@ -7452,7 +8417,7 @@
       </p:sp>
       <p:sp>
         <p:nvSpPr>
-          <p:cNvPr id="12" name="TextBox 11"/>
+          <p:cNvPr id="22" name="TextBox 21"/>
           <p:cNvSpPr txBox="1"/>
           <p:nvPr/>
         </p:nvSpPr>
@@ -7641,7 +8606,7 @@
               </a:defRPr>
             </a:pPr>
             <a:r>
-              <a:t>Industry: Ericsson's AI-Driven Network Telemetry</a:t>
+              <a:t>Industry Example: Ericsson</a:t>
             </a:r>
           </a:p>
         </p:txBody>
@@ -7683,7 +8648,7 @@
               </a:defRPr>
             </a:pPr>
             <a:r>
-              <a:t>Data mesh architecture and Transport Automation Controller</a:t>
+              <a:t>Combining better data organization with automation</a:t>
             </a:r>
           </a:p>
         </p:txBody>
@@ -7767,7 +8732,7 @@
               </a:defRPr>
             </a:pPr>
             <a:r>
-              <a:t>From Data Mess to AI-Ready Data Mesh</a:t>
+              <a:t>AI-Ready Data Mesh</a:t>
             </a:r>
           </a:p>
         </p:txBody>
@@ -7809,7 +8774,7 @@
               </a:defRPr>
             </a:pPr>
             <a:r>
-              <a:t>• Ericsson advocates a 'data mesh' approach to telemetry</a:t>
+              <a:t>• Ericsson treats telemetry as a shared data product, not just raw logs</a:t>
             </a:r>
           </a:p>
         </p:txBody>
@@ -7851,7 +8816,7 @@
               </a:defRPr>
             </a:pPr>
             <a:r>
-              <a:t>• Distributed data ownership with domain-specific telemetry pipelines</a:t>
+              <a:t>• Different teams manage their own data pipelines with common standards</a:t>
             </a:r>
           </a:p>
         </p:txBody>
@@ -7893,7 +8858,7 @@
               </a:defRPr>
             </a:pPr>
             <a:r>
-              <a:t>• Self-serve data infrastructure enabling ML teams across domains</a:t>
+              <a:t>• This makes telemetry easier for ML teams to access and use</a:t>
             </a:r>
           </a:p>
         </p:txBody>
@@ -7935,7 +8900,7 @@
               </a:defRPr>
             </a:pPr>
             <a:r>
-              <a:t>• Focus on data quality, governance, and real-time accessibility</a:t>
+              <a:t>• The goal is cleaner, faster, and more usable network data</a:t>
             </a:r>
           </a:p>
         </p:txBody>
@@ -8019,7 +8984,7 @@
               </a:defRPr>
             </a:pPr>
             <a:r>
-              <a:t>• AI/ML at the helm of transport network performance visualization</a:t>
+              <a:t>• Uses AI/ML to watch transport network performance</a:t>
             </a:r>
           </a:p>
         </p:txBody>
@@ -8061,7 +9026,7 @@
               </a:defRPr>
             </a:pPr>
             <a:r>
-              <a:t>• Automated anomaly detection on KPI time-series data</a:t>
+              <a:t>• Detects KPI anomalies automatically</a:t>
             </a:r>
           </a:p>
         </p:txBody>
@@ -8103,7 +9068,7 @@
               </a:defRPr>
             </a:pPr>
             <a:r>
-              <a:t>• Predictive analytics for proactive capacity planning</a:t>
+              <a:t>• Supports prediction for proactive capacity planning</a:t>
             </a:r>
           </a:p>
         </p:txBody>
@@ -8145,7 +9110,7 @@
               </a:defRPr>
             </a:pPr>
             <a:r>
-              <a:t>• Closed-loop automation: detect → diagnose → remediate</a:t>
+              <a:t>• Moves toward closed-loop automation: detect, diagnose, act</a:t>
             </a:r>
           </a:p>
         </p:txBody>
@@ -8274,7 +9239,7 @@
               </a:defRPr>
             </a:pPr>
             <a:r>
-              <a:t>Both Nokia and Ericsson are converging on AI-native telemetry architectures: moving from centralized, rule-based monitoring to distributed, ML-driven systems that can autonomously detect issues, predict failures, and initiate remediation. The data mesh paradigm reflects the industry's recognition that telemetry data management is as critical as the ML models themselves.</a:t>
+              <a:t>Ericsson's message is that good AI needs good data foundations. Better telemetry pipelines make automation and prediction much more realistic.</a:t>
             </a:r>
           </a:p>
         </p:txBody>
@@ -8512,7 +9477,7 @@
               </a:defRPr>
             </a:pPr>
             <a:r>
-              <a:t>Emerging Trends: 6G &amp; GenAI for Network Telemetry</a:t>
+              <a:t>Emerging Trends: 6G &amp; GenAI</a:t>
             </a:r>
           </a:p>
         </p:txBody>
@@ -8554,7 +9519,7 @@
               </a:defRPr>
             </a:pPr>
             <a:r>
-              <a:t>Next-generation technologies reshaping telemetry and network management</a:t>
+              <a:t>Two trend groups that shape the future of telemetry</a:t>
             </a:r>
           </a:p>
         </p:txBody>
@@ -8603,14 +9568,59 @@
       </p:sp>
       <p:sp>
         <p:nvSpPr>
-          <p:cNvPr id="7" name="TextBox 6"/>
-          <p:cNvSpPr txBox="1"/>
-          <p:nvPr/>
-        </p:nvSpPr>
-        <p:spPr>
-          <a:xfrm>
-            <a:off x="731520" y="1554480"/>
-            <a:ext cx="10972800" cy="365760"/>
+          <p:cNvPr id="7" name="Rounded Rectangle 6"/>
+          <p:cNvSpPr/>
+          <p:nvPr/>
+        </p:nvSpPr>
+        <p:spPr>
+          <a:xfrm>
+            <a:off x="822960" y="1783080"/>
+            <a:ext cx="5166360" cy="3703320"/>
+          </a:xfrm>
+          <a:prstGeom prst="roundRect">
+            <a:avLst/>
+          </a:prstGeom>
+          <a:solidFill>
+            <a:srgbClr val="141832"/>
+          </a:solidFill>
+          <a:ln w="17780">
+            <a:solidFill>
+              <a:srgbClr val="00C9A7"/>
+            </a:solidFill>
+          </a:ln>
+        </p:spPr>
+        <p:style>
+          <a:lnRef idx="1">
+            <a:schemeClr val="accent1"/>
+          </a:lnRef>
+          <a:fillRef idx="3">
+            <a:schemeClr val="accent1"/>
+          </a:fillRef>
+          <a:effectRef idx="2">
+            <a:schemeClr val="accent1"/>
+          </a:effectRef>
+          <a:fontRef idx="minor">
+            <a:schemeClr val="lt1"/>
+          </a:fontRef>
+        </p:style>
+        <p:txBody>
+          <a:bodyPr rtlCol="0" anchor="ctr"/>
+          <a:lstStyle/>
+          <a:p>
+            <a:pPr algn="ctr"/>
+          </a:p>
+        </p:txBody>
+      </p:sp>
+      <p:sp>
+        <p:nvSpPr>
+          <p:cNvPr id="8" name="TextBox 7"/>
+          <p:cNvSpPr txBox="1"/>
+          <p:nvPr/>
+        </p:nvSpPr>
+        <p:spPr>
+          <a:xfrm>
+            <a:off x="987552" y="1920240"/>
+            <a:ext cx="4837176" cy="320040"/>
           </a:xfrm>
           <a:prstGeom prst="rect">
             <a:avLst/>
@@ -8625,12 +9635,12 @@
           <a:p>
             <a:pPr algn="l">
               <a:lnSpc>
-                <a:spcPts val="2400"/>
-              </a:lnSpc>
-              <a:spcAft>
-                <a:spcPts val="0"/>
-              </a:spcAft>
-              <a:defRPr sz="2000" b="1">
+                <a:spcPts val="1920"/>
+              </a:lnSpc>
+              <a:spcAft>
+                <a:spcPts val="0"/>
+              </a:spcAft>
+              <a:defRPr sz="1600" b="1">
                 <a:solidFill>
                   <a:srgbClr val="00C9A7"/>
                 </a:solidFill>
@@ -8645,14 +9655,14 @@
       </p:sp>
       <p:sp>
         <p:nvSpPr>
-          <p:cNvPr id="8" name="TextBox 7"/>
-          <p:cNvSpPr txBox="1"/>
-          <p:nvPr/>
-        </p:nvSpPr>
-        <p:spPr>
-          <a:xfrm>
-            <a:off x="1005840" y="2011680"/>
-            <a:ext cx="10515600" cy="365760"/>
+          <p:cNvPr id="9" name="TextBox 8"/>
+          <p:cNvSpPr txBox="1"/>
+          <p:nvPr/>
+        </p:nvSpPr>
+        <p:spPr>
+          <a:xfrm>
+            <a:off x="987552" y="2286000"/>
+            <a:ext cx="4837176" cy="3063240"/>
           </a:xfrm>
           <a:prstGeom prst="rect">
             <a:avLst/>
@@ -8667,12 +9677,12 @@
           <a:p>
             <a:pPr algn="l">
               <a:lnSpc>
-                <a:spcPts val="1680"/>
-              </a:lnSpc>
-              <a:spcAft>
-                <a:spcPts val="0"/>
-              </a:spcAft>
-              <a:defRPr sz="1400" b="0">
+                <a:spcPts val="1690"/>
+              </a:lnSpc>
+              <a:spcAft>
+                <a:spcPts val="0"/>
+              </a:spcAft>
+              <a:defRPr sz="1300" b="0">
                 <a:solidFill>
                   <a:srgbClr val="CCCCCC"/>
                 </a:solidFill>
@@ -8680,21 +9690,78 @@
               </a:defRPr>
             </a:pPr>
             <a:r>
-              <a:t>• 6G networks target sub-millisecond latency and Tbps throughput — demanding real-time ML inference at the edge</a:t>
-            </a:r>
-          </a:p>
-        </p:txBody>
-      </p:sp>
-      <p:sp>
-        <p:nvSpPr>
-          <p:cNvPr id="9" name="TextBox 8"/>
-          <p:cNvSpPr txBox="1"/>
-          <p:nvPr/>
-        </p:nvSpPr>
-        <p:spPr>
-          <a:xfrm>
-            <a:off x="1005840" y="2359152"/>
-            <a:ext cx="10515600" cy="365760"/>
+              <a:t>6G will need even faster decisions and smarter automation</a:t>
+            </a:r>
+            <a:br/>
+            <a:r>
+              <a:t>Digital twins can simulate a network before changes are made</a:t>
+            </a:r>
+            <a:br/>
+            <a:r>
+              <a:t>Semantic telemetry tries to send only the most useful information</a:t>
+            </a:r>
+            <a:br/>
+            <a:r>
+              <a:t>AI may become a built-in network function instead of an extra tool</a:t>
+            </a:r>
+          </a:p>
+        </p:txBody>
+      </p:sp>
+      <p:sp>
+        <p:nvSpPr>
+          <p:cNvPr id="10" name="Rounded Rectangle 9"/>
+          <p:cNvSpPr/>
+          <p:nvPr/>
+        </p:nvSpPr>
+        <p:spPr>
+          <a:xfrm>
+            <a:off x="6172200" y="1783080"/>
+            <a:ext cx="5166360" cy="3703320"/>
+          </a:xfrm>
+          <a:prstGeom prst="roundRect">
+            <a:avLst/>
+          </a:prstGeom>
+          <a:solidFill>
+            <a:srgbClr val="141832"/>
+          </a:solidFill>
+          <a:ln w="17780">
+            <a:solidFill>
+              <a:srgbClr val="FF8C00"/>
+            </a:solidFill>
+          </a:ln>
+        </p:spPr>
+        <p:style>
+          <a:lnRef idx="1">
+            <a:schemeClr val="accent1"/>
+          </a:lnRef>
+          <a:fillRef idx="3">
+            <a:schemeClr val="accent1"/>
+          </a:fillRef>
+          <a:effectRef idx="2">
+            <a:schemeClr val="accent1"/>
+          </a:effectRef>
+          <a:fontRef idx="minor">
+            <a:schemeClr val="lt1"/>
+          </a:fontRef>
+        </p:style>
+        <p:txBody>
+          <a:bodyPr rtlCol="0" anchor="ctr"/>
+          <a:lstStyle/>
+          <a:p>
+            <a:pPr algn="ctr"/>
+          </a:p>
+        </p:txBody>
+      </p:sp>
+      <p:sp>
+        <p:nvSpPr>
+          <p:cNvPr id="11" name="TextBox 10"/>
+          <p:cNvSpPr txBox="1"/>
+          <p:nvPr/>
+        </p:nvSpPr>
+        <p:spPr>
+          <a:xfrm>
+            <a:off x="6336792" y="1920240"/>
+            <a:ext cx="4837176" cy="320040"/>
           </a:xfrm>
           <a:prstGeom prst="rect">
             <a:avLst/>
@@ -8709,12 +9776,54 @@
           <a:p>
             <a:pPr algn="l">
               <a:lnSpc>
-                <a:spcPts val="1680"/>
-              </a:lnSpc>
-              <a:spcAft>
-                <a:spcPts val="0"/>
-              </a:spcAft>
-              <a:defRPr sz="1400" b="0">
+                <a:spcPts val="1920"/>
+              </a:lnSpc>
+              <a:spcAft>
+                <a:spcPts val="0"/>
+              </a:spcAft>
+              <a:defRPr sz="1600" b="1">
+                <a:solidFill>
+                  <a:srgbClr val="FF8C00"/>
+                </a:solidFill>
+                <a:latin typeface="Calibri"/>
+              </a:defRPr>
+            </a:pPr>
+            <a:r>
+              <a:t>Generative AI &amp; LLMs for Telemetry</a:t>
+            </a:r>
+          </a:p>
+        </p:txBody>
+      </p:sp>
+      <p:sp>
+        <p:nvSpPr>
+          <p:cNvPr id="12" name="TextBox 11"/>
+          <p:cNvSpPr txBox="1"/>
+          <p:nvPr/>
+        </p:nvSpPr>
+        <p:spPr>
+          <a:xfrm>
+            <a:off x="6336792" y="2286000"/>
+            <a:ext cx="4837176" cy="3063240"/>
+          </a:xfrm>
+          <a:prstGeom prst="rect">
+            <a:avLst/>
+          </a:prstGeom>
+          <a:noFill/>
+        </p:spPr>
+        <p:txBody>
+          <a:bodyPr wrap="square">
+            <a:spAutoFit/>
+          </a:bodyPr>
+          <a:lstStyle/>
+          <a:p>
+            <a:pPr algn="l">
+              <a:lnSpc>
+                <a:spcPts val="1690"/>
+              </a:lnSpc>
+              <a:spcAft>
+                <a:spcPts val="0"/>
+              </a:spcAft>
+              <a:defRPr sz="1300" b="0">
                 <a:solidFill>
                   <a:srgbClr val="CCCCCC"/>
                 </a:solidFill>
@@ -8722,133 +9831,19 @@
               </a:defRPr>
             </a:pPr>
             <a:r>
-              <a:t>• Digital twin networks: ML-powered virtual replicas of physical networks for simulation and what-if analysis</a:t>
-            </a:r>
-          </a:p>
-        </p:txBody>
-      </p:sp>
-      <p:sp>
-        <p:nvSpPr>
-          <p:cNvPr id="10" name="TextBox 9"/>
-          <p:cNvSpPr txBox="1"/>
-          <p:nvPr/>
-        </p:nvSpPr>
-        <p:spPr>
-          <a:xfrm>
-            <a:off x="1005840" y="2706624"/>
-            <a:ext cx="10515600" cy="365760"/>
-          </a:xfrm>
-          <a:prstGeom prst="rect">
-            <a:avLst/>
-          </a:prstGeom>
-          <a:noFill/>
-        </p:spPr>
-        <p:txBody>
-          <a:bodyPr wrap="square">
-            <a:spAutoFit/>
-          </a:bodyPr>
-          <a:lstStyle/>
-          <a:p>
-            <a:pPr algn="l">
-              <a:lnSpc>
-                <a:spcPts val="1680"/>
-              </a:lnSpc>
-              <a:spcAft>
-                <a:spcPts val="0"/>
-              </a:spcAft>
-              <a:defRPr sz="1400" b="0">
-                <a:solidFill>
-                  <a:srgbClr val="CCCCCC"/>
-                </a:solidFill>
-                <a:latin typeface="Calibri"/>
-              </a:defRPr>
-            </a:pPr>
-            <a:r>
-              <a:t>• Semantic telemetry: intelligent data reduction at the source — only transmit meaningful changes, not raw streams</a:t>
-            </a:r>
-          </a:p>
-        </p:txBody>
-      </p:sp>
-      <p:sp>
-        <p:nvSpPr>
-          <p:cNvPr id="11" name="TextBox 10"/>
-          <p:cNvSpPr txBox="1"/>
-          <p:nvPr/>
-        </p:nvSpPr>
-        <p:spPr>
-          <a:xfrm>
-            <a:off x="1005840" y="3054096"/>
-            <a:ext cx="10515600" cy="365760"/>
-          </a:xfrm>
-          <a:prstGeom prst="rect">
-            <a:avLst/>
-          </a:prstGeom>
-          <a:noFill/>
-        </p:spPr>
-        <p:txBody>
-          <a:bodyPr wrap="square">
-            <a:spAutoFit/>
-          </a:bodyPr>
-          <a:lstStyle/>
-          <a:p>
-            <a:pPr algn="l">
-              <a:lnSpc>
-                <a:spcPts val="1680"/>
-              </a:lnSpc>
-              <a:spcAft>
-                <a:spcPts val="0"/>
-              </a:spcAft>
-              <a:defRPr sz="1400" b="0">
-                <a:solidFill>
-                  <a:srgbClr val="CCCCCC"/>
-                </a:solidFill>
-                <a:latin typeface="Calibri"/>
-              </a:defRPr>
-            </a:pPr>
-            <a:r>
-              <a:t>• Native AI architecture: 6G standards embed ML as a first-class network function, not an add-on</a:t>
-            </a:r>
-          </a:p>
-        </p:txBody>
-      </p:sp>
-      <p:sp>
-        <p:nvSpPr>
-          <p:cNvPr id="12" name="TextBox 11"/>
-          <p:cNvSpPr txBox="1"/>
-          <p:nvPr/>
-        </p:nvSpPr>
-        <p:spPr>
-          <a:xfrm>
-            <a:off x="731520" y="3675888"/>
-            <a:ext cx="10972800" cy="365760"/>
-          </a:xfrm>
-          <a:prstGeom prst="rect">
-            <a:avLst/>
-          </a:prstGeom>
-          <a:noFill/>
-        </p:spPr>
-        <p:txBody>
-          <a:bodyPr wrap="square">
-            <a:spAutoFit/>
-          </a:bodyPr>
-          <a:lstStyle/>
-          <a:p>
-            <a:pPr algn="l">
-              <a:lnSpc>
-                <a:spcPts val="2400"/>
-              </a:lnSpc>
-              <a:spcAft>
-                <a:spcPts val="0"/>
-              </a:spcAft>
-              <a:defRPr sz="2000" b="1">
-                <a:solidFill>
-                  <a:srgbClr val="FF8C00"/>
-                </a:solidFill>
-                <a:latin typeface="Calibri"/>
-              </a:defRPr>
-            </a:pPr>
-            <a:r>
-              <a:t>Generative AI &amp; LLMs for Telemetry</a:t>
+              <a:t>LLMs may let engineers ask telemetry questions in plain language</a:t>
+            </a:r>
+            <a:br/>
+            <a:r>
+              <a:t>GenAI can create synthetic data to help train models</a:t>
+            </a:r>
+            <a:br/>
+            <a:r>
+              <a:t>It can also help summarize incidents and reports</a:t>
+            </a:r>
+            <a:br/>
+            <a:r>
+              <a:t>Large foundation models may be adapted for different network tasks</a:t>
             </a:r>
           </a:p>
         </p:txBody>
@@ -8856,174 +9851,6 @@
       <p:sp>
         <p:nvSpPr>
           <p:cNvPr id="13" name="TextBox 12"/>
-          <p:cNvSpPr txBox="1"/>
-          <p:nvPr/>
-        </p:nvSpPr>
-        <p:spPr>
-          <a:xfrm>
-            <a:off x="1005840" y="4133088"/>
-            <a:ext cx="10515600" cy="365760"/>
-          </a:xfrm>
-          <a:prstGeom prst="rect">
-            <a:avLst/>
-          </a:prstGeom>
-          <a:noFill/>
-        </p:spPr>
-        <p:txBody>
-          <a:bodyPr wrap="square">
-            <a:spAutoFit/>
-          </a:bodyPr>
-          <a:lstStyle/>
-          <a:p>
-            <a:pPr algn="l">
-              <a:lnSpc>
-                <a:spcPts val="1680"/>
-              </a:lnSpc>
-              <a:spcAft>
-                <a:spcPts val="0"/>
-              </a:spcAft>
-              <a:defRPr sz="1400" b="0">
-                <a:solidFill>
-                  <a:srgbClr val="CCCCCC"/>
-                </a:solidFill>
-                <a:latin typeface="Calibri"/>
-              </a:defRPr>
-            </a:pPr>
-            <a:r>
-              <a:t>• LLMs for natural language querying of telemetry data: 'Show me all anomalies in the US-East backbone last week'</a:t>
-            </a:r>
-          </a:p>
-        </p:txBody>
-      </p:sp>
-      <p:sp>
-        <p:nvSpPr>
-          <p:cNvPr id="14" name="TextBox 13"/>
-          <p:cNvSpPr txBox="1"/>
-          <p:nvPr/>
-        </p:nvSpPr>
-        <p:spPr>
-          <a:xfrm>
-            <a:off x="1005840" y="4480560"/>
-            <a:ext cx="10515600" cy="365760"/>
-          </a:xfrm>
-          <a:prstGeom prst="rect">
-            <a:avLst/>
-          </a:prstGeom>
-          <a:noFill/>
-        </p:spPr>
-        <p:txBody>
-          <a:bodyPr wrap="square">
-            <a:spAutoFit/>
-          </a:bodyPr>
-          <a:lstStyle/>
-          <a:p>
-            <a:pPr algn="l">
-              <a:lnSpc>
-                <a:spcPts val="1680"/>
-              </a:lnSpc>
-              <a:spcAft>
-                <a:spcPts val="0"/>
-              </a:spcAft>
-              <a:defRPr sz="1400" b="0">
-                <a:solidFill>
-                  <a:srgbClr val="CCCCCC"/>
-                </a:solidFill>
-                <a:latin typeface="Calibri"/>
-              </a:defRPr>
-            </a:pPr>
-            <a:r>
-              <a:t>• GenAI for synthetic telemetry data generation — augmenting scarce labeled datasets for training</a:t>
-            </a:r>
-          </a:p>
-        </p:txBody>
-      </p:sp>
-      <p:sp>
-        <p:nvSpPr>
-          <p:cNvPr id="15" name="TextBox 14"/>
-          <p:cNvSpPr txBox="1"/>
-          <p:nvPr/>
-        </p:nvSpPr>
-        <p:spPr>
-          <a:xfrm>
-            <a:off x="1005840" y="4828032"/>
-            <a:ext cx="10515600" cy="365760"/>
-          </a:xfrm>
-          <a:prstGeom prst="rect">
-            <a:avLst/>
-          </a:prstGeom>
-          <a:noFill/>
-        </p:spPr>
-        <p:txBody>
-          <a:bodyPr wrap="square">
-            <a:spAutoFit/>
-          </a:bodyPr>
-          <a:lstStyle/>
-          <a:p>
-            <a:pPr algn="l">
-              <a:lnSpc>
-                <a:spcPts val="1680"/>
-              </a:lnSpc>
-              <a:spcAft>
-                <a:spcPts val="0"/>
-              </a:spcAft>
-              <a:defRPr sz="1400" b="0">
-                <a:solidFill>
-                  <a:srgbClr val="CCCCCC"/>
-                </a:solidFill>
-                <a:latin typeface="Calibri"/>
-              </a:defRPr>
-            </a:pPr>
-            <a:r>
-              <a:t>• Automated incident report generation from raw telemetry events</a:t>
-            </a:r>
-          </a:p>
-        </p:txBody>
-      </p:sp>
-      <p:sp>
-        <p:nvSpPr>
-          <p:cNvPr id="16" name="TextBox 15"/>
-          <p:cNvSpPr txBox="1"/>
-          <p:nvPr/>
-        </p:nvSpPr>
-        <p:spPr>
-          <a:xfrm>
-            <a:off x="1005840" y="5175504"/>
-            <a:ext cx="10515600" cy="365760"/>
-          </a:xfrm>
-          <a:prstGeom prst="rect">
-            <a:avLst/>
-          </a:prstGeom>
-          <a:noFill/>
-        </p:spPr>
-        <p:txBody>
-          <a:bodyPr wrap="square">
-            <a:spAutoFit/>
-          </a:bodyPr>
-          <a:lstStyle/>
-          <a:p>
-            <a:pPr algn="l">
-              <a:lnSpc>
-                <a:spcPts val="1680"/>
-              </a:lnSpc>
-              <a:spcAft>
-                <a:spcPts val="0"/>
-              </a:spcAft>
-              <a:defRPr sz="1400" b="0">
-                <a:solidFill>
-                  <a:srgbClr val="CCCCCC"/>
-                </a:solidFill>
-                <a:latin typeface="Calibri"/>
-              </a:defRPr>
-            </a:pPr>
-            <a:r>
-              <a:t>• Foundation models for network data: pre-trained on diverse telemetry, fine-tuned for specific tasks</a:t>
-            </a:r>
-          </a:p>
-        </p:txBody>
-      </p:sp>
-      <p:sp>
-        <p:nvSpPr>
-          <p:cNvPr id="17" name="TextBox 16"/>
           <p:cNvSpPr txBox="1"/>
           <p:nvPr/>
         </p:nvSpPr>
@@ -9065,7 +9892,7 @@
       </p:sp>
       <p:sp>
         <p:nvSpPr>
-          <p:cNvPr id="18" name="TextBox 17"/>
+          <p:cNvPr id="14" name="TextBox 13"/>
           <p:cNvSpPr txBox="1"/>
           <p:nvPr/>
         </p:nvSpPr>
@@ -9254,7 +10081,7 @@
               </a:defRPr>
             </a:pPr>
             <a:r>
-              <a:t>Open Challenges &amp; Future Directions</a:t>
+              <a:t>Open Challenges</a:t>
             </a:r>
           </a:p>
         </p:txBody>
@@ -9296,7 +10123,7 @@
               </a:defRPr>
             </a:pPr>
             <a:r>
-              <a:t>Key issues that remain unsolved in ML for network telemetry</a:t>
+              <a:t>Important problems that still need better solutions</a:t>
             </a:r>
           </a:p>
         </p:txBody>
@@ -9425,7 +10252,7 @@
               </a:defRPr>
             </a:pPr>
             <a:r>
-              <a:t>Data Scarcity &amp; Labeling</a:t>
+              <a:t>Not enough labeled data</a:t>
             </a:r>
           </a:p>
         </p:txBody>
@@ -9467,7 +10294,7 @@
               </a:defRPr>
             </a:pPr>
             <a:r>
-              <a:t>Labeled anomaly/fault data is rare in production networks. Self-supervised and few-shot learning are active research areas.</a:t>
+              <a:t>Real networks rarely provide clean examples of every failure or attack.</a:t>
             </a:r>
           </a:p>
         </p:txBody>
@@ -9554,7 +10381,7 @@
               </a:defRPr>
             </a:pPr>
             <a:r>
-              <a:t>Scalability &amp; Real-Time Inference</a:t>
+              <a:t>Scale and speed</a:t>
             </a:r>
           </a:p>
         </p:txBody>
@@ -9596,7 +10423,7 @@
               </a:defRPr>
             </a:pPr>
             <a:r>
-              <a:t>ML models must process millions of telemetry records per second. Edge inference and model compression are essential.</a:t>
+              <a:t>Models must handle massive telemetry streams quickly enough to matter.</a:t>
             </a:r>
           </a:p>
         </p:txBody>
@@ -9683,7 +10510,7 @@
               </a:defRPr>
             </a:pPr>
             <a:r>
-              <a:t>Explainability &amp; Trust</a:t>
+              <a:t>Explainability</a:t>
             </a:r>
           </a:p>
         </p:txBody>
@@ -9725,7 +10552,7 @@
               </a:defRPr>
             </a:pPr>
             <a:r>
-              <a:t>Network operators need to understand why an ML model flagged an anomaly. Black-box models hinder adoption.</a:t>
+              <a:t>Operators need to know why a model raised an alert before they trust it.</a:t>
             </a:r>
           </a:p>
         </p:txBody>
@@ -9812,7 +10639,7 @@
               </a:defRPr>
             </a:pPr>
             <a:r>
-              <a:t>Concept Drift</a:t>
+              <a:t>Concept drift</a:t>
             </a:r>
           </a:p>
         </p:txBody>
@@ -9854,7 +10681,7 @@
               </a:defRPr>
             </a:pPr>
             <a:r>
-              <a:t>Network traffic patterns change over time. Models must adapt continuously without catastrophic forgetting.</a:t>
+              <a:t>Normal traffic changes over time, so models can become outdated.</a:t>
             </a:r>
           </a:p>
         </p:txBody>
@@ -9941,7 +10768,7 @@
               </a:defRPr>
             </a:pPr>
             <a:r>
-              <a:t>Cross-Domain Generalization</a:t>
+              <a:t>Generalization</a:t>
             </a:r>
           </a:p>
         </p:txBody>
@@ -9983,7 +10810,7 @@
               </a:defRPr>
             </a:pPr>
             <a:r>
-              <a:t>Models trained on one network often fail on another. Domain adaptation and transfer learning need further development.</a:t>
+              <a:t>A model that works well in one network may fail in another.</a:t>
             </a:r>
           </a:p>
         </p:txBody>
@@ -10070,7 +10897,7 @@
               </a:defRPr>
             </a:pPr>
             <a:r>
-              <a:t>Privacy &amp; Security</a:t>
+              <a:t>Privacy and security</a:t>
             </a:r>
           </a:p>
         </p:txBody>
@@ -10112,7 +10939,7 @@
               </a:defRPr>
             </a:pPr>
             <a:r>
-              <a:t>Telemetry data may contain sensitive information. Federated and differential-privacy-preserving ML are emerging solutions.</a:t>
+              <a:t>Telemetry can contain sensitive information that must be protected.</a:t>
             </a:r>
           </a:p>
         </p:txBody>
@@ -10363,6 +11190,48 @@
         </p:nvSpPr>
         <p:spPr>
           <a:xfrm>
+            <a:off x="731520" y="960120"/>
+            <a:ext cx="10515600" cy="411480"/>
+          </a:xfrm>
+          <a:prstGeom prst="rect">
+            <a:avLst/>
+          </a:prstGeom>
+          <a:noFill/>
+        </p:spPr>
+        <p:txBody>
+          <a:bodyPr wrap="square">
+            <a:spAutoFit/>
+          </a:bodyPr>
+          <a:lstStyle/>
+          <a:p>
+            <a:pPr algn="l">
+              <a:lnSpc>
+                <a:spcPts val="2160"/>
+              </a:lnSpc>
+              <a:spcAft>
+                <a:spcPts val="0"/>
+              </a:spcAft>
+              <a:defRPr sz="1800" b="0">
+                <a:solidFill>
+                  <a:srgbClr val="CCCCCC"/>
+                </a:solidFill>
+                <a:latin typeface="Calibri"/>
+              </a:defRPr>
+            </a:pPr>
+            <a:r>
+              <a:t>A cleaner final summary</a:t>
+            </a:r>
+          </a:p>
+        </p:txBody>
+      </p:sp>
+      <p:sp>
+        <p:nvSpPr>
+          <p:cNvPr id="6" name="TextBox 5"/>
+          <p:cNvSpPr txBox="1"/>
+          <p:nvPr/>
+        </p:nvSpPr>
+        <p:spPr>
+          <a:xfrm>
             <a:off x="9326880" y="6263640"/>
             <a:ext cx="2743200" cy="457200"/>
           </a:xfrm>
@@ -10399,13 +11268,13 @@
       </p:sp>
       <p:sp>
         <p:nvSpPr>
-          <p:cNvPr id="6" name="Oval 5"/>
+          <p:cNvPr id="7" name="Oval 6"/>
           <p:cNvSpPr/>
           <p:nvPr/>
         </p:nvSpPr>
         <p:spPr>
           <a:xfrm>
-            <a:off x="685800" y="1389888"/>
+            <a:off x="685800" y="1344168"/>
             <a:ext cx="384048" cy="384048"/>
           </a:xfrm>
           <a:prstGeom prst="ellipse">
@@ -10442,13 +11311,13 @@
       </p:sp>
       <p:sp>
         <p:nvSpPr>
-          <p:cNvPr id="7" name="TextBox 6"/>
-          <p:cNvSpPr txBox="1"/>
-          <p:nvPr/>
-        </p:nvSpPr>
-        <p:spPr>
-          <a:xfrm>
-            <a:off x="685800" y="1417320"/>
+          <p:cNvPr id="8" name="TextBox 7"/>
+          <p:cNvSpPr txBox="1"/>
+          <p:nvPr/>
+        </p:nvSpPr>
+        <p:spPr>
+          <a:xfrm>
+            <a:off x="685800" y="1371600"/>
             <a:ext cx="384048" cy="347472"/>
           </a:xfrm>
           <a:prstGeom prst="rect">
@@ -10484,13 +11353,13 @@
       </p:sp>
       <p:sp>
         <p:nvSpPr>
-          <p:cNvPr id="8" name="TextBox 7"/>
-          <p:cNvSpPr txBox="1"/>
-          <p:nvPr/>
-        </p:nvSpPr>
-        <p:spPr>
-          <a:xfrm>
-            <a:off x="1280160" y="1371600"/>
+          <p:cNvPr id="9" name="TextBox 8"/>
+          <p:cNvSpPr txBox="1"/>
+          <p:nvPr/>
+        </p:nvSpPr>
+        <p:spPr>
+          <a:xfrm>
+            <a:off x="1280160" y="1325880"/>
             <a:ext cx="10515600" cy="320040"/>
           </a:xfrm>
           <a:prstGeom prst="rect">
@@ -10519,20 +11388,20 @@
               </a:defRPr>
             </a:pPr>
             <a:r>
-              <a:t>ML is transforming network telemetry</a:t>
-            </a:r>
-          </a:p>
-        </p:txBody>
-      </p:sp>
-      <p:sp>
-        <p:nvSpPr>
-          <p:cNvPr id="9" name="TextBox 8"/>
-          <p:cNvSpPr txBox="1"/>
-          <p:nvPr/>
-        </p:nvSpPr>
-        <p:spPr>
-          <a:xfrm>
-            <a:off x="1280160" y="1719072"/>
+              <a:t>Telemetry gives the raw picture</a:t>
+            </a:r>
+          </a:p>
+        </p:txBody>
+      </p:sp>
+      <p:sp>
+        <p:nvSpPr>
+          <p:cNvPr id="10" name="TextBox 9"/>
+          <p:cNvSpPr txBox="1"/>
+          <p:nvPr/>
+        </p:nvSpPr>
+        <p:spPr>
+          <a:xfrm>
+            <a:off x="1280160" y="1673352"/>
             <a:ext cx="10515600" cy="548640"/>
           </a:xfrm>
           <a:prstGeom prst="rect">
@@ -10561,20 +11430,20 @@
               </a:defRPr>
             </a:pPr>
             <a:r>
-              <a:t>From passive data collection to intelligent, proactive network management across anomaly detection, performance prediction, and QoS optimization.</a:t>
-            </a:r>
-          </a:p>
-        </p:txBody>
-      </p:sp>
-      <p:sp>
-        <p:nvSpPr>
-          <p:cNvPr id="10" name="Oval 9"/>
+              <a:t>It tells us what the network is doing right now through streams of measurements and events.</a:t>
+            </a:r>
+          </a:p>
+        </p:txBody>
+      </p:sp>
+      <p:sp>
+        <p:nvSpPr>
+          <p:cNvPr id="11" name="Oval 10"/>
           <p:cNvSpPr/>
           <p:nvPr/>
         </p:nvSpPr>
         <p:spPr>
           <a:xfrm>
-            <a:off x="685800" y="2395728"/>
+            <a:off x="685800" y="2331720"/>
             <a:ext cx="384048" cy="384048"/>
           </a:xfrm>
           <a:prstGeom prst="ellipse">
@@ -10611,13 +11480,13 @@
       </p:sp>
       <p:sp>
         <p:nvSpPr>
-          <p:cNvPr id="11" name="TextBox 10"/>
-          <p:cNvSpPr txBox="1"/>
-          <p:nvPr/>
-        </p:nvSpPr>
-        <p:spPr>
-          <a:xfrm>
-            <a:off x="685800" y="2423160"/>
+          <p:cNvPr id="12" name="TextBox 11"/>
+          <p:cNvSpPr txBox="1"/>
+          <p:nvPr/>
+        </p:nvSpPr>
+        <p:spPr>
+          <a:xfrm>
+            <a:off x="685800" y="2359152"/>
             <a:ext cx="384048" cy="347472"/>
           </a:xfrm>
           <a:prstGeom prst="rect">
@@ -10653,13 +11522,13 @@
       </p:sp>
       <p:sp>
         <p:nvSpPr>
-          <p:cNvPr id="12" name="TextBox 11"/>
-          <p:cNvSpPr txBox="1"/>
-          <p:nvPr/>
-        </p:nvSpPr>
-        <p:spPr>
-          <a:xfrm>
-            <a:off x="1280160" y="2377440"/>
+          <p:cNvPr id="13" name="TextBox 12"/>
+          <p:cNvSpPr txBox="1"/>
+          <p:nvPr/>
+        </p:nvSpPr>
+        <p:spPr>
+          <a:xfrm>
+            <a:off x="1280160" y="2313432"/>
             <a:ext cx="10515600" cy="320040"/>
           </a:xfrm>
           <a:prstGeom prst="rect">
@@ -10688,20 +11557,20 @@
               </a:defRPr>
             </a:pPr>
             <a:r>
-              <a:t>Deep learning leads, but unsupervised methods dominate in practice</a:t>
-            </a:r>
-          </a:p>
-        </p:txBody>
-      </p:sp>
-      <p:sp>
-        <p:nvSpPr>
-          <p:cNvPr id="13" name="TextBox 12"/>
-          <p:cNvSpPr txBox="1"/>
-          <p:nvPr/>
-        </p:nvSpPr>
-        <p:spPr>
-          <a:xfrm>
-            <a:off x="1280160" y="2724912"/>
+              <a:t>ML helps turn data into decisions</a:t>
+            </a:r>
+          </a:p>
+        </p:txBody>
+      </p:sp>
+      <p:sp>
+        <p:nvSpPr>
+          <p:cNvPr id="14" name="TextBox 13"/>
+          <p:cNvSpPr txBox="1"/>
+          <p:nvPr/>
+        </p:nvSpPr>
+        <p:spPr>
+          <a:xfrm>
+            <a:off x="1280160" y="2660904"/>
             <a:ext cx="10515600" cy="548640"/>
           </a:xfrm>
           <a:prstGeom prst="rect">
@@ -10730,20 +11599,20 @@
               </a:defRPr>
             </a:pPr>
             <a:r>
-              <a:t>Due to the scarcity of labeled data, autoencoders, clustering, and self-supervised methods are most practical for real-world deployment.</a:t>
-            </a:r>
-          </a:p>
-        </p:txBody>
-      </p:sp>
-      <p:sp>
-        <p:nvSpPr>
-          <p:cNvPr id="14" name="Oval 13"/>
+              <a:t>It can find anomalies, predict future performance, and help improve QoS.</a:t>
+            </a:r>
+          </a:p>
+        </p:txBody>
+      </p:sp>
+      <p:sp>
+        <p:nvSpPr>
+          <p:cNvPr id="15" name="Oval 14"/>
           <p:cNvSpPr/>
           <p:nvPr/>
         </p:nvSpPr>
         <p:spPr>
           <a:xfrm>
-            <a:off x="685800" y="3401568"/>
+            <a:off x="685800" y="3319272"/>
             <a:ext cx="384048" cy="384048"/>
           </a:xfrm>
           <a:prstGeom prst="ellipse">
@@ -10780,13 +11649,13 @@
       </p:sp>
       <p:sp>
         <p:nvSpPr>
-          <p:cNvPr id="15" name="TextBox 14"/>
-          <p:cNvSpPr txBox="1"/>
-          <p:nvPr/>
-        </p:nvSpPr>
-        <p:spPr>
-          <a:xfrm>
-            <a:off x="685800" y="3429000"/>
+          <p:cNvPr id="16" name="TextBox 15"/>
+          <p:cNvSpPr txBox="1"/>
+          <p:nvPr/>
+        </p:nvSpPr>
+        <p:spPr>
+          <a:xfrm>
+            <a:off x="685800" y="3346704"/>
             <a:ext cx="384048" cy="347472"/>
           </a:xfrm>
           <a:prstGeom prst="rect">
@@ -10822,13 +11691,13 @@
       </p:sp>
       <p:sp>
         <p:nvSpPr>
-          <p:cNvPr id="16" name="TextBox 15"/>
-          <p:cNvSpPr txBox="1"/>
-          <p:nvPr/>
-        </p:nvSpPr>
-        <p:spPr>
-          <a:xfrm>
-            <a:off x="1280160" y="3383280"/>
+          <p:cNvPr id="17" name="TextBox 16"/>
+          <p:cNvSpPr txBox="1"/>
+          <p:nvPr/>
+        </p:nvSpPr>
+        <p:spPr>
+          <a:xfrm>
+            <a:off x="1280160" y="3300984"/>
             <a:ext cx="10515600" cy="320040"/>
           </a:xfrm>
           <a:prstGeom prst="rect">
@@ -10857,20 +11726,20 @@
               </a:defRPr>
             </a:pPr>
             <a:r>
-              <a:t>Industry is moving toward AI-native telemetry</a:t>
-            </a:r>
-          </a:p>
-        </p:txBody>
-      </p:sp>
-      <p:sp>
-        <p:nvSpPr>
-          <p:cNvPr id="17" name="TextBox 16"/>
-          <p:cNvSpPr txBox="1"/>
-          <p:nvPr/>
-        </p:nvSpPr>
-        <p:spPr>
-          <a:xfrm>
-            <a:off x="1280160" y="3730752"/>
+              <a:t>Industry is already using these ideas</a:t>
+            </a:r>
+          </a:p>
+        </p:txBody>
+      </p:sp>
+      <p:sp>
+        <p:nvSpPr>
+          <p:cNvPr id="18" name="TextBox 17"/>
+          <p:cNvSpPr txBox="1"/>
+          <p:nvPr/>
+        </p:nvSpPr>
+        <p:spPr>
+          <a:xfrm>
+            <a:off x="1280160" y="3648456"/>
             <a:ext cx="10515600" cy="548640"/>
           </a:xfrm>
           <a:prstGeom prst="rect">
@@ -10899,20 +11768,20 @@
               </a:defRPr>
             </a:pPr>
             <a:r>
-              <a:t>Nokia and Ericsson are building telemetry platforms with embedded ML — autonomous, closed-loop, and data-mesh-driven architectures.</a:t>
-            </a:r>
-          </a:p>
-        </p:txBody>
-      </p:sp>
-      <p:sp>
-        <p:nvSpPr>
-          <p:cNvPr id="18" name="Oval 17"/>
+              <a:t>Companies such as Nokia and Ericsson are building more automated, ML-driven telemetry systems.</a:t>
+            </a:r>
+          </a:p>
+        </p:txBody>
+      </p:sp>
+      <p:sp>
+        <p:nvSpPr>
+          <p:cNvPr id="19" name="Oval 18"/>
           <p:cNvSpPr/>
           <p:nvPr/>
         </p:nvSpPr>
         <p:spPr>
           <a:xfrm>
-            <a:off x="685800" y="4407408"/>
+            <a:off x="685800" y="4306824"/>
             <a:ext cx="384048" cy="384048"/>
           </a:xfrm>
           <a:prstGeom prst="ellipse">
@@ -10949,13 +11818,13 @@
       </p:sp>
       <p:sp>
         <p:nvSpPr>
-          <p:cNvPr id="19" name="TextBox 18"/>
-          <p:cNvSpPr txBox="1"/>
-          <p:nvPr/>
-        </p:nvSpPr>
-        <p:spPr>
-          <a:xfrm>
-            <a:off x="685800" y="4434840"/>
+          <p:cNvPr id="20" name="TextBox 19"/>
+          <p:cNvSpPr txBox="1"/>
+          <p:nvPr/>
+        </p:nvSpPr>
+        <p:spPr>
+          <a:xfrm>
+            <a:off x="685800" y="4334256"/>
             <a:ext cx="384048" cy="347472"/>
           </a:xfrm>
           <a:prstGeom prst="rect">
@@ -10991,13 +11860,13 @@
       </p:sp>
       <p:sp>
         <p:nvSpPr>
-          <p:cNvPr id="20" name="TextBox 19"/>
-          <p:cNvSpPr txBox="1"/>
-          <p:nvPr/>
-        </p:nvSpPr>
-        <p:spPr>
-          <a:xfrm>
-            <a:off x="1280160" y="4389120"/>
+          <p:cNvPr id="21" name="TextBox 20"/>
+          <p:cNvSpPr txBox="1"/>
+          <p:nvPr/>
+        </p:nvSpPr>
+        <p:spPr>
+          <a:xfrm>
+            <a:off x="1280160" y="4288536"/>
             <a:ext cx="10515600" cy="320040"/>
           </a:xfrm>
           <a:prstGeom prst="rect">
@@ -11026,20 +11895,20 @@
               </a:defRPr>
             </a:pPr>
             <a:r>
-              <a:t>6G and GenAI will accelerate the transformation</a:t>
-            </a:r>
-          </a:p>
-        </p:txBody>
-      </p:sp>
-      <p:sp>
-        <p:nvSpPr>
-          <p:cNvPr id="21" name="TextBox 20"/>
-          <p:cNvSpPr txBox="1"/>
-          <p:nvPr/>
-        </p:nvSpPr>
-        <p:spPr>
-          <a:xfrm>
-            <a:off x="1280160" y="4736592"/>
+              <a:t>The field is still growing</a:t>
+            </a:r>
+          </a:p>
+        </p:txBody>
+      </p:sp>
+      <p:sp>
+        <p:nvSpPr>
+          <p:cNvPr id="22" name="TextBox 21"/>
+          <p:cNvSpPr txBox="1"/>
+          <p:nvPr/>
+        </p:nvSpPr>
+        <p:spPr>
+          <a:xfrm>
+            <a:off x="1280160" y="4636008"/>
             <a:ext cx="10515600" cy="548640"/>
           </a:xfrm>
           <a:prstGeom prst="rect">
@@ -11068,20 +11937,20 @@
               </a:defRPr>
             </a:pPr>
             <a:r>
-              <a:t>Next-generation networks will require ML as a native function, while LLMs promise to democratize telemetry analysis through natural language interfaces.</a:t>
-            </a:r>
-          </a:p>
-        </p:txBody>
-      </p:sp>
-      <p:sp>
-        <p:nvSpPr>
-          <p:cNvPr id="22" name="Oval 21"/>
+              <a:t>6G, digital twins, and generative AI may make telemetry smarter and easier to use.</a:t>
+            </a:r>
+          </a:p>
+        </p:txBody>
+      </p:sp>
+      <p:sp>
+        <p:nvSpPr>
+          <p:cNvPr id="23" name="Oval 22"/>
           <p:cNvSpPr/>
           <p:nvPr/>
         </p:nvSpPr>
         <p:spPr>
           <a:xfrm>
-            <a:off x="685800" y="5413248"/>
+            <a:off x="685800" y="5294376"/>
             <a:ext cx="384048" cy="384048"/>
           </a:xfrm>
           <a:prstGeom prst="ellipse">
@@ -11118,13 +11987,13 @@
       </p:sp>
       <p:sp>
         <p:nvSpPr>
-          <p:cNvPr id="23" name="TextBox 22"/>
-          <p:cNvSpPr txBox="1"/>
-          <p:nvPr/>
-        </p:nvSpPr>
-        <p:spPr>
-          <a:xfrm>
-            <a:off x="685800" y="5440680"/>
+          <p:cNvPr id="24" name="TextBox 23"/>
+          <p:cNvSpPr txBox="1"/>
+          <p:nvPr/>
+        </p:nvSpPr>
+        <p:spPr>
+          <a:xfrm>
+            <a:off x="685800" y="5321808"/>
             <a:ext cx="384048" cy="347472"/>
           </a:xfrm>
           <a:prstGeom prst="rect">
@@ -11160,13 +12029,13 @@
       </p:sp>
       <p:sp>
         <p:nvSpPr>
-          <p:cNvPr id="24" name="TextBox 23"/>
-          <p:cNvSpPr txBox="1"/>
-          <p:nvPr/>
-        </p:nvSpPr>
-        <p:spPr>
-          <a:xfrm>
-            <a:off x="1280160" y="5394960"/>
+          <p:cNvPr id="25" name="TextBox 24"/>
+          <p:cNvSpPr txBox="1"/>
+          <p:nvPr/>
+        </p:nvSpPr>
+        <p:spPr>
+          <a:xfrm>
+            <a:off x="1280160" y="5276088"/>
             <a:ext cx="10515600" cy="320040"/>
           </a:xfrm>
           <a:prstGeom prst="rect">
@@ -11195,20 +12064,20 @@
               </a:defRPr>
             </a:pPr>
             <a:r>
-              <a:t>Key challenges remain: scalability, explainability, and generalization</a:t>
-            </a:r>
-          </a:p>
-        </p:txBody>
-      </p:sp>
-      <p:sp>
-        <p:nvSpPr>
-          <p:cNvPr id="25" name="TextBox 24"/>
-          <p:cNvSpPr txBox="1"/>
-          <p:nvPr/>
-        </p:nvSpPr>
-        <p:spPr>
-          <a:xfrm>
-            <a:off x="1280160" y="5742432"/>
+              <a:t>The hardest part is deployment</a:t>
+            </a:r>
+          </a:p>
+        </p:txBody>
+      </p:sp>
+      <p:sp>
+        <p:nvSpPr>
+          <p:cNvPr id="26" name="TextBox 25"/>
+          <p:cNvSpPr txBox="1"/>
+          <p:nvPr/>
+        </p:nvSpPr>
+        <p:spPr>
+          <a:xfrm>
+            <a:off x="1280160" y="5623560"/>
             <a:ext cx="10515600" cy="548640"/>
           </a:xfrm>
           <a:prstGeom prst="rect">
@@ -11237,14 +12106,14 @@
               </a:defRPr>
             </a:pPr>
             <a:r>
-              <a:t>Real-world adoption requires solving data scarcity, concept drift, real-time inference, and cross-domain transfer.</a:t>
-            </a:r>
-          </a:p>
-        </p:txBody>
-      </p:sp>
-      <p:sp>
-        <p:nvSpPr>
-          <p:cNvPr id="26" name="TextBox 25"/>
+              <a:t>Real-world success still depends on trustworthy models, good data, and systems that scale.</a:t>
+            </a:r>
+          </a:p>
+        </p:txBody>
+      </p:sp>
+      <p:sp>
+        <p:nvSpPr>
+          <p:cNvPr id="27" name="TextBox 26"/>
           <p:cNvSpPr txBox="1"/>
           <p:nvPr/>
         </p:nvSpPr>
@@ -11286,7 +12155,7 @@
       </p:sp>
       <p:sp>
         <p:nvSpPr>
-          <p:cNvPr id="27" name="TextBox 26"/>
+          <p:cNvPr id="28" name="TextBox 27"/>
           <p:cNvSpPr txBox="1"/>
           <p:nvPr/>
         </p:nvSpPr>
@@ -12092,7 +12961,7 @@
               </a:defRPr>
             </a:pPr>
             <a:r>
-              <a:t>What is Network Telemetry?</a:t>
+              <a:t>What Network Telemetry Means</a:t>
             </a:r>
           </a:p>
         </p:txBody>
@@ -12218,7 +13087,7 @@
               </a:defRPr>
             </a:pPr>
             <a:r>
-              <a:t>Why ML for Network Telemetry?</a:t>
+              <a:t>Why Machine Learning Helps</a:t>
             </a:r>
           </a:p>
         </p:txBody>
@@ -12344,7 +13213,7 @@
               </a:defRPr>
             </a:pPr>
             <a:r>
-              <a:t>ML Methods for Anomaly Detection</a:t>
+              <a:t>Anomaly Detection Methods</a:t>
             </a:r>
           </a:p>
         </p:txBody>
@@ -12470,7 +13339,7 @@
               </a:defRPr>
             </a:pPr>
             <a:r>
-              <a:t>Anomaly Detection: Key Findings</a:t>
+              <a:t>Main Lessons from Anomaly Detection</a:t>
             </a:r>
           </a:p>
         </p:txBody>
@@ -12596,7 +13465,7 @@
               </a:defRPr>
             </a:pPr>
             <a:r>
-              <a:t>ML for Performance Prediction</a:t>
+              <a:t>Performance Prediction</a:t>
             </a:r>
           </a:p>
         </p:txBody>
@@ -12722,7 +13591,7 @@
               </a:defRPr>
             </a:pPr>
             <a:r>
-              <a:t>ML for QoS Optimization</a:t>
+              <a:t>QoS Optimization</a:t>
             </a:r>
           </a:p>
         </p:txBody>
@@ -12848,7 +13717,7 @@
               </a:defRPr>
             </a:pPr>
             <a:r>
-              <a:t>Performance &amp; QoS: Key Findings</a:t>
+              <a:t>Main Lessons for Performance &amp; QoS</a:t>
             </a:r>
           </a:p>
         </p:txBody>
@@ -12974,7 +13843,7 @@
               </a:defRPr>
             </a:pPr>
             <a:r>
-              <a:t>Telemetry Data Pipeline &amp; Architecture</a:t>
+              <a:t>Telemetry Pipeline</a:t>
             </a:r>
           </a:p>
         </p:txBody>
@@ -13100,7 +13969,7 @@
               </a:defRPr>
             </a:pPr>
             <a:r>
-              <a:t>Industry: Nokia's Telemetry Solutions</a:t>
+              <a:t>Nokia Example</a:t>
             </a:r>
           </a:p>
         </p:txBody>
@@ -13226,7 +14095,7 @@
               </a:defRPr>
             </a:pPr>
             <a:r>
-              <a:t>Industry: Ericsson's AI-Driven Telemetry</a:t>
+              <a:t>Ericsson Example</a:t>
             </a:r>
           </a:p>
         </p:txBody>
@@ -13352,7 +14221,7 @@
               </a:defRPr>
             </a:pPr>
             <a:r>
-              <a:t>Emerging Trends: 6G &amp; GenAI for Telemetry</a:t>
+              <a:t>Future Trends: 6G &amp; GenAI</a:t>
             </a:r>
           </a:p>
         </p:txBody>
@@ -13478,7 +14347,7 @@
               </a:defRPr>
             </a:pPr>
             <a:r>
-              <a:t>Open Challenges &amp; Future Directions</a:t>
+              <a:t>Open Challenges</a:t>
             </a:r>
           </a:p>
         </p:txBody>
@@ -13604,7 +14473,7 @@
               </a:defRPr>
             </a:pPr>
             <a:r>
-              <a:t>Conclusion &amp; Key Takeaways</a:t>
+              <a:t>Conclusion</a:t>
             </a:r>
           </a:p>
         </p:txBody>
@@ -14908,7 +15777,7 @@
               </a:defRPr>
             </a:pPr>
             <a:r>
-              <a:t>Real-time, automated collection and streaming of network data</a:t>
+              <a:t>The network continuously reports what is happening inside it</a:t>
             </a:r>
           </a:p>
         </p:txBody>
@@ -14982,9 +15851,9 @@
                 <a:spcPts val="200"/>
               </a:spcBef>
               <a:spcAft>
-                <a:spcPts val="800"/>
-              </a:spcAft>
-              <a:defRPr sz="1600" b="0">
+                <a:spcPts val="1000"/>
+              </a:spcAft>
+              <a:defRPr sz="1700" b="0">
                 <a:solidFill>
                   <a:srgbClr val="FFFFFF"/>
                 </a:solidFill>
@@ -14992,7 +15861,7 @@
               </a:defRPr>
             </a:pPr>
             <a:r>
-              <a:t>Network telemetry = automated, real-time collection of operational data from network devices and infrastructure</a:t>
+              <a:t>It is the live data that routers, switches, and links send about their health and traffic.</a:t>
             </a:r>
           </a:p>
           <a:p>
@@ -15001,9 +15870,9 @@
                 <a:spcPts val="200"/>
               </a:spcBef>
               <a:spcAft>
-                <a:spcPts val="800"/>
-              </a:spcAft>
-              <a:defRPr sz="1600" b="0">
+                <a:spcPts val="1000"/>
+              </a:spcAft>
+              <a:defRPr sz="1700" b="0">
                 <a:solidFill>
                   <a:srgbClr val="FFFFFF"/>
                 </a:solidFill>
@@ -15011,7 +15880,7 @@
               </a:defRPr>
             </a:pPr>
             <a:r>
-              <a:t>Data sources include flow statistics, packet traces, SNMP counters, syslog, and in-band network telemetry (INT)</a:t>
+              <a:t>It tells us things like delay, packet loss, throughput, CPU use, and errors.</a:t>
             </a:r>
           </a:p>
           <a:p>
@@ -15020,9 +15889,9 @@
                 <a:spcPts val="200"/>
               </a:spcBef>
               <a:spcAft>
-                <a:spcPts val="800"/>
-              </a:spcAft>
-              <a:defRPr sz="1600" b="0">
+                <a:spcPts val="1000"/>
+              </a:spcAft>
+              <a:defRPr sz="1700" b="0">
                 <a:solidFill>
                   <a:srgbClr val="FFFFFF"/>
                 </a:solidFill>
@@ -15030,7 +15899,7 @@
               </a:defRPr>
             </a:pPr>
             <a:r>
-              <a:t>Evolved from traditional polling-based monitoring (SNMP) to push-based streaming models</a:t>
+              <a:t>Modern systems stream this data automatically instead of waiting for slow manual checks.</a:t>
             </a:r>
           </a:p>
           <a:p>
@@ -15039,9 +15908,9 @@
                 <a:spcPts val="200"/>
               </a:spcBef>
               <a:spcAft>
-                <a:spcPts val="800"/>
-              </a:spcAft>
-              <a:defRPr sz="1600" b="0">
+                <a:spcPts val="1000"/>
+              </a:spcAft>
+              <a:defRPr sz="1700" b="0">
                 <a:solidFill>
                   <a:srgbClr val="FFFFFF"/>
                 </a:solidFill>
@@ -15049,7 +15918,7 @@
               </a:defRPr>
             </a:pPr>
             <a:r>
-              <a:t>Enables fine-grained visibility into network state: latency, jitter, packet loss, throughput, error rates</a:t>
+              <a:t>That gives operators a clearer and faster view of what the network is doing.</a:t>
             </a:r>
           </a:p>
           <a:p>
@@ -15058,9 +15927,9 @@
                 <a:spcPts val="200"/>
               </a:spcBef>
               <a:spcAft>
-                <a:spcPts val="800"/>
-              </a:spcAft>
-              <a:defRPr sz="1600" b="0">
+                <a:spcPts val="1000"/>
+              </a:spcAft>
+              <a:defRPr sz="1700" b="0">
                 <a:solidFill>
                   <a:srgbClr val="FFFFFF"/>
                 </a:solidFill>
@@ -15068,51 +15937,72 @@
               </a:defRPr>
             </a:pPr>
             <a:r>
-              <a:t>Foundation for closed-loop network automation — observe, orient, decide, act</a:t>
-            </a:r>
-          </a:p>
-          <a:p>
-            <a:pPr>
-              <a:spcBef>
-                <a:spcPts val="200"/>
-              </a:spcBef>
-              <a:spcAft>
-                <a:spcPts val="800"/>
-              </a:spcAft>
-              <a:defRPr sz="1600" b="0">
-                <a:solidFill>
-                  <a:srgbClr val="FFFFFF"/>
-                </a:solidFill>
-                <a:latin typeface="Calibri"/>
-              </a:defRPr>
-            </a:pPr>
-            <a:r>
-              <a:t>Critical for modern networks: 5G, SDN/NFV, cloud-native, and multi-domain environments</a:t>
-            </a:r>
-          </a:p>
-        </p:txBody>
-      </p:sp>
-      <p:sp>
-        <p:nvSpPr>
-          <p:cNvPr id="8" name="Rounded Rectangle 7"/>
+              <a:t>Telemetry is the input that ML uses to spot trouble and predict future problems.</a:t>
+            </a:r>
+          </a:p>
+        </p:txBody>
+      </p:sp>
+      <p:sp>
+        <p:nvSpPr>
+          <p:cNvPr id="8" name="TextBox 7"/>
+          <p:cNvSpPr txBox="1"/>
+          <p:nvPr/>
+        </p:nvSpPr>
+        <p:spPr>
+          <a:xfrm>
+            <a:off x="6903720" y="1645920"/>
+            <a:ext cx="4389120" cy="365760"/>
+          </a:xfrm>
+          <a:prstGeom prst="rect">
+            <a:avLst/>
+          </a:prstGeom>
+          <a:noFill/>
+        </p:spPr>
+        <p:txBody>
+          <a:bodyPr wrap="square">
+            <a:spAutoFit/>
+          </a:bodyPr>
+          <a:lstStyle/>
+          <a:p>
+            <a:pPr algn="ctr">
+              <a:lnSpc>
+                <a:spcPts val="1920"/>
+              </a:lnSpc>
+              <a:spcAft>
+                <a:spcPts val="0"/>
+              </a:spcAft>
+              <a:defRPr sz="1600" b="1">
+                <a:solidFill>
+                  <a:srgbClr val="009FFD"/>
+                </a:solidFill>
+                <a:latin typeface="Calibri"/>
+              </a:defRPr>
+            </a:pPr>
+            <a:r>
+              <a:t>Simple View</a:t>
+            </a:r>
+          </a:p>
+        </p:txBody>
+      </p:sp>
+      <p:sp>
+        <p:nvSpPr>
+          <p:cNvPr id="9" name="Oval 8"/>
           <p:cNvSpPr/>
           <p:nvPr/>
         </p:nvSpPr>
         <p:spPr>
           <a:xfrm>
-            <a:off x="6766560" y="1554480"/>
-            <a:ext cx="4937760" cy="4114800"/>
-          </a:xfrm>
-          <a:prstGeom prst="roundRect">
+            <a:off x="7086600" y="2240280"/>
+            <a:ext cx="960120" cy="960120"/>
+          </a:xfrm>
+          <a:prstGeom prst="ellipse">
             <a:avLst/>
           </a:prstGeom>
           <a:solidFill>
-            <a:srgbClr val="141832"/>
+            <a:srgbClr val="009FFD"/>
           </a:solidFill>
-          <a:ln w="19050">
-            <a:solidFill>
-              <a:srgbClr val="009FFD"/>
-            </a:solidFill>
+          <a:ln>
+            <a:noFill/>
           </a:ln>
         </p:spPr>
         <p:style>
@@ -15139,14 +16029,474 @@
       </p:sp>
       <p:sp>
         <p:nvSpPr>
-          <p:cNvPr id="9" name="TextBox 8"/>
-          <p:cNvSpPr txBox="1"/>
-          <p:nvPr/>
-        </p:nvSpPr>
-        <p:spPr>
-          <a:xfrm>
-            <a:off x="7040880" y="1737360"/>
-            <a:ext cx="4389120" cy="457200"/>
+          <p:cNvPr id="10" name="TextBox 9"/>
+          <p:cNvSpPr txBox="1"/>
+          <p:nvPr/>
+        </p:nvSpPr>
+        <p:spPr>
+          <a:xfrm>
+            <a:off x="7086600" y="2267712"/>
+            <a:ext cx="960120" cy="932688"/>
+          </a:xfrm>
+          <a:prstGeom prst="rect">
+            <a:avLst/>
+          </a:prstGeom>
+          <a:noFill/>
+        </p:spPr>
+        <p:txBody>
+          <a:bodyPr wrap="square">
+            <a:spAutoFit/>
+          </a:bodyPr>
+          <a:lstStyle/>
+          <a:p>
+            <a:pPr algn="ctr">
+              <a:lnSpc>
+                <a:spcPts val="2400"/>
+              </a:lnSpc>
+              <a:spcAft>
+                <a:spcPts val="0"/>
+              </a:spcAft>
+              <a:defRPr sz="2000" b="1">
+                <a:solidFill>
+                  <a:srgbClr val="FFFFFF"/>
+                </a:solidFill>
+                <a:latin typeface="Calibri"/>
+              </a:defRPr>
+            </a:pPr>
+          </a:p>
+        </p:txBody>
+      </p:sp>
+      <p:sp>
+        <p:nvSpPr>
+          <p:cNvPr id="11" name="TextBox 10"/>
+          <p:cNvSpPr txBox="1"/>
+          <p:nvPr/>
+        </p:nvSpPr>
+        <p:spPr>
+          <a:xfrm>
+            <a:off x="7086600" y="2542032"/>
+            <a:ext cx="960120" cy="320040"/>
+          </a:xfrm>
+          <a:prstGeom prst="rect">
+            <a:avLst/>
+          </a:prstGeom>
+          <a:noFill/>
+        </p:spPr>
+        <p:txBody>
+          <a:bodyPr wrap="square">
+            <a:spAutoFit/>
+          </a:bodyPr>
+          <a:lstStyle/>
+          <a:p>
+            <a:pPr algn="ctr">
+              <a:lnSpc>
+                <a:spcPts val="1560"/>
+              </a:lnSpc>
+              <a:spcAft>
+                <a:spcPts val="0"/>
+              </a:spcAft>
+              <a:defRPr sz="1300" b="1">
+                <a:solidFill>
+                  <a:srgbClr val="FFFFFF"/>
+                </a:solidFill>
+                <a:latin typeface="Calibri"/>
+              </a:defRPr>
+            </a:pPr>
+            <a:r>
+              <a:t>Devices</a:t>
+            </a:r>
+          </a:p>
+        </p:txBody>
+      </p:sp>
+      <p:sp>
+        <p:nvSpPr>
+          <p:cNvPr id="12" name="Oval 11"/>
+          <p:cNvSpPr/>
+          <p:nvPr/>
+        </p:nvSpPr>
+        <p:spPr>
+          <a:xfrm>
+            <a:off x="8641080" y="2240280"/>
+            <a:ext cx="960120" cy="960120"/>
+          </a:xfrm>
+          <a:prstGeom prst="ellipse">
+            <a:avLst/>
+          </a:prstGeom>
+          <a:solidFill>
+            <a:srgbClr val="00C9A7"/>
+          </a:solidFill>
+          <a:ln>
+            <a:noFill/>
+          </a:ln>
+        </p:spPr>
+        <p:style>
+          <a:lnRef idx="1">
+            <a:schemeClr val="accent1"/>
+          </a:lnRef>
+          <a:fillRef idx="3">
+            <a:schemeClr val="accent1"/>
+          </a:fillRef>
+          <a:effectRef idx="2">
+            <a:schemeClr val="accent1"/>
+          </a:effectRef>
+          <a:fontRef idx="minor">
+            <a:schemeClr val="lt1"/>
+          </a:fontRef>
+        </p:style>
+        <p:txBody>
+          <a:bodyPr rtlCol="0" anchor="ctr"/>
+          <a:lstStyle/>
+          <a:p>
+            <a:pPr algn="ctr"/>
+          </a:p>
+        </p:txBody>
+      </p:sp>
+      <p:sp>
+        <p:nvSpPr>
+          <p:cNvPr id="13" name="TextBox 12"/>
+          <p:cNvSpPr txBox="1"/>
+          <p:nvPr/>
+        </p:nvSpPr>
+        <p:spPr>
+          <a:xfrm>
+            <a:off x="8641080" y="2267712"/>
+            <a:ext cx="960120" cy="932688"/>
+          </a:xfrm>
+          <a:prstGeom prst="rect">
+            <a:avLst/>
+          </a:prstGeom>
+          <a:noFill/>
+        </p:spPr>
+        <p:txBody>
+          <a:bodyPr wrap="square">
+            <a:spAutoFit/>
+          </a:bodyPr>
+          <a:lstStyle/>
+          <a:p>
+            <a:pPr algn="ctr">
+              <a:lnSpc>
+                <a:spcPts val="2400"/>
+              </a:lnSpc>
+              <a:spcAft>
+                <a:spcPts val="0"/>
+              </a:spcAft>
+              <a:defRPr sz="2000" b="1">
+                <a:solidFill>
+                  <a:srgbClr val="FFFFFF"/>
+                </a:solidFill>
+                <a:latin typeface="Calibri"/>
+              </a:defRPr>
+            </a:pPr>
+          </a:p>
+        </p:txBody>
+      </p:sp>
+      <p:sp>
+        <p:nvSpPr>
+          <p:cNvPr id="14" name="TextBox 13"/>
+          <p:cNvSpPr txBox="1"/>
+          <p:nvPr/>
+        </p:nvSpPr>
+        <p:spPr>
+          <a:xfrm>
+            <a:off x="8641080" y="2542032"/>
+            <a:ext cx="960120" cy="320040"/>
+          </a:xfrm>
+          <a:prstGeom prst="rect">
+            <a:avLst/>
+          </a:prstGeom>
+          <a:noFill/>
+        </p:spPr>
+        <p:txBody>
+          <a:bodyPr wrap="square">
+            <a:spAutoFit/>
+          </a:bodyPr>
+          <a:lstStyle/>
+          <a:p>
+            <a:pPr algn="ctr">
+              <a:lnSpc>
+                <a:spcPts val="1560"/>
+              </a:lnSpc>
+              <a:spcAft>
+                <a:spcPts val="0"/>
+              </a:spcAft>
+              <a:defRPr sz="1300" b="1">
+                <a:solidFill>
+                  <a:srgbClr val="FFFFFF"/>
+                </a:solidFill>
+                <a:latin typeface="Calibri"/>
+              </a:defRPr>
+            </a:pPr>
+            <a:r>
+              <a:t>Data</a:t>
+            </a:r>
+          </a:p>
+        </p:txBody>
+      </p:sp>
+      <p:sp>
+        <p:nvSpPr>
+          <p:cNvPr id="15" name="Oval 14"/>
+          <p:cNvSpPr/>
+          <p:nvPr/>
+        </p:nvSpPr>
+        <p:spPr>
+          <a:xfrm>
+            <a:off x="10195560" y="2240280"/>
+            <a:ext cx="960120" cy="960120"/>
+          </a:xfrm>
+          <a:prstGeom prst="ellipse">
+            <a:avLst/>
+          </a:prstGeom>
+          <a:solidFill>
+            <a:srgbClr val="845EC2"/>
+          </a:solidFill>
+          <a:ln>
+            <a:noFill/>
+          </a:ln>
+        </p:spPr>
+        <p:style>
+          <a:lnRef idx="1">
+            <a:schemeClr val="accent1"/>
+          </a:lnRef>
+          <a:fillRef idx="3">
+            <a:schemeClr val="accent1"/>
+          </a:fillRef>
+          <a:effectRef idx="2">
+            <a:schemeClr val="accent1"/>
+          </a:effectRef>
+          <a:fontRef idx="minor">
+            <a:schemeClr val="lt1"/>
+          </a:fontRef>
+        </p:style>
+        <p:txBody>
+          <a:bodyPr rtlCol="0" anchor="ctr"/>
+          <a:lstStyle/>
+          <a:p>
+            <a:pPr algn="ctr"/>
+          </a:p>
+        </p:txBody>
+      </p:sp>
+      <p:sp>
+        <p:nvSpPr>
+          <p:cNvPr id="16" name="TextBox 15"/>
+          <p:cNvSpPr txBox="1"/>
+          <p:nvPr/>
+        </p:nvSpPr>
+        <p:spPr>
+          <a:xfrm>
+            <a:off x="10195560" y="2267712"/>
+            <a:ext cx="960120" cy="932688"/>
+          </a:xfrm>
+          <a:prstGeom prst="rect">
+            <a:avLst/>
+          </a:prstGeom>
+          <a:noFill/>
+        </p:spPr>
+        <p:txBody>
+          <a:bodyPr wrap="square">
+            <a:spAutoFit/>
+          </a:bodyPr>
+          <a:lstStyle/>
+          <a:p>
+            <a:pPr algn="ctr">
+              <a:lnSpc>
+                <a:spcPts val="2400"/>
+              </a:lnSpc>
+              <a:spcAft>
+                <a:spcPts val="0"/>
+              </a:spcAft>
+              <a:defRPr sz="2000" b="1">
+                <a:solidFill>
+                  <a:srgbClr val="FFFFFF"/>
+                </a:solidFill>
+                <a:latin typeface="Calibri"/>
+              </a:defRPr>
+            </a:pPr>
+          </a:p>
+        </p:txBody>
+      </p:sp>
+      <p:sp>
+        <p:nvSpPr>
+          <p:cNvPr id="17" name="TextBox 16"/>
+          <p:cNvSpPr txBox="1"/>
+          <p:nvPr/>
+        </p:nvSpPr>
+        <p:spPr>
+          <a:xfrm>
+            <a:off x="10195560" y="2542032"/>
+            <a:ext cx="960120" cy="320040"/>
+          </a:xfrm>
+          <a:prstGeom prst="rect">
+            <a:avLst/>
+          </a:prstGeom>
+          <a:noFill/>
+        </p:spPr>
+        <p:txBody>
+          <a:bodyPr wrap="square">
+            <a:spAutoFit/>
+          </a:bodyPr>
+          <a:lstStyle/>
+          <a:p>
+            <a:pPr algn="ctr">
+              <a:lnSpc>
+                <a:spcPts val="1560"/>
+              </a:lnSpc>
+              <a:spcAft>
+                <a:spcPts val="0"/>
+              </a:spcAft>
+              <a:defRPr sz="1300" b="1">
+                <a:solidFill>
+                  <a:srgbClr val="FFFFFF"/>
+                </a:solidFill>
+                <a:latin typeface="Calibri"/>
+              </a:defRPr>
+            </a:pPr>
+            <a:r>
+              <a:t>ML</a:t>
+            </a:r>
+          </a:p>
+        </p:txBody>
+      </p:sp>
+      <p:sp>
+        <p:nvSpPr>
+          <p:cNvPr id="18" name="Right Arrow 17"/>
+          <p:cNvSpPr/>
+          <p:nvPr/>
+        </p:nvSpPr>
+        <p:spPr>
+          <a:xfrm>
+            <a:off x="8092440" y="2542032"/>
+            <a:ext cx="411480" cy="201168"/>
+          </a:xfrm>
+          <a:prstGeom prst="rightArrow">
+            <a:avLst/>
+          </a:prstGeom>
+          <a:solidFill>
+            <a:srgbClr val="999999"/>
+          </a:solidFill>
+          <a:ln>
+            <a:noFill/>
+          </a:ln>
+        </p:spPr>
+        <p:style>
+          <a:lnRef idx="1">
+            <a:schemeClr val="accent1"/>
+          </a:lnRef>
+          <a:fillRef idx="3">
+            <a:schemeClr val="accent1"/>
+          </a:fillRef>
+          <a:effectRef idx="2">
+            <a:schemeClr val="accent1"/>
+          </a:effectRef>
+          <a:fontRef idx="minor">
+            <a:schemeClr val="lt1"/>
+          </a:fontRef>
+        </p:style>
+        <p:txBody>
+          <a:bodyPr rtlCol="0" anchor="ctr"/>
+          <a:lstStyle/>
+          <a:p>
+            <a:pPr algn="ctr"/>
+          </a:p>
+        </p:txBody>
+      </p:sp>
+      <p:sp>
+        <p:nvSpPr>
+          <p:cNvPr id="19" name="Right Arrow 18"/>
+          <p:cNvSpPr/>
+          <p:nvPr/>
+        </p:nvSpPr>
+        <p:spPr>
+          <a:xfrm>
+            <a:off x="9646920" y="2542032"/>
+            <a:ext cx="411480" cy="201168"/>
+          </a:xfrm>
+          <a:prstGeom prst="rightArrow">
+            <a:avLst/>
+          </a:prstGeom>
+          <a:solidFill>
+            <a:srgbClr val="999999"/>
+          </a:solidFill>
+          <a:ln>
+            <a:noFill/>
+          </a:ln>
+        </p:spPr>
+        <p:style>
+          <a:lnRef idx="1">
+            <a:schemeClr val="accent1"/>
+          </a:lnRef>
+          <a:fillRef idx="3">
+            <a:schemeClr val="accent1"/>
+          </a:fillRef>
+          <a:effectRef idx="2">
+            <a:schemeClr val="accent1"/>
+          </a:effectRef>
+          <a:fontRef idx="minor">
+            <a:schemeClr val="lt1"/>
+          </a:fontRef>
+        </p:style>
+        <p:txBody>
+          <a:bodyPr rtlCol="0" anchor="ctr"/>
+          <a:lstStyle/>
+          <a:p>
+            <a:pPr algn="ctr"/>
+          </a:p>
+        </p:txBody>
+      </p:sp>
+      <p:sp>
+        <p:nvSpPr>
+          <p:cNvPr id="20" name="Rounded Rectangle 19"/>
+          <p:cNvSpPr/>
+          <p:nvPr/>
+        </p:nvSpPr>
+        <p:spPr>
+          <a:xfrm>
+            <a:off x="6812280" y="3703320"/>
+            <a:ext cx="4983480" cy="1828800"/>
+          </a:xfrm>
+          <a:prstGeom prst="roundRect">
+            <a:avLst/>
+          </a:prstGeom>
+          <a:solidFill>
+            <a:srgbClr val="141832"/>
+          </a:solidFill>
+          <a:ln w="17780">
+            <a:solidFill>
+              <a:srgbClr val="009FFD"/>
+            </a:solidFill>
+          </a:ln>
+        </p:spPr>
+        <p:style>
+          <a:lnRef idx="1">
+            <a:schemeClr val="accent1"/>
+          </a:lnRef>
+          <a:fillRef idx="3">
+            <a:schemeClr val="accent1"/>
+          </a:fillRef>
+          <a:effectRef idx="2">
+            <a:schemeClr val="accent1"/>
+          </a:effectRef>
+          <a:fontRef idx="minor">
+            <a:schemeClr val="lt1"/>
+          </a:fontRef>
+        </p:style>
+        <p:txBody>
+          <a:bodyPr rtlCol="0" anchor="ctr"/>
+          <a:lstStyle/>
+          <a:p>
+            <a:pPr algn="ctr"/>
+          </a:p>
+        </p:txBody>
+      </p:sp>
+      <p:sp>
+        <p:nvSpPr>
+          <p:cNvPr id="21" name="TextBox 20"/>
+          <p:cNvSpPr txBox="1"/>
+          <p:nvPr/>
+        </p:nvSpPr>
+        <p:spPr>
+          <a:xfrm>
+            <a:off x="6976872" y="3840480"/>
+            <a:ext cx="4654296" cy="320040"/>
           </a:xfrm>
           <a:prstGeom prst="rect">
             <a:avLst/>
@@ -15174,41 +16524,41 @@
               </a:defRPr>
             </a:pPr>
             <a:r>
-              <a:t>Key Telemetry Data Types</a:t>
-            </a:r>
-          </a:p>
-        </p:txBody>
-      </p:sp>
-      <p:sp>
-        <p:nvSpPr>
-          <p:cNvPr id="10" name="TextBox 9"/>
-          <p:cNvSpPr txBox="1"/>
-          <p:nvPr/>
-        </p:nvSpPr>
-        <p:spPr>
-          <a:xfrm>
-            <a:off x="7040880" y="2286000"/>
-            <a:ext cx="4389120" cy="3200400"/>
-          </a:xfrm>
-          <a:prstGeom prst="rect">
-            <a:avLst/>
-          </a:prstGeom>
-          <a:noFill/>
-        </p:spPr>
-        <p:txBody>
-          <a:bodyPr wrap="square">
-            <a:spAutoFit/>
-          </a:bodyPr>
-          <a:lstStyle/>
-          <a:p>
-            <a:pPr>
-              <a:spcBef>
-                <a:spcPts val="200"/>
-              </a:spcBef>
-              <a:spcAft>
-                <a:spcPts val="600"/>
-              </a:spcAft>
-              <a:defRPr sz="1300" b="0">
+              <a:t>Examples of Telemetry Data</a:t>
+            </a:r>
+          </a:p>
+        </p:txBody>
+      </p:sp>
+      <p:sp>
+        <p:nvSpPr>
+          <p:cNvPr id="22" name="TextBox 21"/>
+          <p:cNvSpPr txBox="1"/>
+          <p:nvPr/>
+        </p:nvSpPr>
+        <p:spPr>
+          <a:xfrm>
+            <a:off x="6976872" y="4206240"/>
+            <a:ext cx="4654296" cy="1188720"/>
+          </a:xfrm>
+          <a:prstGeom prst="rect">
+            <a:avLst/>
+          </a:prstGeom>
+          <a:noFill/>
+        </p:spPr>
+        <p:txBody>
+          <a:bodyPr wrap="square">
+            <a:spAutoFit/>
+          </a:bodyPr>
+          <a:lstStyle/>
+          <a:p>
+            <a:pPr algn="l">
+              <a:lnSpc>
+                <a:spcPts val="1820"/>
+              </a:lnSpc>
+              <a:spcAft>
+                <a:spcPts val="0"/>
+              </a:spcAft>
+              <a:defRPr sz="1400" b="0">
                 <a:solidFill>
                   <a:srgbClr val="CCCCCC"/>
                 </a:solidFill>
@@ -15216,90 +16566,30 @@
               </a:defRPr>
             </a:pPr>
             <a:r>
-              <a:t>Flow Statistics — NetFlow/IPFIX records of traffic flows</a:t>
-            </a:r>
-          </a:p>
-          <a:p>
-            <a:pPr>
-              <a:spcBef>
-                <a:spcPts val="200"/>
-              </a:spcBef>
-              <a:spcAft>
-                <a:spcPts val="600"/>
-              </a:spcAft>
-              <a:defRPr sz="1300" b="0">
-                <a:solidFill>
-                  <a:srgbClr val="CCCCCC"/>
-                </a:solidFill>
-                <a:latin typeface="Calibri"/>
-              </a:defRPr>
-            </a:pPr>
-            <a:r>
-              <a:t>Packet Traces — Full or sampled packet captures</a:t>
-            </a:r>
-          </a:p>
-          <a:p>
-            <a:pPr>
-              <a:spcBef>
-                <a:spcPts val="200"/>
-              </a:spcBef>
-              <a:spcAft>
-                <a:spcPts val="600"/>
-              </a:spcAft>
-              <a:defRPr sz="1300" b="0">
-                <a:solidFill>
-                  <a:srgbClr val="CCCCCC"/>
-                </a:solidFill>
-                <a:latin typeface="Calibri"/>
-              </a:defRPr>
-            </a:pPr>
-            <a:r>
-              <a:t>In-Band Telemetry (INT) — Hop-by-hop metadata embedded in packets</a:t>
-            </a:r>
-          </a:p>
-          <a:p>
-            <a:pPr>
-              <a:spcBef>
-                <a:spcPts val="200"/>
-              </a:spcBef>
-              <a:spcAft>
-                <a:spcPts val="600"/>
-              </a:spcAft>
-              <a:defRPr sz="1300" b="0">
-                <a:solidFill>
-                  <a:srgbClr val="CCCCCC"/>
-                </a:solidFill>
-                <a:latin typeface="Calibri"/>
-              </a:defRPr>
-            </a:pPr>
-            <a:r>
-              <a:t>Device Metrics — CPU, memory, interface counters via gNMI/gRPC</a:t>
-            </a:r>
-          </a:p>
-          <a:p>
-            <a:pPr>
-              <a:spcBef>
-                <a:spcPts val="200"/>
-              </a:spcBef>
-              <a:spcAft>
-                <a:spcPts val="600"/>
-              </a:spcAft>
-              <a:defRPr sz="1300" b="0">
-                <a:solidFill>
-                  <a:srgbClr val="CCCCCC"/>
-                </a:solidFill>
-                <a:latin typeface="Calibri"/>
-              </a:defRPr>
-            </a:pPr>
-            <a:r>
-              <a:t>Network Logs — Syslog, event logs, configuration changes</a:t>
-            </a:r>
-          </a:p>
-        </p:txBody>
-      </p:sp>
-      <p:sp>
-        <p:nvSpPr>
-          <p:cNvPr id="11" name="TextBox 10"/>
+              <a:t>Flow data</a:t>
+            </a:r>
+            <a:br/>
+            <a:r>
+              <a:t>Packet traces</a:t>
+            </a:r>
+            <a:br/>
+            <a:r>
+              <a:t>Device metrics</a:t>
+            </a:r>
+            <a:br/>
+            <a:r>
+              <a:t>INT path details</a:t>
+            </a:r>
+            <a:br/>
+            <a:r>
+              <a:t>Logs and events</a:t>
+            </a:r>
+          </a:p>
+        </p:txBody>
+      </p:sp>
+      <p:sp>
+        <p:nvSpPr>
+          <p:cNvPr id="23" name="TextBox 22"/>
           <p:cNvSpPr txBox="1"/>
           <p:nvPr/>
         </p:nvSpPr>
@@ -15341,7 +16631,7 @@
       </p:sp>
       <p:sp>
         <p:nvSpPr>
-          <p:cNvPr id="12" name="TextBox 11"/>
+          <p:cNvPr id="24" name="TextBox 23"/>
           <p:cNvSpPr txBox="1"/>
           <p:nvPr/>
         </p:nvSpPr>
@@ -15572,7 +16862,7 @@
               </a:defRPr>
             </a:pPr>
             <a:r>
-              <a:t>The volume and complexity of telemetry data demands intelligent analysis</a:t>
+              <a:t>The challenge is not collecting data. It is understanding it fast enough.</a:t>
             </a:r>
           </a:p>
         </p:txBody>
@@ -15627,8 +16917,8 @@
         </p:nvSpPr>
         <p:spPr>
           <a:xfrm>
-            <a:off x="822960" y="1673352"/>
-            <a:ext cx="164592" cy="164592"/>
+            <a:off x="5074920" y="2148840"/>
+            <a:ext cx="1828800" cy="1828800"/>
           </a:xfrm>
           <a:prstGeom prst="ellipse">
             <a:avLst/>
@@ -15670,28 +16960,70 @@
         </p:nvSpPr>
         <p:spPr>
           <a:xfrm>
-            <a:off x="1188720" y="1600200"/>
-            <a:ext cx="10058400" cy="320040"/>
-          </a:xfrm>
-          <a:prstGeom prst="rect">
-            <a:avLst/>
-          </a:prstGeom>
-          <a:noFill/>
-        </p:spPr>
-        <p:txBody>
-          <a:bodyPr wrap="square">
-            <a:spAutoFit/>
-          </a:bodyPr>
-          <a:lstStyle/>
-          <a:p>
-            <a:pPr algn="l">
-              <a:lnSpc>
-                <a:spcPts val="2160"/>
-              </a:lnSpc>
-              <a:spcAft>
-                <a:spcPts val="0"/>
-              </a:spcAft>
-              <a:defRPr sz="1800" b="1">
+            <a:off x="5074920" y="2176272"/>
+            <a:ext cx="1828800" cy="1801368"/>
+          </a:xfrm>
+          <a:prstGeom prst="rect">
+            <a:avLst/>
+          </a:prstGeom>
+          <a:noFill/>
+        </p:spPr>
+        <p:txBody>
+          <a:bodyPr wrap="square">
+            <a:spAutoFit/>
+          </a:bodyPr>
+          <a:lstStyle/>
+          <a:p>
+            <a:pPr algn="ctr">
+              <a:lnSpc>
+                <a:spcPts val="3600"/>
+              </a:lnSpc>
+              <a:spcAft>
+                <a:spcPts val="0"/>
+              </a:spcAft>
+              <a:defRPr sz="3000" b="1">
+                <a:solidFill>
+                  <a:srgbClr val="FFFFFF"/>
+                </a:solidFill>
+                <a:latin typeface="Calibri"/>
+              </a:defRPr>
+            </a:pPr>
+            <a:r>
+              <a:t>ML</a:t>
+            </a:r>
+          </a:p>
+        </p:txBody>
+      </p:sp>
+      <p:sp>
+        <p:nvSpPr>
+          <p:cNvPr id="9" name="TextBox 8"/>
+          <p:cNvSpPr txBox="1"/>
+          <p:nvPr/>
+        </p:nvSpPr>
+        <p:spPr>
+          <a:xfrm>
+            <a:off x="4526280" y="4160520"/>
+            <a:ext cx="2926080" cy="320040"/>
+          </a:xfrm>
+          <a:prstGeom prst="rect">
+            <a:avLst/>
+          </a:prstGeom>
+          <a:noFill/>
+        </p:spPr>
+        <p:txBody>
+          <a:bodyPr wrap="square">
+            <a:spAutoFit/>
+          </a:bodyPr>
+          <a:lstStyle/>
+          <a:p>
+            <a:pPr algn="ctr">
+              <a:lnSpc>
+                <a:spcPts val="1920"/>
+              </a:lnSpc>
+              <a:spcAft>
+                <a:spcPts val="0"/>
+              </a:spcAft>
+              <a:defRPr sz="1600" b="1">
                 <a:solidFill>
                   <a:srgbClr val="009FFD"/>
                 </a:solidFill>
@@ -15699,72 +17031,32 @@
               </a:defRPr>
             </a:pPr>
             <a:r>
-              <a:t>Volume &amp; Velocity</a:t>
-            </a:r>
-          </a:p>
-        </p:txBody>
-      </p:sp>
-      <p:sp>
-        <p:nvSpPr>
-          <p:cNvPr id="9" name="TextBox 8"/>
-          <p:cNvSpPr txBox="1"/>
-          <p:nvPr/>
-        </p:nvSpPr>
-        <p:spPr>
-          <a:xfrm>
-            <a:off x="1188720" y="1920240"/>
-            <a:ext cx="10058400" cy="411480"/>
-          </a:xfrm>
-          <a:prstGeom prst="rect">
-            <a:avLst/>
-          </a:prstGeom>
-          <a:noFill/>
-        </p:spPr>
-        <p:txBody>
-          <a:bodyPr wrap="square">
-            <a:spAutoFit/>
-          </a:bodyPr>
-          <a:lstStyle/>
-          <a:p>
-            <a:pPr algn="l">
-              <a:lnSpc>
-                <a:spcPts val="1800"/>
-              </a:lnSpc>
-              <a:spcAft>
-                <a:spcPts val="0"/>
-              </a:spcAft>
-              <a:defRPr sz="1500" b="0">
-                <a:solidFill>
-                  <a:srgbClr val="CCCCCC"/>
-                </a:solidFill>
-                <a:latin typeface="Calibri"/>
-              </a:defRPr>
-            </a:pPr>
-            <a:r>
-              <a:t>Modern networks generate terabytes of telemetry daily; manual analysis is infeasible</a:t>
-            </a:r>
-          </a:p>
-        </p:txBody>
-      </p:sp>
-      <p:sp>
-        <p:nvSpPr>
-          <p:cNvPr id="10" name="Oval 9"/>
+              <a:t>Why use ML here?</a:t>
+            </a:r>
+          </a:p>
+        </p:txBody>
+      </p:sp>
+      <p:sp>
+        <p:nvSpPr>
+          <p:cNvPr id="10" name="Rounded Rectangle 9"/>
           <p:cNvSpPr/>
           <p:nvPr/>
         </p:nvSpPr>
         <p:spPr>
           <a:xfrm>
-            <a:off x="822960" y="2542032"/>
-            <a:ext cx="164592" cy="164592"/>
-          </a:xfrm>
-          <a:prstGeom prst="ellipse">
+            <a:off x="822960" y="1737360"/>
+            <a:ext cx="3566160" cy="1417320"/>
+          </a:xfrm>
+          <a:prstGeom prst="roundRect">
             <a:avLst/>
           </a:prstGeom>
           <a:solidFill>
-            <a:srgbClr val="009FFD"/>
+            <a:srgbClr val="141832"/>
           </a:solidFill>
-          <a:ln>
-            <a:noFill/>
+          <a:ln w="17780">
+            <a:solidFill>
+              <a:srgbClr val="009FFD"/>
+            </a:solidFill>
           </a:ln>
         </p:spPr>
         <p:style>
@@ -15797,8 +17089,8 @@
         </p:nvSpPr>
         <p:spPr>
           <a:xfrm>
-            <a:off x="1188720" y="2468880"/>
-            <a:ext cx="10058400" cy="320040"/>
+            <a:off x="987552" y="1874520"/>
+            <a:ext cx="3236976" cy="320040"/>
           </a:xfrm>
           <a:prstGeom prst="rect">
             <a:avLst/>
@@ -15813,12 +17105,12 @@
           <a:p>
             <a:pPr algn="l">
               <a:lnSpc>
-                <a:spcPts val="2160"/>
-              </a:lnSpc>
-              <a:spcAft>
-                <a:spcPts val="0"/>
-              </a:spcAft>
-              <a:defRPr sz="1800" b="1">
+                <a:spcPts val="1920"/>
+              </a:lnSpc>
+              <a:spcAft>
+                <a:spcPts val="0"/>
+              </a:spcAft>
+              <a:defRPr sz="1600" b="1">
                 <a:solidFill>
                   <a:srgbClr val="009FFD"/>
                 </a:solidFill>
@@ -15826,7 +17118,7 @@
               </a:defRPr>
             </a:pPr>
             <a:r>
-              <a:t>Complex Patterns</a:t>
+              <a:t>Too much data</a:t>
             </a:r>
           </a:p>
         </p:txBody>
@@ -15839,8 +17131,8 @@
         </p:nvSpPr>
         <p:spPr>
           <a:xfrm>
-            <a:off x="1188720" y="2788920"/>
-            <a:ext cx="10058400" cy="411480"/>
+            <a:off x="987552" y="2240280"/>
+            <a:ext cx="3236976" cy="777240"/>
           </a:xfrm>
           <a:prstGeom prst="rect">
             <a:avLst/>
@@ -15855,12 +17147,12 @@
           <a:p>
             <a:pPr algn="l">
               <a:lnSpc>
-                <a:spcPts val="1800"/>
-              </a:lnSpc>
-              <a:spcAft>
-                <a:spcPts val="0"/>
-              </a:spcAft>
-              <a:defRPr sz="1500" b="0">
+                <a:spcPts val="1690"/>
+              </a:lnSpc>
+              <a:spcAft>
+                <a:spcPts val="0"/>
+              </a:spcAft>
+              <a:defRPr sz="1300" b="0">
                 <a:solidFill>
                   <a:srgbClr val="CCCCCC"/>
                 </a:solidFill>
@@ -15868,30 +17160,32 @@
               </a:defRPr>
             </a:pPr>
             <a:r>
-              <a:t>Anomalies and performance degradation involve subtle, multi-dimensional correlations</a:t>
-            </a:r>
-          </a:p>
-        </p:txBody>
-      </p:sp>
-      <p:sp>
-        <p:nvSpPr>
-          <p:cNvPr id="13" name="Oval 12"/>
+              <a:t>Large networks create huge telemetry streams every second.</a:t>
+            </a:r>
+          </a:p>
+        </p:txBody>
+      </p:sp>
+      <p:sp>
+        <p:nvSpPr>
+          <p:cNvPr id="13" name="Rounded Rectangle 12"/>
           <p:cNvSpPr/>
           <p:nvPr/>
         </p:nvSpPr>
         <p:spPr>
           <a:xfrm>
-            <a:off x="822960" y="3410712"/>
-            <a:ext cx="164592" cy="164592"/>
-          </a:xfrm>
-          <a:prstGeom prst="ellipse">
+            <a:off x="822960" y="3794760"/>
+            <a:ext cx="3566160" cy="1417320"/>
+          </a:xfrm>
+          <a:prstGeom prst="roundRect">
             <a:avLst/>
           </a:prstGeom>
           <a:solidFill>
-            <a:srgbClr val="009FFD"/>
+            <a:srgbClr val="141832"/>
           </a:solidFill>
-          <a:ln>
-            <a:noFill/>
+          <a:ln w="17780">
+            <a:solidFill>
+              <a:srgbClr val="00C9A7"/>
+            </a:solidFill>
           </a:ln>
         </p:spPr>
         <p:style>
@@ -15924,8 +17218,8 @@
         </p:nvSpPr>
         <p:spPr>
           <a:xfrm>
-            <a:off x="1188720" y="3337560"/>
-            <a:ext cx="10058400" cy="320040"/>
+            <a:off x="987552" y="3931920"/>
+            <a:ext cx="3236976" cy="320040"/>
           </a:xfrm>
           <a:prstGeom prst="rect">
             <a:avLst/>
@@ -15940,20 +17234,20 @@
           <a:p>
             <a:pPr algn="l">
               <a:lnSpc>
-                <a:spcPts val="2160"/>
-              </a:lnSpc>
-              <a:spcAft>
-                <a:spcPts val="0"/>
-              </a:spcAft>
-              <a:defRPr sz="1800" b="1">
-                <a:solidFill>
-                  <a:srgbClr val="009FFD"/>
-                </a:solidFill>
-                <a:latin typeface="Calibri"/>
-              </a:defRPr>
-            </a:pPr>
-            <a:r>
-              <a:t>Real-Time Demands</a:t>
+                <a:spcPts val="1920"/>
+              </a:lnSpc>
+              <a:spcAft>
+                <a:spcPts val="0"/>
+              </a:spcAft>
+              <a:defRPr sz="1600" b="1">
+                <a:solidFill>
+                  <a:srgbClr val="00C9A7"/>
+                </a:solidFill>
+                <a:latin typeface="Calibri"/>
+              </a:defRPr>
+            </a:pPr>
+            <a:r>
+              <a:t>Problems are hidden</a:t>
             </a:r>
           </a:p>
         </p:txBody>
@@ -15966,8 +17260,8 @@
         </p:nvSpPr>
         <p:spPr>
           <a:xfrm>
-            <a:off x="1188720" y="3657600"/>
-            <a:ext cx="10058400" cy="411480"/>
+            <a:off x="987552" y="4297680"/>
+            <a:ext cx="3236976" cy="777240"/>
           </a:xfrm>
           <a:prstGeom prst="rect">
             <a:avLst/>
@@ -15982,12 +17276,12 @@
           <a:p>
             <a:pPr algn="l">
               <a:lnSpc>
-                <a:spcPts val="1800"/>
-              </a:lnSpc>
-              <a:spcAft>
-                <a:spcPts val="0"/>
-              </a:spcAft>
-              <a:defRPr sz="1500" b="0">
+                <a:spcPts val="1690"/>
+              </a:lnSpc>
+              <a:spcAft>
+                <a:spcPts val="0"/>
+              </a:spcAft>
+              <a:defRPr sz="1300" b="0">
                 <a:solidFill>
                   <a:srgbClr val="CCCCCC"/>
                 </a:solidFill>
@@ -15995,30 +17289,32 @@
               </a:defRPr>
             </a:pPr>
             <a:r>
-              <a:t>Network operators need sub-second detection and response times</a:t>
-            </a:r>
-          </a:p>
-        </p:txBody>
-      </p:sp>
-      <p:sp>
-        <p:nvSpPr>
-          <p:cNvPr id="16" name="Oval 15"/>
+              <a:t>Small clues across many signals are hard to notice manually.</a:t>
+            </a:r>
+          </a:p>
+        </p:txBody>
+      </p:sp>
+      <p:sp>
+        <p:nvSpPr>
+          <p:cNvPr id="16" name="Rounded Rectangle 15"/>
           <p:cNvSpPr/>
           <p:nvPr/>
         </p:nvSpPr>
         <p:spPr>
           <a:xfrm>
-            <a:off x="822960" y="4279391"/>
-            <a:ext cx="164592" cy="164592"/>
-          </a:xfrm>
-          <a:prstGeom prst="ellipse">
+            <a:off x="7543800" y="1737360"/>
+            <a:ext cx="3566160" cy="1417320"/>
+          </a:xfrm>
+          <a:prstGeom prst="roundRect">
             <a:avLst/>
           </a:prstGeom>
           <a:solidFill>
-            <a:srgbClr val="009FFD"/>
+            <a:srgbClr val="141832"/>
           </a:solidFill>
-          <a:ln>
-            <a:noFill/>
+          <a:ln w="17780">
+            <a:solidFill>
+              <a:srgbClr val="845EC2"/>
+            </a:solidFill>
           </a:ln>
         </p:spPr>
         <p:style>
@@ -16051,8 +17347,8 @@
         </p:nvSpPr>
         <p:spPr>
           <a:xfrm>
-            <a:off x="1188720" y="4206239"/>
-            <a:ext cx="10058400" cy="320040"/>
+            <a:off x="7708392" y="1874520"/>
+            <a:ext cx="3236976" cy="320040"/>
           </a:xfrm>
           <a:prstGeom prst="rect">
             <a:avLst/>
@@ -16067,20 +17363,20 @@
           <a:p>
             <a:pPr algn="l">
               <a:lnSpc>
-                <a:spcPts val="2160"/>
-              </a:lnSpc>
-              <a:spcAft>
-                <a:spcPts val="0"/>
-              </a:spcAft>
-              <a:defRPr sz="1800" b="1">
-                <a:solidFill>
-                  <a:srgbClr val="009FFD"/>
-                </a:solidFill>
-                <a:latin typeface="Calibri"/>
-              </a:defRPr>
-            </a:pPr>
-            <a:r>
-              <a:t>Dynamic Environments</a:t>
+                <a:spcPts val="1920"/>
+              </a:lnSpc>
+              <a:spcAft>
+                <a:spcPts val="0"/>
+              </a:spcAft>
+              <a:defRPr sz="1600" b="1">
+                <a:solidFill>
+                  <a:srgbClr val="845EC2"/>
+                </a:solidFill>
+                <a:latin typeface="Calibri"/>
+              </a:defRPr>
+            </a:pPr>
+            <a:r>
+              <a:t>Speed matters</a:t>
             </a:r>
           </a:p>
         </p:txBody>
@@ -16093,8 +17389,8 @@
         </p:nvSpPr>
         <p:spPr>
           <a:xfrm>
-            <a:off x="1188720" y="4526279"/>
-            <a:ext cx="10058400" cy="411480"/>
+            <a:off x="7708392" y="2240280"/>
+            <a:ext cx="3236976" cy="777240"/>
           </a:xfrm>
           <a:prstGeom prst="rect">
             <a:avLst/>
@@ -16109,12 +17405,12 @@
           <a:p>
             <a:pPr algn="l">
               <a:lnSpc>
-                <a:spcPts val="1800"/>
-              </a:lnSpc>
-              <a:spcAft>
-                <a:spcPts val="0"/>
-              </a:spcAft>
-              <a:defRPr sz="1500" b="0">
+                <a:spcPts val="1690"/>
+              </a:lnSpc>
+              <a:spcAft>
+                <a:spcPts val="0"/>
+              </a:spcAft>
+              <a:defRPr sz="1300" b="0">
                 <a:solidFill>
                   <a:srgbClr val="CCCCCC"/>
                 </a:solidFill>
@@ -16122,30 +17418,32 @@
               </a:defRPr>
             </a:pPr>
             <a:r>
-              <a:t>Traffic patterns, topologies, and workloads constantly evolve — static rules fail</a:t>
-            </a:r>
-          </a:p>
-        </p:txBody>
-      </p:sp>
-      <p:sp>
-        <p:nvSpPr>
-          <p:cNvPr id="19" name="Oval 18"/>
+              <a:t>Teams need answers before users feel the problem.</a:t>
+            </a:r>
+          </a:p>
+        </p:txBody>
+      </p:sp>
+      <p:sp>
+        <p:nvSpPr>
+          <p:cNvPr id="19" name="Rounded Rectangle 18"/>
           <p:cNvSpPr/>
           <p:nvPr/>
         </p:nvSpPr>
         <p:spPr>
           <a:xfrm>
-            <a:off x="822960" y="5148072"/>
-            <a:ext cx="164592" cy="164592"/>
-          </a:xfrm>
-          <a:prstGeom prst="ellipse">
+            <a:off x="7543800" y="3794760"/>
+            <a:ext cx="3566160" cy="1417320"/>
+          </a:xfrm>
+          <a:prstGeom prst="roundRect">
             <a:avLst/>
           </a:prstGeom>
           <a:solidFill>
-            <a:srgbClr val="009FFD"/>
+            <a:srgbClr val="141832"/>
           </a:solidFill>
-          <a:ln>
-            <a:noFill/>
+          <a:ln w="17780">
+            <a:solidFill>
+              <a:srgbClr val="FF8C00"/>
+            </a:solidFill>
           </a:ln>
         </p:spPr>
         <p:style>
@@ -16178,8 +17476,8 @@
         </p:nvSpPr>
         <p:spPr>
           <a:xfrm>
-            <a:off x="1188720" y="5074920"/>
-            <a:ext cx="10058400" cy="320040"/>
+            <a:off x="7708392" y="3931920"/>
+            <a:ext cx="3236976" cy="320040"/>
           </a:xfrm>
           <a:prstGeom prst="rect">
             <a:avLst/>
@@ -16194,20 +17492,20 @@
           <a:p>
             <a:pPr algn="l">
               <a:lnSpc>
-                <a:spcPts val="2160"/>
-              </a:lnSpc>
-              <a:spcAft>
-                <a:spcPts val="0"/>
-              </a:spcAft>
-              <a:defRPr sz="1800" b="1">
-                <a:solidFill>
-                  <a:srgbClr val="009FFD"/>
-                </a:solidFill>
-                <a:latin typeface="Calibri"/>
-              </a:defRPr>
-            </a:pPr>
-            <a:r>
-              <a:t>Automation Gap</a:t>
+                <a:spcPts val="1920"/>
+              </a:lnSpc>
+              <a:spcAft>
+                <a:spcPts val="0"/>
+              </a:spcAft>
+              <a:defRPr sz="1600" b="1">
+                <a:solidFill>
+                  <a:srgbClr val="FF8C00"/>
+                </a:solidFill>
+                <a:latin typeface="Calibri"/>
+              </a:defRPr>
+            </a:pPr>
+            <a:r>
+              <a:t>Networks change</a:t>
             </a:r>
           </a:p>
         </p:txBody>
@@ -16220,8 +17518,8 @@
         </p:nvSpPr>
         <p:spPr>
           <a:xfrm>
-            <a:off x="1188720" y="5394960"/>
-            <a:ext cx="10058400" cy="411480"/>
+            <a:off x="7708392" y="4297680"/>
+            <a:ext cx="3236976" cy="777240"/>
           </a:xfrm>
           <a:prstGeom prst="rect">
             <a:avLst/>
@@ -16236,12 +17534,12 @@
           <a:p>
             <a:pPr algn="l">
               <a:lnSpc>
-                <a:spcPts val="1800"/>
-              </a:lnSpc>
-              <a:spcAft>
-                <a:spcPts val="0"/>
-              </a:spcAft>
-              <a:defRPr sz="1500" b="0">
+                <a:spcPts val="1690"/>
+              </a:lnSpc>
+              <a:spcAft>
+                <a:spcPts val="0"/>
+              </a:spcAft>
+              <a:defRPr sz="1300" b="0">
                 <a:solidFill>
                   <a:srgbClr val="CCCCCC"/>
                 </a:solidFill>
@@ -16249,7 +17547,7 @@
               </a:defRPr>
             </a:pPr>
             <a:r>
-              <a:t>5G/6G and SDN require autonomous, closed-loop management at scale</a:t>
+              <a:t>Traffic and paths move, so fixed rules become outdated.</a:t>
             </a:r>
           </a:p>
         </p:txBody>
@@ -16262,8 +17560,8 @@
         </p:nvSpPr>
         <p:spPr>
           <a:xfrm>
-            <a:off x="7772400" y="1554480"/>
-            <a:ext cx="4114800" cy="2286000"/>
+            <a:off x="3794760" y="5074920"/>
+            <a:ext cx="4389120" cy="822960"/>
           </a:xfrm>
           <a:prstGeom prst="roundRect">
             <a:avLst/>
@@ -16271,7 +17569,7 @@
           <a:solidFill>
             <a:srgbClr val="141832"/>
           </a:solidFill>
-          <a:ln w="19050">
+          <a:ln w="17780">
             <a:solidFill>
               <a:srgbClr val="00C9A7"/>
             </a:solidFill>
@@ -16307,8 +17605,8 @@
         </p:nvSpPr>
         <p:spPr>
           <a:xfrm>
-            <a:off x="8046720" y="1691640"/>
-            <a:ext cx="3657600" cy="365760"/>
+            <a:off x="3959352" y="5212080"/>
+            <a:ext cx="4059936" cy="320040"/>
           </a:xfrm>
           <a:prstGeom prst="rect">
             <a:avLst/>
@@ -16323,12 +17621,12 @@
           <a:p>
             <a:pPr algn="l">
               <a:lnSpc>
-                <a:spcPts val="1800"/>
-              </a:lnSpc>
-              <a:spcAft>
-                <a:spcPts val="0"/>
-              </a:spcAft>
-              <a:defRPr sz="1500" b="1">
+                <a:spcPts val="1920"/>
+              </a:lnSpc>
+              <a:spcAft>
+                <a:spcPts val="0"/>
+              </a:spcAft>
+              <a:defRPr sz="1600" b="1">
                 <a:solidFill>
                   <a:srgbClr val="00C9A7"/>
                 </a:solidFill>
@@ -16336,7 +17634,7 @@
               </a:defRPr>
             </a:pPr>
             <a:r>
-              <a:t>Our Survey Scope</a:t>
+              <a:t>What We Cover</a:t>
             </a:r>
           </a:p>
         </p:txBody>
@@ -16349,26 +17647,26 @@
         </p:nvSpPr>
         <p:spPr>
           <a:xfrm>
-            <a:off x="8046720" y="2148840"/>
-            <a:ext cx="3657600" cy="1554480"/>
-          </a:xfrm>
-          <a:prstGeom prst="rect">
-            <a:avLst/>
-          </a:prstGeom>
-          <a:noFill/>
-        </p:spPr>
-        <p:txBody>
-          <a:bodyPr wrap="square">
-            <a:spAutoFit/>
-          </a:bodyPr>
-          <a:lstStyle/>
-          <a:p>
-            <a:pPr>
-              <a:spcBef>
-                <a:spcPts val="200"/>
-              </a:spcBef>
-              <a:spcAft>
-                <a:spcPts val="500"/>
+            <a:off x="3959352" y="5577840"/>
+            <a:ext cx="4059936" cy="182880"/>
+          </a:xfrm>
+          <a:prstGeom prst="rect">
+            <a:avLst/>
+          </a:prstGeom>
+          <a:noFill/>
+        </p:spPr>
+        <p:txBody>
+          <a:bodyPr wrap="square">
+            <a:spAutoFit/>
+          </a:bodyPr>
+          <a:lstStyle/>
+          <a:p>
+            <a:pPr algn="l">
+              <a:lnSpc>
+                <a:spcPts val="1690"/>
+              </a:lnSpc>
+              <a:spcAft>
+                <a:spcPts val="0"/>
               </a:spcAft>
               <a:defRPr sz="1300" b="0">
                 <a:solidFill>
@@ -16378,64 +17676,7 @@
               </a:defRPr>
             </a:pPr>
             <a:r>
-              <a:t>Anomaly detection in telemetry</a:t>
-            </a:r>
-          </a:p>
-          <a:p>
-            <a:pPr>
-              <a:spcBef>
-                <a:spcPts val="200"/>
-              </a:spcBef>
-              <a:spcAft>
-                <a:spcPts val="500"/>
-              </a:spcAft>
-              <a:defRPr sz="1300" b="0">
-                <a:solidFill>
-                  <a:srgbClr val="CCCCCC"/>
-                </a:solidFill>
-                <a:latin typeface="Calibri"/>
-              </a:defRPr>
-            </a:pPr>
-            <a:r>
-              <a:t>Performance prediction &amp; QoS</a:t>
-            </a:r>
-          </a:p>
-          <a:p>
-            <a:pPr>
-              <a:spcBef>
-                <a:spcPts val="200"/>
-              </a:spcBef>
-              <a:spcAft>
-                <a:spcPts val="500"/>
-              </a:spcAft>
-              <a:defRPr sz="1300" b="0">
-                <a:solidFill>
-                  <a:srgbClr val="CCCCCC"/>
-                </a:solidFill>
-                <a:latin typeface="Calibri"/>
-              </a:defRPr>
-            </a:pPr>
-            <a:r>
-              <a:t>Industry implementations</a:t>
-            </a:r>
-          </a:p>
-          <a:p>
-            <a:pPr>
-              <a:spcBef>
-                <a:spcPts val="200"/>
-              </a:spcBef>
-              <a:spcAft>
-                <a:spcPts val="500"/>
-              </a:spcAft>
-              <a:defRPr sz="1300" b="0">
-                <a:solidFill>
-                  <a:srgbClr val="CCCCCC"/>
-                </a:solidFill>
-                <a:latin typeface="Calibri"/>
-              </a:defRPr>
-            </a:pPr>
-            <a:r>
-              <a:t>Emerging trends (6G, GenAI)</a:t>
+              <a:t>Anomalies  |  prediction  |  QoS  |  industry  |  future trends</a:t>
             </a:r>
           </a:p>
         </p:txBody>
@@ -16673,7 +17914,7 @@
               </a:defRPr>
             </a:pPr>
             <a:r>
-              <a:t>ML Methods for Anomaly Detection in Telemetry</a:t>
+              <a:t>ML Methods for Anomaly Detection</a:t>
             </a:r>
           </a:p>
         </p:txBody>
@@ -16715,7 +17956,7 @@
               </a:defRPr>
             </a:pPr>
             <a:r>
-              <a:t>Detecting unusual patterns in network data streams</a:t>
+              <a:t>A visual summary of the main model families</a:t>
             </a:r>
           </a:p>
         </p:txBody>
@@ -16770,8 +18011,137 @@
         </p:nvSpPr>
         <p:spPr>
           <a:xfrm>
-            <a:off x="731520" y="1554480"/>
-            <a:ext cx="1463040" cy="292608"/>
+            <a:off x="777240" y="1645920"/>
+            <a:ext cx="2788920" cy="1463040"/>
+          </a:xfrm>
+          <a:prstGeom prst="roundRect">
+            <a:avLst/>
+          </a:prstGeom>
+          <a:solidFill>
+            <a:srgbClr val="141832"/>
+          </a:solidFill>
+          <a:ln w="17780">
+            <a:solidFill>
+              <a:srgbClr val="009FFD"/>
+            </a:solidFill>
+          </a:ln>
+        </p:spPr>
+        <p:style>
+          <a:lnRef idx="1">
+            <a:schemeClr val="accent1"/>
+          </a:lnRef>
+          <a:fillRef idx="3">
+            <a:schemeClr val="accent1"/>
+          </a:fillRef>
+          <a:effectRef idx="2">
+            <a:schemeClr val="accent1"/>
+          </a:effectRef>
+          <a:fontRef idx="minor">
+            <a:schemeClr val="lt1"/>
+          </a:fontRef>
+        </p:style>
+        <p:txBody>
+          <a:bodyPr rtlCol="0" anchor="ctr"/>
+          <a:lstStyle/>
+          <a:p>
+            <a:pPr algn="ctr"/>
+          </a:p>
+        </p:txBody>
+      </p:sp>
+      <p:sp>
+        <p:nvSpPr>
+          <p:cNvPr id="8" name="TextBox 7"/>
+          <p:cNvSpPr txBox="1"/>
+          <p:nvPr/>
+        </p:nvSpPr>
+        <p:spPr>
+          <a:xfrm>
+            <a:off x="941832" y="1783080"/>
+            <a:ext cx="2459736" cy="320040"/>
+          </a:xfrm>
+          <a:prstGeom prst="rect">
+            <a:avLst/>
+          </a:prstGeom>
+          <a:noFill/>
+        </p:spPr>
+        <p:txBody>
+          <a:bodyPr wrap="square">
+            <a:spAutoFit/>
+          </a:bodyPr>
+          <a:lstStyle/>
+          <a:p>
+            <a:pPr algn="l">
+              <a:lnSpc>
+                <a:spcPts val="1920"/>
+              </a:lnSpc>
+              <a:spcAft>
+                <a:spcPts val="0"/>
+              </a:spcAft>
+              <a:defRPr sz="1600" b="1">
+                <a:solidFill>
+                  <a:srgbClr val="FFFFFF"/>
+                </a:solidFill>
+                <a:latin typeface="Calibri"/>
+              </a:defRPr>
+            </a:pPr>
+            <a:r>
+              <a:t>Autoencoders</a:t>
+            </a:r>
+          </a:p>
+        </p:txBody>
+      </p:sp>
+      <p:sp>
+        <p:nvSpPr>
+          <p:cNvPr id="9" name="TextBox 8"/>
+          <p:cNvSpPr txBox="1"/>
+          <p:nvPr/>
+        </p:nvSpPr>
+        <p:spPr>
+          <a:xfrm>
+            <a:off x="941832" y="2148840"/>
+            <a:ext cx="2459736" cy="822960"/>
+          </a:xfrm>
+          <a:prstGeom prst="rect">
+            <a:avLst/>
+          </a:prstGeom>
+          <a:noFill/>
+        </p:spPr>
+        <p:txBody>
+          <a:bodyPr wrap="square">
+            <a:spAutoFit/>
+          </a:bodyPr>
+          <a:lstStyle/>
+          <a:p>
+            <a:pPr algn="l">
+              <a:lnSpc>
+                <a:spcPts val="1560"/>
+              </a:lnSpc>
+              <a:spcAft>
+                <a:spcPts val="0"/>
+              </a:spcAft>
+              <a:defRPr sz="1200" b="0">
+                <a:solidFill>
+                  <a:srgbClr val="CCCCCC"/>
+                </a:solidFill>
+                <a:latin typeface="Calibri"/>
+              </a:defRPr>
+            </a:pPr>
+            <a:r>
+              <a:t>Learn what normal traffic looks like. If new data looks very different, it may be an anomaly.</a:t>
+            </a:r>
+          </a:p>
+        </p:txBody>
+      </p:sp>
+      <p:sp>
+        <p:nvSpPr>
+          <p:cNvPr id="10" name="Rounded Rectangle 9"/>
+          <p:cNvSpPr/>
+          <p:nvPr/>
+        </p:nvSpPr>
+        <p:spPr>
+          <a:xfrm>
+            <a:off x="2560320" y="1481328"/>
+            <a:ext cx="841248" cy="256032"/>
           </a:xfrm>
           <a:prstGeom prst="roundRect">
             <a:avLst/>
@@ -16807,14 +18177,14 @@
       </p:sp>
       <p:sp>
         <p:nvSpPr>
-          <p:cNvPr id="8" name="TextBox 7"/>
-          <p:cNvSpPr txBox="1"/>
-          <p:nvPr/>
-        </p:nvSpPr>
-        <p:spPr>
-          <a:xfrm>
-            <a:off x="731520" y="1572768"/>
-            <a:ext cx="1463040" cy="274320"/>
+          <p:cNvPr id="11" name="TextBox 10"/>
+          <p:cNvSpPr txBox="1"/>
+          <p:nvPr/>
+        </p:nvSpPr>
+        <p:spPr>
+          <a:xfrm>
+            <a:off x="2560320" y="1499616"/>
+            <a:ext cx="841248" cy="219456"/>
           </a:xfrm>
           <a:prstGeom prst="rect">
             <a:avLst/>
@@ -16829,12 +18199,12 @@
           <a:p>
             <a:pPr algn="ctr">
               <a:lnSpc>
-                <a:spcPts val="1200"/>
-              </a:lnSpc>
-              <a:spcAft>
-                <a:spcPts val="0"/>
-              </a:spcAft>
-              <a:defRPr sz="1000" b="1">
+                <a:spcPts val="960"/>
+              </a:lnSpc>
+              <a:spcAft>
+                <a:spcPts val="0"/>
+              </a:spcAft>
+              <a:defRPr sz="800" b="1">
                 <a:solidFill>
                   <a:srgbClr val="FFFFFF"/>
                 </a:solidFill>
@@ -16849,14 +18219,59 @@
       </p:sp>
       <p:sp>
         <p:nvSpPr>
-          <p:cNvPr id="9" name="TextBox 8"/>
-          <p:cNvSpPr txBox="1"/>
-          <p:nvPr/>
-        </p:nvSpPr>
-        <p:spPr>
-          <a:xfrm>
-            <a:off x="2377440" y="1554480"/>
-            <a:ext cx="4114800" cy="320040"/>
+          <p:cNvPr id="12" name="Rounded Rectangle 11"/>
+          <p:cNvSpPr/>
+          <p:nvPr/>
+        </p:nvSpPr>
+        <p:spPr>
+          <a:xfrm>
+            <a:off x="4069080" y="1645920"/>
+            <a:ext cx="2788920" cy="1463040"/>
+          </a:xfrm>
+          <a:prstGeom prst="roundRect">
+            <a:avLst/>
+          </a:prstGeom>
+          <a:solidFill>
+            <a:srgbClr val="141832"/>
+          </a:solidFill>
+          <a:ln w="17780">
+            <a:solidFill>
+              <a:srgbClr val="00C9A7"/>
+            </a:solidFill>
+          </a:ln>
+        </p:spPr>
+        <p:style>
+          <a:lnRef idx="1">
+            <a:schemeClr val="accent1"/>
+          </a:lnRef>
+          <a:fillRef idx="3">
+            <a:schemeClr val="accent1"/>
+          </a:fillRef>
+          <a:effectRef idx="2">
+            <a:schemeClr val="accent1"/>
+          </a:effectRef>
+          <a:fontRef idx="minor">
+            <a:schemeClr val="lt1"/>
+          </a:fontRef>
+        </p:style>
+        <p:txBody>
+          <a:bodyPr rtlCol="0" anchor="ctr"/>
+          <a:lstStyle/>
+          <a:p>
+            <a:pPr algn="ctr"/>
+          </a:p>
+        </p:txBody>
+      </p:sp>
+      <p:sp>
+        <p:nvSpPr>
+          <p:cNvPr id="13" name="TextBox 12"/>
+          <p:cNvSpPr txBox="1"/>
+          <p:nvPr/>
+        </p:nvSpPr>
+        <p:spPr>
+          <a:xfrm>
+            <a:off x="4233672" y="1783080"/>
+            <a:ext cx="2459736" cy="320040"/>
           </a:xfrm>
           <a:prstGeom prst="rect">
             <a:avLst/>
@@ -16871,12 +18286,12 @@
           <a:p>
             <a:pPr algn="l">
               <a:lnSpc>
-                <a:spcPts val="2039"/>
-              </a:lnSpc>
-              <a:spcAft>
-                <a:spcPts val="0"/>
-              </a:spcAft>
-              <a:defRPr sz="1700" b="1">
+                <a:spcPts val="1920"/>
+              </a:lnSpc>
+              <a:spcAft>
+                <a:spcPts val="0"/>
+              </a:spcAft>
+              <a:defRPr sz="1600" b="1">
                 <a:solidFill>
                   <a:srgbClr val="FFFFFF"/>
                 </a:solidFill>
@@ -16884,21 +18299,21 @@
               </a:defRPr>
             </a:pPr>
             <a:r>
-              <a:t>Autoencoders (AE)</a:t>
-            </a:r>
-          </a:p>
-        </p:txBody>
-      </p:sp>
-      <p:sp>
-        <p:nvSpPr>
-          <p:cNvPr id="10" name="TextBox 9"/>
-          <p:cNvSpPr txBox="1"/>
-          <p:nvPr/>
-        </p:nvSpPr>
-        <p:spPr>
-          <a:xfrm>
-            <a:off x="2377440" y="1874520"/>
-            <a:ext cx="9144000" cy="502920"/>
+              <a:t>LSTM / GRU</a:t>
+            </a:r>
+          </a:p>
+        </p:txBody>
+      </p:sp>
+      <p:sp>
+        <p:nvSpPr>
+          <p:cNvPr id="14" name="TextBox 13"/>
+          <p:cNvSpPr txBox="1"/>
+          <p:nvPr/>
+        </p:nvSpPr>
+        <p:spPr>
+          <a:xfrm>
+            <a:off x="4233672" y="2148840"/>
+            <a:ext cx="2459736" cy="822960"/>
           </a:xfrm>
           <a:prstGeom prst="rect">
             <a:avLst/>
@@ -16918,7 +18333,7 @@
               <a:spcAft>
                 <a:spcPts val="0"/>
               </a:spcAft>
-              <a:defRPr sz="1300" b="0">
+              <a:defRPr sz="1200" b="0">
                 <a:solidFill>
                   <a:srgbClr val="CCCCCC"/>
                 </a:solidFill>
@@ -16926,21 +18341,21 @@
               </a:defRPr>
             </a:pPr>
             <a:r>
-              <a:t>Learn normal traffic patterns; flag high-reconstruction-error samples as anomalies. Effective for zero-day attack detection.</a:t>
-            </a:r>
-          </a:p>
-        </p:txBody>
-      </p:sp>
-      <p:sp>
-        <p:nvSpPr>
-          <p:cNvPr id="11" name="Rounded Rectangle 10"/>
+              <a:t>Look at patterns over time. They help catch spikes, drops, or strange sequences in telemetry.</a:t>
+            </a:r>
+          </a:p>
+        </p:txBody>
+      </p:sp>
+      <p:sp>
+        <p:nvSpPr>
+          <p:cNvPr id="15" name="Rounded Rectangle 14"/>
           <p:cNvSpPr/>
           <p:nvPr/>
         </p:nvSpPr>
         <p:spPr>
           <a:xfrm>
-            <a:off x="731520" y="2514600"/>
-            <a:ext cx="1463040" cy="292608"/>
+            <a:off x="5852160" y="1481328"/>
+            <a:ext cx="841248" cy="256032"/>
           </a:xfrm>
           <a:prstGeom prst="roundRect">
             <a:avLst/>
@@ -16976,14 +18391,14 @@
       </p:sp>
       <p:sp>
         <p:nvSpPr>
-          <p:cNvPr id="12" name="TextBox 11"/>
-          <p:cNvSpPr txBox="1"/>
-          <p:nvPr/>
-        </p:nvSpPr>
-        <p:spPr>
-          <a:xfrm>
-            <a:off x="731520" y="2532888"/>
-            <a:ext cx="1463040" cy="274320"/>
+          <p:cNvPr id="16" name="TextBox 15"/>
+          <p:cNvSpPr txBox="1"/>
+          <p:nvPr/>
+        </p:nvSpPr>
+        <p:spPr>
+          <a:xfrm>
+            <a:off x="5852160" y="1499616"/>
+            <a:ext cx="841248" cy="219456"/>
           </a:xfrm>
           <a:prstGeom prst="rect">
             <a:avLst/>
@@ -16998,12 +18413,12 @@
           <a:p>
             <a:pPr algn="ctr">
               <a:lnSpc>
-                <a:spcPts val="1200"/>
-              </a:lnSpc>
-              <a:spcAft>
-                <a:spcPts val="0"/>
-              </a:spcAft>
-              <a:defRPr sz="1000" b="1">
+                <a:spcPts val="960"/>
+              </a:lnSpc>
+              <a:spcAft>
+                <a:spcPts val="0"/>
+              </a:spcAft>
+              <a:defRPr sz="800" b="1">
                 <a:solidFill>
                   <a:srgbClr val="FFFFFF"/>
                 </a:solidFill>
@@ -17018,14 +18433,59 @@
       </p:sp>
       <p:sp>
         <p:nvSpPr>
-          <p:cNvPr id="13" name="TextBox 12"/>
-          <p:cNvSpPr txBox="1"/>
-          <p:nvPr/>
-        </p:nvSpPr>
-        <p:spPr>
-          <a:xfrm>
-            <a:off x="2377440" y="2514600"/>
-            <a:ext cx="4114800" cy="320040"/>
+          <p:cNvPr id="17" name="Rounded Rectangle 16"/>
+          <p:cNvSpPr/>
+          <p:nvPr/>
+        </p:nvSpPr>
+        <p:spPr>
+          <a:xfrm>
+            <a:off x="7360920" y="1645920"/>
+            <a:ext cx="2788920" cy="1463040"/>
+          </a:xfrm>
+          <a:prstGeom prst="roundRect">
+            <a:avLst/>
+          </a:prstGeom>
+          <a:solidFill>
+            <a:srgbClr val="141832"/>
+          </a:solidFill>
+          <a:ln w="17780">
+            <a:solidFill>
+              <a:srgbClr val="009FFD"/>
+            </a:solidFill>
+          </a:ln>
+        </p:spPr>
+        <p:style>
+          <a:lnRef idx="1">
+            <a:schemeClr val="accent1"/>
+          </a:lnRef>
+          <a:fillRef idx="3">
+            <a:schemeClr val="accent1"/>
+          </a:fillRef>
+          <a:effectRef idx="2">
+            <a:schemeClr val="accent1"/>
+          </a:effectRef>
+          <a:fontRef idx="minor">
+            <a:schemeClr val="lt1"/>
+          </a:fontRef>
+        </p:style>
+        <p:txBody>
+          <a:bodyPr rtlCol="0" anchor="ctr"/>
+          <a:lstStyle/>
+          <a:p>
+            <a:pPr algn="ctr"/>
+          </a:p>
+        </p:txBody>
+      </p:sp>
+      <p:sp>
+        <p:nvSpPr>
+          <p:cNvPr id="18" name="TextBox 17"/>
+          <p:cNvSpPr txBox="1"/>
+          <p:nvPr/>
+        </p:nvSpPr>
+        <p:spPr>
+          <a:xfrm>
+            <a:off x="7525512" y="1783080"/>
+            <a:ext cx="2459736" cy="320040"/>
           </a:xfrm>
           <a:prstGeom prst="rect">
             <a:avLst/>
@@ -17040,12 +18500,12 @@
           <a:p>
             <a:pPr algn="l">
               <a:lnSpc>
-                <a:spcPts val="2039"/>
-              </a:lnSpc>
-              <a:spcAft>
-                <a:spcPts val="0"/>
-              </a:spcAft>
-              <a:defRPr sz="1700" b="1">
+                <a:spcPts val="1920"/>
+              </a:lnSpc>
+              <a:spcAft>
+                <a:spcPts val="0"/>
+              </a:spcAft>
+              <a:defRPr sz="1600" b="1">
                 <a:solidFill>
                   <a:srgbClr val="FFFFFF"/>
                 </a:solidFill>
@@ -17053,21 +18513,21 @@
               </a:defRPr>
             </a:pPr>
             <a:r>
-              <a:t>LSTM / GRU Networks</a:t>
-            </a:r>
-          </a:p>
-        </p:txBody>
-      </p:sp>
-      <p:sp>
-        <p:nvSpPr>
-          <p:cNvPr id="14" name="TextBox 13"/>
-          <p:cNvSpPr txBox="1"/>
-          <p:nvPr/>
-        </p:nvSpPr>
-        <p:spPr>
-          <a:xfrm>
-            <a:off x="2377440" y="2834640"/>
-            <a:ext cx="9144000" cy="502920"/>
+              <a:t>Isolation Forest</a:t>
+            </a:r>
+          </a:p>
+        </p:txBody>
+      </p:sp>
+      <p:sp>
+        <p:nvSpPr>
+          <p:cNvPr id="19" name="TextBox 18"/>
+          <p:cNvSpPr txBox="1"/>
+          <p:nvPr/>
+        </p:nvSpPr>
+        <p:spPr>
+          <a:xfrm>
+            <a:off x="7525512" y="2148840"/>
+            <a:ext cx="2459736" cy="822960"/>
           </a:xfrm>
           <a:prstGeom prst="rect">
             <a:avLst/>
@@ -17087,7 +18547,7 @@
               <a:spcAft>
                 <a:spcPts val="0"/>
               </a:spcAft>
-              <a:defRPr sz="1300" b="0">
+              <a:defRPr sz="1200" b="0">
                 <a:solidFill>
                   <a:srgbClr val="CCCCCC"/>
                 </a:solidFill>
@@ -17095,21 +18555,21 @@
               </a:defRPr>
             </a:pPr>
             <a:r>
-              <a:t>Capture temporal dependencies in time-series telemetry. Predict expected values; deviations signal anomalies.</a:t>
-            </a:r>
-          </a:p>
-        </p:txBody>
-      </p:sp>
-      <p:sp>
-        <p:nvSpPr>
-          <p:cNvPr id="15" name="Rounded Rectangle 14"/>
+              <a:t>Quickly separates unusual points from common ones. Useful when speed is important.</a:t>
+            </a:r>
+          </a:p>
+        </p:txBody>
+      </p:sp>
+      <p:sp>
+        <p:nvSpPr>
+          <p:cNvPr id="20" name="Rounded Rectangle 19"/>
           <p:cNvSpPr/>
           <p:nvPr/>
         </p:nvSpPr>
         <p:spPr>
           <a:xfrm>
-            <a:off x="731520" y="3474720"/>
-            <a:ext cx="1463040" cy="292608"/>
+            <a:off x="9144000" y="1481328"/>
+            <a:ext cx="841248" cy="256032"/>
           </a:xfrm>
           <a:prstGeom prst="roundRect">
             <a:avLst/>
@@ -17145,14 +18605,14 @@
       </p:sp>
       <p:sp>
         <p:nvSpPr>
-          <p:cNvPr id="16" name="TextBox 15"/>
-          <p:cNvSpPr txBox="1"/>
-          <p:nvPr/>
-        </p:nvSpPr>
-        <p:spPr>
-          <a:xfrm>
-            <a:off x="731520" y="3493008"/>
-            <a:ext cx="1463040" cy="274320"/>
+          <p:cNvPr id="21" name="TextBox 20"/>
+          <p:cNvSpPr txBox="1"/>
+          <p:nvPr/>
+        </p:nvSpPr>
+        <p:spPr>
+          <a:xfrm>
+            <a:off x="9144000" y="1499616"/>
+            <a:ext cx="841248" cy="219456"/>
           </a:xfrm>
           <a:prstGeom prst="rect">
             <a:avLst/>
@@ -17167,12 +18627,12 @@
           <a:p>
             <a:pPr algn="ctr">
               <a:lnSpc>
-                <a:spcPts val="1200"/>
-              </a:lnSpc>
-              <a:spcAft>
-                <a:spcPts val="0"/>
-              </a:spcAft>
-              <a:defRPr sz="1000" b="1">
+                <a:spcPts val="960"/>
+              </a:lnSpc>
+              <a:spcAft>
+                <a:spcPts val="0"/>
+              </a:spcAft>
+              <a:defRPr sz="800" b="1">
                 <a:solidFill>
                   <a:srgbClr val="FFFFFF"/>
                 </a:solidFill>
@@ -17187,14 +18647,59 @@
       </p:sp>
       <p:sp>
         <p:nvSpPr>
-          <p:cNvPr id="17" name="TextBox 16"/>
-          <p:cNvSpPr txBox="1"/>
-          <p:nvPr/>
-        </p:nvSpPr>
-        <p:spPr>
-          <a:xfrm>
-            <a:off x="2377440" y="3474720"/>
-            <a:ext cx="4114800" cy="320040"/>
+          <p:cNvPr id="22" name="Rounded Rectangle 21"/>
+          <p:cNvSpPr/>
+          <p:nvPr/>
+        </p:nvSpPr>
+        <p:spPr>
+          <a:xfrm>
+            <a:off x="2423160" y="3657600"/>
+            <a:ext cx="2788920" cy="1463040"/>
+          </a:xfrm>
+          <a:prstGeom prst="roundRect">
+            <a:avLst/>
+          </a:prstGeom>
+          <a:solidFill>
+            <a:srgbClr val="141832"/>
+          </a:solidFill>
+          <a:ln w="17780">
+            <a:solidFill>
+              <a:srgbClr val="845EC2"/>
+            </a:solidFill>
+          </a:ln>
+        </p:spPr>
+        <p:style>
+          <a:lnRef idx="1">
+            <a:schemeClr val="accent1"/>
+          </a:lnRef>
+          <a:fillRef idx="3">
+            <a:schemeClr val="accent1"/>
+          </a:fillRef>
+          <a:effectRef idx="2">
+            <a:schemeClr val="accent1"/>
+          </a:effectRef>
+          <a:fontRef idx="minor">
+            <a:schemeClr val="lt1"/>
+          </a:fontRef>
+        </p:style>
+        <p:txBody>
+          <a:bodyPr rtlCol="0" anchor="ctr"/>
+          <a:lstStyle/>
+          <a:p>
+            <a:pPr algn="ctr"/>
+          </a:p>
+        </p:txBody>
+      </p:sp>
+      <p:sp>
+        <p:nvSpPr>
+          <p:cNvPr id="23" name="TextBox 22"/>
+          <p:cNvSpPr txBox="1"/>
+          <p:nvPr/>
+        </p:nvSpPr>
+        <p:spPr>
+          <a:xfrm>
+            <a:off x="2587752" y="3794760"/>
+            <a:ext cx="2459736" cy="320040"/>
           </a:xfrm>
           <a:prstGeom prst="rect">
             <a:avLst/>
@@ -17209,12 +18714,12 @@
           <a:p>
             <a:pPr algn="l">
               <a:lnSpc>
-                <a:spcPts val="2039"/>
-              </a:lnSpc>
-              <a:spcAft>
-                <a:spcPts val="0"/>
-              </a:spcAft>
-              <a:defRPr sz="1700" b="1">
+                <a:spcPts val="1920"/>
+              </a:lnSpc>
+              <a:spcAft>
+                <a:spcPts val="0"/>
+              </a:spcAft>
+              <a:defRPr sz="1600" b="1">
                 <a:solidFill>
                   <a:srgbClr val="FFFFFF"/>
                 </a:solidFill>
@@ -17222,21 +18727,21 @@
               </a:defRPr>
             </a:pPr>
             <a:r>
-              <a:t>Isolation Forest</a:t>
-            </a:r>
-          </a:p>
-        </p:txBody>
-      </p:sp>
-      <p:sp>
-        <p:nvSpPr>
-          <p:cNvPr id="18" name="TextBox 17"/>
-          <p:cNvSpPr txBox="1"/>
-          <p:nvPr/>
-        </p:nvSpPr>
-        <p:spPr>
-          <a:xfrm>
-            <a:off x="2377440" y="3794760"/>
-            <a:ext cx="9144000" cy="502920"/>
+              <a:t>One-Class SVM</a:t>
+            </a:r>
+          </a:p>
+        </p:txBody>
+      </p:sp>
+      <p:sp>
+        <p:nvSpPr>
+          <p:cNvPr id="24" name="TextBox 23"/>
+          <p:cNvSpPr txBox="1"/>
+          <p:nvPr/>
+        </p:nvSpPr>
+        <p:spPr>
+          <a:xfrm>
+            <a:off x="2587752" y="4160520"/>
+            <a:ext cx="2459736" cy="822960"/>
           </a:xfrm>
           <a:prstGeom prst="rect">
             <a:avLst/>
@@ -17256,7 +18761,7 @@
               <a:spcAft>
                 <a:spcPts val="0"/>
               </a:spcAft>
-              <a:defRPr sz="1300" b="0">
+              <a:defRPr sz="1200" b="0">
                 <a:solidFill>
                   <a:srgbClr val="CCCCCC"/>
                 </a:solidFill>
@@ -17264,21 +18769,21 @@
               </a:defRPr>
             </a:pPr>
             <a:r>
-              <a:t>Tree-based method that isolates anomalies efficiently. Low computational cost, suitable for real-time streaming.</a:t>
-            </a:r>
-          </a:p>
-        </p:txBody>
-      </p:sp>
-      <p:sp>
-        <p:nvSpPr>
-          <p:cNvPr id="19" name="Rounded Rectangle 18"/>
+              <a:t>Builds a boundary around normal behavior, then flags data outside that boundary.</a:t>
+            </a:r>
+          </a:p>
+        </p:txBody>
+      </p:sp>
+      <p:sp>
+        <p:nvSpPr>
+          <p:cNvPr id="25" name="Rounded Rectangle 24"/>
           <p:cNvSpPr/>
           <p:nvPr/>
         </p:nvSpPr>
         <p:spPr>
           <a:xfrm>
-            <a:off x="731520" y="4434840"/>
-            <a:ext cx="1463040" cy="292608"/>
+            <a:off x="4206240" y="3493008"/>
+            <a:ext cx="841248" cy="256032"/>
           </a:xfrm>
           <a:prstGeom prst="roundRect">
             <a:avLst/>
@@ -17314,14 +18819,14 @@
       </p:sp>
       <p:sp>
         <p:nvSpPr>
-          <p:cNvPr id="20" name="TextBox 19"/>
-          <p:cNvSpPr txBox="1"/>
-          <p:nvPr/>
-        </p:nvSpPr>
-        <p:spPr>
-          <a:xfrm>
-            <a:off x="731520" y="4453128"/>
-            <a:ext cx="1463040" cy="274320"/>
+          <p:cNvPr id="26" name="TextBox 25"/>
+          <p:cNvSpPr txBox="1"/>
+          <p:nvPr/>
+        </p:nvSpPr>
+        <p:spPr>
+          <a:xfrm>
+            <a:off x="4206240" y="3511296"/>
+            <a:ext cx="841248" cy="219456"/>
           </a:xfrm>
           <a:prstGeom prst="rect">
             <a:avLst/>
@@ -17336,12 +18841,12 @@
           <a:p>
             <a:pPr algn="ctr">
               <a:lnSpc>
-                <a:spcPts val="1200"/>
-              </a:lnSpc>
-              <a:spcAft>
-                <a:spcPts val="0"/>
-              </a:spcAft>
-              <a:defRPr sz="1000" b="1">
+                <a:spcPts val="960"/>
+              </a:lnSpc>
+              <a:spcAft>
+                <a:spcPts val="0"/>
+              </a:spcAft>
+              <a:defRPr sz="800" b="1">
                 <a:solidFill>
                   <a:srgbClr val="FFFFFF"/>
                 </a:solidFill>
@@ -17356,14 +18861,59 @@
       </p:sp>
       <p:sp>
         <p:nvSpPr>
-          <p:cNvPr id="21" name="TextBox 20"/>
-          <p:cNvSpPr txBox="1"/>
-          <p:nvPr/>
-        </p:nvSpPr>
-        <p:spPr>
-          <a:xfrm>
-            <a:off x="2377440" y="4434840"/>
-            <a:ext cx="4114800" cy="320040"/>
+          <p:cNvPr id="27" name="Rounded Rectangle 26"/>
+          <p:cNvSpPr/>
+          <p:nvPr/>
+        </p:nvSpPr>
+        <p:spPr>
+          <a:xfrm>
+            <a:off x="5715000" y="3657600"/>
+            <a:ext cx="2788920" cy="1463040"/>
+          </a:xfrm>
+          <a:prstGeom prst="roundRect">
+            <a:avLst/>
+          </a:prstGeom>
+          <a:solidFill>
+            <a:srgbClr val="141832"/>
+          </a:solidFill>
+          <a:ln w="17780">
+            <a:solidFill>
+              <a:srgbClr val="FF8C00"/>
+            </a:solidFill>
+          </a:ln>
+        </p:spPr>
+        <p:style>
+          <a:lnRef idx="1">
+            <a:schemeClr val="accent1"/>
+          </a:lnRef>
+          <a:fillRef idx="3">
+            <a:schemeClr val="accent1"/>
+          </a:fillRef>
+          <a:effectRef idx="2">
+            <a:schemeClr val="accent1"/>
+          </a:effectRef>
+          <a:fontRef idx="minor">
+            <a:schemeClr val="lt1"/>
+          </a:fontRef>
+        </p:style>
+        <p:txBody>
+          <a:bodyPr rtlCol="0" anchor="ctr"/>
+          <a:lstStyle/>
+          <a:p>
+            <a:pPr algn="ctr"/>
+          </a:p>
+        </p:txBody>
+      </p:sp>
+      <p:sp>
+        <p:nvSpPr>
+          <p:cNvPr id="28" name="TextBox 27"/>
+          <p:cNvSpPr txBox="1"/>
+          <p:nvPr/>
+        </p:nvSpPr>
+        <p:spPr>
+          <a:xfrm>
+            <a:off x="5879592" y="3794760"/>
+            <a:ext cx="2459736" cy="320040"/>
           </a:xfrm>
           <a:prstGeom prst="rect">
             <a:avLst/>
@@ -17378,12 +18928,12 @@
           <a:p>
             <a:pPr algn="l">
               <a:lnSpc>
-                <a:spcPts val="2039"/>
-              </a:lnSpc>
-              <a:spcAft>
-                <a:spcPts val="0"/>
-              </a:spcAft>
-              <a:defRPr sz="1700" b="1">
+                <a:spcPts val="1920"/>
+              </a:lnSpc>
+              <a:spcAft>
+                <a:spcPts val="0"/>
+              </a:spcAft>
+              <a:defRPr sz="1600" b="1">
                 <a:solidFill>
                   <a:srgbClr val="FFFFFF"/>
                 </a:solidFill>
@@ -17391,21 +18941,21 @@
               </a:defRPr>
             </a:pPr>
             <a:r>
-              <a:t>One-Class SVM</a:t>
-            </a:r>
-          </a:p>
-        </p:txBody>
-      </p:sp>
-      <p:sp>
-        <p:nvSpPr>
-          <p:cNvPr id="22" name="TextBox 21"/>
-          <p:cNvSpPr txBox="1"/>
-          <p:nvPr/>
-        </p:nvSpPr>
-        <p:spPr>
-          <a:xfrm>
-            <a:off x="2377440" y="4754880"/>
-            <a:ext cx="9144000" cy="502920"/>
+              <a:t>GAN-based Models</a:t>
+            </a:r>
+          </a:p>
+        </p:txBody>
+      </p:sp>
+      <p:sp>
+        <p:nvSpPr>
+          <p:cNvPr id="29" name="TextBox 28"/>
+          <p:cNvSpPr txBox="1"/>
+          <p:nvPr/>
+        </p:nvSpPr>
+        <p:spPr>
+          <a:xfrm>
+            <a:off x="5879592" y="4160520"/>
+            <a:ext cx="2459736" cy="822960"/>
           </a:xfrm>
           <a:prstGeom prst="rect">
             <a:avLst/>
@@ -17425,7 +18975,7 @@
               <a:spcAft>
                 <a:spcPts val="0"/>
               </a:spcAft>
-              <a:defRPr sz="1300" b="0">
+              <a:defRPr sz="1200" b="0">
                 <a:solidFill>
                   <a:srgbClr val="CCCCCC"/>
                 </a:solidFill>
@@ -17433,21 +18983,21 @@
               </a:defRPr>
             </a:pPr>
             <a:r>
-              <a:t>Learns a boundary around normal data. Effective when labeled anomaly data is scarce or unavailable.</a:t>
-            </a:r>
-          </a:p>
-        </p:txBody>
-      </p:sp>
-      <p:sp>
-        <p:nvSpPr>
-          <p:cNvPr id="23" name="Rounded Rectangle 22"/>
+              <a:t>Generate or compare normal-looking samples so unusual behavior stands out more clearly.</a:t>
+            </a:r>
+          </a:p>
+        </p:txBody>
+      </p:sp>
+      <p:sp>
+        <p:nvSpPr>
+          <p:cNvPr id="30" name="Rounded Rectangle 29"/>
           <p:cNvSpPr/>
           <p:nvPr/>
         </p:nvSpPr>
         <p:spPr>
           <a:xfrm>
-            <a:off x="731520" y="5394960"/>
-            <a:ext cx="1463040" cy="292608"/>
+            <a:off x="7498080" y="3493008"/>
+            <a:ext cx="841248" cy="256032"/>
           </a:xfrm>
           <a:prstGeom prst="roundRect">
             <a:avLst/>
@@ -17483,14 +19033,14 @@
       </p:sp>
       <p:sp>
         <p:nvSpPr>
-          <p:cNvPr id="24" name="TextBox 23"/>
-          <p:cNvSpPr txBox="1"/>
-          <p:nvPr/>
-        </p:nvSpPr>
-        <p:spPr>
-          <a:xfrm>
-            <a:off x="731520" y="5413248"/>
-            <a:ext cx="1463040" cy="274320"/>
+          <p:cNvPr id="31" name="TextBox 30"/>
+          <p:cNvSpPr txBox="1"/>
+          <p:nvPr/>
+        </p:nvSpPr>
+        <p:spPr>
+          <a:xfrm>
+            <a:off x="7498080" y="3511296"/>
+            <a:ext cx="841248" cy="219456"/>
           </a:xfrm>
           <a:prstGeom prst="rect">
             <a:avLst/>
@@ -17505,12 +19055,12 @@
           <a:p>
             <a:pPr algn="ctr">
               <a:lnSpc>
-                <a:spcPts val="1200"/>
-              </a:lnSpc>
-              <a:spcAft>
-                <a:spcPts val="0"/>
-              </a:spcAft>
-              <a:defRPr sz="1000" b="1">
+                <a:spcPts val="960"/>
+              </a:lnSpc>
+              <a:spcAft>
+                <a:spcPts val="0"/>
+              </a:spcAft>
+              <a:defRPr sz="800" b="1">
                 <a:solidFill>
                   <a:srgbClr val="FFFFFF"/>
                 </a:solidFill>
@@ -17525,91 +19075,7 @@
       </p:sp>
       <p:sp>
         <p:nvSpPr>
-          <p:cNvPr id="25" name="TextBox 24"/>
-          <p:cNvSpPr txBox="1"/>
-          <p:nvPr/>
-        </p:nvSpPr>
-        <p:spPr>
-          <a:xfrm>
-            <a:off x="2377440" y="5394960"/>
-            <a:ext cx="4114800" cy="320040"/>
-          </a:xfrm>
-          <a:prstGeom prst="rect">
-            <a:avLst/>
-          </a:prstGeom>
-          <a:noFill/>
-        </p:spPr>
-        <p:txBody>
-          <a:bodyPr wrap="square">
-            <a:spAutoFit/>
-          </a:bodyPr>
-          <a:lstStyle/>
-          <a:p>
-            <a:pPr algn="l">
-              <a:lnSpc>
-                <a:spcPts val="2039"/>
-              </a:lnSpc>
-              <a:spcAft>
-                <a:spcPts val="0"/>
-              </a:spcAft>
-              <a:defRPr sz="1700" b="1">
-                <a:solidFill>
-                  <a:srgbClr val="FFFFFF"/>
-                </a:solidFill>
-                <a:latin typeface="Calibri"/>
-              </a:defRPr>
-            </a:pPr>
-            <a:r>
-              <a:t>GAN-based Detection</a:t>
-            </a:r>
-          </a:p>
-        </p:txBody>
-      </p:sp>
-      <p:sp>
-        <p:nvSpPr>
-          <p:cNvPr id="26" name="TextBox 25"/>
-          <p:cNvSpPr txBox="1"/>
-          <p:nvPr/>
-        </p:nvSpPr>
-        <p:spPr>
-          <a:xfrm>
-            <a:off x="2377440" y="5715000"/>
-            <a:ext cx="9144000" cy="502920"/>
-          </a:xfrm>
-          <a:prstGeom prst="rect">
-            <a:avLst/>
-          </a:prstGeom>
-          <a:noFill/>
-        </p:spPr>
-        <p:txBody>
-          <a:bodyPr wrap="square">
-            <a:spAutoFit/>
-          </a:bodyPr>
-          <a:lstStyle/>
-          <a:p>
-            <a:pPr algn="l">
-              <a:lnSpc>
-                <a:spcPts val="1560"/>
-              </a:lnSpc>
-              <a:spcAft>
-                <a:spcPts val="0"/>
-              </a:spcAft>
-              <a:defRPr sz="1300" b="0">
-                <a:solidFill>
-                  <a:srgbClr val="CCCCCC"/>
-                </a:solidFill>
-                <a:latin typeface="Calibri"/>
-              </a:defRPr>
-            </a:pPr>
-            <a:r>
-              <a:t>Generator learns normal distribution; discriminator detects out-of-distribution samples as anomalies.</a:t>
-            </a:r>
-          </a:p>
-        </p:txBody>
-      </p:sp>
-      <p:sp>
-        <p:nvSpPr>
-          <p:cNvPr id="27" name="TextBox 26"/>
+          <p:cNvPr id="32" name="TextBox 31"/>
           <p:cNvSpPr txBox="1"/>
           <p:nvPr/>
         </p:nvSpPr>
@@ -17651,7 +19117,7 @@
       </p:sp>
       <p:sp>
         <p:nvSpPr>
-          <p:cNvPr id="28" name="TextBox 27"/>
+          <p:cNvPr id="33" name="TextBox 32"/>
           <p:cNvSpPr txBox="1"/>
           <p:nvPr/>
         </p:nvSpPr>
@@ -17840,7 +19306,7 @@
               </a:defRPr>
             </a:pPr>
             <a:r>
-              <a:t>Anomaly Detection: Key Findings from the Literature</a:t>
+              <a:t>Anomaly Detection: Main Lessons</a:t>
             </a:r>
           </a:p>
         </p:txBody>
@@ -17882,7 +19348,7 @@
               </a:defRPr>
             </a:pPr>
             <a:r>
-              <a:t>Patterns and insights across surveyed papers</a:t>
+              <a:t>Less text, stronger takeaways</a:t>
             </a:r>
           </a:p>
         </p:txBody>
@@ -17931,151 +19397,14 @@
       </p:sp>
       <p:sp>
         <p:nvSpPr>
-          <p:cNvPr id="7" name="TextBox 6"/>
-          <p:cNvSpPr txBox="1"/>
-          <p:nvPr/>
-        </p:nvSpPr>
-        <p:spPr>
-          <a:xfrm>
-            <a:off x="731520" y="1554480"/>
-            <a:ext cx="10515600" cy="4572000"/>
-          </a:xfrm>
-          <a:prstGeom prst="rect">
-            <a:avLst/>
-          </a:prstGeom>
-          <a:noFill/>
-        </p:spPr>
-        <p:txBody>
-          <a:bodyPr wrap="square">
-            <a:spAutoFit/>
-          </a:bodyPr>
-          <a:lstStyle/>
-          <a:p>
-            <a:pPr>
-              <a:spcBef>
-                <a:spcPts val="400"/>
-              </a:spcBef>
-              <a:spcAft>
-                <a:spcPts val="1200"/>
-              </a:spcAft>
-              <a:defRPr sz="1600">
-                <a:solidFill>
-                  <a:srgbClr val="FFFFFF"/>
-                </a:solidFill>
-                <a:latin typeface="Calibri"/>
-              </a:defRPr>
-            </a:pPr>
-            <a:r>
-              <a:t>Deep learning methods (LSTM, Autoencoders) consistently outperform traditional statistical approaches for multi-variate telemetry anomaly detection</a:t>
-            </a:r>
-          </a:p>
-          <a:p>
-            <a:pPr>
-              <a:spcBef>
-                <a:spcPts val="400"/>
-              </a:spcBef>
-              <a:spcAft>
-                <a:spcPts val="1200"/>
-              </a:spcAft>
-              <a:defRPr sz="1600">
-                <a:solidFill>
-                  <a:srgbClr val="FFFFFF"/>
-                </a:solidFill>
-                <a:latin typeface="Calibri"/>
-              </a:defRPr>
-            </a:pPr>
-            <a:r>
-              <a:t>Unsupervised methods are favored in practice — labeled anomaly data is extremely scarce in real network environments</a:t>
-            </a:r>
-          </a:p>
-          <a:p>
-            <a:pPr>
-              <a:spcBef>
-                <a:spcPts val="400"/>
-              </a:spcBef>
-              <a:spcAft>
-                <a:spcPts val="1200"/>
-              </a:spcAft>
-              <a:defRPr sz="1600">
-                <a:solidFill>
-                  <a:srgbClr val="FFFFFF"/>
-                </a:solidFill>
-                <a:latin typeface="Calibri"/>
-              </a:defRPr>
-            </a:pPr>
-            <a:r>
-              <a:t>Hybrid approaches (e.g., Autoencoder + Isolation Forest) combine strengths: representation learning with efficient anomaly scoring</a:t>
-            </a:r>
-          </a:p>
-          <a:p>
-            <a:pPr>
-              <a:spcBef>
-                <a:spcPts val="400"/>
-              </a:spcBef>
-              <a:spcAft>
-                <a:spcPts val="1200"/>
-              </a:spcAft>
-              <a:defRPr sz="1600">
-                <a:solidFill>
-                  <a:srgbClr val="FFFFFF"/>
-                </a:solidFill>
-                <a:latin typeface="Calibri"/>
-              </a:defRPr>
-            </a:pPr>
-            <a:r>
-              <a:t>Real-time detection remains challenging: most deep learning models require significant computational resources for inference at line-rate</a:t>
-            </a:r>
-          </a:p>
-          <a:p>
-            <a:pPr>
-              <a:spcBef>
-                <a:spcPts val="400"/>
-              </a:spcBef>
-              <a:spcAft>
-                <a:spcPts val="1200"/>
-              </a:spcAft>
-              <a:defRPr sz="1600">
-                <a:solidFill>
-                  <a:srgbClr val="FFFFFF"/>
-                </a:solidFill>
-                <a:latin typeface="Calibri"/>
-              </a:defRPr>
-            </a:pPr>
-            <a:r>
-              <a:t>Transfer learning shows promise for generalizing anomaly detection across different network domains without full retraining</a:t>
-            </a:r>
-          </a:p>
-          <a:p>
-            <a:pPr>
-              <a:spcBef>
-                <a:spcPts val="400"/>
-              </a:spcBef>
-              <a:spcAft>
-                <a:spcPts val="1200"/>
-              </a:spcAft>
-              <a:defRPr sz="1600">
-                <a:solidFill>
-                  <a:srgbClr val="FFFFFF"/>
-                </a:solidFill>
-                <a:latin typeface="Calibri"/>
-              </a:defRPr>
-            </a:pPr>
-            <a:r>
-              <a:t>In-band telemetry (INT) provides richer features than traditional flow data, improving detection accuracy by 15–25% in recent studies</a:t>
-            </a:r>
-          </a:p>
-        </p:txBody>
-      </p:sp>
-      <p:sp>
-        <p:nvSpPr>
-          <p:cNvPr id="8" name="Rounded Rectangle 7"/>
+          <p:cNvPr id="7" name="Rounded Rectangle 6"/>
           <p:cNvSpPr/>
           <p:nvPr/>
         </p:nvSpPr>
         <p:spPr>
           <a:xfrm>
-            <a:off x="7498079" y="4572000"/>
-            <a:ext cx="4389120" cy="1371600"/>
+            <a:off x="777240" y="1737360"/>
+            <a:ext cx="4572000" cy="1508760"/>
           </a:xfrm>
           <a:prstGeom prst="roundRect">
             <a:avLst/>
@@ -18083,7 +19412,7 @@
           <a:solidFill>
             <a:srgbClr val="141832"/>
           </a:solidFill>
-          <a:ln w="19050">
+          <a:ln w="17780">
             <a:solidFill>
               <a:srgbClr val="009FFD"/>
             </a:solidFill>
@@ -18113,14 +19442,56 @@
       </p:sp>
       <p:sp>
         <p:nvSpPr>
+          <p:cNvPr id="8" name="TextBox 7"/>
+          <p:cNvSpPr txBox="1"/>
+          <p:nvPr/>
+        </p:nvSpPr>
+        <p:spPr>
+          <a:xfrm>
+            <a:off x="941832" y="1874520"/>
+            <a:ext cx="4242816" cy="320040"/>
+          </a:xfrm>
+          <a:prstGeom prst="rect">
+            <a:avLst/>
+          </a:prstGeom>
+          <a:noFill/>
+        </p:spPr>
+        <p:txBody>
+          <a:bodyPr wrap="square">
+            <a:spAutoFit/>
+          </a:bodyPr>
+          <a:lstStyle/>
+          <a:p>
+            <a:pPr algn="l">
+              <a:lnSpc>
+                <a:spcPts val="1920"/>
+              </a:lnSpc>
+              <a:spcAft>
+                <a:spcPts val="0"/>
+              </a:spcAft>
+              <a:defRPr sz="1600" b="1">
+                <a:solidFill>
+                  <a:srgbClr val="009FFD"/>
+                </a:solidFill>
+                <a:latin typeface="Calibri"/>
+              </a:defRPr>
+            </a:pPr>
+            <a:r>
+              <a:t>Deep learning is strong</a:t>
+            </a:r>
+          </a:p>
+        </p:txBody>
+      </p:sp>
+      <p:sp>
+        <p:nvSpPr>
           <p:cNvPr id="9" name="TextBox 8"/>
           <p:cNvSpPr txBox="1"/>
           <p:nvPr/>
         </p:nvSpPr>
         <p:spPr>
           <a:xfrm>
-            <a:off x="7772400" y="4709160"/>
-            <a:ext cx="3840480" cy="365760"/>
+            <a:off x="941832" y="2240280"/>
+            <a:ext cx="4242816" cy="868680"/>
           </a:xfrm>
           <a:prstGeom prst="rect">
             <a:avLst/>
@@ -18135,12 +19506,486 @@
           <a:p>
             <a:pPr algn="l">
               <a:lnSpc>
-                <a:spcPts val="1680"/>
-              </a:lnSpc>
-              <a:spcAft>
-                <a:spcPts val="0"/>
-              </a:spcAft>
-              <a:defRPr sz="1400" b="1">
+                <a:spcPts val="1560"/>
+              </a:lnSpc>
+              <a:spcAft>
+                <a:spcPts val="0"/>
+              </a:spcAft>
+              <a:defRPr sz="1200" b="0">
+                <a:solidFill>
+                  <a:srgbClr val="CCCCCC"/>
+                </a:solidFill>
+                <a:latin typeface="Calibri"/>
+              </a:defRPr>
+            </a:pPr>
+            <a:r>
+              <a:t>Deep learning often beats older statistical methods when telemetry has many features.</a:t>
+            </a:r>
+          </a:p>
+        </p:txBody>
+      </p:sp>
+      <p:sp>
+        <p:nvSpPr>
+          <p:cNvPr id="10" name="Rounded Rectangle 9"/>
+          <p:cNvSpPr/>
+          <p:nvPr/>
+        </p:nvSpPr>
+        <p:spPr>
+          <a:xfrm>
+            <a:off x="5989320" y="1737360"/>
+            <a:ext cx="4572000" cy="1508760"/>
+          </a:xfrm>
+          <a:prstGeom prst="roundRect">
+            <a:avLst/>
+          </a:prstGeom>
+          <a:solidFill>
+            <a:srgbClr val="141832"/>
+          </a:solidFill>
+          <a:ln w="17780">
+            <a:solidFill>
+              <a:srgbClr val="00C9A7"/>
+            </a:solidFill>
+          </a:ln>
+        </p:spPr>
+        <p:style>
+          <a:lnRef idx="1">
+            <a:schemeClr val="accent1"/>
+          </a:lnRef>
+          <a:fillRef idx="3">
+            <a:schemeClr val="accent1"/>
+          </a:fillRef>
+          <a:effectRef idx="2">
+            <a:schemeClr val="accent1"/>
+          </a:effectRef>
+          <a:fontRef idx="minor">
+            <a:schemeClr val="lt1"/>
+          </a:fontRef>
+        </p:style>
+        <p:txBody>
+          <a:bodyPr rtlCol="0" anchor="ctr"/>
+          <a:lstStyle/>
+          <a:p>
+            <a:pPr algn="ctr"/>
+          </a:p>
+        </p:txBody>
+      </p:sp>
+      <p:sp>
+        <p:nvSpPr>
+          <p:cNvPr id="11" name="TextBox 10"/>
+          <p:cNvSpPr txBox="1"/>
+          <p:nvPr/>
+        </p:nvSpPr>
+        <p:spPr>
+          <a:xfrm>
+            <a:off x="6153912" y="1874520"/>
+            <a:ext cx="4242816" cy="320040"/>
+          </a:xfrm>
+          <a:prstGeom prst="rect">
+            <a:avLst/>
+          </a:prstGeom>
+          <a:noFill/>
+        </p:spPr>
+        <p:txBody>
+          <a:bodyPr wrap="square">
+            <a:spAutoFit/>
+          </a:bodyPr>
+          <a:lstStyle/>
+          <a:p>
+            <a:pPr algn="l">
+              <a:lnSpc>
+                <a:spcPts val="1920"/>
+              </a:lnSpc>
+              <a:spcAft>
+                <a:spcPts val="0"/>
+              </a:spcAft>
+              <a:defRPr sz="1600" b="1">
+                <a:solidFill>
+                  <a:srgbClr val="00C9A7"/>
+                </a:solidFill>
+                <a:latin typeface="Calibri"/>
+              </a:defRPr>
+            </a:pPr>
+            <a:r>
+              <a:t>Unsupervised is practical</a:t>
+            </a:r>
+          </a:p>
+        </p:txBody>
+      </p:sp>
+      <p:sp>
+        <p:nvSpPr>
+          <p:cNvPr id="12" name="TextBox 11"/>
+          <p:cNvSpPr txBox="1"/>
+          <p:nvPr/>
+        </p:nvSpPr>
+        <p:spPr>
+          <a:xfrm>
+            <a:off x="6153912" y="2240280"/>
+            <a:ext cx="4242816" cy="868680"/>
+          </a:xfrm>
+          <a:prstGeom prst="rect">
+            <a:avLst/>
+          </a:prstGeom>
+          <a:noFill/>
+        </p:spPr>
+        <p:txBody>
+          <a:bodyPr wrap="square">
+            <a:spAutoFit/>
+          </a:bodyPr>
+          <a:lstStyle/>
+          <a:p>
+            <a:pPr algn="l">
+              <a:lnSpc>
+                <a:spcPts val="1560"/>
+              </a:lnSpc>
+              <a:spcAft>
+                <a:spcPts val="0"/>
+              </a:spcAft>
+              <a:defRPr sz="1200" b="0">
+                <a:solidFill>
+                  <a:srgbClr val="CCCCCC"/>
+                </a:solidFill>
+                <a:latin typeface="Calibri"/>
+              </a:defRPr>
+            </a:pPr>
+            <a:r>
+              <a:t>Unsupervised learning is popular because real networks rarely have enough labeled anomaly data.</a:t>
+            </a:r>
+          </a:p>
+        </p:txBody>
+      </p:sp>
+      <p:sp>
+        <p:nvSpPr>
+          <p:cNvPr id="13" name="Rounded Rectangle 12"/>
+          <p:cNvSpPr/>
+          <p:nvPr/>
+        </p:nvSpPr>
+        <p:spPr>
+          <a:xfrm>
+            <a:off x="777240" y="3611880"/>
+            <a:ext cx="4572000" cy="1508760"/>
+          </a:xfrm>
+          <a:prstGeom prst="roundRect">
+            <a:avLst/>
+          </a:prstGeom>
+          <a:solidFill>
+            <a:srgbClr val="141832"/>
+          </a:solidFill>
+          <a:ln w="17780">
+            <a:solidFill>
+              <a:srgbClr val="845EC2"/>
+            </a:solidFill>
+          </a:ln>
+        </p:spPr>
+        <p:style>
+          <a:lnRef idx="1">
+            <a:schemeClr val="accent1"/>
+          </a:lnRef>
+          <a:fillRef idx="3">
+            <a:schemeClr val="accent1"/>
+          </a:fillRef>
+          <a:effectRef idx="2">
+            <a:schemeClr val="accent1"/>
+          </a:effectRef>
+          <a:fontRef idx="minor">
+            <a:schemeClr val="lt1"/>
+          </a:fontRef>
+        </p:style>
+        <p:txBody>
+          <a:bodyPr rtlCol="0" anchor="ctr"/>
+          <a:lstStyle/>
+          <a:p>
+            <a:pPr algn="ctr"/>
+          </a:p>
+        </p:txBody>
+      </p:sp>
+      <p:sp>
+        <p:nvSpPr>
+          <p:cNvPr id="14" name="TextBox 13"/>
+          <p:cNvSpPr txBox="1"/>
+          <p:nvPr/>
+        </p:nvSpPr>
+        <p:spPr>
+          <a:xfrm>
+            <a:off x="941832" y="3749040"/>
+            <a:ext cx="4242816" cy="320040"/>
+          </a:xfrm>
+          <a:prstGeom prst="rect">
+            <a:avLst/>
+          </a:prstGeom>
+          <a:noFill/>
+        </p:spPr>
+        <p:txBody>
+          <a:bodyPr wrap="square">
+            <a:spAutoFit/>
+          </a:bodyPr>
+          <a:lstStyle/>
+          <a:p>
+            <a:pPr algn="l">
+              <a:lnSpc>
+                <a:spcPts val="1920"/>
+              </a:lnSpc>
+              <a:spcAft>
+                <a:spcPts val="0"/>
+              </a:spcAft>
+              <a:defRPr sz="1600" b="1">
+                <a:solidFill>
+                  <a:srgbClr val="845EC2"/>
+                </a:solidFill>
+                <a:latin typeface="Calibri"/>
+              </a:defRPr>
+            </a:pPr>
+            <a:r>
+              <a:t>Hybrid models help</a:t>
+            </a:r>
+          </a:p>
+        </p:txBody>
+      </p:sp>
+      <p:sp>
+        <p:nvSpPr>
+          <p:cNvPr id="15" name="TextBox 14"/>
+          <p:cNvSpPr txBox="1"/>
+          <p:nvPr/>
+        </p:nvSpPr>
+        <p:spPr>
+          <a:xfrm>
+            <a:off x="941832" y="4114800"/>
+            <a:ext cx="4242816" cy="868680"/>
+          </a:xfrm>
+          <a:prstGeom prst="rect">
+            <a:avLst/>
+          </a:prstGeom>
+          <a:noFill/>
+        </p:spPr>
+        <p:txBody>
+          <a:bodyPr wrap="square">
+            <a:spAutoFit/>
+          </a:bodyPr>
+          <a:lstStyle/>
+          <a:p>
+            <a:pPr algn="l">
+              <a:lnSpc>
+                <a:spcPts val="1560"/>
+              </a:lnSpc>
+              <a:spcAft>
+                <a:spcPts val="0"/>
+              </a:spcAft>
+              <a:defRPr sz="1200" b="0">
+                <a:solidFill>
+                  <a:srgbClr val="CCCCCC"/>
+                </a:solidFill>
+                <a:latin typeface="Calibri"/>
+              </a:defRPr>
+            </a:pPr>
+            <a:r>
+              <a:t>Hybrid models work well because they mix strong feature learning with fast scoring.</a:t>
+            </a:r>
+          </a:p>
+        </p:txBody>
+      </p:sp>
+      <p:sp>
+        <p:nvSpPr>
+          <p:cNvPr id="16" name="Rounded Rectangle 15"/>
+          <p:cNvSpPr/>
+          <p:nvPr/>
+        </p:nvSpPr>
+        <p:spPr>
+          <a:xfrm>
+            <a:off x="5989320" y="3611880"/>
+            <a:ext cx="4572000" cy="1508760"/>
+          </a:xfrm>
+          <a:prstGeom prst="roundRect">
+            <a:avLst/>
+          </a:prstGeom>
+          <a:solidFill>
+            <a:srgbClr val="141832"/>
+          </a:solidFill>
+          <a:ln w="17780">
+            <a:solidFill>
+              <a:srgbClr val="FF8C00"/>
+            </a:solidFill>
+          </a:ln>
+        </p:spPr>
+        <p:style>
+          <a:lnRef idx="1">
+            <a:schemeClr val="accent1"/>
+          </a:lnRef>
+          <a:fillRef idx="3">
+            <a:schemeClr val="accent1"/>
+          </a:fillRef>
+          <a:effectRef idx="2">
+            <a:schemeClr val="accent1"/>
+          </a:effectRef>
+          <a:fontRef idx="minor">
+            <a:schemeClr val="lt1"/>
+          </a:fontRef>
+        </p:style>
+        <p:txBody>
+          <a:bodyPr rtlCol="0" anchor="ctr"/>
+          <a:lstStyle/>
+          <a:p>
+            <a:pPr algn="ctr"/>
+          </a:p>
+        </p:txBody>
+      </p:sp>
+      <p:sp>
+        <p:nvSpPr>
+          <p:cNvPr id="17" name="TextBox 16"/>
+          <p:cNvSpPr txBox="1"/>
+          <p:nvPr/>
+        </p:nvSpPr>
+        <p:spPr>
+          <a:xfrm>
+            <a:off x="6153912" y="3749040"/>
+            <a:ext cx="4242816" cy="320040"/>
+          </a:xfrm>
+          <a:prstGeom prst="rect">
+            <a:avLst/>
+          </a:prstGeom>
+          <a:noFill/>
+        </p:spPr>
+        <p:txBody>
+          <a:bodyPr wrap="square">
+            <a:spAutoFit/>
+          </a:bodyPr>
+          <a:lstStyle/>
+          <a:p>
+            <a:pPr algn="l">
+              <a:lnSpc>
+                <a:spcPts val="1920"/>
+              </a:lnSpc>
+              <a:spcAft>
+                <a:spcPts val="0"/>
+              </a:spcAft>
+              <a:defRPr sz="1600" b="1">
+                <a:solidFill>
+                  <a:srgbClr val="FF8C00"/>
+                </a:solidFill>
+                <a:latin typeface="Calibri"/>
+              </a:defRPr>
+            </a:pPr>
+            <a:r>
+              <a:t>Speed is still hard</a:t>
+            </a:r>
+          </a:p>
+        </p:txBody>
+      </p:sp>
+      <p:sp>
+        <p:nvSpPr>
+          <p:cNvPr id="18" name="TextBox 17"/>
+          <p:cNvSpPr txBox="1"/>
+          <p:nvPr/>
+        </p:nvSpPr>
+        <p:spPr>
+          <a:xfrm>
+            <a:off x="6153912" y="4114800"/>
+            <a:ext cx="4242816" cy="868680"/>
+          </a:xfrm>
+          <a:prstGeom prst="rect">
+            <a:avLst/>
+          </a:prstGeom>
+          <a:noFill/>
+        </p:spPr>
+        <p:txBody>
+          <a:bodyPr wrap="square">
+            <a:spAutoFit/>
+          </a:bodyPr>
+          <a:lstStyle/>
+          <a:p>
+            <a:pPr algn="l">
+              <a:lnSpc>
+                <a:spcPts val="1560"/>
+              </a:lnSpc>
+              <a:spcAft>
+                <a:spcPts val="0"/>
+              </a:spcAft>
+              <a:defRPr sz="1200" b="0">
+                <a:solidFill>
+                  <a:srgbClr val="CCCCCC"/>
+                </a:solidFill>
+                <a:latin typeface="Calibri"/>
+              </a:defRPr>
+            </a:pPr>
+            <a:r>
+              <a:t>Real-time use is still hard because accurate models can be expensive to run at scale.</a:t>
+            </a:r>
+          </a:p>
+        </p:txBody>
+      </p:sp>
+      <p:sp>
+        <p:nvSpPr>
+          <p:cNvPr id="19" name="Rounded Rectangle 18"/>
+          <p:cNvSpPr/>
+          <p:nvPr/>
+        </p:nvSpPr>
+        <p:spPr>
+          <a:xfrm>
+            <a:off x="1965960" y="5394960"/>
+            <a:ext cx="8138160" cy="713232"/>
+          </a:xfrm>
+          <a:prstGeom prst="roundRect">
+            <a:avLst/>
+          </a:prstGeom>
+          <a:solidFill>
+            <a:srgbClr val="141832"/>
+          </a:solidFill>
+          <a:ln w="17780">
+            <a:solidFill>
+              <a:srgbClr val="009FFD"/>
+            </a:solidFill>
+          </a:ln>
+        </p:spPr>
+        <p:style>
+          <a:lnRef idx="1">
+            <a:schemeClr val="accent1"/>
+          </a:lnRef>
+          <a:fillRef idx="3">
+            <a:schemeClr val="accent1"/>
+          </a:fillRef>
+          <a:effectRef idx="2">
+            <a:schemeClr val="accent1"/>
+          </a:effectRef>
+          <a:fontRef idx="minor">
+            <a:schemeClr val="lt1"/>
+          </a:fontRef>
+        </p:style>
+        <p:txBody>
+          <a:bodyPr rtlCol="0" anchor="ctr"/>
+          <a:lstStyle/>
+          <a:p>
+            <a:pPr algn="ctr"/>
+          </a:p>
+        </p:txBody>
+      </p:sp>
+      <p:sp>
+        <p:nvSpPr>
+          <p:cNvPr id="20" name="TextBox 19"/>
+          <p:cNvSpPr txBox="1"/>
+          <p:nvPr/>
+        </p:nvSpPr>
+        <p:spPr>
+          <a:xfrm>
+            <a:off x="2130552" y="5532120"/>
+            <a:ext cx="7808976" cy="320040"/>
+          </a:xfrm>
+          <a:prstGeom prst="rect">
+            <a:avLst/>
+          </a:prstGeom>
+          <a:noFill/>
+        </p:spPr>
+        <p:txBody>
+          <a:bodyPr wrap="square">
+            <a:spAutoFit/>
+          </a:bodyPr>
+          <a:lstStyle/>
+          <a:p>
+            <a:pPr algn="l">
+              <a:lnSpc>
+                <a:spcPts val="1920"/>
+              </a:lnSpc>
+              <a:spcAft>
+                <a:spcPts val="0"/>
+              </a:spcAft>
+              <a:defRPr sz="1600" b="1">
                 <a:solidFill>
                   <a:srgbClr val="009FFD"/>
                 </a:solidFill>
@@ -18155,14 +20000,14 @@
       </p:sp>
       <p:sp>
         <p:nvSpPr>
-          <p:cNvPr id="10" name="TextBox 9"/>
-          <p:cNvSpPr txBox="1"/>
-          <p:nvPr/>
-        </p:nvSpPr>
-        <p:spPr>
-          <a:xfrm>
-            <a:off x="7772400" y="5074920"/>
-            <a:ext cx="3840480" cy="731520"/>
+          <p:cNvPr id="21" name="TextBox 20"/>
+          <p:cNvSpPr txBox="1"/>
+          <p:nvPr/>
+        </p:nvSpPr>
+        <p:spPr>
+          <a:xfrm>
+            <a:off x="2130552" y="5897880"/>
+            <a:ext cx="7808976" cy="73152"/>
           </a:xfrm>
           <a:prstGeom prst="rect">
             <a:avLst/>
@@ -18177,7 +20022,7 @@
           <a:p>
             <a:pPr algn="l">
               <a:lnSpc>
-                <a:spcPts val="1439"/>
+                <a:spcPts val="1560"/>
               </a:lnSpc>
               <a:spcAft>
                 <a:spcPts val="0"/>
@@ -18190,14 +20035,14 @@
               </a:defRPr>
             </a:pPr>
             <a:r>
-              <a:t>Unsupervised deep learning is the dominant paradigm — driven by the scarcity of labeled anomaly data in production networks.</a:t>
-            </a:r>
-          </a:p>
-        </p:txBody>
-      </p:sp>
-      <p:sp>
-        <p:nvSpPr>
-          <p:cNvPr id="11" name="TextBox 10"/>
+              <a:t>Best results often come from models that learn normal behavior first because labeled anomaly data is limited.</a:t>
+            </a:r>
+          </a:p>
+        </p:txBody>
+      </p:sp>
+      <p:sp>
+        <p:nvSpPr>
+          <p:cNvPr id="22" name="TextBox 21"/>
           <p:cNvSpPr txBox="1"/>
           <p:nvPr/>
         </p:nvSpPr>
@@ -18239,7 +20084,7 @@
       </p:sp>
       <p:sp>
         <p:nvSpPr>
-          <p:cNvPr id="12" name="TextBox 11"/>
+          <p:cNvPr id="23" name="TextBox 22"/>
           <p:cNvSpPr txBox="1"/>
           <p:nvPr/>
         </p:nvSpPr>
@@ -18750,7 +20595,7 @@
               </a:defRPr>
             </a:pPr>
             <a:r>
-              <a:t>Forecasting delay, jitter, packet loss, and throughput from telemetry data</a:t>
+              <a:t>Using telemetry to estimate what the network will do next</a:t>
             </a:r>
           </a:p>
         </p:txBody>
@@ -18876,7 +20721,7 @@
               </a:defRPr>
             </a:pPr>
             <a:r>
-              <a:t>• LSTM and GRU networks model temporal dependencies in traffic metrics</a:t>
+              <a:t>• LSTM and GRU models learn how metrics change over time</a:t>
             </a:r>
           </a:p>
         </p:txBody>
@@ -18918,7 +20763,7 @@
               </a:defRPr>
             </a:pPr>
             <a:r>
-              <a:t>• Predict future values of delay, jitter, and throughput</a:t>
+              <a:t>• They forecast delay, jitter, loss, and throughput</a:t>
             </a:r>
           </a:p>
         </p:txBody>
@@ -18960,7 +20805,7 @@
               </a:defRPr>
             </a:pPr>
             <a:r>
-              <a:t>• Sliding-window approaches on streaming telemetry data</a:t>
+              <a:t>• Useful when recent behavior helps predict the near future</a:t>
             </a:r>
           </a:p>
         </p:txBody>
@@ -19044,7 +20889,7 @@
               </a:defRPr>
             </a:pPr>
             <a:r>
-              <a:t>• Model network topology as a graph — nodes = devices, edges = links</a:t>
+              <a:t>• Represent the network as devices and links in a graph</a:t>
             </a:r>
           </a:p>
         </p:txBody>
@@ -19086,7 +20931,7 @@
               </a:defRPr>
             </a:pPr>
             <a:r>
-              <a:t>• RouteNet-Fermi: GNN architecture for per-flow delay/jitter prediction</a:t>
+              <a:t>• Good for path-based prediction because topology matters</a:t>
             </a:r>
           </a:p>
         </p:txBody>
@@ -19128,7 +20973,7 @@
               </a:defRPr>
             </a:pPr>
             <a:r>
-              <a:t>• Capture spatial correlations that time-series models miss</a:t>
+              <a:t>• They capture how one congested link can affect other paths</a:t>
             </a:r>
           </a:p>
         </p:txBody>
@@ -19212,7 +21057,7 @@
               </a:defRPr>
             </a:pPr>
             <a:r>
-              <a:t>• Combine multiple models (e.g., LSTM + Random Forest) for robust predictions</a:t>
+              <a:t>• Combine different models to improve robustness</a:t>
             </a:r>
           </a:p>
         </p:txBody>
@@ -19254,7 +21099,7 @@
               </a:defRPr>
             </a:pPr>
             <a:r>
-              <a:t>• Stacking and boosting improve accuracy over single models</a:t>
+              <a:t>• Often more accurate than relying on one model alone</a:t>
             </a:r>
           </a:p>
         </p:txBody>
@@ -19296,7 +21141,7 @@
               </a:defRPr>
             </a:pPr>
             <a:r>
-              <a:t>• Adaptive ensembles handle concept drift in network traffic</a:t>
+              <a:t>• Can adapt better when traffic patterns shift</a:t>
             </a:r>
           </a:p>
         </p:txBody>
@@ -19380,7 +21225,7 @@
               </a:defRPr>
             </a:pPr>
             <a:r>
-              <a:t>• Transformer-based models capture long-range dependencies</a:t>
+              <a:t>• Transformer-style models look at longer patterns in the data</a:t>
             </a:r>
           </a:p>
         </p:txBody>
@@ -19422,7 +21267,7 @@
               </a:defRPr>
             </a:pPr>
             <a:r>
-              <a:t>• Self-attention weights highlight which telemetry features matter most</a:t>
+              <a:t>• They help identify which signals matter most</a:t>
             </a:r>
           </a:p>
         </p:txBody>
@@ -19464,7 +21309,7 @@
               </a:defRPr>
             </a:pPr>
             <a:r>
-              <a:t>• Emerging as state-of-the-art for multi-variate network forecasting</a:t>
+              <a:t>• Strong option for large, multi-feature telemetry streams</a:t>
             </a:r>
           </a:p>
         </p:txBody>

--- a/NET3006A-ML-Network-Telemetry/presentation/NET3006A_ML_Network_Telemetry_Presentation.pptx
+++ b/NET3006A-ML-Network-Telemetry/presentation/NET3006A_ML_Network_Telemetry_Presentation.pptx
@@ -29,6 +29,7 @@
     <p:sldId id="277" r:id="rId28"/>
     <p:sldId id="278" r:id="rId29"/>
     <p:sldId id="279" r:id="rId30"/>
+    <p:sldId id="280" r:id="rId31"/>
   </p:sldIdLst>
   <p:sldSz cx="12191695" cy="6858000" type="screen4x3"/>
   <p:notesSz cx="6858000" cy="9144000"/>
@@ -3841,7 +3842,7 @@
               </a:defRPr>
             </a:pPr>
             <a:r>
-              <a:t>1 / 24</a:t>
+              <a:t>1 / 25</a:t>
             </a:r>
           </a:p>
         </p:txBody>
@@ -4808,7 +4809,7 @@
               </a:defRPr>
             </a:pPr>
             <a:r>
-              <a:t>10 / 24</a:t>
+              <a:t>10 / 25</a:t>
             </a:r>
           </a:p>
         </p:txBody>
@@ -5088,7 +5089,7 @@
               </a:defRPr>
             </a:pPr>
             <a:r>
-              <a:t>11 / 24</a:t>
+              <a:t>11 / 25</a:t>
             </a:r>
           </a:p>
         </p:txBody>
@@ -6082,7 +6083,7 @@
               </a:defRPr>
             </a:pPr>
             <a:r>
-              <a:t>12 / 24</a:t>
+              <a:t>12 / 25</a:t>
             </a:r>
           </a:p>
         </p:txBody>
@@ -6912,7 +6913,7 @@
               </a:defRPr>
             </a:pPr>
             <a:r>
-              <a:t>13 / 24</a:t>
+              <a:t>13 / 25</a:t>
             </a:r>
           </a:p>
         </p:txBody>
@@ -7910,7 +7911,7 @@
               </a:defRPr>
             </a:pPr>
             <a:r>
-              <a:t>14 / 24</a:t>
+              <a:t>14 / 25</a:t>
             </a:r>
           </a:p>
         </p:txBody>
@@ -8790,7 +8791,7 @@
               </a:defRPr>
             </a:pPr>
             <a:r>
-              <a:t>15 / 24</a:t>
+              <a:t>15 / 25</a:t>
             </a:r>
           </a:p>
         </p:txBody>
@@ -9070,7 +9071,7 @@
               </a:defRPr>
             </a:pPr>
             <a:r>
-              <a:t>16 / 24</a:t>
+              <a:t>16 / 25</a:t>
             </a:r>
           </a:p>
         </p:txBody>
@@ -9994,7 +9995,7 @@
               </a:defRPr>
             </a:pPr>
             <a:r>
-              <a:t>17 / 24</a:t>
+              <a:t>17 / 25</a:t>
             </a:r>
           </a:p>
         </p:txBody>
@@ -11376,7 +11377,7 @@
               </a:defRPr>
             </a:pPr>
             <a:r>
-              <a:t>18 / 24</a:t>
+              <a:t>18 / 25</a:t>
             </a:r>
           </a:p>
         </p:txBody>
@@ -11422,7 +11423,7 @@
             <a:avLst/>
           </a:prstGeom>
           <a:solidFill>
-            <a:srgbClr val="845EC2"/>
+            <a:srgbClr val="F0B429"/>
           </a:solidFill>
           <a:ln>
             <a:noFill/>
@@ -11530,7 +11531,7 @@
               </a:defRPr>
             </a:pPr>
             <a:r>
-              <a:t>Industry Example: Ericsson</a:t>
+              <a:t>Case Study: Predicting Internet Traffic from Telemetry Data</a:t>
             </a:r>
           </a:p>
         </p:txBody>
@@ -11538,48 +11539,6 @@
       <p:sp>
         <p:nvSpPr>
           <p:cNvPr id="5" name="TextBox 4"/>
-          <p:cNvSpPr txBox="1"/>
-          <p:nvPr/>
-        </p:nvSpPr>
-        <p:spPr>
-          <a:xfrm>
-            <a:off x="731520" y="1024128"/>
-            <a:ext cx="10515600" cy="438912"/>
-          </a:xfrm>
-          <a:prstGeom prst="rect">
-            <a:avLst/>
-          </a:prstGeom>
-          <a:noFill/>
-        </p:spPr>
-        <p:txBody>
-          <a:bodyPr wrap="square" anchor="t" lIns="45720" rIns="45720" tIns="18288" bIns="18288">
-            <a:spAutoFit/>
-          </a:bodyPr>
-          <a:lstStyle/>
-          <a:p>
-            <a:pPr algn="l">
-              <a:lnSpc>
-                <a:spcPct val="120000"/>
-              </a:lnSpc>
-              <a:spcAft>
-                <a:spcPts val="0"/>
-              </a:spcAft>
-              <a:defRPr sz="1800" b="0">
-                <a:solidFill>
-                  <a:srgbClr val="CCCCCC"/>
-                </a:solidFill>
-                <a:latin typeface="Calibri"/>
-              </a:defRPr>
-            </a:pPr>
-            <a:r>
-              <a:t>Combining better data organization with automation</a:t>
-            </a:r>
-          </a:p>
-        </p:txBody>
-      </p:sp>
-      <p:sp>
-        <p:nvSpPr>
-          <p:cNvPr id="6" name="TextBox 5"/>
           <p:cNvSpPr txBox="1"/>
           <p:nvPr/>
         </p:nvSpPr>
@@ -11614,21 +11573,325 @@
               </a:defRPr>
             </a:pPr>
             <a:r>
-              <a:t>Presenter: Hashim Kshim</a:t>
-            </a:r>
-          </a:p>
-        </p:txBody>
-      </p:sp>
-      <p:sp>
-        <p:nvSpPr>
-          <p:cNvPr id="7" name="Rounded Rectangle 6"/>
+              <a:t>Presenter: Mazen Alhassan</a:t>
+            </a:r>
+          </a:p>
+        </p:txBody>
+      </p:sp>
+      <p:sp>
+        <p:nvSpPr>
+          <p:cNvPr id="6" name="TextBox 5"/>
+          <p:cNvSpPr txBox="1"/>
+          <p:nvPr/>
+        </p:nvSpPr>
+        <p:spPr>
+          <a:xfrm>
+            <a:off x="731520" y="1234440"/>
+            <a:ext cx="5303520" cy="320040"/>
+          </a:xfrm>
+          <a:prstGeom prst="rect">
+            <a:avLst/>
+          </a:prstGeom>
+          <a:noFill/>
+        </p:spPr>
+        <p:txBody>
+          <a:bodyPr wrap="square" anchor="t" lIns="45720" rIns="45720" tIns="18288" bIns="18288">
+            <a:spAutoFit/>
+          </a:bodyPr>
+          <a:lstStyle/>
+          <a:p>
+            <a:pPr algn="l">
+              <a:lnSpc>
+                <a:spcPct val="120000"/>
+              </a:lnSpc>
+              <a:spcAft>
+                <a:spcPts val="0"/>
+              </a:spcAft>
+              <a:defRPr sz="1800" b="1">
+                <a:solidFill>
+                  <a:srgbClr val="009FFD"/>
+                </a:solidFill>
+                <a:latin typeface="Calibri"/>
+              </a:defRPr>
+            </a:pPr>
+            <a:r>
+              <a:t>The Problem</a:t>
+            </a:r>
+          </a:p>
+        </p:txBody>
+      </p:sp>
+      <p:sp>
+        <p:nvSpPr>
+          <p:cNvPr id="7" name="TextBox 6"/>
+          <p:cNvSpPr txBox="1"/>
+          <p:nvPr/>
+        </p:nvSpPr>
+        <p:spPr>
+          <a:xfrm>
+            <a:off x="731520" y="1600200"/>
+            <a:ext cx="5303520" cy="1463040"/>
+          </a:xfrm>
+          <a:prstGeom prst="rect">
+            <a:avLst/>
+          </a:prstGeom>
+          <a:noFill/>
+        </p:spPr>
+        <p:txBody>
+          <a:bodyPr wrap="square" anchor="t">
+            <a:spAutoFit/>
+          </a:bodyPr>
+          <a:lstStyle/>
+          <a:p>
+            <a:pPr>
+              <a:lnSpc>
+                <a:spcPct val="120000"/>
+              </a:lnSpc>
+              <a:spcBef>
+                <a:spcPts val="100"/>
+              </a:spcBef>
+              <a:spcAft>
+                <a:spcPts val="600"/>
+              </a:spcAft>
+              <a:defRPr sz="1300" b="0">
+                <a:solidFill>
+                  <a:srgbClr val="CCCCCC"/>
+                </a:solidFill>
+                <a:latin typeface="Calibri"/>
+              </a:defRPr>
+            </a:pPr>
+            <a:r>
+              <a:t>• Operators need to predict future traffic volumes to avoid congestion and plan capacity</a:t>
+            </a:r>
+          </a:p>
+          <a:p>
+            <a:pPr>
+              <a:lnSpc>
+                <a:spcPct val="120000"/>
+              </a:lnSpc>
+              <a:spcBef>
+                <a:spcPts val="100"/>
+              </a:spcBef>
+              <a:spcAft>
+                <a:spcPts val="600"/>
+              </a:spcAft>
+              <a:defRPr sz="1300" b="0">
+                <a:solidFill>
+                  <a:srgbClr val="CCCCCC"/>
+                </a:solidFill>
+                <a:latin typeface="Calibri"/>
+              </a:defRPr>
+            </a:pPr>
+            <a:r>
+              <a:t>• Telemetry is collected by sampling SNMP MIB counters on router interfaces (e.g., every 5 min) — giving a time series of bits-per-second</a:t>
+            </a:r>
+          </a:p>
+          <a:p>
+            <a:pPr>
+              <a:lnSpc>
+                <a:spcPct val="120000"/>
+              </a:lnSpc>
+              <a:spcBef>
+                <a:spcPts val="100"/>
+              </a:spcBef>
+              <a:spcAft>
+                <a:spcPts val="600"/>
+              </a:spcAft>
+              <a:defRPr sz="1300" b="0">
+                <a:solidFill>
+                  <a:srgbClr val="CCCCCC"/>
+                </a:solidFill>
+                <a:latin typeface="Calibri"/>
+              </a:defRPr>
+            </a:pPr>
+            <a:r>
+              <a:t>• Traditional methods like ARIMA struggle with sudden spikes and complex patterns in real network traffic</a:t>
+            </a:r>
+          </a:p>
+        </p:txBody>
+      </p:sp>
+      <p:sp>
+        <p:nvSpPr>
+          <p:cNvPr id="8" name="TextBox 7"/>
+          <p:cNvSpPr txBox="1"/>
+          <p:nvPr/>
+        </p:nvSpPr>
+        <p:spPr>
+          <a:xfrm>
+            <a:off x="731520" y="3063240"/>
+            <a:ext cx="5303520" cy="320040"/>
+          </a:xfrm>
+          <a:prstGeom prst="rect">
+            <a:avLst/>
+          </a:prstGeom>
+          <a:noFill/>
+        </p:spPr>
+        <p:txBody>
+          <a:bodyPr wrap="square" anchor="t" lIns="45720" rIns="45720" tIns="18288" bIns="18288">
+            <a:spAutoFit/>
+          </a:bodyPr>
+          <a:lstStyle/>
+          <a:p>
+            <a:pPr algn="l">
+              <a:lnSpc>
+                <a:spcPct val="120000"/>
+              </a:lnSpc>
+              <a:spcAft>
+                <a:spcPts val="0"/>
+              </a:spcAft>
+              <a:defRPr sz="1800" b="1">
+                <a:solidFill>
+                  <a:srgbClr val="00C9A7"/>
+                </a:solidFill>
+                <a:latin typeface="Calibri"/>
+              </a:defRPr>
+            </a:pPr>
+            <a:r>
+              <a:t>The Study: ConvLSTMTransNet (Pekar et al., 2024)</a:t>
+            </a:r>
+          </a:p>
+        </p:txBody>
+      </p:sp>
+      <p:sp>
+        <p:nvSpPr>
+          <p:cNvPr id="9" name="TextBox 8"/>
+          <p:cNvSpPr txBox="1"/>
+          <p:nvPr/>
+        </p:nvSpPr>
+        <p:spPr>
+          <a:xfrm>
+            <a:off x="731520" y="3429000"/>
+            <a:ext cx="5303520" cy="2377440"/>
+          </a:xfrm>
+          <a:prstGeom prst="rect">
+            <a:avLst/>
+          </a:prstGeom>
+          <a:noFill/>
+        </p:spPr>
+        <p:txBody>
+          <a:bodyPr wrap="square" anchor="t">
+            <a:spAutoFit/>
+          </a:bodyPr>
+          <a:lstStyle/>
+          <a:p>
+            <a:pPr>
+              <a:lnSpc>
+                <a:spcPct val="120000"/>
+              </a:lnSpc>
+              <a:spcBef>
+                <a:spcPts val="100"/>
+              </a:spcBef>
+              <a:spcAft>
+                <a:spcPts val="600"/>
+              </a:spcAft>
+              <a:defRPr sz="1300" b="0">
+                <a:solidFill>
+                  <a:srgbClr val="CCCCCC"/>
+                </a:solidFill>
+                <a:latin typeface="Calibri"/>
+              </a:defRPr>
+            </a:pPr>
+            <a:r>
+              <a:t>• A hybrid deep learning model combining three architectures: CNN (local patterns), LSTM (time dependencies), and Transformer encoder (long-range relationships)</a:t>
+            </a:r>
+          </a:p>
+          <a:p>
+            <a:pPr>
+              <a:lnSpc>
+                <a:spcPct val="120000"/>
+              </a:lnSpc>
+              <a:spcBef>
+                <a:spcPts val="100"/>
+              </a:spcBef>
+              <a:spcAft>
+                <a:spcPts val="600"/>
+              </a:spcAft>
+              <a:defRPr sz="1300" b="0">
+                <a:solidFill>
+                  <a:srgbClr val="CCCCCC"/>
+                </a:solidFill>
+                <a:latin typeface="Calibri"/>
+              </a:defRPr>
+            </a:pPr>
+            <a:r>
+              <a:t>• Trained and tested on real ISP telemetry from high-speed 40 Gbps ports on a provider edge router, sampled at 5-min intervals via SNMP</a:t>
+            </a:r>
+          </a:p>
+          <a:p>
+            <a:pPr>
+              <a:lnSpc>
+                <a:spcPct val="120000"/>
+              </a:lnSpc>
+              <a:spcBef>
+                <a:spcPts val="100"/>
+              </a:spcBef>
+              <a:spcAft>
+                <a:spcPts val="600"/>
+              </a:spcAft>
+              <a:defRPr sz="1300" b="0">
+                <a:solidFill>
+                  <a:srgbClr val="CCCCCC"/>
+                </a:solidFill>
+                <a:latin typeface="Calibri"/>
+              </a:defRPr>
+            </a:pPr>
+            <a:r>
+              <a:t>• This is real Juniper Networks ISP telemetry — not synthetic data</a:t>
+            </a:r>
+          </a:p>
+        </p:txBody>
+      </p:sp>
+      <p:sp>
+        <p:nvSpPr>
+          <p:cNvPr id="10" name="TextBox 9"/>
+          <p:cNvSpPr txBox="1"/>
+          <p:nvPr/>
+        </p:nvSpPr>
+        <p:spPr>
+          <a:xfrm>
+            <a:off x="6583680" y="1234440"/>
+            <a:ext cx="5029200" cy="320040"/>
+          </a:xfrm>
+          <a:prstGeom prst="rect">
+            <a:avLst/>
+          </a:prstGeom>
+          <a:noFill/>
+        </p:spPr>
+        <p:txBody>
+          <a:bodyPr wrap="square" anchor="t" lIns="45720" rIns="45720" tIns="18288" bIns="18288">
+            <a:spAutoFit/>
+          </a:bodyPr>
+          <a:lstStyle/>
+          <a:p>
+            <a:pPr algn="ctr">
+              <a:lnSpc>
+                <a:spcPct val="120000"/>
+              </a:lnSpc>
+              <a:spcAft>
+                <a:spcPts val="0"/>
+              </a:spcAft>
+              <a:defRPr sz="1800" b="1">
+                <a:solidFill>
+                  <a:srgbClr val="845EC2"/>
+                </a:solidFill>
+                <a:latin typeface="Calibri"/>
+              </a:defRPr>
+            </a:pPr>
+            <a:r>
+              <a:t>Model Architecture</a:t>
+            </a:r>
+          </a:p>
+        </p:txBody>
+      </p:sp>
+      <p:sp>
+        <p:nvSpPr>
+          <p:cNvPr id="11" name="Rounded Rectangle 10"/>
           <p:cNvSpPr/>
           <p:nvPr/>
         </p:nvSpPr>
         <p:spPr>
           <a:xfrm>
-            <a:off x="777240" y="1600200"/>
-            <a:ext cx="5120640" cy="2514600"/>
+            <a:off x="6400800" y="1737360"/>
+            <a:ext cx="1508760" cy="777240"/>
           </a:xfrm>
           <a:prstGeom prst="roundRect">
             <a:avLst/>
@@ -11636,9 +11899,9 @@
           <a:solidFill>
             <a:srgbClr val="141832"/>
           </a:solidFill>
-          <a:ln w="17780">
+          <a:ln w="19050">
             <a:solidFill>
-              <a:srgbClr val="845EC2"/>
+              <a:srgbClr val="009FFD"/>
             </a:solidFill>
           </a:ln>
         </p:spPr>
@@ -11666,114 +11929,69 @@
       </p:sp>
       <p:sp>
         <p:nvSpPr>
-          <p:cNvPr id="8" name="TextBox 7"/>
-          <p:cNvSpPr txBox="1"/>
-          <p:nvPr/>
-        </p:nvSpPr>
-        <p:spPr>
-          <a:xfrm>
-            <a:off x="941832" y="1737360"/>
-            <a:ext cx="4791456" cy="320040"/>
-          </a:xfrm>
-          <a:prstGeom prst="rect">
-            <a:avLst/>
-          </a:prstGeom>
-          <a:noFill/>
-        </p:spPr>
-        <p:txBody>
-          <a:bodyPr wrap="square" anchor="t" lIns="45720" rIns="45720" tIns="18288" bIns="18288">
-            <a:spAutoFit/>
-          </a:bodyPr>
-          <a:lstStyle/>
-          <a:p>
-            <a:pPr algn="l">
-              <a:lnSpc>
-                <a:spcPct val="120000"/>
-              </a:lnSpc>
-              <a:spcAft>
-                <a:spcPts val="0"/>
-              </a:spcAft>
-              <a:defRPr sz="1600" b="1">
-                <a:solidFill>
-                  <a:srgbClr val="845EC2"/>
-                </a:solidFill>
-                <a:latin typeface="Calibri"/>
-              </a:defRPr>
-            </a:pPr>
-            <a:r>
-              <a:t>AI-Ready Data Mesh</a:t>
-            </a:r>
-          </a:p>
-        </p:txBody>
-      </p:sp>
-      <p:sp>
-        <p:nvSpPr>
-          <p:cNvPr id="9" name="TextBox 8"/>
-          <p:cNvSpPr txBox="1"/>
-          <p:nvPr/>
-        </p:nvSpPr>
-        <p:spPr>
-          <a:xfrm>
-            <a:off x="941832" y="2103120"/>
-            <a:ext cx="4791456" cy="1874520"/>
-          </a:xfrm>
-          <a:prstGeom prst="rect">
-            <a:avLst/>
-          </a:prstGeom>
-          <a:noFill/>
-        </p:spPr>
-        <p:txBody>
-          <a:bodyPr wrap="square" anchor="t" lIns="45720" rIns="45720" tIns="18288" bIns="18288">
-            <a:spAutoFit/>
-          </a:bodyPr>
-          <a:lstStyle/>
-          <a:p>
-            <a:pPr algn="l">
-              <a:lnSpc>
-                <a:spcPct val="130000"/>
-              </a:lnSpc>
-              <a:spcAft>
-                <a:spcPts val="0"/>
-              </a:spcAft>
-              <a:defRPr sz="1300" b="0">
-                <a:solidFill>
-                  <a:srgbClr val="CCCCCC"/>
-                </a:solidFill>
-                <a:latin typeface="Calibri"/>
-              </a:defRPr>
-            </a:pPr>
-            <a:r>
-              <a:t>Ericsson treats telemetry as a shared data product, not just raw logs.</a:t>
+          <p:cNvPr id="12" name="TextBox 11"/>
+          <p:cNvSpPr txBox="1"/>
+          <p:nvPr/>
+        </p:nvSpPr>
+        <p:spPr>
+          <a:xfrm>
+            <a:off x="6400800" y="1847088"/>
+            <a:ext cx="1508760" cy="640080"/>
+          </a:xfrm>
+          <a:prstGeom prst="rect">
+            <a:avLst/>
+          </a:prstGeom>
+          <a:noFill/>
+        </p:spPr>
+        <p:txBody>
+          <a:bodyPr wrap="square" anchor="t" lIns="45720" rIns="45720" tIns="18288" bIns="18288">
+            <a:spAutoFit/>
+          </a:bodyPr>
+          <a:lstStyle/>
+          <a:p>
+            <a:pPr algn="ctr">
+              <a:lnSpc>
+                <a:spcPct val="120000"/>
+              </a:lnSpc>
+              <a:spcAft>
+                <a:spcPts val="0"/>
+              </a:spcAft>
+              <a:defRPr sz="1200" b="1">
+                <a:solidFill>
+                  <a:srgbClr val="009FFD"/>
+                </a:solidFill>
+                <a:latin typeface="Calibri"/>
+              </a:defRPr>
+            </a:pPr>
+            <a:r>
+              <a:t>Telemetry</a:t>
             </a:r>
             <a:br/>
-            <a:br/>
-            <a:r>
-              <a:t>Teams manage domain pipelines with common standards, which improves data quality and makes telemetry easier for ML teams to use.</a:t>
-            </a:r>
-          </a:p>
-        </p:txBody>
-      </p:sp>
-      <p:sp>
-        <p:nvSpPr>
-          <p:cNvPr id="10" name="Rounded Rectangle 9"/>
+            <a:r>
+              <a:t>Time Series</a:t>
+            </a:r>
+          </a:p>
+        </p:txBody>
+      </p:sp>
+      <p:sp>
+        <p:nvSpPr>
+          <p:cNvPr id="13" name="Right Arrow 12"/>
           <p:cNvSpPr/>
           <p:nvPr/>
         </p:nvSpPr>
         <p:spPr>
           <a:xfrm>
-            <a:off x="6263640" y="1600200"/>
-            <a:ext cx="5120640" cy="2514600"/>
-          </a:xfrm>
-          <a:prstGeom prst="roundRect">
+            <a:off x="7909560" y="1993392"/>
+            <a:ext cx="182880" cy="182880"/>
+          </a:xfrm>
+          <a:prstGeom prst="rightArrow">
             <a:avLst/>
           </a:prstGeom>
           <a:solidFill>
-            <a:srgbClr val="141832"/>
+            <a:srgbClr val="999999"/>
           </a:solidFill>
-          <a:ln w="17780">
-            <a:solidFill>
-              <a:srgbClr val="845EC2"/>
-            </a:solidFill>
+          <a:ln>
+            <a:noFill/>
           </a:ln>
         </p:spPr>
         <p:style>
@@ -11800,103 +12018,14 @@
       </p:sp>
       <p:sp>
         <p:nvSpPr>
-          <p:cNvPr id="11" name="TextBox 10"/>
-          <p:cNvSpPr txBox="1"/>
-          <p:nvPr/>
-        </p:nvSpPr>
-        <p:spPr>
-          <a:xfrm>
-            <a:off x="6428232" y="1737360"/>
-            <a:ext cx="4791456" cy="320040"/>
-          </a:xfrm>
-          <a:prstGeom prst="rect">
-            <a:avLst/>
-          </a:prstGeom>
-          <a:noFill/>
-        </p:spPr>
-        <p:txBody>
-          <a:bodyPr wrap="square" anchor="t" lIns="45720" rIns="45720" tIns="18288" bIns="18288">
-            <a:spAutoFit/>
-          </a:bodyPr>
-          <a:lstStyle/>
-          <a:p>
-            <a:pPr algn="l">
-              <a:lnSpc>
-                <a:spcPct val="120000"/>
-              </a:lnSpc>
-              <a:spcAft>
-                <a:spcPts val="0"/>
-              </a:spcAft>
-              <a:defRPr sz="1600" b="1">
-                <a:solidFill>
-                  <a:srgbClr val="845EC2"/>
-                </a:solidFill>
-                <a:latin typeface="Calibri"/>
-              </a:defRPr>
-            </a:pPr>
-            <a:r>
-              <a:t>Transport Automation Controller (TAC)</a:t>
-            </a:r>
-          </a:p>
-        </p:txBody>
-      </p:sp>
-      <p:sp>
-        <p:nvSpPr>
-          <p:cNvPr id="12" name="TextBox 11"/>
-          <p:cNvSpPr txBox="1"/>
-          <p:nvPr/>
-        </p:nvSpPr>
-        <p:spPr>
-          <a:xfrm>
-            <a:off x="6428232" y="2103120"/>
-            <a:ext cx="4791456" cy="1874520"/>
-          </a:xfrm>
-          <a:prstGeom prst="rect">
-            <a:avLst/>
-          </a:prstGeom>
-          <a:noFill/>
-        </p:spPr>
-        <p:txBody>
-          <a:bodyPr wrap="square" anchor="t" lIns="45720" rIns="45720" tIns="18288" bIns="18288">
-            <a:spAutoFit/>
-          </a:bodyPr>
-          <a:lstStyle/>
-          <a:p>
-            <a:pPr algn="l">
-              <a:lnSpc>
-                <a:spcPct val="130000"/>
-              </a:lnSpc>
-              <a:spcAft>
-                <a:spcPts val="0"/>
-              </a:spcAft>
-              <a:defRPr sz="1300" b="0">
-                <a:solidFill>
-                  <a:srgbClr val="CCCCCC"/>
-                </a:solidFill>
-                <a:latin typeface="Calibri"/>
-              </a:defRPr>
-            </a:pPr>
-            <a:r>
-              <a:t>Uses AI/ML to monitor transport performance, detect KPI anomalies, and support proactive capacity planning.</a:t>
-            </a:r>
-            <a:br/>
-            <a:br/>
-            <a:r>
-              <a:t>Direction: closed-loop automation through detect, diagnose, and act workflows.</a:t>
-            </a:r>
-          </a:p>
-        </p:txBody>
-      </p:sp>
-      <p:sp>
-        <p:nvSpPr>
-          <p:cNvPr id="13" name="Rounded Rectangle 12"/>
+          <p:cNvPr id="14" name="Rounded Rectangle 13"/>
           <p:cNvSpPr/>
           <p:nvPr/>
         </p:nvSpPr>
         <p:spPr>
           <a:xfrm>
-            <a:off x="1325880" y="4526280"/>
-            <a:ext cx="9509760" cy="1325880"/>
+            <a:off x="8092440" y="1737360"/>
+            <a:ext cx="1508760" cy="777240"/>
           </a:xfrm>
           <a:prstGeom prst="roundRect">
             <a:avLst/>
@@ -11904,9 +12033,9 @@
           <a:solidFill>
             <a:srgbClr val="141832"/>
           </a:solidFill>
-          <a:ln w="17780">
+          <a:ln w="19050">
             <a:solidFill>
-              <a:srgbClr val="845EC2"/>
+              <a:srgbClr val="00C9A7"/>
             </a:solidFill>
           </a:ln>
         </p:spPr>
@@ -11934,14 +12063,462 @@
       </p:sp>
       <p:sp>
         <p:nvSpPr>
-          <p:cNvPr id="14" name="TextBox 13"/>
-          <p:cNvSpPr txBox="1"/>
-          <p:nvPr/>
-        </p:nvSpPr>
-        <p:spPr>
-          <a:xfrm>
-            <a:off x="1490472" y="4663440"/>
-            <a:ext cx="9180576" cy="320040"/>
+          <p:cNvPr id="15" name="TextBox 14"/>
+          <p:cNvSpPr txBox="1"/>
+          <p:nvPr/>
+        </p:nvSpPr>
+        <p:spPr>
+          <a:xfrm>
+            <a:off x="8092440" y="1847088"/>
+            <a:ext cx="1508760" cy="640080"/>
+          </a:xfrm>
+          <a:prstGeom prst="rect">
+            <a:avLst/>
+          </a:prstGeom>
+          <a:noFill/>
+        </p:spPr>
+        <p:txBody>
+          <a:bodyPr wrap="square" anchor="t" lIns="45720" rIns="45720" tIns="18288" bIns="18288">
+            <a:spAutoFit/>
+          </a:bodyPr>
+          <a:lstStyle/>
+          <a:p>
+            <a:pPr algn="ctr">
+              <a:lnSpc>
+                <a:spcPct val="120000"/>
+              </a:lnSpc>
+              <a:spcAft>
+                <a:spcPts val="0"/>
+              </a:spcAft>
+              <a:defRPr sz="1200" b="1">
+                <a:solidFill>
+                  <a:srgbClr val="00C9A7"/>
+                </a:solidFill>
+                <a:latin typeface="Calibri"/>
+              </a:defRPr>
+            </a:pPr>
+            <a:r>
+              <a:t>CNN</a:t>
+            </a:r>
+            <a:br/>
+            <a:r>
+              <a:t>Local Patterns</a:t>
+            </a:r>
+          </a:p>
+        </p:txBody>
+      </p:sp>
+      <p:sp>
+        <p:nvSpPr>
+          <p:cNvPr id="16" name="Right Arrow 15"/>
+          <p:cNvSpPr/>
+          <p:nvPr/>
+        </p:nvSpPr>
+        <p:spPr>
+          <a:xfrm>
+            <a:off x="9601200" y="1993392"/>
+            <a:ext cx="182880" cy="182880"/>
+          </a:xfrm>
+          <a:prstGeom prst="rightArrow">
+            <a:avLst/>
+          </a:prstGeom>
+          <a:solidFill>
+            <a:srgbClr val="999999"/>
+          </a:solidFill>
+          <a:ln>
+            <a:noFill/>
+          </a:ln>
+        </p:spPr>
+        <p:style>
+          <a:lnRef idx="1">
+            <a:schemeClr val="accent1"/>
+          </a:lnRef>
+          <a:fillRef idx="3">
+            <a:schemeClr val="accent1"/>
+          </a:fillRef>
+          <a:effectRef idx="2">
+            <a:schemeClr val="accent1"/>
+          </a:effectRef>
+          <a:fontRef idx="minor">
+            <a:schemeClr val="lt1"/>
+          </a:fontRef>
+        </p:style>
+        <p:txBody>
+          <a:bodyPr rtlCol="0" anchor="ctr"/>
+          <a:lstStyle/>
+          <a:p>
+            <a:pPr algn="ctr"/>
+          </a:p>
+        </p:txBody>
+      </p:sp>
+      <p:sp>
+        <p:nvSpPr>
+          <p:cNvPr id="17" name="Rounded Rectangle 16"/>
+          <p:cNvSpPr/>
+          <p:nvPr/>
+        </p:nvSpPr>
+        <p:spPr>
+          <a:xfrm>
+            <a:off x="9784080" y="1737360"/>
+            <a:ext cx="1508760" cy="777240"/>
+          </a:xfrm>
+          <a:prstGeom prst="roundRect">
+            <a:avLst/>
+          </a:prstGeom>
+          <a:solidFill>
+            <a:srgbClr val="141832"/>
+          </a:solidFill>
+          <a:ln w="19050">
+            <a:solidFill>
+              <a:srgbClr val="845EC2"/>
+            </a:solidFill>
+          </a:ln>
+        </p:spPr>
+        <p:style>
+          <a:lnRef idx="1">
+            <a:schemeClr val="accent1"/>
+          </a:lnRef>
+          <a:fillRef idx="3">
+            <a:schemeClr val="accent1"/>
+          </a:fillRef>
+          <a:effectRef idx="2">
+            <a:schemeClr val="accent1"/>
+          </a:effectRef>
+          <a:fontRef idx="minor">
+            <a:schemeClr val="lt1"/>
+          </a:fontRef>
+        </p:style>
+        <p:txBody>
+          <a:bodyPr rtlCol="0" anchor="ctr"/>
+          <a:lstStyle/>
+          <a:p>
+            <a:pPr algn="ctr"/>
+          </a:p>
+        </p:txBody>
+      </p:sp>
+      <p:sp>
+        <p:nvSpPr>
+          <p:cNvPr id="18" name="TextBox 17"/>
+          <p:cNvSpPr txBox="1"/>
+          <p:nvPr/>
+        </p:nvSpPr>
+        <p:spPr>
+          <a:xfrm>
+            <a:off x="9784080" y="1847088"/>
+            <a:ext cx="1508760" cy="640080"/>
+          </a:xfrm>
+          <a:prstGeom prst="rect">
+            <a:avLst/>
+          </a:prstGeom>
+          <a:noFill/>
+        </p:spPr>
+        <p:txBody>
+          <a:bodyPr wrap="square" anchor="t" lIns="45720" rIns="45720" tIns="18288" bIns="18288">
+            <a:spAutoFit/>
+          </a:bodyPr>
+          <a:lstStyle/>
+          <a:p>
+            <a:pPr algn="ctr">
+              <a:lnSpc>
+                <a:spcPct val="120000"/>
+              </a:lnSpc>
+              <a:spcAft>
+                <a:spcPts val="0"/>
+              </a:spcAft>
+              <a:defRPr sz="1200" b="1">
+                <a:solidFill>
+                  <a:srgbClr val="845EC2"/>
+                </a:solidFill>
+                <a:latin typeface="Calibri"/>
+              </a:defRPr>
+            </a:pPr>
+            <a:r>
+              <a:t>LSTM</a:t>
+            </a:r>
+            <a:br/>
+            <a:r>
+              <a:t>Time Deps</a:t>
+            </a:r>
+          </a:p>
+        </p:txBody>
+      </p:sp>
+      <p:sp>
+        <p:nvSpPr>
+          <p:cNvPr id="19" name="Rounded Rectangle 18"/>
+          <p:cNvSpPr/>
+          <p:nvPr/>
+        </p:nvSpPr>
+        <p:spPr>
+          <a:xfrm>
+            <a:off x="6400800" y="2971800"/>
+            <a:ext cx="1508760" cy="777240"/>
+          </a:xfrm>
+          <a:prstGeom prst="roundRect">
+            <a:avLst/>
+          </a:prstGeom>
+          <a:solidFill>
+            <a:srgbClr val="141832"/>
+          </a:solidFill>
+          <a:ln w="19050">
+            <a:solidFill>
+              <a:srgbClr val="FF8C00"/>
+            </a:solidFill>
+          </a:ln>
+        </p:spPr>
+        <p:style>
+          <a:lnRef idx="1">
+            <a:schemeClr val="accent1"/>
+          </a:lnRef>
+          <a:fillRef idx="3">
+            <a:schemeClr val="accent1"/>
+          </a:fillRef>
+          <a:effectRef idx="2">
+            <a:schemeClr val="accent1"/>
+          </a:effectRef>
+          <a:fontRef idx="minor">
+            <a:schemeClr val="lt1"/>
+          </a:fontRef>
+        </p:style>
+        <p:txBody>
+          <a:bodyPr rtlCol="0" anchor="ctr"/>
+          <a:lstStyle/>
+          <a:p>
+            <a:pPr algn="ctr"/>
+          </a:p>
+        </p:txBody>
+      </p:sp>
+      <p:sp>
+        <p:nvSpPr>
+          <p:cNvPr id="20" name="TextBox 19"/>
+          <p:cNvSpPr txBox="1"/>
+          <p:nvPr/>
+        </p:nvSpPr>
+        <p:spPr>
+          <a:xfrm>
+            <a:off x="6400800" y="3081528"/>
+            <a:ext cx="1508760" cy="640080"/>
+          </a:xfrm>
+          <a:prstGeom prst="rect">
+            <a:avLst/>
+          </a:prstGeom>
+          <a:noFill/>
+        </p:spPr>
+        <p:txBody>
+          <a:bodyPr wrap="square" anchor="t" lIns="45720" rIns="45720" tIns="18288" bIns="18288">
+            <a:spAutoFit/>
+          </a:bodyPr>
+          <a:lstStyle/>
+          <a:p>
+            <a:pPr algn="ctr">
+              <a:lnSpc>
+                <a:spcPct val="120000"/>
+              </a:lnSpc>
+              <a:spcAft>
+                <a:spcPts val="0"/>
+              </a:spcAft>
+              <a:defRPr sz="1200" b="1">
+                <a:solidFill>
+                  <a:srgbClr val="FF8C00"/>
+                </a:solidFill>
+                <a:latin typeface="Calibri"/>
+              </a:defRPr>
+            </a:pPr>
+            <a:r>
+              <a:t>Transformer</a:t>
+            </a:r>
+            <a:br/>
+            <a:r>
+              <a:t>Long-Range</a:t>
+            </a:r>
+          </a:p>
+        </p:txBody>
+      </p:sp>
+      <p:sp>
+        <p:nvSpPr>
+          <p:cNvPr id="21" name="Right Arrow 20"/>
+          <p:cNvSpPr/>
+          <p:nvPr/>
+        </p:nvSpPr>
+        <p:spPr>
+          <a:xfrm>
+            <a:off x="7909560" y="3227832"/>
+            <a:ext cx="182880" cy="182880"/>
+          </a:xfrm>
+          <a:prstGeom prst="rightArrow">
+            <a:avLst/>
+          </a:prstGeom>
+          <a:solidFill>
+            <a:srgbClr val="999999"/>
+          </a:solidFill>
+          <a:ln>
+            <a:noFill/>
+          </a:ln>
+        </p:spPr>
+        <p:style>
+          <a:lnRef idx="1">
+            <a:schemeClr val="accent1"/>
+          </a:lnRef>
+          <a:fillRef idx="3">
+            <a:schemeClr val="accent1"/>
+          </a:fillRef>
+          <a:effectRef idx="2">
+            <a:schemeClr val="accent1"/>
+          </a:effectRef>
+          <a:fontRef idx="minor">
+            <a:schemeClr val="lt1"/>
+          </a:fontRef>
+        </p:style>
+        <p:txBody>
+          <a:bodyPr rtlCol="0" anchor="ctr"/>
+          <a:lstStyle/>
+          <a:p>
+            <a:pPr algn="ctr"/>
+          </a:p>
+        </p:txBody>
+      </p:sp>
+      <p:sp>
+        <p:nvSpPr>
+          <p:cNvPr id="22" name="Rounded Rectangle 21"/>
+          <p:cNvSpPr/>
+          <p:nvPr/>
+        </p:nvSpPr>
+        <p:spPr>
+          <a:xfrm>
+            <a:off x="8092440" y="2971800"/>
+            <a:ext cx="1508760" cy="777240"/>
+          </a:xfrm>
+          <a:prstGeom prst="roundRect">
+            <a:avLst/>
+          </a:prstGeom>
+          <a:solidFill>
+            <a:srgbClr val="141832"/>
+          </a:solidFill>
+          <a:ln w="19050">
+            <a:solidFill>
+              <a:srgbClr val="F0B429"/>
+            </a:solidFill>
+          </a:ln>
+        </p:spPr>
+        <p:style>
+          <a:lnRef idx="1">
+            <a:schemeClr val="accent1"/>
+          </a:lnRef>
+          <a:fillRef idx="3">
+            <a:schemeClr val="accent1"/>
+          </a:fillRef>
+          <a:effectRef idx="2">
+            <a:schemeClr val="accent1"/>
+          </a:effectRef>
+          <a:fontRef idx="minor">
+            <a:schemeClr val="lt1"/>
+          </a:fontRef>
+        </p:style>
+        <p:txBody>
+          <a:bodyPr rtlCol="0" anchor="ctr"/>
+          <a:lstStyle/>
+          <a:p>
+            <a:pPr algn="ctr"/>
+          </a:p>
+        </p:txBody>
+      </p:sp>
+      <p:sp>
+        <p:nvSpPr>
+          <p:cNvPr id="23" name="TextBox 22"/>
+          <p:cNvSpPr txBox="1"/>
+          <p:nvPr/>
+        </p:nvSpPr>
+        <p:spPr>
+          <a:xfrm>
+            <a:off x="8092440" y="3081528"/>
+            <a:ext cx="1508760" cy="640080"/>
+          </a:xfrm>
+          <a:prstGeom prst="rect">
+            <a:avLst/>
+          </a:prstGeom>
+          <a:noFill/>
+        </p:spPr>
+        <p:txBody>
+          <a:bodyPr wrap="square" anchor="t" lIns="45720" rIns="45720" tIns="18288" bIns="18288">
+            <a:spAutoFit/>
+          </a:bodyPr>
+          <a:lstStyle/>
+          <a:p>
+            <a:pPr algn="ctr">
+              <a:lnSpc>
+                <a:spcPct val="120000"/>
+              </a:lnSpc>
+              <a:spcAft>
+                <a:spcPts val="0"/>
+              </a:spcAft>
+              <a:defRPr sz="1200" b="1">
+                <a:solidFill>
+                  <a:srgbClr val="F0B429"/>
+                </a:solidFill>
+                <a:latin typeface="Calibri"/>
+              </a:defRPr>
+            </a:pPr>
+            <a:r>
+              <a:t>Traffic</a:t>
+            </a:r>
+            <a:br/>
+            <a:r>
+              <a:t>Prediction</a:t>
+            </a:r>
+          </a:p>
+        </p:txBody>
+      </p:sp>
+      <p:sp>
+        <p:nvSpPr>
+          <p:cNvPr id="24" name="Down Arrow 23"/>
+          <p:cNvSpPr/>
+          <p:nvPr/>
+        </p:nvSpPr>
+        <p:spPr>
+          <a:xfrm>
+            <a:off x="11064240" y="2514600"/>
+            <a:ext cx="182880" cy="365760"/>
+          </a:xfrm>
+          <a:prstGeom prst="downArrow">
+            <a:avLst/>
+          </a:prstGeom>
+          <a:solidFill>
+            <a:srgbClr val="999999"/>
+          </a:solidFill>
+          <a:ln>
+            <a:noFill/>
+          </a:ln>
+        </p:spPr>
+        <p:style>
+          <a:lnRef idx="1">
+            <a:schemeClr val="accent1"/>
+          </a:lnRef>
+          <a:fillRef idx="3">
+            <a:schemeClr val="accent1"/>
+          </a:fillRef>
+          <a:effectRef idx="2">
+            <a:schemeClr val="accent1"/>
+          </a:effectRef>
+          <a:fontRef idx="minor">
+            <a:schemeClr val="lt1"/>
+          </a:fontRef>
+        </p:style>
+        <p:txBody>
+          <a:bodyPr rtlCol="0" anchor="ctr"/>
+          <a:lstStyle/>
+          <a:p>
+            <a:pPr algn="ctr"/>
+          </a:p>
+        </p:txBody>
+      </p:sp>
+      <p:sp>
+        <p:nvSpPr>
+          <p:cNvPr id="25" name="TextBox 24"/>
+          <p:cNvSpPr txBox="1"/>
+          <p:nvPr/>
+        </p:nvSpPr>
+        <p:spPr>
+          <a:xfrm>
+            <a:off x="6583680" y="3246120"/>
+            <a:ext cx="5029200" cy="320040"/>
           </a:xfrm>
           <a:prstGeom prst="rect">
             <a:avLst/>
@@ -11961,47 +12538,50 @@
               <a:spcAft>
                 <a:spcPts val="0"/>
               </a:spcAft>
-              <a:defRPr sz="1600" b="1">
-                <a:solidFill>
-                  <a:srgbClr val="845EC2"/>
-                </a:solidFill>
-                <a:latin typeface="Calibri"/>
-              </a:defRPr>
-            </a:pPr>
-            <a:r>
-              <a:t>Key Industry Insight</a:t>
-            </a:r>
-          </a:p>
-        </p:txBody>
-      </p:sp>
-      <p:sp>
-        <p:nvSpPr>
-          <p:cNvPr id="15" name="TextBox 14"/>
-          <p:cNvSpPr txBox="1"/>
-          <p:nvPr/>
-        </p:nvSpPr>
-        <p:spPr>
-          <a:xfrm>
-            <a:off x="1490472" y="5029200"/>
-            <a:ext cx="9180576" cy="685800"/>
-          </a:xfrm>
-          <a:prstGeom prst="rect">
-            <a:avLst/>
-          </a:prstGeom>
-          <a:noFill/>
-        </p:spPr>
-        <p:txBody>
-          <a:bodyPr wrap="square" anchor="t" lIns="45720" rIns="45720" tIns="18288" bIns="18288">
-            <a:spAutoFit/>
-          </a:bodyPr>
-          <a:lstStyle/>
-          <a:p>
-            <a:pPr algn="l">
-              <a:lnSpc>
-                <a:spcPct val="130000"/>
-              </a:lnSpc>
-              <a:spcAft>
-                <a:spcPts val="0"/>
+              <a:defRPr sz="1800" b="1">
+                <a:solidFill>
+                  <a:srgbClr val="FF8C00"/>
+                </a:solidFill>
+                <a:latin typeface="Calibri"/>
+              </a:defRPr>
+            </a:pPr>
+            <a:r>
+              <a:t>Results</a:t>
+            </a:r>
+          </a:p>
+        </p:txBody>
+      </p:sp>
+      <p:sp>
+        <p:nvSpPr>
+          <p:cNvPr id="26" name="TextBox 25"/>
+          <p:cNvSpPr txBox="1"/>
+          <p:nvPr/>
+        </p:nvSpPr>
+        <p:spPr>
+          <a:xfrm>
+            <a:off x="6583680" y="3611880"/>
+            <a:ext cx="5029200" cy="2194560"/>
+          </a:xfrm>
+          <a:prstGeom prst="rect">
+            <a:avLst/>
+          </a:prstGeom>
+          <a:noFill/>
+        </p:spPr>
+        <p:txBody>
+          <a:bodyPr wrap="square" anchor="t">
+            <a:spAutoFit/>
+          </a:bodyPr>
+          <a:lstStyle/>
+          <a:p>
+            <a:pPr>
+              <a:lnSpc>
+                <a:spcPct val="120000"/>
+              </a:lnSpc>
+              <a:spcBef>
+                <a:spcPts val="100"/>
+              </a:spcBef>
+              <a:spcAft>
+                <a:spcPts val="600"/>
               </a:spcAft>
               <a:defRPr sz="1300" b="0">
                 <a:solidFill>
@@ -12011,14 +12591,80 @@
               </a:defRPr>
             </a:pPr>
             <a:r>
-              <a:t>Ericsson shows that good AI outcomes depend on strong telemetry and data foundations. Better data pipelines make network automation and prediction more realistic at scale.</a:t>
-            </a:r>
-          </a:p>
-        </p:txBody>
-      </p:sp>
-      <p:sp>
-        <p:nvSpPr>
-          <p:cNvPr id="16" name="TextBox 15"/>
+              <a:t>• Compared against three baselines: plain RNN, LSTM, and GRU</a:t>
+            </a:r>
+          </a:p>
+          <a:p>
+            <a:pPr>
+              <a:lnSpc>
+                <a:spcPct val="120000"/>
+              </a:lnSpc>
+              <a:spcBef>
+                <a:spcPts val="100"/>
+              </a:spcBef>
+              <a:spcAft>
+                <a:spcPts val="600"/>
+              </a:spcAft>
+              <a:defRPr sz="1300" b="0">
+                <a:solidFill>
+                  <a:srgbClr val="CCCCCC"/>
+                </a:solidFill>
+                <a:latin typeface="Calibri"/>
+              </a:defRPr>
+            </a:pPr>
+            <a:r>
+              <a:t>• ConvLSTMTransNet outperformed all three by ~10% better accuracy (MAE, RMSE, WAPE)</a:t>
+            </a:r>
+          </a:p>
+          <a:p>
+            <a:pPr>
+              <a:lnSpc>
+                <a:spcPct val="120000"/>
+              </a:lnSpc>
+              <a:spcBef>
+                <a:spcPts val="100"/>
+              </a:spcBef>
+              <a:spcAft>
+                <a:spcPts val="600"/>
+              </a:spcAft>
+              <a:defRPr sz="1300" b="0">
+                <a:solidFill>
+                  <a:srgbClr val="CCCCCC"/>
+                </a:solidFill>
+                <a:latin typeface="Calibri"/>
+              </a:defRPr>
+            </a:pPr>
+            <a:r>
+              <a:t>• Combining CNN + LSTM + Transformer captures both short-term spikes and long-term trends better than any single model</a:t>
+            </a:r>
+          </a:p>
+          <a:p>
+            <a:pPr>
+              <a:lnSpc>
+                <a:spcPct val="120000"/>
+              </a:lnSpc>
+              <a:spcBef>
+                <a:spcPts val="100"/>
+              </a:spcBef>
+              <a:spcAft>
+                <a:spcPts val="600"/>
+              </a:spcAft>
+              <a:defRPr sz="1300" b="0">
+                <a:solidFill>
+                  <a:srgbClr val="CCCCCC"/>
+                </a:solidFill>
+                <a:latin typeface="Calibri"/>
+              </a:defRPr>
+            </a:pPr>
+            <a:r>
+              <a:t>• Trade-off noted: more complex models need more compute and training time</a:t>
+            </a:r>
+          </a:p>
+        </p:txBody>
+      </p:sp>
+      <p:sp>
+        <p:nvSpPr>
+          <p:cNvPr id="27" name="TextBox 26"/>
           <p:cNvSpPr txBox="1"/>
           <p:nvPr/>
         </p:nvSpPr>
@@ -12047,20 +12693,20 @@
               </a:spcAft>
               <a:defRPr sz="1200" b="1">
                 <a:solidFill>
-                  <a:srgbClr val="845EC2"/>
-                </a:solidFill>
-                <a:latin typeface="Calibri"/>
-              </a:defRPr>
-            </a:pPr>
-            <a:r>
-              <a:t>Presenter: Hashim Kshim</a:t>
-            </a:r>
-          </a:p>
-        </p:txBody>
-      </p:sp>
-      <p:sp>
-        <p:nvSpPr>
-          <p:cNvPr id="17" name="TextBox 16"/>
+                  <a:srgbClr val="F0B429"/>
+                </a:solidFill>
+                <a:latin typeface="Calibri"/>
+              </a:defRPr>
+            </a:pPr>
+            <a:r>
+              <a:t>Presenter: Mazen Alhassan</a:t>
+            </a:r>
+          </a:p>
+        </p:txBody>
+      </p:sp>
+      <p:sp>
+        <p:nvSpPr>
+          <p:cNvPr id="28" name="TextBox 27"/>
           <p:cNvSpPr txBox="1"/>
           <p:nvPr/>
         </p:nvSpPr>
@@ -12095,7 +12741,7 @@
               </a:defRPr>
             </a:pPr>
             <a:r>
-              <a:t>19 / 24</a:t>
+              <a:t>19 / 25</a:t>
             </a:r>
           </a:p>
         </p:txBody>
@@ -14437,7 +15083,7 @@
               </a:defRPr>
             </a:pPr>
             <a:r>
-              <a:t>2 / 24</a:t>
+              <a:t>2 / 25</a:t>
             </a:r>
           </a:p>
         </p:txBody>
@@ -14591,7 +15237,7 @@
               </a:defRPr>
             </a:pPr>
             <a:r>
-              <a:t>Emerging Trends: 6G &amp; GenAI</a:t>
+              <a:t>Industry Example: Ericsson</a:t>
             </a:r>
           </a:p>
         </p:txBody>
@@ -14633,7 +15279,7 @@
               </a:defRPr>
             </a:pPr>
             <a:r>
-              <a:t>Two trend groups that shape the future of telemetry</a:t>
+              <a:t>Combining better data organization with automation</a:t>
             </a:r>
           </a:p>
         </p:txBody>
@@ -14688,8 +15334,8 @@
         </p:nvSpPr>
         <p:spPr>
           <a:xfrm>
-            <a:off x="822960" y="4800600"/>
-            <a:ext cx="5166360" cy="1188720"/>
+            <a:off x="777240" y="1600200"/>
+            <a:ext cx="5120640" cy="2514600"/>
           </a:xfrm>
           <a:prstGeom prst="roundRect">
             <a:avLst/>
@@ -14699,7 +15345,7 @@
           </a:solidFill>
           <a:ln w="17780">
             <a:solidFill>
-              <a:srgbClr val="00C9A7"/>
+              <a:srgbClr val="845EC2"/>
             </a:solidFill>
           </a:ln>
         </p:spPr>
@@ -14733,8 +15379,8 @@
         </p:nvSpPr>
         <p:spPr>
           <a:xfrm>
-            <a:off x="987552" y="4937760"/>
-            <a:ext cx="4837176" cy="320040"/>
+            <a:off x="941832" y="1737360"/>
+            <a:ext cx="4791456" cy="320040"/>
           </a:xfrm>
           <a:prstGeom prst="rect">
             <a:avLst/>
@@ -14756,13 +15402,13 @@
               </a:spcAft>
               <a:defRPr sz="1600" b="1">
                 <a:solidFill>
-                  <a:srgbClr val="00C9A7"/>
-                </a:solidFill>
-                <a:latin typeface="Calibri"/>
-              </a:defRPr>
-            </a:pPr>
-            <a:r>
-              <a:t>6G &amp; Next-Gen Telemetry</a:t>
+                  <a:srgbClr val="845EC2"/>
+                </a:solidFill>
+                <a:latin typeface="Calibri"/>
+              </a:defRPr>
+            </a:pPr>
+            <a:r>
+              <a:t>AI-Ready Data Mesh</a:t>
             </a:r>
           </a:p>
         </p:txBody>
@@ -14775,8 +15421,8 @@
         </p:nvSpPr>
         <p:spPr>
           <a:xfrm>
-            <a:off x="987552" y="5303520"/>
-            <a:ext cx="4837176" cy="548640"/>
+            <a:off x="941832" y="2103120"/>
+            <a:ext cx="4791456" cy="1874520"/>
           </a:xfrm>
           <a:prstGeom prst="rect">
             <a:avLst/>
@@ -14796,7 +15442,7 @@
               <a:spcAft>
                 <a:spcPts val="0"/>
               </a:spcAft>
-              <a:defRPr sz="1200" b="0">
+              <a:defRPr sz="1300" b="0">
                 <a:solidFill>
                   <a:srgbClr val="CCCCCC"/>
                 </a:solidFill>
@@ -14804,7 +15450,12 @@
               </a:defRPr>
             </a:pPr>
             <a:r>
-              <a:t>Edge intelligence, digital twins, semantic telemetry, and AI-native design.</a:t>
+              <a:t>Ericsson treats telemetry as a shared data product, not just raw logs.</a:t>
+            </a:r>
+            <a:br/>
+            <a:br/>
+            <a:r>
+              <a:t>Teams manage domain pipelines with common standards, which improves data quality and makes telemetry easier for ML teams to use.</a:t>
             </a:r>
           </a:p>
         </p:txBody>
@@ -14817,8 +15468,8 @@
         </p:nvSpPr>
         <p:spPr>
           <a:xfrm>
-            <a:off x="6172200" y="4800600"/>
-            <a:ext cx="5166360" cy="1188720"/>
+            <a:off x="6263640" y="1600200"/>
+            <a:ext cx="5120640" cy="2514600"/>
           </a:xfrm>
           <a:prstGeom prst="roundRect">
             <a:avLst/>
@@ -14828,7 +15479,7 @@
           </a:solidFill>
           <a:ln w="17780">
             <a:solidFill>
-              <a:srgbClr val="FF8C00"/>
+              <a:srgbClr val="845EC2"/>
             </a:solidFill>
           </a:ln>
         </p:spPr>
@@ -14862,8 +15513,8 @@
         </p:nvSpPr>
         <p:spPr>
           <a:xfrm>
-            <a:off x="6336792" y="4937760"/>
-            <a:ext cx="4837176" cy="320040"/>
+            <a:off x="6428232" y="1737360"/>
+            <a:ext cx="4791456" cy="320040"/>
           </a:xfrm>
           <a:prstGeom prst="rect">
             <a:avLst/>
@@ -14885,13 +15536,13 @@
               </a:spcAft>
               <a:defRPr sz="1600" b="1">
                 <a:solidFill>
-                  <a:srgbClr val="FF8C00"/>
-                </a:solidFill>
-                <a:latin typeface="Calibri"/>
-              </a:defRPr>
-            </a:pPr>
-            <a:r>
-              <a:t>Generative AI &amp; LLMs for Telemetry</a:t>
+                  <a:srgbClr val="845EC2"/>
+                </a:solidFill>
+                <a:latin typeface="Calibri"/>
+              </a:defRPr>
+            </a:pPr>
+            <a:r>
+              <a:t>Transport Automation Controller (TAC)</a:t>
             </a:r>
           </a:p>
         </p:txBody>
@@ -14904,8 +15555,8 @@
         </p:nvSpPr>
         <p:spPr>
           <a:xfrm>
-            <a:off x="6336792" y="5303520"/>
-            <a:ext cx="4837176" cy="548640"/>
+            <a:off x="6428232" y="2103120"/>
+            <a:ext cx="4791456" cy="1874520"/>
           </a:xfrm>
           <a:prstGeom prst="rect">
             <a:avLst/>
@@ -14925,7 +15576,7 @@
               <a:spcAft>
                 <a:spcPts val="0"/>
               </a:spcAft>
-              <a:defRPr sz="1200" b="0">
+              <a:defRPr sz="1300" b="0">
                 <a:solidFill>
                   <a:srgbClr val="CCCCCC"/>
                 </a:solidFill>
@@ -14933,14 +15584,148 @@
               </a:defRPr>
             </a:pPr>
             <a:r>
-              <a:t>Natural-language analytics, synthetic data, incident summaries, and foundation models.</a:t>
-            </a:r>
-          </a:p>
-        </p:txBody>
-      </p:sp>
-      <p:sp>
-        <p:nvSpPr>
-          <p:cNvPr id="13" name="TextBox 12"/>
+              <a:t>Uses AI/ML to monitor transport performance, detect KPI anomalies, and support proactive capacity planning.</a:t>
+            </a:r>
+            <a:br/>
+            <a:br/>
+            <a:r>
+              <a:t>Direction: closed-loop automation through detect, diagnose, and act workflows.</a:t>
+            </a:r>
+          </a:p>
+        </p:txBody>
+      </p:sp>
+      <p:sp>
+        <p:nvSpPr>
+          <p:cNvPr id="13" name="Rounded Rectangle 12"/>
+          <p:cNvSpPr/>
+          <p:nvPr/>
+        </p:nvSpPr>
+        <p:spPr>
+          <a:xfrm>
+            <a:off x="1325880" y="4526280"/>
+            <a:ext cx="9509760" cy="1325880"/>
+          </a:xfrm>
+          <a:prstGeom prst="roundRect">
+            <a:avLst/>
+          </a:prstGeom>
+          <a:solidFill>
+            <a:srgbClr val="141832"/>
+          </a:solidFill>
+          <a:ln w="17780">
+            <a:solidFill>
+              <a:srgbClr val="845EC2"/>
+            </a:solidFill>
+          </a:ln>
+        </p:spPr>
+        <p:style>
+          <a:lnRef idx="1">
+            <a:schemeClr val="accent1"/>
+          </a:lnRef>
+          <a:fillRef idx="3">
+            <a:schemeClr val="accent1"/>
+          </a:fillRef>
+          <a:effectRef idx="2">
+            <a:schemeClr val="accent1"/>
+          </a:effectRef>
+          <a:fontRef idx="minor">
+            <a:schemeClr val="lt1"/>
+          </a:fontRef>
+        </p:style>
+        <p:txBody>
+          <a:bodyPr rtlCol="0" anchor="ctr"/>
+          <a:lstStyle/>
+          <a:p>
+            <a:pPr algn="ctr"/>
+          </a:p>
+        </p:txBody>
+      </p:sp>
+      <p:sp>
+        <p:nvSpPr>
+          <p:cNvPr id="14" name="TextBox 13"/>
+          <p:cNvSpPr txBox="1"/>
+          <p:nvPr/>
+        </p:nvSpPr>
+        <p:spPr>
+          <a:xfrm>
+            <a:off x="1490472" y="4663440"/>
+            <a:ext cx="9180576" cy="320040"/>
+          </a:xfrm>
+          <a:prstGeom prst="rect">
+            <a:avLst/>
+          </a:prstGeom>
+          <a:noFill/>
+        </p:spPr>
+        <p:txBody>
+          <a:bodyPr wrap="square" anchor="t" lIns="45720" rIns="45720" tIns="18288" bIns="18288">
+            <a:spAutoFit/>
+          </a:bodyPr>
+          <a:lstStyle/>
+          <a:p>
+            <a:pPr algn="l">
+              <a:lnSpc>
+                <a:spcPct val="120000"/>
+              </a:lnSpc>
+              <a:spcAft>
+                <a:spcPts val="0"/>
+              </a:spcAft>
+              <a:defRPr sz="1600" b="1">
+                <a:solidFill>
+                  <a:srgbClr val="845EC2"/>
+                </a:solidFill>
+                <a:latin typeface="Calibri"/>
+              </a:defRPr>
+            </a:pPr>
+            <a:r>
+              <a:t>Key Industry Insight</a:t>
+            </a:r>
+          </a:p>
+        </p:txBody>
+      </p:sp>
+      <p:sp>
+        <p:nvSpPr>
+          <p:cNvPr id="15" name="TextBox 14"/>
+          <p:cNvSpPr txBox="1"/>
+          <p:nvPr/>
+        </p:nvSpPr>
+        <p:spPr>
+          <a:xfrm>
+            <a:off x="1490472" y="5029200"/>
+            <a:ext cx="9180576" cy="685800"/>
+          </a:xfrm>
+          <a:prstGeom prst="rect">
+            <a:avLst/>
+          </a:prstGeom>
+          <a:noFill/>
+        </p:spPr>
+        <p:txBody>
+          <a:bodyPr wrap="square" anchor="t" lIns="45720" rIns="45720" tIns="18288" bIns="18288">
+            <a:spAutoFit/>
+          </a:bodyPr>
+          <a:lstStyle/>
+          <a:p>
+            <a:pPr algn="l">
+              <a:lnSpc>
+                <a:spcPct val="130000"/>
+              </a:lnSpc>
+              <a:spcAft>
+                <a:spcPts val="0"/>
+              </a:spcAft>
+              <a:defRPr sz="1300" b="0">
+                <a:solidFill>
+                  <a:srgbClr val="CCCCCC"/>
+                </a:solidFill>
+                <a:latin typeface="Calibri"/>
+              </a:defRPr>
+            </a:pPr>
+            <a:r>
+              <a:t>Ericsson shows that good AI outcomes depend on strong telemetry and data foundations. Better data pipelines make network automation and prediction more realistic at scale.</a:t>
+            </a:r>
+          </a:p>
+        </p:txBody>
+      </p:sp>
+      <p:sp>
+        <p:nvSpPr>
+          <p:cNvPr id="16" name="TextBox 15"/>
           <p:cNvSpPr txBox="1"/>
           <p:nvPr/>
         </p:nvSpPr>
@@ -14982,7 +15767,7 @@
       </p:sp>
       <p:sp>
         <p:nvSpPr>
-          <p:cNvPr id="14" name="TextBox 13"/>
+          <p:cNvPr id="17" name="TextBox 16"/>
           <p:cNvSpPr txBox="1"/>
           <p:nvPr/>
         </p:nvSpPr>
@@ -15017,7 +15802,7 @@
               </a:defRPr>
             </a:pPr>
             <a:r>
-              <a:t>20 / 24</a:t>
+              <a:t>20 / 25</a:t>
             </a:r>
           </a:p>
         </p:txBody>
@@ -15171,7 +15956,7 @@
               </a:defRPr>
             </a:pPr>
             <a:r>
-              <a:t>Open Challenges</a:t>
+              <a:t>Emerging Trends: 6G &amp; GenAI</a:t>
             </a:r>
           </a:p>
         </p:txBody>
@@ -15213,7 +15998,7 @@
               </a:defRPr>
             </a:pPr>
             <a:r>
-              <a:t>Important problems that still need better solutions</a:t>
+              <a:t>Two trend groups that shape the future of telemetry</a:t>
             </a:r>
           </a:p>
         </p:txBody>
@@ -15268,8 +16053,8 @@
         </p:nvSpPr>
         <p:spPr>
           <a:xfrm>
-            <a:off x="731520" y="1554480"/>
-            <a:ext cx="5303520" cy="1325880"/>
+            <a:off x="822960" y="4800600"/>
+            <a:ext cx="5166360" cy="1188720"/>
           </a:xfrm>
           <a:prstGeom prst="roundRect">
             <a:avLst/>
@@ -15277,9 +16062,9 @@
           <a:solidFill>
             <a:srgbClr val="141832"/>
           </a:solidFill>
-          <a:ln w="15240">
+          <a:ln w="17780">
             <a:solidFill>
-              <a:srgbClr val="845EC2"/>
+              <a:srgbClr val="00C9A7"/>
             </a:solidFill>
           </a:ln>
         </p:spPr>
@@ -15313,8 +16098,8 @@
         </p:nvSpPr>
         <p:spPr>
           <a:xfrm>
-            <a:off x="914400" y="1691640"/>
-            <a:ext cx="4937760" cy="320040"/>
+            <a:off x="987552" y="4937760"/>
+            <a:ext cx="4837176" cy="320040"/>
           </a:xfrm>
           <a:prstGeom prst="rect">
             <a:avLst/>
@@ -15336,13 +16121,13 @@
               </a:spcAft>
               <a:defRPr sz="1600" b="1">
                 <a:solidFill>
-                  <a:srgbClr val="845EC2"/>
-                </a:solidFill>
-                <a:latin typeface="Calibri"/>
-              </a:defRPr>
-            </a:pPr>
-            <a:r>
-              <a:t>Not enough labeled data</a:t>
+                  <a:srgbClr val="00C9A7"/>
+                </a:solidFill>
+                <a:latin typeface="Calibri"/>
+              </a:defRPr>
+            </a:pPr>
+            <a:r>
+              <a:t>6G &amp; Next-Gen Telemetry</a:t>
             </a:r>
           </a:p>
         </p:txBody>
@@ -15355,8 +16140,8 @@
         </p:nvSpPr>
         <p:spPr>
           <a:xfrm>
-            <a:off x="914400" y="2057400"/>
-            <a:ext cx="4937760" cy="685800"/>
+            <a:off x="987552" y="5303520"/>
+            <a:ext cx="4837176" cy="548640"/>
           </a:xfrm>
           <a:prstGeom prst="rect">
             <a:avLst/>
@@ -15371,7 +16156,7 @@
           <a:p>
             <a:pPr algn="l">
               <a:lnSpc>
-                <a:spcPct val="120000"/>
+                <a:spcPct val="130000"/>
               </a:lnSpc>
               <a:spcAft>
                 <a:spcPts val="0"/>
@@ -15384,7 +16169,7 @@
               </a:defRPr>
             </a:pPr>
             <a:r>
-              <a:t>Real networks rarely provide clean examples of every failure or attack.</a:t>
+              <a:t>Edge intelligence, digital twins, semantic telemetry, and AI-native design.</a:t>
             </a:r>
           </a:p>
         </p:txBody>
@@ -15397,8 +16182,8 @@
         </p:nvSpPr>
         <p:spPr>
           <a:xfrm>
-            <a:off x="731520" y="3108960"/>
-            <a:ext cx="5303520" cy="1325880"/>
+            <a:off x="6172200" y="4800600"/>
+            <a:ext cx="5166360" cy="1188720"/>
           </a:xfrm>
           <a:prstGeom prst="roundRect">
             <a:avLst/>
@@ -15406,9 +16191,9 @@
           <a:solidFill>
             <a:srgbClr val="141832"/>
           </a:solidFill>
-          <a:ln w="15240">
+          <a:ln w="17780">
             <a:solidFill>
-              <a:srgbClr val="845EC2"/>
+              <a:srgbClr val="FF8C00"/>
             </a:solidFill>
           </a:ln>
         </p:spPr>
@@ -15442,8 +16227,8 @@
         </p:nvSpPr>
         <p:spPr>
           <a:xfrm>
-            <a:off x="914400" y="3246120"/>
-            <a:ext cx="4937760" cy="320040"/>
+            <a:off x="6336792" y="4937760"/>
+            <a:ext cx="4837176" cy="320040"/>
           </a:xfrm>
           <a:prstGeom prst="rect">
             <a:avLst/>
@@ -15465,13 +16250,13 @@
               </a:spcAft>
               <a:defRPr sz="1600" b="1">
                 <a:solidFill>
-                  <a:srgbClr val="845EC2"/>
-                </a:solidFill>
-                <a:latin typeface="Calibri"/>
-              </a:defRPr>
-            </a:pPr>
-            <a:r>
-              <a:t>Scale and speed</a:t>
+                  <a:srgbClr val="FF8C00"/>
+                </a:solidFill>
+                <a:latin typeface="Calibri"/>
+              </a:defRPr>
+            </a:pPr>
+            <a:r>
+              <a:t>Generative AI &amp; LLMs for Telemetry</a:t>
             </a:r>
           </a:p>
         </p:txBody>
@@ -15484,8 +16269,8 @@
         </p:nvSpPr>
         <p:spPr>
           <a:xfrm>
-            <a:off x="914400" y="3611880"/>
-            <a:ext cx="4937760" cy="685800"/>
+            <a:off x="6336792" y="5303520"/>
+            <a:ext cx="4837176" cy="548640"/>
           </a:xfrm>
           <a:prstGeom prst="rect">
             <a:avLst/>
@@ -15500,7 +16285,7 @@
           <a:p>
             <a:pPr algn="l">
               <a:lnSpc>
-                <a:spcPct val="120000"/>
+                <a:spcPct val="130000"/>
               </a:lnSpc>
               <a:spcAft>
                 <a:spcPts val="0"/>
@@ -15513,530 +16298,14 @@
               </a:defRPr>
             </a:pPr>
             <a:r>
-              <a:t>Models must handle massive telemetry streams quickly enough to matter.</a:t>
-            </a:r>
-          </a:p>
-        </p:txBody>
-      </p:sp>
-      <p:sp>
-        <p:nvSpPr>
-          <p:cNvPr id="13" name="Rounded Rectangle 12"/>
-          <p:cNvSpPr/>
-          <p:nvPr/>
-        </p:nvSpPr>
-        <p:spPr>
-          <a:xfrm>
-            <a:off x="731520" y="4663440"/>
-            <a:ext cx="5303520" cy="1325880"/>
-          </a:xfrm>
-          <a:prstGeom prst="roundRect">
-            <a:avLst/>
-          </a:prstGeom>
-          <a:solidFill>
-            <a:srgbClr val="141832"/>
-          </a:solidFill>
-          <a:ln w="15240">
-            <a:solidFill>
-              <a:srgbClr val="845EC2"/>
-            </a:solidFill>
-          </a:ln>
-        </p:spPr>
-        <p:style>
-          <a:lnRef idx="1">
-            <a:schemeClr val="accent1"/>
-          </a:lnRef>
-          <a:fillRef idx="3">
-            <a:schemeClr val="accent1"/>
-          </a:fillRef>
-          <a:effectRef idx="2">
-            <a:schemeClr val="accent1"/>
-          </a:effectRef>
-          <a:fontRef idx="minor">
-            <a:schemeClr val="lt1"/>
-          </a:fontRef>
-        </p:style>
-        <p:txBody>
-          <a:bodyPr rtlCol="0" anchor="ctr"/>
-          <a:lstStyle/>
-          <a:p>
-            <a:pPr algn="ctr"/>
-          </a:p>
-        </p:txBody>
-      </p:sp>
-      <p:sp>
-        <p:nvSpPr>
-          <p:cNvPr id="14" name="TextBox 13"/>
-          <p:cNvSpPr txBox="1"/>
-          <p:nvPr/>
-        </p:nvSpPr>
-        <p:spPr>
-          <a:xfrm>
-            <a:off x="914400" y="4800600"/>
-            <a:ext cx="4937760" cy="320040"/>
-          </a:xfrm>
-          <a:prstGeom prst="rect">
-            <a:avLst/>
-          </a:prstGeom>
-          <a:noFill/>
-        </p:spPr>
-        <p:txBody>
-          <a:bodyPr wrap="square" anchor="t" lIns="45720" rIns="45720" tIns="18288" bIns="18288">
-            <a:spAutoFit/>
-          </a:bodyPr>
-          <a:lstStyle/>
-          <a:p>
-            <a:pPr algn="l">
-              <a:lnSpc>
-                <a:spcPct val="120000"/>
-              </a:lnSpc>
-              <a:spcAft>
-                <a:spcPts val="0"/>
-              </a:spcAft>
-              <a:defRPr sz="1600" b="1">
-                <a:solidFill>
-                  <a:srgbClr val="845EC2"/>
-                </a:solidFill>
-                <a:latin typeface="Calibri"/>
-              </a:defRPr>
-            </a:pPr>
-            <a:r>
-              <a:t>Explainability</a:t>
-            </a:r>
-          </a:p>
-        </p:txBody>
-      </p:sp>
-      <p:sp>
-        <p:nvSpPr>
-          <p:cNvPr id="15" name="TextBox 14"/>
-          <p:cNvSpPr txBox="1"/>
-          <p:nvPr/>
-        </p:nvSpPr>
-        <p:spPr>
-          <a:xfrm>
-            <a:off x="914400" y="5166360"/>
-            <a:ext cx="4937760" cy="685800"/>
-          </a:xfrm>
-          <a:prstGeom prst="rect">
-            <a:avLst/>
-          </a:prstGeom>
-          <a:noFill/>
-        </p:spPr>
-        <p:txBody>
-          <a:bodyPr wrap="square" anchor="t" lIns="45720" rIns="45720" tIns="18288" bIns="18288">
-            <a:spAutoFit/>
-          </a:bodyPr>
-          <a:lstStyle/>
-          <a:p>
-            <a:pPr algn="l">
-              <a:lnSpc>
-                <a:spcPct val="120000"/>
-              </a:lnSpc>
-              <a:spcAft>
-                <a:spcPts val="0"/>
-              </a:spcAft>
-              <a:defRPr sz="1200" b="0">
-                <a:solidFill>
-                  <a:srgbClr val="CCCCCC"/>
-                </a:solidFill>
-                <a:latin typeface="Calibri"/>
-              </a:defRPr>
-            </a:pPr>
-            <a:r>
-              <a:t>Operators need to know why a model raised an alert before they trust it.</a:t>
-            </a:r>
-          </a:p>
-        </p:txBody>
-      </p:sp>
-      <p:sp>
-        <p:nvSpPr>
-          <p:cNvPr id="16" name="Rounded Rectangle 15"/>
-          <p:cNvSpPr/>
-          <p:nvPr/>
-        </p:nvSpPr>
-        <p:spPr>
-          <a:xfrm>
-            <a:off x="6492240" y="1554480"/>
-            <a:ext cx="5303520" cy="1325880"/>
-          </a:xfrm>
-          <a:prstGeom prst="roundRect">
-            <a:avLst/>
-          </a:prstGeom>
-          <a:solidFill>
-            <a:srgbClr val="141832"/>
-          </a:solidFill>
-          <a:ln w="15240">
-            <a:solidFill>
-              <a:srgbClr val="FF8C00"/>
-            </a:solidFill>
-          </a:ln>
-        </p:spPr>
-        <p:style>
-          <a:lnRef idx="1">
-            <a:schemeClr val="accent1"/>
-          </a:lnRef>
-          <a:fillRef idx="3">
-            <a:schemeClr val="accent1"/>
-          </a:fillRef>
-          <a:effectRef idx="2">
-            <a:schemeClr val="accent1"/>
-          </a:effectRef>
-          <a:fontRef idx="minor">
-            <a:schemeClr val="lt1"/>
-          </a:fontRef>
-        </p:style>
-        <p:txBody>
-          <a:bodyPr rtlCol="0" anchor="ctr"/>
-          <a:lstStyle/>
-          <a:p>
-            <a:pPr algn="ctr"/>
-          </a:p>
-        </p:txBody>
-      </p:sp>
-      <p:sp>
-        <p:nvSpPr>
-          <p:cNvPr id="17" name="TextBox 16"/>
-          <p:cNvSpPr txBox="1"/>
-          <p:nvPr/>
-        </p:nvSpPr>
-        <p:spPr>
-          <a:xfrm>
-            <a:off x="6675120" y="1691640"/>
-            <a:ext cx="4937760" cy="320040"/>
-          </a:xfrm>
-          <a:prstGeom prst="rect">
-            <a:avLst/>
-          </a:prstGeom>
-          <a:noFill/>
-        </p:spPr>
-        <p:txBody>
-          <a:bodyPr wrap="square" anchor="t" lIns="45720" rIns="45720" tIns="18288" bIns="18288">
-            <a:spAutoFit/>
-          </a:bodyPr>
-          <a:lstStyle/>
-          <a:p>
-            <a:pPr algn="l">
-              <a:lnSpc>
-                <a:spcPct val="120000"/>
-              </a:lnSpc>
-              <a:spcAft>
-                <a:spcPts val="0"/>
-              </a:spcAft>
-              <a:defRPr sz="1600" b="1">
-                <a:solidFill>
-                  <a:srgbClr val="FF8C00"/>
-                </a:solidFill>
-                <a:latin typeface="Calibri"/>
-              </a:defRPr>
-            </a:pPr>
-            <a:r>
-              <a:t>Concept drift</a:t>
-            </a:r>
-          </a:p>
-        </p:txBody>
-      </p:sp>
-      <p:sp>
-        <p:nvSpPr>
-          <p:cNvPr id="18" name="TextBox 17"/>
-          <p:cNvSpPr txBox="1"/>
-          <p:nvPr/>
-        </p:nvSpPr>
-        <p:spPr>
-          <a:xfrm>
-            <a:off x="6675120" y="2057400"/>
-            <a:ext cx="4937760" cy="685800"/>
-          </a:xfrm>
-          <a:prstGeom prst="rect">
-            <a:avLst/>
-          </a:prstGeom>
-          <a:noFill/>
-        </p:spPr>
-        <p:txBody>
-          <a:bodyPr wrap="square" anchor="t" lIns="45720" rIns="45720" tIns="18288" bIns="18288">
-            <a:spAutoFit/>
-          </a:bodyPr>
-          <a:lstStyle/>
-          <a:p>
-            <a:pPr algn="l">
-              <a:lnSpc>
-                <a:spcPct val="120000"/>
-              </a:lnSpc>
-              <a:spcAft>
-                <a:spcPts val="0"/>
-              </a:spcAft>
-              <a:defRPr sz="1200" b="0">
-                <a:solidFill>
-                  <a:srgbClr val="CCCCCC"/>
-                </a:solidFill>
-                <a:latin typeface="Calibri"/>
-              </a:defRPr>
-            </a:pPr>
-            <a:r>
-              <a:t>Normal traffic changes over time, so models can become outdated.</a:t>
-            </a:r>
-          </a:p>
-        </p:txBody>
-      </p:sp>
-      <p:sp>
-        <p:nvSpPr>
-          <p:cNvPr id="19" name="Rounded Rectangle 18"/>
-          <p:cNvSpPr/>
-          <p:nvPr/>
-        </p:nvSpPr>
-        <p:spPr>
-          <a:xfrm>
-            <a:off x="6492240" y="3108960"/>
-            <a:ext cx="5303520" cy="1325880"/>
-          </a:xfrm>
-          <a:prstGeom prst="roundRect">
-            <a:avLst/>
-          </a:prstGeom>
-          <a:solidFill>
-            <a:srgbClr val="141832"/>
-          </a:solidFill>
-          <a:ln w="15240">
-            <a:solidFill>
-              <a:srgbClr val="FF8C00"/>
-            </a:solidFill>
-          </a:ln>
-        </p:spPr>
-        <p:style>
-          <a:lnRef idx="1">
-            <a:schemeClr val="accent1"/>
-          </a:lnRef>
-          <a:fillRef idx="3">
-            <a:schemeClr val="accent1"/>
-          </a:fillRef>
-          <a:effectRef idx="2">
-            <a:schemeClr val="accent1"/>
-          </a:effectRef>
-          <a:fontRef idx="minor">
-            <a:schemeClr val="lt1"/>
-          </a:fontRef>
-        </p:style>
-        <p:txBody>
-          <a:bodyPr rtlCol="0" anchor="ctr"/>
-          <a:lstStyle/>
-          <a:p>
-            <a:pPr algn="ctr"/>
-          </a:p>
-        </p:txBody>
-      </p:sp>
-      <p:sp>
-        <p:nvSpPr>
-          <p:cNvPr id="20" name="TextBox 19"/>
-          <p:cNvSpPr txBox="1"/>
-          <p:nvPr/>
-        </p:nvSpPr>
-        <p:spPr>
-          <a:xfrm>
-            <a:off x="6675120" y="3246120"/>
-            <a:ext cx="4937760" cy="320040"/>
-          </a:xfrm>
-          <a:prstGeom prst="rect">
-            <a:avLst/>
-          </a:prstGeom>
-          <a:noFill/>
-        </p:spPr>
-        <p:txBody>
-          <a:bodyPr wrap="square" anchor="t" lIns="45720" rIns="45720" tIns="18288" bIns="18288">
-            <a:spAutoFit/>
-          </a:bodyPr>
-          <a:lstStyle/>
-          <a:p>
-            <a:pPr algn="l">
-              <a:lnSpc>
-                <a:spcPct val="120000"/>
-              </a:lnSpc>
-              <a:spcAft>
-                <a:spcPts val="0"/>
-              </a:spcAft>
-              <a:defRPr sz="1600" b="1">
-                <a:solidFill>
-                  <a:srgbClr val="FF8C00"/>
-                </a:solidFill>
-                <a:latin typeface="Calibri"/>
-              </a:defRPr>
-            </a:pPr>
-            <a:r>
-              <a:t>Generalization</a:t>
-            </a:r>
-          </a:p>
-        </p:txBody>
-      </p:sp>
-      <p:sp>
-        <p:nvSpPr>
-          <p:cNvPr id="21" name="TextBox 20"/>
-          <p:cNvSpPr txBox="1"/>
-          <p:nvPr/>
-        </p:nvSpPr>
-        <p:spPr>
-          <a:xfrm>
-            <a:off x="6675120" y="3611880"/>
-            <a:ext cx="4937760" cy="685800"/>
-          </a:xfrm>
-          <a:prstGeom prst="rect">
-            <a:avLst/>
-          </a:prstGeom>
-          <a:noFill/>
-        </p:spPr>
-        <p:txBody>
-          <a:bodyPr wrap="square" anchor="t" lIns="45720" rIns="45720" tIns="18288" bIns="18288">
-            <a:spAutoFit/>
-          </a:bodyPr>
-          <a:lstStyle/>
-          <a:p>
-            <a:pPr algn="l">
-              <a:lnSpc>
-                <a:spcPct val="120000"/>
-              </a:lnSpc>
-              <a:spcAft>
-                <a:spcPts val="0"/>
-              </a:spcAft>
-              <a:defRPr sz="1200" b="0">
-                <a:solidFill>
-                  <a:srgbClr val="CCCCCC"/>
-                </a:solidFill>
-                <a:latin typeface="Calibri"/>
-              </a:defRPr>
-            </a:pPr>
-            <a:r>
-              <a:t>A model that works well in one network may fail in another.</a:t>
-            </a:r>
-          </a:p>
-        </p:txBody>
-      </p:sp>
-      <p:sp>
-        <p:nvSpPr>
-          <p:cNvPr id="22" name="Rounded Rectangle 21"/>
-          <p:cNvSpPr/>
-          <p:nvPr/>
-        </p:nvSpPr>
-        <p:spPr>
-          <a:xfrm>
-            <a:off x="6492240" y="4663440"/>
-            <a:ext cx="5303520" cy="1325880"/>
-          </a:xfrm>
-          <a:prstGeom prst="roundRect">
-            <a:avLst/>
-          </a:prstGeom>
-          <a:solidFill>
-            <a:srgbClr val="141832"/>
-          </a:solidFill>
-          <a:ln w="15240">
-            <a:solidFill>
-              <a:srgbClr val="FF8C00"/>
-            </a:solidFill>
-          </a:ln>
-        </p:spPr>
-        <p:style>
-          <a:lnRef idx="1">
-            <a:schemeClr val="accent1"/>
-          </a:lnRef>
-          <a:fillRef idx="3">
-            <a:schemeClr val="accent1"/>
-          </a:fillRef>
-          <a:effectRef idx="2">
-            <a:schemeClr val="accent1"/>
-          </a:effectRef>
-          <a:fontRef idx="minor">
-            <a:schemeClr val="lt1"/>
-          </a:fontRef>
-        </p:style>
-        <p:txBody>
-          <a:bodyPr rtlCol="0" anchor="ctr"/>
-          <a:lstStyle/>
-          <a:p>
-            <a:pPr algn="ctr"/>
-          </a:p>
-        </p:txBody>
-      </p:sp>
-      <p:sp>
-        <p:nvSpPr>
-          <p:cNvPr id="23" name="TextBox 22"/>
-          <p:cNvSpPr txBox="1"/>
-          <p:nvPr/>
-        </p:nvSpPr>
-        <p:spPr>
-          <a:xfrm>
-            <a:off x="6675120" y="4800600"/>
-            <a:ext cx="4937760" cy="320040"/>
-          </a:xfrm>
-          <a:prstGeom prst="rect">
-            <a:avLst/>
-          </a:prstGeom>
-          <a:noFill/>
-        </p:spPr>
-        <p:txBody>
-          <a:bodyPr wrap="square" anchor="t" lIns="45720" rIns="45720" tIns="18288" bIns="18288">
-            <a:spAutoFit/>
-          </a:bodyPr>
-          <a:lstStyle/>
-          <a:p>
-            <a:pPr algn="l">
-              <a:lnSpc>
-                <a:spcPct val="120000"/>
-              </a:lnSpc>
-              <a:spcAft>
-                <a:spcPts val="0"/>
-              </a:spcAft>
-              <a:defRPr sz="1600" b="1">
-                <a:solidFill>
-                  <a:srgbClr val="FF8C00"/>
-                </a:solidFill>
-                <a:latin typeface="Calibri"/>
-              </a:defRPr>
-            </a:pPr>
-            <a:r>
-              <a:t>Privacy and security</a:t>
-            </a:r>
-          </a:p>
-        </p:txBody>
-      </p:sp>
-      <p:sp>
-        <p:nvSpPr>
-          <p:cNvPr id="24" name="TextBox 23"/>
-          <p:cNvSpPr txBox="1"/>
-          <p:nvPr/>
-        </p:nvSpPr>
-        <p:spPr>
-          <a:xfrm>
-            <a:off x="6675120" y="5166360"/>
-            <a:ext cx="4937760" cy="685800"/>
-          </a:xfrm>
-          <a:prstGeom prst="rect">
-            <a:avLst/>
-          </a:prstGeom>
-          <a:noFill/>
-        </p:spPr>
-        <p:txBody>
-          <a:bodyPr wrap="square" anchor="t" lIns="45720" rIns="45720" tIns="18288" bIns="18288">
-            <a:spAutoFit/>
-          </a:bodyPr>
-          <a:lstStyle/>
-          <a:p>
-            <a:pPr algn="l">
-              <a:lnSpc>
-                <a:spcPct val="120000"/>
-              </a:lnSpc>
-              <a:spcAft>
-                <a:spcPts val="0"/>
-              </a:spcAft>
-              <a:defRPr sz="1200" b="0">
-                <a:solidFill>
-                  <a:srgbClr val="CCCCCC"/>
-                </a:solidFill>
-                <a:latin typeface="Calibri"/>
-              </a:defRPr>
-            </a:pPr>
-            <a:r>
-              <a:t>Telemetry can contain sensitive information that must be protected.</a:t>
-            </a:r>
-          </a:p>
-        </p:txBody>
-      </p:sp>
-      <p:sp>
-        <p:nvSpPr>
-          <p:cNvPr id="25" name="TextBox 24"/>
+              <a:t>Natural-language analytics, synthetic data, incident summaries, and foundation models.</a:t>
+            </a:r>
+          </a:p>
+        </p:txBody>
+      </p:sp>
+      <p:sp>
+        <p:nvSpPr>
+          <p:cNvPr id="13" name="TextBox 12"/>
           <p:cNvSpPr txBox="1"/>
           <p:nvPr/>
         </p:nvSpPr>
@@ -16078,7 +16347,7 @@
       </p:sp>
       <p:sp>
         <p:nvSpPr>
-          <p:cNvPr id="26" name="TextBox 25"/>
+          <p:cNvPr id="14" name="TextBox 13"/>
           <p:cNvSpPr txBox="1"/>
           <p:nvPr/>
         </p:nvSpPr>
@@ -16113,7 +16382,7 @@
               </a:defRPr>
             </a:pPr>
             <a:r>
-              <a:t>21 / 24</a:t>
+              <a:t>21 / 25</a:t>
             </a:r>
           </a:p>
         </p:txBody>
@@ -16153,7 +16422,50 @@
         <p:spPr>
           <a:xfrm>
             <a:off x="0" y="0"/>
-            <a:ext cx="12191695" cy="91440"/>
+            <a:ext cx="137160" cy="6858000"/>
+          </a:xfrm>
+          <a:prstGeom prst="rect">
+            <a:avLst/>
+          </a:prstGeom>
+          <a:solidFill>
+            <a:srgbClr val="845EC2"/>
+          </a:solidFill>
+          <a:ln>
+            <a:noFill/>
+          </a:ln>
+        </p:spPr>
+        <p:style>
+          <a:lnRef idx="1">
+            <a:schemeClr val="accent1"/>
+          </a:lnRef>
+          <a:fillRef idx="3">
+            <a:schemeClr val="accent1"/>
+          </a:fillRef>
+          <a:effectRef idx="2">
+            <a:schemeClr val="accent1"/>
+          </a:effectRef>
+          <a:fontRef idx="minor">
+            <a:schemeClr val="lt1"/>
+          </a:fontRef>
+        </p:style>
+        <p:txBody>
+          <a:bodyPr rtlCol="0" anchor="ctr"/>
+          <a:lstStyle/>
+          <a:p>
+            <a:pPr algn="ctr"/>
+          </a:p>
+        </p:txBody>
+      </p:sp>
+      <p:sp>
+        <p:nvSpPr>
+          <p:cNvPr id="3" name="Rectangle 2"/>
+          <p:cNvSpPr/>
+          <p:nvPr/>
+        </p:nvSpPr>
+        <p:spPr>
+          <a:xfrm>
+            <a:off x="0" y="6784848"/>
+            <a:ext cx="12191695" cy="73152"/>
           </a:xfrm>
           <a:prstGeom prst="rect">
             <a:avLst/>
@@ -16189,23 +16501,151 @@
       </p:sp>
       <p:sp>
         <p:nvSpPr>
-          <p:cNvPr id="3" name="Rectangle 2"/>
+          <p:cNvPr id="4" name="TextBox 3"/>
+          <p:cNvSpPr txBox="1"/>
+          <p:nvPr/>
+        </p:nvSpPr>
+        <p:spPr>
+          <a:xfrm>
+            <a:off x="731520" y="365760"/>
+            <a:ext cx="10515600" cy="640080"/>
+          </a:xfrm>
+          <a:prstGeom prst="rect">
+            <a:avLst/>
+          </a:prstGeom>
+          <a:noFill/>
+        </p:spPr>
+        <p:txBody>
+          <a:bodyPr wrap="square" anchor="t" lIns="45720" rIns="45720" tIns="18288" bIns="18288">
+            <a:spAutoFit/>
+          </a:bodyPr>
+          <a:lstStyle/>
+          <a:p>
+            <a:pPr algn="l">
+              <a:lnSpc>
+                <a:spcPct val="120000"/>
+              </a:lnSpc>
+              <a:spcAft>
+                <a:spcPts val="0"/>
+              </a:spcAft>
+              <a:defRPr sz="3600" b="1">
+                <a:solidFill>
+                  <a:srgbClr val="FFFFFF"/>
+                </a:solidFill>
+                <a:latin typeface="Calibri"/>
+              </a:defRPr>
+            </a:pPr>
+            <a:r>
+              <a:t>Open Challenges</a:t>
+            </a:r>
+          </a:p>
+        </p:txBody>
+      </p:sp>
+      <p:sp>
+        <p:nvSpPr>
+          <p:cNvPr id="5" name="TextBox 4"/>
+          <p:cNvSpPr txBox="1"/>
+          <p:nvPr/>
+        </p:nvSpPr>
+        <p:spPr>
+          <a:xfrm>
+            <a:off x="731520" y="1024128"/>
+            <a:ext cx="10515600" cy="438912"/>
+          </a:xfrm>
+          <a:prstGeom prst="rect">
+            <a:avLst/>
+          </a:prstGeom>
+          <a:noFill/>
+        </p:spPr>
+        <p:txBody>
+          <a:bodyPr wrap="square" anchor="t" lIns="45720" rIns="45720" tIns="18288" bIns="18288">
+            <a:spAutoFit/>
+          </a:bodyPr>
+          <a:lstStyle/>
+          <a:p>
+            <a:pPr algn="l">
+              <a:lnSpc>
+                <a:spcPct val="120000"/>
+              </a:lnSpc>
+              <a:spcAft>
+                <a:spcPts val="0"/>
+              </a:spcAft>
+              <a:defRPr sz="1800" b="0">
+                <a:solidFill>
+                  <a:srgbClr val="CCCCCC"/>
+                </a:solidFill>
+                <a:latin typeface="Calibri"/>
+              </a:defRPr>
+            </a:pPr>
+            <a:r>
+              <a:t>Important problems that still need better solutions</a:t>
+            </a:r>
+          </a:p>
+        </p:txBody>
+      </p:sp>
+      <p:sp>
+        <p:nvSpPr>
+          <p:cNvPr id="6" name="TextBox 5"/>
+          <p:cNvSpPr txBox="1"/>
+          <p:nvPr/>
+        </p:nvSpPr>
+        <p:spPr>
+          <a:xfrm>
+            <a:off x="9326880" y="6263640"/>
+            <a:ext cx="2743200" cy="457200"/>
+          </a:xfrm>
+          <a:prstGeom prst="rect">
+            <a:avLst/>
+          </a:prstGeom>
+          <a:noFill/>
+        </p:spPr>
+        <p:txBody>
+          <a:bodyPr wrap="square" anchor="t" lIns="45720" rIns="45720" tIns="18288" bIns="18288">
+            <a:spAutoFit/>
+          </a:bodyPr>
+          <a:lstStyle/>
+          <a:p>
+            <a:pPr algn="r">
+              <a:lnSpc>
+                <a:spcPct val="120000"/>
+              </a:lnSpc>
+              <a:spcAft>
+                <a:spcPts val="0"/>
+              </a:spcAft>
+              <a:defRPr sz="1200" b="1">
+                <a:solidFill>
+                  <a:srgbClr val="009FFD"/>
+                </a:solidFill>
+                <a:latin typeface="Calibri"/>
+              </a:defRPr>
+            </a:pPr>
+            <a:r>
+              <a:t>Presenter: Hashim Kshim</a:t>
+            </a:r>
+          </a:p>
+        </p:txBody>
+      </p:sp>
+      <p:sp>
+        <p:nvSpPr>
+          <p:cNvPr id="7" name="Rounded Rectangle 6"/>
           <p:cNvSpPr/>
           <p:nvPr/>
         </p:nvSpPr>
         <p:spPr>
           <a:xfrm>
-            <a:off x="0" y="6784848"/>
-            <a:ext cx="12191695" cy="73152"/>
-          </a:xfrm>
-          <a:prstGeom prst="rect">
+            <a:off x="731520" y="1554480"/>
+            <a:ext cx="5303520" cy="1325880"/>
+          </a:xfrm>
+          <a:prstGeom prst="roundRect">
             <a:avLst/>
           </a:prstGeom>
           <a:solidFill>
-            <a:srgbClr val="009FFD"/>
+            <a:srgbClr val="141832"/>
           </a:solidFill>
-          <a:ln>
-            <a:noFill/>
+          <a:ln w="15240">
+            <a:solidFill>
+              <a:srgbClr val="845EC2"/>
+            </a:solidFill>
           </a:ln>
         </p:spPr>
         <p:style>
@@ -16232,14 +16672,14 @@
       </p:sp>
       <p:sp>
         <p:nvSpPr>
-          <p:cNvPr id="4" name="TextBox 3"/>
-          <p:cNvSpPr txBox="1"/>
-          <p:nvPr/>
-        </p:nvSpPr>
-        <p:spPr>
-          <a:xfrm>
-            <a:off x="731520" y="365760"/>
-            <a:ext cx="10515600" cy="640080"/>
+          <p:cNvPr id="8" name="TextBox 7"/>
+          <p:cNvSpPr txBox="1"/>
+          <p:nvPr/>
+        </p:nvSpPr>
+        <p:spPr>
+          <a:xfrm>
+            <a:off x="914400" y="1691640"/>
+            <a:ext cx="4937760" cy="320040"/>
           </a:xfrm>
           <a:prstGeom prst="rect">
             <a:avLst/>
@@ -16259,29 +16699,29 @@
               <a:spcAft>
                 <a:spcPts val="0"/>
               </a:spcAft>
-              <a:defRPr sz="3600" b="1">
-                <a:solidFill>
-                  <a:srgbClr val="FFFFFF"/>
-                </a:solidFill>
-                <a:latin typeface="Calibri"/>
-              </a:defRPr>
-            </a:pPr>
-            <a:r>
-              <a:t>Conclusion &amp; Key Takeaways</a:t>
-            </a:r>
-          </a:p>
-        </p:txBody>
-      </p:sp>
-      <p:sp>
-        <p:nvSpPr>
-          <p:cNvPr id="5" name="TextBox 4"/>
-          <p:cNvSpPr txBox="1"/>
-          <p:nvPr/>
-        </p:nvSpPr>
-        <p:spPr>
-          <a:xfrm>
-            <a:off x="731520" y="1024128"/>
-            <a:ext cx="10515600" cy="438912"/>
+              <a:defRPr sz="1600" b="1">
+                <a:solidFill>
+                  <a:srgbClr val="845EC2"/>
+                </a:solidFill>
+                <a:latin typeface="Calibri"/>
+              </a:defRPr>
+            </a:pPr>
+            <a:r>
+              <a:t>Not enough labeled data</a:t>
+            </a:r>
+          </a:p>
+        </p:txBody>
+      </p:sp>
+      <p:sp>
+        <p:nvSpPr>
+          <p:cNvPr id="9" name="TextBox 8"/>
+          <p:cNvSpPr txBox="1"/>
+          <p:nvPr/>
+        </p:nvSpPr>
+        <p:spPr>
+          <a:xfrm>
+            <a:off x="914400" y="2057400"/>
+            <a:ext cx="4937760" cy="685800"/>
           </a:xfrm>
           <a:prstGeom prst="rect">
             <a:avLst/>
@@ -16301,7 +16741,7 @@
               <a:spcAft>
                 <a:spcPts val="0"/>
               </a:spcAft>
-              <a:defRPr sz="1800" b="0">
+              <a:defRPr sz="1200" b="0">
                 <a:solidFill>
                   <a:srgbClr val="CCCCCC"/>
                 </a:solidFill>
@@ -16309,72 +16749,32 @@
               </a:defRPr>
             </a:pPr>
             <a:r>
-              <a:t>A cleaner final summary</a:t>
-            </a:r>
-          </a:p>
-        </p:txBody>
-      </p:sp>
-      <p:sp>
-        <p:nvSpPr>
-          <p:cNvPr id="6" name="TextBox 5"/>
-          <p:cNvSpPr txBox="1"/>
-          <p:nvPr/>
-        </p:nvSpPr>
-        <p:spPr>
-          <a:xfrm>
-            <a:off x="9326880" y="6263640"/>
-            <a:ext cx="2743200" cy="457200"/>
-          </a:xfrm>
-          <a:prstGeom prst="rect">
-            <a:avLst/>
-          </a:prstGeom>
-          <a:noFill/>
-        </p:spPr>
-        <p:txBody>
-          <a:bodyPr wrap="square" anchor="t" lIns="45720" rIns="45720" tIns="18288" bIns="18288">
-            <a:spAutoFit/>
-          </a:bodyPr>
-          <a:lstStyle/>
-          <a:p>
-            <a:pPr algn="r">
-              <a:lnSpc>
-                <a:spcPct val="120000"/>
-              </a:lnSpc>
-              <a:spcAft>
-                <a:spcPts val="0"/>
-              </a:spcAft>
-              <a:defRPr sz="1200" b="1">
-                <a:solidFill>
-                  <a:srgbClr val="009FFD"/>
-                </a:solidFill>
-                <a:latin typeface="Calibri"/>
-              </a:defRPr>
-            </a:pPr>
-            <a:r>
-              <a:t>Presenter: Hashim Kshim</a:t>
-            </a:r>
-          </a:p>
-        </p:txBody>
-      </p:sp>
-      <p:sp>
-        <p:nvSpPr>
-          <p:cNvPr id="7" name="Oval 6"/>
+              <a:t>Real networks rarely provide clean examples of every failure or attack.</a:t>
+            </a:r>
+          </a:p>
+        </p:txBody>
+      </p:sp>
+      <p:sp>
+        <p:nvSpPr>
+          <p:cNvPr id="10" name="Rounded Rectangle 9"/>
           <p:cNvSpPr/>
           <p:nvPr/>
         </p:nvSpPr>
         <p:spPr>
           <a:xfrm>
-            <a:off x="685800" y="1344168"/>
-            <a:ext cx="384048" cy="384048"/>
-          </a:xfrm>
-          <a:prstGeom prst="ellipse">
+            <a:off x="731520" y="3108960"/>
+            <a:ext cx="5303520" cy="1325880"/>
+          </a:xfrm>
+          <a:prstGeom prst="roundRect">
             <a:avLst/>
           </a:prstGeom>
           <a:solidFill>
-            <a:srgbClr val="009FFD"/>
+            <a:srgbClr val="141832"/>
           </a:solidFill>
-          <a:ln>
-            <a:noFill/>
+          <a:ln w="15240">
+            <a:solidFill>
+              <a:srgbClr val="845EC2"/>
+            </a:solidFill>
           </a:ln>
         </p:spPr>
         <p:style>
@@ -16401,56 +16801,14 @@
       </p:sp>
       <p:sp>
         <p:nvSpPr>
-          <p:cNvPr id="8" name="TextBox 7"/>
-          <p:cNvSpPr txBox="1"/>
-          <p:nvPr/>
-        </p:nvSpPr>
-        <p:spPr>
-          <a:xfrm>
-            <a:off x="685800" y="1371600"/>
-            <a:ext cx="384048" cy="347472"/>
-          </a:xfrm>
-          <a:prstGeom prst="rect">
-            <a:avLst/>
-          </a:prstGeom>
-          <a:noFill/>
-        </p:spPr>
-        <p:txBody>
-          <a:bodyPr wrap="square" anchor="t" lIns="45720" rIns="45720" tIns="18288" bIns="18288">
-            <a:spAutoFit/>
-          </a:bodyPr>
-          <a:lstStyle/>
-          <a:p>
-            <a:pPr algn="ctr">
-              <a:lnSpc>
-                <a:spcPct val="120000"/>
-              </a:lnSpc>
-              <a:spcAft>
-                <a:spcPts val="0"/>
-              </a:spcAft>
-              <a:defRPr sz="1800" b="1">
-                <a:solidFill>
-                  <a:srgbClr val="FFFFFF"/>
-                </a:solidFill>
-                <a:latin typeface="Calibri"/>
-              </a:defRPr>
-            </a:pPr>
-            <a:r>
-              <a:t>1</a:t>
-            </a:r>
-          </a:p>
-        </p:txBody>
-      </p:sp>
-      <p:sp>
-        <p:nvSpPr>
-          <p:cNvPr id="9" name="TextBox 8"/>
-          <p:cNvSpPr txBox="1"/>
-          <p:nvPr/>
-        </p:nvSpPr>
-        <p:spPr>
-          <a:xfrm>
-            <a:off x="1280160" y="1325880"/>
-            <a:ext cx="10515600" cy="320040"/>
+          <p:cNvPr id="11" name="TextBox 10"/>
+          <p:cNvSpPr txBox="1"/>
+          <p:nvPr/>
+        </p:nvSpPr>
+        <p:spPr>
+          <a:xfrm>
+            <a:off x="914400" y="3246120"/>
+            <a:ext cx="4937760" cy="320040"/>
           </a:xfrm>
           <a:prstGeom prst="rect">
             <a:avLst/>
@@ -16470,29 +16828,29 @@
               <a:spcAft>
                 <a:spcPts val="0"/>
               </a:spcAft>
-              <a:defRPr sz="1700" b="1">
-                <a:solidFill>
-                  <a:srgbClr val="009FFD"/>
-                </a:solidFill>
-                <a:latin typeface="Calibri"/>
-              </a:defRPr>
-            </a:pPr>
-            <a:r>
-              <a:t>Telemetry gives the raw picture</a:t>
-            </a:r>
-          </a:p>
-        </p:txBody>
-      </p:sp>
-      <p:sp>
-        <p:nvSpPr>
-          <p:cNvPr id="10" name="TextBox 9"/>
-          <p:cNvSpPr txBox="1"/>
-          <p:nvPr/>
-        </p:nvSpPr>
-        <p:spPr>
-          <a:xfrm>
-            <a:off x="1280160" y="1673352"/>
-            <a:ext cx="10515600" cy="548640"/>
+              <a:defRPr sz="1600" b="1">
+                <a:solidFill>
+                  <a:srgbClr val="845EC2"/>
+                </a:solidFill>
+                <a:latin typeface="Calibri"/>
+              </a:defRPr>
+            </a:pPr>
+            <a:r>
+              <a:t>Scale and speed</a:t>
+            </a:r>
+          </a:p>
+        </p:txBody>
+      </p:sp>
+      <p:sp>
+        <p:nvSpPr>
+          <p:cNvPr id="12" name="TextBox 11"/>
+          <p:cNvSpPr txBox="1"/>
+          <p:nvPr/>
+        </p:nvSpPr>
+        <p:spPr>
+          <a:xfrm>
+            <a:off x="914400" y="3611880"/>
+            <a:ext cx="4937760" cy="685800"/>
           </a:xfrm>
           <a:prstGeom prst="rect">
             <a:avLst/>
@@ -16512,7 +16870,7 @@
               <a:spcAft>
                 <a:spcPts val="0"/>
               </a:spcAft>
-              <a:defRPr sz="1400" b="0">
+              <a:defRPr sz="1200" b="0">
                 <a:solidFill>
                   <a:srgbClr val="CCCCCC"/>
                 </a:solidFill>
@@ -16520,30 +16878,32 @@
               </a:defRPr>
             </a:pPr>
             <a:r>
-              <a:t>It tells us what the network is doing right now through streams of measurements and events.</a:t>
-            </a:r>
-          </a:p>
-        </p:txBody>
-      </p:sp>
-      <p:sp>
-        <p:nvSpPr>
-          <p:cNvPr id="11" name="Oval 10"/>
+              <a:t>Models must handle massive telemetry streams quickly enough to matter.</a:t>
+            </a:r>
+          </a:p>
+        </p:txBody>
+      </p:sp>
+      <p:sp>
+        <p:nvSpPr>
+          <p:cNvPr id="13" name="Rounded Rectangle 12"/>
           <p:cNvSpPr/>
           <p:nvPr/>
         </p:nvSpPr>
         <p:spPr>
           <a:xfrm>
-            <a:off x="685800" y="2331720"/>
-            <a:ext cx="384048" cy="384048"/>
-          </a:xfrm>
-          <a:prstGeom prst="ellipse">
+            <a:off x="731520" y="4663440"/>
+            <a:ext cx="5303520" cy="1325880"/>
+          </a:xfrm>
+          <a:prstGeom prst="roundRect">
             <a:avLst/>
           </a:prstGeom>
           <a:solidFill>
-            <a:srgbClr val="00C9A7"/>
+            <a:srgbClr val="141832"/>
           </a:solidFill>
-          <a:ln>
-            <a:noFill/>
+          <a:ln w="15240">
+            <a:solidFill>
+              <a:srgbClr val="845EC2"/>
+            </a:solidFill>
           </a:ln>
         </p:spPr>
         <p:style>
@@ -16570,56 +16930,14 @@
       </p:sp>
       <p:sp>
         <p:nvSpPr>
-          <p:cNvPr id="12" name="TextBox 11"/>
-          <p:cNvSpPr txBox="1"/>
-          <p:nvPr/>
-        </p:nvSpPr>
-        <p:spPr>
-          <a:xfrm>
-            <a:off x="685800" y="2359152"/>
-            <a:ext cx="384048" cy="347472"/>
-          </a:xfrm>
-          <a:prstGeom prst="rect">
-            <a:avLst/>
-          </a:prstGeom>
-          <a:noFill/>
-        </p:spPr>
-        <p:txBody>
-          <a:bodyPr wrap="square" anchor="t" lIns="45720" rIns="45720" tIns="18288" bIns="18288">
-            <a:spAutoFit/>
-          </a:bodyPr>
-          <a:lstStyle/>
-          <a:p>
-            <a:pPr algn="ctr">
-              <a:lnSpc>
-                <a:spcPct val="120000"/>
-              </a:lnSpc>
-              <a:spcAft>
-                <a:spcPts val="0"/>
-              </a:spcAft>
-              <a:defRPr sz="1800" b="1">
-                <a:solidFill>
-                  <a:srgbClr val="FFFFFF"/>
-                </a:solidFill>
-                <a:latin typeface="Calibri"/>
-              </a:defRPr>
-            </a:pPr>
-            <a:r>
-              <a:t>2</a:t>
-            </a:r>
-          </a:p>
-        </p:txBody>
-      </p:sp>
-      <p:sp>
-        <p:nvSpPr>
-          <p:cNvPr id="13" name="TextBox 12"/>
-          <p:cNvSpPr txBox="1"/>
-          <p:nvPr/>
-        </p:nvSpPr>
-        <p:spPr>
-          <a:xfrm>
-            <a:off x="1280160" y="2313432"/>
-            <a:ext cx="10515600" cy="320040"/>
+          <p:cNvPr id="14" name="TextBox 13"/>
+          <p:cNvSpPr txBox="1"/>
+          <p:nvPr/>
+        </p:nvSpPr>
+        <p:spPr>
+          <a:xfrm>
+            <a:off x="914400" y="4800600"/>
+            <a:ext cx="4937760" cy="320040"/>
           </a:xfrm>
           <a:prstGeom prst="rect">
             <a:avLst/>
@@ -16639,29 +16957,29 @@
               <a:spcAft>
                 <a:spcPts val="0"/>
               </a:spcAft>
-              <a:defRPr sz="1700" b="1">
-                <a:solidFill>
-                  <a:srgbClr val="00C9A7"/>
-                </a:solidFill>
-                <a:latin typeface="Calibri"/>
-              </a:defRPr>
-            </a:pPr>
-            <a:r>
-              <a:t>ML helps turn data into decisions</a:t>
-            </a:r>
-          </a:p>
-        </p:txBody>
-      </p:sp>
-      <p:sp>
-        <p:nvSpPr>
-          <p:cNvPr id="14" name="TextBox 13"/>
-          <p:cNvSpPr txBox="1"/>
-          <p:nvPr/>
-        </p:nvSpPr>
-        <p:spPr>
-          <a:xfrm>
-            <a:off x="1280160" y="2660904"/>
-            <a:ext cx="10515600" cy="548640"/>
+              <a:defRPr sz="1600" b="1">
+                <a:solidFill>
+                  <a:srgbClr val="845EC2"/>
+                </a:solidFill>
+                <a:latin typeface="Calibri"/>
+              </a:defRPr>
+            </a:pPr>
+            <a:r>
+              <a:t>Explainability</a:t>
+            </a:r>
+          </a:p>
+        </p:txBody>
+      </p:sp>
+      <p:sp>
+        <p:nvSpPr>
+          <p:cNvPr id="15" name="TextBox 14"/>
+          <p:cNvSpPr txBox="1"/>
+          <p:nvPr/>
+        </p:nvSpPr>
+        <p:spPr>
+          <a:xfrm>
+            <a:off x="914400" y="5166360"/>
+            <a:ext cx="4937760" cy="685800"/>
           </a:xfrm>
           <a:prstGeom prst="rect">
             <a:avLst/>
@@ -16681,7 +16999,7 @@
               <a:spcAft>
                 <a:spcPts val="0"/>
               </a:spcAft>
-              <a:defRPr sz="1400" b="0">
+              <a:defRPr sz="1200" b="0">
                 <a:solidFill>
                   <a:srgbClr val="CCCCCC"/>
                 </a:solidFill>
@@ -16689,30 +17007,32 @@
               </a:defRPr>
             </a:pPr>
             <a:r>
-              <a:t>It can find anomalies, predict future performance, and help improve QoS.</a:t>
-            </a:r>
-          </a:p>
-        </p:txBody>
-      </p:sp>
-      <p:sp>
-        <p:nvSpPr>
-          <p:cNvPr id="15" name="Oval 14"/>
+              <a:t>Operators need to know why a model raised an alert before they trust it.</a:t>
+            </a:r>
+          </a:p>
+        </p:txBody>
+      </p:sp>
+      <p:sp>
+        <p:nvSpPr>
+          <p:cNvPr id="16" name="Rounded Rectangle 15"/>
           <p:cNvSpPr/>
           <p:nvPr/>
         </p:nvSpPr>
         <p:spPr>
           <a:xfrm>
-            <a:off x="685800" y="3319272"/>
-            <a:ext cx="384048" cy="384048"/>
-          </a:xfrm>
-          <a:prstGeom prst="ellipse">
+            <a:off x="6492240" y="1554480"/>
+            <a:ext cx="5303520" cy="1325880"/>
+          </a:xfrm>
+          <a:prstGeom prst="roundRect">
             <a:avLst/>
           </a:prstGeom>
           <a:solidFill>
-            <a:srgbClr val="845EC2"/>
+            <a:srgbClr val="141832"/>
           </a:solidFill>
-          <a:ln>
-            <a:noFill/>
+          <a:ln w="15240">
+            <a:solidFill>
+              <a:srgbClr val="FF8C00"/>
+            </a:solidFill>
           </a:ln>
         </p:spPr>
         <p:style>
@@ -16739,56 +17059,14 @@
       </p:sp>
       <p:sp>
         <p:nvSpPr>
-          <p:cNvPr id="16" name="TextBox 15"/>
-          <p:cNvSpPr txBox="1"/>
-          <p:nvPr/>
-        </p:nvSpPr>
-        <p:spPr>
-          <a:xfrm>
-            <a:off x="685800" y="3346704"/>
-            <a:ext cx="384048" cy="347472"/>
-          </a:xfrm>
-          <a:prstGeom prst="rect">
-            <a:avLst/>
-          </a:prstGeom>
-          <a:noFill/>
-        </p:spPr>
-        <p:txBody>
-          <a:bodyPr wrap="square" anchor="t" lIns="45720" rIns="45720" tIns="18288" bIns="18288">
-            <a:spAutoFit/>
-          </a:bodyPr>
-          <a:lstStyle/>
-          <a:p>
-            <a:pPr algn="ctr">
-              <a:lnSpc>
-                <a:spcPct val="120000"/>
-              </a:lnSpc>
-              <a:spcAft>
-                <a:spcPts val="0"/>
-              </a:spcAft>
-              <a:defRPr sz="1800" b="1">
-                <a:solidFill>
-                  <a:srgbClr val="FFFFFF"/>
-                </a:solidFill>
-                <a:latin typeface="Calibri"/>
-              </a:defRPr>
-            </a:pPr>
-            <a:r>
-              <a:t>3</a:t>
-            </a:r>
-          </a:p>
-        </p:txBody>
-      </p:sp>
-      <p:sp>
-        <p:nvSpPr>
           <p:cNvPr id="17" name="TextBox 16"/>
           <p:cNvSpPr txBox="1"/>
           <p:nvPr/>
         </p:nvSpPr>
         <p:spPr>
           <a:xfrm>
-            <a:off x="1280160" y="3300984"/>
-            <a:ext cx="10515600" cy="320040"/>
+            <a:off x="6675120" y="1691640"/>
+            <a:ext cx="4937760" cy="320040"/>
           </a:xfrm>
           <a:prstGeom prst="rect">
             <a:avLst/>
@@ -16808,15 +17086,15 @@
               <a:spcAft>
                 <a:spcPts val="0"/>
               </a:spcAft>
-              <a:defRPr sz="1700" b="1">
-                <a:solidFill>
-                  <a:srgbClr val="845EC2"/>
-                </a:solidFill>
-                <a:latin typeface="Calibri"/>
-              </a:defRPr>
-            </a:pPr>
-            <a:r>
-              <a:t>Industry is already using these ideas</a:t>
+              <a:defRPr sz="1600" b="1">
+                <a:solidFill>
+                  <a:srgbClr val="FF8C00"/>
+                </a:solidFill>
+                <a:latin typeface="Calibri"/>
+              </a:defRPr>
+            </a:pPr>
+            <a:r>
+              <a:t>Concept drift</a:t>
             </a:r>
           </a:p>
         </p:txBody>
@@ -16829,8 +17107,8 @@
         </p:nvSpPr>
         <p:spPr>
           <a:xfrm>
-            <a:off x="1280160" y="3648456"/>
-            <a:ext cx="10515600" cy="548640"/>
+            <a:off x="6675120" y="2057400"/>
+            <a:ext cx="4937760" cy="685800"/>
           </a:xfrm>
           <a:prstGeom prst="rect">
             <a:avLst/>
@@ -16850,7 +17128,7 @@
               <a:spcAft>
                 <a:spcPts val="0"/>
               </a:spcAft>
-              <a:defRPr sz="1400" b="0">
+              <a:defRPr sz="1200" b="0">
                 <a:solidFill>
                   <a:srgbClr val="CCCCCC"/>
                 </a:solidFill>
@@ -16858,30 +17136,32 @@
               </a:defRPr>
             </a:pPr>
             <a:r>
-              <a:t>Companies such as Nokia and Ericsson are building more automated, ML-driven telemetry systems.</a:t>
-            </a:r>
-          </a:p>
-        </p:txBody>
-      </p:sp>
-      <p:sp>
-        <p:nvSpPr>
-          <p:cNvPr id="19" name="Oval 18"/>
+              <a:t>Normal traffic changes over time, so models can become outdated.</a:t>
+            </a:r>
+          </a:p>
+        </p:txBody>
+      </p:sp>
+      <p:sp>
+        <p:nvSpPr>
+          <p:cNvPr id="19" name="Rounded Rectangle 18"/>
           <p:cNvSpPr/>
           <p:nvPr/>
         </p:nvSpPr>
         <p:spPr>
           <a:xfrm>
-            <a:off x="685800" y="4306824"/>
-            <a:ext cx="384048" cy="384048"/>
-          </a:xfrm>
-          <a:prstGeom prst="ellipse">
+            <a:off x="6492240" y="3108960"/>
+            <a:ext cx="5303520" cy="1325880"/>
+          </a:xfrm>
+          <a:prstGeom prst="roundRect">
             <a:avLst/>
           </a:prstGeom>
           <a:solidFill>
-            <a:srgbClr val="FF8C00"/>
+            <a:srgbClr val="141832"/>
           </a:solidFill>
-          <a:ln>
-            <a:noFill/>
+          <a:ln w="15240">
+            <a:solidFill>
+              <a:srgbClr val="FF8C00"/>
+            </a:solidFill>
           </a:ln>
         </p:spPr>
         <p:style>
@@ -16914,36 +17194,36 @@
         </p:nvSpPr>
         <p:spPr>
           <a:xfrm>
-            <a:off x="685800" y="4334256"/>
-            <a:ext cx="384048" cy="347472"/>
-          </a:xfrm>
-          <a:prstGeom prst="rect">
-            <a:avLst/>
-          </a:prstGeom>
-          <a:noFill/>
-        </p:spPr>
-        <p:txBody>
-          <a:bodyPr wrap="square" anchor="t" lIns="45720" rIns="45720" tIns="18288" bIns="18288">
-            <a:spAutoFit/>
-          </a:bodyPr>
-          <a:lstStyle/>
-          <a:p>
-            <a:pPr algn="ctr">
-              <a:lnSpc>
-                <a:spcPct val="120000"/>
-              </a:lnSpc>
-              <a:spcAft>
-                <a:spcPts val="0"/>
-              </a:spcAft>
-              <a:defRPr sz="1800" b="1">
-                <a:solidFill>
-                  <a:srgbClr val="FFFFFF"/>
-                </a:solidFill>
-                <a:latin typeface="Calibri"/>
-              </a:defRPr>
-            </a:pPr>
-            <a:r>
-              <a:t>4</a:t>
+            <a:off x="6675120" y="3246120"/>
+            <a:ext cx="4937760" cy="320040"/>
+          </a:xfrm>
+          <a:prstGeom prst="rect">
+            <a:avLst/>
+          </a:prstGeom>
+          <a:noFill/>
+        </p:spPr>
+        <p:txBody>
+          <a:bodyPr wrap="square" anchor="t" lIns="45720" rIns="45720" tIns="18288" bIns="18288">
+            <a:spAutoFit/>
+          </a:bodyPr>
+          <a:lstStyle/>
+          <a:p>
+            <a:pPr algn="l">
+              <a:lnSpc>
+                <a:spcPct val="120000"/>
+              </a:lnSpc>
+              <a:spcAft>
+                <a:spcPts val="0"/>
+              </a:spcAft>
+              <a:defRPr sz="1600" b="1">
+                <a:solidFill>
+                  <a:srgbClr val="FF8C00"/>
+                </a:solidFill>
+                <a:latin typeface="Calibri"/>
+              </a:defRPr>
+            </a:pPr>
+            <a:r>
+              <a:t>Generalization</a:t>
             </a:r>
           </a:p>
         </p:txBody>
@@ -16956,8 +17236,8 @@
         </p:nvSpPr>
         <p:spPr>
           <a:xfrm>
-            <a:off x="1280160" y="4288536"/>
-            <a:ext cx="10515600" cy="320040"/>
+            <a:off x="6675120" y="3611880"/>
+            <a:ext cx="4937760" cy="685800"/>
           </a:xfrm>
           <a:prstGeom prst="rect">
             <a:avLst/>
@@ -16977,49 +17257,7 @@
               <a:spcAft>
                 <a:spcPts val="0"/>
               </a:spcAft>
-              <a:defRPr sz="1700" b="1">
-                <a:solidFill>
-                  <a:srgbClr val="FF8C00"/>
-                </a:solidFill>
-                <a:latin typeface="Calibri"/>
-              </a:defRPr>
-            </a:pPr>
-            <a:r>
-              <a:t>The field is still growing</a:t>
-            </a:r>
-          </a:p>
-        </p:txBody>
-      </p:sp>
-      <p:sp>
-        <p:nvSpPr>
-          <p:cNvPr id="22" name="TextBox 21"/>
-          <p:cNvSpPr txBox="1"/>
-          <p:nvPr/>
-        </p:nvSpPr>
-        <p:spPr>
-          <a:xfrm>
-            <a:off x="1280160" y="4636008"/>
-            <a:ext cx="10515600" cy="548640"/>
-          </a:xfrm>
-          <a:prstGeom prst="rect">
-            <a:avLst/>
-          </a:prstGeom>
-          <a:noFill/>
-        </p:spPr>
-        <p:txBody>
-          <a:bodyPr wrap="square" anchor="t" lIns="45720" rIns="45720" tIns="18288" bIns="18288">
-            <a:spAutoFit/>
-          </a:bodyPr>
-          <a:lstStyle/>
-          <a:p>
-            <a:pPr algn="l">
-              <a:lnSpc>
-                <a:spcPct val="120000"/>
-              </a:lnSpc>
-              <a:spcAft>
-                <a:spcPts val="0"/>
-              </a:spcAft>
-              <a:defRPr sz="1400" b="0">
+              <a:defRPr sz="1200" b="0">
                 <a:solidFill>
                   <a:srgbClr val="CCCCCC"/>
                 </a:solidFill>
@@ -17027,30 +17265,32 @@
               </a:defRPr>
             </a:pPr>
             <a:r>
-              <a:t>6G, digital twins, and generative AI may make telemetry smarter and easier to use.</a:t>
-            </a:r>
-          </a:p>
-        </p:txBody>
-      </p:sp>
-      <p:sp>
-        <p:nvSpPr>
-          <p:cNvPr id="23" name="Oval 22"/>
+              <a:t>A model that works well in one network may fail in another.</a:t>
+            </a:r>
+          </a:p>
+        </p:txBody>
+      </p:sp>
+      <p:sp>
+        <p:nvSpPr>
+          <p:cNvPr id="22" name="Rounded Rectangle 21"/>
           <p:cNvSpPr/>
           <p:nvPr/>
         </p:nvSpPr>
         <p:spPr>
           <a:xfrm>
-            <a:off x="685800" y="5294376"/>
-            <a:ext cx="384048" cy="384048"/>
-          </a:xfrm>
-          <a:prstGeom prst="ellipse">
+            <a:off x="6492240" y="4663440"/>
+            <a:ext cx="5303520" cy="1325880"/>
+          </a:xfrm>
+          <a:prstGeom prst="roundRect">
             <a:avLst/>
           </a:prstGeom>
           <a:solidFill>
-            <a:srgbClr val="E04040"/>
+            <a:srgbClr val="141832"/>
           </a:solidFill>
-          <a:ln>
-            <a:noFill/>
+          <a:ln w="15240">
+            <a:solidFill>
+              <a:srgbClr val="FF8C00"/>
+            </a:solidFill>
           </a:ln>
         </p:spPr>
         <p:style>
@@ -17077,42 +17317,84 @@
       </p:sp>
       <p:sp>
         <p:nvSpPr>
+          <p:cNvPr id="23" name="TextBox 22"/>
+          <p:cNvSpPr txBox="1"/>
+          <p:nvPr/>
+        </p:nvSpPr>
+        <p:spPr>
+          <a:xfrm>
+            <a:off x="6675120" y="4800600"/>
+            <a:ext cx="4937760" cy="320040"/>
+          </a:xfrm>
+          <a:prstGeom prst="rect">
+            <a:avLst/>
+          </a:prstGeom>
+          <a:noFill/>
+        </p:spPr>
+        <p:txBody>
+          <a:bodyPr wrap="square" anchor="t" lIns="45720" rIns="45720" tIns="18288" bIns="18288">
+            <a:spAutoFit/>
+          </a:bodyPr>
+          <a:lstStyle/>
+          <a:p>
+            <a:pPr algn="l">
+              <a:lnSpc>
+                <a:spcPct val="120000"/>
+              </a:lnSpc>
+              <a:spcAft>
+                <a:spcPts val="0"/>
+              </a:spcAft>
+              <a:defRPr sz="1600" b="1">
+                <a:solidFill>
+                  <a:srgbClr val="FF8C00"/>
+                </a:solidFill>
+                <a:latin typeface="Calibri"/>
+              </a:defRPr>
+            </a:pPr>
+            <a:r>
+              <a:t>Privacy and security</a:t>
+            </a:r>
+          </a:p>
+        </p:txBody>
+      </p:sp>
+      <p:sp>
+        <p:nvSpPr>
           <p:cNvPr id="24" name="TextBox 23"/>
           <p:cNvSpPr txBox="1"/>
           <p:nvPr/>
         </p:nvSpPr>
         <p:spPr>
           <a:xfrm>
-            <a:off x="685800" y="5321808"/>
-            <a:ext cx="384048" cy="347472"/>
-          </a:xfrm>
-          <a:prstGeom prst="rect">
-            <a:avLst/>
-          </a:prstGeom>
-          <a:noFill/>
-        </p:spPr>
-        <p:txBody>
-          <a:bodyPr wrap="square" anchor="t" lIns="45720" rIns="45720" tIns="18288" bIns="18288">
-            <a:spAutoFit/>
-          </a:bodyPr>
-          <a:lstStyle/>
-          <a:p>
-            <a:pPr algn="ctr">
-              <a:lnSpc>
-                <a:spcPct val="120000"/>
-              </a:lnSpc>
-              <a:spcAft>
-                <a:spcPts val="0"/>
-              </a:spcAft>
-              <a:defRPr sz="1800" b="1">
-                <a:solidFill>
-                  <a:srgbClr val="FFFFFF"/>
-                </a:solidFill>
-                <a:latin typeface="Calibri"/>
-              </a:defRPr>
-            </a:pPr>
-            <a:r>
-              <a:t>5</a:t>
+            <a:off x="6675120" y="5166360"/>
+            <a:ext cx="4937760" cy="685800"/>
+          </a:xfrm>
+          <a:prstGeom prst="rect">
+            <a:avLst/>
+          </a:prstGeom>
+          <a:noFill/>
+        </p:spPr>
+        <p:txBody>
+          <a:bodyPr wrap="square" anchor="t" lIns="45720" rIns="45720" tIns="18288" bIns="18288">
+            <a:spAutoFit/>
+          </a:bodyPr>
+          <a:lstStyle/>
+          <a:p>
+            <a:pPr algn="l">
+              <a:lnSpc>
+                <a:spcPct val="120000"/>
+              </a:lnSpc>
+              <a:spcAft>
+                <a:spcPts val="0"/>
+              </a:spcAft>
+              <a:defRPr sz="1200" b="0">
+                <a:solidFill>
+                  <a:srgbClr val="CCCCCC"/>
+                </a:solidFill>
+                <a:latin typeface="Calibri"/>
+              </a:defRPr>
+            </a:pPr>
+            <a:r>
+              <a:t>Telemetry can contain sensitive information that must be protected.</a:t>
             </a:r>
           </a:p>
         </p:txBody>
@@ -17120,90 +17402,6 @@
       <p:sp>
         <p:nvSpPr>
           <p:cNvPr id="25" name="TextBox 24"/>
-          <p:cNvSpPr txBox="1"/>
-          <p:nvPr/>
-        </p:nvSpPr>
-        <p:spPr>
-          <a:xfrm>
-            <a:off x="1280160" y="5276088"/>
-            <a:ext cx="10515600" cy="320040"/>
-          </a:xfrm>
-          <a:prstGeom prst="rect">
-            <a:avLst/>
-          </a:prstGeom>
-          <a:noFill/>
-        </p:spPr>
-        <p:txBody>
-          <a:bodyPr wrap="square" anchor="t" lIns="45720" rIns="45720" tIns="18288" bIns="18288">
-            <a:spAutoFit/>
-          </a:bodyPr>
-          <a:lstStyle/>
-          <a:p>
-            <a:pPr algn="l">
-              <a:lnSpc>
-                <a:spcPct val="120000"/>
-              </a:lnSpc>
-              <a:spcAft>
-                <a:spcPts val="0"/>
-              </a:spcAft>
-              <a:defRPr sz="1700" b="1">
-                <a:solidFill>
-                  <a:srgbClr val="E04040"/>
-                </a:solidFill>
-                <a:latin typeface="Calibri"/>
-              </a:defRPr>
-            </a:pPr>
-            <a:r>
-              <a:t>The hardest part is deployment</a:t>
-            </a:r>
-          </a:p>
-        </p:txBody>
-      </p:sp>
-      <p:sp>
-        <p:nvSpPr>
-          <p:cNvPr id="26" name="TextBox 25"/>
-          <p:cNvSpPr txBox="1"/>
-          <p:nvPr/>
-        </p:nvSpPr>
-        <p:spPr>
-          <a:xfrm>
-            <a:off x="1280160" y="5623560"/>
-            <a:ext cx="10515600" cy="548640"/>
-          </a:xfrm>
-          <a:prstGeom prst="rect">
-            <a:avLst/>
-          </a:prstGeom>
-          <a:noFill/>
-        </p:spPr>
-        <p:txBody>
-          <a:bodyPr wrap="square" anchor="t" lIns="45720" rIns="45720" tIns="18288" bIns="18288">
-            <a:spAutoFit/>
-          </a:bodyPr>
-          <a:lstStyle/>
-          <a:p>
-            <a:pPr algn="l">
-              <a:lnSpc>
-                <a:spcPct val="120000"/>
-              </a:lnSpc>
-              <a:spcAft>
-                <a:spcPts val="0"/>
-              </a:spcAft>
-              <a:defRPr sz="1400" b="0">
-                <a:solidFill>
-                  <a:srgbClr val="CCCCCC"/>
-                </a:solidFill>
-                <a:latin typeface="Calibri"/>
-              </a:defRPr>
-            </a:pPr>
-            <a:r>
-              <a:t>Real-world success still depends on trustworthy models, good data, and systems that scale.</a:t>
-            </a:r>
-          </a:p>
-        </p:txBody>
-      </p:sp>
-      <p:sp>
-        <p:nvSpPr>
-          <p:cNvPr id="27" name="TextBox 26"/>
           <p:cNvSpPr txBox="1"/>
           <p:nvPr/>
         </p:nvSpPr>
@@ -17245,7 +17443,7 @@
       </p:sp>
       <p:sp>
         <p:nvSpPr>
-          <p:cNvPr id="28" name="TextBox 27"/>
+          <p:cNvPr id="26" name="TextBox 25"/>
           <p:cNvSpPr txBox="1"/>
           <p:nvPr/>
         </p:nvSpPr>
@@ -17280,7 +17478,7 @@
               </a:defRPr>
             </a:pPr>
             <a:r>
-              <a:t>22 / 24</a:t>
+              <a:t>22 / 25</a:t>
             </a:r>
           </a:p>
         </p:txBody>
@@ -17294,6 +17492,1173 @@
 </file>
 
 <file path=ppt/slides/slide23.xml><?xml version="1.0" encoding="utf-8"?>
+<p:sld xmlns:a="http://schemas.openxmlformats.org/drawingml/2006/main" xmlns:p="http://schemas.openxmlformats.org/presentationml/2006/main" xmlns:r="http://schemas.openxmlformats.org/officeDocument/2006/relationships">
+  <p:cSld>
+    <p:bg>
+      <p:bgPr>
+        <a:solidFill>
+          <a:srgbClr val="1B1F3B"/>
+        </a:solidFill>
+        <a:effectLst/>
+      </p:bgPr>
+    </p:bg>
+    <p:spTree>
+      <p:nvGrpSpPr>
+        <p:cNvPr id="1" name=""/>
+        <p:cNvGrpSpPr/>
+        <p:nvPr/>
+      </p:nvGrpSpPr>
+      <p:grpSpPr/>
+      <p:sp>
+        <p:nvSpPr>
+          <p:cNvPr id="2" name="Rectangle 1"/>
+          <p:cNvSpPr/>
+          <p:nvPr/>
+        </p:nvSpPr>
+        <p:spPr>
+          <a:xfrm>
+            <a:off x="0" y="0"/>
+            <a:ext cx="12191695" cy="91440"/>
+          </a:xfrm>
+          <a:prstGeom prst="rect">
+            <a:avLst/>
+          </a:prstGeom>
+          <a:solidFill>
+            <a:srgbClr val="00C9A7"/>
+          </a:solidFill>
+          <a:ln>
+            <a:noFill/>
+          </a:ln>
+        </p:spPr>
+        <p:style>
+          <a:lnRef idx="1">
+            <a:schemeClr val="accent1"/>
+          </a:lnRef>
+          <a:fillRef idx="3">
+            <a:schemeClr val="accent1"/>
+          </a:fillRef>
+          <a:effectRef idx="2">
+            <a:schemeClr val="accent1"/>
+          </a:effectRef>
+          <a:fontRef idx="minor">
+            <a:schemeClr val="lt1"/>
+          </a:fontRef>
+        </p:style>
+        <p:txBody>
+          <a:bodyPr rtlCol="0" anchor="ctr"/>
+          <a:lstStyle/>
+          <a:p>
+            <a:pPr algn="ctr"/>
+          </a:p>
+        </p:txBody>
+      </p:sp>
+      <p:sp>
+        <p:nvSpPr>
+          <p:cNvPr id="3" name="Rectangle 2"/>
+          <p:cNvSpPr/>
+          <p:nvPr/>
+        </p:nvSpPr>
+        <p:spPr>
+          <a:xfrm>
+            <a:off x="0" y="6784848"/>
+            <a:ext cx="12191695" cy="73152"/>
+          </a:xfrm>
+          <a:prstGeom prst="rect">
+            <a:avLst/>
+          </a:prstGeom>
+          <a:solidFill>
+            <a:srgbClr val="009FFD"/>
+          </a:solidFill>
+          <a:ln>
+            <a:noFill/>
+          </a:ln>
+        </p:spPr>
+        <p:style>
+          <a:lnRef idx="1">
+            <a:schemeClr val="accent1"/>
+          </a:lnRef>
+          <a:fillRef idx="3">
+            <a:schemeClr val="accent1"/>
+          </a:fillRef>
+          <a:effectRef idx="2">
+            <a:schemeClr val="accent1"/>
+          </a:effectRef>
+          <a:fontRef idx="minor">
+            <a:schemeClr val="lt1"/>
+          </a:fontRef>
+        </p:style>
+        <p:txBody>
+          <a:bodyPr rtlCol="0" anchor="ctr"/>
+          <a:lstStyle/>
+          <a:p>
+            <a:pPr algn="ctr"/>
+          </a:p>
+        </p:txBody>
+      </p:sp>
+      <p:sp>
+        <p:nvSpPr>
+          <p:cNvPr id="4" name="TextBox 3"/>
+          <p:cNvSpPr txBox="1"/>
+          <p:nvPr/>
+        </p:nvSpPr>
+        <p:spPr>
+          <a:xfrm>
+            <a:off x="731520" y="365760"/>
+            <a:ext cx="10515600" cy="640080"/>
+          </a:xfrm>
+          <a:prstGeom prst="rect">
+            <a:avLst/>
+          </a:prstGeom>
+          <a:noFill/>
+        </p:spPr>
+        <p:txBody>
+          <a:bodyPr wrap="square" anchor="t" lIns="45720" rIns="45720" tIns="18288" bIns="18288">
+            <a:spAutoFit/>
+          </a:bodyPr>
+          <a:lstStyle/>
+          <a:p>
+            <a:pPr algn="l">
+              <a:lnSpc>
+                <a:spcPct val="120000"/>
+              </a:lnSpc>
+              <a:spcAft>
+                <a:spcPts val="0"/>
+              </a:spcAft>
+              <a:defRPr sz="3600" b="1">
+                <a:solidFill>
+                  <a:srgbClr val="FFFFFF"/>
+                </a:solidFill>
+                <a:latin typeface="Calibri"/>
+              </a:defRPr>
+            </a:pPr>
+            <a:r>
+              <a:t>Conclusion &amp; Key Takeaways</a:t>
+            </a:r>
+          </a:p>
+        </p:txBody>
+      </p:sp>
+      <p:sp>
+        <p:nvSpPr>
+          <p:cNvPr id="5" name="TextBox 4"/>
+          <p:cNvSpPr txBox="1"/>
+          <p:nvPr/>
+        </p:nvSpPr>
+        <p:spPr>
+          <a:xfrm>
+            <a:off x="731520" y="1024128"/>
+            <a:ext cx="10515600" cy="438912"/>
+          </a:xfrm>
+          <a:prstGeom prst="rect">
+            <a:avLst/>
+          </a:prstGeom>
+          <a:noFill/>
+        </p:spPr>
+        <p:txBody>
+          <a:bodyPr wrap="square" anchor="t" lIns="45720" rIns="45720" tIns="18288" bIns="18288">
+            <a:spAutoFit/>
+          </a:bodyPr>
+          <a:lstStyle/>
+          <a:p>
+            <a:pPr algn="l">
+              <a:lnSpc>
+                <a:spcPct val="120000"/>
+              </a:lnSpc>
+              <a:spcAft>
+                <a:spcPts val="0"/>
+              </a:spcAft>
+              <a:defRPr sz="1800" b="0">
+                <a:solidFill>
+                  <a:srgbClr val="CCCCCC"/>
+                </a:solidFill>
+                <a:latin typeface="Calibri"/>
+              </a:defRPr>
+            </a:pPr>
+            <a:r>
+              <a:t>A cleaner final summary</a:t>
+            </a:r>
+          </a:p>
+        </p:txBody>
+      </p:sp>
+      <p:sp>
+        <p:nvSpPr>
+          <p:cNvPr id="6" name="TextBox 5"/>
+          <p:cNvSpPr txBox="1"/>
+          <p:nvPr/>
+        </p:nvSpPr>
+        <p:spPr>
+          <a:xfrm>
+            <a:off x="9326880" y="6263640"/>
+            <a:ext cx="2743200" cy="457200"/>
+          </a:xfrm>
+          <a:prstGeom prst="rect">
+            <a:avLst/>
+          </a:prstGeom>
+          <a:noFill/>
+        </p:spPr>
+        <p:txBody>
+          <a:bodyPr wrap="square" anchor="t" lIns="45720" rIns="45720" tIns="18288" bIns="18288">
+            <a:spAutoFit/>
+          </a:bodyPr>
+          <a:lstStyle/>
+          <a:p>
+            <a:pPr algn="r">
+              <a:lnSpc>
+                <a:spcPct val="120000"/>
+              </a:lnSpc>
+              <a:spcAft>
+                <a:spcPts val="0"/>
+              </a:spcAft>
+              <a:defRPr sz="1200" b="1">
+                <a:solidFill>
+                  <a:srgbClr val="009FFD"/>
+                </a:solidFill>
+                <a:latin typeface="Calibri"/>
+              </a:defRPr>
+            </a:pPr>
+            <a:r>
+              <a:t>Presenter: Hashim Kshim</a:t>
+            </a:r>
+          </a:p>
+        </p:txBody>
+      </p:sp>
+      <p:sp>
+        <p:nvSpPr>
+          <p:cNvPr id="7" name="Oval 6"/>
+          <p:cNvSpPr/>
+          <p:nvPr/>
+        </p:nvSpPr>
+        <p:spPr>
+          <a:xfrm>
+            <a:off x="685800" y="1344168"/>
+            <a:ext cx="384048" cy="384048"/>
+          </a:xfrm>
+          <a:prstGeom prst="ellipse">
+            <a:avLst/>
+          </a:prstGeom>
+          <a:solidFill>
+            <a:srgbClr val="009FFD"/>
+          </a:solidFill>
+          <a:ln>
+            <a:noFill/>
+          </a:ln>
+        </p:spPr>
+        <p:style>
+          <a:lnRef idx="1">
+            <a:schemeClr val="accent1"/>
+          </a:lnRef>
+          <a:fillRef idx="3">
+            <a:schemeClr val="accent1"/>
+          </a:fillRef>
+          <a:effectRef idx="2">
+            <a:schemeClr val="accent1"/>
+          </a:effectRef>
+          <a:fontRef idx="minor">
+            <a:schemeClr val="lt1"/>
+          </a:fontRef>
+        </p:style>
+        <p:txBody>
+          <a:bodyPr rtlCol="0" anchor="ctr"/>
+          <a:lstStyle/>
+          <a:p>
+            <a:pPr algn="ctr"/>
+          </a:p>
+        </p:txBody>
+      </p:sp>
+      <p:sp>
+        <p:nvSpPr>
+          <p:cNvPr id="8" name="TextBox 7"/>
+          <p:cNvSpPr txBox="1"/>
+          <p:nvPr/>
+        </p:nvSpPr>
+        <p:spPr>
+          <a:xfrm>
+            <a:off x="685800" y="1371600"/>
+            <a:ext cx="384048" cy="347472"/>
+          </a:xfrm>
+          <a:prstGeom prst="rect">
+            <a:avLst/>
+          </a:prstGeom>
+          <a:noFill/>
+        </p:spPr>
+        <p:txBody>
+          <a:bodyPr wrap="square" anchor="t" lIns="45720" rIns="45720" tIns="18288" bIns="18288">
+            <a:spAutoFit/>
+          </a:bodyPr>
+          <a:lstStyle/>
+          <a:p>
+            <a:pPr algn="ctr">
+              <a:lnSpc>
+                <a:spcPct val="120000"/>
+              </a:lnSpc>
+              <a:spcAft>
+                <a:spcPts val="0"/>
+              </a:spcAft>
+              <a:defRPr sz="1800" b="1">
+                <a:solidFill>
+                  <a:srgbClr val="FFFFFF"/>
+                </a:solidFill>
+                <a:latin typeface="Calibri"/>
+              </a:defRPr>
+            </a:pPr>
+            <a:r>
+              <a:t>1</a:t>
+            </a:r>
+          </a:p>
+        </p:txBody>
+      </p:sp>
+      <p:sp>
+        <p:nvSpPr>
+          <p:cNvPr id="9" name="TextBox 8"/>
+          <p:cNvSpPr txBox="1"/>
+          <p:nvPr/>
+        </p:nvSpPr>
+        <p:spPr>
+          <a:xfrm>
+            <a:off x="1280160" y="1325880"/>
+            <a:ext cx="10515600" cy="320040"/>
+          </a:xfrm>
+          <a:prstGeom prst="rect">
+            <a:avLst/>
+          </a:prstGeom>
+          <a:noFill/>
+        </p:spPr>
+        <p:txBody>
+          <a:bodyPr wrap="square" anchor="t" lIns="45720" rIns="45720" tIns="18288" bIns="18288">
+            <a:spAutoFit/>
+          </a:bodyPr>
+          <a:lstStyle/>
+          <a:p>
+            <a:pPr algn="l">
+              <a:lnSpc>
+                <a:spcPct val="120000"/>
+              </a:lnSpc>
+              <a:spcAft>
+                <a:spcPts val="0"/>
+              </a:spcAft>
+              <a:defRPr sz="1700" b="1">
+                <a:solidFill>
+                  <a:srgbClr val="009FFD"/>
+                </a:solidFill>
+                <a:latin typeface="Calibri"/>
+              </a:defRPr>
+            </a:pPr>
+            <a:r>
+              <a:t>Telemetry gives the raw picture</a:t>
+            </a:r>
+          </a:p>
+        </p:txBody>
+      </p:sp>
+      <p:sp>
+        <p:nvSpPr>
+          <p:cNvPr id="10" name="TextBox 9"/>
+          <p:cNvSpPr txBox="1"/>
+          <p:nvPr/>
+        </p:nvSpPr>
+        <p:spPr>
+          <a:xfrm>
+            <a:off x="1280160" y="1673352"/>
+            <a:ext cx="10515600" cy="548640"/>
+          </a:xfrm>
+          <a:prstGeom prst="rect">
+            <a:avLst/>
+          </a:prstGeom>
+          <a:noFill/>
+        </p:spPr>
+        <p:txBody>
+          <a:bodyPr wrap="square" anchor="t" lIns="45720" rIns="45720" tIns="18288" bIns="18288">
+            <a:spAutoFit/>
+          </a:bodyPr>
+          <a:lstStyle/>
+          <a:p>
+            <a:pPr algn="l">
+              <a:lnSpc>
+                <a:spcPct val="120000"/>
+              </a:lnSpc>
+              <a:spcAft>
+                <a:spcPts val="0"/>
+              </a:spcAft>
+              <a:defRPr sz="1400" b="0">
+                <a:solidFill>
+                  <a:srgbClr val="CCCCCC"/>
+                </a:solidFill>
+                <a:latin typeface="Calibri"/>
+              </a:defRPr>
+            </a:pPr>
+            <a:r>
+              <a:t>It tells us what the network is doing right now through streams of measurements and events.</a:t>
+            </a:r>
+          </a:p>
+        </p:txBody>
+      </p:sp>
+      <p:sp>
+        <p:nvSpPr>
+          <p:cNvPr id="11" name="Oval 10"/>
+          <p:cNvSpPr/>
+          <p:nvPr/>
+        </p:nvSpPr>
+        <p:spPr>
+          <a:xfrm>
+            <a:off x="685800" y="2331720"/>
+            <a:ext cx="384048" cy="384048"/>
+          </a:xfrm>
+          <a:prstGeom prst="ellipse">
+            <a:avLst/>
+          </a:prstGeom>
+          <a:solidFill>
+            <a:srgbClr val="00C9A7"/>
+          </a:solidFill>
+          <a:ln>
+            <a:noFill/>
+          </a:ln>
+        </p:spPr>
+        <p:style>
+          <a:lnRef idx="1">
+            <a:schemeClr val="accent1"/>
+          </a:lnRef>
+          <a:fillRef idx="3">
+            <a:schemeClr val="accent1"/>
+          </a:fillRef>
+          <a:effectRef idx="2">
+            <a:schemeClr val="accent1"/>
+          </a:effectRef>
+          <a:fontRef idx="minor">
+            <a:schemeClr val="lt1"/>
+          </a:fontRef>
+        </p:style>
+        <p:txBody>
+          <a:bodyPr rtlCol="0" anchor="ctr"/>
+          <a:lstStyle/>
+          <a:p>
+            <a:pPr algn="ctr"/>
+          </a:p>
+        </p:txBody>
+      </p:sp>
+      <p:sp>
+        <p:nvSpPr>
+          <p:cNvPr id="12" name="TextBox 11"/>
+          <p:cNvSpPr txBox="1"/>
+          <p:nvPr/>
+        </p:nvSpPr>
+        <p:spPr>
+          <a:xfrm>
+            <a:off x="685800" y="2359152"/>
+            <a:ext cx="384048" cy="347472"/>
+          </a:xfrm>
+          <a:prstGeom prst="rect">
+            <a:avLst/>
+          </a:prstGeom>
+          <a:noFill/>
+        </p:spPr>
+        <p:txBody>
+          <a:bodyPr wrap="square" anchor="t" lIns="45720" rIns="45720" tIns="18288" bIns="18288">
+            <a:spAutoFit/>
+          </a:bodyPr>
+          <a:lstStyle/>
+          <a:p>
+            <a:pPr algn="ctr">
+              <a:lnSpc>
+                <a:spcPct val="120000"/>
+              </a:lnSpc>
+              <a:spcAft>
+                <a:spcPts val="0"/>
+              </a:spcAft>
+              <a:defRPr sz="1800" b="1">
+                <a:solidFill>
+                  <a:srgbClr val="FFFFFF"/>
+                </a:solidFill>
+                <a:latin typeface="Calibri"/>
+              </a:defRPr>
+            </a:pPr>
+            <a:r>
+              <a:t>2</a:t>
+            </a:r>
+          </a:p>
+        </p:txBody>
+      </p:sp>
+      <p:sp>
+        <p:nvSpPr>
+          <p:cNvPr id="13" name="TextBox 12"/>
+          <p:cNvSpPr txBox="1"/>
+          <p:nvPr/>
+        </p:nvSpPr>
+        <p:spPr>
+          <a:xfrm>
+            <a:off x="1280160" y="2313432"/>
+            <a:ext cx="10515600" cy="320040"/>
+          </a:xfrm>
+          <a:prstGeom prst="rect">
+            <a:avLst/>
+          </a:prstGeom>
+          <a:noFill/>
+        </p:spPr>
+        <p:txBody>
+          <a:bodyPr wrap="square" anchor="t" lIns="45720" rIns="45720" tIns="18288" bIns="18288">
+            <a:spAutoFit/>
+          </a:bodyPr>
+          <a:lstStyle/>
+          <a:p>
+            <a:pPr algn="l">
+              <a:lnSpc>
+                <a:spcPct val="120000"/>
+              </a:lnSpc>
+              <a:spcAft>
+                <a:spcPts val="0"/>
+              </a:spcAft>
+              <a:defRPr sz="1700" b="1">
+                <a:solidFill>
+                  <a:srgbClr val="00C9A7"/>
+                </a:solidFill>
+                <a:latin typeface="Calibri"/>
+              </a:defRPr>
+            </a:pPr>
+            <a:r>
+              <a:t>ML helps turn data into decisions</a:t>
+            </a:r>
+          </a:p>
+        </p:txBody>
+      </p:sp>
+      <p:sp>
+        <p:nvSpPr>
+          <p:cNvPr id="14" name="TextBox 13"/>
+          <p:cNvSpPr txBox="1"/>
+          <p:nvPr/>
+        </p:nvSpPr>
+        <p:spPr>
+          <a:xfrm>
+            <a:off x="1280160" y="2660904"/>
+            <a:ext cx="10515600" cy="548640"/>
+          </a:xfrm>
+          <a:prstGeom prst="rect">
+            <a:avLst/>
+          </a:prstGeom>
+          <a:noFill/>
+        </p:spPr>
+        <p:txBody>
+          <a:bodyPr wrap="square" anchor="t" lIns="45720" rIns="45720" tIns="18288" bIns="18288">
+            <a:spAutoFit/>
+          </a:bodyPr>
+          <a:lstStyle/>
+          <a:p>
+            <a:pPr algn="l">
+              <a:lnSpc>
+                <a:spcPct val="120000"/>
+              </a:lnSpc>
+              <a:spcAft>
+                <a:spcPts val="0"/>
+              </a:spcAft>
+              <a:defRPr sz="1400" b="0">
+                <a:solidFill>
+                  <a:srgbClr val="CCCCCC"/>
+                </a:solidFill>
+                <a:latin typeface="Calibri"/>
+              </a:defRPr>
+            </a:pPr>
+            <a:r>
+              <a:t>It can find anomalies, predict future performance, and help improve QoS.</a:t>
+            </a:r>
+          </a:p>
+        </p:txBody>
+      </p:sp>
+      <p:sp>
+        <p:nvSpPr>
+          <p:cNvPr id="15" name="Oval 14"/>
+          <p:cNvSpPr/>
+          <p:nvPr/>
+        </p:nvSpPr>
+        <p:spPr>
+          <a:xfrm>
+            <a:off x="685800" y="3319272"/>
+            <a:ext cx="384048" cy="384048"/>
+          </a:xfrm>
+          <a:prstGeom prst="ellipse">
+            <a:avLst/>
+          </a:prstGeom>
+          <a:solidFill>
+            <a:srgbClr val="845EC2"/>
+          </a:solidFill>
+          <a:ln>
+            <a:noFill/>
+          </a:ln>
+        </p:spPr>
+        <p:style>
+          <a:lnRef idx="1">
+            <a:schemeClr val="accent1"/>
+          </a:lnRef>
+          <a:fillRef idx="3">
+            <a:schemeClr val="accent1"/>
+          </a:fillRef>
+          <a:effectRef idx="2">
+            <a:schemeClr val="accent1"/>
+          </a:effectRef>
+          <a:fontRef idx="minor">
+            <a:schemeClr val="lt1"/>
+          </a:fontRef>
+        </p:style>
+        <p:txBody>
+          <a:bodyPr rtlCol="0" anchor="ctr"/>
+          <a:lstStyle/>
+          <a:p>
+            <a:pPr algn="ctr"/>
+          </a:p>
+        </p:txBody>
+      </p:sp>
+      <p:sp>
+        <p:nvSpPr>
+          <p:cNvPr id="16" name="TextBox 15"/>
+          <p:cNvSpPr txBox="1"/>
+          <p:nvPr/>
+        </p:nvSpPr>
+        <p:spPr>
+          <a:xfrm>
+            <a:off x="685800" y="3346704"/>
+            <a:ext cx="384048" cy="347472"/>
+          </a:xfrm>
+          <a:prstGeom prst="rect">
+            <a:avLst/>
+          </a:prstGeom>
+          <a:noFill/>
+        </p:spPr>
+        <p:txBody>
+          <a:bodyPr wrap="square" anchor="t" lIns="45720" rIns="45720" tIns="18288" bIns="18288">
+            <a:spAutoFit/>
+          </a:bodyPr>
+          <a:lstStyle/>
+          <a:p>
+            <a:pPr algn="ctr">
+              <a:lnSpc>
+                <a:spcPct val="120000"/>
+              </a:lnSpc>
+              <a:spcAft>
+                <a:spcPts val="0"/>
+              </a:spcAft>
+              <a:defRPr sz="1800" b="1">
+                <a:solidFill>
+                  <a:srgbClr val="FFFFFF"/>
+                </a:solidFill>
+                <a:latin typeface="Calibri"/>
+              </a:defRPr>
+            </a:pPr>
+            <a:r>
+              <a:t>3</a:t>
+            </a:r>
+          </a:p>
+        </p:txBody>
+      </p:sp>
+      <p:sp>
+        <p:nvSpPr>
+          <p:cNvPr id="17" name="TextBox 16"/>
+          <p:cNvSpPr txBox="1"/>
+          <p:nvPr/>
+        </p:nvSpPr>
+        <p:spPr>
+          <a:xfrm>
+            <a:off x="1280160" y="3300984"/>
+            <a:ext cx="10515600" cy="320040"/>
+          </a:xfrm>
+          <a:prstGeom prst="rect">
+            <a:avLst/>
+          </a:prstGeom>
+          <a:noFill/>
+        </p:spPr>
+        <p:txBody>
+          <a:bodyPr wrap="square" anchor="t" lIns="45720" rIns="45720" tIns="18288" bIns="18288">
+            <a:spAutoFit/>
+          </a:bodyPr>
+          <a:lstStyle/>
+          <a:p>
+            <a:pPr algn="l">
+              <a:lnSpc>
+                <a:spcPct val="120000"/>
+              </a:lnSpc>
+              <a:spcAft>
+                <a:spcPts val="0"/>
+              </a:spcAft>
+              <a:defRPr sz="1700" b="1">
+                <a:solidFill>
+                  <a:srgbClr val="845EC2"/>
+                </a:solidFill>
+                <a:latin typeface="Calibri"/>
+              </a:defRPr>
+            </a:pPr>
+            <a:r>
+              <a:t>Industry is already using these ideas</a:t>
+            </a:r>
+          </a:p>
+        </p:txBody>
+      </p:sp>
+      <p:sp>
+        <p:nvSpPr>
+          <p:cNvPr id="18" name="TextBox 17"/>
+          <p:cNvSpPr txBox="1"/>
+          <p:nvPr/>
+        </p:nvSpPr>
+        <p:spPr>
+          <a:xfrm>
+            <a:off x="1280160" y="3648456"/>
+            <a:ext cx="10515600" cy="548640"/>
+          </a:xfrm>
+          <a:prstGeom prst="rect">
+            <a:avLst/>
+          </a:prstGeom>
+          <a:noFill/>
+        </p:spPr>
+        <p:txBody>
+          <a:bodyPr wrap="square" anchor="t" lIns="45720" rIns="45720" tIns="18288" bIns="18288">
+            <a:spAutoFit/>
+          </a:bodyPr>
+          <a:lstStyle/>
+          <a:p>
+            <a:pPr algn="l">
+              <a:lnSpc>
+                <a:spcPct val="120000"/>
+              </a:lnSpc>
+              <a:spcAft>
+                <a:spcPts val="0"/>
+              </a:spcAft>
+              <a:defRPr sz="1400" b="0">
+                <a:solidFill>
+                  <a:srgbClr val="CCCCCC"/>
+                </a:solidFill>
+                <a:latin typeface="Calibri"/>
+              </a:defRPr>
+            </a:pPr>
+            <a:r>
+              <a:t>Companies such as Nokia and Ericsson are building more automated, ML-driven telemetry systems.</a:t>
+            </a:r>
+          </a:p>
+        </p:txBody>
+      </p:sp>
+      <p:sp>
+        <p:nvSpPr>
+          <p:cNvPr id="19" name="Oval 18"/>
+          <p:cNvSpPr/>
+          <p:nvPr/>
+        </p:nvSpPr>
+        <p:spPr>
+          <a:xfrm>
+            <a:off x="685800" y="4306824"/>
+            <a:ext cx="384048" cy="384048"/>
+          </a:xfrm>
+          <a:prstGeom prst="ellipse">
+            <a:avLst/>
+          </a:prstGeom>
+          <a:solidFill>
+            <a:srgbClr val="FF8C00"/>
+          </a:solidFill>
+          <a:ln>
+            <a:noFill/>
+          </a:ln>
+        </p:spPr>
+        <p:style>
+          <a:lnRef idx="1">
+            <a:schemeClr val="accent1"/>
+          </a:lnRef>
+          <a:fillRef idx="3">
+            <a:schemeClr val="accent1"/>
+          </a:fillRef>
+          <a:effectRef idx="2">
+            <a:schemeClr val="accent1"/>
+          </a:effectRef>
+          <a:fontRef idx="minor">
+            <a:schemeClr val="lt1"/>
+          </a:fontRef>
+        </p:style>
+        <p:txBody>
+          <a:bodyPr rtlCol="0" anchor="ctr"/>
+          <a:lstStyle/>
+          <a:p>
+            <a:pPr algn="ctr"/>
+          </a:p>
+        </p:txBody>
+      </p:sp>
+      <p:sp>
+        <p:nvSpPr>
+          <p:cNvPr id="20" name="TextBox 19"/>
+          <p:cNvSpPr txBox="1"/>
+          <p:nvPr/>
+        </p:nvSpPr>
+        <p:spPr>
+          <a:xfrm>
+            <a:off x="685800" y="4334256"/>
+            <a:ext cx="384048" cy="347472"/>
+          </a:xfrm>
+          <a:prstGeom prst="rect">
+            <a:avLst/>
+          </a:prstGeom>
+          <a:noFill/>
+        </p:spPr>
+        <p:txBody>
+          <a:bodyPr wrap="square" anchor="t" lIns="45720" rIns="45720" tIns="18288" bIns="18288">
+            <a:spAutoFit/>
+          </a:bodyPr>
+          <a:lstStyle/>
+          <a:p>
+            <a:pPr algn="ctr">
+              <a:lnSpc>
+                <a:spcPct val="120000"/>
+              </a:lnSpc>
+              <a:spcAft>
+                <a:spcPts val="0"/>
+              </a:spcAft>
+              <a:defRPr sz="1800" b="1">
+                <a:solidFill>
+                  <a:srgbClr val="FFFFFF"/>
+                </a:solidFill>
+                <a:latin typeface="Calibri"/>
+              </a:defRPr>
+            </a:pPr>
+            <a:r>
+              <a:t>4</a:t>
+            </a:r>
+          </a:p>
+        </p:txBody>
+      </p:sp>
+      <p:sp>
+        <p:nvSpPr>
+          <p:cNvPr id="21" name="TextBox 20"/>
+          <p:cNvSpPr txBox="1"/>
+          <p:nvPr/>
+        </p:nvSpPr>
+        <p:spPr>
+          <a:xfrm>
+            <a:off x="1280160" y="4288536"/>
+            <a:ext cx="10515600" cy="320040"/>
+          </a:xfrm>
+          <a:prstGeom prst="rect">
+            <a:avLst/>
+          </a:prstGeom>
+          <a:noFill/>
+        </p:spPr>
+        <p:txBody>
+          <a:bodyPr wrap="square" anchor="t" lIns="45720" rIns="45720" tIns="18288" bIns="18288">
+            <a:spAutoFit/>
+          </a:bodyPr>
+          <a:lstStyle/>
+          <a:p>
+            <a:pPr algn="l">
+              <a:lnSpc>
+                <a:spcPct val="120000"/>
+              </a:lnSpc>
+              <a:spcAft>
+                <a:spcPts val="0"/>
+              </a:spcAft>
+              <a:defRPr sz="1700" b="1">
+                <a:solidFill>
+                  <a:srgbClr val="FF8C00"/>
+                </a:solidFill>
+                <a:latin typeface="Calibri"/>
+              </a:defRPr>
+            </a:pPr>
+            <a:r>
+              <a:t>The field is still growing</a:t>
+            </a:r>
+          </a:p>
+        </p:txBody>
+      </p:sp>
+      <p:sp>
+        <p:nvSpPr>
+          <p:cNvPr id="22" name="TextBox 21"/>
+          <p:cNvSpPr txBox="1"/>
+          <p:nvPr/>
+        </p:nvSpPr>
+        <p:spPr>
+          <a:xfrm>
+            <a:off x="1280160" y="4636008"/>
+            <a:ext cx="10515600" cy="548640"/>
+          </a:xfrm>
+          <a:prstGeom prst="rect">
+            <a:avLst/>
+          </a:prstGeom>
+          <a:noFill/>
+        </p:spPr>
+        <p:txBody>
+          <a:bodyPr wrap="square" anchor="t" lIns="45720" rIns="45720" tIns="18288" bIns="18288">
+            <a:spAutoFit/>
+          </a:bodyPr>
+          <a:lstStyle/>
+          <a:p>
+            <a:pPr algn="l">
+              <a:lnSpc>
+                <a:spcPct val="120000"/>
+              </a:lnSpc>
+              <a:spcAft>
+                <a:spcPts val="0"/>
+              </a:spcAft>
+              <a:defRPr sz="1400" b="0">
+                <a:solidFill>
+                  <a:srgbClr val="CCCCCC"/>
+                </a:solidFill>
+                <a:latin typeface="Calibri"/>
+              </a:defRPr>
+            </a:pPr>
+            <a:r>
+              <a:t>6G, digital twins, and generative AI may make telemetry smarter and easier to use.</a:t>
+            </a:r>
+          </a:p>
+        </p:txBody>
+      </p:sp>
+      <p:sp>
+        <p:nvSpPr>
+          <p:cNvPr id="23" name="Oval 22"/>
+          <p:cNvSpPr/>
+          <p:nvPr/>
+        </p:nvSpPr>
+        <p:spPr>
+          <a:xfrm>
+            <a:off x="685800" y="5294376"/>
+            <a:ext cx="384048" cy="384048"/>
+          </a:xfrm>
+          <a:prstGeom prst="ellipse">
+            <a:avLst/>
+          </a:prstGeom>
+          <a:solidFill>
+            <a:srgbClr val="E04040"/>
+          </a:solidFill>
+          <a:ln>
+            <a:noFill/>
+          </a:ln>
+        </p:spPr>
+        <p:style>
+          <a:lnRef idx="1">
+            <a:schemeClr val="accent1"/>
+          </a:lnRef>
+          <a:fillRef idx="3">
+            <a:schemeClr val="accent1"/>
+          </a:fillRef>
+          <a:effectRef idx="2">
+            <a:schemeClr val="accent1"/>
+          </a:effectRef>
+          <a:fontRef idx="minor">
+            <a:schemeClr val="lt1"/>
+          </a:fontRef>
+        </p:style>
+        <p:txBody>
+          <a:bodyPr rtlCol="0" anchor="ctr"/>
+          <a:lstStyle/>
+          <a:p>
+            <a:pPr algn="ctr"/>
+          </a:p>
+        </p:txBody>
+      </p:sp>
+      <p:sp>
+        <p:nvSpPr>
+          <p:cNvPr id="24" name="TextBox 23"/>
+          <p:cNvSpPr txBox="1"/>
+          <p:nvPr/>
+        </p:nvSpPr>
+        <p:spPr>
+          <a:xfrm>
+            <a:off x="685800" y="5321808"/>
+            <a:ext cx="384048" cy="347472"/>
+          </a:xfrm>
+          <a:prstGeom prst="rect">
+            <a:avLst/>
+          </a:prstGeom>
+          <a:noFill/>
+        </p:spPr>
+        <p:txBody>
+          <a:bodyPr wrap="square" anchor="t" lIns="45720" rIns="45720" tIns="18288" bIns="18288">
+            <a:spAutoFit/>
+          </a:bodyPr>
+          <a:lstStyle/>
+          <a:p>
+            <a:pPr algn="ctr">
+              <a:lnSpc>
+                <a:spcPct val="120000"/>
+              </a:lnSpc>
+              <a:spcAft>
+                <a:spcPts val="0"/>
+              </a:spcAft>
+              <a:defRPr sz="1800" b="1">
+                <a:solidFill>
+                  <a:srgbClr val="FFFFFF"/>
+                </a:solidFill>
+                <a:latin typeface="Calibri"/>
+              </a:defRPr>
+            </a:pPr>
+            <a:r>
+              <a:t>5</a:t>
+            </a:r>
+          </a:p>
+        </p:txBody>
+      </p:sp>
+      <p:sp>
+        <p:nvSpPr>
+          <p:cNvPr id="25" name="TextBox 24"/>
+          <p:cNvSpPr txBox="1"/>
+          <p:nvPr/>
+        </p:nvSpPr>
+        <p:spPr>
+          <a:xfrm>
+            <a:off x="1280160" y="5276088"/>
+            <a:ext cx="10515600" cy="320040"/>
+          </a:xfrm>
+          <a:prstGeom prst="rect">
+            <a:avLst/>
+          </a:prstGeom>
+          <a:noFill/>
+        </p:spPr>
+        <p:txBody>
+          <a:bodyPr wrap="square" anchor="t" lIns="45720" rIns="45720" tIns="18288" bIns="18288">
+            <a:spAutoFit/>
+          </a:bodyPr>
+          <a:lstStyle/>
+          <a:p>
+            <a:pPr algn="l">
+              <a:lnSpc>
+                <a:spcPct val="120000"/>
+              </a:lnSpc>
+              <a:spcAft>
+                <a:spcPts val="0"/>
+              </a:spcAft>
+              <a:defRPr sz="1700" b="1">
+                <a:solidFill>
+                  <a:srgbClr val="E04040"/>
+                </a:solidFill>
+                <a:latin typeface="Calibri"/>
+              </a:defRPr>
+            </a:pPr>
+            <a:r>
+              <a:t>The hardest part is deployment</a:t>
+            </a:r>
+          </a:p>
+        </p:txBody>
+      </p:sp>
+      <p:sp>
+        <p:nvSpPr>
+          <p:cNvPr id="26" name="TextBox 25"/>
+          <p:cNvSpPr txBox="1"/>
+          <p:nvPr/>
+        </p:nvSpPr>
+        <p:spPr>
+          <a:xfrm>
+            <a:off x="1280160" y="5623560"/>
+            <a:ext cx="10515600" cy="548640"/>
+          </a:xfrm>
+          <a:prstGeom prst="rect">
+            <a:avLst/>
+          </a:prstGeom>
+          <a:noFill/>
+        </p:spPr>
+        <p:txBody>
+          <a:bodyPr wrap="square" anchor="t" lIns="45720" rIns="45720" tIns="18288" bIns="18288">
+            <a:spAutoFit/>
+          </a:bodyPr>
+          <a:lstStyle/>
+          <a:p>
+            <a:pPr algn="l">
+              <a:lnSpc>
+                <a:spcPct val="120000"/>
+              </a:lnSpc>
+              <a:spcAft>
+                <a:spcPts val="0"/>
+              </a:spcAft>
+              <a:defRPr sz="1400" b="0">
+                <a:solidFill>
+                  <a:srgbClr val="CCCCCC"/>
+                </a:solidFill>
+                <a:latin typeface="Calibri"/>
+              </a:defRPr>
+            </a:pPr>
+            <a:r>
+              <a:t>Real-world success still depends on trustworthy models, good data, and systems that scale.</a:t>
+            </a:r>
+          </a:p>
+        </p:txBody>
+      </p:sp>
+      <p:sp>
+        <p:nvSpPr>
+          <p:cNvPr id="27" name="TextBox 26"/>
+          <p:cNvSpPr txBox="1"/>
+          <p:nvPr/>
+        </p:nvSpPr>
+        <p:spPr>
+          <a:xfrm>
+            <a:off x="9326880" y="6263640"/>
+            <a:ext cx="2743200" cy="457200"/>
+          </a:xfrm>
+          <a:prstGeom prst="rect">
+            <a:avLst/>
+          </a:prstGeom>
+          <a:noFill/>
+        </p:spPr>
+        <p:txBody>
+          <a:bodyPr wrap="square" anchor="t" lIns="45720" rIns="45720" tIns="18288" bIns="18288">
+            <a:spAutoFit/>
+          </a:bodyPr>
+          <a:lstStyle/>
+          <a:p>
+            <a:pPr algn="r">
+              <a:lnSpc>
+                <a:spcPct val="120000"/>
+              </a:lnSpc>
+              <a:spcAft>
+                <a:spcPts val="0"/>
+              </a:spcAft>
+              <a:defRPr sz="1200" b="1">
+                <a:solidFill>
+                  <a:srgbClr val="845EC2"/>
+                </a:solidFill>
+                <a:latin typeface="Calibri"/>
+              </a:defRPr>
+            </a:pPr>
+            <a:r>
+              <a:t>Presenter: Hashim Kshim</a:t>
+            </a:r>
+          </a:p>
+        </p:txBody>
+      </p:sp>
+      <p:sp>
+        <p:nvSpPr>
+          <p:cNvPr id="28" name="TextBox 27"/>
+          <p:cNvSpPr txBox="1"/>
+          <p:nvPr/>
+        </p:nvSpPr>
+        <p:spPr>
+          <a:xfrm>
+            <a:off x="365760" y="6309360"/>
+            <a:ext cx="1371600" cy="365760"/>
+          </a:xfrm>
+          <a:prstGeom prst="rect">
+            <a:avLst/>
+          </a:prstGeom>
+          <a:noFill/>
+        </p:spPr>
+        <p:txBody>
+          <a:bodyPr wrap="square" anchor="t" lIns="45720" rIns="45720" tIns="18288" bIns="18288">
+            <a:spAutoFit/>
+          </a:bodyPr>
+          <a:lstStyle/>
+          <a:p>
+            <a:pPr algn="l">
+              <a:lnSpc>
+                <a:spcPct val="120000"/>
+              </a:lnSpc>
+              <a:spcAft>
+                <a:spcPts val="0"/>
+              </a:spcAft>
+              <a:defRPr sz="1000" b="0">
+                <a:solidFill>
+                  <a:srgbClr val="999999"/>
+                </a:solidFill>
+                <a:latin typeface="Calibri"/>
+              </a:defRPr>
+            </a:pPr>
+            <a:r>
+              <a:t>23 / 25</a:t>
+            </a:r>
+          </a:p>
+        </p:txBody>
+      </p:sp>
+    </p:spTree>
+  </p:cSld>
+  <p:clrMapOvr>
+    <a:masterClrMapping/>
+  </p:clrMapOvr>
+</p:sld>
+</file>
+
+<file path=ppt/slides/slide24.xml><?xml version="1.0" encoding="utf-8"?>
 <p:sld xmlns:a="http://schemas.openxmlformats.org/drawingml/2006/main" xmlns:p="http://schemas.openxmlformats.org/presentationml/2006/main" xmlns:r="http://schemas.openxmlformats.org/officeDocument/2006/relationships">
   <p:cSld>
     <p:bg>
@@ -17645,7 +19010,7 @@
               </a:defRPr>
             </a:pPr>
             <a:r>
-              <a:t>23 / 24</a:t>
+              <a:t>24 / 25</a:t>
             </a:r>
           </a:p>
         </p:txBody>
@@ -17658,7 +19023,7 @@
 </p:sld>
 </file>
 
-<file path=ppt/slides/slide24.xml><?xml version="1.0" encoding="utf-8"?>
+<file path=ppt/slides/slide25.xml><?xml version="1.0" encoding="utf-8"?>
 <p:sld xmlns:a="http://schemas.openxmlformats.org/drawingml/2006/main" xmlns:p="http://schemas.openxmlformats.org/presentationml/2006/main" xmlns:r="http://schemas.openxmlformats.org/officeDocument/2006/relationships">
   <p:cSld>
     <p:bg>
@@ -18134,7 +19499,7 @@
               </a:defRPr>
             </a:pPr>
             <a:r>
-              <a:t>24 / 24</a:t>
+              <a:t>25 / 25</a:t>
             </a:r>
           </a:p>
         </p:txBody>
@@ -18414,7 +19779,7 @@
               </a:defRPr>
             </a:pPr>
             <a:r>
-              <a:t>3 / 24</a:t>
+              <a:t>3 / 25</a:t>
             </a:r>
           </a:p>
         </p:txBody>
@@ -19514,7 +20879,7 @@
               </a:defRPr>
             </a:pPr>
             <a:r>
-              <a:t>4 / 24</a:t>
+              <a:t>4 / 25</a:t>
             </a:r>
           </a:p>
         </p:txBody>
@@ -20290,7 +21655,7 @@
               </a:defRPr>
             </a:pPr>
             <a:r>
-              <a:t>5 / 24</a:t>
+              <a:t>5 / 25</a:t>
             </a:r>
           </a:p>
         </p:txBody>
@@ -21257,7 +22622,7 @@
               </a:defRPr>
             </a:pPr>
             <a:r>
-              <a:t>6 / 24</a:t>
+              <a:t>6 / 25</a:t>
             </a:r>
           </a:p>
         </p:txBody>
@@ -22388,7 +23753,7 @@
               </a:defRPr>
             </a:pPr>
             <a:r>
-              <a:t>7 / 24</a:t>
+              <a:t>7 / 25</a:t>
             </a:r>
           </a:p>
         </p:txBody>
@@ -23482,7 +24847,7 @@
               </a:defRPr>
             </a:pPr>
             <a:r>
-              <a:t>8 / 24</a:t>
+              <a:t>8 / 25</a:t>
             </a:r>
           </a:p>
         </p:txBody>
@@ -24874,7 +26239,7 @@
               </a:defRPr>
             </a:pPr>
             <a:r>
-              <a:t>9 / 24</a:t>
+              <a:t>9 / 25</a:t>
             </a:r>
           </a:p>
         </p:txBody>

--- a/NET3006A-ML-Network-Telemetry/presentation/NET3006A_ML_Network_Telemetry_Presentation.pptx
+++ b/NET3006A-ML-Network-Telemetry/presentation/NET3006A_ML_Network_Telemetry_Presentation.pptx
@@ -30,6 +30,7 @@
     <p:sldId id="278" r:id="rId29"/>
     <p:sldId id="279" r:id="rId30"/>
     <p:sldId id="280" r:id="rId31"/>
+    <p:sldId id="281" r:id="rId32"/>
   </p:sldIdLst>
   <p:sldSz cx="12191695" cy="6858000" type="screen4x3"/>
   <p:notesSz cx="6858000" cy="9144000"/>
@@ -3842,7 +3843,7 @@
               </a:defRPr>
             </a:pPr>
             <a:r>
-              <a:t>1 / 25</a:t>
+              <a:t>1 / 26</a:t>
             </a:r>
           </a:p>
         </p:txBody>
@@ -4809,7 +4810,7 @@
               </a:defRPr>
             </a:pPr>
             <a:r>
-              <a:t>10 / 25</a:t>
+              <a:t>10 / 26</a:t>
             </a:r>
           </a:p>
         </p:txBody>
@@ -5089,7 +5090,7 @@
               </a:defRPr>
             </a:pPr>
             <a:r>
-              <a:t>11 / 25</a:t>
+              <a:t>11 / 26</a:t>
             </a:r>
           </a:p>
         </p:txBody>
@@ -6083,7 +6084,7 @@
               </a:defRPr>
             </a:pPr>
             <a:r>
-              <a:t>12 / 25</a:t>
+              <a:t>12 / 26</a:t>
             </a:r>
           </a:p>
         </p:txBody>
@@ -6913,7 +6914,7 @@
               </a:defRPr>
             </a:pPr>
             <a:r>
-              <a:t>13 / 25</a:t>
+              <a:t>13 / 26</a:t>
             </a:r>
           </a:p>
         </p:txBody>
@@ -7911,7 +7912,7 @@
               </a:defRPr>
             </a:pPr>
             <a:r>
-              <a:t>14 / 25</a:t>
+              <a:t>14 / 26</a:t>
             </a:r>
           </a:p>
         </p:txBody>
@@ -8791,7 +8792,7 @@
               </a:defRPr>
             </a:pPr>
             <a:r>
-              <a:t>15 / 25</a:t>
+              <a:t>15 / 26</a:t>
             </a:r>
           </a:p>
         </p:txBody>
@@ -9071,7 +9072,7 @@
               </a:defRPr>
             </a:pPr>
             <a:r>
-              <a:t>16 / 25</a:t>
+              <a:t>16 / 26</a:t>
             </a:r>
           </a:p>
         </p:txBody>
@@ -9995,7 +9996,7 @@
               </a:defRPr>
             </a:pPr>
             <a:r>
-              <a:t>17 / 25</a:t>
+              <a:t>17 / 26</a:t>
             </a:r>
           </a:p>
         </p:txBody>
@@ -11377,7 +11378,7 @@
               </a:defRPr>
             </a:pPr>
             <a:r>
-              <a:t>18 / 25</a:t>
+              <a:t>18 / 26</a:t>
             </a:r>
           </a:p>
         </p:txBody>
@@ -12741,7 +12742,7 @@
               </a:defRPr>
             </a:pPr>
             <a:r>
-              <a:t>19 / 25</a:t>
+              <a:t>19 / 26</a:t>
             </a:r>
           </a:p>
         </p:txBody>
@@ -15083,7 +15084,7 @@
               </a:defRPr>
             </a:pPr>
             <a:r>
-              <a:t>2 / 25</a:t>
+              <a:t>2 / 26</a:t>
             </a:r>
           </a:p>
         </p:txBody>
@@ -15129,7 +15130,7 @@
             <a:avLst/>
           </a:prstGeom>
           <a:solidFill>
-            <a:srgbClr val="845EC2"/>
+            <a:srgbClr val="F0B429"/>
           </a:solidFill>
           <a:ln>
             <a:noFill/>
@@ -15237,7 +15238,7 @@
               </a:defRPr>
             </a:pPr>
             <a:r>
-              <a:t>Industry Example: Ericsson</a:t>
+              <a:t>Case Study: Predicting QoS with Graph Neural Networks</a:t>
             </a:r>
           </a:p>
         </p:txBody>
@@ -15245,48 +15246,6 @@
       <p:sp>
         <p:nvSpPr>
           <p:cNvPr id="5" name="TextBox 4"/>
-          <p:cNvSpPr txBox="1"/>
-          <p:nvPr/>
-        </p:nvSpPr>
-        <p:spPr>
-          <a:xfrm>
-            <a:off x="731520" y="1024128"/>
-            <a:ext cx="10515600" cy="438912"/>
-          </a:xfrm>
-          <a:prstGeom prst="rect">
-            <a:avLst/>
-          </a:prstGeom>
-          <a:noFill/>
-        </p:spPr>
-        <p:txBody>
-          <a:bodyPr wrap="square" anchor="t" lIns="45720" rIns="45720" tIns="18288" bIns="18288">
-            <a:spAutoFit/>
-          </a:bodyPr>
-          <a:lstStyle/>
-          <a:p>
-            <a:pPr algn="l">
-              <a:lnSpc>
-                <a:spcPct val="120000"/>
-              </a:lnSpc>
-              <a:spcAft>
-                <a:spcPts val="0"/>
-              </a:spcAft>
-              <a:defRPr sz="1800" b="0">
-                <a:solidFill>
-                  <a:srgbClr val="CCCCCC"/>
-                </a:solidFill>
-                <a:latin typeface="Calibri"/>
-              </a:defRPr>
-            </a:pPr>
-            <a:r>
-              <a:t>Combining better data organization with automation</a:t>
-            </a:r>
-          </a:p>
-        </p:txBody>
-      </p:sp>
-      <p:sp>
-        <p:nvSpPr>
-          <p:cNvPr id="6" name="TextBox 5"/>
           <p:cNvSpPr txBox="1"/>
           <p:nvPr/>
         </p:nvSpPr>
@@ -15321,21 +15280,347 @@
               </a:defRPr>
             </a:pPr>
             <a:r>
-              <a:t>Presenter: Hashim Kshim</a:t>
-            </a:r>
-          </a:p>
-        </p:txBody>
-      </p:sp>
-      <p:sp>
-        <p:nvSpPr>
-          <p:cNvPr id="7" name="Rounded Rectangle 6"/>
+              <a:t>Presenter: Mazen Alhassan</a:t>
+            </a:r>
+          </a:p>
+        </p:txBody>
+      </p:sp>
+      <p:sp>
+        <p:nvSpPr>
+          <p:cNvPr id="6" name="TextBox 5"/>
+          <p:cNvSpPr txBox="1"/>
+          <p:nvPr/>
+        </p:nvSpPr>
+        <p:spPr>
+          <a:xfrm>
+            <a:off x="731520" y="1234440"/>
+            <a:ext cx="5303520" cy="320040"/>
+          </a:xfrm>
+          <a:prstGeom prst="rect">
+            <a:avLst/>
+          </a:prstGeom>
+          <a:noFill/>
+        </p:spPr>
+        <p:txBody>
+          <a:bodyPr wrap="square" anchor="t" lIns="45720" rIns="45720" tIns="18288" bIns="18288">
+            <a:spAutoFit/>
+          </a:bodyPr>
+          <a:lstStyle/>
+          <a:p>
+            <a:pPr algn="l">
+              <a:lnSpc>
+                <a:spcPct val="120000"/>
+              </a:lnSpc>
+              <a:spcAft>
+                <a:spcPts val="0"/>
+              </a:spcAft>
+              <a:defRPr sz="1800" b="1">
+                <a:solidFill>
+                  <a:srgbClr val="009FFD"/>
+                </a:solidFill>
+                <a:latin typeface="Calibri"/>
+              </a:defRPr>
+            </a:pPr>
+            <a:r>
+              <a:t>The Problem</a:t>
+            </a:r>
+          </a:p>
+        </p:txBody>
+      </p:sp>
+      <p:sp>
+        <p:nvSpPr>
+          <p:cNvPr id="7" name="TextBox 6"/>
+          <p:cNvSpPr txBox="1"/>
+          <p:nvPr/>
+        </p:nvSpPr>
+        <p:spPr>
+          <a:xfrm>
+            <a:off x="731520" y="1600200"/>
+            <a:ext cx="5303520" cy="1645920"/>
+          </a:xfrm>
+          <a:prstGeom prst="rect">
+            <a:avLst/>
+          </a:prstGeom>
+          <a:noFill/>
+        </p:spPr>
+        <p:txBody>
+          <a:bodyPr wrap="square" anchor="t">
+            <a:spAutoFit/>
+          </a:bodyPr>
+          <a:lstStyle/>
+          <a:p>
+            <a:pPr>
+              <a:lnSpc>
+                <a:spcPct val="120000"/>
+              </a:lnSpc>
+              <a:spcBef>
+                <a:spcPts val="100"/>
+              </a:spcBef>
+              <a:spcAft>
+                <a:spcPts val="600"/>
+              </a:spcAft>
+              <a:defRPr sz="1300" b="0">
+                <a:solidFill>
+                  <a:srgbClr val="CCCCCC"/>
+                </a:solidFill>
+                <a:latin typeface="Calibri"/>
+              </a:defRPr>
+            </a:pPr>
+            <a:r>
+              <a:t>• Operators need to know QoS metrics (delay, jitter, packet loss) for every flow path in their network</a:t>
+            </a:r>
+          </a:p>
+          <a:p>
+            <a:pPr>
+              <a:lnSpc>
+                <a:spcPct val="120000"/>
+              </a:lnSpc>
+              <a:spcBef>
+                <a:spcPts val="100"/>
+              </a:spcBef>
+              <a:spcAft>
+                <a:spcPts val="600"/>
+              </a:spcAft>
+              <a:defRPr sz="1300" b="0">
+                <a:solidFill>
+                  <a:srgbClr val="CCCCCC"/>
+                </a:solidFill>
+                <a:latin typeface="Calibri"/>
+              </a:defRPr>
+            </a:pPr>
+            <a:r>
+              <a:t>• Traditionally requires expensive packet-level simulators (OMNeT++) that take a long time, or constant active probing that wastes bandwidth</a:t>
+            </a:r>
+          </a:p>
+          <a:p>
+            <a:pPr>
+              <a:lnSpc>
+                <a:spcPct val="120000"/>
+              </a:lnSpc>
+              <a:spcBef>
+                <a:spcPts val="100"/>
+              </a:spcBef>
+              <a:spcAft>
+                <a:spcPts val="600"/>
+              </a:spcAft>
+              <a:defRPr sz="1300" b="0">
+                <a:solidFill>
+                  <a:srgbClr val="CCCCCC"/>
+                </a:solidFill>
+                <a:latin typeface="Calibri"/>
+              </a:defRPr>
+            </a:pPr>
+            <a:r>
+              <a:t>• What if ML could instantly predict QoS metrics just by looking at topology, routing, and traffic load?</a:t>
+            </a:r>
+          </a:p>
+        </p:txBody>
+      </p:sp>
+      <p:sp>
+        <p:nvSpPr>
+          <p:cNvPr id="8" name="TextBox 7"/>
+          <p:cNvSpPr txBox="1"/>
+          <p:nvPr/>
+        </p:nvSpPr>
+        <p:spPr>
+          <a:xfrm>
+            <a:off x="731520" y="3246120"/>
+            <a:ext cx="5303520" cy="320040"/>
+          </a:xfrm>
+          <a:prstGeom prst="rect">
+            <a:avLst/>
+          </a:prstGeom>
+          <a:noFill/>
+        </p:spPr>
+        <p:txBody>
+          <a:bodyPr wrap="square" anchor="t" lIns="45720" rIns="45720" tIns="18288" bIns="18288">
+            <a:spAutoFit/>
+          </a:bodyPr>
+          <a:lstStyle/>
+          <a:p>
+            <a:pPr algn="l">
+              <a:lnSpc>
+                <a:spcPct val="120000"/>
+              </a:lnSpc>
+              <a:spcAft>
+                <a:spcPts val="0"/>
+              </a:spcAft>
+              <a:defRPr sz="1700" b="1">
+                <a:solidFill>
+                  <a:srgbClr val="00C9A7"/>
+                </a:solidFill>
+                <a:latin typeface="Calibri"/>
+              </a:defRPr>
+            </a:pPr>
+            <a:r>
+              <a:t>The Study: RouteNet-Fermi (Ferriol-Galmés et al., 2023)</a:t>
+            </a:r>
+          </a:p>
+        </p:txBody>
+      </p:sp>
+      <p:sp>
+        <p:nvSpPr>
+          <p:cNvPr id="9" name="TextBox 8"/>
+          <p:cNvSpPr txBox="1"/>
+          <p:nvPr/>
+        </p:nvSpPr>
+        <p:spPr>
+          <a:xfrm>
+            <a:off x="731520" y="3611880"/>
+            <a:ext cx="5303520" cy="2194560"/>
+          </a:xfrm>
+          <a:prstGeom prst="rect">
+            <a:avLst/>
+          </a:prstGeom>
+          <a:noFill/>
+        </p:spPr>
+        <p:txBody>
+          <a:bodyPr wrap="square" anchor="t">
+            <a:spAutoFit/>
+          </a:bodyPr>
+          <a:lstStyle/>
+          <a:p>
+            <a:pPr>
+              <a:lnSpc>
+                <a:spcPct val="120000"/>
+              </a:lnSpc>
+              <a:spcBef>
+                <a:spcPts val="100"/>
+              </a:spcBef>
+              <a:spcAft>
+                <a:spcPts val="600"/>
+              </a:spcAft>
+              <a:defRPr sz="1300" b="0">
+                <a:solidFill>
+                  <a:srgbClr val="CCCCCC"/>
+                </a:solidFill>
+                <a:latin typeface="Calibri"/>
+              </a:defRPr>
+            </a:pPr>
+            <a:r>
+              <a:t>• Uses a Graph Neural Network (GNN) — designed for graph-structured data (perfect for networks)</a:t>
+            </a:r>
+          </a:p>
+          <a:p>
+            <a:pPr>
+              <a:lnSpc>
+                <a:spcPct val="120000"/>
+              </a:lnSpc>
+              <a:spcBef>
+                <a:spcPts val="100"/>
+              </a:spcBef>
+              <a:spcAft>
+                <a:spcPts val="600"/>
+              </a:spcAft>
+              <a:defRPr sz="1300" b="0">
+                <a:solidFill>
+                  <a:srgbClr val="CCCCCC"/>
+                </a:solidFill>
+                <a:latin typeface="Calibri"/>
+              </a:defRPr>
+            </a:pPr>
+            <a:r>
+              <a:t>• Three-stage message-passing algorithm between flows, queues, and links — learns how they interact to affect performance</a:t>
+            </a:r>
+          </a:p>
+          <a:p>
+            <a:pPr>
+              <a:lnSpc>
+                <a:spcPct val="120000"/>
+              </a:lnSpc>
+              <a:spcBef>
+                <a:spcPts val="100"/>
+              </a:spcBef>
+              <a:spcAft>
+                <a:spcPts val="600"/>
+              </a:spcAft>
+              <a:defRPr sz="1300" b="0">
+                <a:solidFill>
+                  <a:srgbClr val="CCCCCC"/>
+                </a:solidFill>
+                <a:latin typeface="Calibri"/>
+              </a:defRPr>
+            </a:pPr>
+            <a:r>
+              <a:t>• Input: topology + routing + traffic parameters. Output: per-flow delay, jitter, packet loss</a:t>
+            </a:r>
+          </a:p>
+          <a:p>
+            <a:pPr>
+              <a:lnSpc>
+                <a:spcPct val="120000"/>
+              </a:lnSpc>
+              <a:spcBef>
+                <a:spcPts val="100"/>
+              </a:spcBef>
+              <a:spcAft>
+                <a:spcPts val="600"/>
+              </a:spcAft>
+              <a:defRPr sz="1300" b="0">
+                <a:solidFill>
+                  <a:srgbClr val="CCCCCC"/>
+                </a:solidFill>
+                <a:latin typeface="Calibri"/>
+              </a:defRPr>
+            </a:pPr>
+            <a:r>
+              <a:t>• Key strength: generalizes to unseen networks — train on small networks (14-50 nodes), predict accurately on networks up to 300 nodes</a:t>
+            </a:r>
+          </a:p>
+        </p:txBody>
+      </p:sp>
+      <p:sp>
+        <p:nvSpPr>
+          <p:cNvPr id="10" name="TextBox 9"/>
+          <p:cNvSpPr txBox="1"/>
+          <p:nvPr/>
+        </p:nvSpPr>
+        <p:spPr>
+          <a:xfrm>
+            <a:off x="6583680" y="1234440"/>
+            <a:ext cx="5029200" cy="320040"/>
+          </a:xfrm>
+          <a:prstGeom prst="rect">
+            <a:avLst/>
+          </a:prstGeom>
+          <a:noFill/>
+        </p:spPr>
+        <p:txBody>
+          <a:bodyPr wrap="square" anchor="t" lIns="45720" rIns="45720" tIns="18288" bIns="18288">
+            <a:spAutoFit/>
+          </a:bodyPr>
+          <a:lstStyle/>
+          <a:p>
+            <a:pPr algn="ctr">
+              <a:lnSpc>
+                <a:spcPct val="120000"/>
+              </a:lnSpc>
+              <a:spcAft>
+                <a:spcPts val="0"/>
+              </a:spcAft>
+              <a:defRPr sz="1800" b="1">
+                <a:solidFill>
+                  <a:srgbClr val="845EC2"/>
+                </a:solidFill>
+                <a:latin typeface="Calibri"/>
+              </a:defRPr>
+            </a:pPr>
+            <a:r>
+              <a:t>How RouteNet-Fermi Works</a:t>
+            </a:r>
+          </a:p>
+        </p:txBody>
+      </p:sp>
+      <p:sp>
+        <p:nvSpPr>
+          <p:cNvPr id="11" name="Rounded Rectangle 10"/>
           <p:cNvSpPr/>
           <p:nvPr/>
         </p:nvSpPr>
         <p:spPr>
           <a:xfrm>
-            <a:off x="777240" y="1600200"/>
-            <a:ext cx="5120640" cy="2514600"/>
+            <a:off x="6583680" y="1737360"/>
+            <a:ext cx="2194560" cy="777240"/>
           </a:xfrm>
           <a:prstGeom prst="roundRect">
             <a:avLst/>
@@ -15343,9 +15628,9 @@
           <a:solidFill>
             <a:srgbClr val="141832"/>
           </a:solidFill>
-          <a:ln w="17780">
+          <a:ln w="19050">
             <a:solidFill>
-              <a:srgbClr val="845EC2"/>
+              <a:srgbClr val="009FFD"/>
             </a:solidFill>
           </a:ln>
         </p:spPr>
@@ -15373,114 +15658,69 @@
       </p:sp>
       <p:sp>
         <p:nvSpPr>
-          <p:cNvPr id="8" name="TextBox 7"/>
-          <p:cNvSpPr txBox="1"/>
-          <p:nvPr/>
-        </p:nvSpPr>
-        <p:spPr>
-          <a:xfrm>
-            <a:off x="941832" y="1737360"/>
-            <a:ext cx="4791456" cy="320040"/>
-          </a:xfrm>
-          <a:prstGeom prst="rect">
-            <a:avLst/>
-          </a:prstGeom>
-          <a:noFill/>
-        </p:spPr>
-        <p:txBody>
-          <a:bodyPr wrap="square" anchor="t" lIns="45720" rIns="45720" tIns="18288" bIns="18288">
-            <a:spAutoFit/>
-          </a:bodyPr>
-          <a:lstStyle/>
-          <a:p>
-            <a:pPr algn="l">
-              <a:lnSpc>
-                <a:spcPct val="120000"/>
-              </a:lnSpc>
-              <a:spcAft>
-                <a:spcPts val="0"/>
-              </a:spcAft>
-              <a:defRPr sz="1600" b="1">
-                <a:solidFill>
-                  <a:srgbClr val="845EC2"/>
-                </a:solidFill>
-                <a:latin typeface="Calibri"/>
-              </a:defRPr>
-            </a:pPr>
-            <a:r>
-              <a:t>AI-Ready Data Mesh</a:t>
-            </a:r>
-          </a:p>
-        </p:txBody>
-      </p:sp>
-      <p:sp>
-        <p:nvSpPr>
-          <p:cNvPr id="9" name="TextBox 8"/>
-          <p:cNvSpPr txBox="1"/>
-          <p:nvPr/>
-        </p:nvSpPr>
-        <p:spPr>
-          <a:xfrm>
-            <a:off x="941832" y="2103120"/>
-            <a:ext cx="4791456" cy="1874520"/>
-          </a:xfrm>
-          <a:prstGeom prst="rect">
-            <a:avLst/>
-          </a:prstGeom>
-          <a:noFill/>
-        </p:spPr>
-        <p:txBody>
-          <a:bodyPr wrap="square" anchor="t" lIns="45720" rIns="45720" tIns="18288" bIns="18288">
-            <a:spAutoFit/>
-          </a:bodyPr>
-          <a:lstStyle/>
-          <a:p>
-            <a:pPr algn="l">
-              <a:lnSpc>
-                <a:spcPct val="130000"/>
-              </a:lnSpc>
-              <a:spcAft>
-                <a:spcPts val="0"/>
-              </a:spcAft>
-              <a:defRPr sz="1300" b="0">
-                <a:solidFill>
-                  <a:srgbClr val="CCCCCC"/>
-                </a:solidFill>
-                <a:latin typeface="Calibri"/>
-              </a:defRPr>
-            </a:pPr>
-            <a:r>
-              <a:t>Ericsson treats telemetry as a shared data product, not just raw logs.</a:t>
+          <p:cNvPr id="12" name="TextBox 11"/>
+          <p:cNvSpPr txBox="1"/>
+          <p:nvPr/>
+        </p:nvSpPr>
+        <p:spPr>
+          <a:xfrm>
+            <a:off x="6583680" y="1847088"/>
+            <a:ext cx="2194560" cy="640080"/>
+          </a:xfrm>
+          <a:prstGeom prst="rect">
+            <a:avLst/>
+          </a:prstGeom>
+          <a:noFill/>
+        </p:spPr>
+        <p:txBody>
+          <a:bodyPr wrap="square" anchor="t" lIns="45720" rIns="45720" tIns="18288" bIns="18288">
+            <a:spAutoFit/>
+          </a:bodyPr>
+          <a:lstStyle/>
+          <a:p>
+            <a:pPr algn="ctr">
+              <a:lnSpc>
+                <a:spcPct val="120000"/>
+              </a:lnSpc>
+              <a:spcAft>
+                <a:spcPts val="0"/>
+              </a:spcAft>
+              <a:defRPr sz="1200" b="1">
+                <a:solidFill>
+                  <a:srgbClr val="009FFD"/>
+                </a:solidFill>
+                <a:latin typeface="Calibri"/>
+              </a:defRPr>
+            </a:pPr>
+            <a:r>
+              <a:t>Network</a:t>
             </a:r>
             <a:br/>
-            <a:br/>
-            <a:r>
-              <a:t>Teams manage domain pipelines with common standards, which improves data quality and makes telemetry easier for ML teams to use.</a:t>
-            </a:r>
-          </a:p>
-        </p:txBody>
-      </p:sp>
-      <p:sp>
-        <p:nvSpPr>
-          <p:cNvPr id="10" name="Rounded Rectangle 9"/>
+            <a:r>
+              <a:t>Graph</a:t>
+            </a:r>
+          </a:p>
+        </p:txBody>
+      </p:sp>
+      <p:sp>
+        <p:nvSpPr>
+          <p:cNvPr id="13" name="Right Arrow 12"/>
           <p:cNvSpPr/>
           <p:nvPr/>
         </p:nvSpPr>
         <p:spPr>
           <a:xfrm>
-            <a:off x="6263640" y="1600200"/>
-            <a:ext cx="5120640" cy="2514600"/>
-          </a:xfrm>
-          <a:prstGeom prst="roundRect">
+            <a:off x="8778240" y="1993392"/>
+            <a:ext cx="182880" cy="182880"/>
+          </a:xfrm>
+          <a:prstGeom prst="rightArrow">
             <a:avLst/>
           </a:prstGeom>
           <a:solidFill>
-            <a:srgbClr val="141832"/>
+            <a:srgbClr val="999999"/>
           </a:solidFill>
-          <a:ln w="17780">
-            <a:solidFill>
-              <a:srgbClr val="845EC2"/>
-            </a:solidFill>
+          <a:ln>
+            <a:noFill/>
           </a:ln>
         </p:spPr>
         <p:style>
@@ -15507,103 +15747,14 @@
       </p:sp>
       <p:sp>
         <p:nvSpPr>
-          <p:cNvPr id="11" name="TextBox 10"/>
-          <p:cNvSpPr txBox="1"/>
-          <p:nvPr/>
-        </p:nvSpPr>
-        <p:spPr>
-          <a:xfrm>
-            <a:off x="6428232" y="1737360"/>
-            <a:ext cx="4791456" cy="320040"/>
-          </a:xfrm>
-          <a:prstGeom prst="rect">
-            <a:avLst/>
-          </a:prstGeom>
-          <a:noFill/>
-        </p:spPr>
-        <p:txBody>
-          <a:bodyPr wrap="square" anchor="t" lIns="45720" rIns="45720" tIns="18288" bIns="18288">
-            <a:spAutoFit/>
-          </a:bodyPr>
-          <a:lstStyle/>
-          <a:p>
-            <a:pPr algn="l">
-              <a:lnSpc>
-                <a:spcPct val="120000"/>
-              </a:lnSpc>
-              <a:spcAft>
-                <a:spcPts val="0"/>
-              </a:spcAft>
-              <a:defRPr sz="1600" b="1">
-                <a:solidFill>
-                  <a:srgbClr val="845EC2"/>
-                </a:solidFill>
-                <a:latin typeface="Calibri"/>
-              </a:defRPr>
-            </a:pPr>
-            <a:r>
-              <a:t>Transport Automation Controller (TAC)</a:t>
-            </a:r>
-          </a:p>
-        </p:txBody>
-      </p:sp>
-      <p:sp>
-        <p:nvSpPr>
-          <p:cNvPr id="12" name="TextBox 11"/>
-          <p:cNvSpPr txBox="1"/>
-          <p:nvPr/>
-        </p:nvSpPr>
-        <p:spPr>
-          <a:xfrm>
-            <a:off x="6428232" y="2103120"/>
-            <a:ext cx="4791456" cy="1874520"/>
-          </a:xfrm>
-          <a:prstGeom prst="rect">
-            <a:avLst/>
-          </a:prstGeom>
-          <a:noFill/>
-        </p:spPr>
-        <p:txBody>
-          <a:bodyPr wrap="square" anchor="t" lIns="45720" rIns="45720" tIns="18288" bIns="18288">
-            <a:spAutoFit/>
-          </a:bodyPr>
-          <a:lstStyle/>
-          <a:p>
-            <a:pPr algn="l">
-              <a:lnSpc>
-                <a:spcPct val="130000"/>
-              </a:lnSpc>
-              <a:spcAft>
-                <a:spcPts val="0"/>
-              </a:spcAft>
-              <a:defRPr sz="1300" b="0">
-                <a:solidFill>
-                  <a:srgbClr val="CCCCCC"/>
-                </a:solidFill>
-                <a:latin typeface="Calibri"/>
-              </a:defRPr>
-            </a:pPr>
-            <a:r>
-              <a:t>Uses AI/ML to monitor transport performance, detect KPI anomalies, and support proactive capacity planning.</a:t>
-            </a:r>
-            <a:br/>
-            <a:br/>
-            <a:r>
-              <a:t>Direction: closed-loop automation through detect, diagnose, and act workflows.</a:t>
-            </a:r>
-          </a:p>
-        </p:txBody>
-      </p:sp>
-      <p:sp>
-        <p:nvSpPr>
-          <p:cNvPr id="13" name="Rounded Rectangle 12"/>
+          <p:cNvPr id="14" name="Rounded Rectangle 13"/>
           <p:cNvSpPr/>
           <p:nvPr/>
         </p:nvSpPr>
         <p:spPr>
           <a:xfrm>
-            <a:off x="1325880" y="4526280"/>
-            <a:ext cx="9509760" cy="1325880"/>
+            <a:off x="8961120" y="1737360"/>
+            <a:ext cx="2194560" cy="777240"/>
           </a:xfrm>
           <a:prstGeom prst="roundRect">
             <a:avLst/>
@@ -15611,9 +15762,9 @@
           <a:solidFill>
             <a:srgbClr val="141832"/>
           </a:solidFill>
-          <a:ln w="17780">
+          <a:ln w="19050">
             <a:solidFill>
-              <a:srgbClr val="845EC2"/>
+              <a:srgbClr val="00C9A7"/>
             </a:solidFill>
           </a:ln>
         </p:spPr>
@@ -15641,14 +15792,328 @@
       </p:sp>
       <p:sp>
         <p:nvSpPr>
-          <p:cNvPr id="14" name="TextBox 13"/>
-          <p:cNvSpPr txBox="1"/>
-          <p:nvPr/>
-        </p:nvSpPr>
-        <p:spPr>
-          <a:xfrm>
-            <a:off x="1490472" y="4663440"/>
-            <a:ext cx="9180576" cy="320040"/>
+          <p:cNvPr id="15" name="TextBox 14"/>
+          <p:cNvSpPr txBox="1"/>
+          <p:nvPr/>
+        </p:nvSpPr>
+        <p:spPr>
+          <a:xfrm>
+            <a:off x="8961120" y="1847088"/>
+            <a:ext cx="2194560" cy="640080"/>
+          </a:xfrm>
+          <a:prstGeom prst="rect">
+            <a:avLst/>
+          </a:prstGeom>
+          <a:noFill/>
+        </p:spPr>
+        <p:txBody>
+          <a:bodyPr wrap="square" anchor="t" lIns="45720" rIns="45720" tIns="18288" bIns="18288">
+            <a:spAutoFit/>
+          </a:bodyPr>
+          <a:lstStyle/>
+          <a:p>
+            <a:pPr algn="ctr">
+              <a:lnSpc>
+                <a:spcPct val="120000"/>
+              </a:lnSpc>
+              <a:spcAft>
+                <a:spcPts val="0"/>
+              </a:spcAft>
+              <a:defRPr sz="1200" b="1">
+                <a:solidFill>
+                  <a:srgbClr val="00C9A7"/>
+                </a:solidFill>
+                <a:latin typeface="Calibri"/>
+              </a:defRPr>
+            </a:pPr>
+            <a:r>
+              <a:t>GNN Message</a:t>
+            </a:r>
+            <a:br/>
+            <a:r>
+              <a:t>Passing</a:t>
+            </a:r>
+          </a:p>
+        </p:txBody>
+      </p:sp>
+      <p:sp>
+        <p:nvSpPr>
+          <p:cNvPr id="16" name="Rounded Rectangle 15"/>
+          <p:cNvSpPr/>
+          <p:nvPr/>
+        </p:nvSpPr>
+        <p:spPr>
+          <a:xfrm>
+            <a:off x="6583680" y="2971800"/>
+            <a:ext cx="2194560" cy="777240"/>
+          </a:xfrm>
+          <a:prstGeom prst="roundRect">
+            <a:avLst/>
+          </a:prstGeom>
+          <a:solidFill>
+            <a:srgbClr val="141832"/>
+          </a:solidFill>
+          <a:ln w="19050">
+            <a:solidFill>
+              <a:srgbClr val="845EC2"/>
+            </a:solidFill>
+          </a:ln>
+        </p:spPr>
+        <p:style>
+          <a:lnRef idx="1">
+            <a:schemeClr val="accent1"/>
+          </a:lnRef>
+          <a:fillRef idx="3">
+            <a:schemeClr val="accent1"/>
+          </a:fillRef>
+          <a:effectRef idx="2">
+            <a:schemeClr val="accent1"/>
+          </a:effectRef>
+          <a:fontRef idx="minor">
+            <a:schemeClr val="lt1"/>
+          </a:fontRef>
+        </p:style>
+        <p:txBody>
+          <a:bodyPr rtlCol="0" anchor="ctr"/>
+          <a:lstStyle/>
+          <a:p>
+            <a:pPr algn="ctr"/>
+          </a:p>
+        </p:txBody>
+      </p:sp>
+      <p:sp>
+        <p:nvSpPr>
+          <p:cNvPr id="17" name="TextBox 16"/>
+          <p:cNvSpPr txBox="1"/>
+          <p:nvPr/>
+        </p:nvSpPr>
+        <p:spPr>
+          <a:xfrm>
+            <a:off x="6583680" y="3081528"/>
+            <a:ext cx="2194560" cy="640080"/>
+          </a:xfrm>
+          <a:prstGeom prst="rect">
+            <a:avLst/>
+          </a:prstGeom>
+          <a:noFill/>
+        </p:spPr>
+        <p:txBody>
+          <a:bodyPr wrap="square" anchor="t" lIns="45720" rIns="45720" tIns="18288" bIns="18288">
+            <a:spAutoFit/>
+          </a:bodyPr>
+          <a:lstStyle/>
+          <a:p>
+            <a:pPr algn="ctr">
+              <a:lnSpc>
+                <a:spcPct val="120000"/>
+              </a:lnSpc>
+              <a:spcAft>
+                <a:spcPts val="0"/>
+              </a:spcAft>
+              <a:defRPr sz="1200" b="1">
+                <a:solidFill>
+                  <a:srgbClr val="845EC2"/>
+                </a:solidFill>
+                <a:latin typeface="Calibri"/>
+              </a:defRPr>
+            </a:pPr>
+            <a:r>
+              <a:t>Flows ↔</a:t>
+            </a:r>
+            <a:br/>
+            <a:r>
+              <a:t>Queues ↔ Links</a:t>
+            </a:r>
+          </a:p>
+        </p:txBody>
+      </p:sp>
+      <p:sp>
+        <p:nvSpPr>
+          <p:cNvPr id="18" name="Right Arrow 17"/>
+          <p:cNvSpPr/>
+          <p:nvPr/>
+        </p:nvSpPr>
+        <p:spPr>
+          <a:xfrm>
+            <a:off x="8778240" y="3227832"/>
+            <a:ext cx="182880" cy="182880"/>
+          </a:xfrm>
+          <a:prstGeom prst="rightArrow">
+            <a:avLst/>
+          </a:prstGeom>
+          <a:solidFill>
+            <a:srgbClr val="999999"/>
+          </a:solidFill>
+          <a:ln>
+            <a:noFill/>
+          </a:ln>
+        </p:spPr>
+        <p:style>
+          <a:lnRef idx="1">
+            <a:schemeClr val="accent1"/>
+          </a:lnRef>
+          <a:fillRef idx="3">
+            <a:schemeClr val="accent1"/>
+          </a:fillRef>
+          <a:effectRef idx="2">
+            <a:schemeClr val="accent1"/>
+          </a:effectRef>
+          <a:fontRef idx="minor">
+            <a:schemeClr val="lt1"/>
+          </a:fontRef>
+        </p:style>
+        <p:txBody>
+          <a:bodyPr rtlCol="0" anchor="ctr"/>
+          <a:lstStyle/>
+          <a:p>
+            <a:pPr algn="ctr"/>
+          </a:p>
+        </p:txBody>
+      </p:sp>
+      <p:sp>
+        <p:nvSpPr>
+          <p:cNvPr id="19" name="Rounded Rectangle 18"/>
+          <p:cNvSpPr/>
+          <p:nvPr/>
+        </p:nvSpPr>
+        <p:spPr>
+          <a:xfrm>
+            <a:off x="8961120" y="2971800"/>
+            <a:ext cx="2194560" cy="777240"/>
+          </a:xfrm>
+          <a:prstGeom prst="roundRect">
+            <a:avLst/>
+          </a:prstGeom>
+          <a:solidFill>
+            <a:srgbClr val="141832"/>
+          </a:solidFill>
+          <a:ln w="19050">
+            <a:solidFill>
+              <a:srgbClr val="F0B429"/>
+            </a:solidFill>
+          </a:ln>
+        </p:spPr>
+        <p:style>
+          <a:lnRef idx="1">
+            <a:schemeClr val="accent1"/>
+          </a:lnRef>
+          <a:fillRef idx="3">
+            <a:schemeClr val="accent1"/>
+          </a:fillRef>
+          <a:effectRef idx="2">
+            <a:schemeClr val="accent1"/>
+          </a:effectRef>
+          <a:fontRef idx="minor">
+            <a:schemeClr val="lt1"/>
+          </a:fontRef>
+        </p:style>
+        <p:txBody>
+          <a:bodyPr rtlCol="0" anchor="ctr"/>
+          <a:lstStyle/>
+          <a:p>
+            <a:pPr algn="ctr"/>
+          </a:p>
+        </p:txBody>
+      </p:sp>
+      <p:sp>
+        <p:nvSpPr>
+          <p:cNvPr id="20" name="TextBox 19"/>
+          <p:cNvSpPr txBox="1"/>
+          <p:nvPr/>
+        </p:nvSpPr>
+        <p:spPr>
+          <a:xfrm>
+            <a:off x="8961120" y="3081528"/>
+            <a:ext cx="2194560" cy="640080"/>
+          </a:xfrm>
+          <a:prstGeom prst="rect">
+            <a:avLst/>
+          </a:prstGeom>
+          <a:noFill/>
+        </p:spPr>
+        <p:txBody>
+          <a:bodyPr wrap="square" anchor="t" lIns="45720" rIns="45720" tIns="18288" bIns="18288">
+            <a:spAutoFit/>
+          </a:bodyPr>
+          <a:lstStyle/>
+          <a:p>
+            <a:pPr algn="ctr">
+              <a:lnSpc>
+                <a:spcPct val="120000"/>
+              </a:lnSpc>
+              <a:spcAft>
+                <a:spcPts val="0"/>
+              </a:spcAft>
+              <a:defRPr sz="1200" b="1">
+                <a:solidFill>
+                  <a:srgbClr val="F0B429"/>
+                </a:solidFill>
+                <a:latin typeface="Calibri"/>
+              </a:defRPr>
+            </a:pPr>
+            <a:r>
+              <a:t>QoS</a:t>
+            </a:r>
+            <a:br/>
+            <a:r>
+              <a:t>Predictions</a:t>
+            </a:r>
+          </a:p>
+        </p:txBody>
+      </p:sp>
+      <p:sp>
+        <p:nvSpPr>
+          <p:cNvPr id="21" name="Down Arrow 20"/>
+          <p:cNvSpPr/>
+          <p:nvPr/>
+        </p:nvSpPr>
+        <p:spPr>
+          <a:xfrm>
+            <a:off x="7680960" y="2514600"/>
+            <a:ext cx="182880" cy="365760"/>
+          </a:xfrm>
+          <a:prstGeom prst="downArrow">
+            <a:avLst/>
+          </a:prstGeom>
+          <a:solidFill>
+            <a:srgbClr val="999999"/>
+          </a:solidFill>
+          <a:ln>
+            <a:noFill/>
+          </a:ln>
+        </p:spPr>
+        <p:style>
+          <a:lnRef idx="1">
+            <a:schemeClr val="accent1"/>
+          </a:lnRef>
+          <a:fillRef idx="3">
+            <a:schemeClr val="accent1"/>
+          </a:fillRef>
+          <a:effectRef idx="2">
+            <a:schemeClr val="accent1"/>
+          </a:effectRef>
+          <a:fontRef idx="minor">
+            <a:schemeClr val="lt1"/>
+          </a:fontRef>
+        </p:style>
+        <p:txBody>
+          <a:bodyPr rtlCol="0" anchor="ctr"/>
+          <a:lstStyle/>
+          <a:p>
+            <a:pPr algn="ctr"/>
+          </a:p>
+        </p:txBody>
+      </p:sp>
+      <p:sp>
+        <p:nvSpPr>
+          <p:cNvPr id="22" name="TextBox 21"/>
+          <p:cNvSpPr txBox="1"/>
+          <p:nvPr/>
+        </p:nvSpPr>
+        <p:spPr>
+          <a:xfrm>
+            <a:off x="6583680" y="3246120"/>
+            <a:ext cx="5029200" cy="320040"/>
           </a:xfrm>
           <a:prstGeom prst="rect">
             <a:avLst/>
@@ -15668,47 +16133,50 @@
               <a:spcAft>
                 <a:spcPts val="0"/>
               </a:spcAft>
-              <a:defRPr sz="1600" b="1">
-                <a:solidFill>
-                  <a:srgbClr val="845EC2"/>
-                </a:solidFill>
-                <a:latin typeface="Calibri"/>
-              </a:defRPr>
-            </a:pPr>
-            <a:r>
-              <a:t>Key Industry Insight</a:t>
-            </a:r>
-          </a:p>
-        </p:txBody>
-      </p:sp>
-      <p:sp>
-        <p:nvSpPr>
-          <p:cNvPr id="15" name="TextBox 14"/>
-          <p:cNvSpPr txBox="1"/>
-          <p:nvPr/>
-        </p:nvSpPr>
-        <p:spPr>
-          <a:xfrm>
-            <a:off x="1490472" y="5029200"/>
-            <a:ext cx="9180576" cy="685800"/>
-          </a:xfrm>
-          <a:prstGeom prst="rect">
-            <a:avLst/>
-          </a:prstGeom>
-          <a:noFill/>
-        </p:spPr>
-        <p:txBody>
-          <a:bodyPr wrap="square" anchor="t" lIns="45720" rIns="45720" tIns="18288" bIns="18288">
-            <a:spAutoFit/>
-          </a:bodyPr>
-          <a:lstStyle/>
-          <a:p>
-            <a:pPr algn="l">
-              <a:lnSpc>
-                <a:spcPct val="130000"/>
-              </a:lnSpc>
-              <a:spcAft>
-                <a:spcPts val="0"/>
+              <a:defRPr sz="1800" b="1">
+                <a:solidFill>
+                  <a:srgbClr val="FF8C00"/>
+                </a:solidFill>
+                <a:latin typeface="Calibri"/>
+              </a:defRPr>
+            </a:pPr>
+            <a:r>
+              <a:t>Results</a:t>
+            </a:r>
+          </a:p>
+        </p:txBody>
+      </p:sp>
+      <p:sp>
+        <p:nvSpPr>
+          <p:cNvPr id="23" name="TextBox 22"/>
+          <p:cNvSpPr txBox="1"/>
+          <p:nvPr/>
+        </p:nvSpPr>
+        <p:spPr>
+          <a:xfrm>
+            <a:off x="6583680" y="3611880"/>
+            <a:ext cx="5029200" cy="2194560"/>
+          </a:xfrm>
+          <a:prstGeom prst="rect">
+            <a:avLst/>
+          </a:prstGeom>
+          <a:noFill/>
+        </p:spPr>
+        <p:txBody>
+          <a:bodyPr wrap="square" anchor="t">
+            <a:spAutoFit/>
+          </a:bodyPr>
+          <a:lstStyle/>
+          <a:p>
+            <a:pPr>
+              <a:lnSpc>
+                <a:spcPct val="120000"/>
+              </a:lnSpc>
+              <a:spcBef>
+                <a:spcPts val="100"/>
+              </a:spcBef>
+              <a:spcAft>
+                <a:spcPts val="600"/>
               </a:spcAft>
               <a:defRPr sz="1300" b="0">
                 <a:solidFill>
@@ -15718,14 +16186,80 @@
               </a:defRPr>
             </a:pPr>
             <a:r>
-              <a:t>Ericsson shows that good AI outcomes depend on strong telemetry and data foundations. Better data pipelines make network automation and prediction more realistic at scale.</a:t>
-            </a:r>
-          </a:p>
-        </p:txBody>
-      </p:sp>
-      <p:sp>
-        <p:nvSpPr>
-          <p:cNvPr id="16" name="TextBox 15"/>
+              <a:t>• Mean relative error of only 6.24% for delay prediction on test networks 10x larger than training networks</a:t>
+            </a:r>
+          </a:p>
+          <a:p>
+            <a:pPr>
+              <a:lnSpc>
+                <a:spcPct val="120000"/>
+              </a:lnSpc>
+              <a:spcBef>
+                <a:spcPts val="100"/>
+              </a:spcBef>
+              <a:spcAft>
+                <a:spcPts val="600"/>
+              </a:spcAft>
+              <a:defRPr sz="1300" b="0">
+                <a:solidFill>
+                  <a:srgbClr val="CCCCCC"/>
+                </a:solidFill>
+                <a:latin typeface="Calibri"/>
+              </a:defRPr>
+            </a:pPr>
+            <a:r>
+              <a:t>• Worst-case accuracy on completely unseen topologies and routing: MRE of 15.4%</a:t>
+            </a:r>
+          </a:p>
+          <a:p>
+            <a:pPr>
+              <a:lnSpc>
+                <a:spcPct val="120000"/>
+              </a:lnSpc>
+              <a:spcBef>
+                <a:spcPts val="100"/>
+              </a:spcBef>
+              <a:spcAft>
+                <a:spcPts val="600"/>
+              </a:spcAft>
+              <a:defRPr sz="1300" b="0">
+                <a:solidFill>
+                  <a:srgbClr val="CCCCCC"/>
+                </a:solidFill>
+                <a:latin typeface="Calibri"/>
+              </a:defRPr>
+            </a:pPr>
+            <a:r>
+              <a:t>• Matched accuracy of packet-level simulators but runs orders of magnitude faster</a:t>
+            </a:r>
+          </a:p>
+          <a:p>
+            <a:pPr>
+              <a:lnSpc>
+                <a:spcPct val="120000"/>
+              </a:lnSpc>
+              <a:spcBef>
+                <a:spcPts val="100"/>
+              </a:spcBef>
+              <a:spcAft>
+                <a:spcPts val="600"/>
+              </a:spcAft>
+              <a:defRPr sz="1300" b="0">
+                <a:solidFill>
+                  <a:srgbClr val="CCCCCC"/>
+                </a:solidFill>
+                <a:latin typeface="Calibri"/>
+              </a:defRPr>
+            </a:pPr>
+            <a:r>
+              <a:t>• Supports real-world features like multi-queue QoS scheduling — not just toy scenarios</a:t>
+            </a:r>
+          </a:p>
+        </p:txBody>
+      </p:sp>
+      <p:sp>
+        <p:nvSpPr>
+          <p:cNvPr id="24" name="TextBox 23"/>
           <p:cNvSpPr txBox="1"/>
           <p:nvPr/>
         </p:nvSpPr>
@@ -15754,20 +16288,20 @@
               </a:spcAft>
               <a:defRPr sz="1200" b="1">
                 <a:solidFill>
-                  <a:srgbClr val="845EC2"/>
-                </a:solidFill>
-                <a:latin typeface="Calibri"/>
-              </a:defRPr>
-            </a:pPr>
-            <a:r>
-              <a:t>Presenter: Hashim Kshim</a:t>
-            </a:r>
-          </a:p>
-        </p:txBody>
-      </p:sp>
-      <p:sp>
-        <p:nvSpPr>
-          <p:cNvPr id="17" name="TextBox 16"/>
+                  <a:srgbClr val="F0B429"/>
+                </a:solidFill>
+                <a:latin typeface="Calibri"/>
+              </a:defRPr>
+            </a:pPr>
+            <a:r>
+              <a:t>Presenter: Mazen Alhassan</a:t>
+            </a:r>
+          </a:p>
+        </p:txBody>
+      </p:sp>
+      <p:sp>
+        <p:nvSpPr>
+          <p:cNvPr id="25" name="TextBox 24"/>
           <p:cNvSpPr txBox="1"/>
           <p:nvPr/>
         </p:nvSpPr>
@@ -15802,7 +16336,7 @@
               </a:defRPr>
             </a:pPr>
             <a:r>
-              <a:t>20 / 25</a:t>
+              <a:t>20 / 26</a:t>
             </a:r>
           </a:p>
         </p:txBody>
@@ -15956,7 +16490,7 @@
               </a:defRPr>
             </a:pPr>
             <a:r>
-              <a:t>Emerging Trends: 6G &amp; GenAI</a:t>
+              <a:t>Industry Example: Ericsson</a:t>
             </a:r>
           </a:p>
         </p:txBody>
@@ -15998,7 +16532,7 @@
               </a:defRPr>
             </a:pPr>
             <a:r>
-              <a:t>Two trend groups that shape the future of telemetry</a:t>
+              <a:t>Combining better data organization with automation</a:t>
             </a:r>
           </a:p>
         </p:txBody>
@@ -16053,8 +16587,8 @@
         </p:nvSpPr>
         <p:spPr>
           <a:xfrm>
-            <a:off x="822960" y="4800600"/>
-            <a:ext cx="5166360" cy="1188720"/>
+            <a:off x="777240" y="1600200"/>
+            <a:ext cx="5120640" cy="2514600"/>
           </a:xfrm>
           <a:prstGeom prst="roundRect">
             <a:avLst/>
@@ -16064,7 +16598,7 @@
           </a:solidFill>
           <a:ln w="17780">
             <a:solidFill>
-              <a:srgbClr val="00C9A7"/>
+              <a:srgbClr val="845EC2"/>
             </a:solidFill>
           </a:ln>
         </p:spPr>
@@ -16098,8 +16632,8 @@
         </p:nvSpPr>
         <p:spPr>
           <a:xfrm>
-            <a:off x="987552" y="4937760"/>
-            <a:ext cx="4837176" cy="320040"/>
+            <a:off x="941832" y="1737360"/>
+            <a:ext cx="4791456" cy="320040"/>
           </a:xfrm>
           <a:prstGeom prst="rect">
             <a:avLst/>
@@ -16121,13 +16655,13 @@
               </a:spcAft>
               <a:defRPr sz="1600" b="1">
                 <a:solidFill>
-                  <a:srgbClr val="00C9A7"/>
-                </a:solidFill>
-                <a:latin typeface="Calibri"/>
-              </a:defRPr>
-            </a:pPr>
-            <a:r>
-              <a:t>6G &amp; Next-Gen Telemetry</a:t>
+                  <a:srgbClr val="845EC2"/>
+                </a:solidFill>
+                <a:latin typeface="Calibri"/>
+              </a:defRPr>
+            </a:pPr>
+            <a:r>
+              <a:t>AI-Ready Data Mesh</a:t>
             </a:r>
           </a:p>
         </p:txBody>
@@ -16140,8 +16674,8 @@
         </p:nvSpPr>
         <p:spPr>
           <a:xfrm>
-            <a:off x="987552" y="5303520"/>
-            <a:ext cx="4837176" cy="548640"/>
+            <a:off x="941832" y="2103120"/>
+            <a:ext cx="4791456" cy="1874520"/>
           </a:xfrm>
           <a:prstGeom prst="rect">
             <a:avLst/>
@@ -16161,7 +16695,7 @@
               <a:spcAft>
                 <a:spcPts val="0"/>
               </a:spcAft>
-              <a:defRPr sz="1200" b="0">
+              <a:defRPr sz="1300" b="0">
                 <a:solidFill>
                   <a:srgbClr val="CCCCCC"/>
                 </a:solidFill>
@@ -16169,7 +16703,12 @@
               </a:defRPr>
             </a:pPr>
             <a:r>
-              <a:t>Edge intelligence, digital twins, semantic telemetry, and AI-native design.</a:t>
+              <a:t>Ericsson treats telemetry as a shared data product, not just raw logs.</a:t>
+            </a:r>
+            <a:br/>
+            <a:br/>
+            <a:r>
+              <a:t>Teams manage domain pipelines with common standards, which improves data quality and makes telemetry easier for ML teams to use.</a:t>
             </a:r>
           </a:p>
         </p:txBody>
@@ -16182,8 +16721,8 @@
         </p:nvSpPr>
         <p:spPr>
           <a:xfrm>
-            <a:off x="6172200" y="4800600"/>
-            <a:ext cx="5166360" cy="1188720"/>
+            <a:off x="6263640" y="1600200"/>
+            <a:ext cx="5120640" cy="2514600"/>
           </a:xfrm>
           <a:prstGeom prst="roundRect">
             <a:avLst/>
@@ -16193,7 +16732,7 @@
           </a:solidFill>
           <a:ln w="17780">
             <a:solidFill>
-              <a:srgbClr val="FF8C00"/>
+              <a:srgbClr val="845EC2"/>
             </a:solidFill>
           </a:ln>
         </p:spPr>
@@ -16227,8 +16766,8 @@
         </p:nvSpPr>
         <p:spPr>
           <a:xfrm>
-            <a:off x="6336792" y="4937760"/>
-            <a:ext cx="4837176" cy="320040"/>
+            <a:off x="6428232" y="1737360"/>
+            <a:ext cx="4791456" cy="320040"/>
           </a:xfrm>
           <a:prstGeom prst="rect">
             <a:avLst/>
@@ -16250,13 +16789,13 @@
               </a:spcAft>
               <a:defRPr sz="1600" b="1">
                 <a:solidFill>
-                  <a:srgbClr val="FF8C00"/>
-                </a:solidFill>
-                <a:latin typeface="Calibri"/>
-              </a:defRPr>
-            </a:pPr>
-            <a:r>
-              <a:t>Generative AI &amp; LLMs for Telemetry</a:t>
+                  <a:srgbClr val="845EC2"/>
+                </a:solidFill>
+                <a:latin typeface="Calibri"/>
+              </a:defRPr>
+            </a:pPr>
+            <a:r>
+              <a:t>Transport Automation Controller (TAC)</a:t>
             </a:r>
           </a:p>
         </p:txBody>
@@ -16269,8 +16808,8 @@
         </p:nvSpPr>
         <p:spPr>
           <a:xfrm>
-            <a:off x="6336792" y="5303520"/>
-            <a:ext cx="4837176" cy="548640"/>
+            <a:off x="6428232" y="2103120"/>
+            <a:ext cx="4791456" cy="1874520"/>
           </a:xfrm>
           <a:prstGeom prst="rect">
             <a:avLst/>
@@ -16290,7 +16829,7 @@
               <a:spcAft>
                 <a:spcPts val="0"/>
               </a:spcAft>
-              <a:defRPr sz="1200" b="0">
+              <a:defRPr sz="1300" b="0">
                 <a:solidFill>
                   <a:srgbClr val="CCCCCC"/>
                 </a:solidFill>
@@ -16298,14 +16837,148 @@
               </a:defRPr>
             </a:pPr>
             <a:r>
-              <a:t>Natural-language analytics, synthetic data, incident summaries, and foundation models.</a:t>
-            </a:r>
-          </a:p>
-        </p:txBody>
-      </p:sp>
-      <p:sp>
-        <p:nvSpPr>
-          <p:cNvPr id="13" name="TextBox 12"/>
+              <a:t>Uses AI/ML to monitor transport performance, detect KPI anomalies, and support proactive capacity planning.</a:t>
+            </a:r>
+            <a:br/>
+            <a:br/>
+            <a:r>
+              <a:t>Direction: closed-loop automation through detect, diagnose, and act workflows.</a:t>
+            </a:r>
+          </a:p>
+        </p:txBody>
+      </p:sp>
+      <p:sp>
+        <p:nvSpPr>
+          <p:cNvPr id="13" name="Rounded Rectangle 12"/>
+          <p:cNvSpPr/>
+          <p:nvPr/>
+        </p:nvSpPr>
+        <p:spPr>
+          <a:xfrm>
+            <a:off x="1325880" y="4526280"/>
+            <a:ext cx="9509760" cy="1325880"/>
+          </a:xfrm>
+          <a:prstGeom prst="roundRect">
+            <a:avLst/>
+          </a:prstGeom>
+          <a:solidFill>
+            <a:srgbClr val="141832"/>
+          </a:solidFill>
+          <a:ln w="17780">
+            <a:solidFill>
+              <a:srgbClr val="845EC2"/>
+            </a:solidFill>
+          </a:ln>
+        </p:spPr>
+        <p:style>
+          <a:lnRef idx="1">
+            <a:schemeClr val="accent1"/>
+          </a:lnRef>
+          <a:fillRef idx="3">
+            <a:schemeClr val="accent1"/>
+          </a:fillRef>
+          <a:effectRef idx="2">
+            <a:schemeClr val="accent1"/>
+          </a:effectRef>
+          <a:fontRef idx="minor">
+            <a:schemeClr val="lt1"/>
+          </a:fontRef>
+        </p:style>
+        <p:txBody>
+          <a:bodyPr rtlCol="0" anchor="ctr"/>
+          <a:lstStyle/>
+          <a:p>
+            <a:pPr algn="ctr"/>
+          </a:p>
+        </p:txBody>
+      </p:sp>
+      <p:sp>
+        <p:nvSpPr>
+          <p:cNvPr id="14" name="TextBox 13"/>
+          <p:cNvSpPr txBox="1"/>
+          <p:nvPr/>
+        </p:nvSpPr>
+        <p:spPr>
+          <a:xfrm>
+            <a:off x="1490472" y="4663440"/>
+            <a:ext cx="9180576" cy="320040"/>
+          </a:xfrm>
+          <a:prstGeom prst="rect">
+            <a:avLst/>
+          </a:prstGeom>
+          <a:noFill/>
+        </p:spPr>
+        <p:txBody>
+          <a:bodyPr wrap="square" anchor="t" lIns="45720" rIns="45720" tIns="18288" bIns="18288">
+            <a:spAutoFit/>
+          </a:bodyPr>
+          <a:lstStyle/>
+          <a:p>
+            <a:pPr algn="l">
+              <a:lnSpc>
+                <a:spcPct val="120000"/>
+              </a:lnSpc>
+              <a:spcAft>
+                <a:spcPts val="0"/>
+              </a:spcAft>
+              <a:defRPr sz="1600" b="1">
+                <a:solidFill>
+                  <a:srgbClr val="845EC2"/>
+                </a:solidFill>
+                <a:latin typeface="Calibri"/>
+              </a:defRPr>
+            </a:pPr>
+            <a:r>
+              <a:t>Key Industry Insight</a:t>
+            </a:r>
+          </a:p>
+        </p:txBody>
+      </p:sp>
+      <p:sp>
+        <p:nvSpPr>
+          <p:cNvPr id="15" name="TextBox 14"/>
+          <p:cNvSpPr txBox="1"/>
+          <p:nvPr/>
+        </p:nvSpPr>
+        <p:spPr>
+          <a:xfrm>
+            <a:off x="1490472" y="5029200"/>
+            <a:ext cx="9180576" cy="685800"/>
+          </a:xfrm>
+          <a:prstGeom prst="rect">
+            <a:avLst/>
+          </a:prstGeom>
+          <a:noFill/>
+        </p:spPr>
+        <p:txBody>
+          <a:bodyPr wrap="square" anchor="t" lIns="45720" rIns="45720" tIns="18288" bIns="18288">
+            <a:spAutoFit/>
+          </a:bodyPr>
+          <a:lstStyle/>
+          <a:p>
+            <a:pPr algn="l">
+              <a:lnSpc>
+                <a:spcPct val="130000"/>
+              </a:lnSpc>
+              <a:spcAft>
+                <a:spcPts val="0"/>
+              </a:spcAft>
+              <a:defRPr sz="1300" b="0">
+                <a:solidFill>
+                  <a:srgbClr val="CCCCCC"/>
+                </a:solidFill>
+                <a:latin typeface="Calibri"/>
+              </a:defRPr>
+            </a:pPr>
+            <a:r>
+              <a:t>Ericsson shows that good AI outcomes depend on strong telemetry and data foundations. Better data pipelines make network automation and prediction more realistic at scale.</a:t>
+            </a:r>
+          </a:p>
+        </p:txBody>
+      </p:sp>
+      <p:sp>
+        <p:nvSpPr>
+          <p:cNvPr id="16" name="TextBox 15"/>
           <p:cNvSpPr txBox="1"/>
           <p:nvPr/>
         </p:nvSpPr>
@@ -16347,7 +17020,7 @@
       </p:sp>
       <p:sp>
         <p:nvSpPr>
-          <p:cNvPr id="14" name="TextBox 13"/>
+          <p:cNvPr id="17" name="TextBox 16"/>
           <p:cNvSpPr txBox="1"/>
           <p:nvPr/>
         </p:nvSpPr>
@@ -16382,7 +17055,7 @@
               </a:defRPr>
             </a:pPr>
             <a:r>
-              <a:t>21 / 25</a:t>
+              <a:t>21 / 26</a:t>
             </a:r>
           </a:p>
         </p:txBody>
@@ -16536,7 +17209,7 @@
               </a:defRPr>
             </a:pPr>
             <a:r>
-              <a:t>Open Challenges</a:t>
+              <a:t>Emerging Trends: 6G &amp; GenAI</a:t>
             </a:r>
           </a:p>
         </p:txBody>
@@ -16578,7 +17251,7 @@
               </a:defRPr>
             </a:pPr>
             <a:r>
-              <a:t>Important problems that still need better solutions</a:t>
+              <a:t>Two trend groups that shape the future of telemetry</a:t>
             </a:r>
           </a:p>
         </p:txBody>
@@ -16633,8 +17306,8 @@
         </p:nvSpPr>
         <p:spPr>
           <a:xfrm>
-            <a:off x="731520" y="1554480"/>
-            <a:ext cx="5303520" cy="1325880"/>
+            <a:off x="822960" y="4800600"/>
+            <a:ext cx="5166360" cy="1188720"/>
           </a:xfrm>
           <a:prstGeom prst="roundRect">
             <a:avLst/>
@@ -16642,9 +17315,9 @@
           <a:solidFill>
             <a:srgbClr val="141832"/>
           </a:solidFill>
-          <a:ln w="15240">
+          <a:ln w="17780">
             <a:solidFill>
-              <a:srgbClr val="845EC2"/>
+              <a:srgbClr val="00C9A7"/>
             </a:solidFill>
           </a:ln>
         </p:spPr>
@@ -16678,8 +17351,8 @@
         </p:nvSpPr>
         <p:spPr>
           <a:xfrm>
-            <a:off x="914400" y="1691640"/>
-            <a:ext cx="4937760" cy="320040"/>
+            <a:off x="987552" y="4937760"/>
+            <a:ext cx="4837176" cy="320040"/>
           </a:xfrm>
           <a:prstGeom prst="rect">
             <a:avLst/>
@@ -16701,13 +17374,13 @@
               </a:spcAft>
               <a:defRPr sz="1600" b="1">
                 <a:solidFill>
-                  <a:srgbClr val="845EC2"/>
-                </a:solidFill>
-                <a:latin typeface="Calibri"/>
-              </a:defRPr>
-            </a:pPr>
-            <a:r>
-              <a:t>Not enough labeled data</a:t>
+                  <a:srgbClr val="00C9A7"/>
+                </a:solidFill>
+                <a:latin typeface="Calibri"/>
+              </a:defRPr>
+            </a:pPr>
+            <a:r>
+              <a:t>6G &amp; Next-Gen Telemetry</a:t>
             </a:r>
           </a:p>
         </p:txBody>
@@ -16720,8 +17393,8 @@
         </p:nvSpPr>
         <p:spPr>
           <a:xfrm>
-            <a:off x="914400" y="2057400"/>
-            <a:ext cx="4937760" cy="685800"/>
+            <a:off x="987552" y="5303520"/>
+            <a:ext cx="4837176" cy="548640"/>
           </a:xfrm>
           <a:prstGeom prst="rect">
             <a:avLst/>
@@ -16736,7 +17409,7 @@
           <a:p>
             <a:pPr algn="l">
               <a:lnSpc>
-                <a:spcPct val="120000"/>
+                <a:spcPct val="130000"/>
               </a:lnSpc>
               <a:spcAft>
                 <a:spcPts val="0"/>
@@ -16749,7 +17422,7 @@
               </a:defRPr>
             </a:pPr>
             <a:r>
-              <a:t>Real networks rarely provide clean examples of every failure or attack.</a:t>
+              <a:t>Edge intelligence, digital twins, semantic telemetry, and AI-native design.</a:t>
             </a:r>
           </a:p>
         </p:txBody>
@@ -16762,8 +17435,8 @@
         </p:nvSpPr>
         <p:spPr>
           <a:xfrm>
-            <a:off x="731520" y="3108960"/>
-            <a:ext cx="5303520" cy="1325880"/>
+            <a:off x="6172200" y="4800600"/>
+            <a:ext cx="5166360" cy="1188720"/>
           </a:xfrm>
           <a:prstGeom prst="roundRect">
             <a:avLst/>
@@ -16771,9 +17444,9 @@
           <a:solidFill>
             <a:srgbClr val="141832"/>
           </a:solidFill>
-          <a:ln w="15240">
+          <a:ln w="17780">
             <a:solidFill>
-              <a:srgbClr val="845EC2"/>
+              <a:srgbClr val="FF8C00"/>
             </a:solidFill>
           </a:ln>
         </p:spPr>
@@ -16807,8 +17480,8 @@
         </p:nvSpPr>
         <p:spPr>
           <a:xfrm>
-            <a:off x="914400" y="3246120"/>
-            <a:ext cx="4937760" cy="320040"/>
+            <a:off x="6336792" y="4937760"/>
+            <a:ext cx="4837176" cy="320040"/>
           </a:xfrm>
           <a:prstGeom prst="rect">
             <a:avLst/>
@@ -16830,13 +17503,13 @@
               </a:spcAft>
               <a:defRPr sz="1600" b="1">
                 <a:solidFill>
-                  <a:srgbClr val="845EC2"/>
-                </a:solidFill>
-                <a:latin typeface="Calibri"/>
-              </a:defRPr>
-            </a:pPr>
-            <a:r>
-              <a:t>Scale and speed</a:t>
+                  <a:srgbClr val="FF8C00"/>
+                </a:solidFill>
+                <a:latin typeface="Calibri"/>
+              </a:defRPr>
+            </a:pPr>
+            <a:r>
+              <a:t>Generative AI &amp; LLMs for Telemetry</a:t>
             </a:r>
           </a:p>
         </p:txBody>
@@ -16849,8 +17522,8 @@
         </p:nvSpPr>
         <p:spPr>
           <a:xfrm>
-            <a:off x="914400" y="3611880"/>
-            <a:ext cx="4937760" cy="685800"/>
+            <a:off x="6336792" y="5303520"/>
+            <a:ext cx="4837176" cy="548640"/>
           </a:xfrm>
           <a:prstGeom prst="rect">
             <a:avLst/>
@@ -16865,7 +17538,7 @@
           <a:p>
             <a:pPr algn="l">
               <a:lnSpc>
-                <a:spcPct val="120000"/>
+                <a:spcPct val="130000"/>
               </a:lnSpc>
               <a:spcAft>
                 <a:spcPts val="0"/>
@@ -16878,530 +17551,14 @@
               </a:defRPr>
             </a:pPr>
             <a:r>
-              <a:t>Models must handle massive telemetry streams quickly enough to matter.</a:t>
-            </a:r>
-          </a:p>
-        </p:txBody>
-      </p:sp>
-      <p:sp>
-        <p:nvSpPr>
-          <p:cNvPr id="13" name="Rounded Rectangle 12"/>
-          <p:cNvSpPr/>
-          <p:nvPr/>
-        </p:nvSpPr>
-        <p:spPr>
-          <a:xfrm>
-            <a:off x="731520" y="4663440"/>
-            <a:ext cx="5303520" cy="1325880"/>
-          </a:xfrm>
-          <a:prstGeom prst="roundRect">
-            <a:avLst/>
-          </a:prstGeom>
-          <a:solidFill>
-            <a:srgbClr val="141832"/>
-          </a:solidFill>
-          <a:ln w="15240">
-            <a:solidFill>
-              <a:srgbClr val="845EC2"/>
-            </a:solidFill>
-          </a:ln>
-        </p:spPr>
-        <p:style>
-          <a:lnRef idx="1">
-            <a:schemeClr val="accent1"/>
-          </a:lnRef>
-          <a:fillRef idx="3">
-            <a:schemeClr val="accent1"/>
-          </a:fillRef>
-          <a:effectRef idx="2">
-            <a:schemeClr val="accent1"/>
-          </a:effectRef>
-          <a:fontRef idx="minor">
-            <a:schemeClr val="lt1"/>
-          </a:fontRef>
-        </p:style>
-        <p:txBody>
-          <a:bodyPr rtlCol="0" anchor="ctr"/>
-          <a:lstStyle/>
-          <a:p>
-            <a:pPr algn="ctr"/>
-          </a:p>
-        </p:txBody>
-      </p:sp>
-      <p:sp>
-        <p:nvSpPr>
-          <p:cNvPr id="14" name="TextBox 13"/>
-          <p:cNvSpPr txBox="1"/>
-          <p:nvPr/>
-        </p:nvSpPr>
-        <p:spPr>
-          <a:xfrm>
-            <a:off x="914400" y="4800600"/>
-            <a:ext cx="4937760" cy="320040"/>
-          </a:xfrm>
-          <a:prstGeom prst="rect">
-            <a:avLst/>
-          </a:prstGeom>
-          <a:noFill/>
-        </p:spPr>
-        <p:txBody>
-          <a:bodyPr wrap="square" anchor="t" lIns="45720" rIns="45720" tIns="18288" bIns="18288">
-            <a:spAutoFit/>
-          </a:bodyPr>
-          <a:lstStyle/>
-          <a:p>
-            <a:pPr algn="l">
-              <a:lnSpc>
-                <a:spcPct val="120000"/>
-              </a:lnSpc>
-              <a:spcAft>
-                <a:spcPts val="0"/>
-              </a:spcAft>
-              <a:defRPr sz="1600" b="1">
-                <a:solidFill>
-                  <a:srgbClr val="845EC2"/>
-                </a:solidFill>
-                <a:latin typeface="Calibri"/>
-              </a:defRPr>
-            </a:pPr>
-            <a:r>
-              <a:t>Explainability</a:t>
-            </a:r>
-          </a:p>
-        </p:txBody>
-      </p:sp>
-      <p:sp>
-        <p:nvSpPr>
-          <p:cNvPr id="15" name="TextBox 14"/>
-          <p:cNvSpPr txBox="1"/>
-          <p:nvPr/>
-        </p:nvSpPr>
-        <p:spPr>
-          <a:xfrm>
-            <a:off x="914400" y="5166360"/>
-            <a:ext cx="4937760" cy="685800"/>
-          </a:xfrm>
-          <a:prstGeom prst="rect">
-            <a:avLst/>
-          </a:prstGeom>
-          <a:noFill/>
-        </p:spPr>
-        <p:txBody>
-          <a:bodyPr wrap="square" anchor="t" lIns="45720" rIns="45720" tIns="18288" bIns="18288">
-            <a:spAutoFit/>
-          </a:bodyPr>
-          <a:lstStyle/>
-          <a:p>
-            <a:pPr algn="l">
-              <a:lnSpc>
-                <a:spcPct val="120000"/>
-              </a:lnSpc>
-              <a:spcAft>
-                <a:spcPts val="0"/>
-              </a:spcAft>
-              <a:defRPr sz="1200" b="0">
-                <a:solidFill>
-                  <a:srgbClr val="CCCCCC"/>
-                </a:solidFill>
-                <a:latin typeface="Calibri"/>
-              </a:defRPr>
-            </a:pPr>
-            <a:r>
-              <a:t>Operators need to know why a model raised an alert before they trust it.</a:t>
-            </a:r>
-          </a:p>
-        </p:txBody>
-      </p:sp>
-      <p:sp>
-        <p:nvSpPr>
-          <p:cNvPr id="16" name="Rounded Rectangle 15"/>
-          <p:cNvSpPr/>
-          <p:nvPr/>
-        </p:nvSpPr>
-        <p:spPr>
-          <a:xfrm>
-            <a:off x="6492240" y="1554480"/>
-            <a:ext cx="5303520" cy="1325880"/>
-          </a:xfrm>
-          <a:prstGeom prst="roundRect">
-            <a:avLst/>
-          </a:prstGeom>
-          <a:solidFill>
-            <a:srgbClr val="141832"/>
-          </a:solidFill>
-          <a:ln w="15240">
-            <a:solidFill>
-              <a:srgbClr val="FF8C00"/>
-            </a:solidFill>
-          </a:ln>
-        </p:spPr>
-        <p:style>
-          <a:lnRef idx="1">
-            <a:schemeClr val="accent1"/>
-          </a:lnRef>
-          <a:fillRef idx="3">
-            <a:schemeClr val="accent1"/>
-          </a:fillRef>
-          <a:effectRef idx="2">
-            <a:schemeClr val="accent1"/>
-          </a:effectRef>
-          <a:fontRef idx="minor">
-            <a:schemeClr val="lt1"/>
-          </a:fontRef>
-        </p:style>
-        <p:txBody>
-          <a:bodyPr rtlCol="0" anchor="ctr"/>
-          <a:lstStyle/>
-          <a:p>
-            <a:pPr algn="ctr"/>
-          </a:p>
-        </p:txBody>
-      </p:sp>
-      <p:sp>
-        <p:nvSpPr>
-          <p:cNvPr id="17" name="TextBox 16"/>
-          <p:cNvSpPr txBox="1"/>
-          <p:nvPr/>
-        </p:nvSpPr>
-        <p:spPr>
-          <a:xfrm>
-            <a:off x="6675120" y="1691640"/>
-            <a:ext cx="4937760" cy="320040"/>
-          </a:xfrm>
-          <a:prstGeom prst="rect">
-            <a:avLst/>
-          </a:prstGeom>
-          <a:noFill/>
-        </p:spPr>
-        <p:txBody>
-          <a:bodyPr wrap="square" anchor="t" lIns="45720" rIns="45720" tIns="18288" bIns="18288">
-            <a:spAutoFit/>
-          </a:bodyPr>
-          <a:lstStyle/>
-          <a:p>
-            <a:pPr algn="l">
-              <a:lnSpc>
-                <a:spcPct val="120000"/>
-              </a:lnSpc>
-              <a:spcAft>
-                <a:spcPts val="0"/>
-              </a:spcAft>
-              <a:defRPr sz="1600" b="1">
-                <a:solidFill>
-                  <a:srgbClr val="FF8C00"/>
-                </a:solidFill>
-                <a:latin typeface="Calibri"/>
-              </a:defRPr>
-            </a:pPr>
-            <a:r>
-              <a:t>Concept drift</a:t>
-            </a:r>
-          </a:p>
-        </p:txBody>
-      </p:sp>
-      <p:sp>
-        <p:nvSpPr>
-          <p:cNvPr id="18" name="TextBox 17"/>
-          <p:cNvSpPr txBox="1"/>
-          <p:nvPr/>
-        </p:nvSpPr>
-        <p:spPr>
-          <a:xfrm>
-            <a:off x="6675120" y="2057400"/>
-            <a:ext cx="4937760" cy="685800"/>
-          </a:xfrm>
-          <a:prstGeom prst="rect">
-            <a:avLst/>
-          </a:prstGeom>
-          <a:noFill/>
-        </p:spPr>
-        <p:txBody>
-          <a:bodyPr wrap="square" anchor="t" lIns="45720" rIns="45720" tIns="18288" bIns="18288">
-            <a:spAutoFit/>
-          </a:bodyPr>
-          <a:lstStyle/>
-          <a:p>
-            <a:pPr algn="l">
-              <a:lnSpc>
-                <a:spcPct val="120000"/>
-              </a:lnSpc>
-              <a:spcAft>
-                <a:spcPts val="0"/>
-              </a:spcAft>
-              <a:defRPr sz="1200" b="0">
-                <a:solidFill>
-                  <a:srgbClr val="CCCCCC"/>
-                </a:solidFill>
-                <a:latin typeface="Calibri"/>
-              </a:defRPr>
-            </a:pPr>
-            <a:r>
-              <a:t>Normal traffic changes over time, so models can become outdated.</a:t>
-            </a:r>
-          </a:p>
-        </p:txBody>
-      </p:sp>
-      <p:sp>
-        <p:nvSpPr>
-          <p:cNvPr id="19" name="Rounded Rectangle 18"/>
-          <p:cNvSpPr/>
-          <p:nvPr/>
-        </p:nvSpPr>
-        <p:spPr>
-          <a:xfrm>
-            <a:off x="6492240" y="3108960"/>
-            <a:ext cx="5303520" cy="1325880"/>
-          </a:xfrm>
-          <a:prstGeom prst="roundRect">
-            <a:avLst/>
-          </a:prstGeom>
-          <a:solidFill>
-            <a:srgbClr val="141832"/>
-          </a:solidFill>
-          <a:ln w="15240">
-            <a:solidFill>
-              <a:srgbClr val="FF8C00"/>
-            </a:solidFill>
-          </a:ln>
-        </p:spPr>
-        <p:style>
-          <a:lnRef idx="1">
-            <a:schemeClr val="accent1"/>
-          </a:lnRef>
-          <a:fillRef idx="3">
-            <a:schemeClr val="accent1"/>
-          </a:fillRef>
-          <a:effectRef idx="2">
-            <a:schemeClr val="accent1"/>
-          </a:effectRef>
-          <a:fontRef idx="minor">
-            <a:schemeClr val="lt1"/>
-          </a:fontRef>
-        </p:style>
-        <p:txBody>
-          <a:bodyPr rtlCol="0" anchor="ctr"/>
-          <a:lstStyle/>
-          <a:p>
-            <a:pPr algn="ctr"/>
-          </a:p>
-        </p:txBody>
-      </p:sp>
-      <p:sp>
-        <p:nvSpPr>
-          <p:cNvPr id="20" name="TextBox 19"/>
-          <p:cNvSpPr txBox="1"/>
-          <p:nvPr/>
-        </p:nvSpPr>
-        <p:spPr>
-          <a:xfrm>
-            <a:off x="6675120" y="3246120"/>
-            <a:ext cx="4937760" cy="320040"/>
-          </a:xfrm>
-          <a:prstGeom prst="rect">
-            <a:avLst/>
-          </a:prstGeom>
-          <a:noFill/>
-        </p:spPr>
-        <p:txBody>
-          <a:bodyPr wrap="square" anchor="t" lIns="45720" rIns="45720" tIns="18288" bIns="18288">
-            <a:spAutoFit/>
-          </a:bodyPr>
-          <a:lstStyle/>
-          <a:p>
-            <a:pPr algn="l">
-              <a:lnSpc>
-                <a:spcPct val="120000"/>
-              </a:lnSpc>
-              <a:spcAft>
-                <a:spcPts val="0"/>
-              </a:spcAft>
-              <a:defRPr sz="1600" b="1">
-                <a:solidFill>
-                  <a:srgbClr val="FF8C00"/>
-                </a:solidFill>
-                <a:latin typeface="Calibri"/>
-              </a:defRPr>
-            </a:pPr>
-            <a:r>
-              <a:t>Generalization</a:t>
-            </a:r>
-          </a:p>
-        </p:txBody>
-      </p:sp>
-      <p:sp>
-        <p:nvSpPr>
-          <p:cNvPr id="21" name="TextBox 20"/>
-          <p:cNvSpPr txBox="1"/>
-          <p:nvPr/>
-        </p:nvSpPr>
-        <p:spPr>
-          <a:xfrm>
-            <a:off x="6675120" y="3611880"/>
-            <a:ext cx="4937760" cy="685800"/>
-          </a:xfrm>
-          <a:prstGeom prst="rect">
-            <a:avLst/>
-          </a:prstGeom>
-          <a:noFill/>
-        </p:spPr>
-        <p:txBody>
-          <a:bodyPr wrap="square" anchor="t" lIns="45720" rIns="45720" tIns="18288" bIns="18288">
-            <a:spAutoFit/>
-          </a:bodyPr>
-          <a:lstStyle/>
-          <a:p>
-            <a:pPr algn="l">
-              <a:lnSpc>
-                <a:spcPct val="120000"/>
-              </a:lnSpc>
-              <a:spcAft>
-                <a:spcPts val="0"/>
-              </a:spcAft>
-              <a:defRPr sz="1200" b="0">
-                <a:solidFill>
-                  <a:srgbClr val="CCCCCC"/>
-                </a:solidFill>
-                <a:latin typeface="Calibri"/>
-              </a:defRPr>
-            </a:pPr>
-            <a:r>
-              <a:t>A model that works well in one network may fail in another.</a:t>
-            </a:r>
-          </a:p>
-        </p:txBody>
-      </p:sp>
-      <p:sp>
-        <p:nvSpPr>
-          <p:cNvPr id="22" name="Rounded Rectangle 21"/>
-          <p:cNvSpPr/>
-          <p:nvPr/>
-        </p:nvSpPr>
-        <p:spPr>
-          <a:xfrm>
-            <a:off x="6492240" y="4663440"/>
-            <a:ext cx="5303520" cy="1325880"/>
-          </a:xfrm>
-          <a:prstGeom prst="roundRect">
-            <a:avLst/>
-          </a:prstGeom>
-          <a:solidFill>
-            <a:srgbClr val="141832"/>
-          </a:solidFill>
-          <a:ln w="15240">
-            <a:solidFill>
-              <a:srgbClr val="FF8C00"/>
-            </a:solidFill>
-          </a:ln>
-        </p:spPr>
-        <p:style>
-          <a:lnRef idx="1">
-            <a:schemeClr val="accent1"/>
-          </a:lnRef>
-          <a:fillRef idx="3">
-            <a:schemeClr val="accent1"/>
-          </a:fillRef>
-          <a:effectRef idx="2">
-            <a:schemeClr val="accent1"/>
-          </a:effectRef>
-          <a:fontRef idx="minor">
-            <a:schemeClr val="lt1"/>
-          </a:fontRef>
-        </p:style>
-        <p:txBody>
-          <a:bodyPr rtlCol="0" anchor="ctr"/>
-          <a:lstStyle/>
-          <a:p>
-            <a:pPr algn="ctr"/>
-          </a:p>
-        </p:txBody>
-      </p:sp>
-      <p:sp>
-        <p:nvSpPr>
-          <p:cNvPr id="23" name="TextBox 22"/>
-          <p:cNvSpPr txBox="1"/>
-          <p:nvPr/>
-        </p:nvSpPr>
-        <p:spPr>
-          <a:xfrm>
-            <a:off x="6675120" y="4800600"/>
-            <a:ext cx="4937760" cy="320040"/>
-          </a:xfrm>
-          <a:prstGeom prst="rect">
-            <a:avLst/>
-          </a:prstGeom>
-          <a:noFill/>
-        </p:spPr>
-        <p:txBody>
-          <a:bodyPr wrap="square" anchor="t" lIns="45720" rIns="45720" tIns="18288" bIns="18288">
-            <a:spAutoFit/>
-          </a:bodyPr>
-          <a:lstStyle/>
-          <a:p>
-            <a:pPr algn="l">
-              <a:lnSpc>
-                <a:spcPct val="120000"/>
-              </a:lnSpc>
-              <a:spcAft>
-                <a:spcPts val="0"/>
-              </a:spcAft>
-              <a:defRPr sz="1600" b="1">
-                <a:solidFill>
-                  <a:srgbClr val="FF8C00"/>
-                </a:solidFill>
-                <a:latin typeface="Calibri"/>
-              </a:defRPr>
-            </a:pPr>
-            <a:r>
-              <a:t>Privacy and security</a:t>
-            </a:r>
-          </a:p>
-        </p:txBody>
-      </p:sp>
-      <p:sp>
-        <p:nvSpPr>
-          <p:cNvPr id="24" name="TextBox 23"/>
-          <p:cNvSpPr txBox="1"/>
-          <p:nvPr/>
-        </p:nvSpPr>
-        <p:spPr>
-          <a:xfrm>
-            <a:off x="6675120" y="5166360"/>
-            <a:ext cx="4937760" cy="685800"/>
-          </a:xfrm>
-          <a:prstGeom prst="rect">
-            <a:avLst/>
-          </a:prstGeom>
-          <a:noFill/>
-        </p:spPr>
-        <p:txBody>
-          <a:bodyPr wrap="square" anchor="t" lIns="45720" rIns="45720" tIns="18288" bIns="18288">
-            <a:spAutoFit/>
-          </a:bodyPr>
-          <a:lstStyle/>
-          <a:p>
-            <a:pPr algn="l">
-              <a:lnSpc>
-                <a:spcPct val="120000"/>
-              </a:lnSpc>
-              <a:spcAft>
-                <a:spcPts val="0"/>
-              </a:spcAft>
-              <a:defRPr sz="1200" b="0">
-                <a:solidFill>
-                  <a:srgbClr val="CCCCCC"/>
-                </a:solidFill>
-                <a:latin typeface="Calibri"/>
-              </a:defRPr>
-            </a:pPr>
-            <a:r>
-              <a:t>Telemetry can contain sensitive information that must be protected.</a:t>
-            </a:r>
-          </a:p>
-        </p:txBody>
-      </p:sp>
-      <p:sp>
-        <p:nvSpPr>
-          <p:cNvPr id="25" name="TextBox 24"/>
+              <a:t>Natural-language analytics, synthetic data, incident summaries, and foundation models.</a:t>
+            </a:r>
+          </a:p>
+        </p:txBody>
+      </p:sp>
+      <p:sp>
+        <p:nvSpPr>
+          <p:cNvPr id="13" name="TextBox 12"/>
           <p:cNvSpPr txBox="1"/>
           <p:nvPr/>
         </p:nvSpPr>
@@ -17443,7 +17600,7 @@
       </p:sp>
       <p:sp>
         <p:nvSpPr>
-          <p:cNvPr id="26" name="TextBox 25"/>
+          <p:cNvPr id="14" name="TextBox 13"/>
           <p:cNvSpPr txBox="1"/>
           <p:nvPr/>
         </p:nvSpPr>
@@ -17478,7 +17635,7 @@
               </a:defRPr>
             </a:pPr>
             <a:r>
-              <a:t>22 / 25</a:t>
+              <a:t>22 / 26</a:t>
             </a:r>
           </a:p>
         </p:txBody>
@@ -17518,7 +17675,50 @@
         <p:spPr>
           <a:xfrm>
             <a:off x="0" y="0"/>
-            <a:ext cx="12191695" cy="91440"/>
+            <a:ext cx="137160" cy="6858000"/>
+          </a:xfrm>
+          <a:prstGeom prst="rect">
+            <a:avLst/>
+          </a:prstGeom>
+          <a:solidFill>
+            <a:srgbClr val="845EC2"/>
+          </a:solidFill>
+          <a:ln>
+            <a:noFill/>
+          </a:ln>
+        </p:spPr>
+        <p:style>
+          <a:lnRef idx="1">
+            <a:schemeClr val="accent1"/>
+          </a:lnRef>
+          <a:fillRef idx="3">
+            <a:schemeClr val="accent1"/>
+          </a:fillRef>
+          <a:effectRef idx="2">
+            <a:schemeClr val="accent1"/>
+          </a:effectRef>
+          <a:fontRef idx="minor">
+            <a:schemeClr val="lt1"/>
+          </a:fontRef>
+        </p:style>
+        <p:txBody>
+          <a:bodyPr rtlCol="0" anchor="ctr"/>
+          <a:lstStyle/>
+          <a:p>
+            <a:pPr algn="ctr"/>
+          </a:p>
+        </p:txBody>
+      </p:sp>
+      <p:sp>
+        <p:nvSpPr>
+          <p:cNvPr id="3" name="Rectangle 2"/>
+          <p:cNvSpPr/>
+          <p:nvPr/>
+        </p:nvSpPr>
+        <p:spPr>
+          <a:xfrm>
+            <a:off x="0" y="6784848"/>
+            <a:ext cx="12191695" cy="73152"/>
           </a:xfrm>
           <a:prstGeom prst="rect">
             <a:avLst/>
@@ -17554,23 +17754,151 @@
       </p:sp>
       <p:sp>
         <p:nvSpPr>
-          <p:cNvPr id="3" name="Rectangle 2"/>
+          <p:cNvPr id="4" name="TextBox 3"/>
+          <p:cNvSpPr txBox="1"/>
+          <p:nvPr/>
+        </p:nvSpPr>
+        <p:spPr>
+          <a:xfrm>
+            <a:off x="731520" y="365760"/>
+            <a:ext cx="10515600" cy="640080"/>
+          </a:xfrm>
+          <a:prstGeom prst="rect">
+            <a:avLst/>
+          </a:prstGeom>
+          <a:noFill/>
+        </p:spPr>
+        <p:txBody>
+          <a:bodyPr wrap="square" anchor="t" lIns="45720" rIns="45720" tIns="18288" bIns="18288">
+            <a:spAutoFit/>
+          </a:bodyPr>
+          <a:lstStyle/>
+          <a:p>
+            <a:pPr algn="l">
+              <a:lnSpc>
+                <a:spcPct val="120000"/>
+              </a:lnSpc>
+              <a:spcAft>
+                <a:spcPts val="0"/>
+              </a:spcAft>
+              <a:defRPr sz="3600" b="1">
+                <a:solidFill>
+                  <a:srgbClr val="FFFFFF"/>
+                </a:solidFill>
+                <a:latin typeface="Calibri"/>
+              </a:defRPr>
+            </a:pPr>
+            <a:r>
+              <a:t>Open Challenges</a:t>
+            </a:r>
+          </a:p>
+        </p:txBody>
+      </p:sp>
+      <p:sp>
+        <p:nvSpPr>
+          <p:cNvPr id="5" name="TextBox 4"/>
+          <p:cNvSpPr txBox="1"/>
+          <p:nvPr/>
+        </p:nvSpPr>
+        <p:spPr>
+          <a:xfrm>
+            <a:off x="731520" y="1024128"/>
+            <a:ext cx="10515600" cy="438912"/>
+          </a:xfrm>
+          <a:prstGeom prst="rect">
+            <a:avLst/>
+          </a:prstGeom>
+          <a:noFill/>
+        </p:spPr>
+        <p:txBody>
+          <a:bodyPr wrap="square" anchor="t" lIns="45720" rIns="45720" tIns="18288" bIns="18288">
+            <a:spAutoFit/>
+          </a:bodyPr>
+          <a:lstStyle/>
+          <a:p>
+            <a:pPr algn="l">
+              <a:lnSpc>
+                <a:spcPct val="120000"/>
+              </a:lnSpc>
+              <a:spcAft>
+                <a:spcPts val="0"/>
+              </a:spcAft>
+              <a:defRPr sz="1800" b="0">
+                <a:solidFill>
+                  <a:srgbClr val="CCCCCC"/>
+                </a:solidFill>
+                <a:latin typeface="Calibri"/>
+              </a:defRPr>
+            </a:pPr>
+            <a:r>
+              <a:t>Important problems that still need better solutions</a:t>
+            </a:r>
+          </a:p>
+        </p:txBody>
+      </p:sp>
+      <p:sp>
+        <p:nvSpPr>
+          <p:cNvPr id="6" name="TextBox 5"/>
+          <p:cNvSpPr txBox="1"/>
+          <p:nvPr/>
+        </p:nvSpPr>
+        <p:spPr>
+          <a:xfrm>
+            <a:off x="9326880" y="6263640"/>
+            <a:ext cx="2743200" cy="457200"/>
+          </a:xfrm>
+          <a:prstGeom prst="rect">
+            <a:avLst/>
+          </a:prstGeom>
+          <a:noFill/>
+        </p:spPr>
+        <p:txBody>
+          <a:bodyPr wrap="square" anchor="t" lIns="45720" rIns="45720" tIns="18288" bIns="18288">
+            <a:spAutoFit/>
+          </a:bodyPr>
+          <a:lstStyle/>
+          <a:p>
+            <a:pPr algn="r">
+              <a:lnSpc>
+                <a:spcPct val="120000"/>
+              </a:lnSpc>
+              <a:spcAft>
+                <a:spcPts val="0"/>
+              </a:spcAft>
+              <a:defRPr sz="1200" b="1">
+                <a:solidFill>
+                  <a:srgbClr val="009FFD"/>
+                </a:solidFill>
+                <a:latin typeface="Calibri"/>
+              </a:defRPr>
+            </a:pPr>
+            <a:r>
+              <a:t>Presenter: Hashim Kshim</a:t>
+            </a:r>
+          </a:p>
+        </p:txBody>
+      </p:sp>
+      <p:sp>
+        <p:nvSpPr>
+          <p:cNvPr id="7" name="Rounded Rectangle 6"/>
           <p:cNvSpPr/>
           <p:nvPr/>
         </p:nvSpPr>
         <p:spPr>
           <a:xfrm>
-            <a:off x="0" y="6784848"/>
-            <a:ext cx="12191695" cy="73152"/>
-          </a:xfrm>
-          <a:prstGeom prst="rect">
+            <a:off x="731520" y="1554480"/>
+            <a:ext cx="5303520" cy="1325880"/>
+          </a:xfrm>
+          <a:prstGeom prst="roundRect">
             <a:avLst/>
           </a:prstGeom>
           <a:solidFill>
-            <a:srgbClr val="009FFD"/>
+            <a:srgbClr val="141832"/>
           </a:solidFill>
-          <a:ln>
-            <a:noFill/>
+          <a:ln w="15240">
+            <a:solidFill>
+              <a:srgbClr val="845EC2"/>
+            </a:solidFill>
           </a:ln>
         </p:spPr>
         <p:style>
@@ -17597,14 +17925,14 @@
       </p:sp>
       <p:sp>
         <p:nvSpPr>
-          <p:cNvPr id="4" name="TextBox 3"/>
-          <p:cNvSpPr txBox="1"/>
-          <p:nvPr/>
-        </p:nvSpPr>
-        <p:spPr>
-          <a:xfrm>
-            <a:off x="731520" y="365760"/>
-            <a:ext cx="10515600" cy="640080"/>
+          <p:cNvPr id="8" name="TextBox 7"/>
+          <p:cNvSpPr txBox="1"/>
+          <p:nvPr/>
+        </p:nvSpPr>
+        <p:spPr>
+          <a:xfrm>
+            <a:off x="914400" y="1691640"/>
+            <a:ext cx="4937760" cy="320040"/>
           </a:xfrm>
           <a:prstGeom prst="rect">
             <a:avLst/>
@@ -17624,29 +17952,29 @@
               <a:spcAft>
                 <a:spcPts val="0"/>
               </a:spcAft>
-              <a:defRPr sz="3600" b="1">
-                <a:solidFill>
-                  <a:srgbClr val="FFFFFF"/>
-                </a:solidFill>
-                <a:latin typeface="Calibri"/>
-              </a:defRPr>
-            </a:pPr>
-            <a:r>
-              <a:t>Conclusion &amp; Key Takeaways</a:t>
-            </a:r>
-          </a:p>
-        </p:txBody>
-      </p:sp>
-      <p:sp>
-        <p:nvSpPr>
-          <p:cNvPr id="5" name="TextBox 4"/>
-          <p:cNvSpPr txBox="1"/>
-          <p:nvPr/>
-        </p:nvSpPr>
-        <p:spPr>
-          <a:xfrm>
-            <a:off x="731520" y="1024128"/>
-            <a:ext cx="10515600" cy="438912"/>
+              <a:defRPr sz="1600" b="1">
+                <a:solidFill>
+                  <a:srgbClr val="845EC2"/>
+                </a:solidFill>
+                <a:latin typeface="Calibri"/>
+              </a:defRPr>
+            </a:pPr>
+            <a:r>
+              <a:t>Not enough labeled data</a:t>
+            </a:r>
+          </a:p>
+        </p:txBody>
+      </p:sp>
+      <p:sp>
+        <p:nvSpPr>
+          <p:cNvPr id="9" name="TextBox 8"/>
+          <p:cNvSpPr txBox="1"/>
+          <p:nvPr/>
+        </p:nvSpPr>
+        <p:spPr>
+          <a:xfrm>
+            <a:off x="914400" y="2057400"/>
+            <a:ext cx="4937760" cy="685800"/>
           </a:xfrm>
           <a:prstGeom prst="rect">
             <a:avLst/>
@@ -17666,7 +17994,7 @@
               <a:spcAft>
                 <a:spcPts val="0"/>
               </a:spcAft>
-              <a:defRPr sz="1800" b="0">
+              <a:defRPr sz="1200" b="0">
                 <a:solidFill>
                   <a:srgbClr val="CCCCCC"/>
                 </a:solidFill>
@@ -17674,72 +18002,32 @@
               </a:defRPr>
             </a:pPr>
             <a:r>
-              <a:t>A cleaner final summary</a:t>
-            </a:r>
-          </a:p>
-        </p:txBody>
-      </p:sp>
-      <p:sp>
-        <p:nvSpPr>
-          <p:cNvPr id="6" name="TextBox 5"/>
-          <p:cNvSpPr txBox="1"/>
-          <p:nvPr/>
-        </p:nvSpPr>
-        <p:spPr>
-          <a:xfrm>
-            <a:off x="9326880" y="6263640"/>
-            <a:ext cx="2743200" cy="457200"/>
-          </a:xfrm>
-          <a:prstGeom prst="rect">
-            <a:avLst/>
-          </a:prstGeom>
-          <a:noFill/>
-        </p:spPr>
-        <p:txBody>
-          <a:bodyPr wrap="square" anchor="t" lIns="45720" rIns="45720" tIns="18288" bIns="18288">
-            <a:spAutoFit/>
-          </a:bodyPr>
-          <a:lstStyle/>
-          <a:p>
-            <a:pPr algn="r">
-              <a:lnSpc>
-                <a:spcPct val="120000"/>
-              </a:lnSpc>
-              <a:spcAft>
-                <a:spcPts val="0"/>
-              </a:spcAft>
-              <a:defRPr sz="1200" b="1">
-                <a:solidFill>
-                  <a:srgbClr val="009FFD"/>
-                </a:solidFill>
-                <a:latin typeface="Calibri"/>
-              </a:defRPr>
-            </a:pPr>
-            <a:r>
-              <a:t>Presenter: Hashim Kshim</a:t>
-            </a:r>
-          </a:p>
-        </p:txBody>
-      </p:sp>
-      <p:sp>
-        <p:nvSpPr>
-          <p:cNvPr id="7" name="Oval 6"/>
+              <a:t>Real networks rarely provide clean examples of every failure or attack.</a:t>
+            </a:r>
+          </a:p>
+        </p:txBody>
+      </p:sp>
+      <p:sp>
+        <p:nvSpPr>
+          <p:cNvPr id="10" name="Rounded Rectangle 9"/>
           <p:cNvSpPr/>
           <p:nvPr/>
         </p:nvSpPr>
         <p:spPr>
           <a:xfrm>
-            <a:off x="685800" y="1344168"/>
-            <a:ext cx="384048" cy="384048"/>
-          </a:xfrm>
-          <a:prstGeom prst="ellipse">
+            <a:off x="731520" y="3108960"/>
+            <a:ext cx="5303520" cy="1325880"/>
+          </a:xfrm>
+          <a:prstGeom prst="roundRect">
             <a:avLst/>
           </a:prstGeom>
           <a:solidFill>
-            <a:srgbClr val="009FFD"/>
+            <a:srgbClr val="141832"/>
           </a:solidFill>
-          <a:ln>
-            <a:noFill/>
+          <a:ln w="15240">
+            <a:solidFill>
+              <a:srgbClr val="845EC2"/>
+            </a:solidFill>
           </a:ln>
         </p:spPr>
         <p:style>
@@ -17766,56 +18054,14 @@
       </p:sp>
       <p:sp>
         <p:nvSpPr>
-          <p:cNvPr id="8" name="TextBox 7"/>
-          <p:cNvSpPr txBox="1"/>
-          <p:nvPr/>
-        </p:nvSpPr>
-        <p:spPr>
-          <a:xfrm>
-            <a:off x="685800" y="1371600"/>
-            <a:ext cx="384048" cy="347472"/>
-          </a:xfrm>
-          <a:prstGeom prst="rect">
-            <a:avLst/>
-          </a:prstGeom>
-          <a:noFill/>
-        </p:spPr>
-        <p:txBody>
-          <a:bodyPr wrap="square" anchor="t" lIns="45720" rIns="45720" tIns="18288" bIns="18288">
-            <a:spAutoFit/>
-          </a:bodyPr>
-          <a:lstStyle/>
-          <a:p>
-            <a:pPr algn="ctr">
-              <a:lnSpc>
-                <a:spcPct val="120000"/>
-              </a:lnSpc>
-              <a:spcAft>
-                <a:spcPts val="0"/>
-              </a:spcAft>
-              <a:defRPr sz="1800" b="1">
-                <a:solidFill>
-                  <a:srgbClr val="FFFFFF"/>
-                </a:solidFill>
-                <a:latin typeface="Calibri"/>
-              </a:defRPr>
-            </a:pPr>
-            <a:r>
-              <a:t>1</a:t>
-            </a:r>
-          </a:p>
-        </p:txBody>
-      </p:sp>
-      <p:sp>
-        <p:nvSpPr>
-          <p:cNvPr id="9" name="TextBox 8"/>
-          <p:cNvSpPr txBox="1"/>
-          <p:nvPr/>
-        </p:nvSpPr>
-        <p:spPr>
-          <a:xfrm>
-            <a:off x="1280160" y="1325880"/>
-            <a:ext cx="10515600" cy="320040"/>
+          <p:cNvPr id="11" name="TextBox 10"/>
+          <p:cNvSpPr txBox="1"/>
+          <p:nvPr/>
+        </p:nvSpPr>
+        <p:spPr>
+          <a:xfrm>
+            <a:off x="914400" y="3246120"/>
+            <a:ext cx="4937760" cy="320040"/>
           </a:xfrm>
           <a:prstGeom prst="rect">
             <a:avLst/>
@@ -17835,29 +18081,29 @@
               <a:spcAft>
                 <a:spcPts val="0"/>
               </a:spcAft>
-              <a:defRPr sz="1700" b="1">
-                <a:solidFill>
-                  <a:srgbClr val="009FFD"/>
-                </a:solidFill>
-                <a:latin typeface="Calibri"/>
-              </a:defRPr>
-            </a:pPr>
-            <a:r>
-              <a:t>Telemetry gives the raw picture</a:t>
-            </a:r>
-          </a:p>
-        </p:txBody>
-      </p:sp>
-      <p:sp>
-        <p:nvSpPr>
-          <p:cNvPr id="10" name="TextBox 9"/>
-          <p:cNvSpPr txBox="1"/>
-          <p:nvPr/>
-        </p:nvSpPr>
-        <p:spPr>
-          <a:xfrm>
-            <a:off x="1280160" y="1673352"/>
-            <a:ext cx="10515600" cy="548640"/>
+              <a:defRPr sz="1600" b="1">
+                <a:solidFill>
+                  <a:srgbClr val="845EC2"/>
+                </a:solidFill>
+                <a:latin typeface="Calibri"/>
+              </a:defRPr>
+            </a:pPr>
+            <a:r>
+              <a:t>Scale and speed</a:t>
+            </a:r>
+          </a:p>
+        </p:txBody>
+      </p:sp>
+      <p:sp>
+        <p:nvSpPr>
+          <p:cNvPr id="12" name="TextBox 11"/>
+          <p:cNvSpPr txBox="1"/>
+          <p:nvPr/>
+        </p:nvSpPr>
+        <p:spPr>
+          <a:xfrm>
+            <a:off x="914400" y="3611880"/>
+            <a:ext cx="4937760" cy="685800"/>
           </a:xfrm>
           <a:prstGeom prst="rect">
             <a:avLst/>
@@ -17877,7 +18123,7 @@
               <a:spcAft>
                 <a:spcPts val="0"/>
               </a:spcAft>
-              <a:defRPr sz="1400" b="0">
+              <a:defRPr sz="1200" b="0">
                 <a:solidFill>
                   <a:srgbClr val="CCCCCC"/>
                 </a:solidFill>
@@ -17885,30 +18131,32 @@
               </a:defRPr>
             </a:pPr>
             <a:r>
-              <a:t>It tells us what the network is doing right now through streams of measurements and events.</a:t>
-            </a:r>
-          </a:p>
-        </p:txBody>
-      </p:sp>
-      <p:sp>
-        <p:nvSpPr>
-          <p:cNvPr id="11" name="Oval 10"/>
+              <a:t>Models must handle massive telemetry streams quickly enough to matter.</a:t>
+            </a:r>
+          </a:p>
+        </p:txBody>
+      </p:sp>
+      <p:sp>
+        <p:nvSpPr>
+          <p:cNvPr id="13" name="Rounded Rectangle 12"/>
           <p:cNvSpPr/>
           <p:nvPr/>
         </p:nvSpPr>
         <p:spPr>
           <a:xfrm>
-            <a:off x="685800" y="2331720"/>
-            <a:ext cx="384048" cy="384048"/>
-          </a:xfrm>
-          <a:prstGeom prst="ellipse">
+            <a:off x="731520" y="4663440"/>
+            <a:ext cx="5303520" cy="1325880"/>
+          </a:xfrm>
+          <a:prstGeom prst="roundRect">
             <a:avLst/>
           </a:prstGeom>
           <a:solidFill>
-            <a:srgbClr val="00C9A7"/>
+            <a:srgbClr val="141832"/>
           </a:solidFill>
-          <a:ln>
-            <a:noFill/>
+          <a:ln w="15240">
+            <a:solidFill>
+              <a:srgbClr val="845EC2"/>
+            </a:solidFill>
           </a:ln>
         </p:spPr>
         <p:style>
@@ -17935,56 +18183,14 @@
       </p:sp>
       <p:sp>
         <p:nvSpPr>
-          <p:cNvPr id="12" name="TextBox 11"/>
-          <p:cNvSpPr txBox="1"/>
-          <p:nvPr/>
-        </p:nvSpPr>
-        <p:spPr>
-          <a:xfrm>
-            <a:off x="685800" y="2359152"/>
-            <a:ext cx="384048" cy="347472"/>
-          </a:xfrm>
-          <a:prstGeom prst="rect">
-            <a:avLst/>
-          </a:prstGeom>
-          <a:noFill/>
-        </p:spPr>
-        <p:txBody>
-          <a:bodyPr wrap="square" anchor="t" lIns="45720" rIns="45720" tIns="18288" bIns="18288">
-            <a:spAutoFit/>
-          </a:bodyPr>
-          <a:lstStyle/>
-          <a:p>
-            <a:pPr algn="ctr">
-              <a:lnSpc>
-                <a:spcPct val="120000"/>
-              </a:lnSpc>
-              <a:spcAft>
-                <a:spcPts val="0"/>
-              </a:spcAft>
-              <a:defRPr sz="1800" b="1">
-                <a:solidFill>
-                  <a:srgbClr val="FFFFFF"/>
-                </a:solidFill>
-                <a:latin typeface="Calibri"/>
-              </a:defRPr>
-            </a:pPr>
-            <a:r>
-              <a:t>2</a:t>
-            </a:r>
-          </a:p>
-        </p:txBody>
-      </p:sp>
-      <p:sp>
-        <p:nvSpPr>
-          <p:cNvPr id="13" name="TextBox 12"/>
-          <p:cNvSpPr txBox="1"/>
-          <p:nvPr/>
-        </p:nvSpPr>
-        <p:spPr>
-          <a:xfrm>
-            <a:off x="1280160" y="2313432"/>
-            <a:ext cx="10515600" cy="320040"/>
+          <p:cNvPr id="14" name="TextBox 13"/>
+          <p:cNvSpPr txBox="1"/>
+          <p:nvPr/>
+        </p:nvSpPr>
+        <p:spPr>
+          <a:xfrm>
+            <a:off x="914400" y="4800600"/>
+            <a:ext cx="4937760" cy="320040"/>
           </a:xfrm>
           <a:prstGeom prst="rect">
             <a:avLst/>
@@ -18004,29 +18210,29 @@
               <a:spcAft>
                 <a:spcPts val="0"/>
               </a:spcAft>
-              <a:defRPr sz="1700" b="1">
-                <a:solidFill>
-                  <a:srgbClr val="00C9A7"/>
-                </a:solidFill>
-                <a:latin typeface="Calibri"/>
-              </a:defRPr>
-            </a:pPr>
-            <a:r>
-              <a:t>ML helps turn data into decisions</a:t>
-            </a:r>
-          </a:p>
-        </p:txBody>
-      </p:sp>
-      <p:sp>
-        <p:nvSpPr>
-          <p:cNvPr id="14" name="TextBox 13"/>
-          <p:cNvSpPr txBox="1"/>
-          <p:nvPr/>
-        </p:nvSpPr>
-        <p:spPr>
-          <a:xfrm>
-            <a:off x="1280160" y="2660904"/>
-            <a:ext cx="10515600" cy="548640"/>
+              <a:defRPr sz="1600" b="1">
+                <a:solidFill>
+                  <a:srgbClr val="845EC2"/>
+                </a:solidFill>
+                <a:latin typeface="Calibri"/>
+              </a:defRPr>
+            </a:pPr>
+            <a:r>
+              <a:t>Explainability</a:t>
+            </a:r>
+          </a:p>
+        </p:txBody>
+      </p:sp>
+      <p:sp>
+        <p:nvSpPr>
+          <p:cNvPr id="15" name="TextBox 14"/>
+          <p:cNvSpPr txBox="1"/>
+          <p:nvPr/>
+        </p:nvSpPr>
+        <p:spPr>
+          <a:xfrm>
+            <a:off x="914400" y="5166360"/>
+            <a:ext cx="4937760" cy="685800"/>
           </a:xfrm>
           <a:prstGeom prst="rect">
             <a:avLst/>
@@ -18046,7 +18252,7 @@
               <a:spcAft>
                 <a:spcPts val="0"/>
               </a:spcAft>
-              <a:defRPr sz="1400" b="0">
+              <a:defRPr sz="1200" b="0">
                 <a:solidFill>
                   <a:srgbClr val="CCCCCC"/>
                 </a:solidFill>
@@ -18054,30 +18260,32 @@
               </a:defRPr>
             </a:pPr>
             <a:r>
-              <a:t>It can find anomalies, predict future performance, and help improve QoS.</a:t>
-            </a:r>
-          </a:p>
-        </p:txBody>
-      </p:sp>
-      <p:sp>
-        <p:nvSpPr>
-          <p:cNvPr id="15" name="Oval 14"/>
+              <a:t>Operators need to know why a model raised an alert before they trust it.</a:t>
+            </a:r>
+          </a:p>
+        </p:txBody>
+      </p:sp>
+      <p:sp>
+        <p:nvSpPr>
+          <p:cNvPr id="16" name="Rounded Rectangle 15"/>
           <p:cNvSpPr/>
           <p:nvPr/>
         </p:nvSpPr>
         <p:spPr>
           <a:xfrm>
-            <a:off x="685800" y="3319272"/>
-            <a:ext cx="384048" cy="384048"/>
-          </a:xfrm>
-          <a:prstGeom prst="ellipse">
+            <a:off x="6492240" y="1554480"/>
+            <a:ext cx="5303520" cy="1325880"/>
+          </a:xfrm>
+          <a:prstGeom prst="roundRect">
             <a:avLst/>
           </a:prstGeom>
           <a:solidFill>
-            <a:srgbClr val="845EC2"/>
+            <a:srgbClr val="141832"/>
           </a:solidFill>
-          <a:ln>
-            <a:noFill/>
+          <a:ln w="15240">
+            <a:solidFill>
+              <a:srgbClr val="FF8C00"/>
+            </a:solidFill>
           </a:ln>
         </p:spPr>
         <p:style>
@@ -18104,56 +18312,14 @@
       </p:sp>
       <p:sp>
         <p:nvSpPr>
-          <p:cNvPr id="16" name="TextBox 15"/>
-          <p:cNvSpPr txBox="1"/>
-          <p:nvPr/>
-        </p:nvSpPr>
-        <p:spPr>
-          <a:xfrm>
-            <a:off x="685800" y="3346704"/>
-            <a:ext cx="384048" cy="347472"/>
-          </a:xfrm>
-          <a:prstGeom prst="rect">
-            <a:avLst/>
-          </a:prstGeom>
-          <a:noFill/>
-        </p:spPr>
-        <p:txBody>
-          <a:bodyPr wrap="square" anchor="t" lIns="45720" rIns="45720" tIns="18288" bIns="18288">
-            <a:spAutoFit/>
-          </a:bodyPr>
-          <a:lstStyle/>
-          <a:p>
-            <a:pPr algn="ctr">
-              <a:lnSpc>
-                <a:spcPct val="120000"/>
-              </a:lnSpc>
-              <a:spcAft>
-                <a:spcPts val="0"/>
-              </a:spcAft>
-              <a:defRPr sz="1800" b="1">
-                <a:solidFill>
-                  <a:srgbClr val="FFFFFF"/>
-                </a:solidFill>
-                <a:latin typeface="Calibri"/>
-              </a:defRPr>
-            </a:pPr>
-            <a:r>
-              <a:t>3</a:t>
-            </a:r>
-          </a:p>
-        </p:txBody>
-      </p:sp>
-      <p:sp>
-        <p:nvSpPr>
           <p:cNvPr id="17" name="TextBox 16"/>
           <p:cNvSpPr txBox="1"/>
           <p:nvPr/>
         </p:nvSpPr>
         <p:spPr>
           <a:xfrm>
-            <a:off x="1280160" y="3300984"/>
-            <a:ext cx="10515600" cy="320040"/>
+            <a:off x="6675120" y="1691640"/>
+            <a:ext cx="4937760" cy="320040"/>
           </a:xfrm>
           <a:prstGeom prst="rect">
             <a:avLst/>
@@ -18173,15 +18339,15 @@
               <a:spcAft>
                 <a:spcPts val="0"/>
               </a:spcAft>
-              <a:defRPr sz="1700" b="1">
-                <a:solidFill>
-                  <a:srgbClr val="845EC2"/>
-                </a:solidFill>
-                <a:latin typeface="Calibri"/>
-              </a:defRPr>
-            </a:pPr>
-            <a:r>
-              <a:t>Industry is already using these ideas</a:t>
+              <a:defRPr sz="1600" b="1">
+                <a:solidFill>
+                  <a:srgbClr val="FF8C00"/>
+                </a:solidFill>
+                <a:latin typeface="Calibri"/>
+              </a:defRPr>
+            </a:pPr>
+            <a:r>
+              <a:t>Concept drift</a:t>
             </a:r>
           </a:p>
         </p:txBody>
@@ -18194,8 +18360,8 @@
         </p:nvSpPr>
         <p:spPr>
           <a:xfrm>
-            <a:off x="1280160" y="3648456"/>
-            <a:ext cx="10515600" cy="548640"/>
+            <a:off x="6675120" y="2057400"/>
+            <a:ext cx="4937760" cy="685800"/>
           </a:xfrm>
           <a:prstGeom prst="rect">
             <a:avLst/>
@@ -18215,7 +18381,7 @@
               <a:spcAft>
                 <a:spcPts val="0"/>
               </a:spcAft>
-              <a:defRPr sz="1400" b="0">
+              <a:defRPr sz="1200" b="0">
                 <a:solidFill>
                   <a:srgbClr val="CCCCCC"/>
                 </a:solidFill>
@@ -18223,30 +18389,32 @@
               </a:defRPr>
             </a:pPr>
             <a:r>
-              <a:t>Companies such as Nokia and Ericsson are building more automated, ML-driven telemetry systems.</a:t>
-            </a:r>
-          </a:p>
-        </p:txBody>
-      </p:sp>
-      <p:sp>
-        <p:nvSpPr>
-          <p:cNvPr id="19" name="Oval 18"/>
+              <a:t>Normal traffic changes over time, so models can become outdated.</a:t>
+            </a:r>
+          </a:p>
+        </p:txBody>
+      </p:sp>
+      <p:sp>
+        <p:nvSpPr>
+          <p:cNvPr id="19" name="Rounded Rectangle 18"/>
           <p:cNvSpPr/>
           <p:nvPr/>
         </p:nvSpPr>
         <p:spPr>
           <a:xfrm>
-            <a:off x="685800" y="4306824"/>
-            <a:ext cx="384048" cy="384048"/>
-          </a:xfrm>
-          <a:prstGeom prst="ellipse">
+            <a:off x="6492240" y="3108960"/>
+            <a:ext cx="5303520" cy="1325880"/>
+          </a:xfrm>
+          <a:prstGeom prst="roundRect">
             <a:avLst/>
           </a:prstGeom>
           <a:solidFill>
-            <a:srgbClr val="FF8C00"/>
+            <a:srgbClr val="141832"/>
           </a:solidFill>
-          <a:ln>
-            <a:noFill/>
+          <a:ln w="15240">
+            <a:solidFill>
+              <a:srgbClr val="FF8C00"/>
+            </a:solidFill>
           </a:ln>
         </p:spPr>
         <p:style>
@@ -18279,36 +18447,36 @@
         </p:nvSpPr>
         <p:spPr>
           <a:xfrm>
-            <a:off x="685800" y="4334256"/>
-            <a:ext cx="384048" cy="347472"/>
-          </a:xfrm>
-          <a:prstGeom prst="rect">
-            <a:avLst/>
-          </a:prstGeom>
-          <a:noFill/>
-        </p:spPr>
-        <p:txBody>
-          <a:bodyPr wrap="square" anchor="t" lIns="45720" rIns="45720" tIns="18288" bIns="18288">
-            <a:spAutoFit/>
-          </a:bodyPr>
-          <a:lstStyle/>
-          <a:p>
-            <a:pPr algn="ctr">
-              <a:lnSpc>
-                <a:spcPct val="120000"/>
-              </a:lnSpc>
-              <a:spcAft>
-                <a:spcPts val="0"/>
-              </a:spcAft>
-              <a:defRPr sz="1800" b="1">
-                <a:solidFill>
-                  <a:srgbClr val="FFFFFF"/>
-                </a:solidFill>
-                <a:latin typeface="Calibri"/>
-              </a:defRPr>
-            </a:pPr>
-            <a:r>
-              <a:t>4</a:t>
+            <a:off x="6675120" y="3246120"/>
+            <a:ext cx="4937760" cy="320040"/>
+          </a:xfrm>
+          <a:prstGeom prst="rect">
+            <a:avLst/>
+          </a:prstGeom>
+          <a:noFill/>
+        </p:spPr>
+        <p:txBody>
+          <a:bodyPr wrap="square" anchor="t" lIns="45720" rIns="45720" tIns="18288" bIns="18288">
+            <a:spAutoFit/>
+          </a:bodyPr>
+          <a:lstStyle/>
+          <a:p>
+            <a:pPr algn="l">
+              <a:lnSpc>
+                <a:spcPct val="120000"/>
+              </a:lnSpc>
+              <a:spcAft>
+                <a:spcPts val="0"/>
+              </a:spcAft>
+              <a:defRPr sz="1600" b="1">
+                <a:solidFill>
+                  <a:srgbClr val="FF8C00"/>
+                </a:solidFill>
+                <a:latin typeface="Calibri"/>
+              </a:defRPr>
+            </a:pPr>
+            <a:r>
+              <a:t>Generalization</a:t>
             </a:r>
           </a:p>
         </p:txBody>
@@ -18321,8 +18489,8 @@
         </p:nvSpPr>
         <p:spPr>
           <a:xfrm>
-            <a:off x="1280160" y="4288536"/>
-            <a:ext cx="10515600" cy="320040"/>
+            <a:off x="6675120" y="3611880"/>
+            <a:ext cx="4937760" cy="685800"/>
           </a:xfrm>
           <a:prstGeom prst="rect">
             <a:avLst/>
@@ -18342,49 +18510,7 @@
               <a:spcAft>
                 <a:spcPts val="0"/>
               </a:spcAft>
-              <a:defRPr sz="1700" b="1">
-                <a:solidFill>
-                  <a:srgbClr val="FF8C00"/>
-                </a:solidFill>
-                <a:latin typeface="Calibri"/>
-              </a:defRPr>
-            </a:pPr>
-            <a:r>
-              <a:t>The field is still growing</a:t>
-            </a:r>
-          </a:p>
-        </p:txBody>
-      </p:sp>
-      <p:sp>
-        <p:nvSpPr>
-          <p:cNvPr id="22" name="TextBox 21"/>
-          <p:cNvSpPr txBox="1"/>
-          <p:nvPr/>
-        </p:nvSpPr>
-        <p:spPr>
-          <a:xfrm>
-            <a:off x="1280160" y="4636008"/>
-            <a:ext cx="10515600" cy="548640"/>
-          </a:xfrm>
-          <a:prstGeom prst="rect">
-            <a:avLst/>
-          </a:prstGeom>
-          <a:noFill/>
-        </p:spPr>
-        <p:txBody>
-          <a:bodyPr wrap="square" anchor="t" lIns="45720" rIns="45720" tIns="18288" bIns="18288">
-            <a:spAutoFit/>
-          </a:bodyPr>
-          <a:lstStyle/>
-          <a:p>
-            <a:pPr algn="l">
-              <a:lnSpc>
-                <a:spcPct val="120000"/>
-              </a:lnSpc>
-              <a:spcAft>
-                <a:spcPts val="0"/>
-              </a:spcAft>
-              <a:defRPr sz="1400" b="0">
+              <a:defRPr sz="1200" b="0">
                 <a:solidFill>
                   <a:srgbClr val="CCCCCC"/>
                 </a:solidFill>
@@ -18392,30 +18518,32 @@
               </a:defRPr>
             </a:pPr>
             <a:r>
-              <a:t>6G, digital twins, and generative AI may make telemetry smarter and easier to use.</a:t>
-            </a:r>
-          </a:p>
-        </p:txBody>
-      </p:sp>
-      <p:sp>
-        <p:nvSpPr>
-          <p:cNvPr id="23" name="Oval 22"/>
+              <a:t>A model that works well in one network may fail in another.</a:t>
+            </a:r>
+          </a:p>
+        </p:txBody>
+      </p:sp>
+      <p:sp>
+        <p:nvSpPr>
+          <p:cNvPr id="22" name="Rounded Rectangle 21"/>
           <p:cNvSpPr/>
           <p:nvPr/>
         </p:nvSpPr>
         <p:spPr>
           <a:xfrm>
-            <a:off x="685800" y="5294376"/>
-            <a:ext cx="384048" cy="384048"/>
-          </a:xfrm>
-          <a:prstGeom prst="ellipse">
+            <a:off x="6492240" y="4663440"/>
+            <a:ext cx="5303520" cy="1325880"/>
+          </a:xfrm>
+          <a:prstGeom prst="roundRect">
             <a:avLst/>
           </a:prstGeom>
           <a:solidFill>
-            <a:srgbClr val="E04040"/>
+            <a:srgbClr val="141832"/>
           </a:solidFill>
-          <a:ln>
-            <a:noFill/>
+          <a:ln w="15240">
+            <a:solidFill>
+              <a:srgbClr val="FF8C00"/>
+            </a:solidFill>
           </a:ln>
         </p:spPr>
         <p:style>
@@ -18442,42 +18570,84 @@
       </p:sp>
       <p:sp>
         <p:nvSpPr>
+          <p:cNvPr id="23" name="TextBox 22"/>
+          <p:cNvSpPr txBox="1"/>
+          <p:nvPr/>
+        </p:nvSpPr>
+        <p:spPr>
+          <a:xfrm>
+            <a:off x="6675120" y="4800600"/>
+            <a:ext cx="4937760" cy="320040"/>
+          </a:xfrm>
+          <a:prstGeom prst="rect">
+            <a:avLst/>
+          </a:prstGeom>
+          <a:noFill/>
+        </p:spPr>
+        <p:txBody>
+          <a:bodyPr wrap="square" anchor="t" lIns="45720" rIns="45720" tIns="18288" bIns="18288">
+            <a:spAutoFit/>
+          </a:bodyPr>
+          <a:lstStyle/>
+          <a:p>
+            <a:pPr algn="l">
+              <a:lnSpc>
+                <a:spcPct val="120000"/>
+              </a:lnSpc>
+              <a:spcAft>
+                <a:spcPts val="0"/>
+              </a:spcAft>
+              <a:defRPr sz="1600" b="1">
+                <a:solidFill>
+                  <a:srgbClr val="FF8C00"/>
+                </a:solidFill>
+                <a:latin typeface="Calibri"/>
+              </a:defRPr>
+            </a:pPr>
+            <a:r>
+              <a:t>Privacy and security</a:t>
+            </a:r>
+          </a:p>
+        </p:txBody>
+      </p:sp>
+      <p:sp>
+        <p:nvSpPr>
           <p:cNvPr id="24" name="TextBox 23"/>
           <p:cNvSpPr txBox="1"/>
           <p:nvPr/>
         </p:nvSpPr>
         <p:spPr>
           <a:xfrm>
-            <a:off x="685800" y="5321808"/>
-            <a:ext cx="384048" cy="347472"/>
-          </a:xfrm>
-          <a:prstGeom prst="rect">
-            <a:avLst/>
-          </a:prstGeom>
-          <a:noFill/>
-        </p:spPr>
-        <p:txBody>
-          <a:bodyPr wrap="square" anchor="t" lIns="45720" rIns="45720" tIns="18288" bIns="18288">
-            <a:spAutoFit/>
-          </a:bodyPr>
-          <a:lstStyle/>
-          <a:p>
-            <a:pPr algn="ctr">
-              <a:lnSpc>
-                <a:spcPct val="120000"/>
-              </a:lnSpc>
-              <a:spcAft>
-                <a:spcPts val="0"/>
-              </a:spcAft>
-              <a:defRPr sz="1800" b="1">
-                <a:solidFill>
-                  <a:srgbClr val="FFFFFF"/>
-                </a:solidFill>
-                <a:latin typeface="Calibri"/>
-              </a:defRPr>
-            </a:pPr>
-            <a:r>
-              <a:t>5</a:t>
+            <a:off x="6675120" y="5166360"/>
+            <a:ext cx="4937760" cy="685800"/>
+          </a:xfrm>
+          <a:prstGeom prst="rect">
+            <a:avLst/>
+          </a:prstGeom>
+          <a:noFill/>
+        </p:spPr>
+        <p:txBody>
+          <a:bodyPr wrap="square" anchor="t" lIns="45720" rIns="45720" tIns="18288" bIns="18288">
+            <a:spAutoFit/>
+          </a:bodyPr>
+          <a:lstStyle/>
+          <a:p>
+            <a:pPr algn="l">
+              <a:lnSpc>
+                <a:spcPct val="120000"/>
+              </a:lnSpc>
+              <a:spcAft>
+                <a:spcPts val="0"/>
+              </a:spcAft>
+              <a:defRPr sz="1200" b="0">
+                <a:solidFill>
+                  <a:srgbClr val="CCCCCC"/>
+                </a:solidFill>
+                <a:latin typeface="Calibri"/>
+              </a:defRPr>
+            </a:pPr>
+            <a:r>
+              <a:t>Telemetry can contain sensitive information that must be protected.</a:t>
             </a:r>
           </a:p>
         </p:txBody>
@@ -18485,90 +18655,6 @@
       <p:sp>
         <p:nvSpPr>
           <p:cNvPr id="25" name="TextBox 24"/>
-          <p:cNvSpPr txBox="1"/>
-          <p:nvPr/>
-        </p:nvSpPr>
-        <p:spPr>
-          <a:xfrm>
-            <a:off x="1280160" y="5276088"/>
-            <a:ext cx="10515600" cy="320040"/>
-          </a:xfrm>
-          <a:prstGeom prst="rect">
-            <a:avLst/>
-          </a:prstGeom>
-          <a:noFill/>
-        </p:spPr>
-        <p:txBody>
-          <a:bodyPr wrap="square" anchor="t" lIns="45720" rIns="45720" tIns="18288" bIns="18288">
-            <a:spAutoFit/>
-          </a:bodyPr>
-          <a:lstStyle/>
-          <a:p>
-            <a:pPr algn="l">
-              <a:lnSpc>
-                <a:spcPct val="120000"/>
-              </a:lnSpc>
-              <a:spcAft>
-                <a:spcPts val="0"/>
-              </a:spcAft>
-              <a:defRPr sz="1700" b="1">
-                <a:solidFill>
-                  <a:srgbClr val="E04040"/>
-                </a:solidFill>
-                <a:latin typeface="Calibri"/>
-              </a:defRPr>
-            </a:pPr>
-            <a:r>
-              <a:t>The hardest part is deployment</a:t>
-            </a:r>
-          </a:p>
-        </p:txBody>
-      </p:sp>
-      <p:sp>
-        <p:nvSpPr>
-          <p:cNvPr id="26" name="TextBox 25"/>
-          <p:cNvSpPr txBox="1"/>
-          <p:nvPr/>
-        </p:nvSpPr>
-        <p:spPr>
-          <a:xfrm>
-            <a:off x="1280160" y="5623560"/>
-            <a:ext cx="10515600" cy="548640"/>
-          </a:xfrm>
-          <a:prstGeom prst="rect">
-            <a:avLst/>
-          </a:prstGeom>
-          <a:noFill/>
-        </p:spPr>
-        <p:txBody>
-          <a:bodyPr wrap="square" anchor="t" lIns="45720" rIns="45720" tIns="18288" bIns="18288">
-            <a:spAutoFit/>
-          </a:bodyPr>
-          <a:lstStyle/>
-          <a:p>
-            <a:pPr algn="l">
-              <a:lnSpc>
-                <a:spcPct val="120000"/>
-              </a:lnSpc>
-              <a:spcAft>
-                <a:spcPts val="0"/>
-              </a:spcAft>
-              <a:defRPr sz="1400" b="0">
-                <a:solidFill>
-                  <a:srgbClr val="CCCCCC"/>
-                </a:solidFill>
-                <a:latin typeface="Calibri"/>
-              </a:defRPr>
-            </a:pPr>
-            <a:r>
-              <a:t>Real-world success still depends on trustworthy models, good data, and systems that scale.</a:t>
-            </a:r>
-          </a:p>
-        </p:txBody>
-      </p:sp>
-      <p:sp>
-        <p:nvSpPr>
-          <p:cNvPr id="27" name="TextBox 26"/>
           <p:cNvSpPr txBox="1"/>
           <p:nvPr/>
         </p:nvSpPr>
@@ -18610,7 +18696,7 @@
       </p:sp>
       <p:sp>
         <p:nvSpPr>
-          <p:cNvPr id="28" name="TextBox 27"/>
+          <p:cNvPr id="26" name="TextBox 25"/>
           <p:cNvSpPr txBox="1"/>
           <p:nvPr/>
         </p:nvSpPr>
@@ -18645,7 +18731,7 @@
               </a:defRPr>
             </a:pPr>
             <a:r>
-              <a:t>23 / 25</a:t>
+              <a:t>23 / 26</a:t>
             </a:r>
           </a:p>
         </p:txBody>
@@ -18659,6 +18745,1173 @@
 </file>
 
 <file path=ppt/slides/slide24.xml><?xml version="1.0" encoding="utf-8"?>
+<p:sld xmlns:a="http://schemas.openxmlformats.org/drawingml/2006/main" xmlns:p="http://schemas.openxmlformats.org/presentationml/2006/main" xmlns:r="http://schemas.openxmlformats.org/officeDocument/2006/relationships">
+  <p:cSld>
+    <p:bg>
+      <p:bgPr>
+        <a:solidFill>
+          <a:srgbClr val="1B1F3B"/>
+        </a:solidFill>
+        <a:effectLst/>
+      </p:bgPr>
+    </p:bg>
+    <p:spTree>
+      <p:nvGrpSpPr>
+        <p:cNvPr id="1" name=""/>
+        <p:cNvGrpSpPr/>
+        <p:nvPr/>
+      </p:nvGrpSpPr>
+      <p:grpSpPr/>
+      <p:sp>
+        <p:nvSpPr>
+          <p:cNvPr id="2" name="Rectangle 1"/>
+          <p:cNvSpPr/>
+          <p:nvPr/>
+        </p:nvSpPr>
+        <p:spPr>
+          <a:xfrm>
+            <a:off x="0" y="0"/>
+            <a:ext cx="12191695" cy="91440"/>
+          </a:xfrm>
+          <a:prstGeom prst="rect">
+            <a:avLst/>
+          </a:prstGeom>
+          <a:solidFill>
+            <a:srgbClr val="00C9A7"/>
+          </a:solidFill>
+          <a:ln>
+            <a:noFill/>
+          </a:ln>
+        </p:spPr>
+        <p:style>
+          <a:lnRef idx="1">
+            <a:schemeClr val="accent1"/>
+          </a:lnRef>
+          <a:fillRef idx="3">
+            <a:schemeClr val="accent1"/>
+          </a:fillRef>
+          <a:effectRef idx="2">
+            <a:schemeClr val="accent1"/>
+          </a:effectRef>
+          <a:fontRef idx="minor">
+            <a:schemeClr val="lt1"/>
+          </a:fontRef>
+        </p:style>
+        <p:txBody>
+          <a:bodyPr rtlCol="0" anchor="ctr"/>
+          <a:lstStyle/>
+          <a:p>
+            <a:pPr algn="ctr"/>
+          </a:p>
+        </p:txBody>
+      </p:sp>
+      <p:sp>
+        <p:nvSpPr>
+          <p:cNvPr id="3" name="Rectangle 2"/>
+          <p:cNvSpPr/>
+          <p:nvPr/>
+        </p:nvSpPr>
+        <p:spPr>
+          <a:xfrm>
+            <a:off x="0" y="6784848"/>
+            <a:ext cx="12191695" cy="73152"/>
+          </a:xfrm>
+          <a:prstGeom prst="rect">
+            <a:avLst/>
+          </a:prstGeom>
+          <a:solidFill>
+            <a:srgbClr val="009FFD"/>
+          </a:solidFill>
+          <a:ln>
+            <a:noFill/>
+          </a:ln>
+        </p:spPr>
+        <p:style>
+          <a:lnRef idx="1">
+            <a:schemeClr val="accent1"/>
+          </a:lnRef>
+          <a:fillRef idx="3">
+            <a:schemeClr val="accent1"/>
+          </a:fillRef>
+          <a:effectRef idx="2">
+            <a:schemeClr val="accent1"/>
+          </a:effectRef>
+          <a:fontRef idx="minor">
+            <a:schemeClr val="lt1"/>
+          </a:fontRef>
+        </p:style>
+        <p:txBody>
+          <a:bodyPr rtlCol="0" anchor="ctr"/>
+          <a:lstStyle/>
+          <a:p>
+            <a:pPr algn="ctr"/>
+          </a:p>
+        </p:txBody>
+      </p:sp>
+      <p:sp>
+        <p:nvSpPr>
+          <p:cNvPr id="4" name="TextBox 3"/>
+          <p:cNvSpPr txBox="1"/>
+          <p:nvPr/>
+        </p:nvSpPr>
+        <p:spPr>
+          <a:xfrm>
+            <a:off x="731520" y="365760"/>
+            <a:ext cx="10515600" cy="640080"/>
+          </a:xfrm>
+          <a:prstGeom prst="rect">
+            <a:avLst/>
+          </a:prstGeom>
+          <a:noFill/>
+        </p:spPr>
+        <p:txBody>
+          <a:bodyPr wrap="square" anchor="t" lIns="45720" rIns="45720" tIns="18288" bIns="18288">
+            <a:spAutoFit/>
+          </a:bodyPr>
+          <a:lstStyle/>
+          <a:p>
+            <a:pPr algn="l">
+              <a:lnSpc>
+                <a:spcPct val="120000"/>
+              </a:lnSpc>
+              <a:spcAft>
+                <a:spcPts val="0"/>
+              </a:spcAft>
+              <a:defRPr sz="3600" b="1">
+                <a:solidFill>
+                  <a:srgbClr val="FFFFFF"/>
+                </a:solidFill>
+                <a:latin typeface="Calibri"/>
+              </a:defRPr>
+            </a:pPr>
+            <a:r>
+              <a:t>Conclusion &amp; Key Takeaways</a:t>
+            </a:r>
+          </a:p>
+        </p:txBody>
+      </p:sp>
+      <p:sp>
+        <p:nvSpPr>
+          <p:cNvPr id="5" name="TextBox 4"/>
+          <p:cNvSpPr txBox="1"/>
+          <p:nvPr/>
+        </p:nvSpPr>
+        <p:spPr>
+          <a:xfrm>
+            <a:off x="731520" y="1024128"/>
+            <a:ext cx="10515600" cy="438912"/>
+          </a:xfrm>
+          <a:prstGeom prst="rect">
+            <a:avLst/>
+          </a:prstGeom>
+          <a:noFill/>
+        </p:spPr>
+        <p:txBody>
+          <a:bodyPr wrap="square" anchor="t" lIns="45720" rIns="45720" tIns="18288" bIns="18288">
+            <a:spAutoFit/>
+          </a:bodyPr>
+          <a:lstStyle/>
+          <a:p>
+            <a:pPr algn="l">
+              <a:lnSpc>
+                <a:spcPct val="120000"/>
+              </a:lnSpc>
+              <a:spcAft>
+                <a:spcPts val="0"/>
+              </a:spcAft>
+              <a:defRPr sz="1800" b="0">
+                <a:solidFill>
+                  <a:srgbClr val="CCCCCC"/>
+                </a:solidFill>
+                <a:latin typeface="Calibri"/>
+              </a:defRPr>
+            </a:pPr>
+            <a:r>
+              <a:t>A cleaner final summary</a:t>
+            </a:r>
+          </a:p>
+        </p:txBody>
+      </p:sp>
+      <p:sp>
+        <p:nvSpPr>
+          <p:cNvPr id="6" name="TextBox 5"/>
+          <p:cNvSpPr txBox="1"/>
+          <p:nvPr/>
+        </p:nvSpPr>
+        <p:spPr>
+          <a:xfrm>
+            <a:off x="9326880" y="6263640"/>
+            <a:ext cx="2743200" cy="457200"/>
+          </a:xfrm>
+          <a:prstGeom prst="rect">
+            <a:avLst/>
+          </a:prstGeom>
+          <a:noFill/>
+        </p:spPr>
+        <p:txBody>
+          <a:bodyPr wrap="square" anchor="t" lIns="45720" rIns="45720" tIns="18288" bIns="18288">
+            <a:spAutoFit/>
+          </a:bodyPr>
+          <a:lstStyle/>
+          <a:p>
+            <a:pPr algn="r">
+              <a:lnSpc>
+                <a:spcPct val="120000"/>
+              </a:lnSpc>
+              <a:spcAft>
+                <a:spcPts val="0"/>
+              </a:spcAft>
+              <a:defRPr sz="1200" b="1">
+                <a:solidFill>
+                  <a:srgbClr val="009FFD"/>
+                </a:solidFill>
+                <a:latin typeface="Calibri"/>
+              </a:defRPr>
+            </a:pPr>
+            <a:r>
+              <a:t>Presenter: Hashim Kshim</a:t>
+            </a:r>
+          </a:p>
+        </p:txBody>
+      </p:sp>
+      <p:sp>
+        <p:nvSpPr>
+          <p:cNvPr id="7" name="Oval 6"/>
+          <p:cNvSpPr/>
+          <p:nvPr/>
+        </p:nvSpPr>
+        <p:spPr>
+          <a:xfrm>
+            <a:off x="685800" y="1344168"/>
+            <a:ext cx="384048" cy="384048"/>
+          </a:xfrm>
+          <a:prstGeom prst="ellipse">
+            <a:avLst/>
+          </a:prstGeom>
+          <a:solidFill>
+            <a:srgbClr val="009FFD"/>
+          </a:solidFill>
+          <a:ln>
+            <a:noFill/>
+          </a:ln>
+        </p:spPr>
+        <p:style>
+          <a:lnRef idx="1">
+            <a:schemeClr val="accent1"/>
+          </a:lnRef>
+          <a:fillRef idx="3">
+            <a:schemeClr val="accent1"/>
+          </a:fillRef>
+          <a:effectRef idx="2">
+            <a:schemeClr val="accent1"/>
+          </a:effectRef>
+          <a:fontRef idx="minor">
+            <a:schemeClr val="lt1"/>
+          </a:fontRef>
+        </p:style>
+        <p:txBody>
+          <a:bodyPr rtlCol="0" anchor="ctr"/>
+          <a:lstStyle/>
+          <a:p>
+            <a:pPr algn="ctr"/>
+          </a:p>
+        </p:txBody>
+      </p:sp>
+      <p:sp>
+        <p:nvSpPr>
+          <p:cNvPr id="8" name="TextBox 7"/>
+          <p:cNvSpPr txBox="1"/>
+          <p:nvPr/>
+        </p:nvSpPr>
+        <p:spPr>
+          <a:xfrm>
+            <a:off x="685800" y="1371600"/>
+            <a:ext cx="384048" cy="347472"/>
+          </a:xfrm>
+          <a:prstGeom prst="rect">
+            <a:avLst/>
+          </a:prstGeom>
+          <a:noFill/>
+        </p:spPr>
+        <p:txBody>
+          <a:bodyPr wrap="square" anchor="t" lIns="45720" rIns="45720" tIns="18288" bIns="18288">
+            <a:spAutoFit/>
+          </a:bodyPr>
+          <a:lstStyle/>
+          <a:p>
+            <a:pPr algn="ctr">
+              <a:lnSpc>
+                <a:spcPct val="120000"/>
+              </a:lnSpc>
+              <a:spcAft>
+                <a:spcPts val="0"/>
+              </a:spcAft>
+              <a:defRPr sz="1800" b="1">
+                <a:solidFill>
+                  <a:srgbClr val="FFFFFF"/>
+                </a:solidFill>
+                <a:latin typeface="Calibri"/>
+              </a:defRPr>
+            </a:pPr>
+            <a:r>
+              <a:t>1</a:t>
+            </a:r>
+          </a:p>
+        </p:txBody>
+      </p:sp>
+      <p:sp>
+        <p:nvSpPr>
+          <p:cNvPr id="9" name="TextBox 8"/>
+          <p:cNvSpPr txBox="1"/>
+          <p:nvPr/>
+        </p:nvSpPr>
+        <p:spPr>
+          <a:xfrm>
+            <a:off x="1280160" y="1325880"/>
+            <a:ext cx="10515600" cy="320040"/>
+          </a:xfrm>
+          <a:prstGeom prst="rect">
+            <a:avLst/>
+          </a:prstGeom>
+          <a:noFill/>
+        </p:spPr>
+        <p:txBody>
+          <a:bodyPr wrap="square" anchor="t" lIns="45720" rIns="45720" tIns="18288" bIns="18288">
+            <a:spAutoFit/>
+          </a:bodyPr>
+          <a:lstStyle/>
+          <a:p>
+            <a:pPr algn="l">
+              <a:lnSpc>
+                <a:spcPct val="120000"/>
+              </a:lnSpc>
+              <a:spcAft>
+                <a:spcPts val="0"/>
+              </a:spcAft>
+              <a:defRPr sz="1700" b="1">
+                <a:solidFill>
+                  <a:srgbClr val="009FFD"/>
+                </a:solidFill>
+                <a:latin typeface="Calibri"/>
+              </a:defRPr>
+            </a:pPr>
+            <a:r>
+              <a:t>Telemetry gives the raw picture</a:t>
+            </a:r>
+          </a:p>
+        </p:txBody>
+      </p:sp>
+      <p:sp>
+        <p:nvSpPr>
+          <p:cNvPr id="10" name="TextBox 9"/>
+          <p:cNvSpPr txBox="1"/>
+          <p:nvPr/>
+        </p:nvSpPr>
+        <p:spPr>
+          <a:xfrm>
+            <a:off x="1280160" y="1673352"/>
+            <a:ext cx="10515600" cy="548640"/>
+          </a:xfrm>
+          <a:prstGeom prst="rect">
+            <a:avLst/>
+          </a:prstGeom>
+          <a:noFill/>
+        </p:spPr>
+        <p:txBody>
+          <a:bodyPr wrap="square" anchor="t" lIns="45720" rIns="45720" tIns="18288" bIns="18288">
+            <a:spAutoFit/>
+          </a:bodyPr>
+          <a:lstStyle/>
+          <a:p>
+            <a:pPr algn="l">
+              <a:lnSpc>
+                <a:spcPct val="120000"/>
+              </a:lnSpc>
+              <a:spcAft>
+                <a:spcPts val="0"/>
+              </a:spcAft>
+              <a:defRPr sz="1400" b="0">
+                <a:solidFill>
+                  <a:srgbClr val="CCCCCC"/>
+                </a:solidFill>
+                <a:latin typeface="Calibri"/>
+              </a:defRPr>
+            </a:pPr>
+            <a:r>
+              <a:t>It tells us what the network is doing right now through streams of measurements and events.</a:t>
+            </a:r>
+          </a:p>
+        </p:txBody>
+      </p:sp>
+      <p:sp>
+        <p:nvSpPr>
+          <p:cNvPr id="11" name="Oval 10"/>
+          <p:cNvSpPr/>
+          <p:nvPr/>
+        </p:nvSpPr>
+        <p:spPr>
+          <a:xfrm>
+            <a:off x="685800" y="2331720"/>
+            <a:ext cx="384048" cy="384048"/>
+          </a:xfrm>
+          <a:prstGeom prst="ellipse">
+            <a:avLst/>
+          </a:prstGeom>
+          <a:solidFill>
+            <a:srgbClr val="00C9A7"/>
+          </a:solidFill>
+          <a:ln>
+            <a:noFill/>
+          </a:ln>
+        </p:spPr>
+        <p:style>
+          <a:lnRef idx="1">
+            <a:schemeClr val="accent1"/>
+          </a:lnRef>
+          <a:fillRef idx="3">
+            <a:schemeClr val="accent1"/>
+          </a:fillRef>
+          <a:effectRef idx="2">
+            <a:schemeClr val="accent1"/>
+          </a:effectRef>
+          <a:fontRef idx="minor">
+            <a:schemeClr val="lt1"/>
+          </a:fontRef>
+        </p:style>
+        <p:txBody>
+          <a:bodyPr rtlCol="0" anchor="ctr"/>
+          <a:lstStyle/>
+          <a:p>
+            <a:pPr algn="ctr"/>
+          </a:p>
+        </p:txBody>
+      </p:sp>
+      <p:sp>
+        <p:nvSpPr>
+          <p:cNvPr id="12" name="TextBox 11"/>
+          <p:cNvSpPr txBox="1"/>
+          <p:nvPr/>
+        </p:nvSpPr>
+        <p:spPr>
+          <a:xfrm>
+            <a:off x="685800" y="2359152"/>
+            <a:ext cx="384048" cy="347472"/>
+          </a:xfrm>
+          <a:prstGeom prst="rect">
+            <a:avLst/>
+          </a:prstGeom>
+          <a:noFill/>
+        </p:spPr>
+        <p:txBody>
+          <a:bodyPr wrap="square" anchor="t" lIns="45720" rIns="45720" tIns="18288" bIns="18288">
+            <a:spAutoFit/>
+          </a:bodyPr>
+          <a:lstStyle/>
+          <a:p>
+            <a:pPr algn="ctr">
+              <a:lnSpc>
+                <a:spcPct val="120000"/>
+              </a:lnSpc>
+              <a:spcAft>
+                <a:spcPts val="0"/>
+              </a:spcAft>
+              <a:defRPr sz="1800" b="1">
+                <a:solidFill>
+                  <a:srgbClr val="FFFFFF"/>
+                </a:solidFill>
+                <a:latin typeface="Calibri"/>
+              </a:defRPr>
+            </a:pPr>
+            <a:r>
+              <a:t>2</a:t>
+            </a:r>
+          </a:p>
+        </p:txBody>
+      </p:sp>
+      <p:sp>
+        <p:nvSpPr>
+          <p:cNvPr id="13" name="TextBox 12"/>
+          <p:cNvSpPr txBox="1"/>
+          <p:nvPr/>
+        </p:nvSpPr>
+        <p:spPr>
+          <a:xfrm>
+            <a:off x="1280160" y="2313432"/>
+            <a:ext cx="10515600" cy="320040"/>
+          </a:xfrm>
+          <a:prstGeom prst="rect">
+            <a:avLst/>
+          </a:prstGeom>
+          <a:noFill/>
+        </p:spPr>
+        <p:txBody>
+          <a:bodyPr wrap="square" anchor="t" lIns="45720" rIns="45720" tIns="18288" bIns="18288">
+            <a:spAutoFit/>
+          </a:bodyPr>
+          <a:lstStyle/>
+          <a:p>
+            <a:pPr algn="l">
+              <a:lnSpc>
+                <a:spcPct val="120000"/>
+              </a:lnSpc>
+              <a:spcAft>
+                <a:spcPts val="0"/>
+              </a:spcAft>
+              <a:defRPr sz="1700" b="1">
+                <a:solidFill>
+                  <a:srgbClr val="00C9A7"/>
+                </a:solidFill>
+                <a:latin typeface="Calibri"/>
+              </a:defRPr>
+            </a:pPr>
+            <a:r>
+              <a:t>ML helps turn data into decisions</a:t>
+            </a:r>
+          </a:p>
+        </p:txBody>
+      </p:sp>
+      <p:sp>
+        <p:nvSpPr>
+          <p:cNvPr id="14" name="TextBox 13"/>
+          <p:cNvSpPr txBox="1"/>
+          <p:nvPr/>
+        </p:nvSpPr>
+        <p:spPr>
+          <a:xfrm>
+            <a:off x="1280160" y="2660904"/>
+            <a:ext cx="10515600" cy="548640"/>
+          </a:xfrm>
+          <a:prstGeom prst="rect">
+            <a:avLst/>
+          </a:prstGeom>
+          <a:noFill/>
+        </p:spPr>
+        <p:txBody>
+          <a:bodyPr wrap="square" anchor="t" lIns="45720" rIns="45720" tIns="18288" bIns="18288">
+            <a:spAutoFit/>
+          </a:bodyPr>
+          <a:lstStyle/>
+          <a:p>
+            <a:pPr algn="l">
+              <a:lnSpc>
+                <a:spcPct val="120000"/>
+              </a:lnSpc>
+              <a:spcAft>
+                <a:spcPts val="0"/>
+              </a:spcAft>
+              <a:defRPr sz="1400" b="0">
+                <a:solidFill>
+                  <a:srgbClr val="CCCCCC"/>
+                </a:solidFill>
+                <a:latin typeface="Calibri"/>
+              </a:defRPr>
+            </a:pPr>
+            <a:r>
+              <a:t>It can find anomalies, predict future performance, and help improve QoS.</a:t>
+            </a:r>
+          </a:p>
+        </p:txBody>
+      </p:sp>
+      <p:sp>
+        <p:nvSpPr>
+          <p:cNvPr id="15" name="Oval 14"/>
+          <p:cNvSpPr/>
+          <p:nvPr/>
+        </p:nvSpPr>
+        <p:spPr>
+          <a:xfrm>
+            <a:off x="685800" y="3319272"/>
+            <a:ext cx="384048" cy="384048"/>
+          </a:xfrm>
+          <a:prstGeom prst="ellipse">
+            <a:avLst/>
+          </a:prstGeom>
+          <a:solidFill>
+            <a:srgbClr val="845EC2"/>
+          </a:solidFill>
+          <a:ln>
+            <a:noFill/>
+          </a:ln>
+        </p:spPr>
+        <p:style>
+          <a:lnRef idx="1">
+            <a:schemeClr val="accent1"/>
+          </a:lnRef>
+          <a:fillRef idx="3">
+            <a:schemeClr val="accent1"/>
+          </a:fillRef>
+          <a:effectRef idx="2">
+            <a:schemeClr val="accent1"/>
+          </a:effectRef>
+          <a:fontRef idx="minor">
+            <a:schemeClr val="lt1"/>
+          </a:fontRef>
+        </p:style>
+        <p:txBody>
+          <a:bodyPr rtlCol="0" anchor="ctr"/>
+          <a:lstStyle/>
+          <a:p>
+            <a:pPr algn="ctr"/>
+          </a:p>
+        </p:txBody>
+      </p:sp>
+      <p:sp>
+        <p:nvSpPr>
+          <p:cNvPr id="16" name="TextBox 15"/>
+          <p:cNvSpPr txBox="1"/>
+          <p:nvPr/>
+        </p:nvSpPr>
+        <p:spPr>
+          <a:xfrm>
+            <a:off x="685800" y="3346704"/>
+            <a:ext cx="384048" cy="347472"/>
+          </a:xfrm>
+          <a:prstGeom prst="rect">
+            <a:avLst/>
+          </a:prstGeom>
+          <a:noFill/>
+        </p:spPr>
+        <p:txBody>
+          <a:bodyPr wrap="square" anchor="t" lIns="45720" rIns="45720" tIns="18288" bIns="18288">
+            <a:spAutoFit/>
+          </a:bodyPr>
+          <a:lstStyle/>
+          <a:p>
+            <a:pPr algn="ctr">
+              <a:lnSpc>
+                <a:spcPct val="120000"/>
+              </a:lnSpc>
+              <a:spcAft>
+                <a:spcPts val="0"/>
+              </a:spcAft>
+              <a:defRPr sz="1800" b="1">
+                <a:solidFill>
+                  <a:srgbClr val="FFFFFF"/>
+                </a:solidFill>
+                <a:latin typeface="Calibri"/>
+              </a:defRPr>
+            </a:pPr>
+            <a:r>
+              <a:t>3</a:t>
+            </a:r>
+          </a:p>
+        </p:txBody>
+      </p:sp>
+      <p:sp>
+        <p:nvSpPr>
+          <p:cNvPr id="17" name="TextBox 16"/>
+          <p:cNvSpPr txBox="1"/>
+          <p:nvPr/>
+        </p:nvSpPr>
+        <p:spPr>
+          <a:xfrm>
+            <a:off x="1280160" y="3300984"/>
+            <a:ext cx="10515600" cy="320040"/>
+          </a:xfrm>
+          <a:prstGeom prst="rect">
+            <a:avLst/>
+          </a:prstGeom>
+          <a:noFill/>
+        </p:spPr>
+        <p:txBody>
+          <a:bodyPr wrap="square" anchor="t" lIns="45720" rIns="45720" tIns="18288" bIns="18288">
+            <a:spAutoFit/>
+          </a:bodyPr>
+          <a:lstStyle/>
+          <a:p>
+            <a:pPr algn="l">
+              <a:lnSpc>
+                <a:spcPct val="120000"/>
+              </a:lnSpc>
+              <a:spcAft>
+                <a:spcPts val="0"/>
+              </a:spcAft>
+              <a:defRPr sz="1700" b="1">
+                <a:solidFill>
+                  <a:srgbClr val="845EC2"/>
+                </a:solidFill>
+                <a:latin typeface="Calibri"/>
+              </a:defRPr>
+            </a:pPr>
+            <a:r>
+              <a:t>Industry is already using these ideas</a:t>
+            </a:r>
+          </a:p>
+        </p:txBody>
+      </p:sp>
+      <p:sp>
+        <p:nvSpPr>
+          <p:cNvPr id="18" name="TextBox 17"/>
+          <p:cNvSpPr txBox="1"/>
+          <p:nvPr/>
+        </p:nvSpPr>
+        <p:spPr>
+          <a:xfrm>
+            <a:off x="1280160" y="3648456"/>
+            <a:ext cx="10515600" cy="548640"/>
+          </a:xfrm>
+          <a:prstGeom prst="rect">
+            <a:avLst/>
+          </a:prstGeom>
+          <a:noFill/>
+        </p:spPr>
+        <p:txBody>
+          <a:bodyPr wrap="square" anchor="t" lIns="45720" rIns="45720" tIns="18288" bIns="18288">
+            <a:spAutoFit/>
+          </a:bodyPr>
+          <a:lstStyle/>
+          <a:p>
+            <a:pPr algn="l">
+              <a:lnSpc>
+                <a:spcPct val="120000"/>
+              </a:lnSpc>
+              <a:spcAft>
+                <a:spcPts val="0"/>
+              </a:spcAft>
+              <a:defRPr sz="1400" b="0">
+                <a:solidFill>
+                  <a:srgbClr val="CCCCCC"/>
+                </a:solidFill>
+                <a:latin typeface="Calibri"/>
+              </a:defRPr>
+            </a:pPr>
+            <a:r>
+              <a:t>Companies such as Nokia and Ericsson are building more automated, ML-driven telemetry systems.</a:t>
+            </a:r>
+          </a:p>
+        </p:txBody>
+      </p:sp>
+      <p:sp>
+        <p:nvSpPr>
+          <p:cNvPr id="19" name="Oval 18"/>
+          <p:cNvSpPr/>
+          <p:nvPr/>
+        </p:nvSpPr>
+        <p:spPr>
+          <a:xfrm>
+            <a:off x="685800" y="4306824"/>
+            <a:ext cx="384048" cy="384048"/>
+          </a:xfrm>
+          <a:prstGeom prst="ellipse">
+            <a:avLst/>
+          </a:prstGeom>
+          <a:solidFill>
+            <a:srgbClr val="FF8C00"/>
+          </a:solidFill>
+          <a:ln>
+            <a:noFill/>
+          </a:ln>
+        </p:spPr>
+        <p:style>
+          <a:lnRef idx="1">
+            <a:schemeClr val="accent1"/>
+          </a:lnRef>
+          <a:fillRef idx="3">
+            <a:schemeClr val="accent1"/>
+          </a:fillRef>
+          <a:effectRef idx="2">
+            <a:schemeClr val="accent1"/>
+          </a:effectRef>
+          <a:fontRef idx="minor">
+            <a:schemeClr val="lt1"/>
+          </a:fontRef>
+        </p:style>
+        <p:txBody>
+          <a:bodyPr rtlCol="0" anchor="ctr"/>
+          <a:lstStyle/>
+          <a:p>
+            <a:pPr algn="ctr"/>
+          </a:p>
+        </p:txBody>
+      </p:sp>
+      <p:sp>
+        <p:nvSpPr>
+          <p:cNvPr id="20" name="TextBox 19"/>
+          <p:cNvSpPr txBox="1"/>
+          <p:nvPr/>
+        </p:nvSpPr>
+        <p:spPr>
+          <a:xfrm>
+            <a:off x="685800" y="4334256"/>
+            <a:ext cx="384048" cy="347472"/>
+          </a:xfrm>
+          <a:prstGeom prst="rect">
+            <a:avLst/>
+          </a:prstGeom>
+          <a:noFill/>
+        </p:spPr>
+        <p:txBody>
+          <a:bodyPr wrap="square" anchor="t" lIns="45720" rIns="45720" tIns="18288" bIns="18288">
+            <a:spAutoFit/>
+          </a:bodyPr>
+          <a:lstStyle/>
+          <a:p>
+            <a:pPr algn="ctr">
+              <a:lnSpc>
+                <a:spcPct val="120000"/>
+              </a:lnSpc>
+              <a:spcAft>
+                <a:spcPts val="0"/>
+              </a:spcAft>
+              <a:defRPr sz="1800" b="1">
+                <a:solidFill>
+                  <a:srgbClr val="FFFFFF"/>
+                </a:solidFill>
+                <a:latin typeface="Calibri"/>
+              </a:defRPr>
+            </a:pPr>
+            <a:r>
+              <a:t>4</a:t>
+            </a:r>
+          </a:p>
+        </p:txBody>
+      </p:sp>
+      <p:sp>
+        <p:nvSpPr>
+          <p:cNvPr id="21" name="TextBox 20"/>
+          <p:cNvSpPr txBox="1"/>
+          <p:nvPr/>
+        </p:nvSpPr>
+        <p:spPr>
+          <a:xfrm>
+            <a:off x="1280160" y="4288536"/>
+            <a:ext cx="10515600" cy="320040"/>
+          </a:xfrm>
+          <a:prstGeom prst="rect">
+            <a:avLst/>
+          </a:prstGeom>
+          <a:noFill/>
+        </p:spPr>
+        <p:txBody>
+          <a:bodyPr wrap="square" anchor="t" lIns="45720" rIns="45720" tIns="18288" bIns="18288">
+            <a:spAutoFit/>
+          </a:bodyPr>
+          <a:lstStyle/>
+          <a:p>
+            <a:pPr algn="l">
+              <a:lnSpc>
+                <a:spcPct val="120000"/>
+              </a:lnSpc>
+              <a:spcAft>
+                <a:spcPts val="0"/>
+              </a:spcAft>
+              <a:defRPr sz="1700" b="1">
+                <a:solidFill>
+                  <a:srgbClr val="FF8C00"/>
+                </a:solidFill>
+                <a:latin typeface="Calibri"/>
+              </a:defRPr>
+            </a:pPr>
+            <a:r>
+              <a:t>The field is still growing</a:t>
+            </a:r>
+          </a:p>
+        </p:txBody>
+      </p:sp>
+      <p:sp>
+        <p:nvSpPr>
+          <p:cNvPr id="22" name="TextBox 21"/>
+          <p:cNvSpPr txBox="1"/>
+          <p:nvPr/>
+        </p:nvSpPr>
+        <p:spPr>
+          <a:xfrm>
+            <a:off x="1280160" y="4636008"/>
+            <a:ext cx="10515600" cy="548640"/>
+          </a:xfrm>
+          <a:prstGeom prst="rect">
+            <a:avLst/>
+          </a:prstGeom>
+          <a:noFill/>
+        </p:spPr>
+        <p:txBody>
+          <a:bodyPr wrap="square" anchor="t" lIns="45720" rIns="45720" tIns="18288" bIns="18288">
+            <a:spAutoFit/>
+          </a:bodyPr>
+          <a:lstStyle/>
+          <a:p>
+            <a:pPr algn="l">
+              <a:lnSpc>
+                <a:spcPct val="120000"/>
+              </a:lnSpc>
+              <a:spcAft>
+                <a:spcPts val="0"/>
+              </a:spcAft>
+              <a:defRPr sz="1400" b="0">
+                <a:solidFill>
+                  <a:srgbClr val="CCCCCC"/>
+                </a:solidFill>
+                <a:latin typeface="Calibri"/>
+              </a:defRPr>
+            </a:pPr>
+            <a:r>
+              <a:t>6G, digital twins, and generative AI may make telemetry smarter and easier to use.</a:t>
+            </a:r>
+          </a:p>
+        </p:txBody>
+      </p:sp>
+      <p:sp>
+        <p:nvSpPr>
+          <p:cNvPr id="23" name="Oval 22"/>
+          <p:cNvSpPr/>
+          <p:nvPr/>
+        </p:nvSpPr>
+        <p:spPr>
+          <a:xfrm>
+            <a:off x="685800" y="5294376"/>
+            <a:ext cx="384048" cy="384048"/>
+          </a:xfrm>
+          <a:prstGeom prst="ellipse">
+            <a:avLst/>
+          </a:prstGeom>
+          <a:solidFill>
+            <a:srgbClr val="E04040"/>
+          </a:solidFill>
+          <a:ln>
+            <a:noFill/>
+          </a:ln>
+        </p:spPr>
+        <p:style>
+          <a:lnRef idx="1">
+            <a:schemeClr val="accent1"/>
+          </a:lnRef>
+          <a:fillRef idx="3">
+            <a:schemeClr val="accent1"/>
+          </a:fillRef>
+          <a:effectRef idx="2">
+            <a:schemeClr val="accent1"/>
+          </a:effectRef>
+          <a:fontRef idx="minor">
+            <a:schemeClr val="lt1"/>
+          </a:fontRef>
+        </p:style>
+        <p:txBody>
+          <a:bodyPr rtlCol="0" anchor="ctr"/>
+          <a:lstStyle/>
+          <a:p>
+            <a:pPr algn="ctr"/>
+          </a:p>
+        </p:txBody>
+      </p:sp>
+      <p:sp>
+        <p:nvSpPr>
+          <p:cNvPr id="24" name="TextBox 23"/>
+          <p:cNvSpPr txBox="1"/>
+          <p:nvPr/>
+        </p:nvSpPr>
+        <p:spPr>
+          <a:xfrm>
+            <a:off x="685800" y="5321808"/>
+            <a:ext cx="384048" cy="347472"/>
+          </a:xfrm>
+          <a:prstGeom prst="rect">
+            <a:avLst/>
+          </a:prstGeom>
+          <a:noFill/>
+        </p:spPr>
+        <p:txBody>
+          <a:bodyPr wrap="square" anchor="t" lIns="45720" rIns="45720" tIns="18288" bIns="18288">
+            <a:spAutoFit/>
+          </a:bodyPr>
+          <a:lstStyle/>
+          <a:p>
+            <a:pPr algn="ctr">
+              <a:lnSpc>
+                <a:spcPct val="120000"/>
+              </a:lnSpc>
+              <a:spcAft>
+                <a:spcPts val="0"/>
+              </a:spcAft>
+              <a:defRPr sz="1800" b="1">
+                <a:solidFill>
+                  <a:srgbClr val="FFFFFF"/>
+                </a:solidFill>
+                <a:latin typeface="Calibri"/>
+              </a:defRPr>
+            </a:pPr>
+            <a:r>
+              <a:t>5</a:t>
+            </a:r>
+          </a:p>
+        </p:txBody>
+      </p:sp>
+      <p:sp>
+        <p:nvSpPr>
+          <p:cNvPr id="25" name="TextBox 24"/>
+          <p:cNvSpPr txBox="1"/>
+          <p:nvPr/>
+        </p:nvSpPr>
+        <p:spPr>
+          <a:xfrm>
+            <a:off x="1280160" y="5276088"/>
+            <a:ext cx="10515600" cy="320040"/>
+          </a:xfrm>
+          <a:prstGeom prst="rect">
+            <a:avLst/>
+          </a:prstGeom>
+          <a:noFill/>
+        </p:spPr>
+        <p:txBody>
+          <a:bodyPr wrap="square" anchor="t" lIns="45720" rIns="45720" tIns="18288" bIns="18288">
+            <a:spAutoFit/>
+          </a:bodyPr>
+          <a:lstStyle/>
+          <a:p>
+            <a:pPr algn="l">
+              <a:lnSpc>
+                <a:spcPct val="120000"/>
+              </a:lnSpc>
+              <a:spcAft>
+                <a:spcPts val="0"/>
+              </a:spcAft>
+              <a:defRPr sz="1700" b="1">
+                <a:solidFill>
+                  <a:srgbClr val="E04040"/>
+                </a:solidFill>
+                <a:latin typeface="Calibri"/>
+              </a:defRPr>
+            </a:pPr>
+            <a:r>
+              <a:t>The hardest part is deployment</a:t>
+            </a:r>
+          </a:p>
+        </p:txBody>
+      </p:sp>
+      <p:sp>
+        <p:nvSpPr>
+          <p:cNvPr id="26" name="TextBox 25"/>
+          <p:cNvSpPr txBox="1"/>
+          <p:nvPr/>
+        </p:nvSpPr>
+        <p:spPr>
+          <a:xfrm>
+            <a:off x="1280160" y="5623560"/>
+            <a:ext cx="10515600" cy="548640"/>
+          </a:xfrm>
+          <a:prstGeom prst="rect">
+            <a:avLst/>
+          </a:prstGeom>
+          <a:noFill/>
+        </p:spPr>
+        <p:txBody>
+          <a:bodyPr wrap="square" anchor="t" lIns="45720" rIns="45720" tIns="18288" bIns="18288">
+            <a:spAutoFit/>
+          </a:bodyPr>
+          <a:lstStyle/>
+          <a:p>
+            <a:pPr algn="l">
+              <a:lnSpc>
+                <a:spcPct val="120000"/>
+              </a:lnSpc>
+              <a:spcAft>
+                <a:spcPts val="0"/>
+              </a:spcAft>
+              <a:defRPr sz="1400" b="0">
+                <a:solidFill>
+                  <a:srgbClr val="CCCCCC"/>
+                </a:solidFill>
+                <a:latin typeface="Calibri"/>
+              </a:defRPr>
+            </a:pPr>
+            <a:r>
+              <a:t>Real-world success still depends on trustworthy models, good data, and systems that scale.</a:t>
+            </a:r>
+          </a:p>
+        </p:txBody>
+      </p:sp>
+      <p:sp>
+        <p:nvSpPr>
+          <p:cNvPr id="27" name="TextBox 26"/>
+          <p:cNvSpPr txBox="1"/>
+          <p:nvPr/>
+        </p:nvSpPr>
+        <p:spPr>
+          <a:xfrm>
+            <a:off x="9326880" y="6263640"/>
+            <a:ext cx="2743200" cy="457200"/>
+          </a:xfrm>
+          <a:prstGeom prst="rect">
+            <a:avLst/>
+          </a:prstGeom>
+          <a:noFill/>
+        </p:spPr>
+        <p:txBody>
+          <a:bodyPr wrap="square" anchor="t" lIns="45720" rIns="45720" tIns="18288" bIns="18288">
+            <a:spAutoFit/>
+          </a:bodyPr>
+          <a:lstStyle/>
+          <a:p>
+            <a:pPr algn="r">
+              <a:lnSpc>
+                <a:spcPct val="120000"/>
+              </a:lnSpc>
+              <a:spcAft>
+                <a:spcPts val="0"/>
+              </a:spcAft>
+              <a:defRPr sz="1200" b="1">
+                <a:solidFill>
+                  <a:srgbClr val="845EC2"/>
+                </a:solidFill>
+                <a:latin typeface="Calibri"/>
+              </a:defRPr>
+            </a:pPr>
+            <a:r>
+              <a:t>Presenter: Hashim Kshim</a:t>
+            </a:r>
+          </a:p>
+        </p:txBody>
+      </p:sp>
+      <p:sp>
+        <p:nvSpPr>
+          <p:cNvPr id="28" name="TextBox 27"/>
+          <p:cNvSpPr txBox="1"/>
+          <p:nvPr/>
+        </p:nvSpPr>
+        <p:spPr>
+          <a:xfrm>
+            <a:off x="365760" y="6309360"/>
+            <a:ext cx="1371600" cy="365760"/>
+          </a:xfrm>
+          <a:prstGeom prst="rect">
+            <a:avLst/>
+          </a:prstGeom>
+          <a:noFill/>
+        </p:spPr>
+        <p:txBody>
+          <a:bodyPr wrap="square" anchor="t" lIns="45720" rIns="45720" tIns="18288" bIns="18288">
+            <a:spAutoFit/>
+          </a:bodyPr>
+          <a:lstStyle/>
+          <a:p>
+            <a:pPr algn="l">
+              <a:lnSpc>
+                <a:spcPct val="120000"/>
+              </a:lnSpc>
+              <a:spcAft>
+                <a:spcPts val="0"/>
+              </a:spcAft>
+              <a:defRPr sz="1000" b="0">
+                <a:solidFill>
+                  <a:srgbClr val="999999"/>
+                </a:solidFill>
+                <a:latin typeface="Calibri"/>
+              </a:defRPr>
+            </a:pPr>
+            <a:r>
+              <a:t>24 / 26</a:t>
+            </a:r>
+          </a:p>
+        </p:txBody>
+      </p:sp>
+    </p:spTree>
+  </p:cSld>
+  <p:clrMapOvr>
+    <a:masterClrMapping/>
+  </p:clrMapOvr>
+</p:sld>
+</file>
+
+<file path=ppt/slides/slide25.xml><?xml version="1.0" encoding="utf-8"?>
 <p:sld xmlns:a="http://schemas.openxmlformats.org/drawingml/2006/main" xmlns:p="http://schemas.openxmlformats.org/presentationml/2006/main" xmlns:r="http://schemas.openxmlformats.org/officeDocument/2006/relationships">
   <p:cSld>
     <p:bg>
@@ -19010,7 +20263,7 @@
               </a:defRPr>
             </a:pPr>
             <a:r>
-              <a:t>24 / 25</a:t>
+              <a:t>25 / 26</a:t>
             </a:r>
           </a:p>
         </p:txBody>
@@ -19023,7 +20276,7 @@
 </p:sld>
 </file>
 
-<file path=ppt/slides/slide25.xml><?xml version="1.0" encoding="utf-8"?>
+<file path=ppt/slides/slide26.xml><?xml version="1.0" encoding="utf-8"?>
 <p:sld xmlns:a="http://schemas.openxmlformats.org/drawingml/2006/main" xmlns:p="http://schemas.openxmlformats.org/presentationml/2006/main" xmlns:r="http://schemas.openxmlformats.org/officeDocument/2006/relationships">
   <p:cSld>
     <p:bg>
@@ -19499,7 +20752,7 @@
               </a:defRPr>
             </a:pPr>
             <a:r>
-              <a:t>25 / 25</a:t>
+              <a:t>26 / 26</a:t>
             </a:r>
           </a:p>
         </p:txBody>
@@ -19779,7 +21032,7 @@
               </a:defRPr>
             </a:pPr>
             <a:r>
-              <a:t>3 / 25</a:t>
+              <a:t>3 / 26</a:t>
             </a:r>
           </a:p>
         </p:txBody>
@@ -20879,7 +22132,7 @@
               </a:defRPr>
             </a:pPr>
             <a:r>
-              <a:t>4 / 25</a:t>
+              <a:t>4 / 26</a:t>
             </a:r>
           </a:p>
         </p:txBody>
@@ -21655,7 +22908,7 @@
               </a:defRPr>
             </a:pPr>
             <a:r>
-              <a:t>5 / 25</a:t>
+              <a:t>5 / 26</a:t>
             </a:r>
           </a:p>
         </p:txBody>
@@ -22622,7 +23875,7 @@
               </a:defRPr>
             </a:pPr>
             <a:r>
-              <a:t>6 / 25</a:t>
+              <a:t>6 / 26</a:t>
             </a:r>
           </a:p>
         </p:txBody>
@@ -23753,7 +25006,7 @@
               </a:defRPr>
             </a:pPr>
             <a:r>
-              <a:t>7 / 25</a:t>
+              <a:t>7 / 26</a:t>
             </a:r>
           </a:p>
         </p:txBody>
@@ -24847,7 +26100,7 @@
               </a:defRPr>
             </a:pPr>
             <a:r>
-              <a:t>8 / 25</a:t>
+              <a:t>8 / 26</a:t>
             </a:r>
           </a:p>
         </p:txBody>
@@ -26239,7 +27492,7 @@
               </a:defRPr>
             </a:pPr>
             <a:r>
-              <a:t>9 / 25</a:t>
+              <a:t>9 / 26</a:t>
             </a:r>
           </a:p>
         </p:txBody>

--- a/NET3006A-ML-Network-Telemetry/presentation/NET3006A_ML_Network_Telemetry_Presentation.pptx
+++ b/NET3006A-ML-Network-Telemetry/presentation/NET3006A_ML_Network_Telemetry_Presentation.pptx
@@ -31,6 +31,7 @@
     <p:sldId id="279" r:id="rId30"/>
     <p:sldId id="280" r:id="rId31"/>
     <p:sldId id="281" r:id="rId32"/>
+    <p:sldId id="282" r:id="rId33"/>
   </p:sldIdLst>
   <p:sldSz cx="12191695" cy="6858000" type="screen4x3"/>
   <p:notesSz cx="6858000" cy="9144000"/>
@@ -3843,7 +3844,7 @@
               </a:defRPr>
             </a:pPr>
             <a:r>
-              <a:t>1 / 26</a:t>
+              <a:t>1 / 27</a:t>
             </a:r>
           </a:p>
         </p:txBody>
@@ -4810,7 +4811,7 @@
               </a:defRPr>
             </a:pPr>
             <a:r>
-              <a:t>10 / 26</a:t>
+              <a:t>10 / 27</a:t>
             </a:r>
           </a:p>
         </p:txBody>
@@ -5090,7 +5091,7 @@
               </a:defRPr>
             </a:pPr>
             <a:r>
-              <a:t>11 / 26</a:t>
+              <a:t>11 / 27</a:t>
             </a:r>
           </a:p>
         </p:txBody>
@@ -6084,7 +6085,7 @@
               </a:defRPr>
             </a:pPr>
             <a:r>
-              <a:t>12 / 26</a:t>
+              <a:t>12 / 27</a:t>
             </a:r>
           </a:p>
         </p:txBody>
@@ -6914,7 +6915,7 @@
               </a:defRPr>
             </a:pPr>
             <a:r>
-              <a:t>13 / 26</a:t>
+              <a:t>13 / 27</a:t>
             </a:r>
           </a:p>
         </p:txBody>
@@ -7912,7 +7913,7 @@
               </a:defRPr>
             </a:pPr>
             <a:r>
-              <a:t>14 / 26</a:t>
+              <a:t>14 / 27</a:t>
             </a:r>
           </a:p>
         </p:txBody>
@@ -8792,7 +8793,7 @@
               </a:defRPr>
             </a:pPr>
             <a:r>
-              <a:t>15 / 26</a:t>
+              <a:t>15 / 27</a:t>
             </a:r>
           </a:p>
         </p:txBody>
@@ -9072,7 +9073,7 @@
               </a:defRPr>
             </a:pPr>
             <a:r>
-              <a:t>16 / 26</a:t>
+              <a:t>16 / 27</a:t>
             </a:r>
           </a:p>
         </p:txBody>
@@ -9996,7 +9997,7 @@
               </a:defRPr>
             </a:pPr>
             <a:r>
-              <a:t>17 / 26</a:t>
+              <a:t>17 / 27</a:t>
             </a:r>
           </a:p>
         </p:txBody>
@@ -11350,6 +11351,48 @@
         <p:spPr>
           <a:xfrm>
             <a:off x="365760" y="6309360"/>
+            <a:ext cx="5486400" cy="274320"/>
+          </a:xfrm>
+          <a:prstGeom prst="rect">
+            <a:avLst/>
+          </a:prstGeom>
+          <a:noFill/>
+        </p:spPr>
+        <p:txBody>
+          <a:bodyPr wrap="square" anchor="t" lIns="45720" rIns="45720" tIns="18288" bIns="18288">
+            <a:spAutoFit/>
+          </a:bodyPr>
+          <a:lstStyle/>
+          <a:p>
+            <a:pPr algn="l">
+              <a:lnSpc>
+                <a:spcPct val="120000"/>
+              </a:lnSpc>
+              <a:spcAft>
+                <a:spcPts val="0"/>
+              </a:spcAft>
+              <a:defRPr sz="800" b="0">
+                <a:solidFill>
+                  <a:srgbClr val="999999"/>
+                </a:solidFill>
+                <a:latin typeface="Calibri"/>
+              </a:defRPr>
+            </a:pPr>
+            <a:r>
+              <a:t>Reference: https://link.springer.com/article/10.1007/s00521-022-08000-y</a:t>
+            </a:r>
+          </a:p>
+        </p:txBody>
+      </p:sp>
+      <p:sp>
+        <p:nvSpPr>
+          <p:cNvPr id="29" name="TextBox 28"/>
+          <p:cNvSpPr txBox="1"/>
+          <p:nvPr/>
+        </p:nvSpPr>
+        <p:spPr>
+          <a:xfrm>
+            <a:off x="365760" y="6309360"/>
             <a:ext cx="1371600" cy="365760"/>
           </a:xfrm>
           <a:prstGeom prst="rect">
@@ -11378,7 +11421,7 @@
               </a:defRPr>
             </a:pPr>
             <a:r>
-              <a:t>18 / 26</a:t>
+              <a:t>18 / 27</a:t>
             </a:r>
           </a:p>
         </p:txBody>
@@ -12714,6 +12757,48 @@
         <p:spPr>
           <a:xfrm>
             <a:off x="365760" y="6309360"/>
+            <a:ext cx="5486400" cy="274320"/>
+          </a:xfrm>
+          <a:prstGeom prst="rect">
+            <a:avLst/>
+          </a:prstGeom>
+          <a:noFill/>
+        </p:spPr>
+        <p:txBody>
+          <a:bodyPr wrap="square" anchor="t" lIns="45720" rIns="45720" tIns="18288" bIns="18288">
+            <a:spAutoFit/>
+          </a:bodyPr>
+          <a:lstStyle/>
+          <a:p>
+            <a:pPr algn="l">
+              <a:lnSpc>
+                <a:spcPct val="120000"/>
+              </a:lnSpc>
+              <a:spcAft>
+                <a:spcPts val="0"/>
+              </a:spcAft>
+              <a:defRPr sz="800" b="0">
+                <a:solidFill>
+                  <a:srgbClr val="999999"/>
+                </a:solidFill>
+                <a:latin typeface="Calibri"/>
+              </a:defRPr>
+            </a:pPr>
+            <a:r>
+              <a:t>Reference: https://arxiv.org/html/2409.13179v1</a:t>
+            </a:r>
+          </a:p>
+        </p:txBody>
+      </p:sp>
+      <p:sp>
+        <p:nvSpPr>
+          <p:cNvPr id="29" name="TextBox 28"/>
+          <p:cNvSpPr txBox="1"/>
+          <p:nvPr/>
+        </p:nvSpPr>
+        <p:spPr>
+          <a:xfrm>
+            <a:off x="365760" y="6309360"/>
             <a:ext cx="1371600" cy="365760"/>
           </a:xfrm>
           <a:prstGeom prst="rect">
@@ -12742,7 +12827,7 @@
               </a:defRPr>
             </a:pPr>
             <a:r>
-              <a:t>19 / 26</a:t>
+              <a:t>19 / 27</a:t>
             </a:r>
           </a:p>
         </p:txBody>
@@ -15084,7 +15169,7 @@
               </a:defRPr>
             </a:pPr>
             <a:r>
-              <a:t>2 / 26</a:t>
+              <a:t>2 / 27</a:t>
             </a:r>
           </a:p>
         </p:txBody>
@@ -16308,6 +16393,48 @@
         <p:spPr>
           <a:xfrm>
             <a:off x="365760" y="6309360"/>
+            <a:ext cx="5486400" cy="274320"/>
+          </a:xfrm>
+          <a:prstGeom prst="rect">
+            <a:avLst/>
+          </a:prstGeom>
+          <a:noFill/>
+        </p:spPr>
+        <p:txBody>
+          <a:bodyPr wrap="square" anchor="t" lIns="45720" rIns="45720" tIns="18288" bIns="18288">
+            <a:spAutoFit/>
+          </a:bodyPr>
+          <a:lstStyle/>
+          <a:p>
+            <a:pPr algn="l">
+              <a:lnSpc>
+                <a:spcPct val="120000"/>
+              </a:lnSpc>
+              <a:spcAft>
+                <a:spcPts val="0"/>
+              </a:spcAft>
+              <a:defRPr sz="800" b="0">
+                <a:solidFill>
+                  <a:srgbClr val="999999"/>
+                </a:solidFill>
+                <a:latin typeface="Calibri"/>
+              </a:defRPr>
+            </a:pPr>
+            <a:r>
+              <a:t>Reference: https://dl.acm.org/doi/pdf/10.1109/TNET.2023.3269983</a:t>
+            </a:r>
+          </a:p>
+        </p:txBody>
+      </p:sp>
+      <p:sp>
+        <p:nvSpPr>
+          <p:cNvPr id="26" name="TextBox 25"/>
+          <p:cNvSpPr txBox="1"/>
+          <p:nvPr/>
+        </p:nvSpPr>
+        <p:spPr>
+          <a:xfrm>
+            <a:off x="365760" y="6309360"/>
             <a:ext cx="1371600" cy="365760"/>
           </a:xfrm>
           <a:prstGeom prst="rect">
@@ -16336,7 +16463,7 @@
               </a:defRPr>
             </a:pPr>
             <a:r>
-              <a:t>20 / 26</a:t>
+              <a:t>20 / 27</a:t>
             </a:r>
           </a:p>
         </p:txBody>
@@ -16382,7 +16509,7 @@
             <a:avLst/>
           </a:prstGeom>
           <a:solidFill>
-            <a:srgbClr val="845EC2"/>
+            <a:srgbClr val="F0B429"/>
           </a:solidFill>
           <a:ln>
             <a:noFill/>
@@ -16490,7 +16617,7 @@
               </a:defRPr>
             </a:pPr>
             <a:r>
-              <a:t>Industry Example: Ericsson</a:t>
+              <a:t>Lessons Learned: Comparing ML Approaches for Network Telemetry</a:t>
             </a:r>
           </a:p>
         </p:txBody>
@@ -16498,48 +16625,6 @@
       <p:sp>
         <p:nvSpPr>
           <p:cNvPr id="5" name="TextBox 4"/>
-          <p:cNvSpPr txBox="1"/>
-          <p:nvPr/>
-        </p:nvSpPr>
-        <p:spPr>
-          <a:xfrm>
-            <a:off x="731520" y="1024128"/>
-            <a:ext cx="10515600" cy="438912"/>
-          </a:xfrm>
-          <a:prstGeom prst="rect">
-            <a:avLst/>
-          </a:prstGeom>
-          <a:noFill/>
-        </p:spPr>
-        <p:txBody>
-          <a:bodyPr wrap="square" anchor="t" lIns="45720" rIns="45720" tIns="18288" bIns="18288">
-            <a:spAutoFit/>
-          </a:bodyPr>
-          <a:lstStyle/>
-          <a:p>
-            <a:pPr algn="l">
-              <a:lnSpc>
-                <a:spcPct val="120000"/>
-              </a:lnSpc>
-              <a:spcAft>
-                <a:spcPts val="0"/>
-              </a:spcAft>
-              <a:defRPr sz="1800" b="0">
-                <a:solidFill>
-                  <a:srgbClr val="CCCCCC"/>
-                </a:solidFill>
-                <a:latin typeface="Calibri"/>
-              </a:defRPr>
-            </a:pPr>
-            <a:r>
-              <a:t>Combining better data organization with automation</a:t>
-            </a:r>
-          </a:p>
-        </p:txBody>
-      </p:sp>
-      <p:sp>
-        <p:nvSpPr>
-          <p:cNvPr id="6" name="TextBox 5"/>
           <p:cNvSpPr txBox="1"/>
           <p:nvPr/>
         </p:nvSpPr>
@@ -16574,7 +16659,49 @@
               </a:defRPr>
             </a:pPr>
             <a:r>
-              <a:t>Presenter: Hashim Kshim</a:t>
+              <a:t>Presenter: Mazen Alhassan</a:t>
+            </a:r>
+          </a:p>
+        </p:txBody>
+      </p:sp>
+      <p:sp>
+        <p:nvSpPr>
+          <p:cNvPr id="6" name="TextBox 5"/>
+          <p:cNvSpPr txBox="1"/>
+          <p:nvPr/>
+        </p:nvSpPr>
+        <p:spPr>
+          <a:xfrm>
+            <a:off x="731520" y="1371600"/>
+            <a:ext cx="10515600" cy="320040"/>
+          </a:xfrm>
+          <a:prstGeom prst="rect">
+            <a:avLst/>
+          </a:prstGeom>
+          <a:noFill/>
+        </p:spPr>
+        <p:txBody>
+          <a:bodyPr wrap="square" anchor="t" lIns="45720" rIns="45720" tIns="18288" bIns="18288">
+            <a:spAutoFit/>
+          </a:bodyPr>
+          <a:lstStyle/>
+          <a:p>
+            <a:pPr algn="ctr">
+              <a:lnSpc>
+                <a:spcPct val="120000"/>
+              </a:lnSpc>
+              <a:spcAft>
+                <a:spcPts val="0"/>
+              </a:spcAft>
+              <a:defRPr sz="2000" b="1">
+                <a:solidFill>
+                  <a:srgbClr val="F0B429"/>
+                </a:solidFill>
+                <a:latin typeface="Calibri"/>
+              </a:defRPr>
+            </a:pPr>
+            <a:r>
+              <a:t>Comparison of Three Case Studies</a:t>
             </a:r>
           </a:p>
         </p:txBody>
@@ -16587,19 +16714,17 @@
         </p:nvSpPr>
         <p:spPr>
           <a:xfrm>
-            <a:off x="777240" y="1600200"/>
-            <a:ext cx="5120640" cy="2514600"/>
+            <a:off x="731520" y="1828800"/>
+            <a:ext cx="3474720" cy="411480"/>
           </a:xfrm>
           <a:prstGeom prst="roundRect">
             <a:avLst/>
           </a:prstGeom>
           <a:solidFill>
-            <a:srgbClr val="141832"/>
+            <a:srgbClr val="009FFD"/>
           </a:solidFill>
-          <a:ln w="17780">
-            <a:solidFill>
-              <a:srgbClr val="845EC2"/>
-            </a:solidFill>
+          <a:ln>
+            <a:noFill/>
           </a:ln>
         </p:spPr>
         <p:style>
@@ -16632,97 +16757,50 @@
         </p:nvSpPr>
         <p:spPr>
           <a:xfrm>
-            <a:off x="941832" y="1737360"/>
-            <a:ext cx="4791456" cy="320040"/>
-          </a:xfrm>
-          <a:prstGeom prst="rect">
-            <a:avLst/>
-          </a:prstGeom>
-          <a:noFill/>
-        </p:spPr>
-        <p:txBody>
-          <a:bodyPr wrap="square" anchor="t" lIns="45720" rIns="45720" tIns="18288" bIns="18288">
-            <a:spAutoFit/>
-          </a:bodyPr>
-          <a:lstStyle/>
-          <a:p>
-            <a:pPr algn="l">
-              <a:lnSpc>
-                <a:spcPct val="120000"/>
-              </a:lnSpc>
-              <a:spcAft>
-                <a:spcPts val="0"/>
-              </a:spcAft>
-              <a:defRPr sz="1600" b="1">
-                <a:solidFill>
-                  <a:srgbClr val="845EC2"/>
-                </a:solidFill>
-                <a:latin typeface="Calibri"/>
-              </a:defRPr>
-            </a:pPr>
-            <a:r>
-              <a:t>AI-Ready Data Mesh</a:t>
-            </a:r>
-          </a:p>
-        </p:txBody>
-      </p:sp>
-      <p:sp>
-        <p:nvSpPr>
-          <p:cNvPr id="9" name="TextBox 8"/>
-          <p:cNvSpPr txBox="1"/>
-          <p:nvPr/>
-        </p:nvSpPr>
-        <p:spPr>
-          <a:xfrm>
-            <a:off x="941832" y="2103120"/>
-            <a:ext cx="4791456" cy="1874520"/>
-          </a:xfrm>
-          <a:prstGeom prst="rect">
-            <a:avLst/>
-          </a:prstGeom>
-          <a:noFill/>
-        </p:spPr>
-        <p:txBody>
-          <a:bodyPr wrap="square" anchor="t" lIns="45720" rIns="45720" tIns="18288" bIns="18288">
-            <a:spAutoFit/>
-          </a:bodyPr>
-          <a:lstStyle/>
-          <a:p>
-            <a:pPr algn="l">
-              <a:lnSpc>
-                <a:spcPct val="130000"/>
-              </a:lnSpc>
-              <a:spcAft>
-                <a:spcPts val="0"/>
-              </a:spcAft>
-              <a:defRPr sz="1300" b="0">
-                <a:solidFill>
-                  <a:srgbClr val="CCCCCC"/>
-                </a:solidFill>
-                <a:latin typeface="Calibri"/>
-              </a:defRPr>
-            </a:pPr>
-            <a:r>
-              <a:t>Ericsson treats telemetry as a shared data product, not just raw logs.</a:t>
-            </a:r>
-            <a:br/>
-            <a:br/>
-            <a:r>
-              <a:t>Teams manage domain pipelines with common standards, which improves data quality and makes telemetry easier for ML teams to use.</a:t>
-            </a:r>
-          </a:p>
-        </p:txBody>
-      </p:sp>
-      <p:sp>
-        <p:nvSpPr>
-          <p:cNvPr id="10" name="Rounded Rectangle 9"/>
+            <a:off x="731520" y="1874520"/>
+            <a:ext cx="3474720" cy="320040"/>
+          </a:xfrm>
+          <a:prstGeom prst="rect">
+            <a:avLst/>
+          </a:prstGeom>
+          <a:noFill/>
+        </p:spPr>
+        <p:txBody>
+          <a:bodyPr wrap="square" anchor="t" lIns="45720" rIns="45720" tIns="18288" bIns="18288">
+            <a:spAutoFit/>
+          </a:bodyPr>
+          <a:lstStyle/>
+          <a:p>
+            <a:pPr algn="ctr">
+              <a:lnSpc>
+                <a:spcPct val="120000"/>
+              </a:lnSpc>
+              <a:spcAft>
+                <a:spcPts val="0"/>
+              </a:spcAft>
+              <a:defRPr sz="1400" b="1">
+                <a:solidFill>
+                  <a:srgbClr val="FFFFFF"/>
+                </a:solidFill>
+                <a:latin typeface="Calibri"/>
+              </a:defRPr>
+            </a:pPr>
+            <a:r>
+              <a:t>AREP</a:t>
+            </a:r>
+          </a:p>
+        </p:txBody>
+      </p:sp>
+      <p:sp>
+        <p:nvSpPr>
+          <p:cNvPr id="9" name="Rounded Rectangle 8"/>
           <p:cNvSpPr/>
           <p:nvPr/>
         </p:nvSpPr>
         <p:spPr>
           <a:xfrm>
-            <a:off x="6263640" y="1600200"/>
-            <a:ext cx="5120640" cy="2514600"/>
+            <a:off x="731520" y="2240280"/>
+            <a:ext cx="3474720" cy="2560320"/>
           </a:xfrm>
           <a:prstGeom prst="roundRect">
             <a:avLst/>
@@ -16730,9 +16808,9 @@
           <a:solidFill>
             <a:srgbClr val="141832"/>
           </a:solidFill>
-          <a:ln w="17780">
+          <a:ln w="15240">
             <a:solidFill>
-              <a:srgbClr val="845EC2"/>
+              <a:srgbClr val="009FFD"/>
             </a:solidFill>
           </a:ln>
         </p:spPr>
@@ -16760,14 +16838,56 @@
       </p:sp>
       <p:sp>
         <p:nvSpPr>
+          <p:cNvPr id="10" name="TextBox 9"/>
+          <p:cNvSpPr txBox="1"/>
+          <p:nvPr/>
+        </p:nvSpPr>
+        <p:spPr>
+          <a:xfrm>
+            <a:off x="868680" y="2377440"/>
+            <a:ext cx="3200400" cy="182880"/>
+          </a:xfrm>
+          <a:prstGeom prst="rect">
+            <a:avLst/>
+          </a:prstGeom>
+          <a:noFill/>
+        </p:spPr>
+        <p:txBody>
+          <a:bodyPr wrap="square" anchor="t" lIns="45720" rIns="45720" tIns="18288" bIns="18288">
+            <a:spAutoFit/>
+          </a:bodyPr>
+          <a:lstStyle/>
+          <a:p>
+            <a:pPr algn="l">
+              <a:lnSpc>
+                <a:spcPct val="120000"/>
+              </a:lnSpc>
+              <a:spcAft>
+                <a:spcPts val="0"/>
+              </a:spcAft>
+              <a:defRPr sz="1000" b="1">
+                <a:solidFill>
+                  <a:srgbClr val="009FFD"/>
+                </a:solidFill>
+                <a:latin typeface="Calibri"/>
+              </a:defRPr>
+            </a:pPr>
+            <a:r>
+              <a:t>Method:</a:t>
+            </a:r>
+          </a:p>
+        </p:txBody>
+      </p:sp>
+      <p:sp>
+        <p:nvSpPr>
           <p:cNvPr id="11" name="TextBox 10"/>
           <p:cNvSpPr txBox="1"/>
           <p:nvPr/>
         </p:nvSpPr>
         <p:spPr>
           <a:xfrm>
-            <a:off x="6428232" y="1737360"/>
-            <a:ext cx="4791456" cy="320040"/>
+            <a:off x="868680" y="2606040"/>
+            <a:ext cx="3200400" cy="320040"/>
           </a:xfrm>
           <a:prstGeom prst="rect">
             <a:avLst/>
@@ -16787,15 +16907,15 @@
               <a:spcAft>
                 <a:spcPts val="0"/>
               </a:spcAft>
-              <a:defRPr sz="1600" b="1">
-                <a:solidFill>
-                  <a:srgbClr val="845EC2"/>
-                </a:solidFill>
-                <a:latin typeface="Calibri"/>
-              </a:defRPr>
-            </a:pPr>
-            <a:r>
-              <a:t>Transport Automation Controller (TAC)</a:t>
+              <a:defRPr sz="900" b="0">
+                <a:solidFill>
+                  <a:srgbClr val="CCCCCC"/>
+                </a:solidFill>
+                <a:latin typeface="Calibri"/>
+              </a:defRPr>
+            </a:pPr>
+            <a:r>
+              <a:t>LSTM</a:t>
             </a:r>
           </a:p>
         </p:txBody>
@@ -16808,8 +16928,8 @@
         </p:nvSpPr>
         <p:spPr>
           <a:xfrm>
-            <a:off x="6428232" y="2103120"/>
-            <a:ext cx="4791456" cy="1874520"/>
+            <a:off x="868680" y="3017520"/>
+            <a:ext cx="3200400" cy="182880"/>
           </a:xfrm>
           <a:prstGeom prst="rect">
             <a:avLst/>
@@ -16824,12 +16944,54 @@
           <a:p>
             <a:pPr algn="l">
               <a:lnSpc>
-                <a:spcPct val="130000"/>
-              </a:lnSpc>
-              <a:spcAft>
-                <a:spcPts val="0"/>
-              </a:spcAft>
-              <a:defRPr sz="1300" b="0">
+                <a:spcPct val="120000"/>
+              </a:lnSpc>
+              <a:spcAft>
+                <a:spcPts val="0"/>
+              </a:spcAft>
+              <a:defRPr sz="1000" b="1">
+                <a:solidFill>
+                  <a:srgbClr val="009FFD"/>
+                </a:solidFill>
+                <a:latin typeface="Calibri"/>
+              </a:defRPr>
+            </a:pPr>
+            <a:r>
+              <a:t>Task:</a:t>
+            </a:r>
+          </a:p>
+        </p:txBody>
+      </p:sp>
+      <p:sp>
+        <p:nvSpPr>
+          <p:cNvPr id="13" name="TextBox 12"/>
+          <p:cNvSpPr txBox="1"/>
+          <p:nvPr/>
+        </p:nvSpPr>
+        <p:spPr>
+          <a:xfrm>
+            <a:off x="868680" y="3246120"/>
+            <a:ext cx="3200400" cy="320040"/>
+          </a:xfrm>
+          <a:prstGeom prst="rect">
+            <a:avLst/>
+          </a:prstGeom>
+          <a:noFill/>
+        </p:spPr>
+        <p:txBody>
+          <a:bodyPr wrap="square" anchor="t" lIns="45720" rIns="45720" tIns="18288" bIns="18288">
+            <a:spAutoFit/>
+          </a:bodyPr>
+          <a:lstStyle/>
+          <a:p>
+            <a:pPr algn="l">
+              <a:lnSpc>
+                <a:spcPct val="120000"/>
+              </a:lnSpc>
+              <a:spcAft>
+                <a:spcPts val="0"/>
+              </a:spcAft>
+              <a:defRPr sz="900" b="0">
                 <a:solidFill>
                   <a:srgbClr val="CCCCCC"/>
                 </a:solidFill>
@@ -16837,37 +16999,282 @@
               </a:defRPr>
             </a:pPr>
             <a:r>
-              <a:t>Uses AI/ML to monitor transport performance, detect KPI anomalies, and support proactive capacity planning.</a:t>
-            </a:r>
-            <a:br/>
-            <a:br/>
-            <a:r>
-              <a:t>Direction: closed-loop automation through detect, diagnose, and act workflows.</a:t>
-            </a:r>
-          </a:p>
-        </p:txBody>
-      </p:sp>
-      <p:sp>
-        <p:nvSpPr>
-          <p:cNvPr id="13" name="Rounded Rectangle 12"/>
+              <a:t>Anomaly Detection</a:t>
+            </a:r>
+          </a:p>
+        </p:txBody>
+      </p:sp>
+      <p:sp>
+        <p:nvSpPr>
+          <p:cNvPr id="14" name="TextBox 13"/>
+          <p:cNvSpPr txBox="1"/>
+          <p:nvPr/>
+        </p:nvSpPr>
+        <p:spPr>
+          <a:xfrm>
+            <a:off x="868680" y="3657600"/>
+            <a:ext cx="3200400" cy="182880"/>
+          </a:xfrm>
+          <a:prstGeom prst="rect">
+            <a:avLst/>
+          </a:prstGeom>
+          <a:noFill/>
+        </p:spPr>
+        <p:txBody>
+          <a:bodyPr wrap="square" anchor="t" lIns="45720" rIns="45720" tIns="18288" bIns="18288">
+            <a:spAutoFit/>
+          </a:bodyPr>
+          <a:lstStyle/>
+          <a:p>
+            <a:pPr algn="l">
+              <a:lnSpc>
+                <a:spcPct val="120000"/>
+              </a:lnSpc>
+              <a:spcAft>
+                <a:spcPts val="0"/>
+              </a:spcAft>
+              <a:defRPr sz="1000" b="1">
+                <a:solidFill>
+                  <a:srgbClr val="009FFD"/>
+                </a:solidFill>
+                <a:latin typeface="Calibri"/>
+              </a:defRPr>
+            </a:pPr>
+            <a:r>
+              <a:t>Data:</a:t>
+            </a:r>
+          </a:p>
+        </p:txBody>
+      </p:sp>
+      <p:sp>
+        <p:nvSpPr>
+          <p:cNvPr id="15" name="TextBox 14"/>
+          <p:cNvSpPr txBox="1"/>
+          <p:nvPr/>
+        </p:nvSpPr>
+        <p:spPr>
+          <a:xfrm>
+            <a:off x="868680" y="3886200"/>
+            <a:ext cx="3200400" cy="320040"/>
+          </a:xfrm>
+          <a:prstGeom prst="rect">
+            <a:avLst/>
+          </a:prstGeom>
+          <a:noFill/>
+        </p:spPr>
+        <p:txBody>
+          <a:bodyPr wrap="square" anchor="t" lIns="45720" rIns="45720" tIns="18288" bIns="18288">
+            <a:spAutoFit/>
+          </a:bodyPr>
+          <a:lstStyle/>
+          <a:p>
+            <a:pPr algn="l">
+              <a:lnSpc>
+                <a:spcPct val="120000"/>
+              </a:lnSpc>
+              <a:spcAft>
+                <a:spcPts val="0"/>
+              </a:spcAft>
+              <a:defRPr sz="900" b="0">
+                <a:solidFill>
+                  <a:srgbClr val="CCCCCC"/>
+                </a:solidFill>
+                <a:latin typeface="Calibri"/>
+              </a:defRPr>
+            </a:pPr>
+            <a:r>
+              <a:t>NAB Benchmark (streaming)</a:t>
+            </a:r>
+          </a:p>
+        </p:txBody>
+      </p:sp>
+      <p:sp>
+        <p:nvSpPr>
+          <p:cNvPr id="16" name="TextBox 15"/>
+          <p:cNvSpPr txBox="1"/>
+          <p:nvPr/>
+        </p:nvSpPr>
+        <p:spPr>
+          <a:xfrm>
+            <a:off x="868680" y="4297680"/>
+            <a:ext cx="3200400" cy="182880"/>
+          </a:xfrm>
+          <a:prstGeom prst="rect">
+            <a:avLst/>
+          </a:prstGeom>
+          <a:noFill/>
+        </p:spPr>
+        <p:txBody>
+          <a:bodyPr wrap="square" anchor="t" lIns="45720" rIns="45720" tIns="18288" bIns="18288">
+            <a:spAutoFit/>
+          </a:bodyPr>
+          <a:lstStyle/>
+          <a:p>
+            <a:pPr algn="l">
+              <a:lnSpc>
+                <a:spcPct val="120000"/>
+              </a:lnSpc>
+              <a:spcAft>
+                <a:spcPts val="0"/>
+              </a:spcAft>
+              <a:defRPr sz="1000" b="1">
+                <a:solidFill>
+                  <a:srgbClr val="009FFD"/>
+                </a:solidFill>
+                <a:latin typeface="Calibri"/>
+              </a:defRPr>
+            </a:pPr>
+            <a:r>
+              <a:t>Strength:</a:t>
+            </a:r>
+          </a:p>
+        </p:txBody>
+      </p:sp>
+      <p:sp>
+        <p:nvSpPr>
+          <p:cNvPr id="17" name="TextBox 16"/>
+          <p:cNvSpPr txBox="1"/>
+          <p:nvPr/>
+        </p:nvSpPr>
+        <p:spPr>
+          <a:xfrm>
+            <a:off x="868680" y="4526280"/>
+            <a:ext cx="3200400" cy="320040"/>
+          </a:xfrm>
+          <a:prstGeom prst="rect">
+            <a:avLst/>
+          </a:prstGeom>
+          <a:noFill/>
+        </p:spPr>
+        <p:txBody>
+          <a:bodyPr wrap="square" anchor="t" lIns="45720" rIns="45720" tIns="18288" bIns="18288">
+            <a:spAutoFit/>
+          </a:bodyPr>
+          <a:lstStyle/>
+          <a:p>
+            <a:pPr algn="l">
+              <a:lnSpc>
+                <a:spcPct val="120000"/>
+              </a:lnSpc>
+              <a:spcAft>
+                <a:spcPts val="0"/>
+              </a:spcAft>
+              <a:defRPr sz="900" b="0">
+                <a:solidFill>
+                  <a:srgbClr val="CCCCCC"/>
+                </a:solidFill>
+                <a:latin typeface="Calibri"/>
+              </a:defRPr>
+            </a:pPr>
+            <a:r>
+              <a:t>Auto-tunes parameters</a:t>
+            </a:r>
+          </a:p>
+        </p:txBody>
+      </p:sp>
+      <p:sp>
+        <p:nvSpPr>
+          <p:cNvPr id="18" name="TextBox 17"/>
+          <p:cNvSpPr txBox="1"/>
+          <p:nvPr/>
+        </p:nvSpPr>
+        <p:spPr>
+          <a:xfrm>
+            <a:off x="868680" y="4937760"/>
+            <a:ext cx="3200400" cy="182880"/>
+          </a:xfrm>
+          <a:prstGeom prst="rect">
+            <a:avLst/>
+          </a:prstGeom>
+          <a:noFill/>
+        </p:spPr>
+        <p:txBody>
+          <a:bodyPr wrap="square" anchor="t" lIns="45720" rIns="45720" tIns="18288" bIns="18288">
+            <a:spAutoFit/>
+          </a:bodyPr>
+          <a:lstStyle/>
+          <a:p>
+            <a:pPr algn="l">
+              <a:lnSpc>
+                <a:spcPct val="120000"/>
+              </a:lnSpc>
+              <a:spcAft>
+                <a:spcPts val="0"/>
+              </a:spcAft>
+              <a:defRPr sz="1000" b="1">
+                <a:solidFill>
+                  <a:srgbClr val="009FFD"/>
+                </a:solidFill>
+                <a:latin typeface="Calibri"/>
+              </a:defRPr>
+            </a:pPr>
+            <a:r>
+              <a:t>Limit:</a:t>
+            </a:r>
+          </a:p>
+        </p:txBody>
+      </p:sp>
+      <p:sp>
+        <p:nvSpPr>
+          <p:cNvPr id="19" name="TextBox 18"/>
+          <p:cNvSpPr txBox="1"/>
+          <p:nvPr/>
+        </p:nvSpPr>
+        <p:spPr>
+          <a:xfrm>
+            <a:off x="868680" y="5166360"/>
+            <a:ext cx="3200400" cy="320040"/>
+          </a:xfrm>
+          <a:prstGeom prst="rect">
+            <a:avLst/>
+          </a:prstGeom>
+          <a:noFill/>
+        </p:spPr>
+        <p:txBody>
+          <a:bodyPr wrap="square" anchor="t" lIns="45720" rIns="45720" tIns="18288" bIns="18288">
+            <a:spAutoFit/>
+          </a:bodyPr>
+          <a:lstStyle/>
+          <a:p>
+            <a:pPr algn="l">
+              <a:lnSpc>
+                <a:spcPct val="120000"/>
+              </a:lnSpc>
+              <a:spcAft>
+                <a:spcPts val="0"/>
+              </a:spcAft>
+              <a:defRPr sz="900" b="0">
+                <a:solidFill>
+                  <a:srgbClr val="CCCCCC"/>
+                </a:solidFill>
+                <a:latin typeface="Calibri"/>
+              </a:defRPr>
+            </a:pPr>
+            <a:r>
+              <a:t>Struggles with periodic data</a:t>
+            </a:r>
+          </a:p>
+        </p:txBody>
+      </p:sp>
+      <p:sp>
+        <p:nvSpPr>
+          <p:cNvPr id="20" name="Rounded Rectangle 19"/>
           <p:cNvSpPr/>
           <p:nvPr/>
         </p:nvSpPr>
         <p:spPr>
           <a:xfrm>
-            <a:off x="1325880" y="4526280"/>
-            <a:ext cx="9509760" cy="1325880"/>
+            <a:off x="4389120" y="1828800"/>
+            <a:ext cx="3474720" cy="411480"/>
           </a:xfrm>
           <a:prstGeom prst="roundRect">
             <a:avLst/>
           </a:prstGeom>
           <a:solidFill>
-            <a:srgbClr val="141832"/>
+            <a:srgbClr val="00C9A7"/>
           </a:solidFill>
-          <a:ln w="17780">
-            <a:solidFill>
-              <a:srgbClr val="845EC2"/>
-            </a:solidFill>
+          <a:ln>
+            <a:noFill/>
           </a:ln>
         </p:spPr>
         <p:style>
@@ -16894,14 +17301,101 @@
       </p:sp>
       <p:sp>
         <p:nvSpPr>
-          <p:cNvPr id="14" name="TextBox 13"/>
-          <p:cNvSpPr txBox="1"/>
-          <p:nvPr/>
-        </p:nvSpPr>
-        <p:spPr>
-          <a:xfrm>
-            <a:off x="1490472" y="4663440"/>
-            <a:ext cx="9180576" cy="320040"/>
+          <p:cNvPr id="21" name="TextBox 20"/>
+          <p:cNvSpPr txBox="1"/>
+          <p:nvPr/>
+        </p:nvSpPr>
+        <p:spPr>
+          <a:xfrm>
+            <a:off x="4389120" y="1874520"/>
+            <a:ext cx="3474720" cy="320040"/>
+          </a:xfrm>
+          <a:prstGeom prst="rect">
+            <a:avLst/>
+          </a:prstGeom>
+          <a:noFill/>
+        </p:spPr>
+        <p:txBody>
+          <a:bodyPr wrap="square" anchor="t" lIns="45720" rIns="45720" tIns="18288" bIns="18288">
+            <a:spAutoFit/>
+          </a:bodyPr>
+          <a:lstStyle/>
+          <a:p>
+            <a:pPr algn="ctr">
+              <a:lnSpc>
+                <a:spcPct val="120000"/>
+              </a:lnSpc>
+              <a:spcAft>
+                <a:spcPts val="0"/>
+              </a:spcAft>
+              <a:defRPr sz="1400" b="1">
+                <a:solidFill>
+                  <a:srgbClr val="FFFFFF"/>
+                </a:solidFill>
+                <a:latin typeface="Calibri"/>
+              </a:defRPr>
+            </a:pPr>
+            <a:r>
+              <a:t>ConvLSTMTransNet</a:t>
+            </a:r>
+          </a:p>
+        </p:txBody>
+      </p:sp>
+      <p:sp>
+        <p:nvSpPr>
+          <p:cNvPr id="22" name="Rounded Rectangle 21"/>
+          <p:cNvSpPr/>
+          <p:nvPr/>
+        </p:nvSpPr>
+        <p:spPr>
+          <a:xfrm>
+            <a:off x="4389120" y="2240280"/>
+            <a:ext cx="3474720" cy="2560320"/>
+          </a:xfrm>
+          <a:prstGeom prst="roundRect">
+            <a:avLst/>
+          </a:prstGeom>
+          <a:solidFill>
+            <a:srgbClr val="141832"/>
+          </a:solidFill>
+          <a:ln w="15240">
+            <a:solidFill>
+              <a:srgbClr val="00C9A7"/>
+            </a:solidFill>
+          </a:ln>
+        </p:spPr>
+        <p:style>
+          <a:lnRef idx="1">
+            <a:schemeClr val="accent1"/>
+          </a:lnRef>
+          <a:fillRef idx="3">
+            <a:schemeClr val="accent1"/>
+          </a:fillRef>
+          <a:effectRef idx="2">
+            <a:schemeClr val="accent1"/>
+          </a:effectRef>
+          <a:fontRef idx="minor">
+            <a:schemeClr val="lt1"/>
+          </a:fontRef>
+        </p:style>
+        <p:txBody>
+          <a:bodyPr rtlCol="0" anchor="ctr"/>
+          <a:lstStyle/>
+          <a:p>
+            <a:pPr algn="ctr"/>
+          </a:p>
+        </p:txBody>
+      </p:sp>
+      <p:sp>
+        <p:nvSpPr>
+          <p:cNvPr id="23" name="TextBox 22"/>
+          <p:cNvSpPr txBox="1"/>
+          <p:nvPr/>
+        </p:nvSpPr>
+        <p:spPr>
+          <a:xfrm>
+            <a:off x="4526280" y="2377440"/>
+            <a:ext cx="3200400" cy="182880"/>
           </a:xfrm>
           <a:prstGeom prst="rect">
             <a:avLst/>
@@ -16921,7 +17415,557 @@
               <a:spcAft>
                 <a:spcPts val="0"/>
               </a:spcAft>
-              <a:defRPr sz="1600" b="1">
+              <a:defRPr sz="1000" b="1">
+                <a:solidFill>
+                  <a:srgbClr val="00C9A7"/>
+                </a:solidFill>
+                <a:latin typeface="Calibri"/>
+              </a:defRPr>
+            </a:pPr>
+            <a:r>
+              <a:t>Method:</a:t>
+            </a:r>
+          </a:p>
+        </p:txBody>
+      </p:sp>
+      <p:sp>
+        <p:nvSpPr>
+          <p:cNvPr id="24" name="TextBox 23"/>
+          <p:cNvSpPr txBox="1"/>
+          <p:nvPr/>
+        </p:nvSpPr>
+        <p:spPr>
+          <a:xfrm>
+            <a:off x="4526280" y="2606040"/>
+            <a:ext cx="3200400" cy="320040"/>
+          </a:xfrm>
+          <a:prstGeom prst="rect">
+            <a:avLst/>
+          </a:prstGeom>
+          <a:noFill/>
+        </p:spPr>
+        <p:txBody>
+          <a:bodyPr wrap="square" anchor="t" lIns="45720" rIns="45720" tIns="18288" bIns="18288">
+            <a:spAutoFit/>
+          </a:bodyPr>
+          <a:lstStyle/>
+          <a:p>
+            <a:pPr algn="l">
+              <a:lnSpc>
+                <a:spcPct val="120000"/>
+              </a:lnSpc>
+              <a:spcAft>
+                <a:spcPts val="0"/>
+              </a:spcAft>
+              <a:defRPr sz="900" b="0">
+                <a:solidFill>
+                  <a:srgbClr val="CCCCCC"/>
+                </a:solidFill>
+                <a:latin typeface="Calibri"/>
+              </a:defRPr>
+            </a:pPr>
+            <a:r>
+              <a:t>CNN+LSTM+Transformer</a:t>
+            </a:r>
+          </a:p>
+        </p:txBody>
+      </p:sp>
+      <p:sp>
+        <p:nvSpPr>
+          <p:cNvPr id="25" name="TextBox 24"/>
+          <p:cNvSpPr txBox="1"/>
+          <p:nvPr/>
+        </p:nvSpPr>
+        <p:spPr>
+          <a:xfrm>
+            <a:off x="4526280" y="3017520"/>
+            <a:ext cx="3200400" cy="182880"/>
+          </a:xfrm>
+          <a:prstGeom prst="rect">
+            <a:avLst/>
+          </a:prstGeom>
+          <a:noFill/>
+        </p:spPr>
+        <p:txBody>
+          <a:bodyPr wrap="square" anchor="t" lIns="45720" rIns="45720" tIns="18288" bIns="18288">
+            <a:spAutoFit/>
+          </a:bodyPr>
+          <a:lstStyle/>
+          <a:p>
+            <a:pPr algn="l">
+              <a:lnSpc>
+                <a:spcPct val="120000"/>
+              </a:lnSpc>
+              <a:spcAft>
+                <a:spcPts val="0"/>
+              </a:spcAft>
+              <a:defRPr sz="1000" b="1">
+                <a:solidFill>
+                  <a:srgbClr val="00C9A7"/>
+                </a:solidFill>
+                <a:latin typeface="Calibri"/>
+              </a:defRPr>
+            </a:pPr>
+            <a:r>
+              <a:t>Task:</a:t>
+            </a:r>
+          </a:p>
+        </p:txBody>
+      </p:sp>
+      <p:sp>
+        <p:nvSpPr>
+          <p:cNvPr id="26" name="TextBox 25"/>
+          <p:cNvSpPr txBox="1"/>
+          <p:nvPr/>
+        </p:nvSpPr>
+        <p:spPr>
+          <a:xfrm>
+            <a:off x="4526280" y="3246120"/>
+            <a:ext cx="3200400" cy="320040"/>
+          </a:xfrm>
+          <a:prstGeom prst="rect">
+            <a:avLst/>
+          </a:prstGeom>
+          <a:noFill/>
+        </p:spPr>
+        <p:txBody>
+          <a:bodyPr wrap="square" anchor="t" lIns="45720" rIns="45720" tIns="18288" bIns="18288">
+            <a:spAutoFit/>
+          </a:bodyPr>
+          <a:lstStyle/>
+          <a:p>
+            <a:pPr algn="l">
+              <a:lnSpc>
+                <a:spcPct val="120000"/>
+              </a:lnSpc>
+              <a:spcAft>
+                <a:spcPts val="0"/>
+              </a:spcAft>
+              <a:defRPr sz="900" b="0">
+                <a:solidFill>
+                  <a:srgbClr val="CCCCCC"/>
+                </a:solidFill>
+                <a:latin typeface="Calibri"/>
+              </a:defRPr>
+            </a:pPr>
+            <a:r>
+              <a:t>Traffic Prediction</a:t>
+            </a:r>
+          </a:p>
+        </p:txBody>
+      </p:sp>
+      <p:sp>
+        <p:nvSpPr>
+          <p:cNvPr id="27" name="TextBox 26"/>
+          <p:cNvSpPr txBox="1"/>
+          <p:nvPr/>
+        </p:nvSpPr>
+        <p:spPr>
+          <a:xfrm>
+            <a:off x="4526280" y="3657600"/>
+            <a:ext cx="3200400" cy="182880"/>
+          </a:xfrm>
+          <a:prstGeom prst="rect">
+            <a:avLst/>
+          </a:prstGeom>
+          <a:noFill/>
+        </p:spPr>
+        <p:txBody>
+          <a:bodyPr wrap="square" anchor="t" lIns="45720" rIns="45720" tIns="18288" bIns="18288">
+            <a:spAutoFit/>
+          </a:bodyPr>
+          <a:lstStyle/>
+          <a:p>
+            <a:pPr algn="l">
+              <a:lnSpc>
+                <a:spcPct val="120000"/>
+              </a:lnSpc>
+              <a:spcAft>
+                <a:spcPts val="0"/>
+              </a:spcAft>
+              <a:defRPr sz="1000" b="1">
+                <a:solidFill>
+                  <a:srgbClr val="00C9A7"/>
+                </a:solidFill>
+                <a:latin typeface="Calibri"/>
+              </a:defRPr>
+            </a:pPr>
+            <a:r>
+              <a:t>Data:</a:t>
+            </a:r>
+          </a:p>
+        </p:txBody>
+      </p:sp>
+      <p:sp>
+        <p:nvSpPr>
+          <p:cNvPr id="28" name="TextBox 27"/>
+          <p:cNvSpPr txBox="1"/>
+          <p:nvPr/>
+        </p:nvSpPr>
+        <p:spPr>
+          <a:xfrm>
+            <a:off x="4526280" y="3886200"/>
+            <a:ext cx="3200400" cy="320040"/>
+          </a:xfrm>
+          <a:prstGeom prst="rect">
+            <a:avLst/>
+          </a:prstGeom>
+          <a:noFill/>
+        </p:spPr>
+        <p:txBody>
+          <a:bodyPr wrap="square" anchor="t" lIns="45720" rIns="45720" tIns="18288" bIns="18288">
+            <a:spAutoFit/>
+          </a:bodyPr>
+          <a:lstStyle/>
+          <a:p>
+            <a:pPr algn="l">
+              <a:lnSpc>
+                <a:spcPct val="120000"/>
+              </a:lnSpc>
+              <a:spcAft>
+                <a:spcPts val="0"/>
+              </a:spcAft>
+              <a:defRPr sz="900" b="0">
+                <a:solidFill>
+                  <a:srgbClr val="CCCCCC"/>
+                </a:solidFill>
+                <a:latin typeface="Calibri"/>
+              </a:defRPr>
+            </a:pPr>
+            <a:r>
+              <a:t>Real ISP telemetry (SNMP)</a:t>
+            </a:r>
+          </a:p>
+        </p:txBody>
+      </p:sp>
+      <p:sp>
+        <p:nvSpPr>
+          <p:cNvPr id="29" name="TextBox 28"/>
+          <p:cNvSpPr txBox="1"/>
+          <p:nvPr/>
+        </p:nvSpPr>
+        <p:spPr>
+          <a:xfrm>
+            <a:off x="4526280" y="4297680"/>
+            <a:ext cx="3200400" cy="182880"/>
+          </a:xfrm>
+          <a:prstGeom prst="rect">
+            <a:avLst/>
+          </a:prstGeom>
+          <a:noFill/>
+        </p:spPr>
+        <p:txBody>
+          <a:bodyPr wrap="square" anchor="t" lIns="45720" rIns="45720" tIns="18288" bIns="18288">
+            <a:spAutoFit/>
+          </a:bodyPr>
+          <a:lstStyle/>
+          <a:p>
+            <a:pPr algn="l">
+              <a:lnSpc>
+                <a:spcPct val="120000"/>
+              </a:lnSpc>
+              <a:spcAft>
+                <a:spcPts val="0"/>
+              </a:spcAft>
+              <a:defRPr sz="1000" b="1">
+                <a:solidFill>
+                  <a:srgbClr val="00C9A7"/>
+                </a:solidFill>
+                <a:latin typeface="Calibri"/>
+              </a:defRPr>
+            </a:pPr>
+            <a:r>
+              <a:t>Strength:</a:t>
+            </a:r>
+          </a:p>
+        </p:txBody>
+      </p:sp>
+      <p:sp>
+        <p:nvSpPr>
+          <p:cNvPr id="30" name="TextBox 29"/>
+          <p:cNvSpPr txBox="1"/>
+          <p:nvPr/>
+        </p:nvSpPr>
+        <p:spPr>
+          <a:xfrm>
+            <a:off x="4526280" y="4526280"/>
+            <a:ext cx="3200400" cy="320040"/>
+          </a:xfrm>
+          <a:prstGeom prst="rect">
+            <a:avLst/>
+          </a:prstGeom>
+          <a:noFill/>
+        </p:spPr>
+        <p:txBody>
+          <a:bodyPr wrap="square" anchor="t" lIns="45720" rIns="45720" tIns="18288" bIns="18288">
+            <a:spAutoFit/>
+          </a:bodyPr>
+          <a:lstStyle/>
+          <a:p>
+            <a:pPr algn="l">
+              <a:lnSpc>
+                <a:spcPct val="120000"/>
+              </a:lnSpc>
+              <a:spcAft>
+                <a:spcPts val="0"/>
+              </a:spcAft>
+              <a:defRPr sz="900" b="0">
+                <a:solidFill>
+                  <a:srgbClr val="CCCCCC"/>
+                </a:solidFill>
+                <a:latin typeface="Calibri"/>
+              </a:defRPr>
+            </a:pPr>
+            <a:r>
+              <a:t>10% better accuracy</a:t>
+            </a:r>
+          </a:p>
+        </p:txBody>
+      </p:sp>
+      <p:sp>
+        <p:nvSpPr>
+          <p:cNvPr id="31" name="TextBox 30"/>
+          <p:cNvSpPr txBox="1"/>
+          <p:nvPr/>
+        </p:nvSpPr>
+        <p:spPr>
+          <a:xfrm>
+            <a:off x="4526280" y="4937760"/>
+            <a:ext cx="3200400" cy="182880"/>
+          </a:xfrm>
+          <a:prstGeom prst="rect">
+            <a:avLst/>
+          </a:prstGeom>
+          <a:noFill/>
+        </p:spPr>
+        <p:txBody>
+          <a:bodyPr wrap="square" anchor="t" lIns="45720" rIns="45720" tIns="18288" bIns="18288">
+            <a:spAutoFit/>
+          </a:bodyPr>
+          <a:lstStyle/>
+          <a:p>
+            <a:pPr algn="l">
+              <a:lnSpc>
+                <a:spcPct val="120000"/>
+              </a:lnSpc>
+              <a:spcAft>
+                <a:spcPts val="0"/>
+              </a:spcAft>
+              <a:defRPr sz="1000" b="1">
+                <a:solidFill>
+                  <a:srgbClr val="00C9A7"/>
+                </a:solidFill>
+                <a:latin typeface="Calibri"/>
+              </a:defRPr>
+            </a:pPr>
+            <a:r>
+              <a:t>Limit:</a:t>
+            </a:r>
+          </a:p>
+        </p:txBody>
+      </p:sp>
+      <p:sp>
+        <p:nvSpPr>
+          <p:cNvPr id="32" name="TextBox 31"/>
+          <p:cNvSpPr txBox="1"/>
+          <p:nvPr/>
+        </p:nvSpPr>
+        <p:spPr>
+          <a:xfrm>
+            <a:off x="4526280" y="5166360"/>
+            <a:ext cx="3200400" cy="320040"/>
+          </a:xfrm>
+          <a:prstGeom prst="rect">
+            <a:avLst/>
+          </a:prstGeom>
+          <a:noFill/>
+        </p:spPr>
+        <p:txBody>
+          <a:bodyPr wrap="square" anchor="t" lIns="45720" rIns="45720" tIns="18288" bIns="18288">
+            <a:spAutoFit/>
+          </a:bodyPr>
+          <a:lstStyle/>
+          <a:p>
+            <a:pPr algn="l">
+              <a:lnSpc>
+                <a:spcPct val="120000"/>
+              </a:lnSpc>
+              <a:spcAft>
+                <a:spcPts val="0"/>
+              </a:spcAft>
+              <a:defRPr sz="900" b="0">
+                <a:solidFill>
+                  <a:srgbClr val="CCCCCC"/>
+                </a:solidFill>
+                <a:latin typeface="Calibri"/>
+              </a:defRPr>
+            </a:pPr>
+            <a:r>
+              <a:t>More compute overhead</a:t>
+            </a:r>
+          </a:p>
+        </p:txBody>
+      </p:sp>
+      <p:sp>
+        <p:nvSpPr>
+          <p:cNvPr id="33" name="Rounded Rectangle 32"/>
+          <p:cNvSpPr/>
+          <p:nvPr/>
+        </p:nvSpPr>
+        <p:spPr>
+          <a:xfrm>
+            <a:off x="8046720" y="1828800"/>
+            <a:ext cx="3474720" cy="411480"/>
+          </a:xfrm>
+          <a:prstGeom prst="roundRect">
+            <a:avLst/>
+          </a:prstGeom>
+          <a:solidFill>
+            <a:srgbClr val="845EC2"/>
+          </a:solidFill>
+          <a:ln>
+            <a:noFill/>
+          </a:ln>
+        </p:spPr>
+        <p:style>
+          <a:lnRef idx="1">
+            <a:schemeClr val="accent1"/>
+          </a:lnRef>
+          <a:fillRef idx="3">
+            <a:schemeClr val="accent1"/>
+          </a:fillRef>
+          <a:effectRef idx="2">
+            <a:schemeClr val="accent1"/>
+          </a:effectRef>
+          <a:fontRef idx="minor">
+            <a:schemeClr val="lt1"/>
+          </a:fontRef>
+        </p:style>
+        <p:txBody>
+          <a:bodyPr rtlCol="0" anchor="ctr"/>
+          <a:lstStyle/>
+          <a:p>
+            <a:pPr algn="ctr"/>
+          </a:p>
+        </p:txBody>
+      </p:sp>
+      <p:sp>
+        <p:nvSpPr>
+          <p:cNvPr id="34" name="TextBox 33"/>
+          <p:cNvSpPr txBox="1"/>
+          <p:nvPr/>
+        </p:nvSpPr>
+        <p:spPr>
+          <a:xfrm>
+            <a:off x="8046720" y="1874520"/>
+            <a:ext cx="3474720" cy="320040"/>
+          </a:xfrm>
+          <a:prstGeom prst="rect">
+            <a:avLst/>
+          </a:prstGeom>
+          <a:noFill/>
+        </p:spPr>
+        <p:txBody>
+          <a:bodyPr wrap="square" anchor="t" lIns="45720" rIns="45720" tIns="18288" bIns="18288">
+            <a:spAutoFit/>
+          </a:bodyPr>
+          <a:lstStyle/>
+          <a:p>
+            <a:pPr algn="ctr">
+              <a:lnSpc>
+                <a:spcPct val="120000"/>
+              </a:lnSpc>
+              <a:spcAft>
+                <a:spcPts val="0"/>
+              </a:spcAft>
+              <a:defRPr sz="1400" b="1">
+                <a:solidFill>
+                  <a:srgbClr val="FFFFFF"/>
+                </a:solidFill>
+                <a:latin typeface="Calibri"/>
+              </a:defRPr>
+            </a:pPr>
+            <a:r>
+              <a:t>RouteNet-Fermi</a:t>
+            </a:r>
+          </a:p>
+        </p:txBody>
+      </p:sp>
+      <p:sp>
+        <p:nvSpPr>
+          <p:cNvPr id="35" name="Rounded Rectangle 34"/>
+          <p:cNvSpPr/>
+          <p:nvPr/>
+        </p:nvSpPr>
+        <p:spPr>
+          <a:xfrm>
+            <a:off x="8046720" y="2240280"/>
+            <a:ext cx="3474720" cy="2560320"/>
+          </a:xfrm>
+          <a:prstGeom prst="roundRect">
+            <a:avLst/>
+          </a:prstGeom>
+          <a:solidFill>
+            <a:srgbClr val="141832"/>
+          </a:solidFill>
+          <a:ln w="15240">
+            <a:solidFill>
+              <a:srgbClr val="845EC2"/>
+            </a:solidFill>
+          </a:ln>
+        </p:spPr>
+        <p:style>
+          <a:lnRef idx="1">
+            <a:schemeClr val="accent1"/>
+          </a:lnRef>
+          <a:fillRef idx="3">
+            <a:schemeClr val="accent1"/>
+          </a:fillRef>
+          <a:effectRef idx="2">
+            <a:schemeClr val="accent1"/>
+          </a:effectRef>
+          <a:fontRef idx="minor">
+            <a:schemeClr val="lt1"/>
+          </a:fontRef>
+        </p:style>
+        <p:txBody>
+          <a:bodyPr rtlCol="0" anchor="ctr"/>
+          <a:lstStyle/>
+          <a:p>
+            <a:pPr algn="ctr"/>
+          </a:p>
+        </p:txBody>
+      </p:sp>
+      <p:sp>
+        <p:nvSpPr>
+          <p:cNvPr id="36" name="TextBox 35"/>
+          <p:cNvSpPr txBox="1"/>
+          <p:nvPr/>
+        </p:nvSpPr>
+        <p:spPr>
+          <a:xfrm>
+            <a:off x="8183880" y="2377440"/>
+            <a:ext cx="3200400" cy="182880"/>
+          </a:xfrm>
+          <a:prstGeom prst="rect">
+            <a:avLst/>
+          </a:prstGeom>
+          <a:noFill/>
+        </p:spPr>
+        <p:txBody>
+          <a:bodyPr wrap="square" anchor="t" lIns="45720" rIns="45720" tIns="18288" bIns="18288">
+            <a:spAutoFit/>
+          </a:bodyPr>
+          <a:lstStyle/>
+          <a:p>
+            <a:pPr algn="l">
+              <a:lnSpc>
+                <a:spcPct val="120000"/>
+              </a:lnSpc>
+              <a:spcAft>
+                <a:spcPts val="0"/>
+              </a:spcAft>
+              <a:defRPr sz="1000" b="1">
                 <a:solidFill>
                   <a:srgbClr val="845EC2"/>
                 </a:solidFill>
@@ -16929,21 +17973,21 @@
               </a:defRPr>
             </a:pPr>
             <a:r>
-              <a:t>Key Industry Insight</a:t>
-            </a:r>
-          </a:p>
-        </p:txBody>
-      </p:sp>
-      <p:sp>
-        <p:nvSpPr>
-          <p:cNvPr id="15" name="TextBox 14"/>
-          <p:cNvSpPr txBox="1"/>
-          <p:nvPr/>
-        </p:nvSpPr>
-        <p:spPr>
-          <a:xfrm>
-            <a:off x="1490472" y="5029200"/>
-            <a:ext cx="9180576" cy="685800"/>
+              <a:t>Method:</a:t>
+            </a:r>
+          </a:p>
+        </p:txBody>
+      </p:sp>
+      <p:sp>
+        <p:nvSpPr>
+          <p:cNvPr id="37" name="TextBox 36"/>
+          <p:cNvSpPr txBox="1"/>
+          <p:nvPr/>
+        </p:nvSpPr>
+        <p:spPr>
+          <a:xfrm>
+            <a:off x="8183880" y="2606040"/>
+            <a:ext cx="3200400" cy="320040"/>
           </a:xfrm>
           <a:prstGeom prst="rect">
             <a:avLst/>
@@ -16958,12 +18002,12 @@
           <a:p>
             <a:pPr algn="l">
               <a:lnSpc>
-                <a:spcPct val="130000"/>
-              </a:lnSpc>
-              <a:spcAft>
-                <a:spcPts val="0"/>
-              </a:spcAft>
-              <a:defRPr sz="1300" b="0">
+                <a:spcPct val="120000"/>
+              </a:lnSpc>
+              <a:spcAft>
+                <a:spcPts val="0"/>
+              </a:spcAft>
+              <a:defRPr sz="900" b="0">
                 <a:solidFill>
                   <a:srgbClr val="CCCCCC"/>
                 </a:solidFill>
@@ -16971,14 +18015,503 @@
               </a:defRPr>
             </a:pPr>
             <a:r>
-              <a:t>Ericsson shows that good AI outcomes depend on strong telemetry and data foundations. Better data pipelines make network automation and prediction more realistic at scale.</a:t>
-            </a:r>
-          </a:p>
-        </p:txBody>
-      </p:sp>
-      <p:sp>
-        <p:nvSpPr>
-          <p:cNvPr id="16" name="TextBox 15"/>
+              <a:t>Graph Neural Network</a:t>
+            </a:r>
+          </a:p>
+        </p:txBody>
+      </p:sp>
+      <p:sp>
+        <p:nvSpPr>
+          <p:cNvPr id="38" name="TextBox 37"/>
+          <p:cNvSpPr txBox="1"/>
+          <p:nvPr/>
+        </p:nvSpPr>
+        <p:spPr>
+          <a:xfrm>
+            <a:off x="8183880" y="3017520"/>
+            <a:ext cx="3200400" cy="182880"/>
+          </a:xfrm>
+          <a:prstGeom prst="rect">
+            <a:avLst/>
+          </a:prstGeom>
+          <a:noFill/>
+        </p:spPr>
+        <p:txBody>
+          <a:bodyPr wrap="square" anchor="t" lIns="45720" rIns="45720" tIns="18288" bIns="18288">
+            <a:spAutoFit/>
+          </a:bodyPr>
+          <a:lstStyle/>
+          <a:p>
+            <a:pPr algn="l">
+              <a:lnSpc>
+                <a:spcPct val="120000"/>
+              </a:lnSpc>
+              <a:spcAft>
+                <a:spcPts val="0"/>
+              </a:spcAft>
+              <a:defRPr sz="1000" b="1">
+                <a:solidFill>
+                  <a:srgbClr val="845EC2"/>
+                </a:solidFill>
+                <a:latin typeface="Calibri"/>
+              </a:defRPr>
+            </a:pPr>
+            <a:r>
+              <a:t>Task:</a:t>
+            </a:r>
+          </a:p>
+        </p:txBody>
+      </p:sp>
+      <p:sp>
+        <p:nvSpPr>
+          <p:cNvPr id="39" name="TextBox 38"/>
+          <p:cNvSpPr txBox="1"/>
+          <p:nvPr/>
+        </p:nvSpPr>
+        <p:spPr>
+          <a:xfrm>
+            <a:off x="8183880" y="3246120"/>
+            <a:ext cx="3200400" cy="320040"/>
+          </a:xfrm>
+          <a:prstGeom prst="rect">
+            <a:avLst/>
+          </a:prstGeom>
+          <a:noFill/>
+        </p:spPr>
+        <p:txBody>
+          <a:bodyPr wrap="square" anchor="t" lIns="45720" rIns="45720" tIns="18288" bIns="18288">
+            <a:spAutoFit/>
+          </a:bodyPr>
+          <a:lstStyle/>
+          <a:p>
+            <a:pPr algn="l">
+              <a:lnSpc>
+                <a:spcPct val="120000"/>
+              </a:lnSpc>
+              <a:spcAft>
+                <a:spcPts val="0"/>
+              </a:spcAft>
+              <a:defRPr sz="900" b="0">
+                <a:solidFill>
+                  <a:srgbClr val="CCCCCC"/>
+                </a:solidFill>
+                <a:latin typeface="Calibri"/>
+              </a:defRPr>
+            </a:pPr>
+            <a:r>
+              <a:t>QoS Prediction</a:t>
+            </a:r>
+          </a:p>
+        </p:txBody>
+      </p:sp>
+      <p:sp>
+        <p:nvSpPr>
+          <p:cNvPr id="40" name="TextBox 39"/>
+          <p:cNvSpPr txBox="1"/>
+          <p:nvPr/>
+        </p:nvSpPr>
+        <p:spPr>
+          <a:xfrm>
+            <a:off x="8183880" y="3657600"/>
+            <a:ext cx="3200400" cy="182880"/>
+          </a:xfrm>
+          <a:prstGeom prst="rect">
+            <a:avLst/>
+          </a:prstGeom>
+          <a:noFill/>
+        </p:spPr>
+        <p:txBody>
+          <a:bodyPr wrap="square" anchor="t" lIns="45720" rIns="45720" tIns="18288" bIns="18288">
+            <a:spAutoFit/>
+          </a:bodyPr>
+          <a:lstStyle/>
+          <a:p>
+            <a:pPr algn="l">
+              <a:lnSpc>
+                <a:spcPct val="120000"/>
+              </a:lnSpc>
+              <a:spcAft>
+                <a:spcPts val="0"/>
+              </a:spcAft>
+              <a:defRPr sz="1000" b="1">
+                <a:solidFill>
+                  <a:srgbClr val="845EC2"/>
+                </a:solidFill>
+                <a:latin typeface="Calibri"/>
+              </a:defRPr>
+            </a:pPr>
+            <a:r>
+              <a:t>Data:</a:t>
+            </a:r>
+          </a:p>
+        </p:txBody>
+      </p:sp>
+      <p:sp>
+        <p:nvSpPr>
+          <p:cNvPr id="41" name="TextBox 40"/>
+          <p:cNvSpPr txBox="1"/>
+          <p:nvPr/>
+        </p:nvSpPr>
+        <p:spPr>
+          <a:xfrm>
+            <a:off x="8183880" y="3886200"/>
+            <a:ext cx="3200400" cy="320040"/>
+          </a:xfrm>
+          <a:prstGeom prst="rect">
+            <a:avLst/>
+          </a:prstGeom>
+          <a:noFill/>
+        </p:spPr>
+        <p:txBody>
+          <a:bodyPr wrap="square" anchor="t" lIns="45720" rIns="45720" tIns="18288" bIns="18288">
+            <a:spAutoFit/>
+          </a:bodyPr>
+          <a:lstStyle/>
+          <a:p>
+            <a:pPr algn="l">
+              <a:lnSpc>
+                <a:spcPct val="120000"/>
+              </a:lnSpc>
+              <a:spcAft>
+                <a:spcPts val="0"/>
+              </a:spcAft>
+              <a:defRPr sz="900" b="0">
+                <a:solidFill>
+                  <a:srgbClr val="CCCCCC"/>
+                </a:solidFill>
+                <a:latin typeface="Calibri"/>
+              </a:defRPr>
+            </a:pPr>
+            <a:r>
+              <a:t>Simulated (OMNeT++)</a:t>
+            </a:r>
+          </a:p>
+        </p:txBody>
+      </p:sp>
+      <p:sp>
+        <p:nvSpPr>
+          <p:cNvPr id="42" name="TextBox 41"/>
+          <p:cNvSpPr txBox="1"/>
+          <p:nvPr/>
+        </p:nvSpPr>
+        <p:spPr>
+          <a:xfrm>
+            <a:off x="8183880" y="4297680"/>
+            <a:ext cx="3200400" cy="182880"/>
+          </a:xfrm>
+          <a:prstGeom prst="rect">
+            <a:avLst/>
+          </a:prstGeom>
+          <a:noFill/>
+        </p:spPr>
+        <p:txBody>
+          <a:bodyPr wrap="square" anchor="t" lIns="45720" rIns="45720" tIns="18288" bIns="18288">
+            <a:spAutoFit/>
+          </a:bodyPr>
+          <a:lstStyle/>
+          <a:p>
+            <a:pPr algn="l">
+              <a:lnSpc>
+                <a:spcPct val="120000"/>
+              </a:lnSpc>
+              <a:spcAft>
+                <a:spcPts val="0"/>
+              </a:spcAft>
+              <a:defRPr sz="1000" b="1">
+                <a:solidFill>
+                  <a:srgbClr val="845EC2"/>
+                </a:solidFill>
+                <a:latin typeface="Calibri"/>
+              </a:defRPr>
+            </a:pPr>
+            <a:r>
+              <a:t>Strength:</a:t>
+            </a:r>
+          </a:p>
+        </p:txBody>
+      </p:sp>
+      <p:sp>
+        <p:nvSpPr>
+          <p:cNvPr id="43" name="TextBox 42"/>
+          <p:cNvSpPr txBox="1"/>
+          <p:nvPr/>
+        </p:nvSpPr>
+        <p:spPr>
+          <a:xfrm>
+            <a:off x="8183880" y="4526280"/>
+            <a:ext cx="3200400" cy="320040"/>
+          </a:xfrm>
+          <a:prstGeom prst="rect">
+            <a:avLst/>
+          </a:prstGeom>
+          <a:noFill/>
+        </p:spPr>
+        <p:txBody>
+          <a:bodyPr wrap="square" anchor="t" lIns="45720" rIns="45720" tIns="18288" bIns="18288">
+            <a:spAutoFit/>
+          </a:bodyPr>
+          <a:lstStyle/>
+          <a:p>
+            <a:pPr algn="l">
+              <a:lnSpc>
+                <a:spcPct val="120000"/>
+              </a:lnSpc>
+              <a:spcAft>
+                <a:spcPts val="0"/>
+              </a:spcAft>
+              <a:defRPr sz="900" b="0">
+                <a:solidFill>
+                  <a:srgbClr val="CCCCCC"/>
+                </a:solidFill>
+                <a:latin typeface="Calibri"/>
+              </a:defRPr>
+            </a:pPr>
+            <a:r>
+              <a:t>Generalizes to 10x networks</a:t>
+            </a:r>
+          </a:p>
+        </p:txBody>
+      </p:sp>
+      <p:sp>
+        <p:nvSpPr>
+          <p:cNvPr id="44" name="TextBox 43"/>
+          <p:cNvSpPr txBox="1"/>
+          <p:nvPr/>
+        </p:nvSpPr>
+        <p:spPr>
+          <a:xfrm>
+            <a:off x="8183880" y="4937760"/>
+            <a:ext cx="3200400" cy="182880"/>
+          </a:xfrm>
+          <a:prstGeom prst="rect">
+            <a:avLst/>
+          </a:prstGeom>
+          <a:noFill/>
+        </p:spPr>
+        <p:txBody>
+          <a:bodyPr wrap="square" anchor="t" lIns="45720" rIns="45720" tIns="18288" bIns="18288">
+            <a:spAutoFit/>
+          </a:bodyPr>
+          <a:lstStyle/>
+          <a:p>
+            <a:pPr algn="l">
+              <a:lnSpc>
+                <a:spcPct val="120000"/>
+              </a:lnSpc>
+              <a:spcAft>
+                <a:spcPts val="0"/>
+              </a:spcAft>
+              <a:defRPr sz="1000" b="1">
+                <a:solidFill>
+                  <a:srgbClr val="845EC2"/>
+                </a:solidFill>
+                <a:latin typeface="Calibri"/>
+              </a:defRPr>
+            </a:pPr>
+            <a:r>
+              <a:t>Limit:</a:t>
+            </a:r>
+          </a:p>
+        </p:txBody>
+      </p:sp>
+      <p:sp>
+        <p:nvSpPr>
+          <p:cNvPr id="45" name="TextBox 44"/>
+          <p:cNvSpPr txBox="1"/>
+          <p:nvPr/>
+        </p:nvSpPr>
+        <p:spPr>
+          <a:xfrm>
+            <a:off x="8183880" y="5166360"/>
+            <a:ext cx="3200400" cy="320040"/>
+          </a:xfrm>
+          <a:prstGeom prst="rect">
+            <a:avLst/>
+          </a:prstGeom>
+          <a:noFill/>
+        </p:spPr>
+        <p:txBody>
+          <a:bodyPr wrap="square" anchor="t" lIns="45720" rIns="45720" tIns="18288" bIns="18288">
+            <a:spAutoFit/>
+          </a:bodyPr>
+          <a:lstStyle/>
+          <a:p>
+            <a:pPr algn="l">
+              <a:lnSpc>
+                <a:spcPct val="120000"/>
+              </a:lnSpc>
+              <a:spcAft>
+                <a:spcPts val="0"/>
+              </a:spcAft>
+              <a:defRPr sz="900" b="0">
+                <a:solidFill>
+                  <a:srgbClr val="CCCCCC"/>
+                </a:solidFill>
+                <a:latin typeface="Calibri"/>
+              </a:defRPr>
+            </a:pPr>
+            <a:r>
+              <a:t>Relies on simulated data</a:t>
+            </a:r>
+          </a:p>
+        </p:txBody>
+      </p:sp>
+      <p:sp>
+        <p:nvSpPr>
+          <p:cNvPr id="46" name="TextBox 45"/>
+          <p:cNvSpPr txBox="1"/>
+          <p:nvPr/>
+        </p:nvSpPr>
+        <p:spPr>
+          <a:xfrm>
+            <a:off x="731520" y="4754880"/>
+            <a:ext cx="10515600" cy="320040"/>
+          </a:xfrm>
+          <a:prstGeom prst="rect">
+            <a:avLst/>
+          </a:prstGeom>
+          <a:noFill/>
+        </p:spPr>
+        <p:txBody>
+          <a:bodyPr wrap="square" anchor="t" lIns="45720" rIns="45720" tIns="18288" bIns="18288">
+            <a:spAutoFit/>
+          </a:bodyPr>
+          <a:lstStyle/>
+          <a:p>
+            <a:pPr algn="l">
+              <a:lnSpc>
+                <a:spcPct val="120000"/>
+              </a:lnSpc>
+              <a:spcAft>
+                <a:spcPts val="0"/>
+              </a:spcAft>
+              <a:defRPr sz="1800" b="1">
+                <a:solidFill>
+                  <a:srgbClr val="F0B429"/>
+                </a:solidFill>
+                <a:latin typeface="Calibri"/>
+              </a:defRPr>
+            </a:pPr>
+            <a:r>
+              <a:t>Key Takeaways</a:t>
+            </a:r>
+          </a:p>
+        </p:txBody>
+      </p:sp>
+      <p:sp>
+        <p:nvSpPr>
+          <p:cNvPr id="47" name="TextBox 46"/>
+          <p:cNvSpPr txBox="1"/>
+          <p:nvPr/>
+        </p:nvSpPr>
+        <p:spPr>
+          <a:xfrm>
+            <a:off x="731520" y="5120640"/>
+            <a:ext cx="10515600" cy="914400"/>
+          </a:xfrm>
+          <a:prstGeom prst="rect">
+            <a:avLst/>
+          </a:prstGeom>
+          <a:noFill/>
+        </p:spPr>
+        <p:txBody>
+          <a:bodyPr wrap="square" anchor="t">
+            <a:spAutoFit/>
+          </a:bodyPr>
+          <a:lstStyle/>
+          <a:p>
+            <a:pPr>
+              <a:lnSpc>
+                <a:spcPct val="120000"/>
+              </a:lnSpc>
+              <a:spcBef>
+                <a:spcPts val="100"/>
+              </a:spcBef>
+              <a:spcAft>
+                <a:spcPts val="400"/>
+              </a:spcAft>
+              <a:defRPr sz="1200" b="0">
+                <a:solidFill>
+                  <a:srgbClr val="CCCCCC"/>
+                </a:solidFill>
+                <a:latin typeface="Calibri"/>
+              </a:defRPr>
+            </a:pPr>
+            <a:r>
+              <a:t>• No single ML method wins everywhere — LSTM for time-series, GNNs for topology, hybrids for best accuracy but higher cost</a:t>
+            </a:r>
+          </a:p>
+          <a:p>
+            <a:pPr>
+              <a:lnSpc>
+                <a:spcPct val="120000"/>
+              </a:lnSpc>
+              <a:spcBef>
+                <a:spcPts val="100"/>
+              </a:spcBef>
+              <a:spcAft>
+                <a:spcPts val="400"/>
+              </a:spcAft>
+              <a:defRPr sz="1200" b="0">
+                <a:solidFill>
+                  <a:srgbClr val="CCCCCC"/>
+                </a:solidFill>
+                <a:latin typeface="Calibri"/>
+              </a:defRPr>
+            </a:pPr>
+            <a:r>
+              <a:t>• Telemetry data type matters — streaming time-series suits LSTM/RNN; topology + routing suits GNNs</a:t>
+            </a:r>
+          </a:p>
+          <a:p>
+            <a:pPr>
+              <a:lnSpc>
+                <a:spcPct val="120000"/>
+              </a:lnSpc>
+              <a:spcBef>
+                <a:spcPts val="100"/>
+              </a:spcBef>
+              <a:spcAft>
+                <a:spcPts val="400"/>
+              </a:spcAft>
+              <a:defRPr sz="1200" b="0">
+                <a:solidFill>
+                  <a:srgbClr val="CCCCCC"/>
+                </a:solidFill>
+                <a:latin typeface="Calibri"/>
+              </a:defRPr>
+            </a:pPr>
+            <a:r>
+              <a:t>• Real-world deployment remains challenging — most use benchmarks/simulators; live telemetry with low latency is still open</a:t>
+            </a:r>
+          </a:p>
+          <a:p>
+            <a:pPr>
+              <a:lnSpc>
+                <a:spcPct val="120000"/>
+              </a:lnSpc>
+              <a:spcBef>
+                <a:spcPts val="100"/>
+              </a:spcBef>
+              <a:spcAft>
+                <a:spcPts val="400"/>
+              </a:spcAft>
+              <a:defRPr sz="1200" b="0">
+                <a:solidFill>
+                  <a:srgbClr val="CCCCCC"/>
+                </a:solidFill>
+                <a:latin typeface="Calibri"/>
+              </a:defRPr>
+            </a:pPr>
+            <a:r>
+              <a:t>• Trend: combining multiple ML techniques outperforms single methods (e.g., ConvLSTMTransNet beats standalone models)</a:t>
+            </a:r>
+          </a:p>
+        </p:txBody>
+      </p:sp>
+      <p:sp>
+        <p:nvSpPr>
+          <p:cNvPr id="48" name="TextBox 47"/>
           <p:cNvSpPr txBox="1"/>
           <p:nvPr/>
         </p:nvSpPr>
@@ -17007,20 +18540,20 @@
               </a:spcAft>
               <a:defRPr sz="1200" b="1">
                 <a:solidFill>
-                  <a:srgbClr val="845EC2"/>
-                </a:solidFill>
-                <a:latin typeface="Calibri"/>
-              </a:defRPr>
-            </a:pPr>
-            <a:r>
-              <a:t>Presenter: Hashim Kshim</a:t>
-            </a:r>
-          </a:p>
-        </p:txBody>
-      </p:sp>
-      <p:sp>
-        <p:nvSpPr>
-          <p:cNvPr id="17" name="TextBox 16"/>
+                  <a:srgbClr val="F0B429"/>
+                </a:solidFill>
+                <a:latin typeface="Calibri"/>
+              </a:defRPr>
+            </a:pPr>
+            <a:r>
+              <a:t>Presenter: Mazen Alhassan</a:t>
+            </a:r>
+          </a:p>
+        </p:txBody>
+      </p:sp>
+      <p:sp>
+        <p:nvSpPr>
+          <p:cNvPr id="49" name="TextBox 48"/>
           <p:cNvSpPr txBox="1"/>
           <p:nvPr/>
         </p:nvSpPr>
@@ -17055,7 +18588,7 @@
               </a:defRPr>
             </a:pPr>
             <a:r>
-              <a:t>21 / 26</a:t>
+              <a:t>21 / 27</a:t>
             </a:r>
           </a:p>
         </p:txBody>
@@ -17209,7 +18742,7 @@
               </a:defRPr>
             </a:pPr>
             <a:r>
-              <a:t>Emerging Trends: 6G &amp; GenAI</a:t>
+              <a:t>Industry Example: Ericsson</a:t>
             </a:r>
           </a:p>
         </p:txBody>
@@ -17251,7 +18784,7 @@
               </a:defRPr>
             </a:pPr>
             <a:r>
-              <a:t>Two trend groups that shape the future of telemetry</a:t>
+              <a:t>Combining better data organization with automation</a:t>
             </a:r>
           </a:p>
         </p:txBody>
@@ -17306,8 +18839,8 @@
         </p:nvSpPr>
         <p:spPr>
           <a:xfrm>
-            <a:off x="822960" y="4800600"/>
-            <a:ext cx="5166360" cy="1188720"/>
+            <a:off x="777240" y="1600200"/>
+            <a:ext cx="5120640" cy="2514600"/>
           </a:xfrm>
           <a:prstGeom prst="roundRect">
             <a:avLst/>
@@ -17317,7 +18850,7 @@
           </a:solidFill>
           <a:ln w="17780">
             <a:solidFill>
-              <a:srgbClr val="00C9A7"/>
+              <a:srgbClr val="845EC2"/>
             </a:solidFill>
           </a:ln>
         </p:spPr>
@@ -17351,8 +18884,8 @@
         </p:nvSpPr>
         <p:spPr>
           <a:xfrm>
-            <a:off x="987552" y="4937760"/>
-            <a:ext cx="4837176" cy="320040"/>
+            <a:off x="941832" y="1737360"/>
+            <a:ext cx="4791456" cy="320040"/>
           </a:xfrm>
           <a:prstGeom prst="rect">
             <a:avLst/>
@@ -17374,13 +18907,13 @@
               </a:spcAft>
               <a:defRPr sz="1600" b="1">
                 <a:solidFill>
-                  <a:srgbClr val="00C9A7"/>
-                </a:solidFill>
-                <a:latin typeface="Calibri"/>
-              </a:defRPr>
-            </a:pPr>
-            <a:r>
-              <a:t>6G &amp; Next-Gen Telemetry</a:t>
+                  <a:srgbClr val="845EC2"/>
+                </a:solidFill>
+                <a:latin typeface="Calibri"/>
+              </a:defRPr>
+            </a:pPr>
+            <a:r>
+              <a:t>AI-Ready Data Mesh</a:t>
             </a:r>
           </a:p>
         </p:txBody>
@@ -17393,8 +18926,8 @@
         </p:nvSpPr>
         <p:spPr>
           <a:xfrm>
-            <a:off x="987552" y="5303520"/>
-            <a:ext cx="4837176" cy="548640"/>
+            <a:off x="941832" y="2103120"/>
+            <a:ext cx="4791456" cy="1874520"/>
           </a:xfrm>
           <a:prstGeom prst="rect">
             <a:avLst/>
@@ -17414,7 +18947,7 @@
               <a:spcAft>
                 <a:spcPts val="0"/>
               </a:spcAft>
-              <a:defRPr sz="1200" b="0">
+              <a:defRPr sz="1300" b="0">
                 <a:solidFill>
                   <a:srgbClr val="CCCCCC"/>
                 </a:solidFill>
@@ -17422,7 +18955,12 @@
               </a:defRPr>
             </a:pPr>
             <a:r>
-              <a:t>Edge intelligence, digital twins, semantic telemetry, and AI-native design.</a:t>
+              <a:t>Ericsson treats telemetry as a shared data product, not just raw logs.</a:t>
+            </a:r>
+            <a:br/>
+            <a:br/>
+            <a:r>
+              <a:t>Teams manage domain pipelines with common standards, which improves data quality and makes telemetry easier for ML teams to use.</a:t>
             </a:r>
           </a:p>
         </p:txBody>
@@ -17435,8 +18973,8 @@
         </p:nvSpPr>
         <p:spPr>
           <a:xfrm>
-            <a:off x="6172200" y="4800600"/>
-            <a:ext cx="5166360" cy="1188720"/>
+            <a:off x="6263640" y="1600200"/>
+            <a:ext cx="5120640" cy="2514600"/>
           </a:xfrm>
           <a:prstGeom prst="roundRect">
             <a:avLst/>
@@ -17446,7 +18984,7 @@
           </a:solidFill>
           <a:ln w="17780">
             <a:solidFill>
-              <a:srgbClr val="FF8C00"/>
+              <a:srgbClr val="845EC2"/>
             </a:solidFill>
           </a:ln>
         </p:spPr>
@@ -17480,8 +19018,8 @@
         </p:nvSpPr>
         <p:spPr>
           <a:xfrm>
-            <a:off x="6336792" y="4937760"/>
-            <a:ext cx="4837176" cy="320040"/>
+            <a:off x="6428232" y="1737360"/>
+            <a:ext cx="4791456" cy="320040"/>
           </a:xfrm>
           <a:prstGeom prst="rect">
             <a:avLst/>
@@ -17503,13 +19041,13 @@
               </a:spcAft>
               <a:defRPr sz="1600" b="1">
                 <a:solidFill>
-                  <a:srgbClr val="FF8C00"/>
-                </a:solidFill>
-                <a:latin typeface="Calibri"/>
-              </a:defRPr>
-            </a:pPr>
-            <a:r>
-              <a:t>Generative AI &amp; LLMs for Telemetry</a:t>
+                  <a:srgbClr val="845EC2"/>
+                </a:solidFill>
+                <a:latin typeface="Calibri"/>
+              </a:defRPr>
+            </a:pPr>
+            <a:r>
+              <a:t>Transport Automation Controller (TAC)</a:t>
             </a:r>
           </a:p>
         </p:txBody>
@@ -17522,8 +19060,8 @@
         </p:nvSpPr>
         <p:spPr>
           <a:xfrm>
-            <a:off x="6336792" y="5303520"/>
-            <a:ext cx="4837176" cy="548640"/>
+            <a:off x="6428232" y="2103120"/>
+            <a:ext cx="4791456" cy="1874520"/>
           </a:xfrm>
           <a:prstGeom prst="rect">
             <a:avLst/>
@@ -17543,7 +19081,7 @@
               <a:spcAft>
                 <a:spcPts val="0"/>
               </a:spcAft>
-              <a:defRPr sz="1200" b="0">
+              <a:defRPr sz="1300" b="0">
                 <a:solidFill>
                   <a:srgbClr val="CCCCCC"/>
                 </a:solidFill>
@@ -17551,14 +19089,148 @@
               </a:defRPr>
             </a:pPr>
             <a:r>
-              <a:t>Natural-language analytics, synthetic data, incident summaries, and foundation models.</a:t>
-            </a:r>
-          </a:p>
-        </p:txBody>
-      </p:sp>
-      <p:sp>
-        <p:nvSpPr>
-          <p:cNvPr id="13" name="TextBox 12"/>
+              <a:t>Uses AI/ML to monitor transport performance, detect KPI anomalies, and support proactive capacity planning.</a:t>
+            </a:r>
+            <a:br/>
+            <a:br/>
+            <a:r>
+              <a:t>Direction: closed-loop automation through detect, diagnose, and act workflows.</a:t>
+            </a:r>
+          </a:p>
+        </p:txBody>
+      </p:sp>
+      <p:sp>
+        <p:nvSpPr>
+          <p:cNvPr id="13" name="Rounded Rectangle 12"/>
+          <p:cNvSpPr/>
+          <p:nvPr/>
+        </p:nvSpPr>
+        <p:spPr>
+          <a:xfrm>
+            <a:off x="1325880" y="4526280"/>
+            <a:ext cx="9509760" cy="1325880"/>
+          </a:xfrm>
+          <a:prstGeom prst="roundRect">
+            <a:avLst/>
+          </a:prstGeom>
+          <a:solidFill>
+            <a:srgbClr val="141832"/>
+          </a:solidFill>
+          <a:ln w="17780">
+            <a:solidFill>
+              <a:srgbClr val="845EC2"/>
+            </a:solidFill>
+          </a:ln>
+        </p:spPr>
+        <p:style>
+          <a:lnRef idx="1">
+            <a:schemeClr val="accent1"/>
+          </a:lnRef>
+          <a:fillRef idx="3">
+            <a:schemeClr val="accent1"/>
+          </a:fillRef>
+          <a:effectRef idx="2">
+            <a:schemeClr val="accent1"/>
+          </a:effectRef>
+          <a:fontRef idx="minor">
+            <a:schemeClr val="lt1"/>
+          </a:fontRef>
+        </p:style>
+        <p:txBody>
+          <a:bodyPr rtlCol="0" anchor="ctr"/>
+          <a:lstStyle/>
+          <a:p>
+            <a:pPr algn="ctr"/>
+          </a:p>
+        </p:txBody>
+      </p:sp>
+      <p:sp>
+        <p:nvSpPr>
+          <p:cNvPr id="14" name="TextBox 13"/>
+          <p:cNvSpPr txBox="1"/>
+          <p:nvPr/>
+        </p:nvSpPr>
+        <p:spPr>
+          <a:xfrm>
+            <a:off x="1490472" y="4663440"/>
+            <a:ext cx="9180576" cy="320040"/>
+          </a:xfrm>
+          <a:prstGeom prst="rect">
+            <a:avLst/>
+          </a:prstGeom>
+          <a:noFill/>
+        </p:spPr>
+        <p:txBody>
+          <a:bodyPr wrap="square" anchor="t" lIns="45720" rIns="45720" tIns="18288" bIns="18288">
+            <a:spAutoFit/>
+          </a:bodyPr>
+          <a:lstStyle/>
+          <a:p>
+            <a:pPr algn="l">
+              <a:lnSpc>
+                <a:spcPct val="120000"/>
+              </a:lnSpc>
+              <a:spcAft>
+                <a:spcPts val="0"/>
+              </a:spcAft>
+              <a:defRPr sz="1600" b="1">
+                <a:solidFill>
+                  <a:srgbClr val="845EC2"/>
+                </a:solidFill>
+                <a:latin typeface="Calibri"/>
+              </a:defRPr>
+            </a:pPr>
+            <a:r>
+              <a:t>Key Industry Insight</a:t>
+            </a:r>
+          </a:p>
+        </p:txBody>
+      </p:sp>
+      <p:sp>
+        <p:nvSpPr>
+          <p:cNvPr id="15" name="TextBox 14"/>
+          <p:cNvSpPr txBox="1"/>
+          <p:nvPr/>
+        </p:nvSpPr>
+        <p:spPr>
+          <a:xfrm>
+            <a:off x="1490472" y="5029200"/>
+            <a:ext cx="9180576" cy="685800"/>
+          </a:xfrm>
+          <a:prstGeom prst="rect">
+            <a:avLst/>
+          </a:prstGeom>
+          <a:noFill/>
+        </p:spPr>
+        <p:txBody>
+          <a:bodyPr wrap="square" anchor="t" lIns="45720" rIns="45720" tIns="18288" bIns="18288">
+            <a:spAutoFit/>
+          </a:bodyPr>
+          <a:lstStyle/>
+          <a:p>
+            <a:pPr algn="l">
+              <a:lnSpc>
+                <a:spcPct val="130000"/>
+              </a:lnSpc>
+              <a:spcAft>
+                <a:spcPts val="0"/>
+              </a:spcAft>
+              <a:defRPr sz="1300" b="0">
+                <a:solidFill>
+                  <a:srgbClr val="CCCCCC"/>
+                </a:solidFill>
+                <a:latin typeface="Calibri"/>
+              </a:defRPr>
+            </a:pPr>
+            <a:r>
+              <a:t>Ericsson shows that good AI outcomes depend on strong telemetry and data foundations. Better data pipelines make network automation and prediction more realistic at scale.</a:t>
+            </a:r>
+          </a:p>
+        </p:txBody>
+      </p:sp>
+      <p:sp>
+        <p:nvSpPr>
+          <p:cNvPr id="16" name="TextBox 15"/>
           <p:cNvSpPr txBox="1"/>
           <p:nvPr/>
         </p:nvSpPr>
@@ -17600,7 +19272,7 @@
       </p:sp>
       <p:sp>
         <p:nvSpPr>
-          <p:cNvPr id="14" name="TextBox 13"/>
+          <p:cNvPr id="17" name="TextBox 16"/>
           <p:cNvSpPr txBox="1"/>
           <p:nvPr/>
         </p:nvSpPr>
@@ -17635,7 +19307,7 @@
               </a:defRPr>
             </a:pPr>
             <a:r>
-              <a:t>22 / 26</a:t>
+              <a:t>22 / 27</a:t>
             </a:r>
           </a:p>
         </p:txBody>
@@ -17789,7 +19461,7 @@
               </a:defRPr>
             </a:pPr>
             <a:r>
-              <a:t>Open Challenges</a:t>
+              <a:t>Emerging Trends: 6G &amp; GenAI</a:t>
             </a:r>
           </a:p>
         </p:txBody>
@@ -17831,7 +19503,7 @@
               </a:defRPr>
             </a:pPr>
             <a:r>
-              <a:t>Important problems that still need better solutions</a:t>
+              <a:t>Two trend groups that shape the future of telemetry</a:t>
             </a:r>
           </a:p>
         </p:txBody>
@@ -17886,8 +19558,8 @@
         </p:nvSpPr>
         <p:spPr>
           <a:xfrm>
-            <a:off x="731520" y="1554480"/>
-            <a:ext cx="5303520" cy="1325880"/>
+            <a:off x="822960" y="4800600"/>
+            <a:ext cx="5166360" cy="1188720"/>
           </a:xfrm>
           <a:prstGeom prst="roundRect">
             <a:avLst/>
@@ -17895,9 +19567,9 @@
           <a:solidFill>
             <a:srgbClr val="141832"/>
           </a:solidFill>
-          <a:ln w="15240">
+          <a:ln w="17780">
             <a:solidFill>
-              <a:srgbClr val="845EC2"/>
+              <a:srgbClr val="00C9A7"/>
             </a:solidFill>
           </a:ln>
         </p:spPr>
@@ -17931,8 +19603,8 @@
         </p:nvSpPr>
         <p:spPr>
           <a:xfrm>
-            <a:off x="914400" y="1691640"/>
-            <a:ext cx="4937760" cy="320040"/>
+            <a:off x="987552" y="4937760"/>
+            <a:ext cx="4837176" cy="320040"/>
           </a:xfrm>
           <a:prstGeom prst="rect">
             <a:avLst/>
@@ -17954,13 +19626,13 @@
               </a:spcAft>
               <a:defRPr sz="1600" b="1">
                 <a:solidFill>
-                  <a:srgbClr val="845EC2"/>
-                </a:solidFill>
-                <a:latin typeface="Calibri"/>
-              </a:defRPr>
-            </a:pPr>
-            <a:r>
-              <a:t>Not enough labeled data</a:t>
+                  <a:srgbClr val="00C9A7"/>
+                </a:solidFill>
+                <a:latin typeface="Calibri"/>
+              </a:defRPr>
+            </a:pPr>
+            <a:r>
+              <a:t>6G &amp; Next-Gen Telemetry</a:t>
             </a:r>
           </a:p>
         </p:txBody>
@@ -17973,8 +19645,8 @@
         </p:nvSpPr>
         <p:spPr>
           <a:xfrm>
-            <a:off x="914400" y="2057400"/>
-            <a:ext cx="4937760" cy="685800"/>
+            <a:off x="987552" y="5303520"/>
+            <a:ext cx="4837176" cy="548640"/>
           </a:xfrm>
           <a:prstGeom prst="rect">
             <a:avLst/>
@@ -17989,7 +19661,7 @@
           <a:p>
             <a:pPr algn="l">
               <a:lnSpc>
-                <a:spcPct val="120000"/>
+                <a:spcPct val="130000"/>
               </a:lnSpc>
               <a:spcAft>
                 <a:spcPts val="0"/>
@@ -18002,7 +19674,7 @@
               </a:defRPr>
             </a:pPr>
             <a:r>
-              <a:t>Real networks rarely provide clean examples of every failure or attack.</a:t>
+              <a:t>Edge intelligence, digital twins, semantic telemetry, and AI-native design.</a:t>
             </a:r>
           </a:p>
         </p:txBody>
@@ -18015,8 +19687,8 @@
         </p:nvSpPr>
         <p:spPr>
           <a:xfrm>
-            <a:off x="731520" y="3108960"/>
-            <a:ext cx="5303520" cy="1325880"/>
+            <a:off x="6172200" y="4800600"/>
+            <a:ext cx="5166360" cy="1188720"/>
           </a:xfrm>
           <a:prstGeom prst="roundRect">
             <a:avLst/>
@@ -18024,9 +19696,9 @@
           <a:solidFill>
             <a:srgbClr val="141832"/>
           </a:solidFill>
-          <a:ln w="15240">
+          <a:ln w="17780">
             <a:solidFill>
-              <a:srgbClr val="845EC2"/>
+              <a:srgbClr val="FF8C00"/>
             </a:solidFill>
           </a:ln>
         </p:spPr>
@@ -18060,8 +19732,8 @@
         </p:nvSpPr>
         <p:spPr>
           <a:xfrm>
-            <a:off x="914400" y="3246120"/>
-            <a:ext cx="4937760" cy="320040"/>
+            <a:off x="6336792" y="4937760"/>
+            <a:ext cx="4837176" cy="320040"/>
           </a:xfrm>
           <a:prstGeom prst="rect">
             <a:avLst/>
@@ -18083,13 +19755,13 @@
               </a:spcAft>
               <a:defRPr sz="1600" b="1">
                 <a:solidFill>
-                  <a:srgbClr val="845EC2"/>
-                </a:solidFill>
-                <a:latin typeface="Calibri"/>
-              </a:defRPr>
-            </a:pPr>
-            <a:r>
-              <a:t>Scale and speed</a:t>
+                  <a:srgbClr val="FF8C00"/>
+                </a:solidFill>
+                <a:latin typeface="Calibri"/>
+              </a:defRPr>
+            </a:pPr>
+            <a:r>
+              <a:t>Generative AI &amp; LLMs for Telemetry</a:t>
             </a:r>
           </a:p>
         </p:txBody>
@@ -18102,8 +19774,8 @@
         </p:nvSpPr>
         <p:spPr>
           <a:xfrm>
-            <a:off x="914400" y="3611880"/>
-            <a:ext cx="4937760" cy="685800"/>
+            <a:off x="6336792" y="5303520"/>
+            <a:ext cx="4837176" cy="548640"/>
           </a:xfrm>
           <a:prstGeom prst="rect">
             <a:avLst/>
@@ -18118,7 +19790,7 @@
           <a:p>
             <a:pPr algn="l">
               <a:lnSpc>
-                <a:spcPct val="120000"/>
+                <a:spcPct val="130000"/>
               </a:lnSpc>
               <a:spcAft>
                 <a:spcPts val="0"/>
@@ -18131,530 +19803,14 @@
               </a:defRPr>
             </a:pPr>
             <a:r>
-              <a:t>Models must handle massive telemetry streams quickly enough to matter.</a:t>
-            </a:r>
-          </a:p>
-        </p:txBody>
-      </p:sp>
-      <p:sp>
-        <p:nvSpPr>
-          <p:cNvPr id="13" name="Rounded Rectangle 12"/>
-          <p:cNvSpPr/>
-          <p:nvPr/>
-        </p:nvSpPr>
-        <p:spPr>
-          <a:xfrm>
-            <a:off x="731520" y="4663440"/>
-            <a:ext cx="5303520" cy="1325880"/>
-          </a:xfrm>
-          <a:prstGeom prst="roundRect">
-            <a:avLst/>
-          </a:prstGeom>
-          <a:solidFill>
-            <a:srgbClr val="141832"/>
-          </a:solidFill>
-          <a:ln w="15240">
-            <a:solidFill>
-              <a:srgbClr val="845EC2"/>
-            </a:solidFill>
-          </a:ln>
-        </p:spPr>
-        <p:style>
-          <a:lnRef idx="1">
-            <a:schemeClr val="accent1"/>
-          </a:lnRef>
-          <a:fillRef idx="3">
-            <a:schemeClr val="accent1"/>
-          </a:fillRef>
-          <a:effectRef idx="2">
-            <a:schemeClr val="accent1"/>
-          </a:effectRef>
-          <a:fontRef idx="minor">
-            <a:schemeClr val="lt1"/>
-          </a:fontRef>
-        </p:style>
-        <p:txBody>
-          <a:bodyPr rtlCol="0" anchor="ctr"/>
-          <a:lstStyle/>
-          <a:p>
-            <a:pPr algn="ctr"/>
-          </a:p>
-        </p:txBody>
-      </p:sp>
-      <p:sp>
-        <p:nvSpPr>
-          <p:cNvPr id="14" name="TextBox 13"/>
-          <p:cNvSpPr txBox="1"/>
-          <p:nvPr/>
-        </p:nvSpPr>
-        <p:spPr>
-          <a:xfrm>
-            <a:off x="914400" y="4800600"/>
-            <a:ext cx="4937760" cy="320040"/>
-          </a:xfrm>
-          <a:prstGeom prst="rect">
-            <a:avLst/>
-          </a:prstGeom>
-          <a:noFill/>
-        </p:spPr>
-        <p:txBody>
-          <a:bodyPr wrap="square" anchor="t" lIns="45720" rIns="45720" tIns="18288" bIns="18288">
-            <a:spAutoFit/>
-          </a:bodyPr>
-          <a:lstStyle/>
-          <a:p>
-            <a:pPr algn="l">
-              <a:lnSpc>
-                <a:spcPct val="120000"/>
-              </a:lnSpc>
-              <a:spcAft>
-                <a:spcPts val="0"/>
-              </a:spcAft>
-              <a:defRPr sz="1600" b="1">
-                <a:solidFill>
-                  <a:srgbClr val="845EC2"/>
-                </a:solidFill>
-                <a:latin typeface="Calibri"/>
-              </a:defRPr>
-            </a:pPr>
-            <a:r>
-              <a:t>Explainability</a:t>
-            </a:r>
-          </a:p>
-        </p:txBody>
-      </p:sp>
-      <p:sp>
-        <p:nvSpPr>
-          <p:cNvPr id="15" name="TextBox 14"/>
-          <p:cNvSpPr txBox="1"/>
-          <p:nvPr/>
-        </p:nvSpPr>
-        <p:spPr>
-          <a:xfrm>
-            <a:off x="914400" y="5166360"/>
-            <a:ext cx="4937760" cy="685800"/>
-          </a:xfrm>
-          <a:prstGeom prst="rect">
-            <a:avLst/>
-          </a:prstGeom>
-          <a:noFill/>
-        </p:spPr>
-        <p:txBody>
-          <a:bodyPr wrap="square" anchor="t" lIns="45720" rIns="45720" tIns="18288" bIns="18288">
-            <a:spAutoFit/>
-          </a:bodyPr>
-          <a:lstStyle/>
-          <a:p>
-            <a:pPr algn="l">
-              <a:lnSpc>
-                <a:spcPct val="120000"/>
-              </a:lnSpc>
-              <a:spcAft>
-                <a:spcPts val="0"/>
-              </a:spcAft>
-              <a:defRPr sz="1200" b="0">
-                <a:solidFill>
-                  <a:srgbClr val="CCCCCC"/>
-                </a:solidFill>
-                <a:latin typeface="Calibri"/>
-              </a:defRPr>
-            </a:pPr>
-            <a:r>
-              <a:t>Operators need to know why a model raised an alert before they trust it.</a:t>
-            </a:r>
-          </a:p>
-        </p:txBody>
-      </p:sp>
-      <p:sp>
-        <p:nvSpPr>
-          <p:cNvPr id="16" name="Rounded Rectangle 15"/>
-          <p:cNvSpPr/>
-          <p:nvPr/>
-        </p:nvSpPr>
-        <p:spPr>
-          <a:xfrm>
-            <a:off x="6492240" y="1554480"/>
-            <a:ext cx="5303520" cy="1325880"/>
-          </a:xfrm>
-          <a:prstGeom prst="roundRect">
-            <a:avLst/>
-          </a:prstGeom>
-          <a:solidFill>
-            <a:srgbClr val="141832"/>
-          </a:solidFill>
-          <a:ln w="15240">
-            <a:solidFill>
-              <a:srgbClr val="FF8C00"/>
-            </a:solidFill>
-          </a:ln>
-        </p:spPr>
-        <p:style>
-          <a:lnRef idx="1">
-            <a:schemeClr val="accent1"/>
-          </a:lnRef>
-          <a:fillRef idx="3">
-            <a:schemeClr val="accent1"/>
-          </a:fillRef>
-          <a:effectRef idx="2">
-            <a:schemeClr val="accent1"/>
-          </a:effectRef>
-          <a:fontRef idx="minor">
-            <a:schemeClr val="lt1"/>
-          </a:fontRef>
-        </p:style>
-        <p:txBody>
-          <a:bodyPr rtlCol="0" anchor="ctr"/>
-          <a:lstStyle/>
-          <a:p>
-            <a:pPr algn="ctr"/>
-          </a:p>
-        </p:txBody>
-      </p:sp>
-      <p:sp>
-        <p:nvSpPr>
-          <p:cNvPr id="17" name="TextBox 16"/>
-          <p:cNvSpPr txBox="1"/>
-          <p:nvPr/>
-        </p:nvSpPr>
-        <p:spPr>
-          <a:xfrm>
-            <a:off x="6675120" y="1691640"/>
-            <a:ext cx="4937760" cy="320040"/>
-          </a:xfrm>
-          <a:prstGeom prst="rect">
-            <a:avLst/>
-          </a:prstGeom>
-          <a:noFill/>
-        </p:spPr>
-        <p:txBody>
-          <a:bodyPr wrap="square" anchor="t" lIns="45720" rIns="45720" tIns="18288" bIns="18288">
-            <a:spAutoFit/>
-          </a:bodyPr>
-          <a:lstStyle/>
-          <a:p>
-            <a:pPr algn="l">
-              <a:lnSpc>
-                <a:spcPct val="120000"/>
-              </a:lnSpc>
-              <a:spcAft>
-                <a:spcPts val="0"/>
-              </a:spcAft>
-              <a:defRPr sz="1600" b="1">
-                <a:solidFill>
-                  <a:srgbClr val="FF8C00"/>
-                </a:solidFill>
-                <a:latin typeface="Calibri"/>
-              </a:defRPr>
-            </a:pPr>
-            <a:r>
-              <a:t>Concept drift</a:t>
-            </a:r>
-          </a:p>
-        </p:txBody>
-      </p:sp>
-      <p:sp>
-        <p:nvSpPr>
-          <p:cNvPr id="18" name="TextBox 17"/>
-          <p:cNvSpPr txBox="1"/>
-          <p:nvPr/>
-        </p:nvSpPr>
-        <p:spPr>
-          <a:xfrm>
-            <a:off x="6675120" y="2057400"/>
-            <a:ext cx="4937760" cy="685800"/>
-          </a:xfrm>
-          <a:prstGeom prst="rect">
-            <a:avLst/>
-          </a:prstGeom>
-          <a:noFill/>
-        </p:spPr>
-        <p:txBody>
-          <a:bodyPr wrap="square" anchor="t" lIns="45720" rIns="45720" tIns="18288" bIns="18288">
-            <a:spAutoFit/>
-          </a:bodyPr>
-          <a:lstStyle/>
-          <a:p>
-            <a:pPr algn="l">
-              <a:lnSpc>
-                <a:spcPct val="120000"/>
-              </a:lnSpc>
-              <a:spcAft>
-                <a:spcPts val="0"/>
-              </a:spcAft>
-              <a:defRPr sz="1200" b="0">
-                <a:solidFill>
-                  <a:srgbClr val="CCCCCC"/>
-                </a:solidFill>
-                <a:latin typeface="Calibri"/>
-              </a:defRPr>
-            </a:pPr>
-            <a:r>
-              <a:t>Normal traffic changes over time, so models can become outdated.</a:t>
-            </a:r>
-          </a:p>
-        </p:txBody>
-      </p:sp>
-      <p:sp>
-        <p:nvSpPr>
-          <p:cNvPr id="19" name="Rounded Rectangle 18"/>
-          <p:cNvSpPr/>
-          <p:nvPr/>
-        </p:nvSpPr>
-        <p:spPr>
-          <a:xfrm>
-            <a:off x="6492240" y="3108960"/>
-            <a:ext cx="5303520" cy="1325880"/>
-          </a:xfrm>
-          <a:prstGeom prst="roundRect">
-            <a:avLst/>
-          </a:prstGeom>
-          <a:solidFill>
-            <a:srgbClr val="141832"/>
-          </a:solidFill>
-          <a:ln w="15240">
-            <a:solidFill>
-              <a:srgbClr val="FF8C00"/>
-            </a:solidFill>
-          </a:ln>
-        </p:spPr>
-        <p:style>
-          <a:lnRef idx="1">
-            <a:schemeClr val="accent1"/>
-          </a:lnRef>
-          <a:fillRef idx="3">
-            <a:schemeClr val="accent1"/>
-          </a:fillRef>
-          <a:effectRef idx="2">
-            <a:schemeClr val="accent1"/>
-          </a:effectRef>
-          <a:fontRef idx="minor">
-            <a:schemeClr val="lt1"/>
-          </a:fontRef>
-        </p:style>
-        <p:txBody>
-          <a:bodyPr rtlCol="0" anchor="ctr"/>
-          <a:lstStyle/>
-          <a:p>
-            <a:pPr algn="ctr"/>
-          </a:p>
-        </p:txBody>
-      </p:sp>
-      <p:sp>
-        <p:nvSpPr>
-          <p:cNvPr id="20" name="TextBox 19"/>
-          <p:cNvSpPr txBox="1"/>
-          <p:nvPr/>
-        </p:nvSpPr>
-        <p:spPr>
-          <a:xfrm>
-            <a:off x="6675120" y="3246120"/>
-            <a:ext cx="4937760" cy="320040"/>
-          </a:xfrm>
-          <a:prstGeom prst="rect">
-            <a:avLst/>
-          </a:prstGeom>
-          <a:noFill/>
-        </p:spPr>
-        <p:txBody>
-          <a:bodyPr wrap="square" anchor="t" lIns="45720" rIns="45720" tIns="18288" bIns="18288">
-            <a:spAutoFit/>
-          </a:bodyPr>
-          <a:lstStyle/>
-          <a:p>
-            <a:pPr algn="l">
-              <a:lnSpc>
-                <a:spcPct val="120000"/>
-              </a:lnSpc>
-              <a:spcAft>
-                <a:spcPts val="0"/>
-              </a:spcAft>
-              <a:defRPr sz="1600" b="1">
-                <a:solidFill>
-                  <a:srgbClr val="FF8C00"/>
-                </a:solidFill>
-                <a:latin typeface="Calibri"/>
-              </a:defRPr>
-            </a:pPr>
-            <a:r>
-              <a:t>Generalization</a:t>
-            </a:r>
-          </a:p>
-        </p:txBody>
-      </p:sp>
-      <p:sp>
-        <p:nvSpPr>
-          <p:cNvPr id="21" name="TextBox 20"/>
-          <p:cNvSpPr txBox="1"/>
-          <p:nvPr/>
-        </p:nvSpPr>
-        <p:spPr>
-          <a:xfrm>
-            <a:off x="6675120" y="3611880"/>
-            <a:ext cx="4937760" cy="685800"/>
-          </a:xfrm>
-          <a:prstGeom prst="rect">
-            <a:avLst/>
-          </a:prstGeom>
-          <a:noFill/>
-        </p:spPr>
-        <p:txBody>
-          <a:bodyPr wrap="square" anchor="t" lIns="45720" rIns="45720" tIns="18288" bIns="18288">
-            <a:spAutoFit/>
-          </a:bodyPr>
-          <a:lstStyle/>
-          <a:p>
-            <a:pPr algn="l">
-              <a:lnSpc>
-                <a:spcPct val="120000"/>
-              </a:lnSpc>
-              <a:spcAft>
-                <a:spcPts val="0"/>
-              </a:spcAft>
-              <a:defRPr sz="1200" b="0">
-                <a:solidFill>
-                  <a:srgbClr val="CCCCCC"/>
-                </a:solidFill>
-                <a:latin typeface="Calibri"/>
-              </a:defRPr>
-            </a:pPr>
-            <a:r>
-              <a:t>A model that works well in one network may fail in another.</a:t>
-            </a:r>
-          </a:p>
-        </p:txBody>
-      </p:sp>
-      <p:sp>
-        <p:nvSpPr>
-          <p:cNvPr id="22" name="Rounded Rectangle 21"/>
-          <p:cNvSpPr/>
-          <p:nvPr/>
-        </p:nvSpPr>
-        <p:spPr>
-          <a:xfrm>
-            <a:off x="6492240" y="4663440"/>
-            <a:ext cx="5303520" cy="1325880"/>
-          </a:xfrm>
-          <a:prstGeom prst="roundRect">
-            <a:avLst/>
-          </a:prstGeom>
-          <a:solidFill>
-            <a:srgbClr val="141832"/>
-          </a:solidFill>
-          <a:ln w="15240">
-            <a:solidFill>
-              <a:srgbClr val="FF8C00"/>
-            </a:solidFill>
-          </a:ln>
-        </p:spPr>
-        <p:style>
-          <a:lnRef idx="1">
-            <a:schemeClr val="accent1"/>
-          </a:lnRef>
-          <a:fillRef idx="3">
-            <a:schemeClr val="accent1"/>
-          </a:fillRef>
-          <a:effectRef idx="2">
-            <a:schemeClr val="accent1"/>
-          </a:effectRef>
-          <a:fontRef idx="minor">
-            <a:schemeClr val="lt1"/>
-          </a:fontRef>
-        </p:style>
-        <p:txBody>
-          <a:bodyPr rtlCol="0" anchor="ctr"/>
-          <a:lstStyle/>
-          <a:p>
-            <a:pPr algn="ctr"/>
-          </a:p>
-        </p:txBody>
-      </p:sp>
-      <p:sp>
-        <p:nvSpPr>
-          <p:cNvPr id="23" name="TextBox 22"/>
-          <p:cNvSpPr txBox="1"/>
-          <p:nvPr/>
-        </p:nvSpPr>
-        <p:spPr>
-          <a:xfrm>
-            <a:off x="6675120" y="4800600"/>
-            <a:ext cx="4937760" cy="320040"/>
-          </a:xfrm>
-          <a:prstGeom prst="rect">
-            <a:avLst/>
-          </a:prstGeom>
-          <a:noFill/>
-        </p:spPr>
-        <p:txBody>
-          <a:bodyPr wrap="square" anchor="t" lIns="45720" rIns="45720" tIns="18288" bIns="18288">
-            <a:spAutoFit/>
-          </a:bodyPr>
-          <a:lstStyle/>
-          <a:p>
-            <a:pPr algn="l">
-              <a:lnSpc>
-                <a:spcPct val="120000"/>
-              </a:lnSpc>
-              <a:spcAft>
-                <a:spcPts val="0"/>
-              </a:spcAft>
-              <a:defRPr sz="1600" b="1">
-                <a:solidFill>
-                  <a:srgbClr val="FF8C00"/>
-                </a:solidFill>
-                <a:latin typeface="Calibri"/>
-              </a:defRPr>
-            </a:pPr>
-            <a:r>
-              <a:t>Privacy and security</a:t>
-            </a:r>
-          </a:p>
-        </p:txBody>
-      </p:sp>
-      <p:sp>
-        <p:nvSpPr>
-          <p:cNvPr id="24" name="TextBox 23"/>
-          <p:cNvSpPr txBox="1"/>
-          <p:nvPr/>
-        </p:nvSpPr>
-        <p:spPr>
-          <a:xfrm>
-            <a:off x="6675120" y="5166360"/>
-            <a:ext cx="4937760" cy="685800"/>
-          </a:xfrm>
-          <a:prstGeom prst="rect">
-            <a:avLst/>
-          </a:prstGeom>
-          <a:noFill/>
-        </p:spPr>
-        <p:txBody>
-          <a:bodyPr wrap="square" anchor="t" lIns="45720" rIns="45720" tIns="18288" bIns="18288">
-            <a:spAutoFit/>
-          </a:bodyPr>
-          <a:lstStyle/>
-          <a:p>
-            <a:pPr algn="l">
-              <a:lnSpc>
-                <a:spcPct val="120000"/>
-              </a:lnSpc>
-              <a:spcAft>
-                <a:spcPts val="0"/>
-              </a:spcAft>
-              <a:defRPr sz="1200" b="0">
-                <a:solidFill>
-                  <a:srgbClr val="CCCCCC"/>
-                </a:solidFill>
-                <a:latin typeface="Calibri"/>
-              </a:defRPr>
-            </a:pPr>
-            <a:r>
-              <a:t>Telemetry can contain sensitive information that must be protected.</a:t>
-            </a:r>
-          </a:p>
-        </p:txBody>
-      </p:sp>
-      <p:sp>
-        <p:nvSpPr>
-          <p:cNvPr id="25" name="TextBox 24"/>
+              <a:t>Natural-language analytics, synthetic data, incident summaries, and foundation models.</a:t>
+            </a:r>
+          </a:p>
+        </p:txBody>
+      </p:sp>
+      <p:sp>
+        <p:nvSpPr>
+          <p:cNvPr id="13" name="TextBox 12"/>
           <p:cNvSpPr txBox="1"/>
           <p:nvPr/>
         </p:nvSpPr>
@@ -18696,7 +19852,7 @@
       </p:sp>
       <p:sp>
         <p:nvSpPr>
-          <p:cNvPr id="26" name="TextBox 25"/>
+          <p:cNvPr id="14" name="TextBox 13"/>
           <p:cNvSpPr txBox="1"/>
           <p:nvPr/>
         </p:nvSpPr>
@@ -18731,7 +19887,7 @@
               </a:defRPr>
             </a:pPr>
             <a:r>
-              <a:t>23 / 26</a:t>
+              <a:t>23 / 27</a:t>
             </a:r>
           </a:p>
         </p:txBody>
@@ -18771,7 +19927,50 @@
         <p:spPr>
           <a:xfrm>
             <a:off x="0" y="0"/>
-            <a:ext cx="12191695" cy="91440"/>
+            <a:ext cx="137160" cy="6858000"/>
+          </a:xfrm>
+          <a:prstGeom prst="rect">
+            <a:avLst/>
+          </a:prstGeom>
+          <a:solidFill>
+            <a:srgbClr val="845EC2"/>
+          </a:solidFill>
+          <a:ln>
+            <a:noFill/>
+          </a:ln>
+        </p:spPr>
+        <p:style>
+          <a:lnRef idx="1">
+            <a:schemeClr val="accent1"/>
+          </a:lnRef>
+          <a:fillRef idx="3">
+            <a:schemeClr val="accent1"/>
+          </a:fillRef>
+          <a:effectRef idx="2">
+            <a:schemeClr val="accent1"/>
+          </a:effectRef>
+          <a:fontRef idx="minor">
+            <a:schemeClr val="lt1"/>
+          </a:fontRef>
+        </p:style>
+        <p:txBody>
+          <a:bodyPr rtlCol="0" anchor="ctr"/>
+          <a:lstStyle/>
+          <a:p>
+            <a:pPr algn="ctr"/>
+          </a:p>
+        </p:txBody>
+      </p:sp>
+      <p:sp>
+        <p:nvSpPr>
+          <p:cNvPr id="3" name="Rectangle 2"/>
+          <p:cNvSpPr/>
+          <p:nvPr/>
+        </p:nvSpPr>
+        <p:spPr>
+          <a:xfrm>
+            <a:off x="0" y="6784848"/>
+            <a:ext cx="12191695" cy="73152"/>
           </a:xfrm>
           <a:prstGeom prst="rect">
             <a:avLst/>
@@ -18807,23 +20006,151 @@
       </p:sp>
       <p:sp>
         <p:nvSpPr>
-          <p:cNvPr id="3" name="Rectangle 2"/>
+          <p:cNvPr id="4" name="TextBox 3"/>
+          <p:cNvSpPr txBox="1"/>
+          <p:nvPr/>
+        </p:nvSpPr>
+        <p:spPr>
+          <a:xfrm>
+            <a:off x="731520" y="365760"/>
+            <a:ext cx="10515600" cy="640080"/>
+          </a:xfrm>
+          <a:prstGeom prst="rect">
+            <a:avLst/>
+          </a:prstGeom>
+          <a:noFill/>
+        </p:spPr>
+        <p:txBody>
+          <a:bodyPr wrap="square" anchor="t" lIns="45720" rIns="45720" tIns="18288" bIns="18288">
+            <a:spAutoFit/>
+          </a:bodyPr>
+          <a:lstStyle/>
+          <a:p>
+            <a:pPr algn="l">
+              <a:lnSpc>
+                <a:spcPct val="120000"/>
+              </a:lnSpc>
+              <a:spcAft>
+                <a:spcPts val="0"/>
+              </a:spcAft>
+              <a:defRPr sz="3600" b="1">
+                <a:solidFill>
+                  <a:srgbClr val="FFFFFF"/>
+                </a:solidFill>
+                <a:latin typeface="Calibri"/>
+              </a:defRPr>
+            </a:pPr>
+            <a:r>
+              <a:t>Open Challenges</a:t>
+            </a:r>
+          </a:p>
+        </p:txBody>
+      </p:sp>
+      <p:sp>
+        <p:nvSpPr>
+          <p:cNvPr id="5" name="TextBox 4"/>
+          <p:cNvSpPr txBox="1"/>
+          <p:nvPr/>
+        </p:nvSpPr>
+        <p:spPr>
+          <a:xfrm>
+            <a:off x="731520" y="1024128"/>
+            <a:ext cx="10515600" cy="438912"/>
+          </a:xfrm>
+          <a:prstGeom prst="rect">
+            <a:avLst/>
+          </a:prstGeom>
+          <a:noFill/>
+        </p:spPr>
+        <p:txBody>
+          <a:bodyPr wrap="square" anchor="t" lIns="45720" rIns="45720" tIns="18288" bIns="18288">
+            <a:spAutoFit/>
+          </a:bodyPr>
+          <a:lstStyle/>
+          <a:p>
+            <a:pPr algn="l">
+              <a:lnSpc>
+                <a:spcPct val="120000"/>
+              </a:lnSpc>
+              <a:spcAft>
+                <a:spcPts val="0"/>
+              </a:spcAft>
+              <a:defRPr sz="1800" b="0">
+                <a:solidFill>
+                  <a:srgbClr val="CCCCCC"/>
+                </a:solidFill>
+                <a:latin typeface="Calibri"/>
+              </a:defRPr>
+            </a:pPr>
+            <a:r>
+              <a:t>Important problems that still need better solutions</a:t>
+            </a:r>
+          </a:p>
+        </p:txBody>
+      </p:sp>
+      <p:sp>
+        <p:nvSpPr>
+          <p:cNvPr id="6" name="TextBox 5"/>
+          <p:cNvSpPr txBox="1"/>
+          <p:nvPr/>
+        </p:nvSpPr>
+        <p:spPr>
+          <a:xfrm>
+            <a:off x="9326880" y="6263640"/>
+            <a:ext cx="2743200" cy="457200"/>
+          </a:xfrm>
+          <a:prstGeom prst="rect">
+            <a:avLst/>
+          </a:prstGeom>
+          <a:noFill/>
+        </p:spPr>
+        <p:txBody>
+          <a:bodyPr wrap="square" anchor="t" lIns="45720" rIns="45720" tIns="18288" bIns="18288">
+            <a:spAutoFit/>
+          </a:bodyPr>
+          <a:lstStyle/>
+          <a:p>
+            <a:pPr algn="r">
+              <a:lnSpc>
+                <a:spcPct val="120000"/>
+              </a:lnSpc>
+              <a:spcAft>
+                <a:spcPts val="0"/>
+              </a:spcAft>
+              <a:defRPr sz="1200" b="1">
+                <a:solidFill>
+                  <a:srgbClr val="009FFD"/>
+                </a:solidFill>
+                <a:latin typeface="Calibri"/>
+              </a:defRPr>
+            </a:pPr>
+            <a:r>
+              <a:t>Presenter: Hashim Kshim</a:t>
+            </a:r>
+          </a:p>
+        </p:txBody>
+      </p:sp>
+      <p:sp>
+        <p:nvSpPr>
+          <p:cNvPr id="7" name="Rounded Rectangle 6"/>
           <p:cNvSpPr/>
           <p:nvPr/>
         </p:nvSpPr>
         <p:spPr>
           <a:xfrm>
-            <a:off x="0" y="6784848"/>
-            <a:ext cx="12191695" cy="73152"/>
-          </a:xfrm>
-          <a:prstGeom prst="rect">
+            <a:off x="731520" y="1554480"/>
+            <a:ext cx="5303520" cy="1325880"/>
+          </a:xfrm>
+          <a:prstGeom prst="roundRect">
             <a:avLst/>
           </a:prstGeom>
           <a:solidFill>
-            <a:srgbClr val="009FFD"/>
+            <a:srgbClr val="141832"/>
           </a:solidFill>
-          <a:ln>
-            <a:noFill/>
+          <a:ln w="15240">
+            <a:solidFill>
+              <a:srgbClr val="845EC2"/>
+            </a:solidFill>
           </a:ln>
         </p:spPr>
         <p:style>
@@ -18850,14 +20177,14 @@
       </p:sp>
       <p:sp>
         <p:nvSpPr>
-          <p:cNvPr id="4" name="TextBox 3"/>
-          <p:cNvSpPr txBox="1"/>
-          <p:nvPr/>
-        </p:nvSpPr>
-        <p:spPr>
-          <a:xfrm>
-            <a:off x="731520" y="365760"/>
-            <a:ext cx="10515600" cy="640080"/>
+          <p:cNvPr id="8" name="TextBox 7"/>
+          <p:cNvSpPr txBox="1"/>
+          <p:nvPr/>
+        </p:nvSpPr>
+        <p:spPr>
+          <a:xfrm>
+            <a:off x="914400" y="1691640"/>
+            <a:ext cx="4937760" cy="320040"/>
           </a:xfrm>
           <a:prstGeom prst="rect">
             <a:avLst/>
@@ -18877,29 +20204,29 @@
               <a:spcAft>
                 <a:spcPts val="0"/>
               </a:spcAft>
-              <a:defRPr sz="3600" b="1">
-                <a:solidFill>
-                  <a:srgbClr val="FFFFFF"/>
-                </a:solidFill>
-                <a:latin typeface="Calibri"/>
-              </a:defRPr>
-            </a:pPr>
-            <a:r>
-              <a:t>Conclusion &amp; Key Takeaways</a:t>
-            </a:r>
-          </a:p>
-        </p:txBody>
-      </p:sp>
-      <p:sp>
-        <p:nvSpPr>
-          <p:cNvPr id="5" name="TextBox 4"/>
-          <p:cNvSpPr txBox="1"/>
-          <p:nvPr/>
-        </p:nvSpPr>
-        <p:spPr>
-          <a:xfrm>
-            <a:off x="731520" y="1024128"/>
-            <a:ext cx="10515600" cy="438912"/>
+              <a:defRPr sz="1600" b="1">
+                <a:solidFill>
+                  <a:srgbClr val="845EC2"/>
+                </a:solidFill>
+                <a:latin typeface="Calibri"/>
+              </a:defRPr>
+            </a:pPr>
+            <a:r>
+              <a:t>Not enough labeled data</a:t>
+            </a:r>
+          </a:p>
+        </p:txBody>
+      </p:sp>
+      <p:sp>
+        <p:nvSpPr>
+          <p:cNvPr id="9" name="TextBox 8"/>
+          <p:cNvSpPr txBox="1"/>
+          <p:nvPr/>
+        </p:nvSpPr>
+        <p:spPr>
+          <a:xfrm>
+            <a:off x="914400" y="2057400"/>
+            <a:ext cx="4937760" cy="685800"/>
           </a:xfrm>
           <a:prstGeom prst="rect">
             <a:avLst/>
@@ -18919,7 +20246,7 @@
               <a:spcAft>
                 <a:spcPts val="0"/>
               </a:spcAft>
-              <a:defRPr sz="1800" b="0">
+              <a:defRPr sz="1200" b="0">
                 <a:solidFill>
                   <a:srgbClr val="CCCCCC"/>
                 </a:solidFill>
@@ -18927,72 +20254,32 @@
               </a:defRPr>
             </a:pPr>
             <a:r>
-              <a:t>A cleaner final summary</a:t>
-            </a:r>
-          </a:p>
-        </p:txBody>
-      </p:sp>
-      <p:sp>
-        <p:nvSpPr>
-          <p:cNvPr id="6" name="TextBox 5"/>
-          <p:cNvSpPr txBox="1"/>
-          <p:nvPr/>
-        </p:nvSpPr>
-        <p:spPr>
-          <a:xfrm>
-            <a:off x="9326880" y="6263640"/>
-            <a:ext cx="2743200" cy="457200"/>
-          </a:xfrm>
-          <a:prstGeom prst="rect">
-            <a:avLst/>
-          </a:prstGeom>
-          <a:noFill/>
-        </p:spPr>
-        <p:txBody>
-          <a:bodyPr wrap="square" anchor="t" lIns="45720" rIns="45720" tIns="18288" bIns="18288">
-            <a:spAutoFit/>
-          </a:bodyPr>
-          <a:lstStyle/>
-          <a:p>
-            <a:pPr algn="r">
-              <a:lnSpc>
-                <a:spcPct val="120000"/>
-              </a:lnSpc>
-              <a:spcAft>
-                <a:spcPts val="0"/>
-              </a:spcAft>
-              <a:defRPr sz="1200" b="1">
-                <a:solidFill>
-                  <a:srgbClr val="009FFD"/>
-                </a:solidFill>
-                <a:latin typeface="Calibri"/>
-              </a:defRPr>
-            </a:pPr>
-            <a:r>
-              <a:t>Presenter: Hashim Kshim</a:t>
-            </a:r>
-          </a:p>
-        </p:txBody>
-      </p:sp>
-      <p:sp>
-        <p:nvSpPr>
-          <p:cNvPr id="7" name="Oval 6"/>
+              <a:t>Real networks rarely provide clean examples of every failure or attack.</a:t>
+            </a:r>
+          </a:p>
+        </p:txBody>
+      </p:sp>
+      <p:sp>
+        <p:nvSpPr>
+          <p:cNvPr id="10" name="Rounded Rectangle 9"/>
           <p:cNvSpPr/>
           <p:nvPr/>
         </p:nvSpPr>
         <p:spPr>
           <a:xfrm>
-            <a:off x="685800" y="1344168"/>
-            <a:ext cx="384048" cy="384048"/>
-          </a:xfrm>
-          <a:prstGeom prst="ellipse">
+            <a:off x="731520" y="3108960"/>
+            <a:ext cx="5303520" cy="1325880"/>
+          </a:xfrm>
+          <a:prstGeom prst="roundRect">
             <a:avLst/>
           </a:prstGeom>
           <a:solidFill>
-            <a:srgbClr val="009FFD"/>
+            <a:srgbClr val="141832"/>
           </a:solidFill>
-          <a:ln>
-            <a:noFill/>
+          <a:ln w="15240">
+            <a:solidFill>
+              <a:srgbClr val="845EC2"/>
+            </a:solidFill>
           </a:ln>
         </p:spPr>
         <p:style>
@@ -19019,56 +20306,14 @@
       </p:sp>
       <p:sp>
         <p:nvSpPr>
-          <p:cNvPr id="8" name="TextBox 7"/>
-          <p:cNvSpPr txBox="1"/>
-          <p:nvPr/>
-        </p:nvSpPr>
-        <p:spPr>
-          <a:xfrm>
-            <a:off x="685800" y="1371600"/>
-            <a:ext cx="384048" cy="347472"/>
-          </a:xfrm>
-          <a:prstGeom prst="rect">
-            <a:avLst/>
-          </a:prstGeom>
-          <a:noFill/>
-        </p:spPr>
-        <p:txBody>
-          <a:bodyPr wrap="square" anchor="t" lIns="45720" rIns="45720" tIns="18288" bIns="18288">
-            <a:spAutoFit/>
-          </a:bodyPr>
-          <a:lstStyle/>
-          <a:p>
-            <a:pPr algn="ctr">
-              <a:lnSpc>
-                <a:spcPct val="120000"/>
-              </a:lnSpc>
-              <a:spcAft>
-                <a:spcPts val="0"/>
-              </a:spcAft>
-              <a:defRPr sz="1800" b="1">
-                <a:solidFill>
-                  <a:srgbClr val="FFFFFF"/>
-                </a:solidFill>
-                <a:latin typeface="Calibri"/>
-              </a:defRPr>
-            </a:pPr>
-            <a:r>
-              <a:t>1</a:t>
-            </a:r>
-          </a:p>
-        </p:txBody>
-      </p:sp>
-      <p:sp>
-        <p:nvSpPr>
-          <p:cNvPr id="9" name="TextBox 8"/>
-          <p:cNvSpPr txBox="1"/>
-          <p:nvPr/>
-        </p:nvSpPr>
-        <p:spPr>
-          <a:xfrm>
-            <a:off x="1280160" y="1325880"/>
-            <a:ext cx="10515600" cy="320040"/>
+          <p:cNvPr id="11" name="TextBox 10"/>
+          <p:cNvSpPr txBox="1"/>
+          <p:nvPr/>
+        </p:nvSpPr>
+        <p:spPr>
+          <a:xfrm>
+            <a:off x="914400" y="3246120"/>
+            <a:ext cx="4937760" cy="320040"/>
           </a:xfrm>
           <a:prstGeom prst="rect">
             <a:avLst/>
@@ -19088,29 +20333,29 @@
               <a:spcAft>
                 <a:spcPts val="0"/>
               </a:spcAft>
-              <a:defRPr sz="1700" b="1">
-                <a:solidFill>
-                  <a:srgbClr val="009FFD"/>
-                </a:solidFill>
-                <a:latin typeface="Calibri"/>
-              </a:defRPr>
-            </a:pPr>
-            <a:r>
-              <a:t>Telemetry gives the raw picture</a:t>
-            </a:r>
-          </a:p>
-        </p:txBody>
-      </p:sp>
-      <p:sp>
-        <p:nvSpPr>
-          <p:cNvPr id="10" name="TextBox 9"/>
-          <p:cNvSpPr txBox="1"/>
-          <p:nvPr/>
-        </p:nvSpPr>
-        <p:spPr>
-          <a:xfrm>
-            <a:off x="1280160" y="1673352"/>
-            <a:ext cx="10515600" cy="548640"/>
+              <a:defRPr sz="1600" b="1">
+                <a:solidFill>
+                  <a:srgbClr val="845EC2"/>
+                </a:solidFill>
+                <a:latin typeface="Calibri"/>
+              </a:defRPr>
+            </a:pPr>
+            <a:r>
+              <a:t>Scale and speed</a:t>
+            </a:r>
+          </a:p>
+        </p:txBody>
+      </p:sp>
+      <p:sp>
+        <p:nvSpPr>
+          <p:cNvPr id="12" name="TextBox 11"/>
+          <p:cNvSpPr txBox="1"/>
+          <p:nvPr/>
+        </p:nvSpPr>
+        <p:spPr>
+          <a:xfrm>
+            <a:off x="914400" y="3611880"/>
+            <a:ext cx="4937760" cy="685800"/>
           </a:xfrm>
           <a:prstGeom prst="rect">
             <a:avLst/>
@@ -19130,7 +20375,7 @@
               <a:spcAft>
                 <a:spcPts val="0"/>
               </a:spcAft>
-              <a:defRPr sz="1400" b="0">
+              <a:defRPr sz="1200" b="0">
                 <a:solidFill>
                   <a:srgbClr val="CCCCCC"/>
                 </a:solidFill>
@@ -19138,30 +20383,32 @@
               </a:defRPr>
             </a:pPr>
             <a:r>
-              <a:t>It tells us what the network is doing right now through streams of measurements and events.</a:t>
-            </a:r>
-          </a:p>
-        </p:txBody>
-      </p:sp>
-      <p:sp>
-        <p:nvSpPr>
-          <p:cNvPr id="11" name="Oval 10"/>
+              <a:t>Models must handle massive telemetry streams quickly enough to matter.</a:t>
+            </a:r>
+          </a:p>
+        </p:txBody>
+      </p:sp>
+      <p:sp>
+        <p:nvSpPr>
+          <p:cNvPr id="13" name="Rounded Rectangle 12"/>
           <p:cNvSpPr/>
           <p:nvPr/>
         </p:nvSpPr>
         <p:spPr>
           <a:xfrm>
-            <a:off x="685800" y="2331720"/>
-            <a:ext cx="384048" cy="384048"/>
-          </a:xfrm>
-          <a:prstGeom prst="ellipse">
+            <a:off x="731520" y="4663440"/>
+            <a:ext cx="5303520" cy="1325880"/>
+          </a:xfrm>
+          <a:prstGeom prst="roundRect">
             <a:avLst/>
           </a:prstGeom>
           <a:solidFill>
-            <a:srgbClr val="00C9A7"/>
+            <a:srgbClr val="141832"/>
           </a:solidFill>
-          <a:ln>
-            <a:noFill/>
+          <a:ln w="15240">
+            <a:solidFill>
+              <a:srgbClr val="845EC2"/>
+            </a:solidFill>
           </a:ln>
         </p:spPr>
         <p:style>
@@ -19188,56 +20435,14 @@
       </p:sp>
       <p:sp>
         <p:nvSpPr>
-          <p:cNvPr id="12" name="TextBox 11"/>
-          <p:cNvSpPr txBox="1"/>
-          <p:nvPr/>
-        </p:nvSpPr>
-        <p:spPr>
-          <a:xfrm>
-            <a:off x="685800" y="2359152"/>
-            <a:ext cx="384048" cy="347472"/>
-          </a:xfrm>
-          <a:prstGeom prst="rect">
-            <a:avLst/>
-          </a:prstGeom>
-          <a:noFill/>
-        </p:spPr>
-        <p:txBody>
-          <a:bodyPr wrap="square" anchor="t" lIns="45720" rIns="45720" tIns="18288" bIns="18288">
-            <a:spAutoFit/>
-          </a:bodyPr>
-          <a:lstStyle/>
-          <a:p>
-            <a:pPr algn="ctr">
-              <a:lnSpc>
-                <a:spcPct val="120000"/>
-              </a:lnSpc>
-              <a:spcAft>
-                <a:spcPts val="0"/>
-              </a:spcAft>
-              <a:defRPr sz="1800" b="1">
-                <a:solidFill>
-                  <a:srgbClr val="FFFFFF"/>
-                </a:solidFill>
-                <a:latin typeface="Calibri"/>
-              </a:defRPr>
-            </a:pPr>
-            <a:r>
-              <a:t>2</a:t>
-            </a:r>
-          </a:p>
-        </p:txBody>
-      </p:sp>
-      <p:sp>
-        <p:nvSpPr>
-          <p:cNvPr id="13" name="TextBox 12"/>
-          <p:cNvSpPr txBox="1"/>
-          <p:nvPr/>
-        </p:nvSpPr>
-        <p:spPr>
-          <a:xfrm>
-            <a:off x="1280160" y="2313432"/>
-            <a:ext cx="10515600" cy="320040"/>
+          <p:cNvPr id="14" name="TextBox 13"/>
+          <p:cNvSpPr txBox="1"/>
+          <p:nvPr/>
+        </p:nvSpPr>
+        <p:spPr>
+          <a:xfrm>
+            <a:off x="914400" y="4800600"/>
+            <a:ext cx="4937760" cy="320040"/>
           </a:xfrm>
           <a:prstGeom prst="rect">
             <a:avLst/>
@@ -19257,29 +20462,29 @@
               <a:spcAft>
                 <a:spcPts val="0"/>
               </a:spcAft>
-              <a:defRPr sz="1700" b="1">
-                <a:solidFill>
-                  <a:srgbClr val="00C9A7"/>
-                </a:solidFill>
-                <a:latin typeface="Calibri"/>
-              </a:defRPr>
-            </a:pPr>
-            <a:r>
-              <a:t>ML helps turn data into decisions</a:t>
-            </a:r>
-          </a:p>
-        </p:txBody>
-      </p:sp>
-      <p:sp>
-        <p:nvSpPr>
-          <p:cNvPr id="14" name="TextBox 13"/>
-          <p:cNvSpPr txBox="1"/>
-          <p:nvPr/>
-        </p:nvSpPr>
-        <p:spPr>
-          <a:xfrm>
-            <a:off x="1280160" y="2660904"/>
-            <a:ext cx="10515600" cy="548640"/>
+              <a:defRPr sz="1600" b="1">
+                <a:solidFill>
+                  <a:srgbClr val="845EC2"/>
+                </a:solidFill>
+                <a:latin typeface="Calibri"/>
+              </a:defRPr>
+            </a:pPr>
+            <a:r>
+              <a:t>Explainability</a:t>
+            </a:r>
+          </a:p>
+        </p:txBody>
+      </p:sp>
+      <p:sp>
+        <p:nvSpPr>
+          <p:cNvPr id="15" name="TextBox 14"/>
+          <p:cNvSpPr txBox="1"/>
+          <p:nvPr/>
+        </p:nvSpPr>
+        <p:spPr>
+          <a:xfrm>
+            <a:off x="914400" y="5166360"/>
+            <a:ext cx="4937760" cy="685800"/>
           </a:xfrm>
           <a:prstGeom prst="rect">
             <a:avLst/>
@@ -19299,7 +20504,7 @@
               <a:spcAft>
                 <a:spcPts val="0"/>
               </a:spcAft>
-              <a:defRPr sz="1400" b="0">
+              <a:defRPr sz="1200" b="0">
                 <a:solidFill>
                   <a:srgbClr val="CCCCCC"/>
                 </a:solidFill>
@@ -19307,30 +20512,32 @@
               </a:defRPr>
             </a:pPr>
             <a:r>
-              <a:t>It can find anomalies, predict future performance, and help improve QoS.</a:t>
-            </a:r>
-          </a:p>
-        </p:txBody>
-      </p:sp>
-      <p:sp>
-        <p:nvSpPr>
-          <p:cNvPr id="15" name="Oval 14"/>
+              <a:t>Operators need to know why a model raised an alert before they trust it.</a:t>
+            </a:r>
+          </a:p>
+        </p:txBody>
+      </p:sp>
+      <p:sp>
+        <p:nvSpPr>
+          <p:cNvPr id="16" name="Rounded Rectangle 15"/>
           <p:cNvSpPr/>
           <p:nvPr/>
         </p:nvSpPr>
         <p:spPr>
           <a:xfrm>
-            <a:off x="685800" y="3319272"/>
-            <a:ext cx="384048" cy="384048"/>
-          </a:xfrm>
-          <a:prstGeom prst="ellipse">
+            <a:off x="6492240" y="1554480"/>
+            <a:ext cx="5303520" cy="1325880"/>
+          </a:xfrm>
+          <a:prstGeom prst="roundRect">
             <a:avLst/>
           </a:prstGeom>
           <a:solidFill>
-            <a:srgbClr val="845EC2"/>
+            <a:srgbClr val="141832"/>
           </a:solidFill>
-          <a:ln>
-            <a:noFill/>
+          <a:ln w="15240">
+            <a:solidFill>
+              <a:srgbClr val="FF8C00"/>
+            </a:solidFill>
           </a:ln>
         </p:spPr>
         <p:style>
@@ -19357,56 +20564,14 @@
       </p:sp>
       <p:sp>
         <p:nvSpPr>
-          <p:cNvPr id="16" name="TextBox 15"/>
-          <p:cNvSpPr txBox="1"/>
-          <p:nvPr/>
-        </p:nvSpPr>
-        <p:spPr>
-          <a:xfrm>
-            <a:off x="685800" y="3346704"/>
-            <a:ext cx="384048" cy="347472"/>
-          </a:xfrm>
-          <a:prstGeom prst="rect">
-            <a:avLst/>
-          </a:prstGeom>
-          <a:noFill/>
-        </p:spPr>
-        <p:txBody>
-          <a:bodyPr wrap="square" anchor="t" lIns="45720" rIns="45720" tIns="18288" bIns="18288">
-            <a:spAutoFit/>
-          </a:bodyPr>
-          <a:lstStyle/>
-          <a:p>
-            <a:pPr algn="ctr">
-              <a:lnSpc>
-                <a:spcPct val="120000"/>
-              </a:lnSpc>
-              <a:spcAft>
-                <a:spcPts val="0"/>
-              </a:spcAft>
-              <a:defRPr sz="1800" b="1">
-                <a:solidFill>
-                  <a:srgbClr val="FFFFFF"/>
-                </a:solidFill>
-                <a:latin typeface="Calibri"/>
-              </a:defRPr>
-            </a:pPr>
-            <a:r>
-              <a:t>3</a:t>
-            </a:r>
-          </a:p>
-        </p:txBody>
-      </p:sp>
-      <p:sp>
-        <p:nvSpPr>
           <p:cNvPr id="17" name="TextBox 16"/>
           <p:cNvSpPr txBox="1"/>
           <p:nvPr/>
         </p:nvSpPr>
         <p:spPr>
           <a:xfrm>
-            <a:off x="1280160" y="3300984"/>
-            <a:ext cx="10515600" cy="320040"/>
+            <a:off x="6675120" y="1691640"/>
+            <a:ext cx="4937760" cy="320040"/>
           </a:xfrm>
           <a:prstGeom prst="rect">
             <a:avLst/>
@@ -19426,15 +20591,15 @@
               <a:spcAft>
                 <a:spcPts val="0"/>
               </a:spcAft>
-              <a:defRPr sz="1700" b="1">
-                <a:solidFill>
-                  <a:srgbClr val="845EC2"/>
-                </a:solidFill>
-                <a:latin typeface="Calibri"/>
-              </a:defRPr>
-            </a:pPr>
-            <a:r>
-              <a:t>Industry is already using these ideas</a:t>
+              <a:defRPr sz="1600" b="1">
+                <a:solidFill>
+                  <a:srgbClr val="FF8C00"/>
+                </a:solidFill>
+                <a:latin typeface="Calibri"/>
+              </a:defRPr>
+            </a:pPr>
+            <a:r>
+              <a:t>Concept drift</a:t>
             </a:r>
           </a:p>
         </p:txBody>
@@ -19447,8 +20612,8 @@
         </p:nvSpPr>
         <p:spPr>
           <a:xfrm>
-            <a:off x="1280160" y="3648456"/>
-            <a:ext cx="10515600" cy="548640"/>
+            <a:off x="6675120" y="2057400"/>
+            <a:ext cx="4937760" cy="685800"/>
           </a:xfrm>
           <a:prstGeom prst="rect">
             <a:avLst/>
@@ -19468,7 +20633,7 @@
               <a:spcAft>
                 <a:spcPts val="0"/>
               </a:spcAft>
-              <a:defRPr sz="1400" b="0">
+              <a:defRPr sz="1200" b="0">
                 <a:solidFill>
                   <a:srgbClr val="CCCCCC"/>
                 </a:solidFill>
@@ -19476,30 +20641,32 @@
               </a:defRPr>
             </a:pPr>
             <a:r>
-              <a:t>Companies such as Nokia and Ericsson are building more automated, ML-driven telemetry systems.</a:t>
-            </a:r>
-          </a:p>
-        </p:txBody>
-      </p:sp>
-      <p:sp>
-        <p:nvSpPr>
-          <p:cNvPr id="19" name="Oval 18"/>
+              <a:t>Normal traffic changes over time, so models can become outdated.</a:t>
+            </a:r>
+          </a:p>
+        </p:txBody>
+      </p:sp>
+      <p:sp>
+        <p:nvSpPr>
+          <p:cNvPr id="19" name="Rounded Rectangle 18"/>
           <p:cNvSpPr/>
           <p:nvPr/>
         </p:nvSpPr>
         <p:spPr>
           <a:xfrm>
-            <a:off x="685800" y="4306824"/>
-            <a:ext cx="384048" cy="384048"/>
-          </a:xfrm>
-          <a:prstGeom prst="ellipse">
+            <a:off x="6492240" y="3108960"/>
+            <a:ext cx="5303520" cy="1325880"/>
+          </a:xfrm>
+          <a:prstGeom prst="roundRect">
             <a:avLst/>
           </a:prstGeom>
           <a:solidFill>
-            <a:srgbClr val="FF8C00"/>
+            <a:srgbClr val="141832"/>
           </a:solidFill>
-          <a:ln>
-            <a:noFill/>
+          <a:ln w="15240">
+            <a:solidFill>
+              <a:srgbClr val="FF8C00"/>
+            </a:solidFill>
           </a:ln>
         </p:spPr>
         <p:style>
@@ -19532,36 +20699,36 @@
         </p:nvSpPr>
         <p:spPr>
           <a:xfrm>
-            <a:off x="685800" y="4334256"/>
-            <a:ext cx="384048" cy="347472"/>
-          </a:xfrm>
-          <a:prstGeom prst="rect">
-            <a:avLst/>
-          </a:prstGeom>
-          <a:noFill/>
-        </p:spPr>
-        <p:txBody>
-          <a:bodyPr wrap="square" anchor="t" lIns="45720" rIns="45720" tIns="18288" bIns="18288">
-            <a:spAutoFit/>
-          </a:bodyPr>
-          <a:lstStyle/>
-          <a:p>
-            <a:pPr algn="ctr">
-              <a:lnSpc>
-                <a:spcPct val="120000"/>
-              </a:lnSpc>
-              <a:spcAft>
-                <a:spcPts val="0"/>
-              </a:spcAft>
-              <a:defRPr sz="1800" b="1">
-                <a:solidFill>
-                  <a:srgbClr val="FFFFFF"/>
-                </a:solidFill>
-                <a:latin typeface="Calibri"/>
-              </a:defRPr>
-            </a:pPr>
-            <a:r>
-              <a:t>4</a:t>
+            <a:off x="6675120" y="3246120"/>
+            <a:ext cx="4937760" cy="320040"/>
+          </a:xfrm>
+          <a:prstGeom prst="rect">
+            <a:avLst/>
+          </a:prstGeom>
+          <a:noFill/>
+        </p:spPr>
+        <p:txBody>
+          <a:bodyPr wrap="square" anchor="t" lIns="45720" rIns="45720" tIns="18288" bIns="18288">
+            <a:spAutoFit/>
+          </a:bodyPr>
+          <a:lstStyle/>
+          <a:p>
+            <a:pPr algn="l">
+              <a:lnSpc>
+                <a:spcPct val="120000"/>
+              </a:lnSpc>
+              <a:spcAft>
+                <a:spcPts val="0"/>
+              </a:spcAft>
+              <a:defRPr sz="1600" b="1">
+                <a:solidFill>
+                  <a:srgbClr val="FF8C00"/>
+                </a:solidFill>
+                <a:latin typeface="Calibri"/>
+              </a:defRPr>
+            </a:pPr>
+            <a:r>
+              <a:t>Generalization</a:t>
             </a:r>
           </a:p>
         </p:txBody>
@@ -19574,8 +20741,8 @@
         </p:nvSpPr>
         <p:spPr>
           <a:xfrm>
-            <a:off x="1280160" y="4288536"/>
-            <a:ext cx="10515600" cy="320040"/>
+            <a:off x="6675120" y="3611880"/>
+            <a:ext cx="4937760" cy="685800"/>
           </a:xfrm>
           <a:prstGeom prst="rect">
             <a:avLst/>
@@ -19595,49 +20762,7 @@
               <a:spcAft>
                 <a:spcPts val="0"/>
               </a:spcAft>
-              <a:defRPr sz="1700" b="1">
-                <a:solidFill>
-                  <a:srgbClr val="FF8C00"/>
-                </a:solidFill>
-                <a:latin typeface="Calibri"/>
-              </a:defRPr>
-            </a:pPr>
-            <a:r>
-              <a:t>The field is still growing</a:t>
-            </a:r>
-          </a:p>
-        </p:txBody>
-      </p:sp>
-      <p:sp>
-        <p:nvSpPr>
-          <p:cNvPr id="22" name="TextBox 21"/>
-          <p:cNvSpPr txBox="1"/>
-          <p:nvPr/>
-        </p:nvSpPr>
-        <p:spPr>
-          <a:xfrm>
-            <a:off x="1280160" y="4636008"/>
-            <a:ext cx="10515600" cy="548640"/>
-          </a:xfrm>
-          <a:prstGeom prst="rect">
-            <a:avLst/>
-          </a:prstGeom>
-          <a:noFill/>
-        </p:spPr>
-        <p:txBody>
-          <a:bodyPr wrap="square" anchor="t" lIns="45720" rIns="45720" tIns="18288" bIns="18288">
-            <a:spAutoFit/>
-          </a:bodyPr>
-          <a:lstStyle/>
-          <a:p>
-            <a:pPr algn="l">
-              <a:lnSpc>
-                <a:spcPct val="120000"/>
-              </a:lnSpc>
-              <a:spcAft>
-                <a:spcPts val="0"/>
-              </a:spcAft>
-              <a:defRPr sz="1400" b="0">
+              <a:defRPr sz="1200" b="0">
                 <a:solidFill>
                   <a:srgbClr val="CCCCCC"/>
                 </a:solidFill>
@@ -19645,30 +20770,32 @@
               </a:defRPr>
             </a:pPr>
             <a:r>
-              <a:t>6G, digital twins, and generative AI may make telemetry smarter and easier to use.</a:t>
-            </a:r>
-          </a:p>
-        </p:txBody>
-      </p:sp>
-      <p:sp>
-        <p:nvSpPr>
-          <p:cNvPr id="23" name="Oval 22"/>
+              <a:t>A model that works well in one network may fail in another.</a:t>
+            </a:r>
+          </a:p>
+        </p:txBody>
+      </p:sp>
+      <p:sp>
+        <p:nvSpPr>
+          <p:cNvPr id="22" name="Rounded Rectangle 21"/>
           <p:cNvSpPr/>
           <p:nvPr/>
         </p:nvSpPr>
         <p:spPr>
           <a:xfrm>
-            <a:off x="685800" y="5294376"/>
-            <a:ext cx="384048" cy="384048"/>
-          </a:xfrm>
-          <a:prstGeom prst="ellipse">
+            <a:off x="6492240" y="4663440"/>
+            <a:ext cx="5303520" cy="1325880"/>
+          </a:xfrm>
+          <a:prstGeom prst="roundRect">
             <a:avLst/>
           </a:prstGeom>
           <a:solidFill>
-            <a:srgbClr val="E04040"/>
+            <a:srgbClr val="141832"/>
           </a:solidFill>
-          <a:ln>
-            <a:noFill/>
+          <a:ln w="15240">
+            <a:solidFill>
+              <a:srgbClr val="FF8C00"/>
+            </a:solidFill>
           </a:ln>
         </p:spPr>
         <p:style>
@@ -19695,42 +20822,84 @@
       </p:sp>
       <p:sp>
         <p:nvSpPr>
+          <p:cNvPr id="23" name="TextBox 22"/>
+          <p:cNvSpPr txBox="1"/>
+          <p:nvPr/>
+        </p:nvSpPr>
+        <p:spPr>
+          <a:xfrm>
+            <a:off x="6675120" y="4800600"/>
+            <a:ext cx="4937760" cy="320040"/>
+          </a:xfrm>
+          <a:prstGeom prst="rect">
+            <a:avLst/>
+          </a:prstGeom>
+          <a:noFill/>
+        </p:spPr>
+        <p:txBody>
+          <a:bodyPr wrap="square" anchor="t" lIns="45720" rIns="45720" tIns="18288" bIns="18288">
+            <a:spAutoFit/>
+          </a:bodyPr>
+          <a:lstStyle/>
+          <a:p>
+            <a:pPr algn="l">
+              <a:lnSpc>
+                <a:spcPct val="120000"/>
+              </a:lnSpc>
+              <a:spcAft>
+                <a:spcPts val="0"/>
+              </a:spcAft>
+              <a:defRPr sz="1600" b="1">
+                <a:solidFill>
+                  <a:srgbClr val="FF8C00"/>
+                </a:solidFill>
+                <a:latin typeface="Calibri"/>
+              </a:defRPr>
+            </a:pPr>
+            <a:r>
+              <a:t>Privacy and security</a:t>
+            </a:r>
+          </a:p>
+        </p:txBody>
+      </p:sp>
+      <p:sp>
+        <p:nvSpPr>
           <p:cNvPr id="24" name="TextBox 23"/>
           <p:cNvSpPr txBox="1"/>
           <p:nvPr/>
         </p:nvSpPr>
         <p:spPr>
           <a:xfrm>
-            <a:off x="685800" y="5321808"/>
-            <a:ext cx="384048" cy="347472"/>
-          </a:xfrm>
-          <a:prstGeom prst="rect">
-            <a:avLst/>
-          </a:prstGeom>
-          <a:noFill/>
-        </p:spPr>
-        <p:txBody>
-          <a:bodyPr wrap="square" anchor="t" lIns="45720" rIns="45720" tIns="18288" bIns="18288">
-            <a:spAutoFit/>
-          </a:bodyPr>
-          <a:lstStyle/>
-          <a:p>
-            <a:pPr algn="ctr">
-              <a:lnSpc>
-                <a:spcPct val="120000"/>
-              </a:lnSpc>
-              <a:spcAft>
-                <a:spcPts val="0"/>
-              </a:spcAft>
-              <a:defRPr sz="1800" b="1">
-                <a:solidFill>
-                  <a:srgbClr val="FFFFFF"/>
-                </a:solidFill>
-                <a:latin typeface="Calibri"/>
-              </a:defRPr>
-            </a:pPr>
-            <a:r>
-              <a:t>5</a:t>
+            <a:off x="6675120" y="5166360"/>
+            <a:ext cx="4937760" cy="685800"/>
+          </a:xfrm>
+          <a:prstGeom prst="rect">
+            <a:avLst/>
+          </a:prstGeom>
+          <a:noFill/>
+        </p:spPr>
+        <p:txBody>
+          <a:bodyPr wrap="square" anchor="t" lIns="45720" rIns="45720" tIns="18288" bIns="18288">
+            <a:spAutoFit/>
+          </a:bodyPr>
+          <a:lstStyle/>
+          <a:p>
+            <a:pPr algn="l">
+              <a:lnSpc>
+                <a:spcPct val="120000"/>
+              </a:lnSpc>
+              <a:spcAft>
+                <a:spcPts val="0"/>
+              </a:spcAft>
+              <a:defRPr sz="1200" b="0">
+                <a:solidFill>
+                  <a:srgbClr val="CCCCCC"/>
+                </a:solidFill>
+                <a:latin typeface="Calibri"/>
+              </a:defRPr>
+            </a:pPr>
+            <a:r>
+              <a:t>Telemetry can contain sensitive information that must be protected.</a:t>
             </a:r>
           </a:p>
         </p:txBody>
@@ -19738,90 +20907,6 @@
       <p:sp>
         <p:nvSpPr>
           <p:cNvPr id="25" name="TextBox 24"/>
-          <p:cNvSpPr txBox="1"/>
-          <p:nvPr/>
-        </p:nvSpPr>
-        <p:spPr>
-          <a:xfrm>
-            <a:off x="1280160" y="5276088"/>
-            <a:ext cx="10515600" cy="320040"/>
-          </a:xfrm>
-          <a:prstGeom prst="rect">
-            <a:avLst/>
-          </a:prstGeom>
-          <a:noFill/>
-        </p:spPr>
-        <p:txBody>
-          <a:bodyPr wrap="square" anchor="t" lIns="45720" rIns="45720" tIns="18288" bIns="18288">
-            <a:spAutoFit/>
-          </a:bodyPr>
-          <a:lstStyle/>
-          <a:p>
-            <a:pPr algn="l">
-              <a:lnSpc>
-                <a:spcPct val="120000"/>
-              </a:lnSpc>
-              <a:spcAft>
-                <a:spcPts val="0"/>
-              </a:spcAft>
-              <a:defRPr sz="1700" b="1">
-                <a:solidFill>
-                  <a:srgbClr val="E04040"/>
-                </a:solidFill>
-                <a:latin typeface="Calibri"/>
-              </a:defRPr>
-            </a:pPr>
-            <a:r>
-              <a:t>The hardest part is deployment</a:t>
-            </a:r>
-          </a:p>
-        </p:txBody>
-      </p:sp>
-      <p:sp>
-        <p:nvSpPr>
-          <p:cNvPr id="26" name="TextBox 25"/>
-          <p:cNvSpPr txBox="1"/>
-          <p:nvPr/>
-        </p:nvSpPr>
-        <p:spPr>
-          <a:xfrm>
-            <a:off x="1280160" y="5623560"/>
-            <a:ext cx="10515600" cy="548640"/>
-          </a:xfrm>
-          <a:prstGeom prst="rect">
-            <a:avLst/>
-          </a:prstGeom>
-          <a:noFill/>
-        </p:spPr>
-        <p:txBody>
-          <a:bodyPr wrap="square" anchor="t" lIns="45720" rIns="45720" tIns="18288" bIns="18288">
-            <a:spAutoFit/>
-          </a:bodyPr>
-          <a:lstStyle/>
-          <a:p>
-            <a:pPr algn="l">
-              <a:lnSpc>
-                <a:spcPct val="120000"/>
-              </a:lnSpc>
-              <a:spcAft>
-                <a:spcPts val="0"/>
-              </a:spcAft>
-              <a:defRPr sz="1400" b="0">
-                <a:solidFill>
-                  <a:srgbClr val="CCCCCC"/>
-                </a:solidFill>
-                <a:latin typeface="Calibri"/>
-              </a:defRPr>
-            </a:pPr>
-            <a:r>
-              <a:t>Real-world success still depends on trustworthy models, good data, and systems that scale.</a:t>
-            </a:r>
-          </a:p>
-        </p:txBody>
-      </p:sp>
-      <p:sp>
-        <p:nvSpPr>
-          <p:cNvPr id="27" name="TextBox 26"/>
           <p:cNvSpPr txBox="1"/>
           <p:nvPr/>
         </p:nvSpPr>
@@ -19863,7 +20948,7 @@
       </p:sp>
       <p:sp>
         <p:nvSpPr>
-          <p:cNvPr id="28" name="TextBox 27"/>
+          <p:cNvPr id="26" name="TextBox 25"/>
           <p:cNvSpPr txBox="1"/>
           <p:nvPr/>
         </p:nvSpPr>
@@ -19898,7 +20983,7 @@
               </a:defRPr>
             </a:pPr>
             <a:r>
-              <a:t>24 / 26</a:t>
+              <a:t>24 / 27</a:t>
             </a:r>
           </a:p>
         </p:txBody>
@@ -19912,6 +20997,1173 @@
 </file>
 
 <file path=ppt/slides/slide25.xml><?xml version="1.0" encoding="utf-8"?>
+<p:sld xmlns:a="http://schemas.openxmlformats.org/drawingml/2006/main" xmlns:p="http://schemas.openxmlformats.org/presentationml/2006/main" xmlns:r="http://schemas.openxmlformats.org/officeDocument/2006/relationships">
+  <p:cSld>
+    <p:bg>
+      <p:bgPr>
+        <a:solidFill>
+          <a:srgbClr val="1B1F3B"/>
+        </a:solidFill>
+        <a:effectLst/>
+      </p:bgPr>
+    </p:bg>
+    <p:spTree>
+      <p:nvGrpSpPr>
+        <p:cNvPr id="1" name=""/>
+        <p:cNvGrpSpPr/>
+        <p:nvPr/>
+      </p:nvGrpSpPr>
+      <p:grpSpPr/>
+      <p:sp>
+        <p:nvSpPr>
+          <p:cNvPr id="2" name="Rectangle 1"/>
+          <p:cNvSpPr/>
+          <p:nvPr/>
+        </p:nvSpPr>
+        <p:spPr>
+          <a:xfrm>
+            <a:off x="0" y="0"/>
+            <a:ext cx="12191695" cy="91440"/>
+          </a:xfrm>
+          <a:prstGeom prst="rect">
+            <a:avLst/>
+          </a:prstGeom>
+          <a:solidFill>
+            <a:srgbClr val="00C9A7"/>
+          </a:solidFill>
+          <a:ln>
+            <a:noFill/>
+          </a:ln>
+        </p:spPr>
+        <p:style>
+          <a:lnRef idx="1">
+            <a:schemeClr val="accent1"/>
+          </a:lnRef>
+          <a:fillRef idx="3">
+            <a:schemeClr val="accent1"/>
+          </a:fillRef>
+          <a:effectRef idx="2">
+            <a:schemeClr val="accent1"/>
+          </a:effectRef>
+          <a:fontRef idx="minor">
+            <a:schemeClr val="lt1"/>
+          </a:fontRef>
+        </p:style>
+        <p:txBody>
+          <a:bodyPr rtlCol="0" anchor="ctr"/>
+          <a:lstStyle/>
+          <a:p>
+            <a:pPr algn="ctr"/>
+          </a:p>
+        </p:txBody>
+      </p:sp>
+      <p:sp>
+        <p:nvSpPr>
+          <p:cNvPr id="3" name="Rectangle 2"/>
+          <p:cNvSpPr/>
+          <p:nvPr/>
+        </p:nvSpPr>
+        <p:spPr>
+          <a:xfrm>
+            <a:off x="0" y="6784848"/>
+            <a:ext cx="12191695" cy="73152"/>
+          </a:xfrm>
+          <a:prstGeom prst="rect">
+            <a:avLst/>
+          </a:prstGeom>
+          <a:solidFill>
+            <a:srgbClr val="009FFD"/>
+          </a:solidFill>
+          <a:ln>
+            <a:noFill/>
+          </a:ln>
+        </p:spPr>
+        <p:style>
+          <a:lnRef idx="1">
+            <a:schemeClr val="accent1"/>
+          </a:lnRef>
+          <a:fillRef idx="3">
+            <a:schemeClr val="accent1"/>
+          </a:fillRef>
+          <a:effectRef idx="2">
+            <a:schemeClr val="accent1"/>
+          </a:effectRef>
+          <a:fontRef idx="minor">
+            <a:schemeClr val="lt1"/>
+          </a:fontRef>
+        </p:style>
+        <p:txBody>
+          <a:bodyPr rtlCol="0" anchor="ctr"/>
+          <a:lstStyle/>
+          <a:p>
+            <a:pPr algn="ctr"/>
+          </a:p>
+        </p:txBody>
+      </p:sp>
+      <p:sp>
+        <p:nvSpPr>
+          <p:cNvPr id="4" name="TextBox 3"/>
+          <p:cNvSpPr txBox="1"/>
+          <p:nvPr/>
+        </p:nvSpPr>
+        <p:spPr>
+          <a:xfrm>
+            <a:off x="731520" y="365760"/>
+            <a:ext cx="10515600" cy="640080"/>
+          </a:xfrm>
+          <a:prstGeom prst="rect">
+            <a:avLst/>
+          </a:prstGeom>
+          <a:noFill/>
+        </p:spPr>
+        <p:txBody>
+          <a:bodyPr wrap="square" anchor="t" lIns="45720" rIns="45720" tIns="18288" bIns="18288">
+            <a:spAutoFit/>
+          </a:bodyPr>
+          <a:lstStyle/>
+          <a:p>
+            <a:pPr algn="l">
+              <a:lnSpc>
+                <a:spcPct val="120000"/>
+              </a:lnSpc>
+              <a:spcAft>
+                <a:spcPts val="0"/>
+              </a:spcAft>
+              <a:defRPr sz="3600" b="1">
+                <a:solidFill>
+                  <a:srgbClr val="FFFFFF"/>
+                </a:solidFill>
+                <a:latin typeface="Calibri"/>
+              </a:defRPr>
+            </a:pPr>
+            <a:r>
+              <a:t>Conclusion &amp; Key Takeaways</a:t>
+            </a:r>
+          </a:p>
+        </p:txBody>
+      </p:sp>
+      <p:sp>
+        <p:nvSpPr>
+          <p:cNvPr id="5" name="TextBox 4"/>
+          <p:cNvSpPr txBox="1"/>
+          <p:nvPr/>
+        </p:nvSpPr>
+        <p:spPr>
+          <a:xfrm>
+            <a:off x="731520" y="1024128"/>
+            <a:ext cx="10515600" cy="438912"/>
+          </a:xfrm>
+          <a:prstGeom prst="rect">
+            <a:avLst/>
+          </a:prstGeom>
+          <a:noFill/>
+        </p:spPr>
+        <p:txBody>
+          <a:bodyPr wrap="square" anchor="t" lIns="45720" rIns="45720" tIns="18288" bIns="18288">
+            <a:spAutoFit/>
+          </a:bodyPr>
+          <a:lstStyle/>
+          <a:p>
+            <a:pPr algn="l">
+              <a:lnSpc>
+                <a:spcPct val="120000"/>
+              </a:lnSpc>
+              <a:spcAft>
+                <a:spcPts val="0"/>
+              </a:spcAft>
+              <a:defRPr sz="1800" b="0">
+                <a:solidFill>
+                  <a:srgbClr val="CCCCCC"/>
+                </a:solidFill>
+                <a:latin typeface="Calibri"/>
+              </a:defRPr>
+            </a:pPr>
+            <a:r>
+              <a:t>A cleaner final summary</a:t>
+            </a:r>
+          </a:p>
+        </p:txBody>
+      </p:sp>
+      <p:sp>
+        <p:nvSpPr>
+          <p:cNvPr id="6" name="TextBox 5"/>
+          <p:cNvSpPr txBox="1"/>
+          <p:nvPr/>
+        </p:nvSpPr>
+        <p:spPr>
+          <a:xfrm>
+            <a:off x="9326880" y="6263640"/>
+            <a:ext cx="2743200" cy="457200"/>
+          </a:xfrm>
+          <a:prstGeom prst="rect">
+            <a:avLst/>
+          </a:prstGeom>
+          <a:noFill/>
+        </p:spPr>
+        <p:txBody>
+          <a:bodyPr wrap="square" anchor="t" lIns="45720" rIns="45720" tIns="18288" bIns="18288">
+            <a:spAutoFit/>
+          </a:bodyPr>
+          <a:lstStyle/>
+          <a:p>
+            <a:pPr algn="r">
+              <a:lnSpc>
+                <a:spcPct val="120000"/>
+              </a:lnSpc>
+              <a:spcAft>
+                <a:spcPts val="0"/>
+              </a:spcAft>
+              <a:defRPr sz="1200" b="1">
+                <a:solidFill>
+                  <a:srgbClr val="009FFD"/>
+                </a:solidFill>
+                <a:latin typeface="Calibri"/>
+              </a:defRPr>
+            </a:pPr>
+            <a:r>
+              <a:t>Presenter: Hashim Kshim</a:t>
+            </a:r>
+          </a:p>
+        </p:txBody>
+      </p:sp>
+      <p:sp>
+        <p:nvSpPr>
+          <p:cNvPr id="7" name="Oval 6"/>
+          <p:cNvSpPr/>
+          <p:nvPr/>
+        </p:nvSpPr>
+        <p:spPr>
+          <a:xfrm>
+            <a:off x="685800" y="1344168"/>
+            <a:ext cx="384048" cy="384048"/>
+          </a:xfrm>
+          <a:prstGeom prst="ellipse">
+            <a:avLst/>
+          </a:prstGeom>
+          <a:solidFill>
+            <a:srgbClr val="009FFD"/>
+          </a:solidFill>
+          <a:ln>
+            <a:noFill/>
+          </a:ln>
+        </p:spPr>
+        <p:style>
+          <a:lnRef idx="1">
+            <a:schemeClr val="accent1"/>
+          </a:lnRef>
+          <a:fillRef idx="3">
+            <a:schemeClr val="accent1"/>
+          </a:fillRef>
+          <a:effectRef idx="2">
+            <a:schemeClr val="accent1"/>
+          </a:effectRef>
+          <a:fontRef idx="minor">
+            <a:schemeClr val="lt1"/>
+          </a:fontRef>
+        </p:style>
+        <p:txBody>
+          <a:bodyPr rtlCol="0" anchor="ctr"/>
+          <a:lstStyle/>
+          <a:p>
+            <a:pPr algn="ctr"/>
+          </a:p>
+        </p:txBody>
+      </p:sp>
+      <p:sp>
+        <p:nvSpPr>
+          <p:cNvPr id="8" name="TextBox 7"/>
+          <p:cNvSpPr txBox="1"/>
+          <p:nvPr/>
+        </p:nvSpPr>
+        <p:spPr>
+          <a:xfrm>
+            <a:off x="685800" y="1371600"/>
+            <a:ext cx="384048" cy="347472"/>
+          </a:xfrm>
+          <a:prstGeom prst="rect">
+            <a:avLst/>
+          </a:prstGeom>
+          <a:noFill/>
+        </p:spPr>
+        <p:txBody>
+          <a:bodyPr wrap="square" anchor="t" lIns="45720" rIns="45720" tIns="18288" bIns="18288">
+            <a:spAutoFit/>
+          </a:bodyPr>
+          <a:lstStyle/>
+          <a:p>
+            <a:pPr algn="ctr">
+              <a:lnSpc>
+                <a:spcPct val="120000"/>
+              </a:lnSpc>
+              <a:spcAft>
+                <a:spcPts val="0"/>
+              </a:spcAft>
+              <a:defRPr sz="1800" b="1">
+                <a:solidFill>
+                  <a:srgbClr val="FFFFFF"/>
+                </a:solidFill>
+                <a:latin typeface="Calibri"/>
+              </a:defRPr>
+            </a:pPr>
+            <a:r>
+              <a:t>1</a:t>
+            </a:r>
+          </a:p>
+        </p:txBody>
+      </p:sp>
+      <p:sp>
+        <p:nvSpPr>
+          <p:cNvPr id="9" name="TextBox 8"/>
+          <p:cNvSpPr txBox="1"/>
+          <p:nvPr/>
+        </p:nvSpPr>
+        <p:spPr>
+          <a:xfrm>
+            <a:off x="1280160" y="1325880"/>
+            <a:ext cx="10515600" cy="320040"/>
+          </a:xfrm>
+          <a:prstGeom prst="rect">
+            <a:avLst/>
+          </a:prstGeom>
+          <a:noFill/>
+        </p:spPr>
+        <p:txBody>
+          <a:bodyPr wrap="square" anchor="t" lIns="45720" rIns="45720" tIns="18288" bIns="18288">
+            <a:spAutoFit/>
+          </a:bodyPr>
+          <a:lstStyle/>
+          <a:p>
+            <a:pPr algn="l">
+              <a:lnSpc>
+                <a:spcPct val="120000"/>
+              </a:lnSpc>
+              <a:spcAft>
+                <a:spcPts val="0"/>
+              </a:spcAft>
+              <a:defRPr sz="1700" b="1">
+                <a:solidFill>
+                  <a:srgbClr val="009FFD"/>
+                </a:solidFill>
+                <a:latin typeface="Calibri"/>
+              </a:defRPr>
+            </a:pPr>
+            <a:r>
+              <a:t>Telemetry gives the raw picture</a:t>
+            </a:r>
+          </a:p>
+        </p:txBody>
+      </p:sp>
+      <p:sp>
+        <p:nvSpPr>
+          <p:cNvPr id="10" name="TextBox 9"/>
+          <p:cNvSpPr txBox="1"/>
+          <p:nvPr/>
+        </p:nvSpPr>
+        <p:spPr>
+          <a:xfrm>
+            <a:off x="1280160" y="1673352"/>
+            <a:ext cx="10515600" cy="548640"/>
+          </a:xfrm>
+          <a:prstGeom prst="rect">
+            <a:avLst/>
+          </a:prstGeom>
+          <a:noFill/>
+        </p:spPr>
+        <p:txBody>
+          <a:bodyPr wrap="square" anchor="t" lIns="45720" rIns="45720" tIns="18288" bIns="18288">
+            <a:spAutoFit/>
+          </a:bodyPr>
+          <a:lstStyle/>
+          <a:p>
+            <a:pPr algn="l">
+              <a:lnSpc>
+                <a:spcPct val="120000"/>
+              </a:lnSpc>
+              <a:spcAft>
+                <a:spcPts val="0"/>
+              </a:spcAft>
+              <a:defRPr sz="1400" b="0">
+                <a:solidFill>
+                  <a:srgbClr val="CCCCCC"/>
+                </a:solidFill>
+                <a:latin typeface="Calibri"/>
+              </a:defRPr>
+            </a:pPr>
+            <a:r>
+              <a:t>It tells us what the network is doing right now through streams of measurements and events.</a:t>
+            </a:r>
+          </a:p>
+        </p:txBody>
+      </p:sp>
+      <p:sp>
+        <p:nvSpPr>
+          <p:cNvPr id="11" name="Oval 10"/>
+          <p:cNvSpPr/>
+          <p:nvPr/>
+        </p:nvSpPr>
+        <p:spPr>
+          <a:xfrm>
+            <a:off x="685800" y="2331720"/>
+            <a:ext cx="384048" cy="384048"/>
+          </a:xfrm>
+          <a:prstGeom prst="ellipse">
+            <a:avLst/>
+          </a:prstGeom>
+          <a:solidFill>
+            <a:srgbClr val="00C9A7"/>
+          </a:solidFill>
+          <a:ln>
+            <a:noFill/>
+          </a:ln>
+        </p:spPr>
+        <p:style>
+          <a:lnRef idx="1">
+            <a:schemeClr val="accent1"/>
+          </a:lnRef>
+          <a:fillRef idx="3">
+            <a:schemeClr val="accent1"/>
+          </a:fillRef>
+          <a:effectRef idx="2">
+            <a:schemeClr val="accent1"/>
+          </a:effectRef>
+          <a:fontRef idx="minor">
+            <a:schemeClr val="lt1"/>
+          </a:fontRef>
+        </p:style>
+        <p:txBody>
+          <a:bodyPr rtlCol="0" anchor="ctr"/>
+          <a:lstStyle/>
+          <a:p>
+            <a:pPr algn="ctr"/>
+          </a:p>
+        </p:txBody>
+      </p:sp>
+      <p:sp>
+        <p:nvSpPr>
+          <p:cNvPr id="12" name="TextBox 11"/>
+          <p:cNvSpPr txBox="1"/>
+          <p:nvPr/>
+        </p:nvSpPr>
+        <p:spPr>
+          <a:xfrm>
+            <a:off x="685800" y="2359152"/>
+            <a:ext cx="384048" cy="347472"/>
+          </a:xfrm>
+          <a:prstGeom prst="rect">
+            <a:avLst/>
+          </a:prstGeom>
+          <a:noFill/>
+        </p:spPr>
+        <p:txBody>
+          <a:bodyPr wrap="square" anchor="t" lIns="45720" rIns="45720" tIns="18288" bIns="18288">
+            <a:spAutoFit/>
+          </a:bodyPr>
+          <a:lstStyle/>
+          <a:p>
+            <a:pPr algn="ctr">
+              <a:lnSpc>
+                <a:spcPct val="120000"/>
+              </a:lnSpc>
+              <a:spcAft>
+                <a:spcPts val="0"/>
+              </a:spcAft>
+              <a:defRPr sz="1800" b="1">
+                <a:solidFill>
+                  <a:srgbClr val="FFFFFF"/>
+                </a:solidFill>
+                <a:latin typeface="Calibri"/>
+              </a:defRPr>
+            </a:pPr>
+            <a:r>
+              <a:t>2</a:t>
+            </a:r>
+          </a:p>
+        </p:txBody>
+      </p:sp>
+      <p:sp>
+        <p:nvSpPr>
+          <p:cNvPr id="13" name="TextBox 12"/>
+          <p:cNvSpPr txBox="1"/>
+          <p:nvPr/>
+        </p:nvSpPr>
+        <p:spPr>
+          <a:xfrm>
+            <a:off x="1280160" y="2313432"/>
+            <a:ext cx="10515600" cy="320040"/>
+          </a:xfrm>
+          <a:prstGeom prst="rect">
+            <a:avLst/>
+          </a:prstGeom>
+          <a:noFill/>
+        </p:spPr>
+        <p:txBody>
+          <a:bodyPr wrap="square" anchor="t" lIns="45720" rIns="45720" tIns="18288" bIns="18288">
+            <a:spAutoFit/>
+          </a:bodyPr>
+          <a:lstStyle/>
+          <a:p>
+            <a:pPr algn="l">
+              <a:lnSpc>
+                <a:spcPct val="120000"/>
+              </a:lnSpc>
+              <a:spcAft>
+                <a:spcPts val="0"/>
+              </a:spcAft>
+              <a:defRPr sz="1700" b="1">
+                <a:solidFill>
+                  <a:srgbClr val="00C9A7"/>
+                </a:solidFill>
+                <a:latin typeface="Calibri"/>
+              </a:defRPr>
+            </a:pPr>
+            <a:r>
+              <a:t>ML helps turn data into decisions</a:t>
+            </a:r>
+          </a:p>
+        </p:txBody>
+      </p:sp>
+      <p:sp>
+        <p:nvSpPr>
+          <p:cNvPr id="14" name="TextBox 13"/>
+          <p:cNvSpPr txBox="1"/>
+          <p:nvPr/>
+        </p:nvSpPr>
+        <p:spPr>
+          <a:xfrm>
+            <a:off x="1280160" y="2660904"/>
+            <a:ext cx="10515600" cy="548640"/>
+          </a:xfrm>
+          <a:prstGeom prst="rect">
+            <a:avLst/>
+          </a:prstGeom>
+          <a:noFill/>
+        </p:spPr>
+        <p:txBody>
+          <a:bodyPr wrap="square" anchor="t" lIns="45720" rIns="45720" tIns="18288" bIns="18288">
+            <a:spAutoFit/>
+          </a:bodyPr>
+          <a:lstStyle/>
+          <a:p>
+            <a:pPr algn="l">
+              <a:lnSpc>
+                <a:spcPct val="120000"/>
+              </a:lnSpc>
+              <a:spcAft>
+                <a:spcPts val="0"/>
+              </a:spcAft>
+              <a:defRPr sz="1400" b="0">
+                <a:solidFill>
+                  <a:srgbClr val="CCCCCC"/>
+                </a:solidFill>
+                <a:latin typeface="Calibri"/>
+              </a:defRPr>
+            </a:pPr>
+            <a:r>
+              <a:t>It can find anomalies, predict future performance, and help improve QoS.</a:t>
+            </a:r>
+          </a:p>
+        </p:txBody>
+      </p:sp>
+      <p:sp>
+        <p:nvSpPr>
+          <p:cNvPr id="15" name="Oval 14"/>
+          <p:cNvSpPr/>
+          <p:nvPr/>
+        </p:nvSpPr>
+        <p:spPr>
+          <a:xfrm>
+            <a:off x="685800" y="3319272"/>
+            <a:ext cx="384048" cy="384048"/>
+          </a:xfrm>
+          <a:prstGeom prst="ellipse">
+            <a:avLst/>
+          </a:prstGeom>
+          <a:solidFill>
+            <a:srgbClr val="845EC2"/>
+          </a:solidFill>
+          <a:ln>
+            <a:noFill/>
+          </a:ln>
+        </p:spPr>
+        <p:style>
+          <a:lnRef idx="1">
+            <a:schemeClr val="accent1"/>
+          </a:lnRef>
+          <a:fillRef idx="3">
+            <a:schemeClr val="accent1"/>
+          </a:fillRef>
+          <a:effectRef idx="2">
+            <a:schemeClr val="accent1"/>
+          </a:effectRef>
+          <a:fontRef idx="minor">
+            <a:schemeClr val="lt1"/>
+          </a:fontRef>
+        </p:style>
+        <p:txBody>
+          <a:bodyPr rtlCol="0" anchor="ctr"/>
+          <a:lstStyle/>
+          <a:p>
+            <a:pPr algn="ctr"/>
+          </a:p>
+        </p:txBody>
+      </p:sp>
+      <p:sp>
+        <p:nvSpPr>
+          <p:cNvPr id="16" name="TextBox 15"/>
+          <p:cNvSpPr txBox="1"/>
+          <p:nvPr/>
+        </p:nvSpPr>
+        <p:spPr>
+          <a:xfrm>
+            <a:off x="685800" y="3346704"/>
+            <a:ext cx="384048" cy="347472"/>
+          </a:xfrm>
+          <a:prstGeom prst="rect">
+            <a:avLst/>
+          </a:prstGeom>
+          <a:noFill/>
+        </p:spPr>
+        <p:txBody>
+          <a:bodyPr wrap="square" anchor="t" lIns="45720" rIns="45720" tIns="18288" bIns="18288">
+            <a:spAutoFit/>
+          </a:bodyPr>
+          <a:lstStyle/>
+          <a:p>
+            <a:pPr algn="ctr">
+              <a:lnSpc>
+                <a:spcPct val="120000"/>
+              </a:lnSpc>
+              <a:spcAft>
+                <a:spcPts val="0"/>
+              </a:spcAft>
+              <a:defRPr sz="1800" b="1">
+                <a:solidFill>
+                  <a:srgbClr val="FFFFFF"/>
+                </a:solidFill>
+                <a:latin typeface="Calibri"/>
+              </a:defRPr>
+            </a:pPr>
+            <a:r>
+              <a:t>3</a:t>
+            </a:r>
+          </a:p>
+        </p:txBody>
+      </p:sp>
+      <p:sp>
+        <p:nvSpPr>
+          <p:cNvPr id="17" name="TextBox 16"/>
+          <p:cNvSpPr txBox="1"/>
+          <p:nvPr/>
+        </p:nvSpPr>
+        <p:spPr>
+          <a:xfrm>
+            <a:off x="1280160" y="3300984"/>
+            <a:ext cx="10515600" cy="320040"/>
+          </a:xfrm>
+          <a:prstGeom prst="rect">
+            <a:avLst/>
+          </a:prstGeom>
+          <a:noFill/>
+        </p:spPr>
+        <p:txBody>
+          <a:bodyPr wrap="square" anchor="t" lIns="45720" rIns="45720" tIns="18288" bIns="18288">
+            <a:spAutoFit/>
+          </a:bodyPr>
+          <a:lstStyle/>
+          <a:p>
+            <a:pPr algn="l">
+              <a:lnSpc>
+                <a:spcPct val="120000"/>
+              </a:lnSpc>
+              <a:spcAft>
+                <a:spcPts val="0"/>
+              </a:spcAft>
+              <a:defRPr sz="1700" b="1">
+                <a:solidFill>
+                  <a:srgbClr val="845EC2"/>
+                </a:solidFill>
+                <a:latin typeface="Calibri"/>
+              </a:defRPr>
+            </a:pPr>
+            <a:r>
+              <a:t>Industry is already using these ideas</a:t>
+            </a:r>
+          </a:p>
+        </p:txBody>
+      </p:sp>
+      <p:sp>
+        <p:nvSpPr>
+          <p:cNvPr id="18" name="TextBox 17"/>
+          <p:cNvSpPr txBox="1"/>
+          <p:nvPr/>
+        </p:nvSpPr>
+        <p:spPr>
+          <a:xfrm>
+            <a:off x="1280160" y="3648456"/>
+            <a:ext cx="10515600" cy="548640"/>
+          </a:xfrm>
+          <a:prstGeom prst="rect">
+            <a:avLst/>
+          </a:prstGeom>
+          <a:noFill/>
+        </p:spPr>
+        <p:txBody>
+          <a:bodyPr wrap="square" anchor="t" lIns="45720" rIns="45720" tIns="18288" bIns="18288">
+            <a:spAutoFit/>
+          </a:bodyPr>
+          <a:lstStyle/>
+          <a:p>
+            <a:pPr algn="l">
+              <a:lnSpc>
+                <a:spcPct val="120000"/>
+              </a:lnSpc>
+              <a:spcAft>
+                <a:spcPts val="0"/>
+              </a:spcAft>
+              <a:defRPr sz="1400" b="0">
+                <a:solidFill>
+                  <a:srgbClr val="CCCCCC"/>
+                </a:solidFill>
+                <a:latin typeface="Calibri"/>
+              </a:defRPr>
+            </a:pPr>
+            <a:r>
+              <a:t>Companies such as Nokia and Ericsson are building more automated, ML-driven telemetry systems.</a:t>
+            </a:r>
+          </a:p>
+        </p:txBody>
+      </p:sp>
+      <p:sp>
+        <p:nvSpPr>
+          <p:cNvPr id="19" name="Oval 18"/>
+          <p:cNvSpPr/>
+          <p:nvPr/>
+        </p:nvSpPr>
+        <p:spPr>
+          <a:xfrm>
+            <a:off x="685800" y="4306824"/>
+            <a:ext cx="384048" cy="384048"/>
+          </a:xfrm>
+          <a:prstGeom prst="ellipse">
+            <a:avLst/>
+          </a:prstGeom>
+          <a:solidFill>
+            <a:srgbClr val="FF8C00"/>
+          </a:solidFill>
+          <a:ln>
+            <a:noFill/>
+          </a:ln>
+        </p:spPr>
+        <p:style>
+          <a:lnRef idx="1">
+            <a:schemeClr val="accent1"/>
+          </a:lnRef>
+          <a:fillRef idx="3">
+            <a:schemeClr val="accent1"/>
+          </a:fillRef>
+          <a:effectRef idx="2">
+            <a:schemeClr val="accent1"/>
+          </a:effectRef>
+          <a:fontRef idx="minor">
+            <a:schemeClr val="lt1"/>
+          </a:fontRef>
+        </p:style>
+        <p:txBody>
+          <a:bodyPr rtlCol="0" anchor="ctr"/>
+          <a:lstStyle/>
+          <a:p>
+            <a:pPr algn="ctr"/>
+          </a:p>
+        </p:txBody>
+      </p:sp>
+      <p:sp>
+        <p:nvSpPr>
+          <p:cNvPr id="20" name="TextBox 19"/>
+          <p:cNvSpPr txBox="1"/>
+          <p:nvPr/>
+        </p:nvSpPr>
+        <p:spPr>
+          <a:xfrm>
+            <a:off x="685800" y="4334256"/>
+            <a:ext cx="384048" cy="347472"/>
+          </a:xfrm>
+          <a:prstGeom prst="rect">
+            <a:avLst/>
+          </a:prstGeom>
+          <a:noFill/>
+        </p:spPr>
+        <p:txBody>
+          <a:bodyPr wrap="square" anchor="t" lIns="45720" rIns="45720" tIns="18288" bIns="18288">
+            <a:spAutoFit/>
+          </a:bodyPr>
+          <a:lstStyle/>
+          <a:p>
+            <a:pPr algn="ctr">
+              <a:lnSpc>
+                <a:spcPct val="120000"/>
+              </a:lnSpc>
+              <a:spcAft>
+                <a:spcPts val="0"/>
+              </a:spcAft>
+              <a:defRPr sz="1800" b="1">
+                <a:solidFill>
+                  <a:srgbClr val="FFFFFF"/>
+                </a:solidFill>
+                <a:latin typeface="Calibri"/>
+              </a:defRPr>
+            </a:pPr>
+            <a:r>
+              <a:t>4</a:t>
+            </a:r>
+          </a:p>
+        </p:txBody>
+      </p:sp>
+      <p:sp>
+        <p:nvSpPr>
+          <p:cNvPr id="21" name="TextBox 20"/>
+          <p:cNvSpPr txBox="1"/>
+          <p:nvPr/>
+        </p:nvSpPr>
+        <p:spPr>
+          <a:xfrm>
+            <a:off x="1280160" y="4288536"/>
+            <a:ext cx="10515600" cy="320040"/>
+          </a:xfrm>
+          <a:prstGeom prst="rect">
+            <a:avLst/>
+          </a:prstGeom>
+          <a:noFill/>
+        </p:spPr>
+        <p:txBody>
+          <a:bodyPr wrap="square" anchor="t" lIns="45720" rIns="45720" tIns="18288" bIns="18288">
+            <a:spAutoFit/>
+          </a:bodyPr>
+          <a:lstStyle/>
+          <a:p>
+            <a:pPr algn="l">
+              <a:lnSpc>
+                <a:spcPct val="120000"/>
+              </a:lnSpc>
+              <a:spcAft>
+                <a:spcPts val="0"/>
+              </a:spcAft>
+              <a:defRPr sz="1700" b="1">
+                <a:solidFill>
+                  <a:srgbClr val="FF8C00"/>
+                </a:solidFill>
+                <a:latin typeface="Calibri"/>
+              </a:defRPr>
+            </a:pPr>
+            <a:r>
+              <a:t>The field is still growing</a:t>
+            </a:r>
+          </a:p>
+        </p:txBody>
+      </p:sp>
+      <p:sp>
+        <p:nvSpPr>
+          <p:cNvPr id="22" name="TextBox 21"/>
+          <p:cNvSpPr txBox="1"/>
+          <p:nvPr/>
+        </p:nvSpPr>
+        <p:spPr>
+          <a:xfrm>
+            <a:off x="1280160" y="4636008"/>
+            <a:ext cx="10515600" cy="548640"/>
+          </a:xfrm>
+          <a:prstGeom prst="rect">
+            <a:avLst/>
+          </a:prstGeom>
+          <a:noFill/>
+        </p:spPr>
+        <p:txBody>
+          <a:bodyPr wrap="square" anchor="t" lIns="45720" rIns="45720" tIns="18288" bIns="18288">
+            <a:spAutoFit/>
+          </a:bodyPr>
+          <a:lstStyle/>
+          <a:p>
+            <a:pPr algn="l">
+              <a:lnSpc>
+                <a:spcPct val="120000"/>
+              </a:lnSpc>
+              <a:spcAft>
+                <a:spcPts val="0"/>
+              </a:spcAft>
+              <a:defRPr sz="1400" b="0">
+                <a:solidFill>
+                  <a:srgbClr val="CCCCCC"/>
+                </a:solidFill>
+                <a:latin typeface="Calibri"/>
+              </a:defRPr>
+            </a:pPr>
+            <a:r>
+              <a:t>6G, digital twins, and generative AI may make telemetry smarter and easier to use.</a:t>
+            </a:r>
+          </a:p>
+        </p:txBody>
+      </p:sp>
+      <p:sp>
+        <p:nvSpPr>
+          <p:cNvPr id="23" name="Oval 22"/>
+          <p:cNvSpPr/>
+          <p:nvPr/>
+        </p:nvSpPr>
+        <p:spPr>
+          <a:xfrm>
+            <a:off x="685800" y="5294376"/>
+            <a:ext cx="384048" cy="384048"/>
+          </a:xfrm>
+          <a:prstGeom prst="ellipse">
+            <a:avLst/>
+          </a:prstGeom>
+          <a:solidFill>
+            <a:srgbClr val="E04040"/>
+          </a:solidFill>
+          <a:ln>
+            <a:noFill/>
+          </a:ln>
+        </p:spPr>
+        <p:style>
+          <a:lnRef idx="1">
+            <a:schemeClr val="accent1"/>
+          </a:lnRef>
+          <a:fillRef idx="3">
+            <a:schemeClr val="accent1"/>
+          </a:fillRef>
+          <a:effectRef idx="2">
+            <a:schemeClr val="accent1"/>
+          </a:effectRef>
+          <a:fontRef idx="minor">
+            <a:schemeClr val="lt1"/>
+          </a:fontRef>
+        </p:style>
+        <p:txBody>
+          <a:bodyPr rtlCol="0" anchor="ctr"/>
+          <a:lstStyle/>
+          <a:p>
+            <a:pPr algn="ctr"/>
+          </a:p>
+        </p:txBody>
+      </p:sp>
+      <p:sp>
+        <p:nvSpPr>
+          <p:cNvPr id="24" name="TextBox 23"/>
+          <p:cNvSpPr txBox="1"/>
+          <p:nvPr/>
+        </p:nvSpPr>
+        <p:spPr>
+          <a:xfrm>
+            <a:off x="685800" y="5321808"/>
+            <a:ext cx="384048" cy="347472"/>
+          </a:xfrm>
+          <a:prstGeom prst="rect">
+            <a:avLst/>
+          </a:prstGeom>
+          <a:noFill/>
+        </p:spPr>
+        <p:txBody>
+          <a:bodyPr wrap="square" anchor="t" lIns="45720" rIns="45720" tIns="18288" bIns="18288">
+            <a:spAutoFit/>
+          </a:bodyPr>
+          <a:lstStyle/>
+          <a:p>
+            <a:pPr algn="ctr">
+              <a:lnSpc>
+                <a:spcPct val="120000"/>
+              </a:lnSpc>
+              <a:spcAft>
+                <a:spcPts val="0"/>
+              </a:spcAft>
+              <a:defRPr sz="1800" b="1">
+                <a:solidFill>
+                  <a:srgbClr val="FFFFFF"/>
+                </a:solidFill>
+                <a:latin typeface="Calibri"/>
+              </a:defRPr>
+            </a:pPr>
+            <a:r>
+              <a:t>5</a:t>
+            </a:r>
+          </a:p>
+        </p:txBody>
+      </p:sp>
+      <p:sp>
+        <p:nvSpPr>
+          <p:cNvPr id="25" name="TextBox 24"/>
+          <p:cNvSpPr txBox="1"/>
+          <p:nvPr/>
+        </p:nvSpPr>
+        <p:spPr>
+          <a:xfrm>
+            <a:off x="1280160" y="5276088"/>
+            <a:ext cx="10515600" cy="320040"/>
+          </a:xfrm>
+          <a:prstGeom prst="rect">
+            <a:avLst/>
+          </a:prstGeom>
+          <a:noFill/>
+        </p:spPr>
+        <p:txBody>
+          <a:bodyPr wrap="square" anchor="t" lIns="45720" rIns="45720" tIns="18288" bIns="18288">
+            <a:spAutoFit/>
+          </a:bodyPr>
+          <a:lstStyle/>
+          <a:p>
+            <a:pPr algn="l">
+              <a:lnSpc>
+                <a:spcPct val="120000"/>
+              </a:lnSpc>
+              <a:spcAft>
+                <a:spcPts val="0"/>
+              </a:spcAft>
+              <a:defRPr sz="1700" b="1">
+                <a:solidFill>
+                  <a:srgbClr val="E04040"/>
+                </a:solidFill>
+                <a:latin typeface="Calibri"/>
+              </a:defRPr>
+            </a:pPr>
+            <a:r>
+              <a:t>The hardest part is deployment</a:t>
+            </a:r>
+          </a:p>
+        </p:txBody>
+      </p:sp>
+      <p:sp>
+        <p:nvSpPr>
+          <p:cNvPr id="26" name="TextBox 25"/>
+          <p:cNvSpPr txBox="1"/>
+          <p:nvPr/>
+        </p:nvSpPr>
+        <p:spPr>
+          <a:xfrm>
+            <a:off x="1280160" y="5623560"/>
+            <a:ext cx="10515600" cy="548640"/>
+          </a:xfrm>
+          <a:prstGeom prst="rect">
+            <a:avLst/>
+          </a:prstGeom>
+          <a:noFill/>
+        </p:spPr>
+        <p:txBody>
+          <a:bodyPr wrap="square" anchor="t" lIns="45720" rIns="45720" tIns="18288" bIns="18288">
+            <a:spAutoFit/>
+          </a:bodyPr>
+          <a:lstStyle/>
+          <a:p>
+            <a:pPr algn="l">
+              <a:lnSpc>
+                <a:spcPct val="120000"/>
+              </a:lnSpc>
+              <a:spcAft>
+                <a:spcPts val="0"/>
+              </a:spcAft>
+              <a:defRPr sz="1400" b="0">
+                <a:solidFill>
+                  <a:srgbClr val="CCCCCC"/>
+                </a:solidFill>
+                <a:latin typeface="Calibri"/>
+              </a:defRPr>
+            </a:pPr>
+            <a:r>
+              <a:t>Real-world success still depends on trustworthy models, good data, and systems that scale.</a:t>
+            </a:r>
+          </a:p>
+        </p:txBody>
+      </p:sp>
+      <p:sp>
+        <p:nvSpPr>
+          <p:cNvPr id="27" name="TextBox 26"/>
+          <p:cNvSpPr txBox="1"/>
+          <p:nvPr/>
+        </p:nvSpPr>
+        <p:spPr>
+          <a:xfrm>
+            <a:off x="9326880" y="6263640"/>
+            <a:ext cx="2743200" cy="457200"/>
+          </a:xfrm>
+          <a:prstGeom prst="rect">
+            <a:avLst/>
+          </a:prstGeom>
+          <a:noFill/>
+        </p:spPr>
+        <p:txBody>
+          <a:bodyPr wrap="square" anchor="t" lIns="45720" rIns="45720" tIns="18288" bIns="18288">
+            <a:spAutoFit/>
+          </a:bodyPr>
+          <a:lstStyle/>
+          <a:p>
+            <a:pPr algn="r">
+              <a:lnSpc>
+                <a:spcPct val="120000"/>
+              </a:lnSpc>
+              <a:spcAft>
+                <a:spcPts val="0"/>
+              </a:spcAft>
+              <a:defRPr sz="1200" b="1">
+                <a:solidFill>
+                  <a:srgbClr val="845EC2"/>
+                </a:solidFill>
+                <a:latin typeface="Calibri"/>
+              </a:defRPr>
+            </a:pPr>
+            <a:r>
+              <a:t>Presenter: Hashim Kshim</a:t>
+            </a:r>
+          </a:p>
+        </p:txBody>
+      </p:sp>
+      <p:sp>
+        <p:nvSpPr>
+          <p:cNvPr id="28" name="TextBox 27"/>
+          <p:cNvSpPr txBox="1"/>
+          <p:nvPr/>
+        </p:nvSpPr>
+        <p:spPr>
+          <a:xfrm>
+            <a:off x="365760" y="6309360"/>
+            <a:ext cx="1371600" cy="365760"/>
+          </a:xfrm>
+          <a:prstGeom prst="rect">
+            <a:avLst/>
+          </a:prstGeom>
+          <a:noFill/>
+        </p:spPr>
+        <p:txBody>
+          <a:bodyPr wrap="square" anchor="t" lIns="45720" rIns="45720" tIns="18288" bIns="18288">
+            <a:spAutoFit/>
+          </a:bodyPr>
+          <a:lstStyle/>
+          <a:p>
+            <a:pPr algn="l">
+              <a:lnSpc>
+                <a:spcPct val="120000"/>
+              </a:lnSpc>
+              <a:spcAft>
+                <a:spcPts val="0"/>
+              </a:spcAft>
+              <a:defRPr sz="1000" b="0">
+                <a:solidFill>
+                  <a:srgbClr val="999999"/>
+                </a:solidFill>
+                <a:latin typeface="Calibri"/>
+              </a:defRPr>
+            </a:pPr>
+            <a:r>
+              <a:t>25 / 27</a:t>
+            </a:r>
+          </a:p>
+        </p:txBody>
+      </p:sp>
+    </p:spTree>
+  </p:cSld>
+  <p:clrMapOvr>
+    <a:masterClrMapping/>
+  </p:clrMapOvr>
+</p:sld>
+</file>
+
+<file path=ppt/slides/slide26.xml><?xml version="1.0" encoding="utf-8"?>
 <p:sld xmlns:a="http://schemas.openxmlformats.org/drawingml/2006/main" xmlns:p="http://schemas.openxmlformats.org/presentationml/2006/main" xmlns:r="http://schemas.openxmlformats.org/officeDocument/2006/relationships">
   <p:cSld>
     <p:bg>
@@ -20263,7 +22515,7 @@
               </a:defRPr>
             </a:pPr>
             <a:r>
-              <a:t>25 / 26</a:t>
+              <a:t>26 / 27</a:t>
             </a:r>
           </a:p>
         </p:txBody>
@@ -20276,7 +22528,7 @@
 </p:sld>
 </file>
 
-<file path=ppt/slides/slide26.xml><?xml version="1.0" encoding="utf-8"?>
+<file path=ppt/slides/slide27.xml><?xml version="1.0" encoding="utf-8"?>
 <p:sld xmlns:a="http://schemas.openxmlformats.org/drawingml/2006/main" xmlns:p="http://schemas.openxmlformats.org/presentationml/2006/main" xmlns:r="http://schemas.openxmlformats.org/officeDocument/2006/relationships">
   <p:cSld>
     <p:bg>
@@ -20752,7 +23004,7 @@
               </a:defRPr>
             </a:pPr>
             <a:r>
-              <a:t>26 / 26</a:t>
+              <a:t>27 / 27</a:t>
             </a:r>
           </a:p>
         </p:txBody>
@@ -21032,7 +23284,7 @@
               </a:defRPr>
             </a:pPr>
             <a:r>
-              <a:t>3 / 26</a:t>
+              <a:t>3 / 27</a:t>
             </a:r>
           </a:p>
         </p:txBody>
@@ -22132,7 +24384,7 @@
               </a:defRPr>
             </a:pPr>
             <a:r>
-              <a:t>4 / 26</a:t>
+              <a:t>4 / 27</a:t>
             </a:r>
           </a:p>
         </p:txBody>
@@ -22908,7 +25160,7 @@
               </a:defRPr>
             </a:pPr>
             <a:r>
-              <a:t>5 / 26</a:t>
+              <a:t>5 / 27</a:t>
             </a:r>
           </a:p>
         </p:txBody>
@@ -23875,7 +26127,7 @@
               </a:defRPr>
             </a:pPr>
             <a:r>
-              <a:t>6 / 26</a:t>
+              <a:t>6 / 27</a:t>
             </a:r>
           </a:p>
         </p:txBody>
@@ -25006,7 +27258,7 @@
               </a:defRPr>
             </a:pPr>
             <a:r>
-              <a:t>7 / 26</a:t>
+              <a:t>7 / 27</a:t>
             </a:r>
           </a:p>
         </p:txBody>
@@ -26100,7 +28352,7 @@
               </a:defRPr>
             </a:pPr>
             <a:r>
-              <a:t>8 / 26</a:t>
+              <a:t>8 / 27</a:t>
             </a:r>
           </a:p>
         </p:txBody>
@@ -27492,7 +29744,7 @@
               </a:defRPr>
             </a:pPr>
             <a:r>
-              <a:t>9 / 26</a:t>
+              <a:t>9 / 27</a:t>
             </a:r>
           </a:p>
         </p:txBody>
